--- a/Santander_Digital_Banking_Future.pptx
+++ b/Santander_Digital_Banking_Future.pptx
@@ -3519,7 +3519,120 @@
       </p:sp>
       <p:sp>
         <p:nvSpPr>
-          <p:cNvPr id="13" name="TextBox 12"/>
+          <p:cNvPr id="13" name="Rectangle 12"/>
+          <p:cNvSpPr/>
+          <p:nvPr/>
+        </p:nvSpPr>
+        <p:spPr>
+          <a:xfrm>
+            <a:off x="3200400" y="5230368"/>
+            <a:ext cx="5788152" cy="658368"/>
+          </a:xfrm>
+          <a:prstGeom prst="rect">
+            <a:avLst/>
+          </a:prstGeom>
+          <a:solidFill>
+            <a:srgbClr val="C8102E"/>
+          </a:solidFill>
+          <a:ln>
+            <a:noFill/>
+          </a:ln>
+        </p:spPr>
+        <p:style>
+          <a:lnRef idx="1">
+            <a:schemeClr val="accent1"/>
+          </a:lnRef>
+          <a:fillRef idx="3">
+            <a:schemeClr val="accent1"/>
+          </a:fillRef>
+          <a:effectRef idx="2">
+            <a:schemeClr val="accent1"/>
+          </a:effectRef>
+          <a:fontRef idx="minor">
+            <a:schemeClr val="lt1"/>
+          </a:fontRef>
+        </p:style>
+        <p:txBody>
+          <a:bodyPr rtlCol="0" anchor="ctr"/>
+          <a:lstStyle/>
+          <a:p>
+            <a:pPr algn="ctr"/>
+          </a:p>
+        </p:txBody>
+      </p:sp>
+      <p:sp>
+        <p:nvSpPr>
+          <p:cNvPr id="14" name="TextBox 13"/>
+          <p:cNvSpPr txBox="1"/>
+          <p:nvPr/>
+        </p:nvSpPr>
+        <p:spPr>
+          <a:xfrm>
+            <a:off x="3200400" y="5266944"/>
+            <a:ext cx="5788152" cy="274320"/>
+          </a:xfrm>
+          <a:prstGeom prst="rect">
+            <a:avLst/>
+          </a:prstGeom>
+          <a:noFill/>
+        </p:spPr>
+        <p:txBody>
+          <a:bodyPr wrap="square">
+            <a:spAutoFit/>
+          </a:bodyPr>
+          <a:lstStyle/>
+          <a:p>
+            <a:pPr algn="ctr"/>
+            <a:r>
+              <a:rPr sz="1100" b="1" i="0">
+                <a:solidFill>
+                  <a:srgbClr val="FFFFFF"/>
+                </a:solidFill>
+                <a:latin typeface="Calibri"/>
+              </a:rPr>
+              <a:t>BUSINESS BANKING ADVISOR</a:t>
+            </a:r>
+          </a:p>
+        </p:txBody>
+      </p:sp>
+      <p:sp>
+        <p:nvSpPr>
+          <p:cNvPr id="15" name="TextBox 14"/>
+          <p:cNvSpPr txBox="1"/>
+          <p:nvPr/>
+        </p:nvSpPr>
+        <p:spPr>
+          <a:xfrm>
+            <a:off x="3200400" y="5550408"/>
+            <a:ext cx="5788152" cy="274320"/>
+          </a:xfrm>
+          <a:prstGeom prst="rect">
+            <a:avLst/>
+          </a:prstGeom>
+          <a:noFill/>
+        </p:spPr>
+        <p:txBody>
+          <a:bodyPr wrap="square">
+            <a:spAutoFit/>
+          </a:bodyPr>
+          <a:lstStyle/>
+          <a:p>
+            <a:pPr algn="ctr"/>
+            <a:r>
+              <a:rPr sz="900" b="0" i="1">
+                <a:solidFill>
+                  <a:srgbClr val="FECACA"/>
+                </a:solidFill>
+                <a:latin typeface="Calibri"/>
+              </a:rPr>
+              <a:t>Self-initiated  ·  Completed out of hours  ·  Own time</a:t>
+            </a:r>
+          </a:p>
+        </p:txBody>
+      </p:sp>
+      <p:sp>
+        <p:nvSpPr>
+          <p:cNvPr id="16" name="TextBox 15"/>
           <p:cNvSpPr txBox="1"/>
           <p:nvPr/>
         </p:nvSpPr>
@@ -4675,6 +4788,41 @@
         </p:nvSpPr>
         <p:spPr>
           <a:xfrm>
+            <a:off x="457200" y="6601968"/>
+            <a:ext cx="10515600" cy="219456"/>
+          </a:xfrm>
+          <a:prstGeom prst="rect">
+            <a:avLst/>
+          </a:prstGeom>
+          <a:noFill/>
+        </p:spPr>
+        <p:txBody>
+          <a:bodyPr wrap="square">
+            <a:spAutoFit/>
+          </a:bodyPr>
+          <a:lstStyle/>
+          <a:p>
+            <a:pPr algn="l"/>
+            <a:r>
+              <a:rPr sz="750" b="0" i="1">
+                <a:solidFill>
+                  <a:srgbClr val="78716C"/>
+                </a:solidFill>
+                <a:latin typeface="Calibri"/>
+              </a:rPr>
+              <a:t>Business Banking Advisor  ·  Self-initiated  ·  Completed out of hours in own time</a:t>
+            </a:r>
+          </a:p>
+        </p:txBody>
+      </p:sp>
+      <p:sp>
+        <p:nvSpPr>
+          <p:cNvPr id="27" name="TextBox 26"/>
+          <p:cNvSpPr txBox="1"/>
+          <p:nvPr/>
+        </p:nvSpPr>
+        <p:spPr>
+          <a:xfrm>
             <a:off x="11521440" y="6492240"/>
             <a:ext cx="457200" cy="274320"/>
           </a:xfrm>
@@ -6198,6 +6346,41 @@
         </p:nvSpPr>
         <p:spPr>
           <a:xfrm>
+            <a:off x="457200" y="6601968"/>
+            <a:ext cx="10515600" cy="219456"/>
+          </a:xfrm>
+          <a:prstGeom prst="rect">
+            <a:avLst/>
+          </a:prstGeom>
+          <a:noFill/>
+        </p:spPr>
+        <p:txBody>
+          <a:bodyPr wrap="square">
+            <a:spAutoFit/>
+          </a:bodyPr>
+          <a:lstStyle/>
+          <a:p>
+            <a:pPr algn="l"/>
+            <a:r>
+              <a:rPr sz="750" b="0" i="1">
+                <a:solidFill>
+                  <a:srgbClr val="78716C"/>
+                </a:solidFill>
+                <a:latin typeface="Calibri"/>
+              </a:rPr>
+              <a:t>Business Banking Advisor  ·  Self-initiated  ·  Completed out of hours in own time</a:t>
+            </a:r>
+          </a:p>
+        </p:txBody>
+      </p:sp>
+      <p:sp>
+        <p:nvSpPr>
+          <p:cNvPr id="29" name="TextBox 28"/>
+          <p:cNvSpPr txBox="1"/>
+          <p:nvPr/>
+        </p:nvSpPr>
+        <p:spPr>
+          <a:xfrm>
             <a:off x="11521440" y="6492240"/>
             <a:ext cx="457200" cy="274320"/>
           </a:xfrm>
@@ -8517,6 +8700,41 @@
         </p:nvSpPr>
         <p:spPr>
           <a:xfrm>
+            <a:off x="457200" y="6601968"/>
+            <a:ext cx="10515600" cy="219456"/>
+          </a:xfrm>
+          <a:prstGeom prst="rect">
+            <a:avLst/>
+          </a:prstGeom>
+          <a:noFill/>
+        </p:spPr>
+        <p:txBody>
+          <a:bodyPr wrap="square">
+            <a:spAutoFit/>
+          </a:bodyPr>
+          <a:lstStyle/>
+          <a:p>
+            <a:pPr algn="l"/>
+            <a:r>
+              <a:rPr sz="750" b="0" i="1">
+                <a:solidFill>
+                  <a:srgbClr val="78716C"/>
+                </a:solidFill>
+                <a:latin typeface="Calibri"/>
+              </a:rPr>
+              <a:t>Business Banking Advisor  ·  Self-initiated  ·  Completed out of hours in own time</a:t>
+            </a:r>
+          </a:p>
+        </p:txBody>
+      </p:sp>
+      <p:sp>
+        <p:nvSpPr>
+          <p:cNvPr id="59" name="TextBox 58"/>
+          <p:cNvSpPr txBox="1"/>
+          <p:nvPr/>
+        </p:nvSpPr>
+        <p:spPr>
+          <a:xfrm>
             <a:off x="11521440" y="6492240"/>
             <a:ext cx="457200" cy="274320"/>
           </a:xfrm>
@@ -9428,23 +9646,23 @@
         </p:nvSpPr>
         <p:spPr>
           <a:xfrm>
-            <a:off x="822960" y="6108192"/>
-            <a:ext cx="10515600" cy="457200"/>
-          </a:xfrm>
-          <a:prstGeom prst="rect">
-            <a:avLst/>
-          </a:prstGeom>
-          <a:noFill/>
-        </p:spPr>
-        <p:txBody>
-          <a:bodyPr wrap="square">
-            <a:spAutoFit/>
-          </a:bodyPr>
-          <a:lstStyle/>
-          <a:p>
-            <a:pPr algn="ctr"/>
-            <a:r>
-              <a:rPr sz="1100" b="1" i="0">
+            <a:off x="822960" y="5760720"/>
+            <a:ext cx="10515600" cy="320040"/>
+          </a:xfrm>
+          <a:prstGeom prst="rect">
+            <a:avLst/>
+          </a:prstGeom>
+          <a:noFill/>
+        </p:spPr>
+        <p:txBody>
+          <a:bodyPr wrap="square">
+            <a:spAutoFit/>
+          </a:bodyPr>
+          <a:lstStyle/>
+          <a:p>
+            <a:pPr algn="ctr"/>
+            <a:r>
+              <a:rPr sz="1000" b="1" i="0">
                 <a:solidFill>
                   <a:srgbClr val="FFFFFF"/>
                 </a:solidFill>
@@ -9458,6 +9676,41 @@
       <p:sp>
         <p:nvSpPr>
           <p:cNvPr id="25" name="TextBox 24"/>
+          <p:cNvSpPr txBox="1"/>
+          <p:nvPr/>
+        </p:nvSpPr>
+        <p:spPr>
+          <a:xfrm>
+            <a:off x="822960" y="6080760"/>
+            <a:ext cx="10515600" cy="274320"/>
+          </a:xfrm>
+          <a:prstGeom prst="rect">
+            <a:avLst/>
+          </a:prstGeom>
+          <a:noFill/>
+        </p:spPr>
+        <p:txBody>
+          <a:bodyPr wrap="square">
+            <a:spAutoFit/>
+          </a:bodyPr>
+          <a:lstStyle/>
+          <a:p>
+            <a:pPr algn="ctr"/>
+            <a:r>
+              <a:rPr sz="900" b="0" i="1">
+                <a:solidFill>
+                  <a:srgbClr val="FECACA"/>
+                </a:solidFill>
+                <a:latin typeface="Calibri"/>
+              </a:rPr>
+              <a:t>Business Banking Advisor  ·  Self-initiated  ·  Completed entirely out of hours in own time</a:t>
+            </a:r>
+          </a:p>
+        </p:txBody>
+      </p:sp>
+      <p:sp>
+        <p:nvSpPr>
+          <p:cNvPr id="26" name="TextBox 25"/>
           <p:cNvSpPr txBox="1"/>
           <p:nvPr/>
         </p:nvSpPr>
@@ -10774,6 +11027,41 @@
         </p:nvSpPr>
         <p:spPr>
           <a:xfrm>
+            <a:off x="457200" y="6601968"/>
+            <a:ext cx="10515600" cy="219456"/>
+          </a:xfrm>
+          <a:prstGeom prst="rect">
+            <a:avLst/>
+          </a:prstGeom>
+          <a:noFill/>
+        </p:spPr>
+        <p:txBody>
+          <a:bodyPr wrap="square">
+            <a:spAutoFit/>
+          </a:bodyPr>
+          <a:lstStyle/>
+          <a:p>
+            <a:pPr algn="l"/>
+            <a:r>
+              <a:rPr sz="750" b="0" i="1">
+                <a:solidFill>
+                  <a:srgbClr val="78716C"/>
+                </a:solidFill>
+                <a:latin typeface="Calibri"/>
+              </a:rPr>
+              <a:t>Business Banking Advisor  ·  Self-initiated  ·  Completed out of hours in own time</a:t>
+            </a:r>
+          </a:p>
+        </p:txBody>
+      </p:sp>
+      <p:sp>
+        <p:nvSpPr>
+          <p:cNvPr id="29" name="TextBox 28"/>
+          <p:cNvSpPr txBox="1"/>
+          <p:nvPr/>
+        </p:nvSpPr>
+        <p:spPr>
+          <a:xfrm>
             <a:off x="11521440" y="6492240"/>
             <a:ext cx="457200" cy="274320"/>
           </a:xfrm>
@@ -11970,6 +12258,41 @@
         </p:nvSpPr>
         <p:spPr>
           <a:xfrm>
+            <a:off x="457200" y="6601968"/>
+            <a:ext cx="10515600" cy="219456"/>
+          </a:xfrm>
+          <a:prstGeom prst="rect">
+            <a:avLst/>
+          </a:prstGeom>
+          <a:noFill/>
+        </p:spPr>
+        <p:txBody>
+          <a:bodyPr wrap="square">
+            <a:spAutoFit/>
+          </a:bodyPr>
+          <a:lstStyle/>
+          <a:p>
+            <a:pPr algn="l"/>
+            <a:r>
+              <a:rPr sz="750" b="0" i="1">
+                <a:solidFill>
+                  <a:srgbClr val="78716C"/>
+                </a:solidFill>
+                <a:latin typeface="Calibri"/>
+              </a:rPr>
+              <a:t>Business Banking Advisor  ·  Self-initiated  ·  Completed out of hours in own time</a:t>
+            </a:r>
+          </a:p>
+        </p:txBody>
+      </p:sp>
+      <p:sp>
+        <p:nvSpPr>
+          <p:cNvPr id="32" name="TextBox 31"/>
+          <p:cNvSpPr txBox="1"/>
+          <p:nvPr/>
+        </p:nvSpPr>
+        <p:spPr>
+          <a:xfrm>
             <a:off x="11521440" y="6492240"/>
             <a:ext cx="457200" cy="274320"/>
           </a:xfrm>
@@ -13802,6 +14125,41 @@
         </p:nvSpPr>
         <p:spPr>
           <a:xfrm>
+            <a:off x="457200" y="6601968"/>
+            <a:ext cx="10515600" cy="219456"/>
+          </a:xfrm>
+          <a:prstGeom prst="rect">
+            <a:avLst/>
+          </a:prstGeom>
+          <a:noFill/>
+        </p:spPr>
+        <p:txBody>
+          <a:bodyPr wrap="square">
+            <a:spAutoFit/>
+          </a:bodyPr>
+          <a:lstStyle/>
+          <a:p>
+            <a:pPr algn="l"/>
+            <a:r>
+              <a:rPr sz="750" b="0" i="1">
+                <a:solidFill>
+                  <a:srgbClr val="78716C"/>
+                </a:solidFill>
+                <a:latin typeface="Calibri"/>
+              </a:rPr>
+              <a:t>Business Banking Advisor  ·  Self-initiated  ·  Completed out of hours in own time</a:t>
+            </a:r>
+          </a:p>
+        </p:txBody>
+      </p:sp>
+      <p:sp>
+        <p:nvSpPr>
+          <p:cNvPr id="48" name="TextBox 47"/>
+          <p:cNvSpPr txBox="1"/>
+          <p:nvPr/>
+        </p:nvSpPr>
+        <p:spPr>
+          <a:xfrm>
             <a:off x="11521440" y="6492240"/>
             <a:ext cx="457200" cy="274320"/>
           </a:xfrm>
@@ -15831,6 +16189,41 @@
         </p:nvSpPr>
         <p:spPr>
           <a:xfrm>
+            <a:off x="457200" y="6601968"/>
+            <a:ext cx="10515600" cy="219456"/>
+          </a:xfrm>
+          <a:prstGeom prst="rect">
+            <a:avLst/>
+          </a:prstGeom>
+          <a:noFill/>
+        </p:spPr>
+        <p:txBody>
+          <a:bodyPr wrap="square">
+            <a:spAutoFit/>
+          </a:bodyPr>
+          <a:lstStyle/>
+          <a:p>
+            <a:pPr algn="l"/>
+            <a:r>
+              <a:rPr sz="750" b="0" i="1">
+                <a:solidFill>
+                  <a:srgbClr val="78716C"/>
+                </a:solidFill>
+                <a:latin typeface="Calibri"/>
+              </a:rPr>
+              <a:t>Business Banking Advisor  ·  Self-initiated  ·  Completed out of hours in own time</a:t>
+            </a:r>
+          </a:p>
+        </p:txBody>
+      </p:sp>
+      <p:sp>
+        <p:nvSpPr>
+          <p:cNvPr id="55" name="TextBox 54"/>
+          <p:cNvSpPr txBox="1"/>
+          <p:nvPr/>
+        </p:nvSpPr>
+        <p:spPr>
+          <a:xfrm>
             <a:off x="11521440" y="6492240"/>
             <a:ext cx="457200" cy="274320"/>
           </a:xfrm>
@@ -17612,6 +18005,41 @@
         </p:nvSpPr>
         <p:spPr>
           <a:xfrm>
+            <a:off x="457200" y="6601968"/>
+            <a:ext cx="10515600" cy="219456"/>
+          </a:xfrm>
+          <a:prstGeom prst="rect">
+            <a:avLst/>
+          </a:prstGeom>
+          <a:noFill/>
+        </p:spPr>
+        <p:txBody>
+          <a:bodyPr wrap="square">
+            <a:spAutoFit/>
+          </a:bodyPr>
+          <a:lstStyle/>
+          <a:p>
+            <a:pPr algn="l"/>
+            <a:r>
+              <a:rPr sz="750" b="0" i="1">
+                <a:solidFill>
+                  <a:srgbClr val="78716C"/>
+                </a:solidFill>
+                <a:latin typeface="Calibri"/>
+              </a:rPr>
+              <a:t>Business Banking Advisor  ·  Self-initiated  ·  Completed out of hours in own time</a:t>
+            </a:r>
+          </a:p>
+        </p:txBody>
+      </p:sp>
+      <p:sp>
+        <p:nvSpPr>
+          <p:cNvPr id="43" name="TextBox 42"/>
+          <p:cNvSpPr txBox="1"/>
+          <p:nvPr/>
+        </p:nvSpPr>
+        <p:spPr>
+          <a:xfrm>
             <a:off x="11521440" y="6492240"/>
             <a:ext cx="457200" cy="274320"/>
           </a:xfrm>
@@ -18938,6 +19366,41 @@
         </p:nvSpPr>
         <p:spPr>
           <a:xfrm>
+            <a:off x="457200" y="6601968"/>
+            <a:ext cx="10515600" cy="219456"/>
+          </a:xfrm>
+          <a:prstGeom prst="rect">
+            <a:avLst/>
+          </a:prstGeom>
+          <a:noFill/>
+        </p:spPr>
+        <p:txBody>
+          <a:bodyPr wrap="square">
+            <a:spAutoFit/>
+          </a:bodyPr>
+          <a:lstStyle/>
+          <a:p>
+            <a:pPr algn="l"/>
+            <a:r>
+              <a:rPr sz="750" b="0" i="1">
+                <a:solidFill>
+                  <a:srgbClr val="78716C"/>
+                </a:solidFill>
+                <a:latin typeface="Calibri"/>
+              </a:rPr>
+              <a:t>Business Banking Advisor  ·  Self-initiated  ·  Completed out of hours in own time</a:t>
+            </a:r>
+          </a:p>
+        </p:txBody>
+      </p:sp>
+      <p:sp>
+        <p:nvSpPr>
+          <p:cNvPr id="23" name="TextBox 22"/>
+          <p:cNvSpPr txBox="1"/>
+          <p:nvPr/>
+        </p:nvSpPr>
+        <p:spPr>
+          <a:xfrm>
             <a:off x="11521440" y="6492240"/>
             <a:ext cx="457200" cy="274320"/>
           </a:xfrm>
@@ -20276,6 +20739,41 @@
         </p:nvSpPr>
         <p:spPr>
           <a:xfrm>
+            <a:off x="457200" y="6601968"/>
+            <a:ext cx="10515600" cy="219456"/>
+          </a:xfrm>
+          <a:prstGeom prst="rect">
+            <a:avLst/>
+          </a:prstGeom>
+          <a:noFill/>
+        </p:spPr>
+        <p:txBody>
+          <a:bodyPr wrap="square">
+            <a:spAutoFit/>
+          </a:bodyPr>
+          <a:lstStyle/>
+          <a:p>
+            <a:pPr algn="l"/>
+            <a:r>
+              <a:rPr sz="750" b="0" i="1">
+                <a:solidFill>
+                  <a:srgbClr val="78716C"/>
+                </a:solidFill>
+                <a:latin typeface="Calibri"/>
+              </a:rPr>
+              <a:t>Business Banking Advisor  ·  Self-initiated  ·  Completed out of hours in own time</a:t>
+            </a:r>
+          </a:p>
+        </p:txBody>
+      </p:sp>
+      <p:sp>
+        <p:nvSpPr>
+          <p:cNvPr id="27" name="TextBox 26"/>
+          <p:cNvSpPr txBox="1"/>
+          <p:nvPr/>
+        </p:nvSpPr>
+        <p:spPr>
+          <a:xfrm>
             <a:off x="11521440" y="6492240"/>
             <a:ext cx="457200" cy="274320"/>
           </a:xfrm>
@@ -22140,6 +22638,41 @@
       <p:sp>
         <p:nvSpPr>
           <p:cNvPr id="50" name="TextBox 49"/>
+          <p:cNvSpPr txBox="1"/>
+          <p:nvPr/>
+        </p:nvSpPr>
+        <p:spPr>
+          <a:xfrm>
+            <a:off x="457200" y="6601968"/>
+            <a:ext cx="10515600" cy="219456"/>
+          </a:xfrm>
+          <a:prstGeom prst="rect">
+            <a:avLst/>
+          </a:prstGeom>
+          <a:noFill/>
+        </p:spPr>
+        <p:txBody>
+          <a:bodyPr wrap="square">
+            <a:spAutoFit/>
+          </a:bodyPr>
+          <a:lstStyle/>
+          <a:p>
+            <a:pPr algn="l"/>
+            <a:r>
+              <a:rPr sz="750" b="0" i="1">
+                <a:solidFill>
+                  <a:srgbClr val="78716C"/>
+                </a:solidFill>
+                <a:latin typeface="Calibri"/>
+              </a:rPr>
+              <a:t>Business Banking Advisor  ·  Self-initiated  ·  Completed out of hours in own time</a:t>
+            </a:r>
+          </a:p>
+        </p:txBody>
+      </p:sp>
+      <p:sp>
+        <p:nvSpPr>
+          <p:cNvPr id="51" name="TextBox 50"/>
           <p:cNvSpPr txBox="1"/>
           <p:nvPr/>
         </p:nvSpPr>

--- a/Santander_Digital_Banking_Future.pptx
+++ b/Santander_Digital_Banking_Future.pptx
@@ -17199,7 +17199,7 @@
                 </a:solidFill>
                 <a:latin typeface="Calibri"/>
               </a:rPr>
-              <a:t>A single-page React application — running live in any browser, no server, no backend — demonstrating every critical business banking workflow end-to-end. 20 features across 4 areas.</a:t>
+              <a:t>A single-page React application — running live in any browser, no server, no backend — demonstrating every critical business banking workflow end-to-end. 21 features across 4 areas.</a:t>
             </a:r>
           </a:p>
         </p:txBody>
@@ -20366,7 +20366,165 @@
       </p:sp>
       <p:sp>
         <p:nvSpPr>
-          <p:cNvPr id="87" name="TextBox 86"/>
+          <p:cNvPr id="87" name="Rectangle 86"/>
+          <p:cNvSpPr/>
+          <p:nvPr/>
+        </p:nvSpPr>
+        <p:spPr>
+          <a:xfrm>
+            <a:off x="502920" y="6172200"/>
+            <a:ext cx="2697480" cy="804672"/>
+          </a:xfrm>
+          <a:prstGeom prst="rect">
+            <a:avLst/>
+          </a:prstGeom>
+          <a:solidFill>
+            <a:srgbClr val="FFFFFF"/>
+          </a:solidFill>
+          <a:ln w="12700">
+            <a:solidFill>
+              <a:srgbClr val="D6D3D1"/>
+            </a:solidFill>
+          </a:ln>
+        </p:spPr>
+        <p:style>
+          <a:lnRef idx="1">
+            <a:schemeClr val="accent1"/>
+          </a:lnRef>
+          <a:fillRef idx="3">
+            <a:schemeClr val="accent1"/>
+          </a:fillRef>
+          <a:effectRef idx="2">
+            <a:schemeClr val="accent1"/>
+          </a:effectRef>
+          <a:fontRef idx="minor">
+            <a:schemeClr val="lt1"/>
+          </a:fontRef>
+        </p:style>
+        <p:txBody>
+          <a:bodyPr rtlCol="0" anchor="ctr"/>
+          <a:lstStyle/>
+          <a:p>
+            <a:pPr algn="ctr"/>
+          </a:p>
+        </p:txBody>
+      </p:sp>
+      <p:sp>
+        <p:nvSpPr>
+          <p:cNvPr id="88" name="Rectangle 87"/>
+          <p:cNvSpPr/>
+          <p:nvPr/>
+        </p:nvSpPr>
+        <p:spPr>
+          <a:xfrm>
+            <a:off x="502920" y="6172200"/>
+            <a:ext cx="73152" cy="804672"/>
+          </a:xfrm>
+          <a:prstGeom prst="rect">
+            <a:avLst/>
+          </a:prstGeom>
+          <a:solidFill>
+            <a:srgbClr val="C8102E"/>
+          </a:solidFill>
+          <a:ln>
+            <a:noFill/>
+          </a:ln>
+        </p:spPr>
+        <p:style>
+          <a:lnRef idx="1">
+            <a:schemeClr val="accent1"/>
+          </a:lnRef>
+          <a:fillRef idx="3">
+            <a:schemeClr val="accent1"/>
+          </a:fillRef>
+          <a:effectRef idx="2">
+            <a:schemeClr val="accent1"/>
+          </a:effectRef>
+          <a:fontRef idx="minor">
+            <a:schemeClr val="lt1"/>
+          </a:fontRef>
+        </p:style>
+        <p:txBody>
+          <a:bodyPr rtlCol="0" anchor="ctr"/>
+          <a:lstStyle/>
+          <a:p>
+            <a:pPr algn="ctr"/>
+          </a:p>
+        </p:txBody>
+      </p:sp>
+      <p:sp>
+        <p:nvSpPr>
+          <p:cNvPr id="89" name="TextBox 88"/>
+          <p:cNvSpPr txBox="1"/>
+          <p:nvPr/>
+        </p:nvSpPr>
+        <p:spPr>
+          <a:xfrm>
+            <a:off x="704088" y="6227064"/>
+            <a:ext cx="2377440" cy="256032"/>
+          </a:xfrm>
+          <a:prstGeom prst="rect">
+            <a:avLst/>
+          </a:prstGeom>
+          <a:noFill/>
+        </p:spPr>
+        <p:txBody>
+          <a:bodyPr wrap="square">
+            <a:spAutoFit/>
+          </a:bodyPr>
+          <a:lstStyle/>
+          <a:p>
+            <a:pPr algn="l"/>
+            <a:r>
+              <a:rPr sz="900" b="1" i="0">
+                <a:solidFill>
+                  <a:srgbClr val="1C1917"/>
+                </a:solidFill>
+                <a:latin typeface="Calibri"/>
+              </a:rPr>
+              <a:t>Live notifications</a:t>
+            </a:r>
+          </a:p>
+        </p:txBody>
+      </p:sp>
+      <p:sp>
+        <p:nvSpPr>
+          <p:cNvPr id="90" name="TextBox 89"/>
+          <p:cNvSpPr txBox="1"/>
+          <p:nvPr/>
+        </p:nvSpPr>
+        <p:spPr>
+          <a:xfrm>
+            <a:off x="704088" y="6483096"/>
+            <a:ext cx="2423160" cy="438912"/>
+          </a:xfrm>
+          <a:prstGeom prst="rect">
+            <a:avLst/>
+          </a:prstGeom>
+          <a:noFill/>
+        </p:spPr>
+        <p:txBody>
+          <a:bodyPr wrap="square">
+            <a:spAutoFit/>
+          </a:bodyPr>
+          <a:lstStyle/>
+          <a:p>
+            <a:pPr algn="l"/>
+            <a:r>
+              <a:rPr sz="800" b="0" i="0">
+                <a:solidFill>
+                  <a:srgbClr val="78716C"/>
+                </a:solidFill>
+                <a:latin typeface="Calibri"/>
+              </a:rPr>
+              <a:t>Bell icon · security alerts · approvals · cooling-off · co-signer status</a:t>
+            </a:r>
+          </a:p>
+        </p:txBody>
+      </p:sp>
+      <p:sp>
+        <p:nvSpPr>
+          <p:cNvPr id="91" name="TextBox 90"/>
           <p:cNvSpPr txBox="1"/>
           <p:nvPr/>
         </p:nvSpPr>
@@ -20401,7 +20559,7 @@
       </p:sp>
       <p:sp>
         <p:nvSpPr>
-          <p:cNvPr id="88" name="TextBox 87"/>
+          <p:cNvPr id="92" name="TextBox 91"/>
           <p:cNvSpPr txBox="1"/>
           <p:nvPr/>
         </p:nvSpPr>
@@ -23717,7 +23875,7 @@
         <p:spPr>
           <a:xfrm>
             <a:off x="457200" y="640080"/>
-            <a:ext cx="9144000" cy="320040"/>
+            <a:ext cx="10972800" cy="320040"/>
           </a:xfrm>
           <a:prstGeom prst="rect">
             <a:avLst/>
@@ -23738,7 +23896,7 @@
                 </a:solidFill>
                 <a:latin typeface="Calibri"/>
               </a:rPr>
-              <a:t>Six features that set us apart — intelligence built in, security by design</a:t>
+              <a:t>Seven features that set us apart — intelligence built in, security by design</a:t>
             </a:r>
           </a:p>
         </p:txBody>
@@ -23795,7 +23953,7 @@
         <p:spPr>
           <a:xfrm>
             <a:off x="411480" y="1097280"/>
-            <a:ext cx="3749039" cy="2331720"/>
+            <a:ext cx="3648456" cy="2377440"/>
           </a:xfrm>
           <a:prstGeom prst="rect">
             <a:avLst/>
@@ -23840,7 +23998,7 @@
         <p:spPr>
           <a:xfrm>
             <a:off x="411480" y="1097280"/>
-            <a:ext cx="3749039" cy="64008"/>
+            <a:ext cx="3648456" cy="64008"/>
           </a:xfrm>
           <a:prstGeom prst="rect">
             <a:avLst/>
@@ -23882,8 +24040,8 @@
         </p:nvSpPr>
         <p:spPr>
           <a:xfrm>
-            <a:off x="576072" y="1207007"/>
-            <a:ext cx="3474720" cy="292608"/>
+            <a:off x="548640" y="1207007"/>
+            <a:ext cx="3465576" cy="292608"/>
           </a:xfrm>
           <a:prstGeom prst="rect">
             <a:avLst/>
@@ -23898,7 +24056,7 @@
           <a:p>
             <a:pPr algn="l"/>
             <a:r>
-              <a:rPr sz="1050" b="1" i="0">
+              <a:rPr sz="1000" b="1" i="0">
                 <a:solidFill>
                   <a:srgbClr val="1C1917"/>
                 </a:solidFill>
@@ -23917,8 +24075,8 @@
         </p:nvSpPr>
         <p:spPr>
           <a:xfrm>
-            <a:off x="576072" y="1554480"/>
-            <a:ext cx="3474720" cy="5486400"/>
+            <a:off x="548640" y="1554480"/>
+            <a:ext cx="3465576" cy="5486400"/>
           </a:xfrm>
           <a:prstGeom prst="rect">
             <a:avLst/>
@@ -23937,7 +24095,7 @@
               </a:spcAft>
             </a:pPr>
             <a:r>
-              <a:rPr sz="900">
+              <a:rPr sz="850">
                 <a:solidFill>
                   <a:srgbClr val="C8102E"/>
                 </a:solidFill>
@@ -23946,7 +24104,7 @@
               <a:t>▪  </a:t>
             </a:r>
             <a:r>
-              <a:rPr sz="900">
+              <a:rPr sz="850">
                 <a:solidFill>
                   <a:srgbClr val="78716C"/>
                 </a:solidFill>
@@ -23962,7 +24120,7 @@
               </a:spcAft>
             </a:pPr>
             <a:r>
-              <a:rPr sz="900">
+              <a:rPr sz="850">
                 <a:solidFill>
                   <a:srgbClr val="C8102E"/>
                 </a:solidFill>
@@ -23971,7 +24129,7 @@
               <a:t>▪  </a:t>
             </a:r>
             <a:r>
-              <a:rPr sz="900">
+              <a:rPr sz="850">
                 <a:solidFill>
                   <a:srgbClr val="78716C"/>
                 </a:solidFill>
@@ -23987,7 +24145,7 @@
               </a:spcAft>
             </a:pPr>
             <a:r>
-              <a:rPr sz="900">
+              <a:rPr sz="850">
                 <a:solidFill>
                   <a:srgbClr val="C8102E"/>
                 </a:solidFill>
@@ -23996,7 +24154,7 @@
               <a:t>▪  </a:t>
             </a:r>
             <a:r>
-              <a:rPr sz="900">
+              <a:rPr sz="850">
                 <a:solidFill>
                   <a:srgbClr val="78716C"/>
                 </a:solidFill>
@@ -24012,7 +24170,7 @@
               </a:spcAft>
             </a:pPr>
             <a:r>
-              <a:rPr sz="900">
+              <a:rPr sz="850">
                 <a:solidFill>
                   <a:srgbClr val="C8102E"/>
                 </a:solidFill>
@@ -24021,7 +24179,7 @@
               <a:t>▪  </a:t>
             </a:r>
             <a:r>
-              <a:rPr sz="900">
+              <a:rPr sz="850">
                 <a:solidFill>
                   <a:srgbClr val="78716C"/>
                 </a:solidFill>
@@ -24040,8 +24198,8 @@
         </p:nvSpPr>
         <p:spPr>
           <a:xfrm>
-            <a:off x="4343400" y="1097280"/>
-            <a:ext cx="3749039" cy="2331720"/>
+            <a:off x="4224528" y="1097280"/>
+            <a:ext cx="3648456" cy="2377440"/>
           </a:xfrm>
           <a:prstGeom prst="rect">
             <a:avLst/>
@@ -24085,8 +24243,8 @@
         </p:nvSpPr>
         <p:spPr>
           <a:xfrm>
-            <a:off x="4343400" y="1097280"/>
-            <a:ext cx="3749039" cy="64008"/>
+            <a:off x="4224528" y="1097280"/>
+            <a:ext cx="3648456" cy="64008"/>
           </a:xfrm>
           <a:prstGeom prst="rect">
             <a:avLst/>
@@ -24128,8 +24286,8 @@
         </p:nvSpPr>
         <p:spPr>
           <a:xfrm>
-            <a:off x="4507992" y="1207007"/>
-            <a:ext cx="3474720" cy="292608"/>
+            <a:off x="4361688" y="1207007"/>
+            <a:ext cx="3465576" cy="292608"/>
           </a:xfrm>
           <a:prstGeom prst="rect">
             <a:avLst/>
@@ -24144,7 +24302,7 @@
           <a:p>
             <a:pPr algn="l"/>
             <a:r>
-              <a:rPr sz="1050" b="1" i="0">
+              <a:rPr sz="1000" b="1" i="0">
                 <a:solidFill>
                   <a:srgbClr val="1C1917"/>
                 </a:solidFill>
@@ -24163,8 +24321,8 @@
         </p:nvSpPr>
         <p:spPr>
           <a:xfrm>
-            <a:off x="4507992" y="1554480"/>
-            <a:ext cx="3474720" cy="5486400"/>
+            <a:off x="4361688" y="1554480"/>
+            <a:ext cx="3465576" cy="5486400"/>
           </a:xfrm>
           <a:prstGeom prst="rect">
             <a:avLst/>
@@ -24183,7 +24341,7 @@
               </a:spcAft>
             </a:pPr>
             <a:r>
-              <a:rPr sz="900">
+              <a:rPr sz="850">
                 <a:solidFill>
                   <a:srgbClr val="C8102E"/>
                 </a:solidFill>
@@ -24192,7 +24350,7 @@
               <a:t>▪  </a:t>
             </a:r>
             <a:r>
-              <a:rPr sz="900">
+              <a:rPr sz="850">
                 <a:solidFill>
                   <a:srgbClr val="78716C"/>
                 </a:solidFill>
@@ -24208,7 +24366,7 @@
               </a:spcAft>
             </a:pPr>
             <a:r>
-              <a:rPr sz="900">
+              <a:rPr sz="850">
                 <a:solidFill>
                   <a:srgbClr val="C8102E"/>
                 </a:solidFill>
@@ -24217,7 +24375,7 @@
               <a:t>▪  </a:t>
             </a:r>
             <a:r>
-              <a:rPr sz="900">
+              <a:rPr sz="850">
                 <a:solidFill>
                   <a:srgbClr val="78716C"/>
                 </a:solidFill>
@@ -24233,7 +24391,7 @@
               </a:spcAft>
             </a:pPr>
             <a:r>
-              <a:rPr sz="900">
+              <a:rPr sz="850">
                 <a:solidFill>
                   <a:srgbClr val="C8102E"/>
                 </a:solidFill>
@@ -24242,7 +24400,7 @@
               <a:t>▪  </a:t>
             </a:r>
             <a:r>
-              <a:rPr sz="900">
+              <a:rPr sz="850">
                 <a:solidFill>
                   <a:srgbClr val="78716C"/>
                 </a:solidFill>
@@ -24258,7 +24416,7 @@
               </a:spcAft>
             </a:pPr>
             <a:r>
-              <a:rPr sz="900">
+              <a:rPr sz="850">
                 <a:solidFill>
                   <a:srgbClr val="C8102E"/>
                 </a:solidFill>
@@ -24267,7 +24425,7 @@
               <a:t>▪  </a:t>
             </a:r>
             <a:r>
-              <a:rPr sz="900">
+              <a:rPr sz="850">
                 <a:solidFill>
                   <a:srgbClr val="78716C"/>
                 </a:solidFill>
@@ -24286,8 +24444,8 @@
         </p:nvSpPr>
         <p:spPr>
           <a:xfrm>
-            <a:off x="8275319" y="3584448"/>
-            <a:ext cx="3749039" cy="2331720"/>
+            <a:off x="8037575" y="1097280"/>
+            <a:ext cx="3648456" cy="2377440"/>
           </a:xfrm>
           <a:prstGeom prst="rect">
             <a:avLst/>
@@ -24331,8 +24489,8 @@
         </p:nvSpPr>
         <p:spPr>
           <a:xfrm>
-            <a:off x="8275319" y="3584448"/>
-            <a:ext cx="3749039" cy="64008"/>
+            <a:off x="8037575" y="1097280"/>
+            <a:ext cx="3648456" cy="64008"/>
           </a:xfrm>
           <a:prstGeom prst="rect">
             <a:avLst/>
@@ -24374,8 +24532,8 @@
         </p:nvSpPr>
         <p:spPr>
           <a:xfrm>
-            <a:off x="8439911" y="3694176"/>
-            <a:ext cx="3474720" cy="292608"/>
+            <a:off x="8174736" y="1207007"/>
+            <a:ext cx="3465576" cy="292608"/>
           </a:xfrm>
           <a:prstGeom prst="rect">
             <a:avLst/>
@@ -24390,7 +24548,7 @@
           <a:p>
             <a:pPr algn="l"/>
             <a:r>
-              <a:rPr sz="1050" b="1" i="0">
+              <a:rPr sz="1000" b="1" i="0">
                 <a:solidFill>
                   <a:srgbClr val="1C1917"/>
                 </a:solidFill>
@@ -24409,8 +24567,8 @@
         </p:nvSpPr>
         <p:spPr>
           <a:xfrm>
-            <a:off x="8439911" y="4041648"/>
-            <a:ext cx="3474720" cy="5486400"/>
+            <a:off x="8174736" y="1554480"/>
+            <a:ext cx="3465576" cy="5486400"/>
           </a:xfrm>
           <a:prstGeom prst="rect">
             <a:avLst/>
@@ -24429,7 +24587,7 @@
               </a:spcAft>
             </a:pPr>
             <a:r>
-              <a:rPr sz="900">
+              <a:rPr sz="850">
                 <a:solidFill>
                   <a:srgbClr val="C8102E"/>
                 </a:solidFill>
@@ -24438,7 +24596,7 @@
               <a:t>▪  </a:t>
             </a:r>
             <a:r>
-              <a:rPr sz="900">
+              <a:rPr sz="850">
                 <a:solidFill>
                   <a:srgbClr val="78716C"/>
                 </a:solidFill>
@@ -24454,7 +24612,7 @@
               </a:spcAft>
             </a:pPr>
             <a:r>
-              <a:rPr sz="900">
+              <a:rPr sz="850">
                 <a:solidFill>
                   <a:srgbClr val="C8102E"/>
                 </a:solidFill>
@@ -24463,7 +24621,7 @@
               <a:t>▪  </a:t>
             </a:r>
             <a:r>
-              <a:rPr sz="900">
+              <a:rPr sz="850">
                 <a:solidFill>
                   <a:srgbClr val="78716C"/>
                 </a:solidFill>
@@ -24479,7 +24637,7 @@
               </a:spcAft>
             </a:pPr>
             <a:r>
-              <a:rPr sz="900">
+              <a:rPr sz="850">
                 <a:solidFill>
                   <a:srgbClr val="C8102E"/>
                 </a:solidFill>
@@ -24488,7 +24646,7 @@
               <a:t>▪  </a:t>
             </a:r>
             <a:r>
-              <a:rPr sz="900">
+              <a:rPr sz="850">
                 <a:solidFill>
                   <a:srgbClr val="78716C"/>
                 </a:solidFill>
@@ -24504,7 +24662,7 @@
               </a:spcAft>
             </a:pPr>
             <a:r>
-              <a:rPr sz="900">
+              <a:rPr sz="850">
                 <a:solidFill>
                   <a:srgbClr val="C8102E"/>
                 </a:solidFill>
@@ -24513,7 +24671,7 @@
               <a:t>▪  </a:t>
             </a:r>
             <a:r>
-              <a:rPr sz="900">
+              <a:rPr sz="850">
                 <a:solidFill>
                   <a:srgbClr val="78716C"/>
                 </a:solidFill>
@@ -24532,8 +24690,8 @@
         </p:nvSpPr>
         <p:spPr>
           <a:xfrm>
-            <a:off x="411480" y="3584448"/>
-            <a:ext cx="3749039" cy="2331720"/>
+            <a:off x="411480" y="3703320"/>
+            <a:ext cx="2695194" cy="2377440"/>
           </a:xfrm>
           <a:prstGeom prst="rect">
             <a:avLst/>
@@ -24577,8 +24735,8 @@
         </p:nvSpPr>
         <p:spPr>
           <a:xfrm>
-            <a:off x="411480" y="3584448"/>
-            <a:ext cx="3749039" cy="64008"/>
+            <a:off x="411480" y="3703320"/>
+            <a:ext cx="2695194" cy="64008"/>
           </a:xfrm>
           <a:prstGeom prst="rect">
             <a:avLst/>
@@ -24620,8 +24778,8 @@
         </p:nvSpPr>
         <p:spPr>
           <a:xfrm>
-            <a:off x="576072" y="3694176"/>
-            <a:ext cx="3474720" cy="292608"/>
+            <a:off x="548640" y="3813048"/>
+            <a:ext cx="2512313" cy="292608"/>
           </a:xfrm>
           <a:prstGeom prst="rect">
             <a:avLst/>
@@ -24636,7 +24794,7 @@
           <a:p>
             <a:pPr algn="l"/>
             <a:r>
-              <a:rPr sz="1050" b="1" i="0">
+              <a:rPr sz="1000" b="1" i="0">
                 <a:solidFill>
                   <a:srgbClr val="1C1917"/>
                 </a:solidFill>
@@ -24655,8 +24813,8 @@
         </p:nvSpPr>
         <p:spPr>
           <a:xfrm>
-            <a:off x="576072" y="4041648"/>
-            <a:ext cx="3474720" cy="5486400"/>
+            <a:off x="548640" y="4160520"/>
+            <a:ext cx="2512313" cy="5486400"/>
           </a:xfrm>
           <a:prstGeom prst="rect">
             <a:avLst/>
@@ -24675,7 +24833,7 @@
               </a:spcAft>
             </a:pPr>
             <a:r>
-              <a:rPr sz="900">
+              <a:rPr sz="850">
                 <a:solidFill>
                   <a:srgbClr val="C8102E"/>
                 </a:solidFill>
@@ -24684,7 +24842,7 @@
               <a:t>▪  </a:t>
             </a:r>
             <a:r>
-              <a:rPr sz="900">
+              <a:rPr sz="850">
                 <a:solidFill>
                   <a:srgbClr val="78716C"/>
                 </a:solidFill>
@@ -24700,7 +24858,7 @@
               </a:spcAft>
             </a:pPr>
             <a:r>
-              <a:rPr sz="900">
+              <a:rPr sz="850">
                 <a:solidFill>
                   <a:srgbClr val="C8102E"/>
                 </a:solidFill>
@@ -24709,7 +24867,7 @@
               <a:t>▪  </a:t>
             </a:r>
             <a:r>
-              <a:rPr sz="900">
+              <a:rPr sz="850">
                 <a:solidFill>
                   <a:srgbClr val="78716C"/>
                 </a:solidFill>
@@ -24725,7 +24883,7 @@
               </a:spcAft>
             </a:pPr>
             <a:r>
-              <a:rPr sz="900">
+              <a:rPr sz="850">
                 <a:solidFill>
                   <a:srgbClr val="C8102E"/>
                 </a:solidFill>
@@ -24734,7 +24892,7 @@
               <a:t>▪  </a:t>
             </a:r>
             <a:r>
-              <a:rPr sz="900">
+              <a:rPr sz="850">
                 <a:solidFill>
                   <a:srgbClr val="78716C"/>
                 </a:solidFill>
@@ -24750,7 +24908,7 @@
               </a:spcAft>
             </a:pPr>
             <a:r>
-              <a:rPr sz="900">
+              <a:rPr sz="850">
                 <a:solidFill>
                   <a:srgbClr val="C8102E"/>
                 </a:solidFill>
@@ -24759,7 +24917,7 @@
               <a:t>▪  </a:t>
             </a:r>
             <a:r>
-              <a:rPr sz="900">
+              <a:rPr sz="850">
                 <a:solidFill>
                   <a:srgbClr val="78716C"/>
                 </a:solidFill>
@@ -24778,8 +24936,8 @@
         </p:nvSpPr>
         <p:spPr>
           <a:xfrm>
-            <a:off x="4343400" y="6071616"/>
-            <a:ext cx="3749039" cy="2331720"/>
+            <a:off x="3271266" y="3703320"/>
+            <a:ext cx="2695194" cy="2377440"/>
           </a:xfrm>
           <a:prstGeom prst="rect">
             <a:avLst/>
@@ -24823,8 +24981,8 @@
         </p:nvSpPr>
         <p:spPr>
           <a:xfrm>
-            <a:off x="4343400" y="6071616"/>
-            <a:ext cx="3749039" cy="64008"/>
+            <a:off x="3271266" y="3703320"/>
+            <a:ext cx="2695194" cy="64008"/>
           </a:xfrm>
           <a:prstGeom prst="rect">
             <a:avLst/>
@@ -24866,8 +25024,8 @@
         </p:nvSpPr>
         <p:spPr>
           <a:xfrm>
-            <a:off x="4507992" y="6181344"/>
-            <a:ext cx="3474720" cy="292608"/>
+            <a:off x="3408426" y="3813048"/>
+            <a:ext cx="2512313" cy="292608"/>
           </a:xfrm>
           <a:prstGeom prst="rect">
             <a:avLst/>
@@ -24882,7 +25040,7 @@
           <a:p>
             <a:pPr algn="l"/>
             <a:r>
-              <a:rPr sz="1050" b="1" i="0">
+              <a:rPr sz="1000" b="1" i="0">
                 <a:solidFill>
                   <a:srgbClr val="1C1917"/>
                 </a:solidFill>
@@ -24901,8 +25059,8 @@
         </p:nvSpPr>
         <p:spPr>
           <a:xfrm>
-            <a:off x="4507992" y="6528816"/>
-            <a:ext cx="3474720" cy="5486400"/>
+            <a:off x="3408426" y="4160520"/>
+            <a:ext cx="2512313" cy="5486400"/>
           </a:xfrm>
           <a:prstGeom prst="rect">
             <a:avLst/>
@@ -24921,7 +25079,7 @@
               </a:spcAft>
             </a:pPr>
             <a:r>
-              <a:rPr sz="900">
+              <a:rPr sz="850">
                 <a:solidFill>
                   <a:srgbClr val="C8102E"/>
                 </a:solidFill>
@@ -24930,7 +25088,7 @@
               <a:t>▪  </a:t>
             </a:r>
             <a:r>
-              <a:rPr sz="900">
+              <a:rPr sz="850">
                 <a:solidFill>
                   <a:srgbClr val="78716C"/>
                 </a:solidFill>
@@ -24946,7 +25104,7 @@
               </a:spcAft>
             </a:pPr>
             <a:r>
-              <a:rPr sz="900">
+              <a:rPr sz="850">
                 <a:solidFill>
                   <a:srgbClr val="C8102E"/>
                 </a:solidFill>
@@ -24955,7 +25113,7 @@
               <a:t>▪  </a:t>
             </a:r>
             <a:r>
-              <a:rPr sz="900">
+              <a:rPr sz="850">
                 <a:solidFill>
                   <a:srgbClr val="78716C"/>
                 </a:solidFill>
@@ -24971,7 +25129,7 @@
               </a:spcAft>
             </a:pPr>
             <a:r>
-              <a:rPr sz="900">
+              <a:rPr sz="850">
                 <a:solidFill>
                   <a:srgbClr val="C8102E"/>
                 </a:solidFill>
@@ -24980,7 +25138,7 @@
               <a:t>▪  </a:t>
             </a:r>
             <a:r>
-              <a:rPr sz="900">
+              <a:rPr sz="850">
                 <a:solidFill>
                   <a:srgbClr val="78716C"/>
                 </a:solidFill>
@@ -24996,7 +25154,7 @@
               </a:spcAft>
             </a:pPr>
             <a:r>
-              <a:rPr sz="900">
+              <a:rPr sz="850">
                 <a:solidFill>
                   <a:srgbClr val="C8102E"/>
                 </a:solidFill>
@@ -25005,7 +25163,7 @@
               <a:t>▪  </a:t>
             </a:r>
             <a:r>
-              <a:rPr sz="900">
+              <a:rPr sz="850">
                 <a:solidFill>
                   <a:srgbClr val="78716C"/>
                 </a:solidFill>
@@ -25024,8 +25182,8 @@
         </p:nvSpPr>
         <p:spPr>
           <a:xfrm>
-            <a:off x="8275319" y="6071616"/>
-            <a:ext cx="3749039" cy="2331720"/>
+            <a:off x="6131052" y="3703320"/>
+            <a:ext cx="2695194" cy="2377440"/>
           </a:xfrm>
           <a:prstGeom prst="rect">
             <a:avLst/>
@@ -25069,8 +25227,8 @@
         </p:nvSpPr>
         <p:spPr>
           <a:xfrm>
-            <a:off x="8275319" y="6071616"/>
-            <a:ext cx="3749039" cy="64008"/>
+            <a:off x="6131052" y="3703320"/>
+            <a:ext cx="2695194" cy="64008"/>
           </a:xfrm>
           <a:prstGeom prst="rect">
             <a:avLst/>
@@ -25112,8 +25270,8 @@
         </p:nvSpPr>
         <p:spPr>
           <a:xfrm>
-            <a:off x="8439911" y="6181344"/>
-            <a:ext cx="3474720" cy="292608"/>
+            <a:off x="6268212" y="3813048"/>
+            <a:ext cx="2512313" cy="292608"/>
           </a:xfrm>
           <a:prstGeom prst="rect">
             <a:avLst/>
@@ -25128,7 +25286,7 @@
           <a:p>
             <a:pPr algn="l"/>
             <a:r>
-              <a:rPr sz="1050" b="1" i="0">
+              <a:rPr sz="1000" b="1" i="0">
                 <a:solidFill>
                   <a:srgbClr val="1C1917"/>
                 </a:solidFill>
@@ -25147,8 +25305,8 @@
         </p:nvSpPr>
         <p:spPr>
           <a:xfrm>
-            <a:off x="8439911" y="6528816"/>
-            <a:ext cx="3474720" cy="5486400"/>
+            <a:off x="6268212" y="4160520"/>
+            <a:ext cx="2512313" cy="5486400"/>
           </a:xfrm>
           <a:prstGeom prst="rect">
             <a:avLst/>
@@ -25167,7 +25325,7 @@
               </a:spcAft>
             </a:pPr>
             <a:r>
-              <a:rPr sz="900">
+              <a:rPr sz="850">
                 <a:solidFill>
                   <a:srgbClr val="C8102E"/>
                 </a:solidFill>
@@ -25176,7 +25334,7 @@
               <a:t>▪  </a:t>
             </a:r>
             <a:r>
-              <a:rPr sz="900">
+              <a:rPr sz="850">
                 <a:solidFill>
                   <a:srgbClr val="78716C"/>
                 </a:solidFill>
@@ -25192,7 +25350,7 @@
               </a:spcAft>
             </a:pPr>
             <a:r>
-              <a:rPr sz="900">
+              <a:rPr sz="850">
                 <a:solidFill>
                   <a:srgbClr val="C8102E"/>
                 </a:solidFill>
@@ -25201,7 +25359,7 @@
               <a:t>▪  </a:t>
             </a:r>
             <a:r>
-              <a:rPr sz="900">
+              <a:rPr sz="850">
                 <a:solidFill>
                   <a:srgbClr val="78716C"/>
                 </a:solidFill>
@@ -25217,7 +25375,7 @@
               </a:spcAft>
             </a:pPr>
             <a:r>
-              <a:rPr sz="900">
+              <a:rPr sz="850">
                 <a:solidFill>
                   <a:srgbClr val="C8102E"/>
                 </a:solidFill>
@@ -25226,7 +25384,7 @@
               <a:t>▪  </a:t>
             </a:r>
             <a:r>
-              <a:rPr sz="900">
+              <a:rPr sz="850">
                 <a:solidFill>
                   <a:srgbClr val="78716C"/>
                 </a:solidFill>
@@ -25242,7 +25400,7 @@
               </a:spcAft>
             </a:pPr>
             <a:r>
-              <a:rPr sz="900">
+              <a:rPr sz="850">
                 <a:solidFill>
                   <a:srgbClr val="C8102E"/>
                 </a:solidFill>
@@ -25251,7 +25409,7 @@
               <a:t>▪  </a:t>
             </a:r>
             <a:r>
-              <a:rPr sz="900">
+              <a:rPr sz="850">
                 <a:solidFill>
                   <a:srgbClr val="78716C"/>
                 </a:solidFill>
@@ -25264,7 +25422,253 @@
       </p:sp>
       <p:sp>
         <p:nvSpPr>
-          <p:cNvPr id="31" name="TextBox 30"/>
+          <p:cNvPr id="31" name="Rectangle 30"/>
+          <p:cNvSpPr/>
+          <p:nvPr/>
+        </p:nvSpPr>
+        <p:spPr>
+          <a:xfrm>
+            <a:off x="8990838" y="3703320"/>
+            <a:ext cx="2695194" cy="2377440"/>
+          </a:xfrm>
+          <a:prstGeom prst="rect">
+            <a:avLst/>
+          </a:prstGeom>
+          <a:solidFill>
+            <a:srgbClr val="FFFFFF"/>
+          </a:solidFill>
+          <a:ln w="12700">
+            <a:solidFill>
+              <a:srgbClr val="D6D3D1"/>
+            </a:solidFill>
+          </a:ln>
+        </p:spPr>
+        <p:style>
+          <a:lnRef idx="1">
+            <a:schemeClr val="accent1"/>
+          </a:lnRef>
+          <a:fillRef idx="3">
+            <a:schemeClr val="accent1"/>
+          </a:fillRef>
+          <a:effectRef idx="2">
+            <a:schemeClr val="accent1"/>
+          </a:effectRef>
+          <a:fontRef idx="minor">
+            <a:schemeClr val="lt1"/>
+          </a:fontRef>
+        </p:style>
+        <p:txBody>
+          <a:bodyPr rtlCol="0" anchor="ctr"/>
+          <a:lstStyle/>
+          <a:p>
+            <a:pPr algn="ctr"/>
+          </a:p>
+        </p:txBody>
+      </p:sp>
+      <p:sp>
+        <p:nvSpPr>
+          <p:cNvPr id="32" name="Rectangle 31"/>
+          <p:cNvSpPr/>
+          <p:nvPr/>
+        </p:nvSpPr>
+        <p:spPr>
+          <a:xfrm>
+            <a:off x="8990838" y="3703320"/>
+            <a:ext cx="2695194" cy="64008"/>
+          </a:xfrm>
+          <a:prstGeom prst="rect">
+            <a:avLst/>
+          </a:prstGeom>
+          <a:solidFill>
+            <a:srgbClr val="C8102E"/>
+          </a:solidFill>
+          <a:ln>
+            <a:noFill/>
+          </a:ln>
+        </p:spPr>
+        <p:style>
+          <a:lnRef idx="1">
+            <a:schemeClr val="accent1"/>
+          </a:lnRef>
+          <a:fillRef idx="3">
+            <a:schemeClr val="accent1"/>
+          </a:fillRef>
+          <a:effectRef idx="2">
+            <a:schemeClr val="accent1"/>
+          </a:effectRef>
+          <a:fontRef idx="minor">
+            <a:schemeClr val="lt1"/>
+          </a:fontRef>
+        </p:style>
+        <p:txBody>
+          <a:bodyPr rtlCol="0" anchor="ctr"/>
+          <a:lstStyle/>
+          <a:p>
+            <a:pPr algn="ctr"/>
+          </a:p>
+        </p:txBody>
+      </p:sp>
+      <p:sp>
+        <p:nvSpPr>
+          <p:cNvPr id="33" name="TextBox 32"/>
+          <p:cNvSpPr txBox="1"/>
+          <p:nvPr/>
+        </p:nvSpPr>
+        <p:spPr>
+          <a:xfrm>
+            <a:off x="9127998" y="3813048"/>
+            <a:ext cx="2512313" cy="292608"/>
+          </a:xfrm>
+          <a:prstGeom prst="rect">
+            <a:avLst/>
+          </a:prstGeom>
+          <a:noFill/>
+        </p:spPr>
+        <p:txBody>
+          <a:bodyPr wrap="square">
+            <a:spAutoFit/>
+          </a:bodyPr>
+          <a:lstStyle/>
+          <a:p>
+            <a:pPr algn="l"/>
+            <a:r>
+              <a:rPr sz="1000" b="1" i="0">
+                <a:solidFill>
+                  <a:srgbClr val="1C1917"/>
+                </a:solidFill>
+                <a:latin typeface="Calibri"/>
+              </a:rPr>
+              <a:t>Live Notification Bell</a:t>
+            </a:r>
+          </a:p>
+        </p:txBody>
+      </p:sp>
+      <p:sp>
+        <p:nvSpPr>
+          <p:cNvPr id="34" name="TextBox 33"/>
+          <p:cNvSpPr txBox="1"/>
+          <p:nvPr/>
+        </p:nvSpPr>
+        <p:spPr>
+          <a:xfrm>
+            <a:off x="9127998" y="4160520"/>
+            <a:ext cx="2512313" cy="5486400"/>
+          </a:xfrm>
+          <a:prstGeom prst="rect">
+            <a:avLst/>
+          </a:prstGeom>
+          <a:noFill/>
+        </p:spPr>
+        <p:txBody>
+          <a:bodyPr wrap="square">
+            <a:spAutoFit/>
+          </a:bodyPr>
+          <a:lstStyle/>
+          <a:p>
+            <a:pPr>
+              <a:spcAft>
+                <a:spcPts val="500"/>
+              </a:spcAft>
+            </a:pPr>
+            <a:r>
+              <a:rPr sz="850">
+                <a:solidFill>
+                  <a:srgbClr val="C8102E"/>
+                </a:solidFill>
+                <a:latin typeface="Calibri"/>
+              </a:rPr>
+              <a:t>▪  </a:t>
+            </a:r>
+            <a:r>
+              <a:rPr sz="850">
+                <a:solidFill>
+                  <a:srgbClr val="78716C"/>
+                </a:solidFill>
+                <a:latin typeface="Calibri"/>
+              </a:rPr>
+              <a:t>Security alerts: new device/location login</a:t>
+            </a:r>
+          </a:p>
+          <a:p>
+            <a:pPr>
+              <a:spcAft>
+                <a:spcPts val="500"/>
+              </a:spcAft>
+            </a:pPr>
+            <a:r>
+              <a:rPr sz="850">
+                <a:solidFill>
+                  <a:srgbClr val="C8102E"/>
+                </a:solidFill>
+                <a:latin typeface="Calibri"/>
+              </a:rPr>
+              <a:t>▪  </a:t>
+            </a:r>
+            <a:r>
+              <a:rPr sz="850">
+                <a:solidFill>
+                  <a:srgbClr val="78716C"/>
+                </a:solidFill>
+                <a:latin typeface="Calibri"/>
+              </a:rPr>
+              <a:t>Pending approval queue — one tap to Sign tab</a:t>
+            </a:r>
+          </a:p>
+          <a:p>
+            <a:pPr>
+              <a:spcAft>
+                <a:spcPts val="500"/>
+              </a:spcAft>
+            </a:pPr>
+            <a:r>
+              <a:rPr sz="850">
+                <a:solidFill>
+                  <a:srgbClr val="C8102E"/>
+                </a:solidFill>
+                <a:latin typeface="Calibri"/>
+              </a:rPr>
+              <a:t>▪  </a:t>
+            </a:r>
+            <a:r>
+              <a:rPr sz="850">
+                <a:solidFill>
+                  <a:srgbClr val="78716C"/>
+                </a:solidFill>
+                <a:latin typeface="Calibri"/>
+              </a:rPr>
+              <a:t>Cooling-off countdowns with live progress bar</a:t>
+            </a:r>
+          </a:p>
+          <a:p>
+            <a:pPr>
+              <a:spcAft>
+                <a:spcPts val="500"/>
+              </a:spcAft>
+            </a:pPr>
+            <a:r>
+              <a:rPr sz="850">
+                <a:solidFill>
+                  <a:srgbClr val="C8102E"/>
+                </a:solidFill>
+                <a:latin typeface="Calibri"/>
+              </a:rPr>
+              <a:t>▪  </a:t>
+            </a:r>
+            <a:r>
+              <a:rPr sz="850">
+                <a:solidFill>
+                  <a:srgbClr val="78716C"/>
+                </a:solidFill>
+                <a:latin typeface="Calibri"/>
+              </a:rPr>
+              <a:t>Stalled co-signer escalations with RM status</a:t>
+            </a:r>
+          </a:p>
+        </p:txBody>
+      </p:sp>
+      <p:sp>
+        <p:nvSpPr>
+          <p:cNvPr id="35" name="TextBox 34"/>
           <p:cNvSpPr txBox="1"/>
           <p:nvPr/>
         </p:nvSpPr>
@@ -25299,7 +25703,7 @@
       </p:sp>
       <p:sp>
         <p:nvSpPr>
-          <p:cNvPr id="32" name="TextBox 31"/>
+          <p:cNvPr id="36" name="TextBox 35"/>
           <p:cNvSpPr txBox="1"/>
           <p:nvPr/>
         </p:nvSpPr>

--- a/Santander_Digital_Banking_Future.pptx
+++ b/Santander_Digital_Banking_Future.pptx
@@ -3377,7 +3377,7 @@
         </p:spPr>
         <p:txBody>
           <a:bodyPr wrap="square">
-            <a:spAutoFit/>
+            <a:normAutofit/>
           </a:bodyPr>
           <a:lstStyle/>
           <a:p>
@@ -3412,7 +3412,7 @@
         </p:spPr>
         <p:txBody>
           <a:bodyPr wrap="square">
-            <a:spAutoFit/>
+            <a:normAutofit/>
           </a:bodyPr>
           <a:lstStyle/>
           <a:p>
@@ -3449,7 +3449,7 @@
         </p:spPr>
         <p:txBody>
           <a:bodyPr wrap="square">
-            <a:spAutoFit/>
+            <a:normAutofit/>
           </a:bodyPr>
           <a:lstStyle/>
           <a:p>
@@ -3484,7 +3484,7 @@
         </p:spPr>
         <p:txBody>
           <a:bodyPr wrap="square">
-            <a:spAutoFit/>
+            <a:normAutofit/>
           </a:bodyPr>
           <a:lstStyle/>
           <a:p>
@@ -3666,7 +3666,7 @@
         </p:spPr>
         <p:txBody>
           <a:bodyPr wrap="square">
-            <a:spAutoFit/>
+            <a:normAutofit/>
           </a:bodyPr>
           <a:lstStyle/>
           <a:p>
@@ -3701,7 +3701,7 @@
         </p:spPr>
         <p:txBody>
           <a:bodyPr wrap="square">
-            <a:spAutoFit/>
+            <a:normAutofit/>
           </a:bodyPr>
           <a:lstStyle/>
           <a:p>
@@ -3822,7 +3822,7 @@
         </p:spPr>
         <p:txBody>
           <a:bodyPr wrap="square">
-            <a:spAutoFit/>
+            <a:normAutofit/>
           </a:bodyPr>
           <a:lstStyle/>
           <a:p>
@@ -3900,7 +3900,7 @@
         </p:spPr>
         <p:txBody>
           <a:bodyPr wrap="square">
-            <a:spAutoFit/>
+            <a:normAutofit/>
           </a:bodyPr>
           <a:lstStyle/>
           <a:p>
@@ -3935,7 +3935,7 @@
         </p:spPr>
         <p:txBody>
           <a:bodyPr wrap="square">
-            <a:spAutoFit/>
+            <a:normAutofit/>
           </a:bodyPr>
           <a:lstStyle/>
           <a:p>
@@ -4013,7 +4013,7 @@
         </p:spPr>
         <p:txBody>
           <a:bodyPr wrap="square">
-            <a:spAutoFit/>
+            <a:normAutofit/>
           </a:bodyPr>
           <a:lstStyle/>
           <a:p>
@@ -4048,7 +4048,7 @@
         </p:spPr>
         <p:txBody>
           <a:bodyPr wrap="square">
-            <a:spAutoFit/>
+            <a:normAutofit/>
           </a:bodyPr>
           <a:lstStyle/>
           <a:p>
@@ -4126,7 +4126,7 @@
         </p:spPr>
         <p:txBody>
           <a:bodyPr wrap="square">
-            <a:spAutoFit/>
+            <a:normAutofit/>
           </a:bodyPr>
           <a:lstStyle/>
           <a:p>
@@ -4161,7 +4161,7 @@
         </p:spPr>
         <p:txBody>
           <a:bodyPr wrap="square">
-            <a:spAutoFit/>
+            <a:normAutofit/>
           </a:bodyPr>
           <a:lstStyle/>
           <a:p>
@@ -4239,7 +4239,7 @@
         </p:spPr>
         <p:txBody>
           <a:bodyPr wrap="square">
-            <a:spAutoFit/>
+            <a:normAutofit/>
           </a:bodyPr>
           <a:lstStyle/>
           <a:p>
@@ -4274,7 +4274,7 @@
         </p:spPr>
         <p:txBody>
           <a:bodyPr wrap="square">
-            <a:spAutoFit/>
+            <a:normAutofit/>
           </a:bodyPr>
           <a:lstStyle/>
           <a:p>
@@ -4352,7 +4352,7 @@
         </p:spPr>
         <p:txBody>
           <a:bodyPr wrap="square">
-            <a:spAutoFit/>
+            <a:normAutofit/>
           </a:bodyPr>
           <a:lstStyle/>
           <a:p>
@@ -4387,7 +4387,7 @@
         </p:spPr>
         <p:txBody>
           <a:bodyPr wrap="square">
-            <a:spAutoFit/>
+            <a:normAutofit/>
           </a:bodyPr>
           <a:lstStyle/>
           <a:p>
@@ -4467,7 +4467,7 @@
         </p:spPr>
         <p:txBody>
           <a:bodyPr wrap="square">
-            <a:spAutoFit/>
+            <a:normAutofit/>
           </a:bodyPr>
           <a:lstStyle/>
           <a:p>
@@ -4588,7 +4588,7 @@
         </p:spPr>
         <p:txBody>
           <a:bodyPr wrap="square">
-            <a:spAutoFit/>
+            <a:normAutofit/>
           </a:bodyPr>
           <a:lstStyle/>
           <a:p>
@@ -4623,7 +4623,7 @@
         </p:spPr>
         <p:txBody>
           <a:bodyPr wrap="square">
-            <a:spAutoFit/>
+            <a:normAutofit/>
           </a:bodyPr>
           <a:lstStyle/>
           <a:p>
@@ -4796,7 +4796,7 @@
         </p:spPr>
         <p:txBody>
           <a:bodyPr wrap="square">
-            <a:spAutoFit/>
+            <a:normAutofit/>
           </a:bodyPr>
           <a:lstStyle/>
           <a:p>
@@ -4831,7 +4831,7 @@
         </p:spPr>
         <p:txBody>
           <a:bodyPr wrap="square">
-            <a:spAutoFit/>
+            <a:normAutofit/>
           </a:bodyPr>
           <a:lstStyle/>
           <a:p>
@@ -5004,7 +5004,7 @@
         </p:spPr>
         <p:txBody>
           <a:bodyPr wrap="square">
-            <a:spAutoFit/>
+            <a:normAutofit/>
           </a:bodyPr>
           <a:lstStyle/>
           <a:p>
@@ -5039,7 +5039,7 @@
         </p:spPr>
         <p:txBody>
           <a:bodyPr wrap="square">
-            <a:spAutoFit/>
+            <a:normAutofit/>
           </a:bodyPr>
           <a:lstStyle/>
           <a:p>
@@ -5273,7 +5273,7 @@
         </p:spPr>
         <p:txBody>
           <a:bodyPr wrap="square">
-            <a:spAutoFit/>
+            <a:normAutofit/>
           </a:bodyPr>
           <a:lstStyle/>
           <a:p>
@@ -5308,7 +5308,7 @@
         </p:spPr>
         <p:txBody>
           <a:bodyPr wrap="square">
-            <a:spAutoFit/>
+            <a:normAutofit/>
           </a:bodyPr>
           <a:lstStyle/>
           <a:p>
@@ -5472,7 +5472,7 @@
         </p:spPr>
         <p:txBody>
           <a:bodyPr wrap="square">
-            <a:spAutoFit/>
+            <a:normAutofit/>
           </a:bodyPr>
           <a:lstStyle/>
           <a:p>
@@ -5508,7 +5508,7 @@
         </p:spPr>
         <p:txBody>
           <a:bodyPr wrap="square">
-            <a:spAutoFit/>
+            <a:normAutofit/>
           </a:bodyPr>
           <a:lstStyle/>
           <a:p>
@@ -5544,7 +5544,7 @@
         </p:spPr>
         <p:txBody>
           <a:bodyPr wrap="square">
-            <a:spAutoFit/>
+            <a:normAutofit/>
           </a:bodyPr>
           <a:lstStyle/>
           <a:p>
@@ -5647,7 +5647,7 @@
         </p:spPr>
         <p:txBody>
           <a:bodyPr wrap="square">
-            <a:spAutoFit/>
+            <a:normAutofit/>
           </a:bodyPr>
           <a:lstStyle/>
           <a:p>
@@ -5768,7 +5768,7 @@
         </p:spPr>
         <p:txBody>
           <a:bodyPr wrap="square">
-            <a:spAutoFit/>
+            <a:normAutofit/>
           </a:bodyPr>
           <a:lstStyle/>
           <a:p>
@@ -5804,7 +5804,7 @@
         </p:spPr>
         <p:txBody>
           <a:bodyPr wrap="square">
-            <a:spAutoFit/>
+            <a:normAutofit/>
           </a:bodyPr>
           <a:lstStyle/>
           <a:p>
@@ -5840,7 +5840,7 @@
         </p:spPr>
         <p:txBody>
           <a:bodyPr wrap="square">
-            <a:spAutoFit/>
+            <a:normAutofit/>
           </a:bodyPr>
           <a:lstStyle/>
           <a:p>
@@ -6029,7 +6029,7 @@
         </p:spPr>
         <p:txBody>
           <a:bodyPr wrap="square">
-            <a:spAutoFit/>
+            <a:normAutofit/>
           </a:bodyPr>
           <a:lstStyle/>
           <a:p>
@@ -6065,7 +6065,7 @@
         </p:spPr>
         <p:txBody>
           <a:bodyPr wrap="square">
-            <a:spAutoFit/>
+            <a:normAutofit/>
           </a:bodyPr>
           <a:lstStyle/>
           <a:p>
@@ -6101,7 +6101,7 @@
         </p:spPr>
         <p:txBody>
           <a:bodyPr wrap="square">
-            <a:spAutoFit/>
+            <a:normAutofit/>
           </a:bodyPr>
           <a:lstStyle/>
           <a:p>
@@ -6290,7 +6290,7 @@
         </p:spPr>
         <p:txBody>
           <a:bodyPr wrap="square">
-            <a:spAutoFit/>
+            <a:normAutofit/>
           </a:bodyPr>
           <a:lstStyle/>
           <a:p>
@@ -6326,7 +6326,7 @@
         </p:spPr>
         <p:txBody>
           <a:bodyPr wrap="square">
-            <a:spAutoFit/>
+            <a:normAutofit/>
           </a:bodyPr>
           <a:lstStyle/>
           <a:p>
@@ -6362,7 +6362,7 @@
         </p:spPr>
         <p:txBody>
           <a:bodyPr wrap="square">
-            <a:spAutoFit/>
+            <a:normAutofit/>
           </a:bodyPr>
           <a:lstStyle/>
           <a:p>
@@ -6612,7 +6612,7 @@
         </p:spPr>
         <p:txBody>
           <a:bodyPr wrap="square">
-            <a:spAutoFit/>
+            <a:normAutofit/>
           </a:bodyPr>
           <a:lstStyle/>
           <a:p>
@@ -6647,7 +6647,7 @@
         </p:spPr>
         <p:txBody>
           <a:bodyPr wrap="square">
-            <a:spAutoFit/>
+            <a:normAutofit/>
           </a:bodyPr>
           <a:lstStyle/>
           <a:p>
@@ -6768,7 +6768,7 @@
         </p:spPr>
         <p:txBody>
           <a:bodyPr wrap="square">
-            <a:spAutoFit/>
+            <a:normAutofit/>
           </a:bodyPr>
           <a:lstStyle/>
           <a:p>
@@ -6803,7 +6803,7 @@
         </p:spPr>
         <p:txBody>
           <a:bodyPr wrap="square">
-            <a:spAutoFit/>
+            <a:normAutofit/>
           </a:bodyPr>
           <a:lstStyle/>
           <a:p>
@@ -6917,7 +6917,7 @@
         </p:spPr>
         <p:txBody>
           <a:bodyPr wrap="square">
-            <a:spAutoFit/>
+            <a:normAutofit/>
           </a:bodyPr>
           <a:lstStyle/>
           <a:p>
@@ -6952,7 +6952,7 @@
         </p:spPr>
         <p:txBody>
           <a:bodyPr wrap="square">
-            <a:spAutoFit/>
+            <a:normAutofit/>
           </a:bodyPr>
           <a:lstStyle/>
           <a:p>
@@ -7066,7 +7066,7 @@
         </p:spPr>
         <p:txBody>
           <a:bodyPr wrap="square">
-            <a:spAutoFit/>
+            <a:normAutofit/>
           </a:bodyPr>
           <a:lstStyle/>
           <a:p>
@@ -7101,7 +7101,7 @@
         </p:spPr>
         <p:txBody>
           <a:bodyPr wrap="square">
-            <a:spAutoFit/>
+            <a:normAutofit/>
           </a:bodyPr>
           <a:lstStyle/>
           <a:p>
@@ -7215,7 +7215,7 @@
         </p:spPr>
         <p:txBody>
           <a:bodyPr wrap="square">
-            <a:spAutoFit/>
+            <a:normAutofit/>
           </a:bodyPr>
           <a:lstStyle/>
           <a:p>
@@ -7250,7 +7250,7 @@
         </p:spPr>
         <p:txBody>
           <a:bodyPr wrap="square">
-            <a:spAutoFit/>
+            <a:normAutofit/>
           </a:bodyPr>
           <a:lstStyle/>
           <a:p>
@@ -7364,7 +7364,7 @@
         </p:spPr>
         <p:txBody>
           <a:bodyPr wrap="square">
-            <a:spAutoFit/>
+            <a:normAutofit/>
           </a:bodyPr>
           <a:lstStyle/>
           <a:p>
@@ -7399,7 +7399,7 @@
         </p:spPr>
         <p:txBody>
           <a:bodyPr wrap="square">
-            <a:spAutoFit/>
+            <a:normAutofit/>
           </a:bodyPr>
           <a:lstStyle/>
           <a:p>
@@ -7513,7 +7513,7 @@
         </p:spPr>
         <p:txBody>
           <a:bodyPr wrap="square">
-            <a:spAutoFit/>
+            <a:normAutofit/>
           </a:bodyPr>
           <a:lstStyle/>
           <a:p>
@@ -7548,7 +7548,7 @@
         </p:spPr>
         <p:txBody>
           <a:bodyPr wrap="square">
-            <a:spAutoFit/>
+            <a:normAutofit/>
           </a:bodyPr>
           <a:lstStyle/>
           <a:p>
@@ -7680,7 +7680,7 @@
         </p:spPr>
         <p:txBody>
           <a:bodyPr wrap="square">
-            <a:spAutoFit/>
+            <a:normAutofit/>
           </a:bodyPr>
           <a:lstStyle/>
           <a:p>
@@ -7715,7 +7715,7 @@
         </p:spPr>
         <p:txBody>
           <a:bodyPr wrap="square">
-            <a:spAutoFit/>
+            <a:normAutofit/>
           </a:bodyPr>
           <a:lstStyle/>
           <a:p>
@@ -7847,7 +7847,7 @@
         </p:spPr>
         <p:txBody>
           <a:bodyPr wrap="square">
-            <a:spAutoFit/>
+            <a:normAutofit/>
           </a:bodyPr>
           <a:lstStyle/>
           <a:p>
@@ -7882,7 +7882,7 @@
         </p:spPr>
         <p:txBody>
           <a:bodyPr wrap="square">
-            <a:spAutoFit/>
+            <a:normAutofit/>
           </a:bodyPr>
           <a:lstStyle/>
           <a:p>
@@ -8159,7 +8159,7 @@
         </p:spPr>
         <p:txBody>
           <a:bodyPr wrap="square">
-            <a:spAutoFit/>
+            <a:normAutofit/>
           </a:bodyPr>
           <a:lstStyle/>
           <a:p>
@@ -8237,7 +8237,7 @@
         </p:spPr>
         <p:txBody>
           <a:bodyPr wrap="square">
-            <a:spAutoFit/>
+            <a:normAutofit/>
           </a:bodyPr>
           <a:lstStyle/>
           <a:p>
@@ -8315,7 +8315,7 @@
         </p:spPr>
         <p:txBody>
           <a:bodyPr wrap="square">
-            <a:spAutoFit/>
+            <a:normAutofit/>
           </a:bodyPr>
           <a:lstStyle/>
           <a:p>
@@ -8350,7 +8350,7 @@
         </p:spPr>
         <p:txBody>
           <a:bodyPr wrap="square">
-            <a:spAutoFit/>
+            <a:normAutofit/>
           </a:bodyPr>
           <a:lstStyle/>
           <a:p>
@@ -8385,7 +8385,7 @@
         </p:spPr>
         <p:txBody>
           <a:bodyPr wrap="square">
-            <a:spAutoFit/>
+            <a:normAutofit/>
           </a:bodyPr>
           <a:lstStyle/>
           <a:p>
@@ -8463,7 +8463,7 @@
         </p:spPr>
         <p:txBody>
           <a:bodyPr wrap="square">
-            <a:spAutoFit/>
+            <a:normAutofit/>
           </a:bodyPr>
           <a:lstStyle/>
           <a:p>
@@ -8498,7 +8498,7 @@
         </p:spPr>
         <p:txBody>
           <a:bodyPr wrap="square">
-            <a:spAutoFit/>
+            <a:normAutofit/>
           </a:bodyPr>
           <a:lstStyle/>
           <a:p>
@@ -8533,7 +8533,7 @@
         </p:spPr>
         <p:txBody>
           <a:bodyPr wrap="square">
-            <a:spAutoFit/>
+            <a:normAutofit/>
           </a:bodyPr>
           <a:lstStyle/>
           <a:p>
@@ -8611,7 +8611,7 @@
         </p:spPr>
         <p:txBody>
           <a:bodyPr wrap="square">
-            <a:spAutoFit/>
+            <a:normAutofit/>
           </a:bodyPr>
           <a:lstStyle/>
           <a:p>
@@ -8646,7 +8646,7 @@
         </p:spPr>
         <p:txBody>
           <a:bodyPr wrap="square">
-            <a:spAutoFit/>
+            <a:normAutofit/>
           </a:bodyPr>
           <a:lstStyle/>
           <a:p>
@@ -8681,7 +8681,7 @@
         </p:spPr>
         <p:txBody>
           <a:bodyPr wrap="square">
-            <a:spAutoFit/>
+            <a:normAutofit/>
           </a:bodyPr>
           <a:lstStyle/>
           <a:p>
@@ -8906,7 +8906,7 @@
         </p:spPr>
         <p:txBody>
           <a:bodyPr wrap="square">
-            <a:spAutoFit/>
+            <a:normAutofit/>
           </a:bodyPr>
           <a:lstStyle/>
           <a:p>
@@ -8941,7 +8941,7 @@
         </p:spPr>
         <p:txBody>
           <a:bodyPr wrap="square">
-            <a:spAutoFit/>
+            <a:normAutofit/>
           </a:bodyPr>
           <a:lstStyle/>
           <a:p>
@@ -8976,7 +8976,7 @@
         </p:spPr>
         <p:txBody>
           <a:bodyPr wrap="square">
-            <a:spAutoFit/>
+            <a:normAutofit/>
           </a:bodyPr>
           <a:lstStyle/>
           <a:p>
@@ -9011,7 +9011,7 @@
         </p:spPr>
         <p:txBody>
           <a:bodyPr wrap="square">
-            <a:spAutoFit/>
+            <a:normAutofit/>
           </a:bodyPr>
           <a:lstStyle/>
           <a:p>
@@ -9193,7 +9193,7 @@
         </p:spPr>
         <p:txBody>
           <a:bodyPr wrap="square">
-            <a:spAutoFit/>
+            <a:normAutofit/>
           </a:bodyPr>
           <a:lstStyle/>
           <a:p>
@@ -9228,7 +9228,7 @@
         </p:spPr>
         <p:txBody>
           <a:bodyPr wrap="square">
-            <a:spAutoFit/>
+            <a:normAutofit/>
           </a:bodyPr>
           <a:lstStyle/>
           <a:p>
@@ -9263,7 +9263,7 @@
         </p:spPr>
         <p:txBody>
           <a:bodyPr wrap="square">
-            <a:spAutoFit/>
+            <a:normAutofit/>
           </a:bodyPr>
           <a:lstStyle/>
           <a:p>
@@ -9428,7 +9428,7 @@
         </p:spPr>
         <p:txBody>
           <a:bodyPr wrap="square">
-            <a:spAutoFit/>
+            <a:normAutofit/>
           </a:bodyPr>
           <a:lstStyle/>
           <a:p>
@@ -9463,7 +9463,7 @@
         </p:spPr>
         <p:txBody>
           <a:bodyPr wrap="square">
-            <a:spAutoFit/>
+            <a:normAutofit/>
           </a:bodyPr>
           <a:lstStyle/>
           <a:p>
@@ -9584,7 +9584,7 @@
         </p:spPr>
         <p:txBody>
           <a:bodyPr wrap="square">
-            <a:spAutoFit/>
+            <a:normAutofit/>
           </a:bodyPr>
           <a:lstStyle/>
           <a:p>
@@ -9619,7 +9619,7 @@
         </p:spPr>
         <p:txBody>
           <a:bodyPr wrap="square">
-            <a:spAutoFit/>
+            <a:normAutofit/>
           </a:bodyPr>
           <a:lstStyle/>
           <a:p>
@@ -9740,7 +9740,7 @@
         </p:spPr>
         <p:txBody>
           <a:bodyPr wrap="square">
-            <a:spAutoFit/>
+            <a:normAutofit/>
           </a:bodyPr>
           <a:lstStyle/>
           <a:p>
@@ -9775,7 +9775,7 @@
         </p:spPr>
         <p:txBody>
           <a:bodyPr wrap="square">
-            <a:spAutoFit/>
+            <a:normAutofit/>
           </a:bodyPr>
           <a:lstStyle/>
           <a:p>
@@ -9957,7 +9957,7 @@
         </p:spPr>
         <p:txBody>
           <a:bodyPr wrap="square">
-            <a:spAutoFit/>
+            <a:normAutofit/>
           </a:bodyPr>
           <a:lstStyle/>
           <a:p>
@@ -9992,7 +9992,7 @@
         </p:spPr>
         <p:txBody>
           <a:bodyPr wrap="square">
-            <a:spAutoFit/>
+            <a:normAutofit/>
           </a:bodyPr>
           <a:lstStyle/>
           <a:p>
@@ -10159,7 +10159,7 @@
         </p:spPr>
         <p:txBody>
           <a:bodyPr wrap="square">
-            <a:spAutoFit/>
+            <a:normAutofit/>
           </a:bodyPr>
           <a:lstStyle/>
           <a:p>
@@ -10194,7 +10194,7 @@
         </p:spPr>
         <p:txBody>
           <a:bodyPr wrap="square">
-            <a:spAutoFit/>
+            <a:normAutofit/>
           </a:bodyPr>
           <a:lstStyle/>
           <a:p>
@@ -10229,7 +10229,7 @@
         </p:spPr>
         <p:txBody>
           <a:bodyPr wrap="square">
-            <a:spAutoFit/>
+            <a:normAutofit/>
           </a:bodyPr>
           <a:lstStyle/>
           <a:p>
@@ -10372,7 +10372,7 @@
         </p:spPr>
         <p:txBody>
           <a:bodyPr wrap="square">
-            <a:spAutoFit/>
+            <a:normAutofit/>
           </a:bodyPr>
           <a:lstStyle/>
           <a:p>
@@ -10407,7 +10407,7 @@
         </p:spPr>
         <p:txBody>
           <a:bodyPr wrap="square">
-            <a:spAutoFit/>
+            <a:normAutofit/>
           </a:bodyPr>
           <a:lstStyle/>
           <a:p>
@@ -10442,7 +10442,7 @@
         </p:spPr>
         <p:txBody>
           <a:bodyPr wrap="square">
-            <a:spAutoFit/>
+            <a:normAutofit/>
           </a:bodyPr>
           <a:lstStyle/>
           <a:p>
@@ -10585,7 +10585,7 @@
         </p:spPr>
         <p:txBody>
           <a:bodyPr wrap="square">
-            <a:spAutoFit/>
+            <a:normAutofit/>
           </a:bodyPr>
           <a:lstStyle/>
           <a:p>
@@ -10620,7 +10620,7 @@
         </p:spPr>
         <p:txBody>
           <a:bodyPr wrap="square">
-            <a:spAutoFit/>
+            <a:normAutofit/>
           </a:bodyPr>
           <a:lstStyle/>
           <a:p>
@@ -10655,7 +10655,7 @@
         </p:spPr>
         <p:txBody>
           <a:bodyPr wrap="square">
-            <a:spAutoFit/>
+            <a:normAutofit/>
           </a:bodyPr>
           <a:lstStyle/>
           <a:p>
@@ -10798,7 +10798,7 @@
         </p:spPr>
         <p:txBody>
           <a:bodyPr wrap="square">
-            <a:spAutoFit/>
+            <a:normAutofit/>
           </a:bodyPr>
           <a:lstStyle/>
           <a:p>
@@ -10833,7 +10833,7 @@
         </p:spPr>
         <p:txBody>
           <a:bodyPr wrap="square">
-            <a:spAutoFit/>
+            <a:normAutofit/>
           </a:bodyPr>
           <a:lstStyle/>
           <a:p>
@@ -10868,7 +10868,7 @@
         </p:spPr>
         <p:txBody>
           <a:bodyPr wrap="square">
-            <a:spAutoFit/>
+            <a:normAutofit/>
           </a:bodyPr>
           <a:lstStyle/>
           <a:p>
@@ -11070,7 +11070,7 @@
         </p:spPr>
         <p:txBody>
           <a:bodyPr wrap="square">
-            <a:spAutoFit/>
+            <a:normAutofit/>
           </a:bodyPr>
           <a:lstStyle/>
           <a:p>
@@ -11105,7 +11105,7 @@
         </p:spPr>
         <p:txBody>
           <a:bodyPr wrap="square">
-            <a:spAutoFit/>
+            <a:normAutofit/>
           </a:bodyPr>
           <a:lstStyle/>
           <a:p>
@@ -11227,7 +11227,7 @@
         </p:spPr>
         <p:txBody>
           <a:bodyPr wrap="square">
-            <a:spAutoFit/>
+            <a:normAutofit/>
           </a:bodyPr>
           <a:lstStyle/>
           <a:p>
@@ -11262,7 +11262,7 @@
         </p:spPr>
         <p:txBody>
           <a:bodyPr wrap="square">
-            <a:spAutoFit/>
+            <a:normAutofit/>
           </a:bodyPr>
           <a:lstStyle/>
           <a:p>
@@ -11376,7 +11376,7 @@
         </p:spPr>
         <p:txBody>
           <a:bodyPr wrap="square">
-            <a:spAutoFit/>
+            <a:normAutofit/>
           </a:bodyPr>
           <a:lstStyle/>
           <a:p>
@@ -11411,7 +11411,7 @@
         </p:spPr>
         <p:txBody>
           <a:bodyPr wrap="square">
-            <a:spAutoFit/>
+            <a:normAutofit/>
           </a:bodyPr>
           <a:lstStyle/>
           <a:p>
@@ -11541,7 +11541,7 @@
         </p:spPr>
         <p:txBody>
           <a:bodyPr wrap="square">
-            <a:spAutoFit/>
+            <a:normAutofit/>
           </a:bodyPr>
           <a:lstStyle/>
           <a:p>
@@ -11576,7 +11576,7 @@
         </p:spPr>
         <p:txBody>
           <a:bodyPr wrap="square">
-            <a:spAutoFit/>
+            <a:normAutofit/>
           </a:bodyPr>
           <a:lstStyle/>
           <a:p>
@@ -11810,7 +11810,7 @@
         </p:spPr>
         <p:txBody>
           <a:bodyPr wrap="square">
-            <a:spAutoFit/>
+            <a:normAutofit/>
           </a:bodyPr>
           <a:lstStyle/>
           <a:p>
@@ -11845,7 +11845,7 @@
         </p:spPr>
         <p:txBody>
           <a:bodyPr wrap="square">
-            <a:spAutoFit/>
+            <a:normAutofit/>
           </a:bodyPr>
           <a:lstStyle/>
           <a:p>
@@ -11924,7 +11924,7 @@
         </p:spPr>
         <p:txBody>
           <a:bodyPr wrap="square">
-            <a:spAutoFit/>
+            <a:normAutofit/>
           </a:bodyPr>
           <a:lstStyle/>
           <a:p>
@@ -12047,7 +12047,7 @@
         </p:spPr>
         <p:txBody>
           <a:bodyPr wrap="square">
-            <a:spAutoFit/>
+            <a:normAutofit/>
           </a:bodyPr>
           <a:lstStyle/>
           <a:p>
@@ -12082,7 +12082,7 @@
         </p:spPr>
         <p:txBody>
           <a:bodyPr wrap="square">
-            <a:spAutoFit/>
+            <a:normAutofit/>
           </a:bodyPr>
           <a:lstStyle/>
           <a:p>
@@ -12225,7 +12225,7 @@
         </p:spPr>
         <p:txBody>
           <a:bodyPr wrap="square">
-            <a:spAutoFit/>
+            <a:normAutofit/>
           </a:bodyPr>
           <a:lstStyle/>
           <a:p>
@@ -12260,7 +12260,7 @@
         </p:spPr>
         <p:txBody>
           <a:bodyPr wrap="square">
-            <a:spAutoFit/>
+            <a:normAutofit/>
           </a:bodyPr>
           <a:lstStyle/>
           <a:p>
@@ -12403,7 +12403,7 @@
         </p:spPr>
         <p:txBody>
           <a:bodyPr wrap="square">
-            <a:spAutoFit/>
+            <a:normAutofit/>
           </a:bodyPr>
           <a:lstStyle/>
           <a:p>
@@ -12438,7 +12438,7 @@
         </p:spPr>
         <p:txBody>
           <a:bodyPr wrap="square">
-            <a:spAutoFit/>
+            <a:normAutofit/>
           </a:bodyPr>
           <a:lstStyle/>
           <a:p>
@@ -12581,7 +12581,7 @@
         </p:spPr>
         <p:txBody>
           <a:bodyPr wrap="square">
-            <a:spAutoFit/>
+            <a:normAutofit/>
           </a:bodyPr>
           <a:lstStyle/>
           <a:p>
@@ -12616,7 +12616,7 @@
         </p:spPr>
         <p:txBody>
           <a:bodyPr wrap="square">
-            <a:spAutoFit/>
+            <a:normAutofit/>
           </a:bodyPr>
           <a:lstStyle/>
           <a:p>
@@ -12759,7 +12759,7 @@
         </p:spPr>
         <p:txBody>
           <a:bodyPr wrap="square">
-            <a:spAutoFit/>
+            <a:normAutofit/>
           </a:bodyPr>
           <a:lstStyle/>
           <a:p>
@@ -12794,7 +12794,7 @@
         </p:spPr>
         <p:txBody>
           <a:bodyPr wrap="square">
-            <a:spAutoFit/>
+            <a:normAutofit/>
           </a:bodyPr>
           <a:lstStyle/>
           <a:p>
@@ -12892,7 +12892,7 @@
         </p:spPr>
         <p:txBody>
           <a:bodyPr wrap="square">
-            <a:spAutoFit/>
+            <a:normAutofit/>
           </a:bodyPr>
           <a:lstStyle/>
           <a:p>
@@ -12927,7 +12927,7 @@
         </p:spPr>
         <p:txBody>
           <a:bodyPr wrap="square">
-            <a:spAutoFit/>
+            <a:normAutofit/>
           </a:bodyPr>
           <a:lstStyle/>
           <a:p>
@@ -13161,7 +13161,7 @@
         </p:spPr>
         <p:txBody>
           <a:bodyPr wrap="square">
-            <a:spAutoFit/>
+            <a:normAutofit/>
           </a:bodyPr>
           <a:lstStyle/>
           <a:p>
@@ -13196,7 +13196,7 @@
         </p:spPr>
         <p:txBody>
           <a:bodyPr wrap="square">
-            <a:spAutoFit/>
+            <a:normAutofit/>
           </a:bodyPr>
           <a:lstStyle/>
           <a:p>
@@ -13317,7 +13317,7 @@
         </p:spPr>
         <p:txBody>
           <a:bodyPr wrap="square">
-            <a:spAutoFit/>
+            <a:normAutofit/>
           </a:bodyPr>
           <a:lstStyle/>
           <a:p>
@@ -13352,7 +13352,7 @@
         </p:spPr>
         <p:txBody>
           <a:bodyPr wrap="square">
-            <a:spAutoFit/>
+            <a:normAutofit/>
           </a:bodyPr>
           <a:lstStyle/>
           <a:p>
@@ -13487,7 +13487,7 @@
         </p:spPr>
         <p:txBody>
           <a:bodyPr wrap="square">
-            <a:spAutoFit/>
+            <a:normAutofit/>
           </a:bodyPr>
           <a:lstStyle/>
           <a:p>
@@ -13522,7 +13522,7 @@
         </p:spPr>
         <p:txBody>
           <a:bodyPr wrap="square">
-            <a:spAutoFit/>
+            <a:normAutofit/>
           </a:bodyPr>
           <a:lstStyle/>
           <a:p>
@@ -13593,7 +13593,7 @@
         </p:spPr>
         <p:txBody>
           <a:bodyPr wrap="square">
-            <a:spAutoFit/>
+            <a:normAutofit/>
           </a:bodyPr>
           <a:lstStyle/>
           <a:p>
@@ -13628,7 +13628,7 @@
         </p:spPr>
         <p:txBody>
           <a:bodyPr wrap="square">
-            <a:spAutoFit/>
+            <a:normAutofit/>
           </a:bodyPr>
           <a:lstStyle/>
           <a:p>
@@ -13683,7 +13683,7 @@
         </p:spPr>
         <p:txBody>
           <a:bodyPr wrap="square">
-            <a:spAutoFit/>
+            <a:normAutofit/>
           </a:bodyPr>
           <a:lstStyle/>
           <a:p>
@@ -13718,7 +13718,7 @@
         </p:spPr>
         <p:txBody>
           <a:bodyPr wrap="square">
-            <a:spAutoFit/>
+            <a:normAutofit/>
           </a:bodyPr>
           <a:lstStyle/>
           <a:p>
@@ -14224,7 +14224,7 @@
         </p:spPr>
         <p:txBody>
           <a:bodyPr wrap="square">
-            <a:spAutoFit/>
+            <a:normAutofit/>
           </a:bodyPr>
           <a:lstStyle/>
           <a:p>
@@ -14259,7 +14259,7 @@
         </p:spPr>
         <p:txBody>
           <a:bodyPr wrap="square">
-            <a:spAutoFit/>
+            <a:normAutofit/>
           </a:bodyPr>
           <a:lstStyle/>
           <a:p>
@@ -14423,7 +14423,7 @@
         </p:spPr>
         <p:txBody>
           <a:bodyPr wrap="square">
-            <a:spAutoFit/>
+            <a:normAutofit/>
           </a:bodyPr>
           <a:lstStyle/>
           <a:p>
@@ -14458,7 +14458,7 @@
         </p:spPr>
         <p:txBody>
           <a:bodyPr wrap="square">
-            <a:spAutoFit/>
+            <a:normAutofit/>
           </a:bodyPr>
           <a:lstStyle/>
           <a:p>
@@ -14494,7 +14494,7 @@
         </p:spPr>
         <p:txBody>
           <a:bodyPr wrap="square">
-            <a:spAutoFit/>
+            <a:normAutofit/>
           </a:bodyPr>
           <a:lstStyle/>
           <a:p>
@@ -14683,7 +14683,7 @@
         </p:spPr>
         <p:txBody>
           <a:bodyPr wrap="square">
-            <a:spAutoFit/>
+            <a:normAutofit/>
           </a:bodyPr>
           <a:lstStyle/>
           <a:p>
@@ -14718,7 +14718,7 @@
         </p:spPr>
         <p:txBody>
           <a:bodyPr wrap="square">
-            <a:spAutoFit/>
+            <a:normAutofit/>
           </a:bodyPr>
           <a:lstStyle/>
           <a:p>
@@ -14754,7 +14754,7 @@
         </p:spPr>
         <p:txBody>
           <a:bodyPr wrap="square">
-            <a:spAutoFit/>
+            <a:normAutofit/>
           </a:bodyPr>
           <a:lstStyle/>
           <a:p>
@@ -14927,7 +14927,7 @@
         </p:spPr>
         <p:txBody>
           <a:bodyPr wrap="square">
-            <a:spAutoFit/>
+            <a:normAutofit/>
           </a:bodyPr>
           <a:lstStyle/>
           <a:p>
@@ -14962,7 +14962,7 @@
         </p:spPr>
         <p:txBody>
           <a:bodyPr wrap="square">
-            <a:spAutoFit/>
+            <a:normAutofit/>
           </a:bodyPr>
           <a:lstStyle/>
           <a:p>
@@ -14998,7 +14998,7 @@
         </p:spPr>
         <p:txBody>
           <a:bodyPr wrap="square">
-            <a:spAutoFit/>
+            <a:normAutofit/>
           </a:bodyPr>
           <a:lstStyle/>
           <a:p>
@@ -15171,7 +15171,7 @@
         </p:spPr>
         <p:txBody>
           <a:bodyPr wrap="square">
-            <a:spAutoFit/>
+            <a:normAutofit/>
           </a:bodyPr>
           <a:lstStyle/>
           <a:p>
@@ -15206,7 +15206,7 @@
         </p:spPr>
         <p:txBody>
           <a:bodyPr wrap="square">
-            <a:spAutoFit/>
+            <a:normAutofit/>
           </a:bodyPr>
           <a:lstStyle/>
           <a:p>
@@ -15242,7 +15242,7 @@
         </p:spPr>
         <p:txBody>
           <a:bodyPr wrap="square">
-            <a:spAutoFit/>
+            <a:normAutofit/>
           </a:bodyPr>
           <a:lstStyle/>
           <a:p>
@@ -15372,7 +15372,7 @@
         </p:spPr>
         <p:txBody>
           <a:bodyPr wrap="square">
-            <a:spAutoFit/>
+            <a:normAutofit/>
           </a:bodyPr>
           <a:lstStyle/>
           <a:p>
@@ -15408,7 +15408,7 @@
         </p:spPr>
         <p:txBody>
           <a:bodyPr wrap="square">
-            <a:spAutoFit/>
+            <a:normAutofit/>
           </a:bodyPr>
           <a:lstStyle/>
           <a:p>
@@ -15495,7 +15495,7 @@
         </p:spPr>
         <p:txBody>
           <a:bodyPr wrap="square">
-            <a:spAutoFit/>
+            <a:normAutofit/>
           </a:bodyPr>
           <a:lstStyle/>
           <a:p>
@@ -15677,7 +15677,7 @@
         </p:spPr>
         <p:txBody>
           <a:bodyPr wrap="square">
-            <a:spAutoFit/>
+            <a:normAutofit/>
           </a:bodyPr>
           <a:lstStyle/>
           <a:p>
@@ -15712,7 +15712,7 @@
         </p:spPr>
         <p:txBody>
           <a:bodyPr wrap="square">
-            <a:spAutoFit/>
+            <a:normAutofit/>
           </a:bodyPr>
           <a:lstStyle/>
           <a:p>
@@ -15878,7 +15878,7 @@
         </p:spPr>
         <p:txBody>
           <a:bodyPr wrap="square">
-            <a:spAutoFit/>
+            <a:normAutofit/>
           </a:bodyPr>
           <a:lstStyle/>
           <a:p>
@@ -15913,7 +15913,7 @@
         </p:spPr>
         <p:txBody>
           <a:bodyPr wrap="square">
-            <a:spAutoFit/>
+            <a:normAutofit/>
           </a:bodyPr>
           <a:lstStyle/>
           <a:p>
@@ -15948,7 +15948,7 @@
         </p:spPr>
         <p:txBody>
           <a:bodyPr wrap="square">
-            <a:spAutoFit/>
+            <a:normAutofit/>
           </a:bodyPr>
           <a:lstStyle/>
           <a:p>
@@ -16123,7 +16123,7 @@
         </p:spPr>
         <p:txBody>
           <a:bodyPr wrap="square">
-            <a:spAutoFit/>
+            <a:normAutofit/>
           </a:bodyPr>
           <a:lstStyle/>
           <a:p>
@@ -16158,7 +16158,7 @@
         </p:spPr>
         <p:txBody>
           <a:bodyPr wrap="square">
-            <a:spAutoFit/>
+            <a:normAutofit/>
           </a:bodyPr>
           <a:lstStyle/>
           <a:p>
@@ -16193,7 +16193,7 @@
         </p:spPr>
         <p:txBody>
           <a:bodyPr wrap="square">
-            <a:spAutoFit/>
+            <a:normAutofit/>
           </a:bodyPr>
           <a:lstStyle/>
           <a:p>
@@ -16368,7 +16368,7 @@
         </p:spPr>
         <p:txBody>
           <a:bodyPr wrap="square">
-            <a:spAutoFit/>
+            <a:normAutofit/>
           </a:bodyPr>
           <a:lstStyle/>
           <a:p>
@@ -16403,7 +16403,7 @@
         </p:spPr>
         <p:txBody>
           <a:bodyPr wrap="square">
-            <a:spAutoFit/>
+            <a:normAutofit/>
           </a:bodyPr>
           <a:lstStyle/>
           <a:p>
@@ -16438,7 +16438,7 @@
         </p:spPr>
         <p:txBody>
           <a:bodyPr wrap="square">
-            <a:spAutoFit/>
+            <a:normAutofit/>
           </a:bodyPr>
           <a:lstStyle/>
           <a:p>
@@ -16613,7 +16613,7 @@
         </p:spPr>
         <p:txBody>
           <a:bodyPr wrap="square">
-            <a:spAutoFit/>
+            <a:normAutofit/>
           </a:bodyPr>
           <a:lstStyle/>
           <a:p>
@@ -16648,7 +16648,7 @@
         </p:spPr>
         <p:txBody>
           <a:bodyPr wrap="square">
-            <a:spAutoFit/>
+            <a:normAutofit/>
           </a:bodyPr>
           <a:lstStyle/>
           <a:p>
@@ -16683,7 +16683,7 @@
         </p:spPr>
         <p:txBody>
           <a:bodyPr wrap="square">
-            <a:spAutoFit/>
+            <a:normAutofit/>
           </a:bodyPr>
           <a:lstStyle/>
           <a:p>
@@ -16917,7 +16917,7 @@
         </p:spPr>
         <p:txBody>
           <a:bodyPr wrap="square">
-            <a:spAutoFit/>
+            <a:normAutofit/>
           </a:bodyPr>
           <a:lstStyle/>
           <a:p>
@@ -16952,7 +16952,7 @@
         </p:spPr>
         <p:txBody>
           <a:bodyPr wrap="square">
-            <a:spAutoFit/>
+            <a:normAutofit/>
           </a:bodyPr>
           <a:lstStyle/>
           <a:p>
@@ -17073,7 +17073,7 @@
         </p:spPr>
         <p:txBody>
           <a:bodyPr wrap="square">
-            <a:spAutoFit/>
+            <a:normAutofit/>
           </a:bodyPr>
           <a:lstStyle/>
           <a:p>
@@ -17108,7 +17108,7 @@
         </p:spPr>
         <p:txBody>
           <a:bodyPr wrap="square">
-            <a:spAutoFit/>
+            <a:normAutofit/>
           </a:bodyPr>
           <a:lstStyle/>
           <a:p>
@@ -17254,7 +17254,7 @@
         </p:spPr>
         <p:txBody>
           <a:bodyPr wrap="square">
-            <a:spAutoFit/>
+            <a:normAutofit/>
           </a:bodyPr>
           <a:lstStyle/>
           <a:p>
@@ -17289,7 +17289,7 @@
         </p:spPr>
         <p:txBody>
           <a:bodyPr wrap="square">
-            <a:spAutoFit/>
+            <a:normAutofit/>
           </a:bodyPr>
           <a:lstStyle/>
           <a:p>
@@ -17467,7 +17467,7 @@
         </p:spPr>
         <p:txBody>
           <a:bodyPr wrap="square">
-            <a:spAutoFit/>
+            <a:normAutofit/>
           </a:bodyPr>
           <a:lstStyle/>
           <a:p>
@@ -17502,7 +17502,7 @@
         </p:spPr>
         <p:txBody>
           <a:bodyPr wrap="square">
-            <a:spAutoFit/>
+            <a:normAutofit/>
           </a:bodyPr>
           <a:lstStyle/>
           <a:p>
@@ -17632,7 +17632,7 @@
         </p:spPr>
         <p:txBody>
           <a:bodyPr wrap="square">
-            <a:spAutoFit/>
+            <a:normAutofit/>
           </a:bodyPr>
           <a:lstStyle/>
           <a:p>
@@ -17667,7 +17667,7 @@
         </p:spPr>
         <p:txBody>
           <a:bodyPr wrap="square">
-            <a:spAutoFit/>
+            <a:normAutofit/>
           </a:bodyPr>
           <a:lstStyle/>
           <a:p>

--- a/Santander_Digital_Banking_Future.pptx
+++ b/Santander_Digital_Banking_Future.pptx
@@ -13689,7 +13689,7 @@
           <a:p>
             <a:pPr algn="l"/>
             <a:r>
-              <a:rPr sz="1600" b="1" i="0">
+              <a:rPr sz="1500" b="1" i="0">
                 <a:solidFill>
                   <a:srgbClr val="1C1917"/>
                 </a:solidFill>
@@ -13724,11 +13724,11 @@
           <a:p>
             <a:pPr>
               <a:spcAft>
-                <a:spcPts val="500"/>
-              </a:spcAft>
-            </a:pPr>
-            <a:r>
-              <a:rPr sz="1200">
+                <a:spcPts val="400"/>
+              </a:spcAft>
+            </a:pPr>
+            <a:r>
+              <a:rPr sz="1050">
                 <a:solidFill>
                   <a:srgbClr val="44403C"/>
                 </a:solidFill>
@@ -13740,11 +13740,11 @@
           <a:p>
             <a:pPr>
               <a:spcAft>
-                <a:spcPts val="500"/>
-              </a:spcAft>
-            </a:pPr>
-            <a:r>
-              <a:rPr sz="1200">
+                <a:spcPts val="400"/>
+              </a:spcAft>
+            </a:pPr>
+            <a:r>
+              <a:rPr sz="1050">
                 <a:solidFill>
                   <a:srgbClr val="44403C"/>
                 </a:solidFill>
@@ -13756,11 +13756,11 @@
           <a:p>
             <a:pPr>
               <a:spcAft>
-                <a:spcPts val="500"/>
-              </a:spcAft>
-            </a:pPr>
-            <a:r>
-              <a:rPr sz="1200">
+                <a:spcPts val="400"/>
+              </a:spcAft>
+            </a:pPr>
+            <a:r>
+              <a:rPr sz="1050">
                 <a:solidFill>
                   <a:srgbClr val="44403C"/>
                 </a:solidFill>
@@ -13772,27 +13772,27 @@
           <a:p>
             <a:pPr>
               <a:spcAft>
-                <a:spcPts val="500"/>
-              </a:spcAft>
-            </a:pPr>
-            <a:r>
-              <a:rPr sz="1200">
+                <a:spcPts val="400"/>
+              </a:spcAft>
+            </a:pPr>
+            <a:r>
+              <a:rPr sz="1050">
                 <a:solidFill>
                   <a:srgbClr val="44403C"/>
                 </a:solidFill>
                 <a:latin typeface="Calibri"/>
               </a:rPr>
-              <a:t>The three forecast cards on the Home screen replace:</a:t>
-            </a:r>
-          </a:p>
-          <a:p>
-            <a:pPr>
-              <a:spcAft>
-                <a:spcPts val="500"/>
-              </a:spcAft>
-            </a:pPr>
-            <a:r>
-              <a:rPr sz="1200">
+              <a:t>The three forecast cards replace:</a:t>
+            </a:r>
+          </a:p>
+          <a:p>
+            <a:pPr>
+              <a:spcAft>
+                <a:spcPts val="400"/>
+              </a:spcAft>
+            </a:pPr>
+            <a:r>
+              <a:rPr sz="1050">
                 <a:solidFill>
                   <a:srgbClr val="44403C"/>
                 </a:solidFill>
@@ -13804,11 +13804,11 @@
           <a:p>
             <a:pPr>
               <a:spcAft>
-                <a:spcPts val="500"/>
-              </a:spcAft>
-            </a:pPr>
-            <a:r>
-              <a:rPr sz="1200">
+                <a:spcPts val="400"/>
+              </a:spcAft>
+            </a:pPr>
+            <a:r>
+              <a:rPr sz="1050">
                 <a:solidFill>
                   <a:srgbClr val="44403C"/>
                 </a:solidFill>
@@ -13820,11 +13820,11 @@
           <a:p>
             <a:pPr>
               <a:spcAft>
-                <a:spcPts val="500"/>
-              </a:spcAft>
-            </a:pPr>
-            <a:r>
-              <a:rPr sz="1200">
+                <a:spcPts val="400"/>
+              </a:spcAft>
+            </a:pPr>
+            <a:r>
+              <a:rPr sz="1050">
                 <a:solidFill>
                   <a:srgbClr val="44403C"/>
                 </a:solidFill>
@@ -13836,11 +13836,11 @@
           <a:p>
             <a:pPr>
               <a:spcAft>
-                <a:spcPts val="500"/>
-              </a:spcAft>
-            </a:pPr>
-            <a:r>
-              <a:rPr sz="1200">
+                <a:spcPts val="400"/>
+              </a:spcAft>
+            </a:pPr>
+            <a:r>
+              <a:rPr sz="1050">
                 <a:solidFill>
                   <a:srgbClr val="44403C"/>
                 </a:solidFill>
@@ -13852,11 +13852,11 @@
           <a:p>
             <a:pPr>
               <a:spcAft>
-                <a:spcPts val="500"/>
-              </a:spcAft>
-            </a:pPr>
-            <a:r>
-              <a:rPr sz="1200">
+                <a:spcPts val="400"/>
+              </a:spcAft>
+            </a:pPr>
+            <a:r>
+              <a:rPr sz="1050">
                 <a:solidFill>
                   <a:srgbClr val="44403C"/>
                 </a:solidFill>
@@ -13868,11 +13868,11 @@
           <a:p>
             <a:pPr>
               <a:spcAft>
-                <a:spcPts val="500"/>
-              </a:spcAft>
-            </a:pPr>
-            <a:r>
-              <a:rPr sz="1200">
+                <a:spcPts val="400"/>
+              </a:spcAft>
+            </a:pPr>
+            <a:r>
+              <a:rPr sz="1050">
                 <a:solidFill>
                   <a:srgbClr val="44403C"/>
                 </a:solidFill>
@@ -13884,11 +13884,11 @@
           <a:p>
             <a:pPr>
               <a:spcAft>
-                <a:spcPts val="500"/>
-              </a:spcAft>
-            </a:pPr>
-            <a:r>
-              <a:rPr sz="1200">
+                <a:spcPts val="400"/>
+              </a:spcAft>
+            </a:pPr>
+            <a:r>
+              <a:rPr sz="1050">
                 <a:solidFill>
                   <a:srgbClr val="44403C"/>
                 </a:solidFill>
@@ -13900,27 +13900,27 @@
           <a:p>
             <a:pPr>
               <a:spcAft>
-                <a:spcPts val="500"/>
-              </a:spcAft>
-            </a:pPr>
-            <a:r>
-              <a:rPr sz="1200">
+                <a:spcPts val="400"/>
+              </a:spcAft>
+            </a:pPr>
+            <a:r>
+              <a:rPr sz="1050">
                 <a:solidFill>
                   <a:srgbClr val="44403C"/>
                 </a:solidFill>
                 <a:latin typeface="Calibri"/>
               </a:rPr>
-              <a:t>This is 'Predict → Explain → Act' — applied to banking.</a:t>
-            </a:r>
-          </a:p>
-          <a:p>
-            <a:pPr>
-              <a:spcAft>
-                <a:spcPts val="500"/>
-              </a:spcAft>
-            </a:pPr>
-            <a:r>
-              <a:rPr sz="1200">
+              <a:t>'Predict → Explain → Act' — applied to banking.</a:t>
+            </a:r>
+          </a:p>
+          <a:p>
+            <a:pPr>
+              <a:spcAft>
+                <a:spcPts val="400"/>
+              </a:spcAft>
+            </a:pPr>
+            <a:r>
+              <a:rPr sz="1050">
                 <a:solidFill>
                   <a:srgbClr val="44403C"/>
                 </a:solidFill>
@@ -13932,11 +13932,11 @@
           <a:p>
             <a:pPr>
               <a:spcAft>
-                <a:spcPts val="500"/>
-              </a:spcAft>
-            </a:pPr>
-            <a:r>
-              <a:rPr sz="1200">
+                <a:spcPts val="400"/>
+              </a:spcAft>
+            </a:pPr>
+            <a:r>
+              <a:rPr sz="1050">
                 <a:solidFill>
                   <a:srgbClr val="44403C"/>
                 </a:solidFill>
@@ -13948,11 +13948,11 @@
           <a:p>
             <a:pPr>
               <a:spcAft>
-                <a:spcPts val="500"/>
-              </a:spcAft>
-            </a:pPr>
-            <a:r>
-              <a:rPr sz="1200">
+                <a:spcPts val="400"/>
+              </a:spcAft>
+            </a:pPr>
+            <a:r>
+              <a:rPr sz="1050">
                 <a:solidFill>
                   <a:srgbClr val="44403C"/>
                 </a:solidFill>
@@ -13964,59 +13964,59 @@
           <a:p>
             <a:pPr>
               <a:spcAft>
-                <a:spcPts val="500"/>
-              </a:spcAft>
-            </a:pPr>
-            <a:r>
-              <a:rPr sz="1200">
+                <a:spcPts val="400"/>
+              </a:spcAft>
+            </a:pPr>
+            <a:r>
+              <a:rPr sz="1050">
                 <a:solidFill>
                   <a:srgbClr val="44403C"/>
                 </a:solidFill>
                 <a:latin typeface="Calibri"/>
               </a:rPr>
-              <a:t>  •  When payroll is due (from the wages workflow history)</a:t>
-            </a:r>
-          </a:p>
-          <a:p>
-            <a:pPr>
-              <a:spcAft>
-                <a:spcPts val="500"/>
-              </a:spcAft>
-            </a:pPr>
-            <a:r>
-              <a:rPr sz="1200">
+              <a:t>  •  When payroll is due (wages workflow history)</a:t>
+            </a:r>
+          </a:p>
+          <a:p>
+            <a:pPr>
+              <a:spcAft>
+                <a:spcPts val="400"/>
+              </a:spcAft>
+            </a:pPr>
+            <a:r>
+              <a:rPr sz="1050">
                 <a:solidFill>
                   <a:srgbClr val="44403C"/>
                 </a:solidFill>
                 <a:latin typeface="Calibri"/>
               </a:rPr>
-              <a:t>  •  How much VAT is owed (from the transaction categorisation)</a:t>
-            </a:r>
-          </a:p>
-          <a:p>
-            <a:pPr>
-              <a:spcAft>
-                <a:spcPts val="500"/>
-              </a:spcAft>
-            </a:pPr>
-            <a:r>
-              <a:rPr sz="1200">
+              <a:t>  •  How much VAT is owed (transaction categorisation)</a:t>
+            </a:r>
+          </a:p>
+          <a:p>
+            <a:pPr>
+              <a:spcAft>
+                <a:spcPts val="400"/>
+              </a:spcAft>
+            </a:pPr>
+            <a:r>
+              <a:rPr sz="1050">
                 <a:solidFill>
                   <a:srgbClr val="44403C"/>
                 </a:solidFill>
                 <a:latin typeface="Calibri"/>
               </a:rPr>
-              <a:t>  •  When Companies House confirmation is due (from the entity setup)</a:t>
-            </a:r>
-          </a:p>
-          <a:p>
-            <a:pPr>
-              <a:spcAft>
-                <a:spcPts val="500"/>
-              </a:spcAft>
-            </a:pPr>
-            <a:r>
-              <a:rPr sz="1200">
+              <a:t>  •  When Companies House confirmation is due (entity setup)</a:t>
+            </a:r>
+          </a:p>
+          <a:p>
+            <a:pPr>
+              <a:spcAft>
+                <a:spcPts val="400"/>
+              </a:spcAft>
+            </a:pPr>
+            <a:r>
+              <a:rPr sz="1050">
                 <a:solidFill>
                   <a:srgbClr val="44403C"/>
                 </a:solidFill>
@@ -14028,11 +14028,11 @@
           <a:p>
             <a:pPr>
               <a:spcAft>
-                <a:spcPts val="500"/>
-              </a:spcAft>
-            </a:pPr>
-            <a:r>
-              <a:rPr sz="1200">
+                <a:spcPts val="400"/>
+              </a:spcAft>
+            </a:pPr>
+            <a:r>
+              <a:rPr sz="1050">
                 <a:solidFill>
                   <a:srgbClr val="44403C"/>
                 </a:solidFill>
@@ -14044,17 +14044,17 @@
           <a:p>
             <a:pPr>
               <a:spcAft>
-                <a:spcPts val="500"/>
-              </a:spcAft>
-            </a:pPr>
-            <a:r>
-              <a:rPr sz="1200">
+                <a:spcPts val="400"/>
+              </a:spcAft>
+            </a:pPr>
+            <a:r>
+              <a:rPr sz="1050">
                 <a:solidFill>
                   <a:srgbClr val="44403C"/>
                 </a:solidFill>
                 <a:latin typeface="Calibri"/>
               </a:rPr>
-              <a:t>The question is whether the bank surfaces it — or makes the customer look for it.</a:t>
+              <a:t>The question is whether the bank surfaces it.</a:t>
             </a:r>
           </a:p>
         </p:txBody>
@@ -15919,7 +15919,7 @@
           <a:p>
             <a:pPr algn="l"/>
             <a:r>
-              <a:rPr sz="1400" b="1" i="0">
+              <a:rPr sz="1300" b="1" i="0">
                 <a:solidFill>
                   <a:srgbClr val="1C1917"/>
                 </a:solidFill>
@@ -15939,7 +15939,7 @@
         <p:spPr>
           <a:xfrm>
             <a:off x="649224" y="2240280"/>
-            <a:ext cx="2567178" cy="4069080"/>
+            <a:ext cx="2567178" cy="4160520"/>
           </a:xfrm>
           <a:prstGeom prst="rect">
             <a:avLst/>
@@ -15954,11 +15954,11 @@
           <a:p>
             <a:pPr>
               <a:spcAft>
-                <a:spcPts val="500"/>
-              </a:spcAft>
-            </a:pPr>
-            <a:r>
-              <a:rPr sz="1100">
+                <a:spcPts val="400"/>
+              </a:spcAft>
+            </a:pPr>
+            <a:r>
+              <a:rPr sz="1000">
                 <a:solidFill>
                   <a:srgbClr val="44403C"/>
                 </a:solidFill>
@@ -15970,11 +15970,11 @@
           <a:p>
             <a:pPr>
               <a:spcAft>
-                <a:spcPts val="500"/>
-              </a:spcAft>
-            </a:pPr>
-            <a:r>
-              <a:rPr sz="1100">
+                <a:spcPts val="400"/>
+              </a:spcAft>
+            </a:pPr>
+            <a:r>
+              <a:rPr sz="1000">
                 <a:solidFill>
                   <a:srgbClr val="44403C"/>
                 </a:solidFill>
@@ -15986,11 +15986,11 @@
           <a:p>
             <a:pPr>
               <a:spcAft>
-                <a:spcPts val="500"/>
-              </a:spcAft>
-            </a:pPr>
-            <a:r>
-              <a:rPr sz="1100">
+                <a:spcPts val="400"/>
+              </a:spcAft>
+            </a:pPr>
+            <a:r>
+              <a:rPr sz="1000">
                 <a:solidFill>
                   <a:srgbClr val="44403C"/>
                 </a:solidFill>
@@ -16002,11 +16002,11 @@
           <a:p>
             <a:pPr>
               <a:spcAft>
-                <a:spcPts val="500"/>
-              </a:spcAft>
-            </a:pPr>
-            <a:r>
-              <a:rPr sz="1100">
+                <a:spcPts val="400"/>
+              </a:spcAft>
+            </a:pPr>
+            <a:r>
+              <a:rPr sz="1000">
                 <a:solidFill>
                   <a:srgbClr val="44403C"/>
                 </a:solidFill>
@@ -16164,7 +16164,7 @@
           <a:p>
             <a:pPr algn="l"/>
             <a:r>
-              <a:rPr sz="1400" b="1" i="0">
+              <a:rPr sz="1300" b="1" i="0">
                 <a:solidFill>
                   <a:srgbClr val="1C1917"/>
                 </a:solidFill>
@@ -16184,7 +16184,7 @@
         <p:spPr>
           <a:xfrm>
             <a:off x="3445002" y="2240280"/>
-            <a:ext cx="2567178" cy="4069080"/>
+            <a:ext cx="2567178" cy="4160520"/>
           </a:xfrm>
           <a:prstGeom prst="rect">
             <a:avLst/>
@@ -16199,11 +16199,11 @@
           <a:p>
             <a:pPr>
               <a:spcAft>
-                <a:spcPts val="500"/>
-              </a:spcAft>
-            </a:pPr>
-            <a:r>
-              <a:rPr sz="1100">
+                <a:spcPts val="400"/>
+              </a:spcAft>
+            </a:pPr>
+            <a:r>
+              <a:rPr sz="1000">
                 <a:solidFill>
                   <a:srgbClr val="44403C"/>
                 </a:solidFill>
@@ -16215,11 +16215,11 @@
           <a:p>
             <a:pPr>
               <a:spcAft>
-                <a:spcPts val="500"/>
-              </a:spcAft>
-            </a:pPr>
-            <a:r>
-              <a:rPr sz="1100">
+                <a:spcPts val="400"/>
+              </a:spcAft>
+            </a:pPr>
+            <a:r>
+              <a:rPr sz="1000">
                 <a:solidFill>
                   <a:srgbClr val="44403C"/>
                 </a:solidFill>
@@ -16231,11 +16231,11 @@
           <a:p>
             <a:pPr>
               <a:spcAft>
-                <a:spcPts val="500"/>
-              </a:spcAft>
-            </a:pPr>
-            <a:r>
-              <a:rPr sz="1100">
+                <a:spcPts val="400"/>
+              </a:spcAft>
+            </a:pPr>
+            <a:r>
+              <a:rPr sz="1000">
                 <a:solidFill>
                   <a:srgbClr val="44403C"/>
                 </a:solidFill>
@@ -16247,11 +16247,11 @@
           <a:p>
             <a:pPr>
               <a:spcAft>
-                <a:spcPts val="500"/>
-              </a:spcAft>
-            </a:pPr>
-            <a:r>
-              <a:rPr sz="1100">
+                <a:spcPts val="400"/>
+              </a:spcAft>
+            </a:pPr>
+            <a:r>
+              <a:rPr sz="1000">
                 <a:solidFill>
                   <a:srgbClr val="44403C"/>
                 </a:solidFill>
@@ -16409,7 +16409,7 @@
           <a:p>
             <a:pPr algn="l"/>
             <a:r>
-              <a:rPr sz="1400" b="1" i="0">
+              <a:rPr sz="1300" b="1" i="0">
                 <a:solidFill>
                   <a:srgbClr val="1C1917"/>
                 </a:solidFill>
@@ -16429,7 +16429,7 @@
         <p:spPr>
           <a:xfrm>
             <a:off x="6240780" y="2240280"/>
-            <a:ext cx="2567178" cy="4069080"/>
+            <a:ext cx="2567178" cy="4160520"/>
           </a:xfrm>
           <a:prstGeom prst="rect">
             <a:avLst/>
@@ -16444,11 +16444,11 @@
           <a:p>
             <a:pPr>
               <a:spcAft>
-                <a:spcPts val="500"/>
-              </a:spcAft>
-            </a:pPr>
-            <a:r>
-              <a:rPr sz="1100">
+                <a:spcPts val="400"/>
+              </a:spcAft>
+            </a:pPr>
+            <a:r>
+              <a:rPr sz="1000">
                 <a:solidFill>
                   <a:srgbClr val="44403C"/>
                 </a:solidFill>
@@ -16460,11 +16460,11 @@
           <a:p>
             <a:pPr>
               <a:spcAft>
-                <a:spcPts val="500"/>
-              </a:spcAft>
-            </a:pPr>
-            <a:r>
-              <a:rPr sz="1100">
+                <a:spcPts val="400"/>
+              </a:spcAft>
+            </a:pPr>
+            <a:r>
+              <a:rPr sz="1000">
                 <a:solidFill>
                   <a:srgbClr val="44403C"/>
                 </a:solidFill>
@@ -16476,11 +16476,11 @@
           <a:p>
             <a:pPr>
               <a:spcAft>
-                <a:spcPts val="500"/>
-              </a:spcAft>
-            </a:pPr>
-            <a:r>
-              <a:rPr sz="1100">
+                <a:spcPts val="400"/>
+              </a:spcAft>
+            </a:pPr>
+            <a:r>
+              <a:rPr sz="1000">
                 <a:solidFill>
                   <a:srgbClr val="44403C"/>
                 </a:solidFill>
@@ -16492,11 +16492,11 @@
           <a:p>
             <a:pPr>
               <a:spcAft>
-                <a:spcPts val="500"/>
-              </a:spcAft>
-            </a:pPr>
-            <a:r>
-              <a:rPr sz="1100">
+                <a:spcPts val="400"/>
+              </a:spcAft>
+            </a:pPr>
+            <a:r>
+              <a:rPr sz="1000">
                 <a:solidFill>
                   <a:srgbClr val="44403C"/>
                 </a:solidFill>
@@ -16654,7 +16654,7 @@
           <a:p>
             <a:pPr algn="l"/>
             <a:r>
-              <a:rPr sz="1400" b="1" i="0">
+              <a:rPr sz="1300" b="1" i="0">
                 <a:solidFill>
                   <a:srgbClr val="1C1917"/>
                 </a:solidFill>
@@ -16674,7 +16674,7 @@
         <p:spPr>
           <a:xfrm>
             <a:off x="9036558" y="2240280"/>
-            <a:ext cx="2567178" cy="4069080"/>
+            <a:ext cx="2567178" cy="4160520"/>
           </a:xfrm>
           <a:prstGeom prst="rect">
             <a:avLst/>
@@ -16689,11 +16689,11 @@
           <a:p>
             <a:pPr>
               <a:spcAft>
-                <a:spcPts val="500"/>
-              </a:spcAft>
-            </a:pPr>
-            <a:r>
-              <a:rPr sz="1100">
+                <a:spcPts val="400"/>
+              </a:spcAft>
+            </a:pPr>
+            <a:r>
+              <a:rPr sz="1000">
                 <a:solidFill>
                   <a:srgbClr val="44403C"/>
                 </a:solidFill>
@@ -16705,11 +16705,11 @@
           <a:p>
             <a:pPr>
               <a:spcAft>
-                <a:spcPts val="500"/>
-              </a:spcAft>
-            </a:pPr>
-            <a:r>
-              <a:rPr sz="1100">
+                <a:spcPts val="400"/>
+              </a:spcAft>
+            </a:pPr>
+            <a:r>
+              <a:rPr sz="1000">
                 <a:solidFill>
                   <a:srgbClr val="44403C"/>
                 </a:solidFill>
@@ -16721,11 +16721,11 @@
           <a:p>
             <a:pPr>
               <a:spcAft>
-                <a:spcPts val="500"/>
-              </a:spcAft>
-            </a:pPr>
-            <a:r>
-              <a:rPr sz="1100">
+                <a:spcPts val="400"/>
+              </a:spcAft>
+            </a:pPr>
+            <a:r>
+              <a:rPr sz="1000">
                 <a:solidFill>
                   <a:srgbClr val="44403C"/>
                 </a:solidFill>
@@ -16737,11 +16737,11 @@
           <a:p>
             <a:pPr>
               <a:spcAft>
-                <a:spcPts val="500"/>
-              </a:spcAft>
-            </a:pPr>
-            <a:r>
-              <a:rPr sz="1100">
+                <a:spcPts val="400"/>
+              </a:spcAft>
+            </a:pPr>
+            <a:r>
+              <a:rPr sz="1000">
                 <a:solidFill>
                   <a:srgbClr val="44403C"/>
                 </a:solidFill>
@@ -17079,7 +17079,7 @@
           <a:p>
             <a:pPr algn="l"/>
             <a:r>
-              <a:rPr sz="1200" b="1" i="0">
+              <a:rPr sz="1100" b="1" i="0">
                 <a:solidFill>
                   <a:srgbClr val="C8102E"/>
                 </a:solidFill>
@@ -17099,7 +17099,7 @@
         <p:spPr>
           <a:xfrm>
             <a:off x="649224" y="2103120"/>
-            <a:ext cx="2567178" cy="4160520"/>
+            <a:ext cx="2567178" cy="4251960"/>
           </a:xfrm>
           <a:prstGeom prst="rect">
             <a:avLst/>
@@ -17114,11 +17114,11 @@
           <a:p>
             <a:pPr>
               <a:spcAft>
-                <a:spcPts val="500"/>
-              </a:spcAft>
-            </a:pPr>
-            <a:r>
-              <a:rPr sz="1050">
+                <a:spcPts val="400"/>
+              </a:spcAft>
+            </a:pPr>
+            <a:r>
+              <a:rPr sz="1000">
                 <a:solidFill>
                   <a:srgbClr val="B0AAA4"/>
                 </a:solidFill>
@@ -17130,11 +17130,11 @@
           <a:p>
             <a:pPr>
               <a:spcAft>
-                <a:spcPts val="500"/>
-              </a:spcAft>
-            </a:pPr>
-            <a:r>
-              <a:rPr sz="1050">
+                <a:spcPts val="400"/>
+              </a:spcAft>
+            </a:pPr>
+            <a:r>
+              <a:rPr sz="1000">
                 <a:solidFill>
                   <a:srgbClr val="B0AAA4"/>
                 </a:solidFill>
@@ -17146,11 +17146,11 @@
           <a:p>
             <a:pPr>
               <a:spcAft>
-                <a:spcPts val="500"/>
-              </a:spcAft>
-            </a:pPr>
-            <a:r>
-              <a:rPr sz="1050">
+                <a:spcPts val="400"/>
+              </a:spcAft>
+            </a:pPr>
+            <a:r>
+              <a:rPr sz="1000">
                 <a:solidFill>
                   <a:srgbClr val="B0AAA4"/>
                 </a:solidFill>
@@ -17162,11 +17162,11 @@
           <a:p>
             <a:pPr>
               <a:spcAft>
-                <a:spcPts val="500"/>
-              </a:spcAft>
-            </a:pPr>
-            <a:r>
-              <a:rPr sz="1050">
+                <a:spcPts val="400"/>
+              </a:spcAft>
+            </a:pPr>
+            <a:r>
+              <a:rPr sz="1000">
                 <a:solidFill>
                   <a:srgbClr val="B0AAA4"/>
                 </a:solidFill>
@@ -17178,11 +17178,11 @@
           <a:p>
             <a:pPr>
               <a:spcAft>
-                <a:spcPts val="500"/>
-              </a:spcAft>
-            </a:pPr>
-            <a:r>
-              <a:rPr sz="1050">
+                <a:spcPts val="400"/>
+              </a:spcAft>
+            </a:pPr>
+            <a:r>
+              <a:rPr sz="1000">
                 <a:solidFill>
                   <a:srgbClr val="B0AAA4"/>
                 </a:solidFill>
@@ -17260,7 +17260,7 @@
           <a:p>
             <a:pPr algn="l"/>
             <a:r>
-              <a:rPr sz="1200" b="1" i="0">
+              <a:rPr sz="1100" b="1" i="0">
                 <a:solidFill>
                   <a:srgbClr val="D97706"/>
                 </a:solidFill>
@@ -17280,7 +17280,7 @@
         <p:spPr>
           <a:xfrm>
             <a:off x="3445002" y="2103120"/>
-            <a:ext cx="2567178" cy="4160520"/>
+            <a:ext cx="2567178" cy="4251960"/>
           </a:xfrm>
           <a:prstGeom prst="rect">
             <a:avLst/>
@@ -17295,11 +17295,11 @@
           <a:p>
             <a:pPr>
               <a:spcAft>
-                <a:spcPts val="500"/>
-              </a:spcAft>
-            </a:pPr>
-            <a:r>
-              <a:rPr sz="1050">
+                <a:spcPts val="400"/>
+              </a:spcAft>
+            </a:pPr>
+            <a:r>
+              <a:rPr sz="1000">
                 <a:solidFill>
                   <a:srgbClr val="B0AAA4"/>
                 </a:solidFill>
@@ -17311,11 +17311,11 @@
           <a:p>
             <a:pPr>
               <a:spcAft>
-                <a:spcPts val="500"/>
-              </a:spcAft>
-            </a:pPr>
-            <a:r>
-              <a:rPr sz="1050">
+                <a:spcPts val="400"/>
+              </a:spcAft>
+            </a:pPr>
+            <a:r>
+              <a:rPr sz="1000">
                 <a:solidFill>
                   <a:srgbClr val="B0AAA4"/>
                 </a:solidFill>
@@ -17327,11 +17327,11 @@
           <a:p>
             <a:pPr>
               <a:spcAft>
-                <a:spcPts val="500"/>
-              </a:spcAft>
-            </a:pPr>
-            <a:r>
-              <a:rPr sz="1050">
+                <a:spcPts val="400"/>
+              </a:spcAft>
+            </a:pPr>
+            <a:r>
+              <a:rPr sz="1000">
                 <a:solidFill>
                   <a:srgbClr val="B0AAA4"/>
                 </a:solidFill>
@@ -17343,11 +17343,11 @@
           <a:p>
             <a:pPr>
               <a:spcAft>
-                <a:spcPts val="500"/>
-              </a:spcAft>
-            </a:pPr>
-            <a:r>
-              <a:rPr sz="1050">
+                <a:spcPts val="400"/>
+              </a:spcAft>
+            </a:pPr>
+            <a:r>
+              <a:rPr sz="1000">
                 <a:solidFill>
                   <a:srgbClr val="B0AAA4"/>
                 </a:solidFill>
@@ -17359,11 +17359,11 @@
           <a:p>
             <a:pPr>
               <a:spcAft>
-                <a:spcPts val="500"/>
-              </a:spcAft>
-            </a:pPr>
-            <a:r>
-              <a:rPr sz="1050">
+                <a:spcPts val="400"/>
+              </a:spcAft>
+            </a:pPr>
+            <a:r>
+              <a:rPr sz="1000">
                 <a:solidFill>
                   <a:srgbClr val="B0AAA4"/>
                 </a:solidFill>
@@ -17375,11 +17375,11 @@
           <a:p>
             <a:pPr>
               <a:spcAft>
-                <a:spcPts val="500"/>
-              </a:spcAft>
-            </a:pPr>
-            <a:r>
-              <a:rPr sz="1050">
+                <a:spcPts val="400"/>
+              </a:spcAft>
+            </a:pPr>
+            <a:r>
+              <a:rPr sz="1000">
                 <a:solidFill>
                   <a:srgbClr val="B0AAA4"/>
                 </a:solidFill>
@@ -17391,11 +17391,11 @@
           <a:p>
             <a:pPr>
               <a:spcAft>
-                <a:spcPts val="500"/>
-              </a:spcAft>
-            </a:pPr>
-            <a:r>
-              <a:rPr sz="1050">
+                <a:spcPts val="400"/>
+              </a:spcAft>
+            </a:pPr>
+            <a:r>
+              <a:rPr sz="1000">
                 <a:solidFill>
                   <a:srgbClr val="B0AAA4"/>
                 </a:solidFill>
@@ -17473,7 +17473,7 @@
           <a:p>
             <a:pPr algn="l"/>
             <a:r>
-              <a:rPr sz="1200" b="1" i="0">
+              <a:rPr sz="1100" b="1" i="0">
                 <a:solidFill>
                   <a:srgbClr val="2563EB"/>
                 </a:solidFill>
@@ -17493,7 +17493,7 @@
         <p:spPr>
           <a:xfrm>
             <a:off x="6240780" y="2103120"/>
-            <a:ext cx="2567178" cy="4160520"/>
+            <a:ext cx="2567178" cy="4251960"/>
           </a:xfrm>
           <a:prstGeom prst="rect">
             <a:avLst/>
@@ -17508,11 +17508,11 @@
           <a:p>
             <a:pPr>
               <a:spcAft>
-                <a:spcPts val="500"/>
-              </a:spcAft>
-            </a:pPr>
-            <a:r>
-              <a:rPr sz="1050">
+                <a:spcPts val="400"/>
+              </a:spcAft>
+            </a:pPr>
+            <a:r>
+              <a:rPr sz="1000">
                 <a:solidFill>
                   <a:srgbClr val="B0AAA4"/>
                 </a:solidFill>
@@ -17524,11 +17524,11 @@
           <a:p>
             <a:pPr>
               <a:spcAft>
-                <a:spcPts val="500"/>
-              </a:spcAft>
-            </a:pPr>
-            <a:r>
-              <a:rPr sz="1050">
+                <a:spcPts val="400"/>
+              </a:spcAft>
+            </a:pPr>
+            <a:r>
+              <a:rPr sz="1000">
                 <a:solidFill>
                   <a:srgbClr val="B0AAA4"/>
                 </a:solidFill>
@@ -17540,11 +17540,11 @@
           <a:p>
             <a:pPr>
               <a:spcAft>
-                <a:spcPts val="500"/>
-              </a:spcAft>
-            </a:pPr>
-            <a:r>
-              <a:rPr sz="1050">
+                <a:spcPts val="400"/>
+              </a:spcAft>
+            </a:pPr>
+            <a:r>
+              <a:rPr sz="1000">
                 <a:solidFill>
                   <a:srgbClr val="B0AAA4"/>
                 </a:solidFill>
@@ -17556,11 +17556,11 @@
           <a:p>
             <a:pPr>
               <a:spcAft>
-                <a:spcPts val="500"/>
-              </a:spcAft>
-            </a:pPr>
-            <a:r>
-              <a:rPr sz="1050">
+                <a:spcPts val="400"/>
+              </a:spcAft>
+            </a:pPr>
+            <a:r>
+              <a:rPr sz="1000">
                 <a:solidFill>
                   <a:srgbClr val="B0AAA4"/>
                 </a:solidFill>
@@ -17638,7 +17638,7 @@
           <a:p>
             <a:pPr algn="l"/>
             <a:r>
-              <a:rPr sz="1200" b="1" i="0">
+              <a:rPr sz="1100" b="1" i="0">
                 <a:solidFill>
                   <a:srgbClr val="059669"/>
                 </a:solidFill>
@@ -17658,7 +17658,7 @@
         <p:spPr>
           <a:xfrm>
             <a:off x="9036558" y="2103120"/>
-            <a:ext cx="2567178" cy="4160520"/>
+            <a:ext cx="2567178" cy="4251960"/>
           </a:xfrm>
           <a:prstGeom prst="rect">
             <a:avLst/>
@@ -17673,11 +17673,11 @@
           <a:p>
             <a:pPr>
               <a:spcAft>
-                <a:spcPts val="500"/>
-              </a:spcAft>
-            </a:pPr>
-            <a:r>
-              <a:rPr sz="1050">
+                <a:spcPts val="400"/>
+              </a:spcAft>
+            </a:pPr>
+            <a:r>
+              <a:rPr sz="1000">
                 <a:solidFill>
                   <a:srgbClr val="B0AAA4"/>
                 </a:solidFill>
@@ -17689,11 +17689,11 @@
           <a:p>
             <a:pPr>
               <a:spcAft>
-                <a:spcPts val="500"/>
-              </a:spcAft>
-            </a:pPr>
-            <a:r>
-              <a:rPr sz="1050">
+                <a:spcPts val="400"/>
+              </a:spcAft>
+            </a:pPr>
+            <a:r>
+              <a:rPr sz="1000">
                 <a:solidFill>
                   <a:srgbClr val="B0AAA4"/>
                 </a:solidFill>
@@ -17705,11 +17705,11 @@
           <a:p>
             <a:pPr>
               <a:spcAft>
-                <a:spcPts val="500"/>
-              </a:spcAft>
-            </a:pPr>
-            <a:r>
-              <a:rPr sz="1050">
+                <a:spcPts val="400"/>
+              </a:spcAft>
+            </a:pPr>
+            <a:r>
+              <a:rPr sz="1000">
                 <a:solidFill>
                   <a:srgbClr val="B0AAA4"/>
                 </a:solidFill>
@@ -17721,11 +17721,11 @@
           <a:p>
             <a:pPr>
               <a:spcAft>
-                <a:spcPts val="500"/>
-              </a:spcAft>
-            </a:pPr>
-            <a:r>
-              <a:rPr sz="1050">
+                <a:spcPts val="400"/>
+              </a:spcAft>
+            </a:pPr>
+            <a:r>
+              <a:rPr sz="1000">
                 <a:solidFill>
                   <a:srgbClr val="B0AAA4"/>
                 </a:solidFill>

--- a/Santander_Digital_Banking_Future.pptx
+++ b/Santander_Digital_Banking_Future.pptx
@@ -3377,7 +3377,7 @@
         </p:spPr>
         <p:txBody>
           <a:bodyPr wrap="square">
-            <a:normAutofit/>
+            <a:noAutofit/>
           </a:bodyPr>
           <a:lstStyle/>
           <a:p>
@@ -3412,7 +3412,7 @@
         </p:spPr>
         <p:txBody>
           <a:bodyPr wrap="square">
-            <a:normAutofit/>
+            <a:noAutofit/>
           </a:bodyPr>
           <a:lstStyle/>
           <a:p>
@@ -3449,7 +3449,7 @@
         </p:spPr>
         <p:txBody>
           <a:bodyPr wrap="square">
-            <a:normAutofit/>
+            <a:noAutofit/>
           </a:bodyPr>
           <a:lstStyle/>
           <a:p>
@@ -3484,7 +3484,7 @@
         </p:spPr>
         <p:txBody>
           <a:bodyPr wrap="square">
-            <a:normAutofit/>
+            <a:noAutofit/>
           </a:bodyPr>
           <a:lstStyle/>
           <a:p>
@@ -3666,7 +3666,7 @@
         </p:spPr>
         <p:txBody>
           <a:bodyPr wrap="square">
-            <a:normAutofit/>
+            <a:noAutofit/>
           </a:bodyPr>
           <a:lstStyle/>
           <a:p>
@@ -3701,7 +3701,7 @@
         </p:spPr>
         <p:txBody>
           <a:bodyPr wrap="square">
-            <a:normAutofit/>
+            <a:noAutofit/>
           </a:bodyPr>
           <a:lstStyle/>
           <a:p>
@@ -3822,7 +3822,7 @@
         </p:spPr>
         <p:txBody>
           <a:bodyPr wrap="square">
-            <a:normAutofit/>
+            <a:noAutofit/>
           </a:bodyPr>
           <a:lstStyle/>
           <a:p>
@@ -3900,7 +3900,7 @@
         </p:spPr>
         <p:txBody>
           <a:bodyPr wrap="square">
-            <a:normAutofit/>
+            <a:noAutofit/>
           </a:bodyPr>
           <a:lstStyle/>
           <a:p>
@@ -3935,7 +3935,7 @@
         </p:spPr>
         <p:txBody>
           <a:bodyPr wrap="square">
-            <a:normAutofit/>
+            <a:noAutofit/>
           </a:bodyPr>
           <a:lstStyle/>
           <a:p>
@@ -4013,7 +4013,7 @@
         </p:spPr>
         <p:txBody>
           <a:bodyPr wrap="square">
-            <a:normAutofit/>
+            <a:noAutofit/>
           </a:bodyPr>
           <a:lstStyle/>
           <a:p>
@@ -4048,7 +4048,7 @@
         </p:spPr>
         <p:txBody>
           <a:bodyPr wrap="square">
-            <a:normAutofit/>
+            <a:noAutofit/>
           </a:bodyPr>
           <a:lstStyle/>
           <a:p>
@@ -4126,7 +4126,7 @@
         </p:spPr>
         <p:txBody>
           <a:bodyPr wrap="square">
-            <a:normAutofit/>
+            <a:noAutofit/>
           </a:bodyPr>
           <a:lstStyle/>
           <a:p>
@@ -4161,7 +4161,7 @@
         </p:spPr>
         <p:txBody>
           <a:bodyPr wrap="square">
-            <a:normAutofit/>
+            <a:noAutofit/>
           </a:bodyPr>
           <a:lstStyle/>
           <a:p>
@@ -4239,7 +4239,7 @@
         </p:spPr>
         <p:txBody>
           <a:bodyPr wrap="square">
-            <a:normAutofit/>
+            <a:noAutofit/>
           </a:bodyPr>
           <a:lstStyle/>
           <a:p>
@@ -4274,7 +4274,7 @@
         </p:spPr>
         <p:txBody>
           <a:bodyPr wrap="square">
-            <a:normAutofit/>
+            <a:noAutofit/>
           </a:bodyPr>
           <a:lstStyle/>
           <a:p>
@@ -4352,7 +4352,7 @@
         </p:spPr>
         <p:txBody>
           <a:bodyPr wrap="square">
-            <a:normAutofit/>
+            <a:noAutofit/>
           </a:bodyPr>
           <a:lstStyle/>
           <a:p>
@@ -4387,7 +4387,7 @@
         </p:spPr>
         <p:txBody>
           <a:bodyPr wrap="square">
-            <a:normAutofit/>
+            <a:noAutofit/>
           </a:bodyPr>
           <a:lstStyle/>
           <a:p>
@@ -4467,7 +4467,7 @@
         </p:spPr>
         <p:txBody>
           <a:bodyPr wrap="square">
-            <a:normAutofit/>
+            <a:noAutofit/>
           </a:bodyPr>
           <a:lstStyle/>
           <a:p>
@@ -4588,7 +4588,7 @@
         </p:spPr>
         <p:txBody>
           <a:bodyPr wrap="square">
-            <a:normAutofit/>
+            <a:noAutofit/>
           </a:bodyPr>
           <a:lstStyle/>
           <a:p>
@@ -4623,7 +4623,7 @@
         </p:spPr>
         <p:txBody>
           <a:bodyPr wrap="square">
-            <a:normAutofit/>
+            <a:noAutofit/>
           </a:bodyPr>
           <a:lstStyle/>
           <a:p>
@@ -4796,7 +4796,7 @@
         </p:spPr>
         <p:txBody>
           <a:bodyPr wrap="square">
-            <a:normAutofit/>
+            <a:noAutofit/>
           </a:bodyPr>
           <a:lstStyle/>
           <a:p>
@@ -4831,7 +4831,7 @@
         </p:spPr>
         <p:txBody>
           <a:bodyPr wrap="square">
-            <a:normAutofit/>
+            <a:noAutofit/>
           </a:bodyPr>
           <a:lstStyle/>
           <a:p>
@@ -5004,7 +5004,7 @@
         </p:spPr>
         <p:txBody>
           <a:bodyPr wrap="square">
-            <a:normAutofit/>
+            <a:noAutofit/>
           </a:bodyPr>
           <a:lstStyle/>
           <a:p>
@@ -5039,7 +5039,7 @@
         </p:spPr>
         <p:txBody>
           <a:bodyPr wrap="square">
-            <a:normAutofit/>
+            <a:noAutofit/>
           </a:bodyPr>
           <a:lstStyle/>
           <a:p>
@@ -5273,7 +5273,7 @@
         </p:spPr>
         <p:txBody>
           <a:bodyPr wrap="square">
-            <a:normAutofit/>
+            <a:noAutofit/>
           </a:bodyPr>
           <a:lstStyle/>
           <a:p>
@@ -5308,7 +5308,7 @@
         </p:spPr>
         <p:txBody>
           <a:bodyPr wrap="square">
-            <a:normAutofit/>
+            <a:noAutofit/>
           </a:bodyPr>
           <a:lstStyle/>
           <a:p>
@@ -5472,7 +5472,7 @@
         </p:spPr>
         <p:txBody>
           <a:bodyPr wrap="square">
-            <a:normAutofit/>
+            <a:noAutofit/>
           </a:bodyPr>
           <a:lstStyle/>
           <a:p>
@@ -5508,7 +5508,7 @@
         </p:spPr>
         <p:txBody>
           <a:bodyPr wrap="square">
-            <a:normAutofit/>
+            <a:noAutofit/>
           </a:bodyPr>
           <a:lstStyle/>
           <a:p>
@@ -5544,7 +5544,7 @@
         </p:spPr>
         <p:txBody>
           <a:bodyPr wrap="square">
-            <a:normAutofit/>
+            <a:noAutofit/>
           </a:bodyPr>
           <a:lstStyle/>
           <a:p>
@@ -5647,7 +5647,7 @@
         </p:spPr>
         <p:txBody>
           <a:bodyPr wrap="square">
-            <a:normAutofit/>
+            <a:noAutofit/>
           </a:bodyPr>
           <a:lstStyle/>
           <a:p>
@@ -5768,7 +5768,7 @@
         </p:spPr>
         <p:txBody>
           <a:bodyPr wrap="square">
-            <a:normAutofit/>
+            <a:noAutofit/>
           </a:bodyPr>
           <a:lstStyle/>
           <a:p>
@@ -5804,7 +5804,7 @@
         </p:spPr>
         <p:txBody>
           <a:bodyPr wrap="square">
-            <a:normAutofit/>
+            <a:noAutofit/>
           </a:bodyPr>
           <a:lstStyle/>
           <a:p>
@@ -5840,7 +5840,7 @@
         </p:spPr>
         <p:txBody>
           <a:bodyPr wrap="square">
-            <a:normAutofit/>
+            <a:noAutofit/>
           </a:bodyPr>
           <a:lstStyle/>
           <a:p>
@@ -6029,7 +6029,7 @@
         </p:spPr>
         <p:txBody>
           <a:bodyPr wrap="square">
-            <a:normAutofit/>
+            <a:noAutofit/>
           </a:bodyPr>
           <a:lstStyle/>
           <a:p>
@@ -6065,7 +6065,7 @@
         </p:spPr>
         <p:txBody>
           <a:bodyPr wrap="square">
-            <a:normAutofit/>
+            <a:noAutofit/>
           </a:bodyPr>
           <a:lstStyle/>
           <a:p>
@@ -6101,7 +6101,7 @@
         </p:spPr>
         <p:txBody>
           <a:bodyPr wrap="square">
-            <a:normAutofit/>
+            <a:noAutofit/>
           </a:bodyPr>
           <a:lstStyle/>
           <a:p>
@@ -6290,7 +6290,7 @@
         </p:spPr>
         <p:txBody>
           <a:bodyPr wrap="square">
-            <a:normAutofit/>
+            <a:noAutofit/>
           </a:bodyPr>
           <a:lstStyle/>
           <a:p>
@@ -6326,7 +6326,7 @@
         </p:spPr>
         <p:txBody>
           <a:bodyPr wrap="square">
-            <a:normAutofit/>
+            <a:noAutofit/>
           </a:bodyPr>
           <a:lstStyle/>
           <a:p>
@@ -6362,7 +6362,7 @@
         </p:spPr>
         <p:txBody>
           <a:bodyPr wrap="square">
-            <a:normAutofit/>
+            <a:noAutofit/>
           </a:bodyPr>
           <a:lstStyle/>
           <a:p>
@@ -6612,7 +6612,7 @@
         </p:spPr>
         <p:txBody>
           <a:bodyPr wrap="square">
-            <a:normAutofit/>
+            <a:noAutofit/>
           </a:bodyPr>
           <a:lstStyle/>
           <a:p>
@@ -6647,7 +6647,7 @@
         </p:spPr>
         <p:txBody>
           <a:bodyPr wrap="square">
-            <a:normAutofit/>
+            <a:noAutofit/>
           </a:bodyPr>
           <a:lstStyle/>
           <a:p>
@@ -6768,7 +6768,7 @@
         </p:spPr>
         <p:txBody>
           <a:bodyPr wrap="square">
-            <a:normAutofit/>
+            <a:noAutofit/>
           </a:bodyPr>
           <a:lstStyle/>
           <a:p>
@@ -6803,7 +6803,7 @@
         </p:spPr>
         <p:txBody>
           <a:bodyPr wrap="square">
-            <a:normAutofit/>
+            <a:noAutofit/>
           </a:bodyPr>
           <a:lstStyle/>
           <a:p>
@@ -6917,7 +6917,7 @@
         </p:spPr>
         <p:txBody>
           <a:bodyPr wrap="square">
-            <a:normAutofit/>
+            <a:noAutofit/>
           </a:bodyPr>
           <a:lstStyle/>
           <a:p>
@@ -6952,7 +6952,7 @@
         </p:spPr>
         <p:txBody>
           <a:bodyPr wrap="square">
-            <a:normAutofit/>
+            <a:noAutofit/>
           </a:bodyPr>
           <a:lstStyle/>
           <a:p>
@@ -7066,7 +7066,7 @@
         </p:spPr>
         <p:txBody>
           <a:bodyPr wrap="square">
-            <a:normAutofit/>
+            <a:noAutofit/>
           </a:bodyPr>
           <a:lstStyle/>
           <a:p>
@@ -7101,7 +7101,7 @@
         </p:spPr>
         <p:txBody>
           <a:bodyPr wrap="square">
-            <a:normAutofit/>
+            <a:noAutofit/>
           </a:bodyPr>
           <a:lstStyle/>
           <a:p>
@@ -7215,7 +7215,7 @@
         </p:spPr>
         <p:txBody>
           <a:bodyPr wrap="square">
-            <a:normAutofit/>
+            <a:noAutofit/>
           </a:bodyPr>
           <a:lstStyle/>
           <a:p>
@@ -7250,7 +7250,7 @@
         </p:spPr>
         <p:txBody>
           <a:bodyPr wrap="square">
-            <a:normAutofit/>
+            <a:noAutofit/>
           </a:bodyPr>
           <a:lstStyle/>
           <a:p>
@@ -7364,7 +7364,7 @@
         </p:spPr>
         <p:txBody>
           <a:bodyPr wrap="square">
-            <a:normAutofit/>
+            <a:noAutofit/>
           </a:bodyPr>
           <a:lstStyle/>
           <a:p>
@@ -7399,7 +7399,7 @@
         </p:spPr>
         <p:txBody>
           <a:bodyPr wrap="square">
-            <a:normAutofit/>
+            <a:noAutofit/>
           </a:bodyPr>
           <a:lstStyle/>
           <a:p>
@@ -7513,7 +7513,7 @@
         </p:spPr>
         <p:txBody>
           <a:bodyPr wrap="square">
-            <a:normAutofit/>
+            <a:noAutofit/>
           </a:bodyPr>
           <a:lstStyle/>
           <a:p>
@@ -7548,7 +7548,7 @@
         </p:spPr>
         <p:txBody>
           <a:bodyPr wrap="square">
-            <a:normAutofit/>
+            <a:noAutofit/>
           </a:bodyPr>
           <a:lstStyle/>
           <a:p>
@@ -7680,7 +7680,7 @@
         </p:spPr>
         <p:txBody>
           <a:bodyPr wrap="square">
-            <a:normAutofit/>
+            <a:noAutofit/>
           </a:bodyPr>
           <a:lstStyle/>
           <a:p>
@@ -7715,7 +7715,7 @@
         </p:spPr>
         <p:txBody>
           <a:bodyPr wrap="square">
-            <a:normAutofit/>
+            <a:noAutofit/>
           </a:bodyPr>
           <a:lstStyle/>
           <a:p>
@@ -7847,7 +7847,7 @@
         </p:spPr>
         <p:txBody>
           <a:bodyPr wrap="square">
-            <a:normAutofit/>
+            <a:noAutofit/>
           </a:bodyPr>
           <a:lstStyle/>
           <a:p>
@@ -7882,7 +7882,7 @@
         </p:spPr>
         <p:txBody>
           <a:bodyPr wrap="square">
-            <a:normAutofit/>
+            <a:noAutofit/>
           </a:bodyPr>
           <a:lstStyle/>
           <a:p>
@@ -8159,7 +8159,7 @@
         </p:spPr>
         <p:txBody>
           <a:bodyPr wrap="square">
-            <a:normAutofit/>
+            <a:noAutofit/>
           </a:bodyPr>
           <a:lstStyle/>
           <a:p>
@@ -8237,7 +8237,7 @@
         </p:spPr>
         <p:txBody>
           <a:bodyPr wrap="square">
-            <a:normAutofit/>
+            <a:noAutofit/>
           </a:bodyPr>
           <a:lstStyle/>
           <a:p>
@@ -8315,7 +8315,7 @@
         </p:spPr>
         <p:txBody>
           <a:bodyPr wrap="square">
-            <a:normAutofit/>
+            <a:noAutofit/>
           </a:bodyPr>
           <a:lstStyle/>
           <a:p>
@@ -8350,7 +8350,7 @@
         </p:spPr>
         <p:txBody>
           <a:bodyPr wrap="square">
-            <a:normAutofit/>
+            <a:noAutofit/>
           </a:bodyPr>
           <a:lstStyle/>
           <a:p>
@@ -8385,7 +8385,7 @@
         </p:spPr>
         <p:txBody>
           <a:bodyPr wrap="square">
-            <a:normAutofit/>
+            <a:noAutofit/>
           </a:bodyPr>
           <a:lstStyle/>
           <a:p>
@@ -8463,7 +8463,7 @@
         </p:spPr>
         <p:txBody>
           <a:bodyPr wrap="square">
-            <a:normAutofit/>
+            <a:noAutofit/>
           </a:bodyPr>
           <a:lstStyle/>
           <a:p>
@@ -8498,7 +8498,7 @@
         </p:spPr>
         <p:txBody>
           <a:bodyPr wrap="square">
-            <a:normAutofit/>
+            <a:noAutofit/>
           </a:bodyPr>
           <a:lstStyle/>
           <a:p>
@@ -8533,7 +8533,7 @@
         </p:spPr>
         <p:txBody>
           <a:bodyPr wrap="square">
-            <a:normAutofit/>
+            <a:noAutofit/>
           </a:bodyPr>
           <a:lstStyle/>
           <a:p>
@@ -8611,7 +8611,7 @@
         </p:spPr>
         <p:txBody>
           <a:bodyPr wrap="square">
-            <a:normAutofit/>
+            <a:noAutofit/>
           </a:bodyPr>
           <a:lstStyle/>
           <a:p>
@@ -8646,7 +8646,7 @@
         </p:spPr>
         <p:txBody>
           <a:bodyPr wrap="square">
-            <a:normAutofit/>
+            <a:noAutofit/>
           </a:bodyPr>
           <a:lstStyle/>
           <a:p>
@@ -8681,7 +8681,7 @@
         </p:spPr>
         <p:txBody>
           <a:bodyPr wrap="square">
-            <a:normAutofit/>
+            <a:noAutofit/>
           </a:bodyPr>
           <a:lstStyle/>
           <a:p>
@@ -8906,7 +8906,7 @@
         </p:spPr>
         <p:txBody>
           <a:bodyPr wrap="square">
-            <a:normAutofit/>
+            <a:noAutofit/>
           </a:bodyPr>
           <a:lstStyle/>
           <a:p>
@@ -8941,7 +8941,7 @@
         </p:spPr>
         <p:txBody>
           <a:bodyPr wrap="square">
-            <a:normAutofit/>
+            <a:noAutofit/>
           </a:bodyPr>
           <a:lstStyle/>
           <a:p>
@@ -8976,7 +8976,7 @@
         </p:spPr>
         <p:txBody>
           <a:bodyPr wrap="square">
-            <a:normAutofit/>
+            <a:noAutofit/>
           </a:bodyPr>
           <a:lstStyle/>
           <a:p>
@@ -9011,7 +9011,7 @@
         </p:spPr>
         <p:txBody>
           <a:bodyPr wrap="square">
-            <a:normAutofit/>
+            <a:noAutofit/>
           </a:bodyPr>
           <a:lstStyle/>
           <a:p>
@@ -9193,7 +9193,7 @@
         </p:spPr>
         <p:txBody>
           <a:bodyPr wrap="square">
-            <a:normAutofit/>
+            <a:noAutofit/>
           </a:bodyPr>
           <a:lstStyle/>
           <a:p>
@@ -9228,7 +9228,7 @@
         </p:spPr>
         <p:txBody>
           <a:bodyPr wrap="square">
-            <a:normAutofit/>
+            <a:noAutofit/>
           </a:bodyPr>
           <a:lstStyle/>
           <a:p>
@@ -9263,7 +9263,7 @@
         </p:spPr>
         <p:txBody>
           <a:bodyPr wrap="square">
-            <a:normAutofit/>
+            <a:noAutofit/>
           </a:bodyPr>
           <a:lstStyle/>
           <a:p>
@@ -9428,7 +9428,7 @@
         </p:spPr>
         <p:txBody>
           <a:bodyPr wrap="square">
-            <a:normAutofit/>
+            <a:noAutofit/>
           </a:bodyPr>
           <a:lstStyle/>
           <a:p>
@@ -9463,7 +9463,7 @@
         </p:spPr>
         <p:txBody>
           <a:bodyPr wrap="square">
-            <a:normAutofit/>
+            <a:noAutofit/>
           </a:bodyPr>
           <a:lstStyle/>
           <a:p>
@@ -9584,7 +9584,7 @@
         </p:spPr>
         <p:txBody>
           <a:bodyPr wrap="square">
-            <a:normAutofit/>
+            <a:noAutofit/>
           </a:bodyPr>
           <a:lstStyle/>
           <a:p>
@@ -9619,7 +9619,7 @@
         </p:spPr>
         <p:txBody>
           <a:bodyPr wrap="square">
-            <a:normAutofit/>
+            <a:noAutofit/>
           </a:bodyPr>
           <a:lstStyle/>
           <a:p>
@@ -9740,7 +9740,7 @@
         </p:spPr>
         <p:txBody>
           <a:bodyPr wrap="square">
-            <a:normAutofit/>
+            <a:noAutofit/>
           </a:bodyPr>
           <a:lstStyle/>
           <a:p>
@@ -9775,7 +9775,7 @@
         </p:spPr>
         <p:txBody>
           <a:bodyPr wrap="square">
-            <a:normAutofit/>
+            <a:noAutofit/>
           </a:bodyPr>
           <a:lstStyle/>
           <a:p>
@@ -9957,7 +9957,7 @@
         </p:spPr>
         <p:txBody>
           <a:bodyPr wrap="square">
-            <a:normAutofit/>
+            <a:noAutofit/>
           </a:bodyPr>
           <a:lstStyle/>
           <a:p>
@@ -9992,7 +9992,7 @@
         </p:spPr>
         <p:txBody>
           <a:bodyPr wrap="square">
-            <a:normAutofit/>
+            <a:noAutofit/>
           </a:bodyPr>
           <a:lstStyle/>
           <a:p>
@@ -10159,7 +10159,7 @@
         </p:spPr>
         <p:txBody>
           <a:bodyPr wrap="square">
-            <a:normAutofit/>
+            <a:noAutofit/>
           </a:bodyPr>
           <a:lstStyle/>
           <a:p>
@@ -10194,7 +10194,7 @@
         </p:spPr>
         <p:txBody>
           <a:bodyPr wrap="square">
-            <a:normAutofit/>
+            <a:noAutofit/>
           </a:bodyPr>
           <a:lstStyle/>
           <a:p>
@@ -10229,7 +10229,7 @@
         </p:spPr>
         <p:txBody>
           <a:bodyPr wrap="square">
-            <a:normAutofit/>
+            <a:noAutofit/>
           </a:bodyPr>
           <a:lstStyle/>
           <a:p>
@@ -10372,7 +10372,7 @@
         </p:spPr>
         <p:txBody>
           <a:bodyPr wrap="square">
-            <a:normAutofit/>
+            <a:noAutofit/>
           </a:bodyPr>
           <a:lstStyle/>
           <a:p>
@@ -10407,7 +10407,7 @@
         </p:spPr>
         <p:txBody>
           <a:bodyPr wrap="square">
-            <a:normAutofit/>
+            <a:noAutofit/>
           </a:bodyPr>
           <a:lstStyle/>
           <a:p>
@@ -10442,7 +10442,7 @@
         </p:spPr>
         <p:txBody>
           <a:bodyPr wrap="square">
-            <a:normAutofit/>
+            <a:noAutofit/>
           </a:bodyPr>
           <a:lstStyle/>
           <a:p>
@@ -10585,7 +10585,7 @@
         </p:spPr>
         <p:txBody>
           <a:bodyPr wrap="square">
-            <a:normAutofit/>
+            <a:noAutofit/>
           </a:bodyPr>
           <a:lstStyle/>
           <a:p>
@@ -10620,7 +10620,7 @@
         </p:spPr>
         <p:txBody>
           <a:bodyPr wrap="square">
-            <a:normAutofit/>
+            <a:noAutofit/>
           </a:bodyPr>
           <a:lstStyle/>
           <a:p>
@@ -10655,7 +10655,7 @@
         </p:spPr>
         <p:txBody>
           <a:bodyPr wrap="square">
-            <a:normAutofit/>
+            <a:noAutofit/>
           </a:bodyPr>
           <a:lstStyle/>
           <a:p>
@@ -10798,7 +10798,7 @@
         </p:spPr>
         <p:txBody>
           <a:bodyPr wrap="square">
-            <a:normAutofit/>
+            <a:noAutofit/>
           </a:bodyPr>
           <a:lstStyle/>
           <a:p>
@@ -10833,7 +10833,7 @@
         </p:spPr>
         <p:txBody>
           <a:bodyPr wrap="square">
-            <a:normAutofit/>
+            <a:noAutofit/>
           </a:bodyPr>
           <a:lstStyle/>
           <a:p>
@@ -10868,7 +10868,7 @@
         </p:spPr>
         <p:txBody>
           <a:bodyPr wrap="square">
-            <a:normAutofit/>
+            <a:noAutofit/>
           </a:bodyPr>
           <a:lstStyle/>
           <a:p>
@@ -11070,7 +11070,7 @@
         </p:spPr>
         <p:txBody>
           <a:bodyPr wrap="square">
-            <a:normAutofit/>
+            <a:noAutofit/>
           </a:bodyPr>
           <a:lstStyle/>
           <a:p>
@@ -11105,7 +11105,7 @@
         </p:spPr>
         <p:txBody>
           <a:bodyPr wrap="square">
-            <a:normAutofit/>
+            <a:noAutofit/>
           </a:bodyPr>
           <a:lstStyle/>
           <a:p>
@@ -11227,7 +11227,7 @@
         </p:spPr>
         <p:txBody>
           <a:bodyPr wrap="square">
-            <a:normAutofit/>
+            <a:noAutofit/>
           </a:bodyPr>
           <a:lstStyle/>
           <a:p>
@@ -11262,7 +11262,7 @@
         </p:spPr>
         <p:txBody>
           <a:bodyPr wrap="square">
-            <a:normAutofit/>
+            <a:noAutofit/>
           </a:bodyPr>
           <a:lstStyle/>
           <a:p>
@@ -11376,7 +11376,7 @@
         </p:spPr>
         <p:txBody>
           <a:bodyPr wrap="square">
-            <a:normAutofit/>
+            <a:noAutofit/>
           </a:bodyPr>
           <a:lstStyle/>
           <a:p>
@@ -11411,7 +11411,7 @@
         </p:spPr>
         <p:txBody>
           <a:bodyPr wrap="square">
-            <a:normAutofit/>
+            <a:noAutofit/>
           </a:bodyPr>
           <a:lstStyle/>
           <a:p>
@@ -11541,7 +11541,7 @@
         </p:spPr>
         <p:txBody>
           <a:bodyPr wrap="square">
-            <a:normAutofit/>
+            <a:noAutofit/>
           </a:bodyPr>
           <a:lstStyle/>
           <a:p>
@@ -11576,7 +11576,7 @@
         </p:spPr>
         <p:txBody>
           <a:bodyPr wrap="square">
-            <a:normAutofit/>
+            <a:noAutofit/>
           </a:bodyPr>
           <a:lstStyle/>
           <a:p>
@@ -11810,7 +11810,7 @@
         </p:spPr>
         <p:txBody>
           <a:bodyPr wrap="square">
-            <a:normAutofit/>
+            <a:noAutofit/>
           </a:bodyPr>
           <a:lstStyle/>
           <a:p>
@@ -11845,7 +11845,7 @@
         </p:spPr>
         <p:txBody>
           <a:bodyPr wrap="square">
-            <a:normAutofit/>
+            <a:noAutofit/>
           </a:bodyPr>
           <a:lstStyle/>
           <a:p>
@@ -11924,7 +11924,7 @@
         </p:spPr>
         <p:txBody>
           <a:bodyPr wrap="square">
-            <a:normAutofit/>
+            <a:noAutofit/>
           </a:bodyPr>
           <a:lstStyle/>
           <a:p>
@@ -12047,7 +12047,7 @@
         </p:spPr>
         <p:txBody>
           <a:bodyPr wrap="square">
-            <a:normAutofit/>
+            <a:noAutofit/>
           </a:bodyPr>
           <a:lstStyle/>
           <a:p>
@@ -12082,7 +12082,7 @@
         </p:spPr>
         <p:txBody>
           <a:bodyPr wrap="square">
-            <a:normAutofit/>
+            <a:noAutofit/>
           </a:bodyPr>
           <a:lstStyle/>
           <a:p>
@@ -12225,7 +12225,7 @@
         </p:spPr>
         <p:txBody>
           <a:bodyPr wrap="square">
-            <a:normAutofit/>
+            <a:noAutofit/>
           </a:bodyPr>
           <a:lstStyle/>
           <a:p>
@@ -12260,7 +12260,7 @@
         </p:spPr>
         <p:txBody>
           <a:bodyPr wrap="square">
-            <a:normAutofit/>
+            <a:noAutofit/>
           </a:bodyPr>
           <a:lstStyle/>
           <a:p>
@@ -12403,7 +12403,7 @@
         </p:spPr>
         <p:txBody>
           <a:bodyPr wrap="square">
-            <a:normAutofit/>
+            <a:noAutofit/>
           </a:bodyPr>
           <a:lstStyle/>
           <a:p>
@@ -12438,7 +12438,7 @@
         </p:spPr>
         <p:txBody>
           <a:bodyPr wrap="square">
-            <a:normAutofit/>
+            <a:noAutofit/>
           </a:bodyPr>
           <a:lstStyle/>
           <a:p>
@@ -12581,7 +12581,7 @@
         </p:spPr>
         <p:txBody>
           <a:bodyPr wrap="square">
-            <a:normAutofit/>
+            <a:noAutofit/>
           </a:bodyPr>
           <a:lstStyle/>
           <a:p>
@@ -12616,7 +12616,7 @@
         </p:spPr>
         <p:txBody>
           <a:bodyPr wrap="square">
-            <a:normAutofit/>
+            <a:noAutofit/>
           </a:bodyPr>
           <a:lstStyle/>
           <a:p>
@@ -12759,7 +12759,7 @@
         </p:spPr>
         <p:txBody>
           <a:bodyPr wrap="square">
-            <a:normAutofit/>
+            <a:noAutofit/>
           </a:bodyPr>
           <a:lstStyle/>
           <a:p>
@@ -12794,7 +12794,7 @@
         </p:spPr>
         <p:txBody>
           <a:bodyPr wrap="square">
-            <a:normAutofit/>
+            <a:noAutofit/>
           </a:bodyPr>
           <a:lstStyle/>
           <a:p>
@@ -12892,7 +12892,7 @@
         </p:spPr>
         <p:txBody>
           <a:bodyPr wrap="square">
-            <a:normAutofit/>
+            <a:noAutofit/>
           </a:bodyPr>
           <a:lstStyle/>
           <a:p>
@@ -12927,7 +12927,7 @@
         </p:spPr>
         <p:txBody>
           <a:bodyPr wrap="square">
-            <a:normAutofit/>
+            <a:noAutofit/>
           </a:bodyPr>
           <a:lstStyle/>
           <a:p>
@@ -13161,7 +13161,7 @@
         </p:spPr>
         <p:txBody>
           <a:bodyPr wrap="square">
-            <a:normAutofit/>
+            <a:noAutofit/>
           </a:bodyPr>
           <a:lstStyle/>
           <a:p>
@@ -13196,7 +13196,7 @@
         </p:spPr>
         <p:txBody>
           <a:bodyPr wrap="square">
-            <a:normAutofit/>
+            <a:noAutofit/>
           </a:bodyPr>
           <a:lstStyle/>
           <a:p>
@@ -13317,7 +13317,7 @@
         </p:spPr>
         <p:txBody>
           <a:bodyPr wrap="square">
-            <a:normAutofit/>
+            <a:noAutofit/>
           </a:bodyPr>
           <a:lstStyle/>
           <a:p>
@@ -13352,7 +13352,7 @@
         </p:spPr>
         <p:txBody>
           <a:bodyPr wrap="square">
-            <a:normAutofit/>
+            <a:noAutofit/>
           </a:bodyPr>
           <a:lstStyle/>
           <a:p>
@@ -13487,7 +13487,7 @@
         </p:spPr>
         <p:txBody>
           <a:bodyPr wrap="square">
-            <a:normAutofit/>
+            <a:noAutofit/>
           </a:bodyPr>
           <a:lstStyle/>
           <a:p>
@@ -13522,7 +13522,7 @@
         </p:spPr>
         <p:txBody>
           <a:bodyPr wrap="square">
-            <a:normAutofit/>
+            <a:noAutofit/>
           </a:bodyPr>
           <a:lstStyle/>
           <a:p>
@@ -13593,7 +13593,7 @@
         </p:spPr>
         <p:txBody>
           <a:bodyPr wrap="square">
-            <a:normAutofit/>
+            <a:noAutofit/>
           </a:bodyPr>
           <a:lstStyle/>
           <a:p>
@@ -13628,7 +13628,7 @@
         </p:spPr>
         <p:txBody>
           <a:bodyPr wrap="square">
-            <a:normAutofit/>
+            <a:noAutofit/>
           </a:bodyPr>
           <a:lstStyle/>
           <a:p>
@@ -13683,7 +13683,7 @@
         </p:spPr>
         <p:txBody>
           <a:bodyPr wrap="square">
-            <a:normAutofit/>
+            <a:noAutofit/>
           </a:bodyPr>
           <a:lstStyle/>
           <a:p>
@@ -13718,7 +13718,7 @@
         </p:spPr>
         <p:txBody>
           <a:bodyPr wrap="square">
-            <a:normAutofit/>
+            <a:noAutofit/>
           </a:bodyPr>
           <a:lstStyle/>
           <a:p>
@@ -14224,7 +14224,7 @@
         </p:spPr>
         <p:txBody>
           <a:bodyPr wrap="square">
-            <a:normAutofit/>
+            <a:noAutofit/>
           </a:bodyPr>
           <a:lstStyle/>
           <a:p>
@@ -14259,7 +14259,7 @@
         </p:spPr>
         <p:txBody>
           <a:bodyPr wrap="square">
-            <a:normAutofit/>
+            <a:noAutofit/>
           </a:bodyPr>
           <a:lstStyle/>
           <a:p>
@@ -14423,7 +14423,7 @@
         </p:spPr>
         <p:txBody>
           <a:bodyPr wrap="square">
-            <a:normAutofit/>
+            <a:noAutofit/>
           </a:bodyPr>
           <a:lstStyle/>
           <a:p>
@@ -14458,7 +14458,7 @@
         </p:spPr>
         <p:txBody>
           <a:bodyPr wrap="square">
-            <a:normAutofit/>
+            <a:noAutofit/>
           </a:bodyPr>
           <a:lstStyle/>
           <a:p>
@@ -14494,7 +14494,7 @@
         </p:spPr>
         <p:txBody>
           <a:bodyPr wrap="square">
-            <a:normAutofit/>
+            <a:noAutofit/>
           </a:bodyPr>
           <a:lstStyle/>
           <a:p>
@@ -14683,7 +14683,7 @@
         </p:spPr>
         <p:txBody>
           <a:bodyPr wrap="square">
-            <a:normAutofit/>
+            <a:noAutofit/>
           </a:bodyPr>
           <a:lstStyle/>
           <a:p>
@@ -14718,7 +14718,7 @@
         </p:spPr>
         <p:txBody>
           <a:bodyPr wrap="square">
-            <a:normAutofit/>
+            <a:noAutofit/>
           </a:bodyPr>
           <a:lstStyle/>
           <a:p>
@@ -14754,7 +14754,7 @@
         </p:spPr>
         <p:txBody>
           <a:bodyPr wrap="square">
-            <a:normAutofit/>
+            <a:noAutofit/>
           </a:bodyPr>
           <a:lstStyle/>
           <a:p>
@@ -14927,7 +14927,7 @@
         </p:spPr>
         <p:txBody>
           <a:bodyPr wrap="square">
-            <a:normAutofit/>
+            <a:noAutofit/>
           </a:bodyPr>
           <a:lstStyle/>
           <a:p>
@@ -14962,7 +14962,7 @@
         </p:spPr>
         <p:txBody>
           <a:bodyPr wrap="square">
-            <a:normAutofit/>
+            <a:noAutofit/>
           </a:bodyPr>
           <a:lstStyle/>
           <a:p>
@@ -14998,7 +14998,7 @@
         </p:spPr>
         <p:txBody>
           <a:bodyPr wrap="square">
-            <a:normAutofit/>
+            <a:noAutofit/>
           </a:bodyPr>
           <a:lstStyle/>
           <a:p>
@@ -15171,7 +15171,7 @@
         </p:spPr>
         <p:txBody>
           <a:bodyPr wrap="square">
-            <a:normAutofit/>
+            <a:noAutofit/>
           </a:bodyPr>
           <a:lstStyle/>
           <a:p>
@@ -15206,7 +15206,7 @@
         </p:spPr>
         <p:txBody>
           <a:bodyPr wrap="square">
-            <a:normAutofit/>
+            <a:noAutofit/>
           </a:bodyPr>
           <a:lstStyle/>
           <a:p>
@@ -15242,7 +15242,7 @@
         </p:spPr>
         <p:txBody>
           <a:bodyPr wrap="square">
-            <a:normAutofit/>
+            <a:noAutofit/>
           </a:bodyPr>
           <a:lstStyle/>
           <a:p>
@@ -15372,7 +15372,7 @@
         </p:spPr>
         <p:txBody>
           <a:bodyPr wrap="square">
-            <a:normAutofit/>
+            <a:noAutofit/>
           </a:bodyPr>
           <a:lstStyle/>
           <a:p>
@@ -15408,7 +15408,7 @@
         </p:spPr>
         <p:txBody>
           <a:bodyPr wrap="square">
-            <a:normAutofit/>
+            <a:noAutofit/>
           </a:bodyPr>
           <a:lstStyle/>
           <a:p>
@@ -15495,7 +15495,7 @@
         </p:spPr>
         <p:txBody>
           <a:bodyPr wrap="square">
-            <a:normAutofit/>
+            <a:noAutofit/>
           </a:bodyPr>
           <a:lstStyle/>
           <a:p>
@@ -15677,7 +15677,7 @@
         </p:spPr>
         <p:txBody>
           <a:bodyPr wrap="square">
-            <a:normAutofit/>
+            <a:noAutofit/>
           </a:bodyPr>
           <a:lstStyle/>
           <a:p>
@@ -15712,7 +15712,7 @@
         </p:spPr>
         <p:txBody>
           <a:bodyPr wrap="square">
-            <a:normAutofit/>
+            <a:noAutofit/>
           </a:bodyPr>
           <a:lstStyle/>
           <a:p>
@@ -15878,7 +15878,7 @@
         </p:spPr>
         <p:txBody>
           <a:bodyPr wrap="square">
-            <a:normAutofit/>
+            <a:noAutofit/>
           </a:bodyPr>
           <a:lstStyle/>
           <a:p>
@@ -15913,7 +15913,7 @@
         </p:spPr>
         <p:txBody>
           <a:bodyPr wrap="square">
-            <a:normAutofit/>
+            <a:noAutofit/>
           </a:bodyPr>
           <a:lstStyle/>
           <a:p>
@@ -15948,7 +15948,7 @@
         </p:spPr>
         <p:txBody>
           <a:bodyPr wrap="square">
-            <a:normAutofit/>
+            <a:noAutofit/>
           </a:bodyPr>
           <a:lstStyle/>
           <a:p>
@@ -16123,7 +16123,7 @@
         </p:spPr>
         <p:txBody>
           <a:bodyPr wrap="square">
-            <a:normAutofit/>
+            <a:noAutofit/>
           </a:bodyPr>
           <a:lstStyle/>
           <a:p>
@@ -16158,7 +16158,7 @@
         </p:spPr>
         <p:txBody>
           <a:bodyPr wrap="square">
-            <a:normAutofit/>
+            <a:noAutofit/>
           </a:bodyPr>
           <a:lstStyle/>
           <a:p>
@@ -16193,7 +16193,7 @@
         </p:spPr>
         <p:txBody>
           <a:bodyPr wrap="square">
-            <a:normAutofit/>
+            <a:noAutofit/>
           </a:bodyPr>
           <a:lstStyle/>
           <a:p>
@@ -16368,7 +16368,7 @@
         </p:spPr>
         <p:txBody>
           <a:bodyPr wrap="square">
-            <a:normAutofit/>
+            <a:noAutofit/>
           </a:bodyPr>
           <a:lstStyle/>
           <a:p>
@@ -16403,7 +16403,7 @@
         </p:spPr>
         <p:txBody>
           <a:bodyPr wrap="square">
-            <a:normAutofit/>
+            <a:noAutofit/>
           </a:bodyPr>
           <a:lstStyle/>
           <a:p>
@@ -16438,7 +16438,7 @@
         </p:spPr>
         <p:txBody>
           <a:bodyPr wrap="square">
-            <a:normAutofit/>
+            <a:noAutofit/>
           </a:bodyPr>
           <a:lstStyle/>
           <a:p>
@@ -16613,7 +16613,7 @@
         </p:spPr>
         <p:txBody>
           <a:bodyPr wrap="square">
-            <a:normAutofit/>
+            <a:noAutofit/>
           </a:bodyPr>
           <a:lstStyle/>
           <a:p>
@@ -16648,7 +16648,7 @@
         </p:spPr>
         <p:txBody>
           <a:bodyPr wrap="square">
-            <a:normAutofit/>
+            <a:noAutofit/>
           </a:bodyPr>
           <a:lstStyle/>
           <a:p>
@@ -16683,7 +16683,7 @@
         </p:spPr>
         <p:txBody>
           <a:bodyPr wrap="square">
-            <a:normAutofit/>
+            <a:noAutofit/>
           </a:bodyPr>
           <a:lstStyle/>
           <a:p>
@@ -16917,7 +16917,7 @@
         </p:spPr>
         <p:txBody>
           <a:bodyPr wrap="square">
-            <a:normAutofit/>
+            <a:noAutofit/>
           </a:bodyPr>
           <a:lstStyle/>
           <a:p>
@@ -16952,7 +16952,7 @@
         </p:spPr>
         <p:txBody>
           <a:bodyPr wrap="square">
-            <a:normAutofit/>
+            <a:noAutofit/>
           </a:bodyPr>
           <a:lstStyle/>
           <a:p>
@@ -17073,7 +17073,7 @@
         </p:spPr>
         <p:txBody>
           <a:bodyPr wrap="square">
-            <a:normAutofit/>
+            <a:noAutofit/>
           </a:bodyPr>
           <a:lstStyle/>
           <a:p>
@@ -17108,7 +17108,7 @@
         </p:spPr>
         <p:txBody>
           <a:bodyPr wrap="square">
-            <a:normAutofit/>
+            <a:noAutofit/>
           </a:bodyPr>
           <a:lstStyle/>
           <a:p>
@@ -17254,7 +17254,7 @@
         </p:spPr>
         <p:txBody>
           <a:bodyPr wrap="square">
-            <a:normAutofit/>
+            <a:noAutofit/>
           </a:bodyPr>
           <a:lstStyle/>
           <a:p>
@@ -17289,7 +17289,7 @@
         </p:spPr>
         <p:txBody>
           <a:bodyPr wrap="square">
-            <a:normAutofit/>
+            <a:noAutofit/>
           </a:bodyPr>
           <a:lstStyle/>
           <a:p>
@@ -17467,7 +17467,7 @@
         </p:spPr>
         <p:txBody>
           <a:bodyPr wrap="square">
-            <a:normAutofit/>
+            <a:noAutofit/>
           </a:bodyPr>
           <a:lstStyle/>
           <a:p>
@@ -17502,7 +17502,7 @@
         </p:spPr>
         <p:txBody>
           <a:bodyPr wrap="square">
-            <a:normAutofit/>
+            <a:noAutofit/>
           </a:bodyPr>
           <a:lstStyle/>
           <a:p>
@@ -17632,7 +17632,7 @@
         </p:spPr>
         <p:txBody>
           <a:bodyPr wrap="square">
-            <a:normAutofit/>
+            <a:noAutofit/>
           </a:bodyPr>
           <a:lstStyle/>
           <a:p>
@@ -17667,7 +17667,7 @@
         </p:spPr>
         <p:txBody>
           <a:bodyPr wrap="square">
-            <a:normAutofit/>
+            <a:noAutofit/>
           </a:bodyPr>
           <a:lstStyle/>
           <a:p>

--- a/Santander_Digital_Banking_Future.pptx
+++ b/Santander_Digital_Banking_Future.pptx
@@ -3197,6 +3197,84 @@
         </p:nvSpPr>
         <p:spPr>
           <a:xfrm>
+            <a:off x="10012680" y="292608"/>
+            <a:ext cx="1783080" cy="310896"/>
+          </a:xfrm>
+          <a:prstGeom prst="rect">
+            <a:avLst/>
+          </a:prstGeom>
+          <a:solidFill>
+            <a:srgbClr val="C8102E"/>
+          </a:solidFill>
+          <a:ln>
+            <a:noFill/>
+          </a:ln>
+        </p:spPr>
+        <p:style>
+          <a:lnRef idx="1">
+            <a:schemeClr val="accent1"/>
+          </a:lnRef>
+          <a:fillRef idx="3">
+            <a:schemeClr val="accent1"/>
+          </a:fillRef>
+          <a:effectRef idx="2">
+            <a:schemeClr val="accent1"/>
+          </a:effectRef>
+          <a:fontRef idx="minor">
+            <a:schemeClr val="lt1"/>
+          </a:fontRef>
+        </p:style>
+        <p:txBody>
+          <a:bodyPr rtlCol="0" anchor="ctr"/>
+          <a:lstStyle/>
+          <a:p>
+            <a:pPr algn="ctr"/>
+          </a:p>
+        </p:txBody>
+      </p:sp>
+      <p:sp>
+        <p:nvSpPr>
+          <p:cNvPr id="5" name="TextBox 4"/>
+          <p:cNvSpPr txBox="1"/>
+          <p:nvPr/>
+        </p:nvSpPr>
+        <p:spPr>
+          <a:xfrm>
+            <a:off x="10012680" y="329184"/>
+            <a:ext cx="1783080" cy="237744"/>
+          </a:xfrm>
+          <a:prstGeom prst="rect">
+            <a:avLst/>
+          </a:prstGeom>
+          <a:noFill/>
+        </p:spPr>
+        <p:txBody>
+          <a:bodyPr wrap="square">
+            <a:spAutoFit/>
+          </a:bodyPr>
+          <a:lstStyle/>
+          <a:p>
+            <a:pPr algn="ctr"/>
+            <a:r>
+              <a:rPr sz="750" b="1" i="0">
+                <a:solidFill>
+                  <a:srgbClr val="FFFFFF"/>
+                </a:solidFill>
+                <a:latin typeface="Calibri"/>
+              </a:rPr>
+              <a:t>INTERNAL · CONFIDENTIAL</a:t>
+            </a:r>
+          </a:p>
+        </p:txBody>
+      </p:sp>
+      <p:sp>
+        <p:nvSpPr>
+          <p:cNvPr id="6" name="Rectangle 5"/>
+          <p:cNvSpPr/>
+          <p:nvPr/>
+        </p:nvSpPr>
+        <p:spPr>
+          <a:xfrm>
             <a:off x="0" y="6355080"/>
             <a:ext cx="12188952" cy="502920"/>
           </a:xfrm>
@@ -3234,7 +3312,7 @@
       </p:sp>
       <p:sp>
         <p:nvSpPr>
-          <p:cNvPr id="5" name="Rectangle 4"/>
+          <p:cNvPr id="7" name="Rectangle 6"/>
           <p:cNvSpPr/>
           <p:nvPr/>
         </p:nvSpPr>
@@ -3277,7 +3355,7 @@
       </p:sp>
       <p:sp>
         <p:nvSpPr>
-          <p:cNvPr id="6" name="TextBox 5"/>
+          <p:cNvPr id="8" name="TextBox 7"/>
           <p:cNvSpPr txBox="1"/>
           <p:nvPr/>
         </p:nvSpPr>
@@ -3312,7 +3390,7 @@
       </p:sp>
       <p:sp>
         <p:nvSpPr>
-          <p:cNvPr id="7" name="TextBox 6"/>
+          <p:cNvPr id="9" name="TextBox 8"/>
           <p:cNvSpPr txBox="1"/>
           <p:nvPr/>
         </p:nvSpPr>
@@ -3347,7 +3425,7 @@
       </p:sp>
       <p:sp>
         <p:nvSpPr>
-          <p:cNvPr id="8" name="Rectangle 7"/>
+          <p:cNvPr id="10" name="Rectangle 9"/>
           <p:cNvSpPr/>
           <p:nvPr/>
         </p:nvSpPr>
@@ -3390,7 +3468,7 @@
       </p:sp>
       <p:sp>
         <p:nvSpPr>
-          <p:cNvPr id="9" name="Rectangle 8"/>
+          <p:cNvPr id="11" name="Rectangle 10"/>
           <p:cNvSpPr/>
           <p:nvPr/>
         </p:nvSpPr>
@@ -3433,7 +3511,7 @@
       </p:sp>
       <p:sp>
         <p:nvSpPr>
-          <p:cNvPr id="10" name="TextBox 9"/>
+          <p:cNvPr id="12" name="TextBox 11"/>
           <p:cNvSpPr txBox="1"/>
           <p:nvPr/>
         </p:nvSpPr>
@@ -3468,7 +3546,7 @@
       </p:sp>
       <p:sp>
         <p:nvSpPr>
-          <p:cNvPr id="11" name="TextBox 10"/>
+          <p:cNvPr id="13" name="TextBox 12"/>
           <p:cNvSpPr txBox="1"/>
           <p:nvPr/>
         </p:nvSpPr>
@@ -3503,7 +3581,7 @@
       </p:sp>
       <p:sp>
         <p:nvSpPr>
-          <p:cNvPr id="12" name="Rectangle 11"/>
+          <p:cNvPr id="14" name="Rectangle 13"/>
           <p:cNvSpPr/>
           <p:nvPr/>
         </p:nvSpPr>
@@ -3546,7 +3624,7 @@
       </p:sp>
       <p:sp>
         <p:nvSpPr>
-          <p:cNvPr id="13" name="TextBox 12"/>
+          <p:cNvPr id="15" name="TextBox 14"/>
           <p:cNvSpPr txBox="1"/>
           <p:nvPr/>
         </p:nvSpPr>
@@ -3581,7 +3659,7 @@
       </p:sp>
       <p:sp>
         <p:nvSpPr>
-          <p:cNvPr id="14" name="TextBox 13"/>
+          <p:cNvPr id="16" name="TextBox 15"/>
           <p:cNvSpPr txBox="1"/>
           <p:nvPr/>
         </p:nvSpPr>
@@ -3616,7 +3694,7 @@
       </p:sp>
       <p:sp>
         <p:nvSpPr>
-          <p:cNvPr id="15" name="Rectangle 14"/>
+          <p:cNvPr id="17" name="Rectangle 16"/>
           <p:cNvSpPr/>
           <p:nvPr/>
         </p:nvSpPr>
@@ -3659,7 +3737,7 @@
       </p:sp>
       <p:sp>
         <p:nvSpPr>
-          <p:cNvPr id="16" name="TextBox 15"/>
+          <p:cNvPr id="18" name="TextBox 17"/>
           <p:cNvSpPr txBox="1"/>
           <p:nvPr/>
         </p:nvSpPr>
@@ -3694,7 +3772,7 @@
       </p:sp>
       <p:sp>
         <p:nvSpPr>
-          <p:cNvPr id="17" name="TextBox 16"/>
+          <p:cNvPr id="19" name="TextBox 18"/>
           <p:cNvSpPr txBox="1"/>
           <p:nvPr/>
         </p:nvSpPr>
@@ -3729,7 +3807,7 @@
       </p:sp>
       <p:sp>
         <p:nvSpPr>
-          <p:cNvPr id="18" name="Rectangle 17"/>
+          <p:cNvPr id="20" name="Rectangle 19"/>
           <p:cNvSpPr/>
           <p:nvPr/>
         </p:nvSpPr>
@@ -3772,7 +3850,7 @@
       </p:sp>
       <p:sp>
         <p:nvSpPr>
-          <p:cNvPr id="19" name="TextBox 18"/>
+          <p:cNvPr id="21" name="TextBox 20"/>
           <p:cNvSpPr txBox="1"/>
           <p:nvPr/>
         </p:nvSpPr>
@@ -3807,7 +3885,7 @@
       </p:sp>
       <p:sp>
         <p:nvSpPr>
-          <p:cNvPr id="20" name="TextBox 19"/>
+          <p:cNvPr id="22" name="TextBox 21"/>
           <p:cNvSpPr txBox="1"/>
           <p:nvPr/>
         </p:nvSpPr>
@@ -3842,7 +3920,7 @@
       </p:sp>
       <p:sp>
         <p:nvSpPr>
-          <p:cNvPr id="21" name="TextBox 20"/>
+          <p:cNvPr id="23" name="TextBox 22"/>
           <p:cNvSpPr txBox="1"/>
           <p:nvPr/>
         </p:nvSpPr>
@@ -5938,20 +6016,55 @@
         <p:spPr>
           <a:xfrm>
             <a:off x="411480" y="6620256"/>
-            <a:ext cx="11365992" cy="201168"/>
-          </a:xfrm>
-          <a:prstGeom prst="rect">
-            <a:avLst/>
-          </a:prstGeom>
-          <a:noFill/>
-        </p:spPr>
-        <p:txBody>
-          <a:bodyPr wrap="square">
-            <a:spAutoFit/>
-          </a:bodyPr>
-          <a:lstStyle/>
-          <a:p>
-            <a:pPr algn="ctr"/>
+            <a:ext cx="3657600" cy="201168"/>
+          </a:xfrm>
+          <a:prstGeom prst="rect">
+            <a:avLst/>
+          </a:prstGeom>
+          <a:noFill/>
+        </p:spPr>
+        <p:txBody>
+          <a:bodyPr wrap="square">
+            <a:spAutoFit/>
+          </a:bodyPr>
+          <a:lstStyle/>
+          <a:p>
+            <a:pPr algn="l"/>
+            <a:r>
+              <a:rPr sz="750" b="1" i="0">
+                <a:solidFill>
+                  <a:srgbClr val="FECACA"/>
+                </a:solidFill>
+                <a:latin typeface="Calibri"/>
+              </a:rPr>
+              <a:t>INTERNAL · CONFIDENTIAL</a:t>
+            </a:r>
+          </a:p>
+        </p:txBody>
+      </p:sp>
+      <p:sp>
+        <p:nvSpPr>
+          <p:cNvPr id="55" name="TextBox 54"/>
+          <p:cNvSpPr txBox="1"/>
+          <p:nvPr/>
+        </p:nvSpPr>
+        <p:spPr>
+          <a:xfrm>
+            <a:off x="3657600" y="6620256"/>
+            <a:ext cx="8119872" cy="201168"/>
+          </a:xfrm>
+          <a:prstGeom prst="rect">
+            <a:avLst/>
+          </a:prstGeom>
+          <a:noFill/>
+        </p:spPr>
+        <p:txBody>
+          <a:bodyPr wrap="square">
+            <a:spAutoFit/>
+          </a:bodyPr>
+          <a:lstStyle/>
+          <a:p>
+            <a:pPr algn="r"/>
             <a:r>
               <a:rPr sz="750" b="0" i="1">
                 <a:solidFill>
@@ -5966,7 +6079,7 @@
       </p:sp>
       <p:sp>
         <p:nvSpPr>
-          <p:cNvPr id="55" name="TextBox 54"/>
+          <p:cNvPr id="56" name="TextBox 55"/>
           <p:cNvSpPr txBox="1"/>
           <p:nvPr/>
         </p:nvSpPr>
@@ -7027,20 +7140,55 @@
         <p:spPr>
           <a:xfrm>
             <a:off x="411480" y="6620256"/>
-            <a:ext cx="11365992" cy="201168"/>
-          </a:xfrm>
-          <a:prstGeom prst="rect">
-            <a:avLst/>
-          </a:prstGeom>
-          <a:noFill/>
-        </p:spPr>
-        <p:txBody>
-          <a:bodyPr wrap="square">
-            <a:spAutoFit/>
-          </a:bodyPr>
-          <a:lstStyle/>
-          <a:p>
-            <a:pPr algn="ctr"/>
+            <a:ext cx="3657600" cy="201168"/>
+          </a:xfrm>
+          <a:prstGeom prst="rect">
+            <a:avLst/>
+          </a:prstGeom>
+          <a:noFill/>
+        </p:spPr>
+        <p:txBody>
+          <a:bodyPr wrap="square">
+            <a:spAutoFit/>
+          </a:bodyPr>
+          <a:lstStyle/>
+          <a:p>
+            <a:pPr algn="l"/>
+            <a:r>
+              <a:rPr sz="750" b="1" i="0">
+                <a:solidFill>
+                  <a:srgbClr val="C8102E"/>
+                </a:solidFill>
+                <a:latin typeface="Calibri"/>
+              </a:rPr>
+              <a:t>INTERNAL · CONFIDENTIAL</a:t>
+            </a:r>
+          </a:p>
+        </p:txBody>
+      </p:sp>
+      <p:sp>
+        <p:nvSpPr>
+          <p:cNvPr id="28" name="TextBox 27"/>
+          <p:cNvSpPr txBox="1"/>
+          <p:nvPr/>
+        </p:nvSpPr>
+        <p:spPr>
+          <a:xfrm>
+            <a:off x="3657600" y="6620256"/>
+            <a:ext cx="8119872" cy="201168"/>
+          </a:xfrm>
+          <a:prstGeom prst="rect">
+            <a:avLst/>
+          </a:prstGeom>
+          <a:noFill/>
+        </p:spPr>
+        <p:txBody>
+          <a:bodyPr wrap="square">
+            <a:spAutoFit/>
+          </a:bodyPr>
+          <a:lstStyle/>
+          <a:p>
+            <a:pPr algn="r"/>
             <a:r>
               <a:rPr sz="750" b="0" i="1">
                 <a:solidFill>
@@ -7055,7 +7203,7 @@
       </p:sp>
       <p:sp>
         <p:nvSpPr>
-          <p:cNvPr id="28" name="TextBox 27"/>
+          <p:cNvPr id="29" name="TextBox 28"/>
           <p:cNvSpPr txBox="1"/>
           <p:nvPr/>
         </p:nvSpPr>
@@ -8917,20 +9065,55 @@
         <p:spPr>
           <a:xfrm>
             <a:off x="411480" y="6620256"/>
-            <a:ext cx="11365992" cy="201168"/>
-          </a:xfrm>
-          <a:prstGeom prst="rect">
-            <a:avLst/>
-          </a:prstGeom>
-          <a:noFill/>
-        </p:spPr>
-        <p:txBody>
-          <a:bodyPr wrap="square">
-            <a:spAutoFit/>
-          </a:bodyPr>
-          <a:lstStyle/>
-          <a:p>
-            <a:pPr algn="ctr"/>
+            <a:ext cx="3657600" cy="201168"/>
+          </a:xfrm>
+          <a:prstGeom prst="rect">
+            <a:avLst/>
+          </a:prstGeom>
+          <a:noFill/>
+        </p:spPr>
+        <p:txBody>
+          <a:bodyPr wrap="square">
+            <a:spAutoFit/>
+          </a:bodyPr>
+          <a:lstStyle/>
+          <a:p>
+            <a:pPr algn="l"/>
+            <a:r>
+              <a:rPr sz="750" b="1" i="0">
+                <a:solidFill>
+                  <a:srgbClr val="C8102E"/>
+                </a:solidFill>
+                <a:latin typeface="Calibri"/>
+              </a:rPr>
+              <a:t>INTERNAL · CONFIDENTIAL</a:t>
+            </a:r>
+          </a:p>
+        </p:txBody>
+      </p:sp>
+      <p:sp>
+        <p:nvSpPr>
+          <p:cNvPr id="49" name="TextBox 48"/>
+          <p:cNvSpPr txBox="1"/>
+          <p:nvPr/>
+        </p:nvSpPr>
+        <p:spPr>
+          <a:xfrm>
+            <a:off x="3657600" y="6620256"/>
+            <a:ext cx="8119872" cy="201168"/>
+          </a:xfrm>
+          <a:prstGeom prst="rect">
+            <a:avLst/>
+          </a:prstGeom>
+          <a:noFill/>
+        </p:spPr>
+        <p:txBody>
+          <a:bodyPr wrap="square">
+            <a:spAutoFit/>
+          </a:bodyPr>
+          <a:lstStyle/>
+          <a:p>
+            <a:pPr algn="r"/>
             <a:r>
               <a:rPr sz="750" b="0" i="1">
                 <a:solidFill>
@@ -8945,7 +9128,7 @@
       </p:sp>
       <p:sp>
         <p:nvSpPr>
-          <p:cNvPr id="49" name="TextBox 48"/>
+          <p:cNvPr id="50" name="TextBox 49"/>
           <p:cNvSpPr txBox="1"/>
           <p:nvPr/>
         </p:nvSpPr>
@@ -10552,20 +10735,55 @@
         <p:spPr>
           <a:xfrm>
             <a:off x="411480" y="6620256"/>
-            <a:ext cx="11365992" cy="201168"/>
-          </a:xfrm>
-          <a:prstGeom prst="rect">
-            <a:avLst/>
-          </a:prstGeom>
-          <a:noFill/>
-        </p:spPr>
-        <p:txBody>
-          <a:bodyPr wrap="square">
-            <a:spAutoFit/>
-          </a:bodyPr>
-          <a:lstStyle/>
-          <a:p>
-            <a:pPr algn="ctr"/>
+            <a:ext cx="3657600" cy="201168"/>
+          </a:xfrm>
+          <a:prstGeom prst="rect">
+            <a:avLst/>
+          </a:prstGeom>
+          <a:noFill/>
+        </p:spPr>
+        <p:txBody>
+          <a:bodyPr wrap="square">
+            <a:spAutoFit/>
+          </a:bodyPr>
+          <a:lstStyle/>
+          <a:p>
+            <a:pPr algn="l"/>
+            <a:r>
+              <a:rPr sz="750" b="1" i="0">
+                <a:solidFill>
+                  <a:srgbClr val="FECACA"/>
+                </a:solidFill>
+                <a:latin typeface="Calibri"/>
+              </a:rPr>
+              <a:t>INTERNAL · CONFIDENTIAL</a:t>
+            </a:r>
+          </a:p>
+        </p:txBody>
+      </p:sp>
+      <p:sp>
+        <p:nvSpPr>
+          <p:cNvPr id="43" name="TextBox 42"/>
+          <p:cNvSpPr txBox="1"/>
+          <p:nvPr/>
+        </p:nvSpPr>
+        <p:spPr>
+          <a:xfrm>
+            <a:off x="3657600" y="6620256"/>
+            <a:ext cx="8119872" cy="201168"/>
+          </a:xfrm>
+          <a:prstGeom prst="rect">
+            <a:avLst/>
+          </a:prstGeom>
+          <a:noFill/>
+        </p:spPr>
+        <p:txBody>
+          <a:bodyPr wrap="square">
+            <a:spAutoFit/>
+          </a:bodyPr>
+          <a:lstStyle/>
+          <a:p>
+            <a:pPr algn="r"/>
             <a:r>
               <a:rPr sz="750" b="0" i="1">
                 <a:solidFill>
@@ -10580,7 +10798,7 @@
       </p:sp>
       <p:sp>
         <p:nvSpPr>
-          <p:cNvPr id="43" name="TextBox 42"/>
+          <p:cNvPr id="44" name="TextBox 43"/>
           <p:cNvSpPr txBox="1"/>
           <p:nvPr/>
         </p:nvSpPr>
@@ -13133,20 +13351,55 @@
         <p:spPr>
           <a:xfrm>
             <a:off x="411480" y="6620256"/>
-            <a:ext cx="11365992" cy="201168"/>
-          </a:xfrm>
-          <a:prstGeom prst="rect">
-            <a:avLst/>
-          </a:prstGeom>
-          <a:noFill/>
-        </p:spPr>
-        <p:txBody>
-          <a:bodyPr wrap="square">
-            <a:spAutoFit/>
-          </a:bodyPr>
-          <a:lstStyle/>
-          <a:p>
-            <a:pPr algn="ctr"/>
+            <a:ext cx="3657600" cy="201168"/>
+          </a:xfrm>
+          <a:prstGeom prst="rect">
+            <a:avLst/>
+          </a:prstGeom>
+          <a:noFill/>
+        </p:spPr>
+        <p:txBody>
+          <a:bodyPr wrap="square">
+            <a:spAutoFit/>
+          </a:bodyPr>
+          <a:lstStyle/>
+          <a:p>
+            <a:pPr algn="l"/>
+            <a:r>
+              <a:rPr sz="750" b="1" i="0">
+                <a:solidFill>
+                  <a:srgbClr val="C8102E"/>
+                </a:solidFill>
+                <a:latin typeface="Calibri"/>
+              </a:rPr>
+              <a:t>INTERNAL · CONFIDENTIAL</a:t>
+            </a:r>
+          </a:p>
+        </p:txBody>
+      </p:sp>
+      <p:sp>
+        <p:nvSpPr>
+          <p:cNvPr id="66" name="TextBox 65"/>
+          <p:cNvSpPr txBox="1"/>
+          <p:nvPr/>
+        </p:nvSpPr>
+        <p:spPr>
+          <a:xfrm>
+            <a:off x="3657600" y="6620256"/>
+            <a:ext cx="8119872" cy="201168"/>
+          </a:xfrm>
+          <a:prstGeom prst="rect">
+            <a:avLst/>
+          </a:prstGeom>
+          <a:noFill/>
+        </p:spPr>
+        <p:txBody>
+          <a:bodyPr wrap="square">
+            <a:spAutoFit/>
+          </a:bodyPr>
+          <a:lstStyle/>
+          <a:p>
+            <a:pPr algn="r"/>
             <a:r>
               <a:rPr sz="750" b="0" i="1">
                 <a:solidFill>
@@ -13161,7 +13414,7 @@
       </p:sp>
       <p:sp>
         <p:nvSpPr>
-          <p:cNvPr id="66" name="TextBox 65"/>
+          <p:cNvPr id="67" name="TextBox 66"/>
           <p:cNvSpPr txBox="1"/>
           <p:nvPr/>
         </p:nvSpPr>
@@ -16221,20 +16474,55 @@
         <p:spPr>
           <a:xfrm>
             <a:off x="411480" y="6620256"/>
-            <a:ext cx="11365992" cy="201168"/>
-          </a:xfrm>
-          <a:prstGeom prst="rect">
-            <a:avLst/>
-          </a:prstGeom>
-          <a:noFill/>
-        </p:spPr>
-        <p:txBody>
-          <a:bodyPr wrap="square">
-            <a:spAutoFit/>
-          </a:bodyPr>
-          <a:lstStyle/>
-          <a:p>
-            <a:pPr algn="ctr"/>
+            <a:ext cx="3657600" cy="201168"/>
+          </a:xfrm>
+          <a:prstGeom prst="rect">
+            <a:avLst/>
+          </a:prstGeom>
+          <a:noFill/>
+        </p:spPr>
+        <p:txBody>
+          <a:bodyPr wrap="square">
+            <a:spAutoFit/>
+          </a:bodyPr>
+          <a:lstStyle/>
+          <a:p>
+            <a:pPr algn="l"/>
+            <a:r>
+              <a:rPr sz="750" b="1" i="0">
+                <a:solidFill>
+                  <a:srgbClr val="C8102E"/>
+                </a:solidFill>
+                <a:latin typeface="Calibri"/>
+              </a:rPr>
+              <a:t>INTERNAL · CONFIDENTIAL</a:t>
+            </a:r>
+          </a:p>
+        </p:txBody>
+      </p:sp>
+      <p:sp>
+        <p:nvSpPr>
+          <p:cNvPr id="81" name="TextBox 80"/>
+          <p:cNvSpPr txBox="1"/>
+          <p:nvPr/>
+        </p:nvSpPr>
+        <p:spPr>
+          <a:xfrm>
+            <a:off x="3657600" y="6620256"/>
+            <a:ext cx="8119872" cy="201168"/>
+          </a:xfrm>
+          <a:prstGeom prst="rect">
+            <a:avLst/>
+          </a:prstGeom>
+          <a:noFill/>
+        </p:spPr>
+        <p:txBody>
+          <a:bodyPr wrap="square">
+            <a:spAutoFit/>
+          </a:bodyPr>
+          <a:lstStyle/>
+          <a:p>
+            <a:pPr algn="r"/>
             <a:r>
               <a:rPr sz="750" b="0" i="1">
                 <a:solidFill>
@@ -16249,7 +16537,7 @@
       </p:sp>
       <p:sp>
         <p:nvSpPr>
-          <p:cNvPr id="81" name="TextBox 80"/>
+          <p:cNvPr id="82" name="TextBox 81"/>
           <p:cNvSpPr txBox="1"/>
           <p:nvPr/>
         </p:nvSpPr>
@@ -18629,20 +18917,55 @@
         <p:spPr>
           <a:xfrm>
             <a:off x="411480" y="6620256"/>
-            <a:ext cx="11365992" cy="201168"/>
-          </a:xfrm>
-          <a:prstGeom prst="rect">
-            <a:avLst/>
-          </a:prstGeom>
-          <a:noFill/>
-        </p:spPr>
-        <p:txBody>
-          <a:bodyPr wrap="square">
-            <a:spAutoFit/>
-          </a:bodyPr>
-          <a:lstStyle/>
-          <a:p>
-            <a:pPr algn="ctr"/>
+            <a:ext cx="3657600" cy="201168"/>
+          </a:xfrm>
+          <a:prstGeom prst="rect">
+            <a:avLst/>
+          </a:prstGeom>
+          <a:noFill/>
+        </p:spPr>
+        <p:txBody>
+          <a:bodyPr wrap="square">
+            <a:spAutoFit/>
+          </a:bodyPr>
+          <a:lstStyle/>
+          <a:p>
+            <a:pPr algn="l"/>
+            <a:r>
+              <a:rPr sz="750" b="1" i="0">
+                <a:solidFill>
+                  <a:srgbClr val="C8102E"/>
+                </a:solidFill>
+                <a:latin typeface="Calibri"/>
+              </a:rPr>
+              <a:t>INTERNAL · CONFIDENTIAL</a:t>
+            </a:r>
+          </a:p>
+        </p:txBody>
+      </p:sp>
+      <p:sp>
+        <p:nvSpPr>
+          <p:cNvPr id="30" name="TextBox 29"/>
+          <p:cNvSpPr txBox="1"/>
+          <p:nvPr/>
+        </p:nvSpPr>
+        <p:spPr>
+          <a:xfrm>
+            <a:off x="3657600" y="6620256"/>
+            <a:ext cx="8119872" cy="201168"/>
+          </a:xfrm>
+          <a:prstGeom prst="rect">
+            <a:avLst/>
+          </a:prstGeom>
+          <a:noFill/>
+        </p:spPr>
+        <p:txBody>
+          <a:bodyPr wrap="square">
+            <a:spAutoFit/>
+          </a:bodyPr>
+          <a:lstStyle/>
+          <a:p>
+            <a:pPr algn="r"/>
             <a:r>
               <a:rPr sz="750" b="0" i="1">
                 <a:solidFill>
@@ -18657,7 +18980,7 @@
       </p:sp>
       <p:sp>
         <p:nvSpPr>
-          <p:cNvPr id="30" name="TextBox 29"/>
+          <p:cNvPr id="31" name="TextBox 30"/>
           <p:cNvSpPr txBox="1"/>
           <p:nvPr/>
         </p:nvSpPr>
@@ -19680,20 +20003,55 @@
         <p:spPr>
           <a:xfrm>
             <a:off x="411480" y="6620256"/>
-            <a:ext cx="11365992" cy="201168"/>
-          </a:xfrm>
-          <a:prstGeom prst="rect">
-            <a:avLst/>
-          </a:prstGeom>
-          <a:noFill/>
-        </p:spPr>
-        <p:txBody>
-          <a:bodyPr wrap="square">
-            <a:spAutoFit/>
-          </a:bodyPr>
-          <a:lstStyle/>
-          <a:p>
-            <a:pPr algn="ctr"/>
+            <a:ext cx="3657600" cy="201168"/>
+          </a:xfrm>
+          <a:prstGeom prst="rect">
+            <a:avLst/>
+          </a:prstGeom>
+          <a:noFill/>
+        </p:spPr>
+        <p:txBody>
+          <a:bodyPr wrap="square">
+            <a:spAutoFit/>
+          </a:bodyPr>
+          <a:lstStyle/>
+          <a:p>
+            <a:pPr algn="l"/>
+            <a:r>
+              <a:rPr sz="750" b="1" i="0">
+                <a:solidFill>
+                  <a:srgbClr val="FECACA"/>
+                </a:solidFill>
+                <a:latin typeface="Calibri"/>
+              </a:rPr>
+              <a:t>INTERNAL · CONFIDENTIAL</a:t>
+            </a:r>
+          </a:p>
+        </p:txBody>
+      </p:sp>
+      <p:sp>
+        <p:nvSpPr>
+          <p:cNvPr id="28" name="TextBox 27"/>
+          <p:cNvSpPr txBox="1"/>
+          <p:nvPr/>
+        </p:nvSpPr>
+        <p:spPr>
+          <a:xfrm>
+            <a:off x="3657600" y="6620256"/>
+            <a:ext cx="8119872" cy="201168"/>
+          </a:xfrm>
+          <a:prstGeom prst="rect">
+            <a:avLst/>
+          </a:prstGeom>
+          <a:noFill/>
+        </p:spPr>
+        <p:txBody>
+          <a:bodyPr wrap="square">
+            <a:spAutoFit/>
+          </a:bodyPr>
+          <a:lstStyle/>
+          <a:p>
+            <a:pPr algn="r"/>
             <a:r>
               <a:rPr sz="750" b="0" i="1">
                 <a:solidFill>
@@ -19708,7 +20066,7 @@
       </p:sp>
       <p:sp>
         <p:nvSpPr>
-          <p:cNvPr id="28" name="TextBox 27"/>
+          <p:cNvPr id="29" name="TextBox 28"/>
           <p:cNvSpPr txBox="1"/>
           <p:nvPr/>
         </p:nvSpPr>
@@ -24045,20 +24403,55 @@
         <p:spPr>
           <a:xfrm>
             <a:off x="411480" y="6620256"/>
-            <a:ext cx="11365992" cy="201168"/>
-          </a:xfrm>
-          <a:prstGeom prst="rect">
-            <a:avLst/>
-          </a:prstGeom>
-          <a:noFill/>
-        </p:spPr>
-        <p:txBody>
-          <a:bodyPr wrap="square">
-            <a:spAutoFit/>
-          </a:bodyPr>
-          <a:lstStyle/>
-          <a:p>
-            <a:pPr algn="ctr"/>
+            <a:ext cx="3657600" cy="201168"/>
+          </a:xfrm>
+          <a:prstGeom prst="rect">
+            <a:avLst/>
+          </a:prstGeom>
+          <a:noFill/>
+        </p:spPr>
+        <p:txBody>
+          <a:bodyPr wrap="square">
+            <a:spAutoFit/>
+          </a:bodyPr>
+          <a:lstStyle/>
+          <a:p>
+            <a:pPr algn="l"/>
+            <a:r>
+              <a:rPr sz="750" b="1" i="0">
+                <a:solidFill>
+                  <a:srgbClr val="C8102E"/>
+                </a:solidFill>
+                <a:latin typeface="Calibri"/>
+              </a:rPr>
+              <a:t>INTERNAL · CONFIDENTIAL</a:t>
+            </a:r>
+          </a:p>
+        </p:txBody>
+      </p:sp>
+      <p:sp>
+        <p:nvSpPr>
+          <p:cNvPr id="99" name="TextBox 98"/>
+          <p:cNvSpPr txBox="1"/>
+          <p:nvPr/>
+        </p:nvSpPr>
+        <p:spPr>
+          <a:xfrm>
+            <a:off x="3657600" y="6620256"/>
+            <a:ext cx="8119872" cy="201168"/>
+          </a:xfrm>
+          <a:prstGeom prst="rect">
+            <a:avLst/>
+          </a:prstGeom>
+          <a:noFill/>
+        </p:spPr>
+        <p:txBody>
+          <a:bodyPr wrap="square">
+            <a:spAutoFit/>
+          </a:bodyPr>
+          <a:lstStyle/>
+          <a:p>
+            <a:pPr algn="r"/>
             <a:r>
               <a:rPr sz="750" b="0" i="1">
                 <a:solidFill>
@@ -24073,7 +24466,7 @@
       </p:sp>
       <p:sp>
         <p:nvSpPr>
-          <p:cNvPr id="99" name="TextBox 98"/>
+          <p:cNvPr id="100" name="TextBox 99"/>
           <p:cNvSpPr txBox="1"/>
           <p:nvPr/>
         </p:nvSpPr>
@@ -25565,20 +25958,55 @@
         <p:spPr>
           <a:xfrm>
             <a:off x="411480" y="6620256"/>
-            <a:ext cx="11365992" cy="201168"/>
-          </a:xfrm>
-          <a:prstGeom prst="rect">
-            <a:avLst/>
-          </a:prstGeom>
-          <a:noFill/>
-        </p:spPr>
-        <p:txBody>
-          <a:bodyPr wrap="square">
-            <a:spAutoFit/>
-          </a:bodyPr>
-          <a:lstStyle/>
-          <a:p>
-            <a:pPr algn="ctr"/>
+            <a:ext cx="3657600" cy="201168"/>
+          </a:xfrm>
+          <a:prstGeom prst="rect">
+            <a:avLst/>
+          </a:prstGeom>
+          <a:noFill/>
+        </p:spPr>
+        <p:txBody>
+          <a:bodyPr wrap="square">
+            <a:spAutoFit/>
+          </a:bodyPr>
+          <a:lstStyle/>
+          <a:p>
+            <a:pPr algn="l"/>
+            <a:r>
+              <a:rPr sz="750" b="1" i="0">
+                <a:solidFill>
+                  <a:srgbClr val="C8102E"/>
+                </a:solidFill>
+                <a:latin typeface="Calibri"/>
+              </a:rPr>
+              <a:t>INTERNAL · CONFIDENTIAL</a:t>
+            </a:r>
+          </a:p>
+        </p:txBody>
+      </p:sp>
+      <p:sp>
+        <p:nvSpPr>
+          <p:cNvPr id="39" name="TextBox 38"/>
+          <p:cNvSpPr txBox="1"/>
+          <p:nvPr/>
+        </p:nvSpPr>
+        <p:spPr>
+          <a:xfrm>
+            <a:off x="3657600" y="6620256"/>
+            <a:ext cx="8119872" cy="201168"/>
+          </a:xfrm>
+          <a:prstGeom prst="rect">
+            <a:avLst/>
+          </a:prstGeom>
+          <a:noFill/>
+        </p:spPr>
+        <p:txBody>
+          <a:bodyPr wrap="square">
+            <a:spAutoFit/>
+          </a:bodyPr>
+          <a:lstStyle/>
+          <a:p>
+            <a:pPr algn="r"/>
             <a:r>
               <a:rPr sz="750" b="0" i="1">
                 <a:solidFill>
@@ -25593,7 +26021,7 @@
       </p:sp>
       <p:sp>
         <p:nvSpPr>
-          <p:cNvPr id="39" name="TextBox 38"/>
+          <p:cNvPr id="40" name="TextBox 39"/>
           <p:cNvSpPr txBox="1"/>
           <p:nvPr/>
         </p:nvSpPr>
@@ -27462,20 +27890,55 @@
         <p:spPr>
           <a:xfrm>
             <a:off x="411480" y="6620256"/>
-            <a:ext cx="11365992" cy="201168"/>
-          </a:xfrm>
-          <a:prstGeom prst="rect">
-            <a:avLst/>
-          </a:prstGeom>
-          <a:noFill/>
-        </p:spPr>
-        <p:txBody>
-          <a:bodyPr wrap="square">
-            <a:spAutoFit/>
-          </a:bodyPr>
-          <a:lstStyle/>
-          <a:p>
-            <a:pPr algn="ctr"/>
+            <a:ext cx="3657600" cy="201168"/>
+          </a:xfrm>
+          <a:prstGeom prst="rect">
+            <a:avLst/>
+          </a:prstGeom>
+          <a:noFill/>
+        </p:spPr>
+        <p:txBody>
+          <a:bodyPr wrap="square">
+            <a:spAutoFit/>
+          </a:bodyPr>
+          <a:lstStyle/>
+          <a:p>
+            <a:pPr algn="l"/>
+            <a:r>
+              <a:rPr sz="750" b="1" i="0">
+                <a:solidFill>
+                  <a:srgbClr val="FECACA"/>
+                </a:solidFill>
+                <a:latin typeface="Calibri"/>
+              </a:rPr>
+              <a:t>INTERNAL · CONFIDENTIAL</a:t>
+            </a:r>
+          </a:p>
+        </p:txBody>
+      </p:sp>
+      <p:sp>
+        <p:nvSpPr>
+          <p:cNvPr id="49" name="TextBox 48"/>
+          <p:cNvSpPr txBox="1"/>
+          <p:nvPr/>
+        </p:nvSpPr>
+        <p:spPr>
+          <a:xfrm>
+            <a:off x="3657600" y="6620256"/>
+            <a:ext cx="8119872" cy="201168"/>
+          </a:xfrm>
+          <a:prstGeom prst="rect">
+            <a:avLst/>
+          </a:prstGeom>
+          <a:noFill/>
+        </p:spPr>
+        <p:txBody>
+          <a:bodyPr wrap="square">
+            <a:spAutoFit/>
+          </a:bodyPr>
+          <a:lstStyle/>
+          <a:p>
+            <a:pPr algn="r"/>
             <a:r>
               <a:rPr sz="750" b="0" i="1">
                 <a:solidFill>
@@ -27490,7 +27953,7 @@
       </p:sp>
       <p:sp>
         <p:nvSpPr>
-          <p:cNvPr id="49" name="TextBox 48"/>
+          <p:cNvPr id="50" name="TextBox 49"/>
           <p:cNvSpPr txBox="1"/>
           <p:nvPr/>
         </p:nvSpPr>
@@ -31168,20 +31631,55 @@
         <p:spPr>
           <a:xfrm>
             <a:off x="411480" y="6620256"/>
-            <a:ext cx="11365992" cy="201168"/>
-          </a:xfrm>
-          <a:prstGeom prst="rect">
-            <a:avLst/>
-          </a:prstGeom>
-          <a:noFill/>
-        </p:spPr>
-        <p:txBody>
-          <a:bodyPr wrap="square">
-            <a:spAutoFit/>
-          </a:bodyPr>
-          <a:lstStyle/>
-          <a:p>
-            <a:pPr algn="ctr"/>
+            <a:ext cx="3657600" cy="201168"/>
+          </a:xfrm>
+          <a:prstGeom prst="rect">
+            <a:avLst/>
+          </a:prstGeom>
+          <a:noFill/>
+        </p:spPr>
+        <p:txBody>
+          <a:bodyPr wrap="square">
+            <a:spAutoFit/>
+          </a:bodyPr>
+          <a:lstStyle/>
+          <a:p>
+            <a:pPr algn="l"/>
+            <a:r>
+              <a:rPr sz="750" b="1" i="0">
+                <a:solidFill>
+                  <a:srgbClr val="C8102E"/>
+                </a:solidFill>
+                <a:latin typeface="Calibri"/>
+              </a:rPr>
+              <a:t>INTERNAL · CONFIDENTIAL</a:t>
+            </a:r>
+          </a:p>
+        </p:txBody>
+      </p:sp>
+      <p:sp>
+        <p:nvSpPr>
+          <p:cNvPr id="95" name="TextBox 94"/>
+          <p:cNvSpPr txBox="1"/>
+          <p:nvPr/>
+        </p:nvSpPr>
+        <p:spPr>
+          <a:xfrm>
+            <a:off x="3657600" y="6620256"/>
+            <a:ext cx="8119872" cy="201168"/>
+          </a:xfrm>
+          <a:prstGeom prst="rect">
+            <a:avLst/>
+          </a:prstGeom>
+          <a:noFill/>
+        </p:spPr>
+        <p:txBody>
+          <a:bodyPr wrap="square">
+            <a:spAutoFit/>
+          </a:bodyPr>
+          <a:lstStyle/>
+          <a:p>
+            <a:pPr algn="r"/>
             <a:r>
               <a:rPr sz="750" b="0" i="1">
                 <a:solidFill>
@@ -31196,7 +31694,7 @@
       </p:sp>
       <p:sp>
         <p:nvSpPr>
-          <p:cNvPr id="95" name="TextBox 94"/>
+          <p:cNvPr id="96" name="TextBox 95"/>
           <p:cNvSpPr txBox="1"/>
           <p:nvPr/>
         </p:nvSpPr>
@@ -32633,20 +33131,55 @@
         <p:spPr>
           <a:xfrm>
             <a:off x="411480" y="6620256"/>
-            <a:ext cx="11365992" cy="201168"/>
-          </a:xfrm>
-          <a:prstGeom prst="rect">
-            <a:avLst/>
-          </a:prstGeom>
-          <a:noFill/>
-        </p:spPr>
-        <p:txBody>
-          <a:bodyPr wrap="square">
-            <a:spAutoFit/>
-          </a:bodyPr>
-          <a:lstStyle/>
-          <a:p>
-            <a:pPr algn="ctr"/>
+            <a:ext cx="3657600" cy="201168"/>
+          </a:xfrm>
+          <a:prstGeom prst="rect">
+            <a:avLst/>
+          </a:prstGeom>
+          <a:noFill/>
+        </p:spPr>
+        <p:txBody>
+          <a:bodyPr wrap="square">
+            <a:spAutoFit/>
+          </a:bodyPr>
+          <a:lstStyle/>
+          <a:p>
+            <a:pPr algn="l"/>
+            <a:r>
+              <a:rPr sz="750" b="1" i="0">
+                <a:solidFill>
+                  <a:srgbClr val="C8102E"/>
+                </a:solidFill>
+                <a:latin typeface="Calibri"/>
+              </a:rPr>
+              <a:t>INTERNAL · CONFIDENTIAL</a:t>
+            </a:r>
+          </a:p>
+        </p:txBody>
+      </p:sp>
+      <p:sp>
+        <p:nvSpPr>
+          <p:cNvPr id="38" name="TextBox 37"/>
+          <p:cNvSpPr txBox="1"/>
+          <p:nvPr/>
+        </p:nvSpPr>
+        <p:spPr>
+          <a:xfrm>
+            <a:off x="3657600" y="6620256"/>
+            <a:ext cx="8119872" cy="201168"/>
+          </a:xfrm>
+          <a:prstGeom prst="rect">
+            <a:avLst/>
+          </a:prstGeom>
+          <a:noFill/>
+        </p:spPr>
+        <p:txBody>
+          <a:bodyPr wrap="square">
+            <a:spAutoFit/>
+          </a:bodyPr>
+          <a:lstStyle/>
+          <a:p>
+            <a:pPr algn="r"/>
             <a:r>
               <a:rPr sz="750" b="0" i="1">
                 <a:solidFill>
@@ -32661,7 +33194,7 @@
       </p:sp>
       <p:sp>
         <p:nvSpPr>
-          <p:cNvPr id="38" name="TextBox 37"/>
+          <p:cNvPr id="39" name="TextBox 38"/>
           <p:cNvSpPr txBox="1"/>
           <p:nvPr/>
         </p:nvSpPr>

--- a/Santander_Digital_Banking_Future.pptx
+++ b/Santander_Digital_Banking_Future.pptx
@@ -3161,7 +3161,7 @@
             <a:avLst/>
           </a:prstGeom>
           <a:solidFill>
-            <a:srgbClr val="C8102E"/>
+            <a:srgbClr val="DA291C"/>
           </a:solidFill>
           <a:ln>
             <a:noFill/>
@@ -3204,7 +3204,7 @@
             <a:avLst/>
           </a:prstGeom>
           <a:solidFill>
-            <a:srgbClr val="C8102E"/>
+            <a:srgbClr val="DA291C"/>
           </a:solidFill>
           <a:ln>
             <a:noFill/>
@@ -3325,7 +3325,7 @@
             <a:avLst/>
           </a:prstGeom>
           <a:solidFill>
-            <a:srgbClr val="C8102E"/>
+            <a:srgbClr val="DA291C"/>
           </a:solidFill>
           <a:ln>
             <a:noFill/>
@@ -3438,7 +3438,7 @@
             <a:avLst/>
           </a:prstGeom>
           <a:solidFill>
-            <a:srgbClr val="C8102E"/>
+            <a:srgbClr val="DA291C"/>
           </a:solidFill>
           <a:ln>
             <a:noFill/>
@@ -3820,7 +3820,7 @@
             <a:avLst/>
           </a:prstGeom>
           <a:solidFill>
-            <a:srgbClr val="C8102E"/>
+            <a:srgbClr val="DA291C"/>
           </a:solidFill>
           <a:ln>
             <a:noFill/>
@@ -4029,7 +4029,7 @@
             <a:avLst/>
           </a:prstGeom>
           <a:solidFill>
-            <a:srgbClr val="C8102E"/>
+            <a:srgbClr val="DA291C"/>
           </a:solidFill>
           <a:ln>
             <a:noFill/>
@@ -4107,7 +4107,7 @@
             <a:avLst/>
           </a:prstGeom>
           <a:solidFill>
-            <a:srgbClr val="C8102E"/>
+            <a:srgbClr val="DA291C"/>
           </a:solidFill>
           <a:ln>
             <a:noFill/>
@@ -4193,7 +4193,7 @@
             <a:avLst/>
           </a:prstGeom>
           <a:solidFill>
-            <a:srgbClr val="C8102E"/>
+            <a:srgbClr val="DA291C"/>
           </a:solidFill>
           <a:ln>
             <a:noFill/>
@@ -4236,7 +4236,7 @@
             <a:avLst/>
           </a:prstGeom>
           <a:solidFill>
-            <a:srgbClr val="C8102E"/>
+            <a:srgbClr val="DA291C"/>
           </a:solidFill>
           <a:ln>
             <a:noFill/>
@@ -6188,7 +6188,7 @@
             <a:avLst/>
           </a:prstGeom>
           <a:solidFill>
-            <a:srgbClr val="C8102E"/>
+            <a:srgbClr val="DA291C"/>
           </a:solidFill>
           <a:ln>
             <a:noFill/>
@@ -6354,7 +6354,7 @@
             <a:avLst/>
           </a:prstGeom>
           <a:solidFill>
-            <a:srgbClr val="C8102E"/>
+            <a:srgbClr val="DA291C"/>
           </a:solidFill>
           <a:ln>
             <a:noFill/>
@@ -6633,7 +6633,7 @@
             <a:avLst/>
           </a:prstGeom>
           <a:solidFill>
-            <a:srgbClr val="C8102E"/>
+            <a:srgbClr val="DA291C"/>
           </a:solidFill>
           <a:ln>
             <a:noFill/>
@@ -6912,7 +6912,7 @@
             <a:avLst/>
           </a:prstGeom>
           <a:solidFill>
-            <a:srgbClr val="C8102E"/>
+            <a:srgbClr val="DA291C"/>
           </a:solidFill>
           <a:ln>
             <a:noFill/>
@@ -7157,7 +7157,7 @@
             <a:r>
               <a:rPr sz="750" b="1" i="0">
                 <a:solidFill>
-                  <a:srgbClr val="C8102E"/>
+                  <a:srgbClr val="DA291C"/>
                 </a:solidFill>
                 <a:latin typeface="Calibri"/>
               </a:rPr>
@@ -7312,7 +7312,7 @@
             <a:avLst/>
           </a:prstGeom>
           <a:solidFill>
-            <a:srgbClr val="C8102E"/>
+            <a:srgbClr val="DA291C"/>
           </a:solidFill>
           <a:ln>
             <a:noFill/>
@@ -7478,7 +7478,7 @@
             <a:avLst/>
           </a:prstGeom>
           <a:solidFill>
-            <a:srgbClr val="C8102E"/>
+            <a:srgbClr val="DA291C"/>
           </a:solidFill>
           <a:ln>
             <a:noFill/>
@@ -7567,7 +7567,7 @@
             <a:r>
               <a:rPr sz="900" b="0" i="0">
                 <a:solidFill>
-                  <a:srgbClr val="C8102E"/>
+                  <a:srgbClr val="DA291C"/>
                 </a:solidFill>
                 <a:latin typeface="Calibri"/>
               </a:rPr>
@@ -8917,7 +8917,7 @@
           </a:solidFill>
           <a:ln w="9525">
             <a:solidFill>
-              <a:srgbClr val="C8102E"/>
+              <a:srgbClr val="DA291C"/>
             </a:solidFill>
           </a:ln>
         </p:spPr>
@@ -8958,7 +8958,7 @@
             <a:avLst/>
           </a:prstGeom>
           <a:solidFill>
-            <a:srgbClr val="C8102E"/>
+            <a:srgbClr val="DA291C"/>
           </a:solidFill>
           <a:ln>
             <a:noFill/>
@@ -9082,7 +9082,7 @@
             <a:r>
               <a:rPr sz="750" b="1" i="0">
                 <a:solidFill>
-                  <a:srgbClr val="C8102E"/>
+                  <a:srgbClr val="DA291C"/>
                 </a:solidFill>
                 <a:latin typeface="Calibri"/>
               </a:rPr>
@@ -9237,7 +9237,7 @@
             <a:avLst/>
           </a:prstGeom>
           <a:solidFill>
-            <a:srgbClr val="C8102E"/>
+            <a:srgbClr val="DA291C"/>
           </a:solidFill>
           <a:ln>
             <a:noFill/>
@@ -9315,7 +9315,7 @@
             <a:avLst/>
           </a:prstGeom>
           <a:solidFill>
-            <a:srgbClr val="C8102E"/>
+            <a:srgbClr val="DA291C"/>
           </a:solidFill>
           <a:ln>
             <a:noFill/>
@@ -10682,7 +10682,7 @@
             <a:r>
               <a:rPr sz="3800" b="1" i="0">
                 <a:solidFill>
-                  <a:srgbClr val="C8102E"/>
+                  <a:srgbClr val="DA291C"/>
                 </a:solidFill>
                 <a:latin typeface="Calibri"/>
               </a:rPr>
@@ -10907,7 +10907,7 @@
             <a:avLst/>
           </a:prstGeom>
           <a:solidFill>
-            <a:srgbClr val="C8102E"/>
+            <a:srgbClr val="DA291C"/>
           </a:solidFill>
           <a:ln>
             <a:noFill/>
@@ -12257,7 +12257,7 @@
             <a:avLst/>
           </a:prstGeom>
           <a:solidFill>
-            <a:srgbClr val="C8102E"/>
+            <a:srgbClr val="DA291C"/>
           </a:solidFill>
           <a:ln>
             <a:noFill/>
@@ -12374,7 +12374,7 @@
           </a:solidFill>
           <a:ln w="9525">
             <a:solidFill>
-              <a:srgbClr val="C8102E"/>
+              <a:srgbClr val="DA291C"/>
             </a:solidFill>
           </a:ln>
         </p:spPr>
@@ -12426,7 +12426,7 @@
             <a:r>
               <a:rPr sz="900" b="1" i="0">
                 <a:solidFill>
-                  <a:srgbClr val="C8102E"/>
+                  <a:srgbClr val="DA291C"/>
                 </a:solidFill>
                 <a:latin typeface="Calibri"/>
               </a:rPr>
@@ -12495,7 +12495,7 @@
             <a:avLst/>
           </a:prstGeom>
           <a:solidFill>
-            <a:srgbClr val="C8102E"/>
+            <a:srgbClr val="DA291C"/>
           </a:solidFill>
           <a:ln>
             <a:noFill/>
@@ -12573,7 +12573,7 @@
             <a:avLst/>
           </a:prstGeom>
           <a:solidFill>
-            <a:srgbClr val="C8102E"/>
+            <a:srgbClr val="DA291C"/>
           </a:solidFill>
           <a:ln>
             <a:noFill/>
@@ -12651,7 +12651,7 @@
             <a:avLst/>
           </a:prstGeom>
           <a:solidFill>
-            <a:srgbClr val="C8102E"/>
+            <a:srgbClr val="DA291C"/>
           </a:solidFill>
           <a:ln>
             <a:noFill/>
@@ -12729,7 +12729,7 @@
             <a:avLst/>
           </a:prstGeom>
           <a:solidFill>
-            <a:srgbClr val="C8102E"/>
+            <a:srgbClr val="DA291C"/>
           </a:solidFill>
           <a:ln>
             <a:noFill/>
@@ -13368,7 +13368,7 @@
             <a:r>
               <a:rPr sz="750" b="1" i="0">
                 <a:solidFill>
-                  <a:srgbClr val="C8102E"/>
+                  <a:srgbClr val="DA291C"/>
                 </a:solidFill>
                 <a:latin typeface="Calibri"/>
               </a:rPr>
@@ -13523,7 +13523,7 @@
             <a:avLst/>
           </a:prstGeom>
           <a:solidFill>
-            <a:srgbClr val="C8102E"/>
+            <a:srgbClr val="DA291C"/>
           </a:solidFill>
           <a:ln>
             <a:noFill/>
@@ -13679,7 +13679,7 @@
             <a:avLst/>
           </a:prstGeom>
           <a:solidFill>
-            <a:srgbClr val="C8102E"/>
+            <a:srgbClr val="DA291C"/>
           </a:solidFill>
           <a:ln w="9525">
             <a:solidFill>
@@ -13770,7 +13770,7 @@
             <a:r>
               <a:rPr sz="750" b="0" i="0">
                 <a:solidFill>
-                  <a:srgbClr val="C8102E"/>
+                  <a:srgbClr val="DA291C"/>
                 </a:solidFill>
                 <a:latin typeface="Calibri"/>
               </a:rPr>
@@ -13920,7 +13920,7 @@
             <a:r>
               <a:rPr sz="750" b="0" i="0">
                 <a:solidFill>
-                  <a:srgbClr val="C8102E"/>
+                  <a:srgbClr val="DA291C"/>
                 </a:solidFill>
                 <a:latin typeface="Calibri"/>
               </a:rPr>
@@ -14070,7 +14070,7 @@
             <a:r>
               <a:rPr sz="750" b="0" i="0">
                 <a:solidFill>
-                  <a:srgbClr val="C8102E"/>
+                  <a:srgbClr val="DA291C"/>
                 </a:solidFill>
                 <a:latin typeface="Calibri"/>
               </a:rPr>
@@ -14220,7 +14220,7 @@
             <a:r>
               <a:rPr sz="750" b="0" i="0">
                 <a:solidFill>
-                  <a:srgbClr val="C8102E"/>
+                  <a:srgbClr val="DA291C"/>
                 </a:solidFill>
                 <a:latin typeface="Calibri"/>
               </a:rPr>
@@ -14370,7 +14370,7 @@
             <a:r>
               <a:rPr sz="750" b="0" i="0">
                 <a:solidFill>
-                  <a:srgbClr val="C8102E"/>
+                  <a:srgbClr val="DA291C"/>
                 </a:solidFill>
                 <a:latin typeface="Calibri"/>
               </a:rPr>
@@ -15934,7 +15934,7 @@
             <a:avLst/>
           </a:prstGeom>
           <a:solidFill>
-            <a:srgbClr val="C8102E"/>
+            <a:srgbClr val="DA291C"/>
           </a:solidFill>
           <a:ln>
             <a:noFill/>
@@ -16012,7 +16012,7 @@
             <a:avLst/>
           </a:prstGeom>
           <a:solidFill>
-            <a:srgbClr val="C8102E"/>
+            <a:srgbClr val="DA291C"/>
           </a:solidFill>
           <a:ln>
             <a:noFill/>
@@ -16090,7 +16090,7 @@
             <a:avLst/>
           </a:prstGeom>
           <a:solidFill>
-            <a:srgbClr val="C8102E"/>
+            <a:srgbClr val="DA291C"/>
           </a:solidFill>
           <a:ln>
             <a:noFill/>
@@ -16168,7 +16168,7 @@
             <a:avLst/>
           </a:prstGeom>
           <a:solidFill>
-            <a:srgbClr val="C8102E"/>
+            <a:srgbClr val="DA291C"/>
           </a:solidFill>
           <a:ln>
             <a:noFill/>
@@ -16246,7 +16246,7 @@
             <a:avLst/>
           </a:prstGeom>
           <a:solidFill>
-            <a:srgbClr val="C8102E"/>
+            <a:srgbClr val="DA291C"/>
           </a:solidFill>
           <a:ln>
             <a:noFill/>
@@ -16324,7 +16324,7 @@
             <a:avLst/>
           </a:prstGeom>
           <a:solidFill>
-            <a:srgbClr val="C8102E"/>
+            <a:srgbClr val="DA291C"/>
           </a:solidFill>
           <a:ln>
             <a:noFill/>
@@ -16402,7 +16402,7 @@
             <a:avLst/>
           </a:prstGeom>
           <a:solidFill>
-            <a:srgbClr val="C8102E"/>
+            <a:srgbClr val="DA291C"/>
           </a:solidFill>
           <a:ln>
             <a:noFill/>
@@ -16491,7 +16491,7 @@
             <a:r>
               <a:rPr sz="750" b="1" i="0">
                 <a:solidFill>
-                  <a:srgbClr val="C8102E"/>
+                  <a:srgbClr val="DA291C"/>
                 </a:solidFill>
                 <a:latin typeface="Calibri"/>
               </a:rPr>
@@ -16646,7 +16646,7 @@
             <a:avLst/>
           </a:prstGeom>
           <a:solidFill>
-            <a:srgbClr val="C8102E"/>
+            <a:srgbClr val="DA291C"/>
           </a:solidFill>
           <a:ln>
             <a:noFill/>
@@ -16724,7 +16724,7 @@
             <a:avLst/>
           </a:prstGeom>
           <a:solidFill>
-            <a:srgbClr val="C8102E"/>
+            <a:srgbClr val="DA291C"/>
           </a:solidFill>
           <a:ln>
             <a:noFill/>
@@ -16845,7 +16845,7 @@
             <a:avLst/>
           </a:prstGeom>
           <a:solidFill>
-            <a:srgbClr val="C8102E"/>
+            <a:srgbClr val="DA291C"/>
           </a:solidFill>
           <a:ln>
             <a:noFill/>
@@ -16899,7 +16899,7 @@
             <a:r>
               <a:rPr sz="2800" b="1" i="0">
                 <a:solidFill>
-                  <a:srgbClr val="C8102E"/>
+                  <a:srgbClr val="DA291C"/>
                 </a:solidFill>
                 <a:latin typeface="Calibri"/>
               </a:rPr>
@@ -17036,7 +17036,7 @@
             <a:avLst/>
           </a:prstGeom>
           <a:solidFill>
-            <a:srgbClr val="C8102E"/>
+            <a:srgbClr val="DA291C"/>
           </a:solidFill>
           <a:ln>
             <a:noFill/>
@@ -17157,7 +17157,7 @@
             <a:avLst/>
           </a:prstGeom>
           <a:solidFill>
-            <a:srgbClr val="C8102E"/>
+            <a:srgbClr val="DA291C"/>
           </a:solidFill>
           <a:ln>
             <a:noFill/>
@@ -17211,7 +17211,7 @@
             <a:r>
               <a:rPr sz="2800" b="1" i="0">
                 <a:solidFill>
-                  <a:srgbClr val="C8102E"/>
+                  <a:srgbClr val="DA291C"/>
                 </a:solidFill>
                 <a:latin typeface="Calibri"/>
               </a:rPr>
@@ -17348,7 +17348,7 @@
             <a:avLst/>
           </a:prstGeom>
           <a:solidFill>
-            <a:srgbClr val="C8102E"/>
+            <a:srgbClr val="DA291C"/>
           </a:solidFill>
           <a:ln>
             <a:noFill/>
@@ -17469,7 +17469,7 @@
             <a:avLst/>
           </a:prstGeom>
           <a:solidFill>
-            <a:srgbClr val="C8102E"/>
+            <a:srgbClr val="DA291C"/>
           </a:solidFill>
           <a:ln>
             <a:noFill/>
@@ -17523,7 +17523,7 @@
             <a:r>
               <a:rPr sz="2800" b="1" i="0">
                 <a:solidFill>
-                  <a:srgbClr val="C8102E"/>
+                  <a:srgbClr val="DA291C"/>
                 </a:solidFill>
                 <a:latin typeface="Calibri"/>
               </a:rPr>
@@ -17660,7 +17660,7 @@
             <a:avLst/>
           </a:prstGeom>
           <a:solidFill>
-            <a:srgbClr val="C8102E"/>
+            <a:srgbClr val="DA291C"/>
           </a:solidFill>
           <a:ln>
             <a:noFill/>
@@ -17738,7 +17738,7 @@
             <a:avLst/>
           </a:prstGeom>
           <a:solidFill>
-            <a:srgbClr val="C8102E"/>
+            <a:srgbClr val="DA291C"/>
           </a:solidFill>
           <a:ln>
             <a:noFill/>
@@ -17912,7 +17912,7 @@
             <a:avLst/>
           </a:prstGeom>
           <a:solidFill>
-            <a:srgbClr val="C8102E"/>
+            <a:srgbClr val="DA291C"/>
           </a:solidFill>
           <a:ln>
             <a:noFill/>
@@ -18455,7 +18455,7 @@
             <a:avLst/>
           </a:prstGeom>
           <a:solidFill>
-            <a:srgbClr val="C8102E"/>
+            <a:srgbClr val="DA291C"/>
           </a:solidFill>
           <a:ln>
             <a:noFill/>
@@ -18533,7 +18533,7 @@
             <a:avLst/>
           </a:prstGeom>
           <a:solidFill>
-            <a:srgbClr val="C8102E"/>
+            <a:srgbClr val="DA291C"/>
           </a:solidFill>
           <a:ln>
             <a:noFill/>
@@ -18611,7 +18611,7 @@
             <a:avLst/>
           </a:prstGeom>
           <a:solidFill>
-            <a:srgbClr val="C8102E"/>
+            <a:srgbClr val="DA291C"/>
           </a:solidFill>
           <a:ln>
             <a:noFill/>
@@ -18689,7 +18689,7 @@
             <a:avLst/>
           </a:prstGeom>
           <a:solidFill>
-            <a:srgbClr val="C8102E"/>
+            <a:srgbClr val="DA291C"/>
           </a:solidFill>
           <a:ln>
             <a:noFill/>
@@ -18767,7 +18767,7 @@
             <a:avLst/>
           </a:prstGeom>
           <a:solidFill>
-            <a:srgbClr val="C8102E"/>
+            <a:srgbClr val="DA291C"/>
           </a:solidFill>
           <a:ln>
             <a:noFill/>
@@ -18845,7 +18845,7 @@
             <a:avLst/>
           </a:prstGeom>
           <a:solidFill>
-            <a:srgbClr val="C8102E"/>
+            <a:srgbClr val="DA291C"/>
           </a:solidFill>
           <a:ln>
             <a:noFill/>
@@ -18934,7 +18934,7 @@
             <a:r>
               <a:rPr sz="750" b="1" i="0">
                 <a:solidFill>
-                  <a:srgbClr val="C8102E"/>
+                  <a:srgbClr val="DA291C"/>
                 </a:solidFill>
                 <a:latin typeface="Calibri"/>
               </a:rPr>
@@ -19089,7 +19089,7 @@
             <a:avLst/>
           </a:prstGeom>
           <a:solidFill>
-            <a:srgbClr val="C8102E"/>
+            <a:srgbClr val="DA291C"/>
           </a:solidFill>
           <a:ln>
             <a:noFill/>
@@ -19167,7 +19167,7 @@
             <a:avLst/>
           </a:prstGeom>
           <a:solidFill>
-            <a:srgbClr val="C8102E"/>
+            <a:srgbClr val="DA291C"/>
           </a:solidFill>
           <a:ln>
             <a:noFill/>
@@ -19299,7 +19299,7 @@
             <a:r>
               <a:rPr sz="3200" b="1" i="0">
                 <a:solidFill>
-                  <a:srgbClr val="C8102E"/>
+                  <a:srgbClr val="DA291C"/>
                 </a:solidFill>
                 <a:latin typeface="Calibri"/>
               </a:rPr>
@@ -19358,7 +19358,7 @@
             <a:avLst/>
           </a:prstGeom>
           <a:solidFill>
-            <a:srgbClr val="C8102E"/>
+            <a:srgbClr val="DA291C"/>
           </a:solidFill>
           <a:ln>
             <a:noFill/>
@@ -19490,7 +19490,7 @@
             <a:r>
               <a:rPr sz="3200" b="1" i="0">
                 <a:solidFill>
-                  <a:srgbClr val="C8102E"/>
+                  <a:srgbClr val="DA291C"/>
                 </a:solidFill>
                 <a:latin typeface="Calibri"/>
               </a:rPr>
@@ -19549,7 +19549,7 @@
             <a:avLst/>
           </a:prstGeom>
           <a:solidFill>
-            <a:srgbClr val="C8102E"/>
+            <a:srgbClr val="DA291C"/>
           </a:solidFill>
           <a:ln>
             <a:noFill/>
@@ -19681,7 +19681,7 @@
             <a:r>
               <a:rPr sz="3200" b="1" i="0">
                 <a:solidFill>
-                  <a:srgbClr val="C8102E"/>
+                  <a:srgbClr val="DA291C"/>
                 </a:solidFill>
                 <a:latin typeface="Calibri"/>
               </a:rPr>
@@ -19740,7 +19740,7 @@
             <a:avLst/>
           </a:prstGeom>
           <a:solidFill>
-            <a:srgbClr val="C8102E"/>
+            <a:srgbClr val="DA291C"/>
           </a:solidFill>
           <a:ln>
             <a:noFill/>
@@ -19872,7 +19872,7 @@
             <a:r>
               <a:rPr sz="3200" b="1" i="0">
                 <a:solidFill>
-                  <a:srgbClr val="C8102E"/>
+                  <a:srgbClr val="DA291C"/>
                 </a:solidFill>
                 <a:latin typeface="Calibri"/>
               </a:rPr>
@@ -19931,7 +19931,7 @@
             <a:avLst/>
           </a:prstGeom>
           <a:solidFill>
-            <a:srgbClr val="C8102E"/>
+            <a:srgbClr val="DA291C"/>
           </a:solidFill>
           <a:ln>
             <a:noFill/>
@@ -20132,7 +20132,7 @@
             <a:avLst/>
           </a:prstGeom>
           <a:solidFill>
-            <a:srgbClr val="C8102E"/>
+            <a:srgbClr val="DA291C"/>
           </a:solidFill>
           <a:ln>
             <a:noFill/>
@@ -20532,7 +20532,7 @@
             <a:avLst/>
           </a:prstGeom>
           <a:solidFill>
-            <a:srgbClr val="C8102E"/>
+            <a:srgbClr val="DA291C"/>
           </a:solidFill>
           <a:ln>
             <a:noFill/>
@@ -20653,7 +20653,7 @@
             <a:avLst/>
           </a:prstGeom>
           <a:solidFill>
-            <a:srgbClr val="C8102E"/>
+            <a:srgbClr val="DA291C"/>
           </a:solidFill>
           <a:ln>
             <a:noFill/>
@@ -20776,7 +20776,7 @@
             <a:avLst/>
           </a:prstGeom>
           <a:solidFill>
-            <a:srgbClr val="C8102E"/>
+            <a:srgbClr val="DA291C"/>
           </a:solidFill>
           <a:ln>
             <a:noFill/>
@@ -20899,7 +20899,7 @@
             <a:avLst/>
           </a:prstGeom>
           <a:solidFill>
-            <a:srgbClr val="C8102E"/>
+            <a:srgbClr val="DA291C"/>
           </a:solidFill>
           <a:ln>
             <a:noFill/>
@@ -21022,7 +21022,7 @@
             <a:avLst/>
           </a:prstGeom>
           <a:solidFill>
-            <a:srgbClr val="C8102E"/>
+            <a:srgbClr val="DA291C"/>
           </a:solidFill>
           <a:ln>
             <a:noFill/>
@@ -21145,7 +21145,7 @@
             <a:avLst/>
           </a:prstGeom>
           <a:solidFill>
-            <a:srgbClr val="C8102E"/>
+            <a:srgbClr val="DA291C"/>
           </a:solidFill>
           <a:ln>
             <a:noFill/>
@@ -21268,7 +21268,7 @@
             <a:avLst/>
           </a:prstGeom>
           <a:solidFill>
-            <a:srgbClr val="C8102E"/>
+            <a:srgbClr val="DA291C"/>
           </a:solidFill>
           <a:ln>
             <a:noFill/>
@@ -21391,7 +21391,7 @@
             <a:avLst/>
           </a:prstGeom>
           <a:solidFill>
-            <a:srgbClr val="C8102E"/>
+            <a:srgbClr val="DA291C"/>
           </a:solidFill>
           <a:ln>
             <a:noFill/>
@@ -21514,7 +21514,7 @@
             <a:avLst/>
           </a:prstGeom>
           <a:solidFill>
-            <a:srgbClr val="C8102E"/>
+            <a:srgbClr val="DA291C"/>
           </a:solidFill>
           <a:ln>
             <a:noFill/>
@@ -24420,7 +24420,7 @@
             <a:r>
               <a:rPr sz="750" b="1" i="0">
                 <a:solidFill>
-                  <a:srgbClr val="C8102E"/>
+                  <a:srgbClr val="DA291C"/>
                 </a:solidFill>
                 <a:latin typeface="Calibri"/>
               </a:rPr>
@@ -24575,7 +24575,7 @@
             <a:avLst/>
           </a:prstGeom>
           <a:solidFill>
-            <a:srgbClr val="C8102E"/>
+            <a:srgbClr val="DA291C"/>
           </a:solidFill>
           <a:ln>
             <a:noFill/>
@@ -24741,7 +24741,7 @@
             <a:avLst/>
           </a:prstGeom>
           <a:solidFill>
-            <a:srgbClr val="C8102E"/>
+            <a:srgbClr val="DA291C"/>
           </a:solidFill>
           <a:ln>
             <a:noFill/>
@@ -24819,7 +24819,7 @@
             <a:avLst/>
           </a:prstGeom>
           <a:solidFill>
-            <a:srgbClr val="C8102E"/>
+            <a:srgbClr val="DA291C"/>
           </a:solidFill>
           <a:ln>
             <a:noFill/>
@@ -24988,7 +24988,7 @@
             <a:r>
               <a:rPr sz="800" b="1" i="0">
                 <a:solidFill>
-                  <a:srgbClr val="C8102E"/>
+                  <a:srgbClr val="DA291C"/>
                 </a:solidFill>
                 <a:latin typeface="Calibri"/>
               </a:rPr>
@@ -25975,7 +25975,7 @@
             <a:r>
               <a:rPr sz="750" b="1" i="0">
                 <a:solidFill>
-                  <a:srgbClr val="C8102E"/>
+                  <a:srgbClr val="DA291C"/>
                 </a:solidFill>
                 <a:latin typeface="Calibri"/>
               </a:rPr>
@@ -26130,7 +26130,7 @@
             <a:avLst/>
           </a:prstGeom>
           <a:solidFill>
-            <a:srgbClr val="C8102E"/>
+            <a:srgbClr val="DA291C"/>
           </a:solidFill>
           <a:ln>
             <a:noFill/>
@@ -26208,7 +26208,7 @@
             <a:avLst/>
           </a:prstGeom>
           <a:solidFill>
-            <a:srgbClr val="C8102E"/>
+            <a:srgbClr val="DA291C"/>
           </a:solidFill>
           <a:ln>
             <a:noFill/>
@@ -26294,7 +26294,7 @@
             <a:avLst/>
           </a:prstGeom>
           <a:solidFill>
-            <a:srgbClr val="C8102E"/>
+            <a:srgbClr val="DA291C"/>
           </a:solidFill>
           <a:ln>
             <a:noFill/>
@@ -26529,7 +26529,7 @@
             <a:avLst/>
           </a:prstGeom>
           <a:solidFill>
-            <a:srgbClr val="C8102E"/>
+            <a:srgbClr val="DA291C"/>
           </a:solidFill>
           <a:ln>
             <a:noFill/>
@@ -26764,7 +26764,7 @@
             <a:avLst/>
           </a:prstGeom>
           <a:solidFill>
-            <a:srgbClr val="C8102E"/>
+            <a:srgbClr val="DA291C"/>
           </a:solidFill>
           <a:ln>
             <a:noFill/>
@@ -26999,7 +26999,7 @@
             <a:avLst/>
           </a:prstGeom>
           <a:solidFill>
-            <a:srgbClr val="C8102E"/>
+            <a:srgbClr val="DA291C"/>
           </a:solidFill>
           <a:ln>
             <a:noFill/>
@@ -27234,7 +27234,7 @@
             <a:avLst/>
           </a:prstGeom>
           <a:solidFill>
-            <a:srgbClr val="C8102E"/>
+            <a:srgbClr val="DA291C"/>
           </a:solidFill>
           <a:ln>
             <a:noFill/>
@@ -27469,7 +27469,7 @@
             <a:avLst/>
           </a:prstGeom>
           <a:solidFill>
-            <a:srgbClr val="C8102E"/>
+            <a:srgbClr val="DA291C"/>
           </a:solidFill>
           <a:ln>
             <a:noFill/>
@@ -27704,7 +27704,7 @@
             <a:avLst/>
           </a:prstGeom>
           <a:solidFill>
-            <a:srgbClr val="C8102E"/>
+            <a:srgbClr val="DA291C"/>
           </a:solidFill>
           <a:ln>
             <a:noFill/>
@@ -28062,7 +28062,7 @@
             <a:avLst/>
           </a:prstGeom>
           <a:solidFill>
-            <a:srgbClr val="C8102E"/>
+            <a:srgbClr val="DA291C"/>
           </a:solidFill>
           <a:ln>
             <a:noFill/>
@@ -28228,7 +28228,7 @@
             <a:avLst/>
           </a:prstGeom>
           <a:solidFill>
-            <a:srgbClr val="C8102E"/>
+            <a:srgbClr val="DA291C"/>
           </a:solidFill>
           <a:ln>
             <a:noFill/>
@@ -28306,7 +28306,7 @@
             <a:avLst/>
           </a:prstGeom>
           <a:solidFill>
-            <a:srgbClr val="C8102E"/>
+            <a:srgbClr val="DA291C"/>
           </a:solidFill>
           <a:ln>
             <a:noFill/>
@@ -28542,7 +28542,7 @@
             <a:avLst/>
           </a:prstGeom>
           <a:solidFill>
-            <a:srgbClr val="C8102E"/>
+            <a:srgbClr val="DA291C"/>
           </a:solidFill>
           <a:ln>
             <a:noFill/>
@@ -28620,7 +28620,7 @@
             <a:avLst/>
           </a:prstGeom>
           <a:solidFill>
-            <a:srgbClr val="C8102E"/>
+            <a:srgbClr val="DA291C"/>
           </a:solidFill>
           <a:ln>
             <a:noFill/>
@@ -28856,7 +28856,7 @@
             <a:avLst/>
           </a:prstGeom>
           <a:solidFill>
-            <a:srgbClr val="C8102E"/>
+            <a:srgbClr val="DA291C"/>
           </a:solidFill>
           <a:ln>
             <a:noFill/>
@@ -28934,7 +28934,7 @@
             <a:avLst/>
           </a:prstGeom>
           <a:solidFill>
-            <a:srgbClr val="C8102E"/>
+            <a:srgbClr val="DA291C"/>
           </a:solidFill>
           <a:ln>
             <a:noFill/>
@@ -29170,7 +29170,7 @@
             <a:avLst/>
           </a:prstGeom>
           <a:solidFill>
-            <a:srgbClr val="C8102E"/>
+            <a:srgbClr val="DA291C"/>
           </a:solidFill>
           <a:ln>
             <a:noFill/>
@@ -29248,7 +29248,7 @@
             <a:avLst/>
           </a:prstGeom>
           <a:solidFill>
-            <a:srgbClr val="C8102E"/>
+            <a:srgbClr val="DA291C"/>
           </a:solidFill>
           <a:ln>
             <a:noFill/>
@@ -29484,7 +29484,7 @@
             <a:avLst/>
           </a:prstGeom>
           <a:solidFill>
-            <a:srgbClr val="C8102E"/>
+            <a:srgbClr val="DA291C"/>
           </a:solidFill>
           <a:ln>
             <a:noFill/>
@@ -29562,7 +29562,7 @@
             <a:avLst/>
           </a:prstGeom>
           <a:solidFill>
-            <a:srgbClr val="C8102E"/>
+            <a:srgbClr val="DA291C"/>
           </a:solidFill>
           <a:ln>
             <a:noFill/>
@@ -29798,7 +29798,7 @@
             <a:avLst/>
           </a:prstGeom>
           <a:solidFill>
-            <a:srgbClr val="C8102E"/>
+            <a:srgbClr val="DA291C"/>
           </a:solidFill>
           <a:ln>
             <a:noFill/>
@@ -29876,7 +29876,7 @@
             <a:avLst/>
           </a:prstGeom>
           <a:solidFill>
-            <a:srgbClr val="C8102E"/>
+            <a:srgbClr val="DA291C"/>
           </a:solidFill>
           <a:ln>
             <a:noFill/>
@@ -30112,7 +30112,7 @@
             <a:avLst/>
           </a:prstGeom>
           <a:solidFill>
-            <a:srgbClr val="C8102E"/>
+            <a:srgbClr val="DA291C"/>
           </a:solidFill>
           <a:ln>
             <a:noFill/>
@@ -30190,7 +30190,7 @@
             <a:avLst/>
           </a:prstGeom>
           <a:solidFill>
-            <a:srgbClr val="C8102E"/>
+            <a:srgbClr val="DA291C"/>
           </a:solidFill>
           <a:ln>
             <a:noFill/>
@@ -30426,7 +30426,7 @@
             <a:avLst/>
           </a:prstGeom>
           <a:solidFill>
-            <a:srgbClr val="C8102E"/>
+            <a:srgbClr val="DA291C"/>
           </a:solidFill>
           <a:ln>
             <a:noFill/>
@@ -30504,7 +30504,7 @@
             <a:avLst/>
           </a:prstGeom>
           <a:solidFill>
-            <a:srgbClr val="C8102E"/>
+            <a:srgbClr val="DA291C"/>
           </a:solidFill>
           <a:ln>
             <a:noFill/>
@@ -30740,7 +30740,7 @@
             <a:avLst/>
           </a:prstGeom>
           <a:solidFill>
-            <a:srgbClr val="C8102E"/>
+            <a:srgbClr val="DA291C"/>
           </a:solidFill>
           <a:ln>
             <a:noFill/>
@@ -30818,7 +30818,7 @@
             <a:avLst/>
           </a:prstGeom>
           <a:solidFill>
-            <a:srgbClr val="C8102E"/>
+            <a:srgbClr val="DA291C"/>
           </a:solidFill>
           <a:ln>
             <a:noFill/>
@@ -31054,7 +31054,7 @@
             <a:avLst/>
           </a:prstGeom>
           <a:solidFill>
-            <a:srgbClr val="C8102E"/>
+            <a:srgbClr val="DA291C"/>
           </a:solidFill>
           <a:ln>
             <a:noFill/>
@@ -31132,7 +31132,7 @@
             <a:avLst/>
           </a:prstGeom>
           <a:solidFill>
-            <a:srgbClr val="C8102E"/>
+            <a:srgbClr val="DA291C"/>
           </a:solidFill>
           <a:ln>
             <a:noFill/>
@@ -31368,7 +31368,7 @@
             <a:avLst/>
           </a:prstGeom>
           <a:solidFill>
-            <a:srgbClr val="C8102E"/>
+            <a:srgbClr val="DA291C"/>
           </a:solidFill>
           <a:ln>
             <a:noFill/>
@@ -31446,7 +31446,7 @@
             <a:avLst/>
           </a:prstGeom>
           <a:solidFill>
-            <a:srgbClr val="C8102E"/>
+            <a:srgbClr val="DA291C"/>
           </a:solidFill>
           <a:ln>
             <a:noFill/>
@@ -31648,7 +31648,7 @@
             <a:r>
               <a:rPr sz="750" b="1" i="0">
                 <a:solidFill>
-                  <a:srgbClr val="C8102E"/>
+                  <a:srgbClr val="DA291C"/>
                 </a:solidFill>
                 <a:latin typeface="Calibri"/>
               </a:rPr>
@@ -31803,7 +31803,7 @@
             <a:avLst/>
           </a:prstGeom>
           <a:solidFill>
-            <a:srgbClr val="C8102E"/>
+            <a:srgbClr val="DA291C"/>
           </a:solidFill>
           <a:ln>
             <a:noFill/>
@@ -31924,7 +31924,7 @@
             <a:avLst/>
           </a:prstGeom>
           <a:solidFill>
-            <a:srgbClr val="C8102E"/>
+            <a:srgbClr val="DA291C"/>
           </a:solidFill>
           <a:ln>
             <a:noFill/>
@@ -32012,7 +32012,7 @@
             <a:avLst/>
           </a:prstGeom>
           <a:solidFill>
-            <a:srgbClr val="C8102E"/>
+            <a:srgbClr val="DA291C"/>
           </a:solidFill>
           <a:ln>
             <a:noFill/>
@@ -32066,7 +32066,7 @@
             <a:r>
               <a:rPr sz="1000" b="1" i="0">
                 <a:solidFill>
-                  <a:srgbClr val="C8102E"/>
+                  <a:srgbClr val="DA291C"/>
                 </a:solidFill>
                 <a:latin typeface="Calibri"/>
               </a:rPr>
@@ -32125,7 +32125,7 @@
             <a:avLst/>
           </a:prstGeom>
           <a:solidFill>
-            <a:srgbClr val="C8102E"/>
+            <a:srgbClr val="DA291C"/>
           </a:solidFill>
           <a:ln>
             <a:noFill/>
@@ -32213,7 +32213,7 @@
             <a:avLst/>
           </a:prstGeom>
           <a:solidFill>
-            <a:srgbClr val="C8102E"/>
+            <a:srgbClr val="DA291C"/>
           </a:solidFill>
           <a:ln>
             <a:noFill/>
@@ -32267,7 +32267,7 @@
             <a:r>
               <a:rPr sz="1000" b="1" i="0">
                 <a:solidFill>
-                  <a:srgbClr val="C8102E"/>
+                  <a:srgbClr val="DA291C"/>
                 </a:solidFill>
                 <a:latin typeface="Calibri"/>
               </a:rPr>
@@ -32326,7 +32326,7 @@
             <a:avLst/>
           </a:prstGeom>
           <a:solidFill>
-            <a:srgbClr val="C8102E"/>
+            <a:srgbClr val="DA291C"/>
           </a:solidFill>
           <a:ln>
             <a:noFill/>
@@ -32414,7 +32414,7 @@
             <a:avLst/>
           </a:prstGeom>
           <a:solidFill>
-            <a:srgbClr val="C8102E"/>
+            <a:srgbClr val="DA291C"/>
           </a:solidFill>
           <a:ln>
             <a:noFill/>
@@ -32468,7 +32468,7 @@
             <a:r>
               <a:rPr sz="1000" b="1" i="0">
                 <a:solidFill>
-                  <a:srgbClr val="C8102E"/>
+                  <a:srgbClr val="DA291C"/>
                 </a:solidFill>
                 <a:latin typeface="Calibri"/>
               </a:rPr>
@@ -32572,7 +32572,7 @@
             <a:avLst/>
           </a:prstGeom>
           <a:solidFill>
-            <a:srgbClr val="C8102E"/>
+            <a:srgbClr val="DA291C"/>
           </a:solidFill>
           <a:ln>
             <a:noFill/>
@@ -32626,7 +32626,7 @@
             <a:r>
               <a:rPr sz="1000" b="1" i="0">
                 <a:solidFill>
-                  <a:srgbClr val="C8102E"/>
+                  <a:srgbClr val="DA291C"/>
                 </a:solidFill>
                 <a:latin typeface="Calibri"/>
               </a:rPr>
@@ -33148,7 +33148,7 @@
             <a:r>
               <a:rPr sz="750" b="1" i="0">
                 <a:solidFill>
-                  <a:srgbClr val="C8102E"/>
+                  <a:srgbClr val="DA291C"/>
                 </a:solidFill>
                 <a:latin typeface="Calibri"/>
               </a:rPr>

--- a/Santander_Digital_Banking_Future.pptx
+++ b/Santander_Digital_Banking_Future.pptx
@@ -3312,14 +3312,84 @@
       </p:sp>
       <p:sp>
         <p:nvSpPr>
-          <p:cNvPr id="7" name="Rectangle 6"/>
-          <p:cNvSpPr/>
-          <p:nvPr/>
-        </p:nvSpPr>
-        <p:spPr>
-          <a:xfrm>
-            <a:off x="502920" y="1234440"/>
-            <a:ext cx="457200" cy="457200"/>
+          <p:cNvPr id="8" name="TextBox 7"/>
+          <p:cNvSpPr txBox="1"/>
+          <p:nvPr/>
+        </p:nvSpPr>
+        <p:spPr>
+          <a:xfrm>
+            <a:off x="502920" y="1783080"/>
+            <a:ext cx="8686800" cy="658368"/>
+          </a:xfrm>
+          <a:prstGeom prst="rect">
+            <a:avLst/>
+          </a:prstGeom>
+          <a:noFill/>
+        </p:spPr>
+        <p:txBody>
+          <a:bodyPr wrap="square">
+            <a:spAutoFit/>
+          </a:bodyPr>
+          <a:lstStyle/>
+          <a:p>
+            <a:pPr algn="l"/>
+            <a:r>
+              <a:rPr sz="4600" b="1" i="0">
+                <a:solidFill>
+                  <a:srgbClr val="FFFFFF"/>
+                </a:solidFill>
+                <a:latin typeface="Calibri"/>
+              </a:rPr>
+              <a:t>Santander Business Banking</a:t>
+            </a:r>
+          </a:p>
+        </p:txBody>
+      </p:sp>
+      <p:sp>
+        <p:nvSpPr>
+          <p:cNvPr id="9" name="TextBox 8"/>
+          <p:cNvSpPr txBox="1"/>
+          <p:nvPr/>
+        </p:nvSpPr>
+        <p:spPr>
+          <a:xfrm>
+            <a:off x="502920" y="2487168"/>
+            <a:ext cx="8229600" cy="475488"/>
+          </a:xfrm>
+          <a:prstGeom prst="rect">
+            <a:avLst/>
+          </a:prstGeom>
+          <a:noFill/>
+        </p:spPr>
+        <p:txBody>
+          <a:bodyPr wrap="square">
+            <a:spAutoFit/>
+          </a:bodyPr>
+          <a:lstStyle/>
+          <a:p>
+            <a:pPr algn="l"/>
+            <a:r>
+              <a:rPr sz="2200" b="0" i="0">
+                <a:solidFill>
+                  <a:srgbClr val="FECACA"/>
+                </a:solidFill>
+                <a:latin typeface="Calibri"/>
+              </a:rPr>
+              <a:t>Digital. Personal. Built from within.</a:t>
+            </a:r>
+          </a:p>
+        </p:txBody>
+      </p:sp>
+      <p:sp>
+        <p:nvSpPr>
+          <p:cNvPr id="10" name="Rectangle 9"/>
+          <p:cNvSpPr/>
+          <p:nvPr/>
+        </p:nvSpPr>
+        <p:spPr>
+          <a:xfrm>
+            <a:off x="502920" y="3090672"/>
+            <a:ext cx="7772400" cy="36576"/>
           </a:xfrm>
           <a:prstGeom prst="rect">
             <a:avLst/>
@@ -3355,90 +3425,20 @@
       </p:sp>
       <p:sp>
         <p:nvSpPr>
-          <p:cNvPr id="8" name="TextBox 7"/>
-          <p:cNvSpPr txBox="1"/>
-          <p:nvPr/>
-        </p:nvSpPr>
-        <p:spPr>
-          <a:xfrm>
-            <a:off x="502920" y="1783080"/>
-            <a:ext cx="8686800" cy="658368"/>
-          </a:xfrm>
-          <a:prstGeom prst="rect">
-            <a:avLst/>
-          </a:prstGeom>
-          <a:noFill/>
-        </p:spPr>
-        <p:txBody>
-          <a:bodyPr wrap="square">
-            <a:spAutoFit/>
-          </a:bodyPr>
-          <a:lstStyle/>
-          <a:p>
-            <a:pPr algn="l"/>
-            <a:r>
-              <a:rPr sz="4600" b="1" i="0">
-                <a:solidFill>
-                  <a:srgbClr val="FFFFFF"/>
-                </a:solidFill>
-                <a:latin typeface="Calibri"/>
-              </a:rPr>
-              <a:t>Santander Business Banking</a:t>
-            </a:r>
-          </a:p>
-        </p:txBody>
-      </p:sp>
-      <p:sp>
-        <p:nvSpPr>
-          <p:cNvPr id="9" name="TextBox 8"/>
-          <p:cNvSpPr txBox="1"/>
-          <p:nvPr/>
-        </p:nvSpPr>
-        <p:spPr>
-          <a:xfrm>
-            <a:off x="502920" y="2487168"/>
-            <a:ext cx="8229600" cy="475488"/>
-          </a:xfrm>
-          <a:prstGeom prst="rect">
-            <a:avLst/>
-          </a:prstGeom>
-          <a:noFill/>
-        </p:spPr>
-        <p:txBody>
-          <a:bodyPr wrap="square">
-            <a:spAutoFit/>
-          </a:bodyPr>
-          <a:lstStyle/>
-          <a:p>
-            <a:pPr algn="l"/>
-            <a:r>
-              <a:rPr sz="2200" b="0" i="0">
-                <a:solidFill>
-                  <a:srgbClr val="FECACA"/>
-                </a:solidFill>
-                <a:latin typeface="Calibri"/>
-              </a:rPr>
-              <a:t>Digital. Personal. Built from within.</a:t>
-            </a:r>
-          </a:p>
-        </p:txBody>
-      </p:sp>
-      <p:sp>
-        <p:nvSpPr>
-          <p:cNvPr id="10" name="Rectangle 9"/>
-          <p:cNvSpPr/>
-          <p:nvPr/>
-        </p:nvSpPr>
-        <p:spPr>
-          <a:xfrm>
-            <a:off x="502920" y="3090672"/>
-            <a:ext cx="7772400" cy="36576"/>
-          </a:xfrm>
-          <a:prstGeom prst="rect">
-            <a:avLst/>
-          </a:prstGeom>
-          <a:solidFill>
-            <a:srgbClr val="DA291C"/>
+          <p:cNvPr id="11" name="Rectangle 10"/>
+          <p:cNvSpPr/>
+          <p:nvPr/>
+        </p:nvSpPr>
+        <p:spPr>
+          <a:xfrm>
+            <a:off x="502920" y="3273552"/>
+            <a:ext cx="2450592" cy="749808"/>
+          </a:xfrm>
+          <a:prstGeom prst="rect">
+            <a:avLst/>
+          </a:prstGeom>
+          <a:solidFill>
+            <a:srgbClr val="44403C"/>
           </a:solidFill>
           <a:ln>
             <a:noFill/>
@@ -3468,13 +3468,83 @@
       </p:sp>
       <p:sp>
         <p:nvSpPr>
-          <p:cNvPr id="11" name="Rectangle 10"/>
-          <p:cNvSpPr/>
-          <p:nvPr/>
-        </p:nvSpPr>
-        <p:spPr>
-          <a:xfrm>
-            <a:off x="502920" y="3273552"/>
+          <p:cNvPr id="12" name="TextBox 11"/>
+          <p:cNvSpPr txBox="1"/>
+          <p:nvPr/>
+        </p:nvSpPr>
+        <p:spPr>
+          <a:xfrm>
+            <a:off x="612648" y="3310128"/>
+            <a:ext cx="822960" cy="457200"/>
+          </a:xfrm>
+          <a:prstGeom prst="rect">
+            <a:avLst/>
+          </a:prstGeom>
+          <a:noFill/>
+        </p:spPr>
+        <p:txBody>
+          <a:bodyPr wrap="square">
+            <a:spAutoFit/>
+          </a:bodyPr>
+          <a:lstStyle/>
+          <a:p>
+            <a:pPr algn="l"/>
+            <a:r>
+              <a:rPr sz="2800" b="1" i="0">
+                <a:solidFill>
+                  <a:srgbClr val="FFFFFF"/>
+                </a:solidFill>
+                <a:latin typeface="Calibri"/>
+              </a:rPr>
+              <a:t>21</a:t>
+            </a:r>
+          </a:p>
+        </p:txBody>
+      </p:sp>
+      <p:sp>
+        <p:nvSpPr>
+          <p:cNvPr id="13" name="TextBox 12"/>
+          <p:cNvSpPr txBox="1"/>
+          <p:nvPr/>
+        </p:nvSpPr>
+        <p:spPr>
+          <a:xfrm>
+            <a:off x="1490472" y="3429000"/>
+            <a:ext cx="1353312" cy="256032"/>
+          </a:xfrm>
+          <a:prstGeom prst="rect">
+            <a:avLst/>
+          </a:prstGeom>
+          <a:noFill/>
+        </p:spPr>
+        <p:txBody>
+          <a:bodyPr wrap="square">
+            <a:spAutoFit/>
+          </a:bodyPr>
+          <a:lstStyle/>
+          <a:p>
+            <a:pPr algn="l"/>
+            <a:r>
+              <a:rPr sz="950" b="0" i="0">
+                <a:solidFill>
+                  <a:srgbClr val="D6D3D1"/>
+                </a:solidFill>
+                <a:latin typeface="Calibri"/>
+              </a:rPr>
+              <a:t>features built</a:t>
+            </a:r>
+          </a:p>
+        </p:txBody>
+      </p:sp>
+      <p:sp>
+        <p:nvSpPr>
+          <p:cNvPr id="14" name="Rectangle 13"/>
+          <p:cNvSpPr/>
+          <p:nvPr/>
+        </p:nvSpPr>
+        <p:spPr>
+          <a:xfrm>
+            <a:off x="3136391" y="3273552"/>
             <a:ext cx="2450592" cy="749808"/>
           </a:xfrm>
           <a:prstGeom prst="rect">
@@ -3511,13 +3581,13 @@
       </p:sp>
       <p:sp>
         <p:nvSpPr>
-          <p:cNvPr id="12" name="TextBox 11"/>
-          <p:cNvSpPr txBox="1"/>
-          <p:nvPr/>
-        </p:nvSpPr>
-        <p:spPr>
-          <a:xfrm>
-            <a:off x="612648" y="3310128"/>
+          <p:cNvPr id="15" name="TextBox 14"/>
+          <p:cNvSpPr txBox="1"/>
+          <p:nvPr/>
+        </p:nvSpPr>
+        <p:spPr>
+          <a:xfrm>
+            <a:off x="3246120" y="3310128"/>
             <a:ext cx="822960" cy="457200"/>
           </a:xfrm>
           <a:prstGeom prst="rect">
@@ -3539,20 +3609,20 @@
                 </a:solidFill>
                 <a:latin typeface="Calibri"/>
               </a:rPr>
-              <a:t>21</a:t>
-            </a:r>
-          </a:p>
-        </p:txBody>
-      </p:sp>
-      <p:sp>
-        <p:nvSpPr>
-          <p:cNvPr id="13" name="TextBox 12"/>
-          <p:cNvSpPr txBox="1"/>
-          <p:nvPr/>
-        </p:nvSpPr>
-        <p:spPr>
-          <a:xfrm>
-            <a:off x="1490472" y="3429000"/>
+              <a:t>11</a:t>
+            </a:r>
+          </a:p>
+        </p:txBody>
+      </p:sp>
+      <p:sp>
+        <p:nvSpPr>
+          <p:cNvPr id="16" name="TextBox 15"/>
+          <p:cNvSpPr txBox="1"/>
+          <p:nvPr/>
+        </p:nvSpPr>
+        <p:spPr>
+          <a:xfrm>
+            <a:off x="4123944" y="3429000"/>
             <a:ext cx="1353312" cy="256032"/>
           </a:xfrm>
           <a:prstGeom prst="rect">
@@ -3574,20 +3644,20 @@
                 </a:solidFill>
                 <a:latin typeface="Calibri"/>
               </a:rPr>
-              <a:t>features built</a:t>
-            </a:r>
-          </a:p>
-        </p:txBody>
-      </p:sp>
-      <p:sp>
-        <p:nvSpPr>
-          <p:cNvPr id="14" name="Rectangle 13"/>
-          <p:cNvSpPr/>
-          <p:nvPr/>
-        </p:nvSpPr>
-        <p:spPr>
-          <a:xfrm>
-            <a:off x="3136391" y="3273552"/>
+              <a:t>paperless workflows</a:t>
+            </a:r>
+          </a:p>
+        </p:txBody>
+      </p:sp>
+      <p:sp>
+        <p:nvSpPr>
+          <p:cNvPr id="17" name="Rectangle 16"/>
+          <p:cNvSpPr/>
+          <p:nvPr/>
+        </p:nvSpPr>
+        <p:spPr>
+          <a:xfrm>
+            <a:off x="5769864" y="3273552"/>
             <a:ext cx="2450592" cy="749808"/>
           </a:xfrm>
           <a:prstGeom prst="rect">
@@ -3624,13 +3694,13 @@
       </p:sp>
       <p:sp>
         <p:nvSpPr>
-          <p:cNvPr id="15" name="TextBox 14"/>
-          <p:cNvSpPr txBox="1"/>
-          <p:nvPr/>
-        </p:nvSpPr>
-        <p:spPr>
-          <a:xfrm>
-            <a:off x="3246120" y="3310128"/>
+          <p:cNvPr id="18" name="TextBox 17"/>
+          <p:cNvSpPr txBox="1"/>
+          <p:nvPr/>
+        </p:nvSpPr>
+        <p:spPr>
+          <a:xfrm>
+            <a:off x="5879592" y="3310128"/>
             <a:ext cx="822960" cy="457200"/>
           </a:xfrm>
           <a:prstGeom prst="rect">
@@ -3652,20 +3722,20 @@
                 </a:solidFill>
                 <a:latin typeface="Calibri"/>
               </a:rPr>
-              <a:t>11</a:t>
-            </a:r>
-          </a:p>
-        </p:txBody>
-      </p:sp>
-      <p:sp>
-        <p:nvSpPr>
-          <p:cNvPr id="16" name="TextBox 15"/>
-          <p:cNvSpPr txBox="1"/>
-          <p:nvPr/>
-        </p:nvSpPr>
-        <p:spPr>
-          <a:xfrm>
-            <a:off x="4123944" y="3429000"/>
+              <a:t>7</a:t>
+            </a:r>
+          </a:p>
+        </p:txBody>
+      </p:sp>
+      <p:sp>
+        <p:nvSpPr>
+          <p:cNvPr id="19" name="TextBox 18"/>
+          <p:cNvSpPr txBox="1"/>
+          <p:nvPr/>
+        </p:nvSpPr>
+        <p:spPr>
+          <a:xfrm>
+            <a:off x="6757416" y="3429000"/>
             <a:ext cx="1353312" cy="256032"/>
           </a:xfrm>
           <a:prstGeom prst="rect">
@@ -3687,27 +3757,27 @@
                 </a:solidFill>
                 <a:latin typeface="Calibri"/>
               </a:rPr>
-              <a:t>paperless workflows</a:t>
-            </a:r>
-          </a:p>
-        </p:txBody>
-      </p:sp>
-      <p:sp>
-        <p:nvSpPr>
-          <p:cNvPr id="17" name="Rectangle 16"/>
-          <p:cNvSpPr/>
-          <p:nvPr/>
-        </p:nvSpPr>
-        <p:spPr>
-          <a:xfrm>
-            <a:off x="5769864" y="3273552"/>
-            <a:ext cx="2450592" cy="749808"/>
-          </a:xfrm>
-          <a:prstGeom prst="rect">
-            <a:avLst/>
-          </a:prstGeom>
-          <a:solidFill>
-            <a:srgbClr val="44403C"/>
+              <a:t>entity types</a:t>
+            </a:r>
+          </a:p>
+        </p:txBody>
+      </p:sp>
+      <p:sp>
+        <p:nvSpPr>
+          <p:cNvPr id="20" name="Rectangle 19"/>
+          <p:cNvSpPr/>
+          <p:nvPr/>
+        </p:nvSpPr>
+        <p:spPr>
+          <a:xfrm>
+            <a:off x="502920" y="4251960"/>
+            <a:ext cx="4754880" cy="384048"/>
+          </a:xfrm>
+          <a:prstGeom prst="rect">
+            <a:avLst/>
+          </a:prstGeom>
+          <a:solidFill>
+            <a:srgbClr val="DA291C"/>
           </a:solidFill>
           <a:ln>
             <a:noFill/>
@@ -3737,119 +3807,6 @@
       </p:sp>
       <p:sp>
         <p:nvSpPr>
-          <p:cNvPr id="18" name="TextBox 17"/>
-          <p:cNvSpPr txBox="1"/>
-          <p:nvPr/>
-        </p:nvSpPr>
-        <p:spPr>
-          <a:xfrm>
-            <a:off x="5879592" y="3310128"/>
-            <a:ext cx="822960" cy="457200"/>
-          </a:xfrm>
-          <a:prstGeom prst="rect">
-            <a:avLst/>
-          </a:prstGeom>
-          <a:noFill/>
-        </p:spPr>
-        <p:txBody>
-          <a:bodyPr wrap="square">
-            <a:spAutoFit/>
-          </a:bodyPr>
-          <a:lstStyle/>
-          <a:p>
-            <a:pPr algn="l"/>
-            <a:r>
-              <a:rPr sz="2800" b="1" i="0">
-                <a:solidFill>
-                  <a:srgbClr val="FFFFFF"/>
-                </a:solidFill>
-                <a:latin typeface="Calibri"/>
-              </a:rPr>
-              <a:t>7</a:t>
-            </a:r>
-          </a:p>
-        </p:txBody>
-      </p:sp>
-      <p:sp>
-        <p:nvSpPr>
-          <p:cNvPr id="19" name="TextBox 18"/>
-          <p:cNvSpPr txBox="1"/>
-          <p:nvPr/>
-        </p:nvSpPr>
-        <p:spPr>
-          <a:xfrm>
-            <a:off x="6757416" y="3429000"/>
-            <a:ext cx="1353312" cy="256032"/>
-          </a:xfrm>
-          <a:prstGeom prst="rect">
-            <a:avLst/>
-          </a:prstGeom>
-          <a:noFill/>
-        </p:spPr>
-        <p:txBody>
-          <a:bodyPr wrap="square">
-            <a:spAutoFit/>
-          </a:bodyPr>
-          <a:lstStyle/>
-          <a:p>
-            <a:pPr algn="l"/>
-            <a:r>
-              <a:rPr sz="950" b="0" i="0">
-                <a:solidFill>
-                  <a:srgbClr val="D6D3D1"/>
-                </a:solidFill>
-                <a:latin typeface="Calibri"/>
-              </a:rPr>
-              <a:t>entity types</a:t>
-            </a:r>
-          </a:p>
-        </p:txBody>
-      </p:sp>
-      <p:sp>
-        <p:nvSpPr>
-          <p:cNvPr id="20" name="Rectangle 19"/>
-          <p:cNvSpPr/>
-          <p:nvPr/>
-        </p:nvSpPr>
-        <p:spPr>
-          <a:xfrm>
-            <a:off x="502920" y="4251960"/>
-            <a:ext cx="4754880" cy="384048"/>
-          </a:xfrm>
-          <a:prstGeom prst="rect">
-            <a:avLst/>
-          </a:prstGeom>
-          <a:solidFill>
-            <a:srgbClr val="DA291C"/>
-          </a:solidFill>
-          <a:ln>
-            <a:noFill/>
-          </a:ln>
-        </p:spPr>
-        <p:style>
-          <a:lnRef idx="1">
-            <a:schemeClr val="accent1"/>
-          </a:lnRef>
-          <a:fillRef idx="3">
-            <a:schemeClr val="accent1"/>
-          </a:fillRef>
-          <a:effectRef idx="2">
-            <a:schemeClr val="accent1"/>
-          </a:effectRef>
-          <a:fontRef idx="minor">
-            <a:schemeClr val="lt1"/>
-          </a:fontRef>
-        </p:style>
-        <p:txBody>
-          <a:bodyPr rtlCol="0" anchor="ctr"/>
-          <a:lstStyle/>
-          <a:p>
-            <a:pPr algn="ctr"/>
-          </a:p>
-        </p:txBody>
-      </p:sp>
-      <p:sp>
-        <p:nvSpPr>
           <p:cNvPr id="21" name="TextBox 20"/>
           <p:cNvSpPr txBox="1"/>
           <p:nvPr/>
@@ -3953,6 +3910,30 @@
           </a:p>
         </p:txBody>
       </p:sp>
+      <p:pic>
+        <p:nvPicPr>
+          <p:cNvPr id="24" name="Santander logo" descr="santander-logo-white.png"/>
+          <p:cNvPicPr>
+            <a:picLocks noChangeAspect="1"/>
+          </p:cNvPicPr>
+          <p:nvPr/>
+        </p:nvPicPr>
+        <p:blipFill>
+          <a:blip r:embed="rId2"/>
+          <a:stretch>
+            <a:fillRect/>
+          </a:stretch>
+        </p:blipFill>
+        <p:spPr>
+          <a:xfrm>
+            <a:off x="502920" y="457200"/>
+            <a:ext cx="2377440" cy="411297"/>
+          </a:xfrm>
+          <a:prstGeom prst="rect">
+            <a:avLst/>
+          </a:prstGeom>
+        </p:spPr>
+      </p:pic>
     </p:spTree>
   </p:cSld>
   <p:clrMapOvr>

--- a/Santander_Digital_Banking_Future.pptx
+++ b/Santander_Digital_Banking_Future.pptx
@@ -10633,76 +10633,6 @@
                 <a:latin typeface="Calibri"/>
               </a:rPr>
               <a:t>Phase 2 — 0 DAYS TO READY    Awaiting stakeholder approval</a:t>
-            </a:r>
-          </a:p>
-        </p:txBody>
-      </p:sp>
-      <p:sp>
-        <p:nvSpPr>
-          <p:cNvPr id="40" name="TextBox 39"/>
-          <p:cNvSpPr txBox="1"/>
-          <p:nvPr/>
-        </p:nvSpPr>
-        <p:spPr>
-          <a:xfrm>
-            <a:off x="8229600" y="6236208"/>
-            <a:ext cx="3840480" cy="502920"/>
-          </a:xfrm>
-          <a:prstGeom prst="rect">
-            <a:avLst/>
-          </a:prstGeom>
-          <a:noFill/>
-        </p:spPr>
-        <p:txBody>
-          <a:bodyPr wrap="square">
-            <a:spAutoFit/>
-          </a:bodyPr>
-          <a:lstStyle/>
-          <a:p>
-            <a:pPr algn="r"/>
-            <a:r>
-              <a:rPr sz="3800" b="1" i="0">
-                <a:solidFill>
-                  <a:srgbClr val="DA291C"/>
-                </a:solidFill>
-                <a:latin typeface="Calibri"/>
-              </a:rPr>
-              <a:t>£137M</a:t>
-            </a:r>
-          </a:p>
-        </p:txBody>
-      </p:sp>
-      <p:sp>
-        <p:nvSpPr>
-          <p:cNvPr id="41" name="TextBox 40"/>
-          <p:cNvSpPr txBox="1"/>
-          <p:nvPr/>
-        </p:nvSpPr>
-        <p:spPr>
-          <a:xfrm>
-            <a:off x="8229600" y="6547104"/>
-            <a:ext cx="3840480" cy="219456"/>
-          </a:xfrm>
-          <a:prstGeom prst="rect">
-            <a:avLst/>
-          </a:prstGeom>
-          <a:noFill/>
-        </p:spPr>
-        <p:txBody>
-          <a:bodyPr wrap="square">
-            <a:spAutoFit/>
-          </a:bodyPr>
-          <a:lstStyle/>
-          <a:p>
-            <a:pPr algn="r"/>
-            <a:r>
-              <a:rPr sz="800" b="0" i="0">
-                <a:solidFill>
-                  <a:srgbClr val="78716C"/>
-                </a:solidFill>
-                <a:latin typeface="Calibri"/>
-              </a:rPr>
-              <a:t>annualised opportunity</a:t>
             </a:r>
           </a:p>
         </p:txBody>

--- a/Santander_Digital_Banking_Future.pptx
+++ b/Santander_Digital_Banking_Future.pptx
@@ -20095,7 +20095,7 @@
           <a:p>
             <a:pPr algn="ctr"/>
             <a:r>
-              <a:rPr sz="5200" b="1" i="0">
+              <a:rPr sz="4400" b="1" i="0">
                 <a:solidFill>
                   <a:srgbClr val="FFFFFF"/>
                 </a:solidFill>

--- a/Santander_Digital_Banking_Future.pptx
+++ b/Santander_Digital_Banking_Future.pptx
@@ -7667,7 +7667,7 @@
                 </a:solidFill>
                 <a:latin typeface="Calibri"/>
               </a:rPr>
-              <a:t>5,300 lines · single component · all state at top level</a:t>
+              <a:t>7,400 lines · single component · all state at top level</a:t>
             </a:r>
           </a:p>
         </p:txBody>
@@ -20292,7 +20292,7 @@
                 </a:solidFill>
                 <a:latin typeface="Calibri"/>
               </a:rPr>
-              <a:t>Built in React. 5,300 lines. 21 features. Live at imscots-ui.github.io/santander — open it now.</a:t>
+              <a:t>Built in React. 7,400 lines. 21 features. Live at imscots-ui.github.io/santander — open it now.</a:t>
             </a:r>
           </a:p>
         </p:txBody>
@@ -28031,7 +28031,7 @@
                 </a:solidFill>
                 <a:latin typeface="Calibri"/>
               </a:rPr>
-              <a:t>11 workflows. Every paper form, retired.</a:t>
+              <a:t>17 workflows. Every paper form, retired.</a:t>
             </a:r>
           </a:p>
         </p:txBody>
@@ -28081,137 +28081,163 @@
       </p:sp>
       <p:sp>
         <p:nvSpPr>
-          <p:cNvPr id="6" name="Rectangle 5"/>
+          <p:cNvPr id="94" name="TextBox 93"/>
+          <p:cNvSpPr txBox="1"/>
+          <p:nvPr/>
+        </p:nvSpPr>
+        <p:spPr>
+          <a:xfrm>
+            <a:off x="411480" y="6620256"/>
+            <a:ext cx="3657600" cy="201168"/>
+          </a:xfrm>
+          <a:prstGeom prst="rect">
+            <a:avLst/>
+          </a:prstGeom>
+          <a:noFill/>
+        </p:spPr>
+        <p:txBody>
+          <a:bodyPr wrap="square">
+            <a:spAutoFit/>
+          </a:bodyPr>
+          <a:lstStyle/>
+          <a:p>
+            <a:pPr algn="l"/>
+            <a:r>
+              <a:rPr sz="750" b="1" i="0">
+                <a:solidFill>
+                  <a:srgbClr val="DA291C"/>
+                </a:solidFill>
+                <a:latin typeface="Calibri"/>
+              </a:rPr>
+              <a:t>INTERNAL · CONFIDENTIAL</a:t>
+            </a:r>
+          </a:p>
+        </p:txBody>
+      </p:sp>
+      <p:sp>
+        <p:nvSpPr>
+          <p:cNvPr id="95" name="TextBox 94"/>
+          <p:cNvSpPr txBox="1"/>
+          <p:nvPr/>
+        </p:nvSpPr>
+        <p:spPr>
+          <a:xfrm>
+            <a:off x="3657600" y="6620256"/>
+            <a:ext cx="8119872" cy="201168"/>
+          </a:xfrm>
+          <a:prstGeom prst="rect">
+            <a:avLst/>
+          </a:prstGeom>
+          <a:noFill/>
+        </p:spPr>
+        <p:txBody>
+          <a:bodyPr wrap="square">
+            <a:spAutoFit/>
+          </a:bodyPr>
+          <a:lstStyle/>
+          <a:p>
+            <a:pPr algn="r"/>
+            <a:r>
+              <a:rPr sz="750" b="0" i="1">
+                <a:solidFill>
+                  <a:srgbClr val="78716C"/>
+                </a:solidFill>
+                <a:latin typeface="Calibri"/>
+              </a:rPr>
+              <a:t>Alan Davidson  ·  Business Banking Advisor  ·  Self-initiated  ·  Own time  ·  June 2026</a:t>
+            </a:r>
+          </a:p>
+        </p:txBody>
+      </p:sp>
+      <p:sp>
+        <p:nvSpPr>
+          <p:cNvPr id="96" name="TextBox 95"/>
+          <p:cNvSpPr txBox="1"/>
+          <p:nvPr/>
+        </p:nvSpPr>
+        <p:spPr>
+          <a:xfrm>
+            <a:off x="11722608" y="6565392"/>
+            <a:ext cx="347472" cy="219456"/>
+          </a:xfrm>
+          <a:prstGeom prst="rect">
+            <a:avLst/>
+          </a:prstGeom>
+          <a:noFill/>
+        </p:spPr>
+        <p:txBody>
+          <a:bodyPr wrap="square">
+            <a:spAutoFit/>
+          </a:bodyPr>
+          <a:lstStyle/>
+          <a:p>
+            <a:pPr algn="r"/>
+            <a:r>
+              <a:rPr sz="850" b="0" i="0">
+                <a:solidFill>
+                  <a:srgbClr val="78716C"/>
+                </a:solidFill>
+                <a:latin typeface="Calibri"/>
+              </a:rPr>
+              <a:t>8</a:t>
+            </a:r>
+          </a:p>
+        </p:txBody>
+      </p:sp>
+      <p:sp>
+        <p:nvSpPr>
+          <p:cNvPr id="97" name="Rectangle 96"/>
           <p:cNvSpPr/>
           <p:nvPr/>
         </p:nvSpPr>
         <p:spPr>
           <a:xfrm>
             <a:off x="438912" y="1060704"/>
-            <a:ext cx="3712463" cy="1261872"/>
+            <a:ext cx="2148840" cy="1261872"/>
           </a:xfrm>
           <a:prstGeom prst="rect">
             <a:avLst/>
           </a:prstGeom>
           <a:solidFill>
             <a:srgbClr val="FFFFFF"/>
-          </a:solidFill>
-          <a:ln w="9525">
-            <a:solidFill>
-              <a:srgbClr val="D6D3D1"/>
-            </a:solidFill>
-          </a:ln>
-        </p:spPr>
-        <p:style>
-          <a:lnRef idx="1">
-            <a:schemeClr val="accent1"/>
-          </a:lnRef>
-          <a:fillRef idx="3">
-            <a:schemeClr val="accent1"/>
-          </a:fillRef>
-          <a:effectRef idx="2">
-            <a:schemeClr val="accent1"/>
-          </a:effectRef>
-          <a:fontRef idx="minor">
-            <a:schemeClr val="lt1"/>
-          </a:fontRef>
-        </p:style>
-        <p:txBody>
-          <a:bodyPr rtlCol="0" anchor="ctr"/>
-          <a:lstStyle/>
-          <a:p>
-            <a:pPr algn="ctr"/>
-          </a:p>
-        </p:txBody>
-      </p:sp>
-      <p:sp>
-        <p:nvSpPr>
-          <p:cNvPr id="7" name="Rectangle 6"/>
-          <p:cNvSpPr/>
-          <p:nvPr/>
-        </p:nvSpPr>
-        <p:spPr>
-          <a:xfrm>
-            <a:off x="438912" y="1060704"/>
-            <a:ext cx="3712463" cy="50292"/>
-          </a:xfrm>
-          <a:prstGeom prst="rect">
-            <a:avLst/>
-          </a:prstGeom>
-          <a:solidFill>
-            <a:srgbClr val="DA291C"/>
           </a:solidFill>
           <a:ln>
             <a:noFill/>
           </a:ln>
-        </p:spPr>
-        <p:style>
-          <a:lnRef idx="1">
-            <a:schemeClr val="accent1"/>
-          </a:lnRef>
-          <a:fillRef idx="3">
-            <a:schemeClr val="accent1"/>
-          </a:fillRef>
-          <a:effectRef idx="2">
-            <a:schemeClr val="accent1"/>
-          </a:effectRef>
-          <a:fontRef idx="minor">
-            <a:schemeClr val="lt1"/>
-          </a:fontRef>
-        </p:style>
-        <p:txBody>
-          <a:bodyPr rtlCol="0" anchor="ctr"/>
-          <a:lstStyle/>
-          <a:p>
-            <a:pPr algn="ctr"/>
-          </a:p>
-        </p:txBody>
-      </p:sp>
-      <p:sp>
-        <p:nvSpPr>
-          <p:cNvPr id="8" name="TextBox 7"/>
-          <p:cNvSpPr txBox="1"/>
-          <p:nvPr/>
-        </p:nvSpPr>
-        <p:spPr>
-          <a:xfrm>
-            <a:off x="603503" y="1152144"/>
-            <a:ext cx="3438144" cy="274320"/>
-          </a:xfrm>
-          <a:prstGeom prst="rect">
-            <a:avLst/>
-          </a:prstGeom>
-          <a:noFill/>
-        </p:spPr>
-        <p:txBody>
-          <a:bodyPr wrap="square">
-            <a:spAutoFit/>
-          </a:bodyPr>
-          <a:lstStyle/>
-          <a:p>
-            <a:pPr algn="l"/>
-            <a:r>
-              <a:rPr sz="1000" b="1" i="0">
-                <a:solidFill>
-                  <a:srgbClr val="1C1917"/>
-                </a:solidFill>
-                <a:latin typeface="Calibri"/>
-              </a:rPr>
-              <a:t>Account Closure</a:t>
-            </a:r>
-          </a:p>
-        </p:txBody>
-      </p:sp>
-      <p:sp>
-        <p:nvSpPr>
-          <p:cNvPr id="9" name="Rectangle 8"/>
-          <p:cNvSpPr/>
-          <p:nvPr/>
-        </p:nvSpPr>
-        <p:spPr>
-          <a:xfrm>
-            <a:off x="603503" y="1463039"/>
-            <a:ext cx="621792" cy="237744"/>
+          <a:effectLst/>
+        </p:spPr>
+        <p:style>
+          <a:lnRef idx="1">
+            <a:schemeClr val="accent1"/>
+          </a:lnRef>
+          <a:fillRef idx="3">
+            <a:schemeClr val="accent1"/>
+          </a:fillRef>
+          <a:effectRef idx="2">
+            <a:schemeClr val="accent1"/>
+          </a:effectRef>
+          <a:fontRef idx="minor">
+            <a:schemeClr val="lt1"/>
+          </a:fontRef>
+        </p:style>
+        <p:txBody>
+          <a:bodyPr rtlCol="0" anchor="ctr"/>
+          <a:lstStyle/>
+          <a:p>
+            <a:pPr algn="ctr"/>
+          </a:p>
+        </p:txBody>
+      </p:sp>
+      <p:sp>
+        <p:nvSpPr>
+          <p:cNvPr id="98" name="Rectangle 97"/>
+          <p:cNvSpPr/>
+          <p:nvPr/>
+        </p:nvSpPr>
+        <p:spPr>
+          <a:xfrm>
+            <a:off x="438912" y="1060704"/>
+            <a:ext cx="2148840" cy="54864"/>
           </a:xfrm>
           <a:prstGeom prst="rect">
             <a:avLst/>
@@ -28222,310 +28248,205 @@
           <a:ln>
             <a:noFill/>
           </a:ln>
-        </p:spPr>
-        <p:style>
-          <a:lnRef idx="1">
-            <a:schemeClr val="accent1"/>
-          </a:lnRef>
-          <a:fillRef idx="3">
-            <a:schemeClr val="accent1"/>
-          </a:fillRef>
-          <a:effectRef idx="2">
-            <a:schemeClr val="accent1"/>
-          </a:effectRef>
-          <a:fontRef idx="minor">
-            <a:schemeClr val="lt1"/>
-          </a:fontRef>
-        </p:style>
-        <p:txBody>
-          <a:bodyPr rtlCol="0" anchor="ctr"/>
-          <a:lstStyle/>
-          <a:p>
-            <a:pPr algn="ctr"/>
-          </a:p>
-        </p:txBody>
-      </p:sp>
-      <p:sp>
-        <p:nvSpPr>
-          <p:cNvPr id="10" name="TextBox 9"/>
-          <p:cNvSpPr txBox="1"/>
-          <p:nvPr/>
-        </p:nvSpPr>
-        <p:spPr>
-          <a:xfrm>
-            <a:off x="676656" y="1481328"/>
-            <a:ext cx="530352" cy="201168"/>
-          </a:xfrm>
-          <a:prstGeom prst="rect">
-            <a:avLst/>
-          </a:prstGeom>
-          <a:noFill/>
-        </p:spPr>
-        <p:txBody>
-          <a:bodyPr wrap="square">
-            <a:spAutoFit/>
-          </a:bodyPr>
-          <a:lstStyle/>
-          <a:p>
-            <a:pPr algn="l"/>
-            <a:r>
-              <a:rPr sz="800" b="1" i="0">
-                <a:solidFill>
-                  <a:srgbClr val="FFFFFF"/>
-                </a:solidFill>
-                <a:latin typeface="Calibri"/>
-              </a:rPr>
-              <a:t>4 steps</a:t>
-            </a:r>
-          </a:p>
-        </p:txBody>
-      </p:sp>
-      <p:sp>
-        <p:nvSpPr>
-          <p:cNvPr id="11" name="TextBox 10"/>
-          <p:cNvSpPr txBox="1"/>
-          <p:nvPr/>
-        </p:nvSpPr>
-        <p:spPr>
-          <a:xfrm>
-            <a:off x="1316736" y="1481328"/>
-            <a:ext cx="2706623" cy="201168"/>
-          </a:xfrm>
-          <a:prstGeom prst="rect">
-            <a:avLst/>
-          </a:prstGeom>
-          <a:noFill/>
-        </p:spPr>
-        <p:txBody>
-          <a:bodyPr wrap="square">
-            <a:spAutoFit/>
-          </a:bodyPr>
-          <a:lstStyle/>
-          <a:p>
-            <a:pPr algn="l"/>
-            <a:r>
-              <a:rPr sz="800" b="0" i="1">
-                <a:solidFill>
-                  <a:srgbClr val="78716C"/>
-                </a:solidFill>
-                <a:latin typeface="Calibri"/>
-              </a:rPr>
-              <a:t>FCA BCOBS 4A cooling-off</a:t>
-            </a:r>
-          </a:p>
-        </p:txBody>
-      </p:sp>
-      <p:sp>
-        <p:nvSpPr>
-          <p:cNvPr id="12" name="Rectangle 11"/>
-          <p:cNvSpPr/>
-          <p:nvPr/>
-        </p:nvSpPr>
-        <p:spPr>
-          <a:xfrm>
-            <a:off x="603503" y="1755648"/>
-            <a:ext cx="3383279" cy="365760"/>
-          </a:xfrm>
-          <a:prstGeom prst="rect">
-            <a:avLst/>
-          </a:prstGeom>
-          <a:solidFill>
-            <a:srgbClr val="F5F5F4"/>
+          <a:effectLst/>
+        </p:spPr>
+        <p:style>
+          <a:lnRef idx="1">
+            <a:schemeClr val="accent1"/>
+          </a:lnRef>
+          <a:fillRef idx="3">
+            <a:schemeClr val="accent1"/>
+          </a:fillRef>
+          <a:effectRef idx="2">
+            <a:schemeClr val="accent1"/>
+          </a:effectRef>
+          <a:fontRef idx="minor">
+            <a:schemeClr val="lt1"/>
+          </a:fontRef>
+        </p:style>
+        <p:txBody>
+          <a:bodyPr rtlCol="0" anchor="ctr"/>
+          <a:lstStyle/>
+          <a:p>
+            <a:pPr algn="ctr"/>
+          </a:p>
+        </p:txBody>
+      </p:sp>
+      <p:sp>
+        <p:nvSpPr>
+          <p:cNvPr id="99" name="TextBox 98"/>
+          <p:cNvSpPr txBox="1"/>
+          <p:nvPr/>
+        </p:nvSpPr>
+        <p:spPr>
+          <a:xfrm>
+            <a:off x="585216" y="1188719"/>
+            <a:ext cx="1892808" cy="420624"/>
+          </a:xfrm>
+          <a:prstGeom prst="rect">
+            <a:avLst/>
+          </a:prstGeom>
+          <a:noFill/>
+        </p:spPr>
+        <p:txBody>
+          <a:bodyPr wrap="square" anchor="t" lIns="12700" rIns="12700" tIns="0" bIns="0">
+            <a:spAutoFit/>
+          </a:bodyPr>
+          <a:lstStyle/>
+          <a:p>
+            <a:r>
+              <a:rPr sz="1000" b="1">
+                <a:solidFill>
+                  <a:srgbClr val="1C1917"/>
+                </a:solidFill>
+                <a:latin typeface="Calibri"/>
+              </a:rPr>
+              <a:t>Account Closure</a:t>
+            </a:r>
+          </a:p>
+        </p:txBody>
+      </p:sp>
+      <p:sp>
+        <p:nvSpPr>
+          <p:cNvPr id="100" name="Rectangle 99"/>
+          <p:cNvSpPr/>
+          <p:nvPr/>
+        </p:nvSpPr>
+        <p:spPr>
+          <a:xfrm>
+            <a:off x="585216" y="1664207"/>
+            <a:ext cx="713232" cy="219456"/>
+          </a:xfrm>
+          <a:prstGeom prst="rect">
+            <a:avLst/>
+          </a:prstGeom>
+          <a:solidFill>
+            <a:srgbClr val="DA291C"/>
           </a:solidFill>
           <a:ln>
             <a:noFill/>
           </a:ln>
-        </p:spPr>
-        <p:style>
-          <a:lnRef idx="1">
-            <a:schemeClr val="accent1"/>
-          </a:lnRef>
-          <a:fillRef idx="3">
-            <a:schemeClr val="accent1"/>
-          </a:fillRef>
-          <a:effectRef idx="2">
-            <a:schemeClr val="accent1"/>
-          </a:effectRef>
-          <a:fontRef idx="minor">
-            <a:schemeClr val="lt1"/>
-          </a:fontRef>
-        </p:style>
-        <p:txBody>
-          <a:bodyPr rtlCol="0" anchor="ctr"/>
-          <a:lstStyle/>
-          <a:p>
-            <a:pPr algn="ctr"/>
-          </a:p>
-        </p:txBody>
-      </p:sp>
-      <p:sp>
-        <p:nvSpPr>
-          <p:cNvPr id="13" name="TextBox 12"/>
-          <p:cNvSpPr txBox="1"/>
-          <p:nvPr/>
-        </p:nvSpPr>
-        <p:spPr>
-          <a:xfrm>
-            <a:off x="694944" y="1810512"/>
-            <a:ext cx="3200399" cy="256032"/>
-          </a:xfrm>
-          <a:prstGeom prst="rect">
-            <a:avLst/>
-          </a:prstGeom>
-          <a:noFill/>
-        </p:spPr>
-        <p:txBody>
-          <a:bodyPr wrap="square">
-            <a:spAutoFit/>
-          </a:bodyPr>
-          <a:lstStyle/>
-          <a:p>
-            <a:pPr algn="l"/>
-            <a:r>
-              <a:rPr sz="750" b="0" i="1">
+          <a:effectLst/>
+        </p:spPr>
+        <p:style>
+          <a:lnRef idx="1">
+            <a:schemeClr val="accent1"/>
+          </a:lnRef>
+          <a:fillRef idx="3">
+            <a:schemeClr val="accent1"/>
+          </a:fillRef>
+          <a:effectRef idx="2">
+            <a:schemeClr val="accent1"/>
+          </a:effectRef>
+          <a:fontRef idx="minor">
+            <a:schemeClr val="lt1"/>
+          </a:fontRef>
+        </p:style>
+        <p:txBody>
+          <a:bodyPr rtlCol="0" anchor="ctr" wrap="none" lIns="38100" rIns="38100" tIns="0" bIns="0"/>
+          <a:lstStyle/>
+          <a:p>
+            <a:pPr algn="ctr"/>
+            <a:r>
+              <a:rPr sz="750" b="1">
+                <a:solidFill>
+                  <a:srgbClr val="FFFFFF"/>
+                </a:solidFill>
+                <a:latin typeface="Calibri"/>
+              </a:rPr>
+              <a:t>4 steps</a:t>
+            </a:r>
+          </a:p>
+        </p:txBody>
+      </p:sp>
+      <p:sp>
+        <p:nvSpPr>
+          <p:cNvPr id="101" name="TextBox 100"/>
+          <p:cNvSpPr txBox="1"/>
+          <p:nvPr/>
+        </p:nvSpPr>
+        <p:spPr>
+          <a:xfrm>
+            <a:off x="585216" y="1956815"/>
+            <a:ext cx="1892808" cy="310896"/>
+          </a:xfrm>
+          <a:prstGeom prst="rect">
+            <a:avLst/>
+          </a:prstGeom>
+          <a:noFill/>
+        </p:spPr>
+        <p:txBody>
+          <a:bodyPr wrap="square" anchor="t" lIns="12700" rIns="12700" tIns="0" bIns="0">
+            <a:spAutoFit/>
+          </a:bodyPr>
+          <a:lstStyle/>
+          <a:p>
+            <a:r>
+              <a:rPr sz="750" b="0">
                 <a:solidFill>
                   <a:srgbClr val="78716C"/>
                 </a:solidFill>
                 <a:latin typeface="Calibri"/>
               </a:rPr>
-              <a:t>Self-serve · No branch · No call · No paper</a:t>
-            </a:r>
-          </a:p>
-        </p:txBody>
-      </p:sp>
-      <p:sp>
-        <p:nvSpPr>
-          <p:cNvPr id="14" name="Rectangle 13"/>
-          <p:cNvSpPr/>
-          <p:nvPr/>
-        </p:nvSpPr>
-        <p:spPr>
-          <a:xfrm>
-            <a:off x="4315967" y="1060704"/>
-            <a:ext cx="3712463" cy="1261872"/>
+              <a:t>FCA BCOBS · 24h cooling-off</a:t>
+            </a:r>
+          </a:p>
+        </p:txBody>
+      </p:sp>
+      <p:sp>
+        <p:nvSpPr>
+          <p:cNvPr id="102" name="Rectangle 101"/>
+          <p:cNvSpPr/>
+          <p:nvPr/>
+        </p:nvSpPr>
+        <p:spPr>
+          <a:xfrm>
+            <a:off x="2734056" y="1060704"/>
+            <a:ext cx="2148840" cy="1261872"/>
           </a:xfrm>
           <a:prstGeom prst="rect">
             <a:avLst/>
           </a:prstGeom>
           <a:solidFill>
             <a:srgbClr val="FFFFFF"/>
-          </a:solidFill>
-          <a:ln w="9525">
-            <a:solidFill>
-              <a:srgbClr val="D6D3D1"/>
-            </a:solidFill>
-          </a:ln>
-        </p:spPr>
-        <p:style>
-          <a:lnRef idx="1">
-            <a:schemeClr val="accent1"/>
-          </a:lnRef>
-          <a:fillRef idx="3">
-            <a:schemeClr val="accent1"/>
-          </a:fillRef>
-          <a:effectRef idx="2">
-            <a:schemeClr val="accent1"/>
-          </a:effectRef>
-          <a:fontRef idx="minor">
-            <a:schemeClr val="lt1"/>
-          </a:fontRef>
-        </p:style>
-        <p:txBody>
-          <a:bodyPr rtlCol="0" anchor="ctr"/>
-          <a:lstStyle/>
-          <a:p>
-            <a:pPr algn="ctr"/>
-          </a:p>
-        </p:txBody>
-      </p:sp>
-      <p:sp>
-        <p:nvSpPr>
-          <p:cNvPr id="15" name="Rectangle 14"/>
-          <p:cNvSpPr/>
-          <p:nvPr/>
-        </p:nvSpPr>
-        <p:spPr>
-          <a:xfrm>
-            <a:off x="4315967" y="1060704"/>
-            <a:ext cx="3712463" cy="50292"/>
-          </a:xfrm>
-          <a:prstGeom prst="rect">
-            <a:avLst/>
-          </a:prstGeom>
-          <a:solidFill>
-            <a:srgbClr val="DA291C"/>
           </a:solidFill>
           <a:ln>
             <a:noFill/>
           </a:ln>
-        </p:spPr>
-        <p:style>
-          <a:lnRef idx="1">
-            <a:schemeClr val="accent1"/>
-          </a:lnRef>
-          <a:fillRef idx="3">
-            <a:schemeClr val="accent1"/>
-          </a:fillRef>
-          <a:effectRef idx="2">
-            <a:schemeClr val="accent1"/>
-          </a:effectRef>
-          <a:fontRef idx="minor">
-            <a:schemeClr val="lt1"/>
-          </a:fontRef>
-        </p:style>
-        <p:txBody>
-          <a:bodyPr rtlCol="0" anchor="ctr"/>
-          <a:lstStyle/>
-          <a:p>
-            <a:pPr algn="ctr"/>
-          </a:p>
-        </p:txBody>
-      </p:sp>
-      <p:sp>
-        <p:nvSpPr>
-          <p:cNvPr id="16" name="TextBox 15"/>
-          <p:cNvSpPr txBox="1"/>
-          <p:nvPr/>
-        </p:nvSpPr>
-        <p:spPr>
-          <a:xfrm>
-            <a:off x="4480559" y="1152144"/>
-            <a:ext cx="3438144" cy="274320"/>
-          </a:xfrm>
-          <a:prstGeom prst="rect">
-            <a:avLst/>
-          </a:prstGeom>
-          <a:noFill/>
-        </p:spPr>
-        <p:txBody>
-          <a:bodyPr wrap="square">
-            <a:spAutoFit/>
-          </a:bodyPr>
-          <a:lstStyle/>
-          <a:p>
-            <a:pPr algn="l"/>
-            <a:r>
-              <a:rPr sz="1000" b="1" i="0">
-                <a:solidFill>
-                  <a:srgbClr val="1C1917"/>
-                </a:solidFill>
-                <a:latin typeface="Calibri"/>
-              </a:rPr>
-              <a:t>Partner Unreachable</a:t>
-            </a:r>
-          </a:p>
-        </p:txBody>
-      </p:sp>
-      <p:sp>
-        <p:nvSpPr>
-          <p:cNvPr id="17" name="Rectangle 16"/>
-          <p:cNvSpPr/>
-          <p:nvPr/>
-        </p:nvSpPr>
-        <p:spPr>
-          <a:xfrm>
-            <a:off x="4480559" y="1463039"/>
-            <a:ext cx="621792" cy="237744"/>
+          <a:effectLst/>
+        </p:spPr>
+        <p:style>
+          <a:lnRef idx="1">
+            <a:schemeClr val="accent1"/>
+          </a:lnRef>
+          <a:fillRef idx="3">
+            <a:schemeClr val="accent1"/>
+          </a:fillRef>
+          <a:effectRef idx="2">
+            <a:schemeClr val="accent1"/>
+          </a:effectRef>
+          <a:fontRef idx="minor">
+            <a:schemeClr val="lt1"/>
+          </a:fontRef>
+        </p:style>
+        <p:txBody>
+          <a:bodyPr rtlCol="0" anchor="ctr"/>
+          <a:lstStyle/>
+          <a:p>
+            <a:pPr algn="ctr"/>
+          </a:p>
+        </p:txBody>
+      </p:sp>
+      <p:sp>
+        <p:nvSpPr>
+          <p:cNvPr id="103" name="Rectangle 102"/>
+          <p:cNvSpPr/>
+          <p:nvPr/>
+        </p:nvSpPr>
+        <p:spPr>
+          <a:xfrm>
+            <a:off x="2734056" y="1060704"/>
+            <a:ext cx="2148840" cy="54864"/>
           </a:xfrm>
           <a:prstGeom prst="rect">
             <a:avLst/>
@@ -28536,310 +28457,205 @@
           <a:ln>
             <a:noFill/>
           </a:ln>
-        </p:spPr>
-        <p:style>
-          <a:lnRef idx="1">
-            <a:schemeClr val="accent1"/>
-          </a:lnRef>
-          <a:fillRef idx="3">
-            <a:schemeClr val="accent1"/>
-          </a:fillRef>
-          <a:effectRef idx="2">
-            <a:schemeClr val="accent1"/>
-          </a:effectRef>
-          <a:fontRef idx="minor">
-            <a:schemeClr val="lt1"/>
-          </a:fontRef>
-        </p:style>
-        <p:txBody>
-          <a:bodyPr rtlCol="0" anchor="ctr"/>
-          <a:lstStyle/>
-          <a:p>
-            <a:pPr algn="ctr"/>
-          </a:p>
-        </p:txBody>
-      </p:sp>
-      <p:sp>
-        <p:nvSpPr>
-          <p:cNvPr id="18" name="TextBox 17"/>
-          <p:cNvSpPr txBox="1"/>
-          <p:nvPr/>
-        </p:nvSpPr>
-        <p:spPr>
-          <a:xfrm>
-            <a:off x="4553711" y="1481328"/>
-            <a:ext cx="530352" cy="201168"/>
-          </a:xfrm>
-          <a:prstGeom prst="rect">
-            <a:avLst/>
-          </a:prstGeom>
-          <a:noFill/>
-        </p:spPr>
-        <p:txBody>
-          <a:bodyPr wrap="square">
-            <a:spAutoFit/>
-          </a:bodyPr>
-          <a:lstStyle/>
-          <a:p>
-            <a:pPr algn="l"/>
-            <a:r>
-              <a:rPr sz="800" b="1" i="0">
-                <a:solidFill>
-                  <a:srgbClr val="FFFFFF"/>
-                </a:solidFill>
-                <a:latin typeface="Calibri"/>
-              </a:rPr>
-              <a:t>4 steps</a:t>
-            </a:r>
-          </a:p>
-        </p:txBody>
-      </p:sp>
-      <p:sp>
-        <p:nvSpPr>
-          <p:cNvPr id="19" name="TextBox 18"/>
-          <p:cNvSpPr txBox="1"/>
-          <p:nvPr/>
-        </p:nvSpPr>
-        <p:spPr>
-          <a:xfrm>
-            <a:off x="5193791" y="1481328"/>
-            <a:ext cx="2706623" cy="201168"/>
-          </a:xfrm>
-          <a:prstGeom prst="rect">
-            <a:avLst/>
-          </a:prstGeom>
-          <a:noFill/>
-        </p:spPr>
-        <p:txBody>
-          <a:bodyPr wrap="square">
-            <a:spAutoFit/>
-          </a:bodyPr>
-          <a:lstStyle/>
-          <a:p>
-            <a:pPr algn="l"/>
-            <a:r>
-              <a:rPr sz="800" b="0" i="1">
-                <a:solidFill>
-                  <a:srgbClr val="78716C"/>
-                </a:solidFill>
-                <a:latin typeface="Calibri"/>
-              </a:rPr>
-              <a:t>FCA PS22/9 · 4 regulatory branches</a:t>
-            </a:r>
-          </a:p>
-        </p:txBody>
-      </p:sp>
-      <p:sp>
-        <p:nvSpPr>
-          <p:cNvPr id="20" name="Rectangle 19"/>
-          <p:cNvSpPr/>
-          <p:nvPr/>
-        </p:nvSpPr>
-        <p:spPr>
-          <a:xfrm>
-            <a:off x="4480559" y="1755648"/>
-            <a:ext cx="3383279" cy="365760"/>
-          </a:xfrm>
-          <a:prstGeom prst="rect">
-            <a:avLst/>
-          </a:prstGeom>
-          <a:solidFill>
-            <a:srgbClr val="F5F5F4"/>
+          <a:effectLst/>
+        </p:spPr>
+        <p:style>
+          <a:lnRef idx="1">
+            <a:schemeClr val="accent1"/>
+          </a:lnRef>
+          <a:fillRef idx="3">
+            <a:schemeClr val="accent1"/>
+          </a:fillRef>
+          <a:effectRef idx="2">
+            <a:schemeClr val="accent1"/>
+          </a:effectRef>
+          <a:fontRef idx="minor">
+            <a:schemeClr val="lt1"/>
+          </a:fontRef>
+        </p:style>
+        <p:txBody>
+          <a:bodyPr rtlCol="0" anchor="ctr"/>
+          <a:lstStyle/>
+          <a:p>
+            <a:pPr algn="ctr"/>
+          </a:p>
+        </p:txBody>
+      </p:sp>
+      <p:sp>
+        <p:nvSpPr>
+          <p:cNvPr id="104" name="TextBox 103"/>
+          <p:cNvSpPr txBox="1"/>
+          <p:nvPr/>
+        </p:nvSpPr>
+        <p:spPr>
+          <a:xfrm>
+            <a:off x="2880360" y="1188719"/>
+            <a:ext cx="1892808" cy="420624"/>
+          </a:xfrm>
+          <a:prstGeom prst="rect">
+            <a:avLst/>
+          </a:prstGeom>
+          <a:noFill/>
+        </p:spPr>
+        <p:txBody>
+          <a:bodyPr wrap="square" anchor="t" lIns="12700" rIns="12700" tIns="0" bIns="0">
+            <a:spAutoFit/>
+          </a:bodyPr>
+          <a:lstStyle/>
+          <a:p>
+            <a:r>
+              <a:rPr sz="1000" b="1">
+                <a:solidFill>
+                  <a:srgbClr val="1C1917"/>
+                </a:solidFill>
+                <a:latin typeface="Calibri"/>
+              </a:rPr>
+              <a:t>ID Register (KYB)</a:t>
+            </a:r>
+          </a:p>
+        </p:txBody>
+      </p:sp>
+      <p:sp>
+        <p:nvSpPr>
+          <p:cNvPr id="105" name="Rectangle 104"/>
+          <p:cNvSpPr/>
+          <p:nvPr/>
+        </p:nvSpPr>
+        <p:spPr>
+          <a:xfrm>
+            <a:off x="2880360" y="1664207"/>
+            <a:ext cx="713232" cy="219456"/>
+          </a:xfrm>
+          <a:prstGeom prst="rect">
+            <a:avLst/>
+          </a:prstGeom>
+          <a:solidFill>
+            <a:srgbClr val="DA291C"/>
           </a:solidFill>
           <a:ln>
             <a:noFill/>
           </a:ln>
-        </p:spPr>
-        <p:style>
-          <a:lnRef idx="1">
-            <a:schemeClr val="accent1"/>
-          </a:lnRef>
-          <a:fillRef idx="3">
-            <a:schemeClr val="accent1"/>
-          </a:fillRef>
-          <a:effectRef idx="2">
-            <a:schemeClr val="accent1"/>
-          </a:effectRef>
-          <a:fontRef idx="minor">
-            <a:schemeClr val="lt1"/>
-          </a:fontRef>
-        </p:style>
-        <p:txBody>
-          <a:bodyPr rtlCol="0" anchor="ctr"/>
-          <a:lstStyle/>
-          <a:p>
-            <a:pPr algn="ctr"/>
-          </a:p>
-        </p:txBody>
-      </p:sp>
-      <p:sp>
-        <p:nvSpPr>
-          <p:cNvPr id="21" name="TextBox 20"/>
-          <p:cNvSpPr txBox="1"/>
-          <p:nvPr/>
-        </p:nvSpPr>
-        <p:spPr>
-          <a:xfrm>
-            <a:off x="4571999" y="1810512"/>
-            <a:ext cx="3200399" cy="256032"/>
-          </a:xfrm>
-          <a:prstGeom prst="rect">
-            <a:avLst/>
-          </a:prstGeom>
-          <a:noFill/>
-        </p:spPr>
-        <p:txBody>
-          <a:bodyPr wrap="square">
-            <a:spAutoFit/>
-          </a:bodyPr>
-          <a:lstStyle/>
-          <a:p>
-            <a:pPr algn="l"/>
-            <a:r>
-              <a:rPr sz="750" b="0" i="1">
+          <a:effectLst/>
+        </p:spPr>
+        <p:style>
+          <a:lnRef idx="1">
+            <a:schemeClr val="accent1"/>
+          </a:lnRef>
+          <a:fillRef idx="3">
+            <a:schemeClr val="accent1"/>
+          </a:fillRef>
+          <a:effectRef idx="2">
+            <a:schemeClr val="accent1"/>
+          </a:effectRef>
+          <a:fontRef idx="minor">
+            <a:schemeClr val="lt1"/>
+          </a:fontRef>
+        </p:style>
+        <p:txBody>
+          <a:bodyPr rtlCol="0" anchor="ctr" wrap="none" lIns="38100" rIns="38100" tIns="0" bIns="0"/>
+          <a:lstStyle/>
+          <a:p>
+            <a:pPr algn="ctr"/>
+            <a:r>
+              <a:rPr sz="750" b="1">
+                <a:solidFill>
+                  <a:srgbClr val="FFFFFF"/>
+                </a:solidFill>
+                <a:latin typeface="Calibri"/>
+              </a:rPr>
+              <a:t>4 steps</a:t>
+            </a:r>
+          </a:p>
+        </p:txBody>
+      </p:sp>
+      <p:sp>
+        <p:nvSpPr>
+          <p:cNvPr id="106" name="TextBox 105"/>
+          <p:cNvSpPr txBox="1"/>
+          <p:nvPr/>
+        </p:nvSpPr>
+        <p:spPr>
+          <a:xfrm>
+            <a:off x="2880360" y="1956815"/>
+            <a:ext cx="1892808" cy="310896"/>
+          </a:xfrm>
+          <a:prstGeom prst="rect">
+            <a:avLst/>
+          </a:prstGeom>
+          <a:noFill/>
+        </p:spPr>
+        <p:txBody>
+          <a:bodyPr wrap="square" anchor="t" lIns="12700" rIns="12700" tIns="0" bIns="0">
+            <a:spAutoFit/>
+          </a:bodyPr>
+          <a:lstStyle/>
+          <a:p>
+            <a:r>
+              <a:rPr sz="750" b="0">
                 <a:solidFill>
                   <a:srgbClr val="78716C"/>
                 </a:solidFill>
                 <a:latin typeface="Calibri"/>
               </a:rPr>
-              <a:t>Self-serve · No branch · No call · No paper</a:t>
-            </a:r>
-          </a:p>
-        </p:txBody>
-      </p:sp>
-      <p:sp>
-        <p:nvSpPr>
-          <p:cNvPr id="22" name="Rectangle 21"/>
-          <p:cNvSpPr/>
-          <p:nvPr/>
-        </p:nvSpPr>
-        <p:spPr>
-          <a:xfrm>
-            <a:off x="8193023" y="1060704"/>
-            <a:ext cx="3712463" cy="1261872"/>
+              <a:t>GOV.UK One Login · KYC lists 1–3</a:t>
+            </a:r>
+          </a:p>
+        </p:txBody>
+      </p:sp>
+      <p:sp>
+        <p:nvSpPr>
+          <p:cNvPr id="107" name="Rectangle 106"/>
+          <p:cNvSpPr/>
+          <p:nvPr/>
+        </p:nvSpPr>
+        <p:spPr>
+          <a:xfrm>
+            <a:off x="5029200" y="1060704"/>
+            <a:ext cx="2148840" cy="1261872"/>
           </a:xfrm>
           <a:prstGeom prst="rect">
             <a:avLst/>
           </a:prstGeom>
           <a:solidFill>
             <a:srgbClr val="FFFFFF"/>
-          </a:solidFill>
-          <a:ln w="9525">
-            <a:solidFill>
-              <a:srgbClr val="D6D3D1"/>
-            </a:solidFill>
-          </a:ln>
-        </p:spPr>
-        <p:style>
-          <a:lnRef idx="1">
-            <a:schemeClr val="accent1"/>
-          </a:lnRef>
-          <a:fillRef idx="3">
-            <a:schemeClr val="accent1"/>
-          </a:fillRef>
-          <a:effectRef idx="2">
-            <a:schemeClr val="accent1"/>
-          </a:effectRef>
-          <a:fontRef idx="minor">
-            <a:schemeClr val="lt1"/>
-          </a:fontRef>
-        </p:style>
-        <p:txBody>
-          <a:bodyPr rtlCol="0" anchor="ctr"/>
-          <a:lstStyle/>
-          <a:p>
-            <a:pPr algn="ctr"/>
-          </a:p>
-        </p:txBody>
-      </p:sp>
-      <p:sp>
-        <p:nvSpPr>
-          <p:cNvPr id="23" name="Rectangle 22"/>
-          <p:cNvSpPr/>
-          <p:nvPr/>
-        </p:nvSpPr>
-        <p:spPr>
-          <a:xfrm>
-            <a:off x="8193023" y="1060704"/>
-            <a:ext cx="3712463" cy="50292"/>
-          </a:xfrm>
-          <a:prstGeom prst="rect">
-            <a:avLst/>
-          </a:prstGeom>
-          <a:solidFill>
-            <a:srgbClr val="DA291C"/>
           </a:solidFill>
           <a:ln>
             <a:noFill/>
           </a:ln>
-        </p:spPr>
-        <p:style>
-          <a:lnRef idx="1">
-            <a:schemeClr val="accent1"/>
-          </a:lnRef>
-          <a:fillRef idx="3">
-            <a:schemeClr val="accent1"/>
-          </a:fillRef>
-          <a:effectRef idx="2">
-            <a:schemeClr val="accent1"/>
-          </a:effectRef>
-          <a:fontRef idx="minor">
-            <a:schemeClr val="lt1"/>
-          </a:fontRef>
-        </p:style>
-        <p:txBody>
-          <a:bodyPr rtlCol="0" anchor="ctr"/>
-          <a:lstStyle/>
-          <a:p>
-            <a:pPr algn="ctr"/>
-          </a:p>
-        </p:txBody>
-      </p:sp>
-      <p:sp>
-        <p:nvSpPr>
-          <p:cNvPr id="24" name="TextBox 23"/>
-          <p:cNvSpPr txBox="1"/>
-          <p:nvPr/>
-        </p:nvSpPr>
-        <p:spPr>
-          <a:xfrm>
-            <a:off x="8357615" y="1152144"/>
-            <a:ext cx="3438144" cy="274320"/>
-          </a:xfrm>
-          <a:prstGeom prst="rect">
-            <a:avLst/>
-          </a:prstGeom>
-          <a:noFill/>
-        </p:spPr>
-        <p:txBody>
-          <a:bodyPr wrap="square">
-            <a:spAutoFit/>
-          </a:bodyPr>
-          <a:lstStyle/>
-          <a:p>
-            <a:pPr algn="l"/>
-            <a:r>
-              <a:rPr sz="1000" b="1" i="0">
-                <a:solidFill>
-                  <a:srgbClr val="1C1917"/>
-                </a:solidFill>
-                <a:latin typeface="Calibri"/>
-              </a:rPr>
-              <a:t>Mandate Changes</a:t>
-            </a:r>
-          </a:p>
-        </p:txBody>
-      </p:sp>
-      <p:sp>
-        <p:nvSpPr>
-          <p:cNvPr id="25" name="Rectangle 24"/>
-          <p:cNvSpPr/>
-          <p:nvPr/>
-        </p:nvSpPr>
-        <p:spPr>
-          <a:xfrm>
-            <a:off x="8357615" y="1463039"/>
-            <a:ext cx="621792" cy="237744"/>
+          <a:effectLst/>
+        </p:spPr>
+        <p:style>
+          <a:lnRef idx="1">
+            <a:schemeClr val="accent1"/>
+          </a:lnRef>
+          <a:fillRef idx="3">
+            <a:schemeClr val="accent1"/>
+          </a:fillRef>
+          <a:effectRef idx="2">
+            <a:schemeClr val="accent1"/>
+          </a:effectRef>
+          <a:fontRef idx="minor">
+            <a:schemeClr val="lt1"/>
+          </a:fontRef>
+        </p:style>
+        <p:txBody>
+          <a:bodyPr rtlCol="0" anchor="ctr"/>
+          <a:lstStyle/>
+          <a:p>
+            <a:pPr algn="ctr"/>
+          </a:p>
+        </p:txBody>
+      </p:sp>
+      <p:sp>
+        <p:nvSpPr>
+          <p:cNvPr id="108" name="Rectangle 107"/>
+          <p:cNvSpPr/>
+          <p:nvPr/>
+        </p:nvSpPr>
+        <p:spPr>
+          <a:xfrm>
+            <a:off x="5029200" y="1060704"/>
+            <a:ext cx="2148840" cy="54864"/>
           </a:xfrm>
           <a:prstGeom prst="rect">
             <a:avLst/>
@@ -28850,310 +28666,205 @@
           <a:ln>
             <a:noFill/>
           </a:ln>
-        </p:spPr>
-        <p:style>
-          <a:lnRef idx="1">
-            <a:schemeClr val="accent1"/>
-          </a:lnRef>
-          <a:fillRef idx="3">
-            <a:schemeClr val="accent1"/>
-          </a:fillRef>
-          <a:effectRef idx="2">
-            <a:schemeClr val="accent1"/>
-          </a:effectRef>
-          <a:fontRef idx="minor">
-            <a:schemeClr val="lt1"/>
-          </a:fontRef>
-        </p:style>
-        <p:txBody>
-          <a:bodyPr rtlCol="0" anchor="ctr"/>
-          <a:lstStyle/>
-          <a:p>
-            <a:pPr algn="ctr"/>
-          </a:p>
-        </p:txBody>
-      </p:sp>
-      <p:sp>
-        <p:nvSpPr>
-          <p:cNvPr id="26" name="TextBox 25"/>
-          <p:cNvSpPr txBox="1"/>
-          <p:nvPr/>
-        </p:nvSpPr>
-        <p:spPr>
-          <a:xfrm>
-            <a:off x="8430767" y="1481328"/>
-            <a:ext cx="530352" cy="201168"/>
-          </a:xfrm>
-          <a:prstGeom prst="rect">
-            <a:avLst/>
-          </a:prstGeom>
-          <a:noFill/>
-        </p:spPr>
-        <p:txBody>
-          <a:bodyPr wrap="square">
-            <a:spAutoFit/>
-          </a:bodyPr>
-          <a:lstStyle/>
-          <a:p>
-            <a:pPr algn="l"/>
-            <a:r>
-              <a:rPr sz="800" b="1" i="0">
-                <a:solidFill>
-                  <a:srgbClr val="FFFFFF"/>
-                </a:solidFill>
-                <a:latin typeface="Calibri"/>
-              </a:rPr>
-              <a:t>6 steps</a:t>
-            </a:r>
-          </a:p>
-        </p:txBody>
-      </p:sp>
-      <p:sp>
-        <p:nvSpPr>
-          <p:cNvPr id="27" name="TextBox 26"/>
-          <p:cNvSpPr txBox="1"/>
-          <p:nvPr/>
-        </p:nvSpPr>
-        <p:spPr>
-          <a:xfrm>
-            <a:off x="9070847" y="1481328"/>
-            <a:ext cx="2706623" cy="201168"/>
-          </a:xfrm>
-          <a:prstGeom prst="rect">
-            <a:avLst/>
-          </a:prstGeom>
-          <a:noFill/>
-        </p:spPr>
-        <p:txBody>
-          <a:bodyPr wrap="square">
-            <a:spAutoFit/>
-          </a:bodyPr>
-          <a:lstStyle/>
-          <a:p>
-            <a:pPr algn="l"/>
-            <a:r>
-              <a:rPr sz="800" b="0" i="1">
-                <a:solidFill>
-                  <a:srgbClr val="78716C"/>
-                </a:solidFill>
-                <a:latin typeface="Calibri"/>
-              </a:rPr>
-              <a:t>MLR 2017 / GOV.UK One Login KYC</a:t>
-            </a:r>
-          </a:p>
-        </p:txBody>
-      </p:sp>
-      <p:sp>
-        <p:nvSpPr>
-          <p:cNvPr id="28" name="Rectangle 27"/>
-          <p:cNvSpPr/>
-          <p:nvPr/>
-        </p:nvSpPr>
-        <p:spPr>
-          <a:xfrm>
-            <a:off x="8357615" y="1755648"/>
-            <a:ext cx="3383279" cy="365760"/>
-          </a:xfrm>
-          <a:prstGeom prst="rect">
-            <a:avLst/>
-          </a:prstGeom>
-          <a:solidFill>
-            <a:srgbClr val="F5F5F4"/>
+          <a:effectLst/>
+        </p:spPr>
+        <p:style>
+          <a:lnRef idx="1">
+            <a:schemeClr val="accent1"/>
+          </a:lnRef>
+          <a:fillRef idx="3">
+            <a:schemeClr val="accent1"/>
+          </a:fillRef>
+          <a:effectRef idx="2">
+            <a:schemeClr val="accent1"/>
+          </a:effectRef>
+          <a:fontRef idx="minor">
+            <a:schemeClr val="lt1"/>
+          </a:fontRef>
+        </p:style>
+        <p:txBody>
+          <a:bodyPr rtlCol="0" anchor="ctr"/>
+          <a:lstStyle/>
+          <a:p>
+            <a:pPr algn="ctr"/>
+          </a:p>
+        </p:txBody>
+      </p:sp>
+      <p:sp>
+        <p:nvSpPr>
+          <p:cNvPr id="109" name="TextBox 108"/>
+          <p:cNvSpPr txBox="1"/>
+          <p:nvPr/>
+        </p:nvSpPr>
+        <p:spPr>
+          <a:xfrm>
+            <a:off x="5175504" y="1188719"/>
+            <a:ext cx="1892808" cy="420624"/>
+          </a:xfrm>
+          <a:prstGeom prst="rect">
+            <a:avLst/>
+          </a:prstGeom>
+          <a:noFill/>
+        </p:spPr>
+        <p:txBody>
+          <a:bodyPr wrap="square" anchor="t" lIns="12700" rIns="12700" tIns="0" bIns="0">
+            <a:spAutoFit/>
+          </a:bodyPr>
+          <a:lstStyle/>
+          <a:p>
+            <a:r>
+              <a:rPr sz="1000" b="1">
+                <a:solidFill>
+                  <a:srgbClr val="1C1917"/>
+                </a:solidFill>
+                <a:latin typeface="Calibri"/>
+              </a:rPr>
+              <a:t>Mandate Changes</a:t>
+            </a:r>
+          </a:p>
+        </p:txBody>
+      </p:sp>
+      <p:sp>
+        <p:nvSpPr>
+          <p:cNvPr id="110" name="Rectangle 109"/>
+          <p:cNvSpPr/>
+          <p:nvPr/>
+        </p:nvSpPr>
+        <p:spPr>
+          <a:xfrm>
+            <a:off x="5175504" y="1664207"/>
+            <a:ext cx="713232" cy="219456"/>
+          </a:xfrm>
+          <a:prstGeom prst="rect">
+            <a:avLst/>
+          </a:prstGeom>
+          <a:solidFill>
+            <a:srgbClr val="DA291C"/>
           </a:solidFill>
           <a:ln>
             <a:noFill/>
           </a:ln>
-        </p:spPr>
-        <p:style>
-          <a:lnRef idx="1">
-            <a:schemeClr val="accent1"/>
-          </a:lnRef>
-          <a:fillRef idx="3">
-            <a:schemeClr val="accent1"/>
-          </a:fillRef>
-          <a:effectRef idx="2">
-            <a:schemeClr val="accent1"/>
-          </a:effectRef>
-          <a:fontRef idx="minor">
-            <a:schemeClr val="lt1"/>
-          </a:fontRef>
-        </p:style>
-        <p:txBody>
-          <a:bodyPr rtlCol="0" anchor="ctr"/>
-          <a:lstStyle/>
-          <a:p>
-            <a:pPr algn="ctr"/>
-          </a:p>
-        </p:txBody>
-      </p:sp>
-      <p:sp>
-        <p:nvSpPr>
-          <p:cNvPr id="29" name="TextBox 28"/>
-          <p:cNvSpPr txBox="1"/>
-          <p:nvPr/>
-        </p:nvSpPr>
-        <p:spPr>
-          <a:xfrm>
-            <a:off x="8449055" y="1810512"/>
-            <a:ext cx="3200399" cy="256032"/>
-          </a:xfrm>
-          <a:prstGeom prst="rect">
-            <a:avLst/>
-          </a:prstGeom>
-          <a:noFill/>
-        </p:spPr>
-        <p:txBody>
-          <a:bodyPr wrap="square">
-            <a:spAutoFit/>
-          </a:bodyPr>
-          <a:lstStyle/>
-          <a:p>
-            <a:pPr algn="l"/>
-            <a:r>
-              <a:rPr sz="750" b="0" i="1">
+          <a:effectLst/>
+        </p:spPr>
+        <p:style>
+          <a:lnRef idx="1">
+            <a:schemeClr val="accent1"/>
+          </a:lnRef>
+          <a:fillRef idx="3">
+            <a:schemeClr val="accent1"/>
+          </a:fillRef>
+          <a:effectRef idx="2">
+            <a:schemeClr val="accent1"/>
+          </a:effectRef>
+          <a:fontRef idx="minor">
+            <a:schemeClr val="lt1"/>
+          </a:fontRef>
+        </p:style>
+        <p:txBody>
+          <a:bodyPr rtlCol="0" anchor="ctr" wrap="none" lIns="38100" rIns="38100" tIns="0" bIns="0"/>
+          <a:lstStyle/>
+          <a:p>
+            <a:pPr algn="ctr"/>
+            <a:r>
+              <a:rPr sz="750" b="1">
+                <a:solidFill>
+                  <a:srgbClr val="FFFFFF"/>
+                </a:solidFill>
+                <a:latin typeface="Calibri"/>
+              </a:rPr>
+              <a:t>6 steps</a:t>
+            </a:r>
+          </a:p>
+        </p:txBody>
+      </p:sp>
+      <p:sp>
+        <p:nvSpPr>
+          <p:cNvPr id="111" name="TextBox 110"/>
+          <p:cNvSpPr txBox="1"/>
+          <p:nvPr/>
+        </p:nvSpPr>
+        <p:spPr>
+          <a:xfrm>
+            <a:off x="5175504" y="1956815"/>
+            <a:ext cx="1892808" cy="310896"/>
+          </a:xfrm>
+          <a:prstGeom prst="rect">
+            <a:avLst/>
+          </a:prstGeom>
+          <a:noFill/>
+        </p:spPr>
+        <p:txBody>
+          <a:bodyPr wrap="square" anchor="t" lIns="12700" rIns="12700" tIns="0" bIns="0">
+            <a:spAutoFit/>
+          </a:bodyPr>
+          <a:lstStyle/>
+          <a:p>
+            <a:r>
+              <a:rPr sz="750" b="0">
                 <a:solidFill>
                   <a:srgbClr val="78716C"/>
                 </a:solidFill>
                 <a:latin typeface="Calibri"/>
               </a:rPr>
-              <a:t>Self-serve · No branch · No call · No paper</a:t>
-            </a:r>
-          </a:p>
-        </p:txBody>
-      </p:sp>
-      <p:sp>
-        <p:nvSpPr>
-          <p:cNvPr id="30" name="Rectangle 29"/>
-          <p:cNvSpPr/>
-          <p:nvPr/>
-        </p:nvSpPr>
-        <p:spPr>
-          <a:xfrm>
-            <a:off x="438912" y="2450591"/>
-            <a:ext cx="3712463" cy="1261872"/>
+              <a:t>MLR 2017 · full KYC/KYB</a:t>
+            </a:r>
+          </a:p>
+        </p:txBody>
+      </p:sp>
+      <p:sp>
+        <p:nvSpPr>
+          <p:cNvPr id="112" name="Rectangle 111"/>
+          <p:cNvSpPr/>
+          <p:nvPr/>
+        </p:nvSpPr>
+        <p:spPr>
+          <a:xfrm>
+            <a:off x="7324344" y="1060704"/>
+            <a:ext cx="2148840" cy="1261872"/>
           </a:xfrm>
           <a:prstGeom prst="rect">
             <a:avLst/>
           </a:prstGeom>
           <a:solidFill>
             <a:srgbClr val="FFFFFF"/>
-          </a:solidFill>
-          <a:ln w="9525">
-            <a:solidFill>
-              <a:srgbClr val="D6D3D1"/>
-            </a:solidFill>
-          </a:ln>
-        </p:spPr>
-        <p:style>
-          <a:lnRef idx="1">
-            <a:schemeClr val="accent1"/>
-          </a:lnRef>
-          <a:fillRef idx="3">
-            <a:schemeClr val="accent1"/>
-          </a:fillRef>
-          <a:effectRef idx="2">
-            <a:schemeClr val="accent1"/>
-          </a:effectRef>
-          <a:fontRef idx="minor">
-            <a:schemeClr val="lt1"/>
-          </a:fontRef>
-        </p:style>
-        <p:txBody>
-          <a:bodyPr rtlCol="0" anchor="ctr"/>
-          <a:lstStyle/>
-          <a:p>
-            <a:pPr algn="ctr"/>
-          </a:p>
-        </p:txBody>
-      </p:sp>
-      <p:sp>
-        <p:nvSpPr>
-          <p:cNvPr id="31" name="Rectangle 30"/>
-          <p:cNvSpPr/>
-          <p:nvPr/>
-        </p:nvSpPr>
-        <p:spPr>
-          <a:xfrm>
-            <a:off x="438912" y="2450591"/>
-            <a:ext cx="3712463" cy="50292"/>
-          </a:xfrm>
-          <a:prstGeom prst="rect">
-            <a:avLst/>
-          </a:prstGeom>
-          <a:solidFill>
-            <a:srgbClr val="DA291C"/>
           </a:solidFill>
           <a:ln>
             <a:noFill/>
           </a:ln>
-        </p:spPr>
-        <p:style>
-          <a:lnRef idx="1">
-            <a:schemeClr val="accent1"/>
-          </a:lnRef>
-          <a:fillRef idx="3">
-            <a:schemeClr val="accent1"/>
-          </a:fillRef>
-          <a:effectRef idx="2">
-            <a:schemeClr val="accent1"/>
-          </a:effectRef>
-          <a:fontRef idx="minor">
-            <a:schemeClr val="lt1"/>
-          </a:fontRef>
-        </p:style>
-        <p:txBody>
-          <a:bodyPr rtlCol="0" anchor="ctr"/>
-          <a:lstStyle/>
-          <a:p>
-            <a:pPr algn="ctr"/>
-          </a:p>
-        </p:txBody>
-      </p:sp>
-      <p:sp>
-        <p:nvSpPr>
-          <p:cNvPr id="32" name="TextBox 31"/>
-          <p:cNvSpPr txBox="1"/>
-          <p:nvPr/>
-        </p:nvSpPr>
-        <p:spPr>
-          <a:xfrm>
-            <a:off x="603503" y="2542032"/>
-            <a:ext cx="3438144" cy="274320"/>
-          </a:xfrm>
-          <a:prstGeom prst="rect">
-            <a:avLst/>
-          </a:prstGeom>
-          <a:noFill/>
-        </p:spPr>
-        <p:txBody>
-          <a:bodyPr wrap="square">
-            <a:spAutoFit/>
-          </a:bodyPr>
-          <a:lstStyle/>
-          <a:p>
-            <a:pPr algn="l"/>
-            <a:r>
-              <a:rPr sz="1000" b="1" i="0">
-                <a:solidFill>
-                  <a:srgbClr val="1C1917"/>
-                </a:solidFill>
-                <a:latin typeface="Calibri"/>
-              </a:rPr>
-              <a:t>Bulk Payments / Wages</a:t>
-            </a:r>
-          </a:p>
-        </p:txBody>
-      </p:sp>
-      <p:sp>
-        <p:nvSpPr>
-          <p:cNvPr id="33" name="Rectangle 32"/>
-          <p:cNvSpPr/>
-          <p:nvPr/>
-        </p:nvSpPr>
-        <p:spPr>
-          <a:xfrm>
-            <a:off x="603503" y="2852927"/>
-            <a:ext cx="621792" cy="237744"/>
+          <a:effectLst/>
+        </p:spPr>
+        <p:style>
+          <a:lnRef idx="1">
+            <a:schemeClr val="accent1"/>
+          </a:lnRef>
+          <a:fillRef idx="3">
+            <a:schemeClr val="accent1"/>
+          </a:fillRef>
+          <a:effectRef idx="2">
+            <a:schemeClr val="accent1"/>
+          </a:effectRef>
+          <a:fontRef idx="minor">
+            <a:schemeClr val="lt1"/>
+          </a:fontRef>
+        </p:style>
+        <p:txBody>
+          <a:bodyPr rtlCol="0" anchor="ctr"/>
+          <a:lstStyle/>
+          <a:p>
+            <a:pPr algn="ctr"/>
+          </a:p>
+        </p:txBody>
+      </p:sp>
+      <p:sp>
+        <p:nvSpPr>
+          <p:cNvPr id="113" name="Rectangle 112"/>
+          <p:cNvSpPr/>
+          <p:nvPr/>
+        </p:nvSpPr>
+        <p:spPr>
+          <a:xfrm>
+            <a:off x="7324344" y="1060704"/>
+            <a:ext cx="2148840" cy="54864"/>
           </a:xfrm>
           <a:prstGeom prst="rect">
             <a:avLst/>
@@ -29164,310 +28875,205 @@
           <a:ln>
             <a:noFill/>
           </a:ln>
-        </p:spPr>
-        <p:style>
-          <a:lnRef idx="1">
-            <a:schemeClr val="accent1"/>
-          </a:lnRef>
-          <a:fillRef idx="3">
-            <a:schemeClr val="accent1"/>
-          </a:fillRef>
-          <a:effectRef idx="2">
-            <a:schemeClr val="accent1"/>
-          </a:effectRef>
-          <a:fontRef idx="minor">
-            <a:schemeClr val="lt1"/>
-          </a:fontRef>
-        </p:style>
-        <p:txBody>
-          <a:bodyPr rtlCol="0" anchor="ctr"/>
-          <a:lstStyle/>
-          <a:p>
-            <a:pPr algn="ctr"/>
-          </a:p>
-        </p:txBody>
-      </p:sp>
-      <p:sp>
-        <p:nvSpPr>
-          <p:cNvPr id="34" name="TextBox 33"/>
-          <p:cNvSpPr txBox="1"/>
-          <p:nvPr/>
-        </p:nvSpPr>
-        <p:spPr>
-          <a:xfrm>
-            <a:off x="676656" y="2871215"/>
-            <a:ext cx="530352" cy="201168"/>
-          </a:xfrm>
-          <a:prstGeom prst="rect">
-            <a:avLst/>
-          </a:prstGeom>
-          <a:noFill/>
-        </p:spPr>
-        <p:txBody>
-          <a:bodyPr wrap="square">
-            <a:spAutoFit/>
-          </a:bodyPr>
-          <a:lstStyle/>
-          <a:p>
-            <a:pPr algn="l"/>
-            <a:r>
-              <a:rPr sz="800" b="1" i="0">
-                <a:solidFill>
-                  <a:srgbClr val="FFFFFF"/>
-                </a:solidFill>
-                <a:latin typeface="Calibri"/>
-              </a:rPr>
-              <a:t>4 steps</a:t>
-            </a:r>
-          </a:p>
-        </p:txBody>
-      </p:sp>
-      <p:sp>
-        <p:nvSpPr>
-          <p:cNvPr id="35" name="TextBox 34"/>
-          <p:cNvSpPr txBox="1"/>
-          <p:nvPr/>
-        </p:nvSpPr>
-        <p:spPr>
-          <a:xfrm>
-            <a:off x="1316736" y="2871215"/>
-            <a:ext cx="2706623" cy="201168"/>
-          </a:xfrm>
-          <a:prstGeom prst="rect">
-            <a:avLst/>
-          </a:prstGeom>
-          <a:noFill/>
-        </p:spPr>
-        <p:txBody>
-          <a:bodyPr wrap="square">
-            <a:spAutoFit/>
-          </a:bodyPr>
-          <a:lstStyle/>
-          <a:p>
-            <a:pPr algn="l"/>
-            <a:r>
-              <a:rPr sz="800" b="0" i="1">
-                <a:solidFill>
-                  <a:srgbClr val="78716C"/>
-                </a:solidFill>
-                <a:latin typeface="Calibri"/>
-              </a:rPr>
-              <a:t>PSR PS20/1 Confirmation of Payee (CoP)</a:t>
-            </a:r>
-          </a:p>
-        </p:txBody>
-      </p:sp>
-      <p:sp>
-        <p:nvSpPr>
-          <p:cNvPr id="36" name="Rectangle 35"/>
-          <p:cNvSpPr/>
-          <p:nvPr/>
-        </p:nvSpPr>
-        <p:spPr>
-          <a:xfrm>
-            <a:off x="603503" y="3145535"/>
-            <a:ext cx="3383279" cy="365760"/>
-          </a:xfrm>
-          <a:prstGeom prst="rect">
-            <a:avLst/>
-          </a:prstGeom>
-          <a:solidFill>
-            <a:srgbClr val="F5F5F4"/>
+          <a:effectLst/>
+        </p:spPr>
+        <p:style>
+          <a:lnRef idx="1">
+            <a:schemeClr val="accent1"/>
+          </a:lnRef>
+          <a:fillRef idx="3">
+            <a:schemeClr val="accent1"/>
+          </a:fillRef>
+          <a:effectRef idx="2">
+            <a:schemeClr val="accent1"/>
+          </a:effectRef>
+          <a:fontRef idx="minor">
+            <a:schemeClr val="lt1"/>
+          </a:fontRef>
+        </p:style>
+        <p:txBody>
+          <a:bodyPr rtlCol="0" anchor="ctr"/>
+          <a:lstStyle/>
+          <a:p>
+            <a:pPr algn="ctr"/>
+          </a:p>
+        </p:txBody>
+      </p:sp>
+      <p:sp>
+        <p:nvSpPr>
+          <p:cNvPr id="114" name="TextBox 113"/>
+          <p:cNvSpPr txBox="1"/>
+          <p:nvPr/>
+        </p:nvSpPr>
+        <p:spPr>
+          <a:xfrm>
+            <a:off x="7470648" y="1188719"/>
+            <a:ext cx="1892808" cy="420624"/>
+          </a:xfrm>
+          <a:prstGeom prst="rect">
+            <a:avLst/>
+          </a:prstGeom>
+          <a:noFill/>
+        </p:spPr>
+        <p:txBody>
+          <a:bodyPr wrap="square" anchor="t" lIns="12700" rIns="12700" tIns="0" bIns="0">
+            <a:spAutoFit/>
+          </a:bodyPr>
+          <a:lstStyle/>
+          <a:p>
+            <a:r>
+              <a:rPr sz="1000" b="1">
+                <a:solidFill>
+                  <a:srgbClr val="1C1917"/>
+                </a:solidFill>
+                <a:latin typeface="Calibri"/>
+              </a:rPr>
+              <a:t>Bulk Payments / Wages</a:t>
+            </a:r>
+          </a:p>
+        </p:txBody>
+      </p:sp>
+      <p:sp>
+        <p:nvSpPr>
+          <p:cNvPr id="115" name="Rectangle 114"/>
+          <p:cNvSpPr/>
+          <p:nvPr/>
+        </p:nvSpPr>
+        <p:spPr>
+          <a:xfrm>
+            <a:off x="7470648" y="1664207"/>
+            <a:ext cx="713232" cy="219456"/>
+          </a:xfrm>
+          <a:prstGeom prst="rect">
+            <a:avLst/>
+          </a:prstGeom>
+          <a:solidFill>
+            <a:srgbClr val="DA291C"/>
           </a:solidFill>
           <a:ln>
             <a:noFill/>
           </a:ln>
-        </p:spPr>
-        <p:style>
-          <a:lnRef idx="1">
-            <a:schemeClr val="accent1"/>
-          </a:lnRef>
-          <a:fillRef idx="3">
-            <a:schemeClr val="accent1"/>
-          </a:fillRef>
-          <a:effectRef idx="2">
-            <a:schemeClr val="accent1"/>
-          </a:effectRef>
-          <a:fontRef idx="minor">
-            <a:schemeClr val="lt1"/>
-          </a:fontRef>
-        </p:style>
-        <p:txBody>
-          <a:bodyPr rtlCol="0" anchor="ctr"/>
-          <a:lstStyle/>
-          <a:p>
-            <a:pPr algn="ctr"/>
-          </a:p>
-        </p:txBody>
-      </p:sp>
-      <p:sp>
-        <p:nvSpPr>
-          <p:cNvPr id="37" name="TextBox 36"/>
-          <p:cNvSpPr txBox="1"/>
-          <p:nvPr/>
-        </p:nvSpPr>
-        <p:spPr>
-          <a:xfrm>
-            <a:off x="694944" y="3200399"/>
-            <a:ext cx="3200399" cy="256032"/>
-          </a:xfrm>
-          <a:prstGeom prst="rect">
-            <a:avLst/>
-          </a:prstGeom>
-          <a:noFill/>
-        </p:spPr>
-        <p:txBody>
-          <a:bodyPr wrap="square">
-            <a:spAutoFit/>
-          </a:bodyPr>
-          <a:lstStyle/>
-          <a:p>
-            <a:pPr algn="l"/>
-            <a:r>
-              <a:rPr sz="750" b="0" i="1">
+          <a:effectLst/>
+        </p:spPr>
+        <p:style>
+          <a:lnRef idx="1">
+            <a:schemeClr val="accent1"/>
+          </a:lnRef>
+          <a:fillRef idx="3">
+            <a:schemeClr val="accent1"/>
+          </a:fillRef>
+          <a:effectRef idx="2">
+            <a:schemeClr val="accent1"/>
+          </a:effectRef>
+          <a:fontRef idx="minor">
+            <a:schemeClr val="lt1"/>
+          </a:fontRef>
+        </p:style>
+        <p:txBody>
+          <a:bodyPr rtlCol="0" anchor="ctr" wrap="none" lIns="38100" rIns="38100" tIns="0" bIns="0"/>
+          <a:lstStyle/>
+          <a:p>
+            <a:pPr algn="ctr"/>
+            <a:r>
+              <a:rPr sz="750" b="1">
+                <a:solidFill>
+                  <a:srgbClr val="FFFFFF"/>
+                </a:solidFill>
+                <a:latin typeface="Calibri"/>
+              </a:rPr>
+              <a:t>4 steps</a:t>
+            </a:r>
+          </a:p>
+        </p:txBody>
+      </p:sp>
+      <p:sp>
+        <p:nvSpPr>
+          <p:cNvPr id="116" name="TextBox 115"/>
+          <p:cNvSpPr txBox="1"/>
+          <p:nvPr/>
+        </p:nvSpPr>
+        <p:spPr>
+          <a:xfrm>
+            <a:off x="7470648" y="1956815"/>
+            <a:ext cx="1892808" cy="310896"/>
+          </a:xfrm>
+          <a:prstGeom prst="rect">
+            <a:avLst/>
+          </a:prstGeom>
+          <a:noFill/>
+        </p:spPr>
+        <p:txBody>
+          <a:bodyPr wrap="square" anchor="t" lIns="12700" rIns="12700" tIns="0" bIns="0">
+            <a:spAutoFit/>
+          </a:bodyPr>
+          <a:lstStyle/>
+          <a:p>
+            <a:r>
+              <a:rPr sz="750" b="0">
                 <a:solidFill>
                   <a:srgbClr val="78716C"/>
                 </a:solidFill>
                 <a:latin typeface="Calibri"/>
               </a:rPr>
-              <a:t>Self-serve · No branch · No call · No paper</a:t>
-            </a:r>
-          </a:p>
-        </p:txBody>
-      </p:sp>
-      <p:sp>
-        <p:nvSpPr>
-          <p:cNvPr id="38" name="Rectangle 37"/>
-          <p:cNvSpPr/>
-          <p:nvPr/>
-        </p:nvSpPr>
-        <p:spPr>
-          <a:xfrm>
-            <a:off x="4315967" y="2450591"/>
-            <a:ext cx="3712463" cy="1261872"/>
+              <a:t>PSR PS20/1 CoP · CSV · BACS</a:t>
+            </a:r>
+          </a:p>
+        </p:txBody>
+      </p:sp>
+      <p:sp>
+        <p:nvSpPr>
+          <p:cNvPr id="117" name="Rectangle 116"/>
+          <p:cNvSpPr/>
+          <p:nvPr/>
+        </p:nvSpPr>
+        <p:spPr>
+          <a:xfrm>
+            <a:off x="9619488" y="1060704"/>
+            <a:ext cx="2148840" cy="1261872"/>
           </a:xfrm>
           <a:prstGeom prst="rect">
             <a:avLst/>
           </a:prstGeom>
           <a:solidFill>
             <a:srgbClr val="FFFFFF"/>
-          </a:solidFill>
-          <a:ln w="9525">
-            <a:solidFill>
-              <a:srgbClr val="D6D3D1"/>
-            </a:solidFill>
-          </a:ln>
-        </p:spPr>
-        <p:style>
-          <a:lnRef idx="1">
-            <a:schemeClr val="accent1"/>
-          </a:lnRef>
-          <a:fillRef idx="3">
-            <a:schemeClr val="accent1"/>
-          </a:fillRef>
-          <a:effectRef idx="2">
-            <a:schemeClr val="accent1"/>
-          </a:effectRef>
-          <a:fontRef idx="minor">
-            <a:schemeClr val="lt1"/>
-          </a:fontRef>
-        </p:style>
-        <p:txBody>
-          <a:bodyPr rtlCol="0" anchor="ctr"/>
-          <a:lstStyle/>
-          <a:p>
-            <a:pPr algn="ctr"/>
-          </a:p>
-        </p:txBody>
-      </p:sp>
-      <p:sp>
-        <p:nvSpPr>
-          <p:cNvPr id="39" name="Rectangle 38"/>
-          <p:cNvSpPr/>
-          <p:nvPr/>
-        </p:nvSpPr>
-        <p:spPr>
-          <a:xfrm>
-            <a:off x="4315967" y="2450591"/>
-            <a:ext cx="3712463" cy="50292"/>
-          </a:xfrm>
-          <a:prstGeom prst="rect">
-            <a:avLst/>
-          </a:prstGeom>
-          <a:solidFill>
-            <a:srgbClr val="DA291C"/>
           </a:solidFill>
           <a:ln>
             <a:noFill/>
           </a:ln>
-        </p:spPr>
-        <p:style>
-          <a:lnRef idx="1">
-            <a:schemeClr val="accent1"/>
-          </a:lnRef>
-          <a:fillRef idx="3">
-            <a:schemeClr val="accent1"/>
-          </a:fillRef>
-          <a:effectRef idx="2">
-            <a:schemeClr val="accent1"/>
-          </a:effectRef>
-          <a:fontRef idx="minor">
-            <a:schemeClr val="lt1"/>
-          </a:fontRef>
-        </p:style>
-        <p:txBody>
-          <a:bodyPr rtlCol="0" anchor="ctr"/>
-          <a:lstStyle/>
-          <a:p>
-            <a:pPr algn="ctr"/>
-          </a:p>
-        </p:txBody>
-      </p:sp>
-      <p:sp>
-        <p:nvSpPr>
-          <p:cNvPr id="40" name="TextBox 39"/>
-          <p:cNvSpPr txBox="1"/>
-          <p:nvPr/>
-        </p:nvSpPr>
-        <p:spPr>
-          <a:xfrm>
-            <a:off x="4480559" y="2542032"/>
-            <a:ext cx="3438144" cy="274320"/>
-          </a:xfrm>
-          <a:prstGeom prst="rect">
-            <a:avLst/>
-          </a:prstGeom>
-          <a:noFill/>
-        </p:spPr>
-        <p:txBody>
-          <a:bodyPr wrap="square">
-            <a:spAutoFit/>
-          </a:bodyPr>
-          <a:lstStyle/>
-          <a:p>
-            <a:pPr algn="l"/>
-            <a:r>
-              <a:rPr sz="1000" b="1" i="0">
-                <a:solidFill>
-                  <a:srgbClr val="1C1917"/>
-                </a:solidFill>
-                <a:latin typeface="Calibri"/>
-              </a:rPr>
-              <a:t>Business Details Update</a:t>
-            </a:r>
-          </a:p>
-        </p:txBody>
-      </p:sp>
-      <p:sp>
-        <p:nvSpPr>
-          <p:cNvPr id="41" name="Rectangle 40"/>
-          <p:cNvSpPr/>
-          <p:nvPr/>
-        </p:nvSpPr>
-        <p:spPr>
-          <a:xfrm>
-            <a:off x="4480559" y="2852927"/>
-            <a:ext cx="621792" cy="237744"/>
+          <a:effectLst/>
+        </p:spPr>
+        <p:style>
+          <a:lnRef idx="1">
+            <a:schemeClr val="accent1"/>
+          </a:lnRef>
+          <a:fillRef idx="3">
+            <a:schemeClr val="accent1"/>
+          </a:fillRef>
+          <a:effectRef idx="2">
+            <a:schemeClr val="accent1"/>
+          </a:effectRef>
+          <a:fontRef idx="minor">
+            <a:schemeClr val="lt1"/>
+          </a:fontRef>
+        </p:style>
+        <p:txBody>
+          <a:bodyPr rtlCol="0" anchor="ctr"/>
+          <a:lstStyle/>
+          <a:p>
+            <a:pPr algn="ctr"/>
+          </a:p>
+        </p:txBody>
+      </p:sp>
+      <p:sp>
+        <p:nvSpPr>
+          <p:cNvPr id="118" name="Rectangle 117"/>
+          <p:cNvSpPr/>
+          <p:nvPr/>
+        </p:nvSpPr>
+        <p:spPr>
+          <a:xfrm>
+            <a:off x="9619488" y="1060704"/>
+            <a:ext cx="2148840" cy="54864"/>
           </a:xfrm>
           <a:prstGeom prst="rect">
             <a:avLst/>
@@ -29478,310 +29084,205 @@
           <a:ln>
             <a:noFill/>
           </a:ln>
-        </p:spPr>
-        <p:style>
-          <a:lnRef idx="1">
-            <a:schemeClr val="accent1"/>
-          </a:lnRef>
-          <a:fillRef idx="3">
-            <a:schemeClr val="accent1"/>
-          </a:fillRef>
-          <a:effectRef idx="2">
-            <a:schemeClr val="accent1"/>
-          </a:effectRef>
-          <a:fontRef idx="minor">
-            <a:schemeClr val="lt1"/>
-          </a:fontRef>
-        </p:style>
-        <p:txBody>
-          <a:bodyPr rtlCol="0" anchor="ctr"/>
-          <a:lstStyle/>
-          <a:p>
-            <a:pPr algn="ctr"/>
-          </a:p>
-        </p:txBody>
-      </p:sp>
-      <p:sp>
-        <p:nvSpPr>
-          <p:cNvPr id="42" name="TextBox 41"/>
-          <p:cNvSpPr txBox="1"/>
-          <p:nvPr/>
-        </p:nvSpPr>
-        <p:spPr>
-          <a:xfrm>
-            <a:off x="4553711" y="2871215"/>
-            <a:ext cx="530352" cy="201168"/>
-          </a:xfrm>
-          <a:prstGeom prst="rect">
-            <a:avLst/>
-          </a:prstGeom>
-          <a:noFill/>
-        </p:spPr>
-        <p:txBody>
-          <a:bodyPr wrap="square">
-            <a:spAutoFit/>
-          </a:bodyPr>
-          <a:lstStyle/>
-          <a:p>
-            <a:pPr algn="l"/>
-            <a:r>
-              <a:rPr sz="800" b="1" i="0">
-                <a:solidFill>
-                  <a:srgbClr val="FFFFFF"/>
-                </a:solidFill>
-                <a:latin typeface="Calibri"/>
-              </a:rPr>
-              <a:t>3 steps</a:t>
-            </a:r>
-          </a:p>
-        </p:txBody>
-      </p:sp>
-      <p:sp>
-        <p:nvSpPr>
-          <p:cNvPr id="43" name="TextBox 42"/>
-          <p:cNvSpPr txBox="1"/>
-          <p:nvPr/>
-        </p:nvSpPr>
-        <p:spPr>
-          <a:xfrm>
-            <a:off x="5193791" y="2871215"/>
-            <a:ext cx="2706623" cy="201168"/>
-          </a:xfrm>
-          <a:prstGeom prst="rect">
-            <a:avLst/>
-          </a:prstGeom>
-          <a:noFill/>
-        </p:spPr>
-        <p:txBody>
-          <a:bodyPr wrap="square">
-            <a:spAutoFit/>
-          </a:bodyPr>
-          <a:lstStyle/>
-          <a:p>
-            <a:pPr algn="l"/>
-            <a:r>
-              <a:rPr sz="800" b="0" i="1">
-                <a:solidFill>
-                  <a:srgbClr val="78716C"/>
-                </a:solidFill>
-                <a:latin typeface="Calibri"/>
-              </a:rPr>
-              <a:t>Companies House sync</a:t>
-            </a:r>
-          </a:p>
-        </p:txBody>
-      </p:sp>
-      <p:sp>
-        <p:nvSpPr>
-          <p:cNvPr id="44" name="Rectangle 43"/>
-          <p:cNvSpPr/>
-          <p:nvPr/>
-        </p:nvSpPr>
-        <p:spPr>
-          <a:xfrm>
-            <a:off x="4480559" y="3145535"/>
-            <a:ext cx="3383279" cy="365760"/>
-          </a:xfrm>
-          <a:prstGeom prst="rect">
-            <a:avLst/>
-          </a:prstGeom>
-          <a:solidFill>
-            <a:srgbClr val="F5F5F4"/>
+          <a:effectLst/>
+        </p:spPr>
+        <p:style>
+          <a:lnRef idx="1">
+            <a:schemeClr val="accent1"/>
+          </a:lnRef>
+          <a:fillRef idx="3">
+            <a:schemeClr val="accent1"/>
+          </a:fillRef>
+          <a:effectRef idx="2">
+            <a:schemeClr val="accent1"/>
+          </a:effectRef>
+          <a:fontRef idx="minor">
+            <a:schemeClr val="lt1"/>
+          </a:fontRef>
+        </p:style>
+        <p:txBody>
+          <a:bodyPr rtlCol="0" anchor="ctr"/>
+          <a:lstStyle/>
+          <a:p>
+            <a:pPr algn="ctr"/>
+          </a:p>
+        </p:txBody>
+      </p:sp>
+      <p:sp>
+        <p:nvSpPr>
+          <p:cNvPr id="119" name="TextBox 118"/>
+          <p:cNvSpPr txBox="1"/>
+          <p:nvPr/>
+        </p:nvSpPr>
+        <p:spPr>
+          <a:xfrm>
+            <a:off x="9765792" y="1188719"/>
+            <a:ext cx="1892808" cy="420624"/>
+          </a:xfrm>
+          <a:prstGeom prst="rect">
+            <a:avLst/>
+          </a:prstGeom>
+          <a:noFill/>
+        </p:spPr>
+        <p:txBody>
+          <a:bodyPr wrap="square" anchor="t" lIns="12700" rIns="12700" tIns="0" bIns="0">
+            <a:spAutoFit/>
+          </a:bodyPr>
+          <a:lstStyle/>
+          <a:p>
+            <a:r>
+              <a:rPr sz="1000" b="1">
+                <a:solidFill>
+                  <a:srgbClr val="1C1917"/>
+                </a:solidFill>
+                <a:latin typeface="Calibri"/>
+              </a:rPr>
+              <a:t>Business Details</a:t>
+            </a:r>
+          </a:p>
+        </p:txBody>
+      </p:sp>
+      <p:sp>
+        <p:nvSpPr>
+          <p:cNvPr id="120" name="Rectangle 119"/>
+          <p:cNvSpPr/>
+          <p:nvPr/>
+        </p:nvSpPr>
+        <p:spPr>
+          <a:xfrm>
+            <a:off x="9765792" y="1664207"/>
+            <a:ext cx="713232" cy="219456"/>
+          </a:xfrm>
+          <a:prstGeom prst="rect">
+            <a:avLst/>
+          </a:prstGeom>
+          <a:solidFill>
+            <a:srgbClr val="DA291C"/>
           </a:solidFill>
           <a:ln>
             <a:noFill/>
           </a:ln>
-        </p:spPr>
-        <p:style>
-          <a:lnRef idx="1">
-            <a:schemeClr val="accent1"/>
-          </a:lnRef>
-          <a:fillRef idx="3">
-            <a:schemeClr val="accent1"/>
-          </a:fillRef>
-          <a:effectRef idx="2">
-            <a:schemeClr val="accent1"/>
-          </a:effectRef>
-          <a:fontRef idx="minor">
-            <a:schemeClr val="lt1"/>
-          </a:fontRef>
-        </p:style>
-        <p:txBody>
-          <a:bodyPr rtlCol="0" anchor="ctr"/>
-          <a:lstStyle/>
-          <a:p>
-            <a:pPr algn="ctr"/>
-          </a:p>
-        </p:txBody>
-      </p:sp>
-      <p:sp>
-        <p:nvSpPr>
-          <p:cNvPr id="45" name="TextBox 44"/>
-          <p:cNvSpPr txBox="1"/>
-          <p:nvPr/>
-        </p:nvSpPr>
-        <p:spPr>
-          <a:xfrm>
-            <a:off x="4571999" y="3200399"/>
-            <a:ext cx="3200399" cy="256032"/>
-          </a:xfrm>
-          <a:prstGeom prst="rect">
-            <a:avLst/>
-          </a:prstGeom>
-          <a:noFill/>
-        </p:spPr>
-        <p:txBody>
-          <a:bodyPr wrap="square">
-            <a:spAutoFit/>
-          </a:bodyPr>
-          <a:lstStyle/>
-          <a:p>
-            <a:pPr algn="l"/>
-            <a:r>
-              <a:rPr sz="750" b="0" i="1">
+          <a:effectLst/>
+        </p:spPr>
+        <p:style>
+          <a:lnRef idx="1">
+            <a:schemeClr val="accent1"/>
+          </a:lnRef>
+          <a:fillRef idx="3">
+            <a:schemeClr val="accent1"/>
+          </a:fillRef>
+          <a:effectRef idx="2">
+            <a:schemeClr val="accent1"/>
+          </a:effectRef>
+          <a:fontRef idx="minor">
+            <a:schemeClr val="lt1"/>
+          </a:fontRef>
+        </p:style>
+        <p:txBody>
+          <a:bodyPr rtlCol="0" anchor="ctr" wrap="none" lIns="38100" rIns="38100" tIns="0" bIns="0"/>
+          <a:lstStyle/>
+          <a:p>
+            <a:pPr algn="ctr"/>
+            <a:r>
+              <a:rPr sz="750" b="1">
+                <a:solidFill>
+                  <a:srgbClr val="FFFFFF"/>
+                </a:solidFill>
+                <a:latin typeface="Calibri"/>
+              </a:rPr>
+              <a:t>3 steps</a:t>
+            </a:r>
+          </a:p>
+        </p:txBody>
+      </p:sp>
+      <p:sp>
+        <p:nvSpPr>
+          <p:cNvPr id="121" name="TextBox 120"/>
+          <p:cNvSpPr txBox="1"/>
+          <p:nvPr/>
+        </p:nvSpPr>
+        <p:spPr>
+          <a:xfrm>
+            <a:off x="9765792" y="1956815"/>
+            <a:ext cx="1892808" cy="310896"/>
+          </a:xfrm>
+          <a:prstGeom prst="rect">
+            <a:avLst/>
+          </a:prstGeom>
+          <a:noFill/>
+        </p:spPr>
+        <p:txBody>
+          <a:bodyPr wrap="square" anchor="t" lIns="12700" rIns="12700" tIns="0" bIns="0">
+            <a:spAutoFit/>
+          </a:bodyPr>
+          <a:lstStyle/>
+          <a:p>
+            <a:r>
+              <a:rPr sz="750" b="0">
                 <a:solidFill>
                   <a:srgbClr val="78716C"/>
                 </a:solidFill>
                 <a:latin typeface="Calibri"/>
               </a:rPr>
-              <a:t>Self-serve · No branch · No call · No paper</a:t>
-            </a:r>
-          </a:p>
-        </p:txBody>
-      </p:sp>
-      <p:sp>
-        <p:nvSpPr>
-          <p:cNvPr id="46" name="Rectangle 45"/>
-          <p:cNvSpPr/>
-          <p:nvPr/>
-        </p:nvSpPr>
-        <p:spPr>
-          <a:xfrm>
-            <a:off x="8193023" y="2450591"/>
-            <a:ext cx="3712463" cy="1261872"/>
+              <a:t>Companies House sync</a:t>
+            </a:r>
+          </a:p>
+        </p:txBody>
+      </p:sp>
+      <p:sp>
+        <p:nvSpPr>
+          <p:cNvPr id="122" name="Rectangle 121"/>
+          <p:cNvSpPr/>
+          <p:nvPr/>
+        </p:nvSpPr>
+        <p:spPr>
+          <a:xfrm>
+            <a:off x="438912" y="2450592"/>
+            <a:ext cx="2148840" cy="1261872"/>
           </a:xfrm>
           <a:prstGeom prst="rect">
             <a:avLst/>
           </a:prstGeom>
           <a:solidFill>
             <a:srgbClr val="FFFFFF"/>
-          </a:solidFill>
-          <a:ln w="9525">
-            <a:solidFill>
-              <a:srgbClr val="D6D3D1"/>
-            </a:solidFill>
-          </a:ln>
-        </p:spPr>
-        <p:style>
-          <a:lnRef idx="1">
-            <a:schemeClr val="accent1"/>
-          </a:lnRef>
-          <a:fillRef idx="3">
-            <a:schemeClr val="accent1"/>
-          </a:fillRef>
-          <a:effectRef idx="2">
-            <a:schemeClr val="accent1"/>
-          </a:effectRef>
-          <a:fontRef idx="minor">
-            <a:schemeClr val="lt1"/>
-          </a:fontRef>
-        </p:style>
-        <p:txBody>
-          <a:bodyPr rtlCol="0" anchor="ctr"/>
-          <a:lstStyle/>
-          <a:p>
-            <a:pPr algn="ctr"/>
-          </a:p>
-        </p:txBody>
-      </p:sp>
-      <p:sp>
-        <p:nvSpPr>
-          <p:cNvPr id="47" name="Rectangle 46"/>
-          <p:cNvSpPr/>
-          <p:nvPr/>
-        </p:nvSpPr>
-        <p:spPr>
-          <a:xfrm>
-            <a:off x="8193023" y="2450591"/>
-            <a:ext cx="3712463" cy="50292"/>
-          </a:xfrm>
-          <a:prstGeom prst="rect">
-            <a:avLst/>
-          </a:prstGeom>
-          <a:solidFill>
-            <a:srgbClr val="DA291C"/>
           </a:solidFill>
           <a:ln>
             <a:noFill/>
           </a:ln>
-        </p:spPr>
-        <p:style>
-          <a:lnRef idx="1">
-            <a:schemeClr val="accent1"/>
-          </a:lnRef>
-          <a:fillRef idx="3">
-            <a:schemeClr val="accent1"/>
-          </a:fillRef>
-          <a:effectRef idx="2">
-            <a:schemeClr val="accent1"/>
-          </a:effectRef>
-          <a:fontRef idx="minor">
-            <a:schemeClr val="lt1"/>
-          </a:fontRef>
-        </p:style>
-        <p:txBody>
-          <a:bodyPr rtlCol="0" anchor="ctr"/>
-          <a:lstStyle/>
-          <a:p>
-            <a:pPr algn="ctr"/>
-          </a:p>
-        </p:txBody>
-      </p:sp>
-      <p:sp>
-        <p:nvSpPr>
-          <p:cNvPr id="48" name="TextBox 47"/>
-          <p:cNvSpPr txBox="1"/>
-          <p:nvPr/>
-        </p:nvSpPr>
-        <p:spPr>
-          <a:xfrm>
-            <a:off x="8357615" y="2542032"/>
-            <a:ext cx="3438144" cy="274320"/>
-          </a:xfrm>
-          <a:prstGeom prst="rect">
-            <a:avLst/>
-          </a:prstGeom>
-          <a:noFill/>
-        </p:spPr>
-        <p:txBody>
-          <a:bodyPr wrap="square">
-            <a:spAutoFit/>
-          </a:bodyPr>
-          <a:lstStyle/>
-          <a:p>
-            <a:pPr algn="l"/>
-            <a:r>
-              <a:rPr sz="1000" b="1" i="0">
-                <a:solidFill>
-                  <a:srgbClr val="1C1917"/>
-                </a:solidFill>
-                <a:latin typeface="Calibri"/>
-              </a:rPr>
-              <a:t>Dormant Reactivation</a:t>
-            </a:r>
-          </a:p>
-        </p:txBody>
-      </p:sp>
-      <p:sp>
-        <p:nvSpPr>
-          <p:cNvPr id="49" name="Rectangle 48"/>
-          <p:cNvSpPr/>
-          <p:nvPr/>
-        </p:nvSpPr>
-        <p:spPr>
-          <a:xfrm>
-            <a:off x="8357615" y="2852927"/>
-            <a:ext cx="621792" cy="237744"/>
+          <a:effectLst/>
+        </p:spPr>
+        <p:style>
+          <a:lnRef idx="1">
+            <a:schemeClr val="accent1"/>
+          </a:lnRef>
+          <a:fillRef idx="3">
+            <a:schemeClr val="accent1"/>
+          </a:fillRef>
+          <a:effectRef idx="2">
+            <a:schemeClr val="accent1"/>
+          </a:effectRef>
+          <a:fontRef idx="minor">
+            <a:schemeClr val="lt1"/>
+          </a:fontRef>
+        </p:style>
+        <p:txBody>
+          <a:bodyPr rtlCol="0" anchor="ctr"/>
+          <a:lstStyle/>
+          <a:p>
+            <a:pPr algn="ctr"/>
+          </a:p>
+        </p:txBody>
+      </p:sp>
+      <p:sp>
+        <p:nvSpPr>
+          <p:cNvPr id="123" name="Rectangle 122"/>
+          <p:cNvSpPr/>
+          <p:nvPr/>
+        </p:nvSpPr>
+        <p:spPr>
+          <a:xfrm>
+            <a:off x="438912" y="2450592"/>
+            <a:ext cx="2148840" cy="54864"/>
           </a:xfrm>
           <a:prstGeom prst="rect">
             <a:avLst/>
@@ -29792,310 +29293,205 @@
           <a:ln>
             <a:noFill/>
           </a:ln>
-        </p:spPr>
-        <p:style>
-          <a:lnRef idx="1">
-            <a:schemeClr val="accent1"/>
-          </a:lnRef>
-          <a:fillRef idx="3">
-            <a:schemeClr val="accent1"/>
-          </a:fillRef>
-          <a:effectRef idx="2">
-            <a:schemeClr val="accent1"/>
-          </a:effectRef>
-          <a:fontRef idx="minor">
-            <a:schemeClr val="lt1"/>
-          </a:fontRef>
-        </p:style>
-        <p:txBody>
-          <a:bodyPr rtlCol="0" anchor="ctr"/>
-          <a:lstStyle/>
-          <a:p>
-            <a:pPr algn="ctr"/>
-          </a:p>
-        </p:txBody>
-      </p:sp>
-      <p:sp>
-        <p:nvSpPr>
-          <p:cNvPr id="50" name="TextBox 49"/>
-          <p:cNvSpPr txBox="1"/>
-          <p:nvPr/>
-        </p:nvSpPr>
-        <p:spPr>
-          <a:xfrm>
-            <a:off x="8430767" y="2871215"/>
-            <a:ext cx="530352" cy="201168"/>
-          </a:xfrm>
-          <a:prstGeom prst="rect">
-            <a:avLst/>
-          </a:prstGeom>
-          <a:noFill/>
-        </p:spPr>
-        <p:txBody>
-          <a:bodyPr wrap="square">
-            <a:spAutoFit/>
-          </a:bodyPr>
-          <a:lstStyle/>
-          <a:p>
-            <a:pPr algn="l"/>
-            <a:r>
-              <a:rPr sz="800" b="1" i="0">
-                <a:solidFill>
-                  <a:srgbClr val="FFFFFF"/>
-                </a:solidFill>
-                <a:latin typeface="Calibri"/>
-              </a:rPr>
-              <a:t>1 step</a:t>
-            </a:r>
-          </a:p>
-        </p:txBody>
-      </p:sp>
-      <p:sp>
-        <p:nvSpPr>
-          <p:cNvPr id="51" name="TextBox 50"/>
-          <p:cNvSpPr txBox="1"/>
-          <p:nvPr/>
-        </p:nvSpPr>
-        <p:spPr>
-          <a:xfrm>
-            <a:off x="9070847" y="2871215"/>
-            <a:ext cx="2706623" cy="201168"/>
-          </a:xfrm>
-          <a:prstGeom prst="rect">
-            <a:avLst/>
-          </a:prstGeom>
-          <a:noFill/>
-        </p:spPr>
-        <p:txBody>
-          <a:bodyPr wrap="square">
-            <a:spAutoFit/>
-          </a:bodyPr>
-          <a:lstStyle/>
-          <a:p>
-            <a:pPr algn="l"/>
-            <a:r>
-              <a:rPr sz="800" b="0" i="1">
-                <a:solidFill>
-                  <a:srgbClr val="78716C"/>
-                </a:solidFill>
-                <a:latin typeface="Calibri"/>
-              </a:rPr>
-              <a:t>FSCS notice · 12-month threshold</a:t>
-            </a:r>
-          </a:p>
-        </p:txBody>
-      </p:sp>
-      <p:sp>
-        <p:nvSpPr>
-          <p:cNvPr id="52" name="Rectangle 51"/>
-          <p:cNvSpPr/>
-          <p:nvPr/>
-        </p:nvSpPr>
-        <p:spPr>
-          <a:xfrm>
-            <a:off x="8357615" y="3145535"/>
-            <a:ext cx="3383279" cy="365760"/>
-          </a:xfrm>
-          <a:prstGeom prst="rect">
-            <a:avLst/>
-          </a:prstGeom>
-          <a:solidFill>
-            <a:srgbClr val="F5F5F4"/>
+          <a:effectLst/>
+        </p:spPr>
+        <p:style>
+          <a:lnRef idx="1">
+            <a:schemeClr val="accent1"/>
+          </a:lnRef>
+          <a:fillRef idx="3">
+            <a:schemeClr val="accent1"/>
+          </a:fillRef>
+          <a:effectRef idx="2">
+            <a:schemeClr val="accent1"/>
+          </a:effectRef>
+          <a:fontRef idx="minor">
+            <a:schemeClr val="lt1"/>
+          </a:fontRef>
+        </p:style>
+        <p:txBody>
+          <a:bodyPr rtlCol="0" anchor="ctr"/>
+          <a:lstStyle/>
+          <a:p>
+            <a:pPr algn="ctr"/>
+          </a:p>
+        </p:txBody>
+      </p:sp>
+      <p:sp>
+        <p:nvSpPr>
+          <p:cNvPr id="124" name="TextBox 123"/>
+          <p:cNvSpPr txBox="1"/>
+          <p:nvPr/>
+        </p:nvSpPr>
+        <p:spPr>
+          <a:xfrm>
+            <a:off x="585216" y="2578608"/>
+            <a:ext cx="1892808" cy="420624"/>
+          </a:xfrm>
+          <a:prstGeom prst="rect">
+            <a:avLst/>
+          </a:prstGeom>
+          <a:noFill/>
+        </p:spPr>
+        <p:txBody>
+          <a:bodyPr wrap="square" anchor="t" lIns="12700" rIns="12700" tIns="0" bIns="0">
+            <a:spAutoFit/>
+          </a:bodyPr>
+          <a:lstStyle/>
+          <a:p>
+            <a:r>
+              <a:rPr sz="1000" b="1">
+                <a:solidFill>
+                  <a:srgbClr val="1C1917"/>
+                </a:solidFill>
+                <a:latin typeface="Calibri"/>
+              </a:rPr>
+              <a:t>Dormant Reactivation</a:t>
+            </a:r>
+          </a:p>
+        </p:txBody>
+      </p:sp>
+      <p:sp>
+        <p:nvSpPr>
+          <p:cNvPr id="125" name="Rectangle 124"/>
+          <p:cNvSpPr/>
+          <p:nvPr/>
+        </p:nvSpPr>
+        <p:spPr>
+          <a:xfrm>
+            <a:off x="585216" y="3054096"/>
+            <a:ext cx="713232" cy="219456"/>
+          </a:xfrm>
+          <a:prstGeom prst="rect">
+            <a:avLst/>
+          </a:prstGeom>
+          <a:solidFill>
+            <a:srgbClr val="DA291C"/>
           </a:solidFill>
           <a:ln>
             <a:noFill/>
           </a:ln>
-        </p:spPr>
-        <p:style>
-          <a:lnRef idx="1">
-            <a:schemeClr val="accent1"/>
-          </a:lnRef>
-          <a:fillRef idx="3">
-            <a:schemeClr val="accent1"/>
-          </a:fillRef>
-          <a:effectRef idx="2">
-            <a:schemeClr val="accent1"/>
-          </a:effectRef>
-          <a:fontRef idx="minor">
-            <a:schemeClr val="lt1"/>
-          </a:fontRef>
-        </p:style>
-        <p:txBody>
-          <a:bodyPr rtlCol="0" anchor="ctr"/>
-          <a:lstStyle/>
-          <a:p>
-            <a:pPr algn="ctr"/>
-          </a:p>
-        </p:txBody>
-      </p:sp>
-      <p:sp>
-        <p:nvSpPr>
-          <p:cNvPr id="53" name="TextBox 52"/>
-          <p:cNvSpPr txBox="1"/>
-          <p:nvPr/>
-        </p:nvSpPr>
-        <p:spPr>
-          <a:xfrm>
-            <a:off x="8449055" y="3200399"/>
-            <a:ext cx="3200399" cy="256032"/>
-          </a:xfrm>
-          <a:prstGeom prst="rect">
-            <a:avLst/>
-          </a:prstGeom>
-          <a:noFill/>
-        </p:spPr>
-        <p:txBody>
-          <a:bodyPr wrap="square">
-            <a:spAutoFit/>
-          </a:bodyPr>
-          <a:lstStyle/>
-          <a:p>
-            <a:pPr algn="l"/>
-            <a:r>
-              <a:rPr sz="750" b="0" i="1">
+          <a:effectLst/>
+        </p:spPr>
+        <p:style>
+          <a:lnRef idx="1">
+            <a:schemeClr val="accent1"/>
+          </a:lnRef>
+          <a:fillRef idx="3">
+            <a:schemeClr val="accent1"/>
+          </a:fillRef>
+          <a:effectRef idx="2">
+            <a:schemeClr val="accent1"/>
+          </a:effectRef>
+          <a:fontRef idx="minor">
+            <a:schemeClr val="lt1"/>
+          </a:fontRef>
+        </p:style>
+        <p:txBody>
+          <a:bodyPr rtlCol="0" anchor="ctr" wrap="none" lIns="38100" rIns="38100" tIns="0" bIns="0"/>
+          <a:lstStyle/>
+          <a:p>
+            <a:pPr algn="ctr"/>
+            <a:r>
+              <a:rPr sz="750" b="1">
+                <a:solidFill>
+                  <a:srgbClr val="FFFFFF"/>
+                </a:solidFill>
+                <a:latin typeface="Calibri"/>
+              </a:rPr>
+              <a:t>1 step</a:t>
+            </a:r>
+          </a:p>
+        </p:txBody>
+      </p:sp>
+      <p:sp>
+        <p:nvSpPr>
+          <p:cNvPr id="126" name="TextBox 125"/>
+          <p:cNvSpPr txBox="1"/>
+          <p:nvPr/>
+        </p:nvSpPr>
+        <p:spPr>
+          <a:xfrm>
+            <a:off x="585216" y="3346704"/>
+            <a:ext cx="1892808" cy="310896"/>
+          </a:xfrm>
+          <a:prstGeom prst="rect">
+            <a:avLst/>
+          </a:prstGeom>
+          <a:noFill/>
+        </p:spPr>
+        <p:txBody>
+          <a:bodyPr wrap="square" anchor="t" lIns="12700" rIns="12700" tIns="0" bIns="0">
+            <a:spAutoFit/>
+          </a:bodyPr>
+          <a:lstStyle/>
+          <a:p>
+            <a:r>
+              <a:rPr sz="750" b="0">
                 <a:solidFill>
                   <a:srgbClr val="78716C"/>
                 </a:solidFill>
                 <a:latin typeface="Calibri"/>
               </a:rPr>
-              <a:t>Self-serve · No branch · No call · No paper</a:t>
-            </a:r>
-          </a:p>
-        </p:txBody>
-      </p:sp>
-      <p:sp>
-        <p:nvSpPr>
-          <p:cNvPr id="54" name="Rectangle 53"/>
-          <p:cNvSpPr/>
-          <p:nvPr/>
-        </p:nvSpPr>
-        <p:spPr>
-          <a:xfrm>
-            <a:off x="438912" y="3840480"/>
-            <a:ext cx="3712463" cy="1261872"/>
+              <a:t>FSCS notice · 12-month rule</a:t>
+            </a:r>
+          </a:p>
+        </p:txBody>
+      </p:sp>
+      <p:sp>
+        <p:nvSpPr>
+          <p:cNvPr id="127" name="Rectangle 126"/>
+          <p:cNvSpPr/>
+          <p:nvPr/>
+        </p:nvSpPr>
+        <p:spPr>
+          <a:xfrm>
+            <a:off x="2734056" y="2450592"/>
+            <a:ext cx="2148840" cy="1261872"/>
           </a:xfrm>
           <a:prstGeom prst="rect">
             <a:avLst/>
           </a:prstGeom>
           <a:solidFill>
             <a:srgbClr val="FFFFFF"/>
-          </a:solidFill>
-          <a:ln w="9525">
-            <a:solidFill>
-              <a:srgbClr val="D6D3D1"/>
-            </a:solidFill>
-          </a:ln>
-        </p:spPr>
-        <p:style>
-          <a:lnRef idx="1">
-            <a:schemeClr val="accent1"/>
-          </a:lnRef>
-          <a:fillRef idx="3">
-            <a:schemeClr val="accent1"/>
-          </a:fillRef>
-          <a:effectRef idx="2">
-            <a:schemeClr val="accent1"/>
-          </a:effectRef>
-          <a:fontRef idx="minor">
-            <a:schemeClr val="lt1"/>
-          </a:fontRef>
-        </p:style>
-        <p:txBody>
-          <a:bodyPr rtlCol="0" anchor="ctr"/>
-          <a:lstStyle/>
-          <a:p>
-            <a:pPr algn="ctr"/>
-          </a:p>
-        </p:txBody>
-      </p:sp>
-      <p:sp>
-        <p:nvSpPr>
-          <p:cNvPr id="55" name="Rectangle 54"/>
-          <p:cNvSpPr/>
-          <p:nvPr/>
-        </p:nvSpPr>
-        <p:spPr>
-          <a:xfrm>
-            <a:off x="438912" y="3840480"/>
-            <a:ext cx="3712463" cy="50292"/>
-          </a:xfrm>
-          <a:prstGeom prst="rect">
-            <a:avLst/>
-          </a:prstGeom>
-          <a:solidFill>
-            <a:srgbClr val="DA291C"/>
           </a:solidFill>
           <a:ln>
             <a:noFill/>
           </a:ln>
-        </p:spPr>
-        <p:style>
-          <a:lnRef idx="1">
-            <a:schemeClr val="accent1"/>
-          </a:lnRef>
-          <a:fillRef idx="3">
-            <a:schemeClr val="accent1"/>
-          </a:fillRef>
-          <a:effectRef idx="2">
-            <a:schemeClr val="accent1"/>
-          </a:effectRef>
-          <a:fontRef idx="minor">
-            <a:schemeClr val="lt1"/>
-          </a:fontRef>
-        </p:style>
-        <p:txBody>
-          <a:bodyPr rtlCol="0" anchor="ctr"/>
-          <a:lstStyle/>
-          <a:p>
-            <a:pPr algn="ctr"/>
-          </a:p>
-        </p:txBody>
-      </p:sp>
-      <p:sp>
-        <p:nvSpPr>
-          <p:cNvPr id="56" name="TextBox 55"/>
-          <p:cNvSpPr txBox="1"/>
-          <p:nvPr/>
-        </p:nvSpPr>
-        <p:spPr>
-          <a:xfrm>
-            <a:off x="603503" y="3931920"/>
-            <a:ext cx="3438144" cy="274320"/>
-          </a:xfrm>
-          <a:prstGeom prst="rect">
-            <a:avLst/>
-          </a:prstGeom>
-          <a:noFill/>
-        </p:spPr>
-        <p:txBody>
-          <a:bodyPr wrap="square">
-            <a:spAutoFit/>
-          </a:bodyPr>
-          <a:lstStyle/>
-          <a:p>
-            <a:pPr algn="l"/>
-            <a:r>
-              <a:rPr sz="1000" b="1" i="0">
-                <a:solidFill>
-                  <a:srgbClr val="1C1917"/>
-                </a:solidFill>
-                <a:latin typeface="Calibri"/>
-              </a:rPr>
-              <a:t>MTD VAT Submission</a:t>
-            </a:r>
-          </a:p>
-        </p:txBody>
-      </p:sp>
-      <p:sp>
-        <p:nvSpPr>
-          <p:cNvPr id="57" name="Rectangle 56"/>
-          <p:cNvSpPr/>
-          <p:nvPr/>
-        </p:nvSpPr>
-        <p:spPr>
-          <a:xfrm>
-            <a:off x="603503" y="4242816"/>
-            <a:ext cx="621792" cy="237744"/>
+          <a:effectLst/>
+        </p:spPr>
+        <p:style>
+          <a:lnRef idx="1">
+            <a:schemeClr val="accent1"/>
+          </a:lnRef>
+          <a:fillRef idx="3">
+            <a:schemeClr val="accent1"/>
+          </a:fillRef>
+          <a:effectRef idx="2">
+            <a:schemeClr val="accent1"/>
+          </a:effectRef>
+          <a:fontRef idx="minor">
+            <a:schemeClr val="lt1"/>
+          </a:fontRef>
+        </p:style>
+        <p:txBody>
+          <a:bodyPr rtlCol="0" anchor="ctr"/>
+          <a:lstStyle/>
+          <a:p>
+            <a:pPr algn="ctr"/>
+          </a:p>
+        </p:txBody>
+      </p:sp>
+      <p:sp>
+        <p:nvSpPr>
+          <p:cNvPr id="128" name="Rectangle 127"/>
+          <p:cNvSpPr/>
+          <p:nvPr/>
+        </p:nvSpPr>
+        <p:spPr>
+          <a:xfrm>
+            <a:off x="2734056" y="2450592"/>
+            <a:ext cx="2148840" cy="54864"/>
           </a:xfrm>
           <a:prstGeom prst="rect">
             <a:avLst/>
@@ -30106,310 +29502,205 @@
           <a:ln>
             <a:noFill/>
           </a:ln>
-        </p:spPr>
-        <p:style>
-          <a:lnRef idx="1">
-            <a:schemeClr val="accent1"/>
-          </a:lnRef>
-          <a:fillRef idx="3">
-            <a:schemeClr val="accent1"/>
-          </a:fillRef>
-          <a:effectRef idx="2">
-            <a:schemeClr val="accent1"/>
-          </a:effectRef>
-          <a:fontRef idx="minor">
-            <a:schemeClr val="lt1"/>
-          </a:fontRef>
-        </p:style>
-        <p:txBody>
-          <a:bodyPr rtlCol="0" anchor="ctr"/>
-          <a:lstStyle/>
-          <a:p>
-            <a:pPr algn="ctr"/>
-          </a:p>
-        </p:txBody>
-      </p:sp>
-      <p:sp>
-        <p:nvSpPr>
-          <p:cNvPr id="58" name="TextBox 57"/>
-          <p:cNvSpPr txBox="1"/>
-          <p:nvPr/>
-        </p:nvSpPr>
-        <p:spPr>
-          <a:xfrm>
-            <a:off x="676656" y="4261104"/>
-            <a:ext cx="530352" cy="201168"/>
-          </a:xfrm>
-          <a:prstGeom prst="rect">
-            <a:avLst/>
-          </a:prstGeom>
-          <a:noFill/>
-        </p:spPr>
-        <p:txBody>
-          <a:bodyPr wrap="square">
-            <a:spAutoFit/>
-          </a:bodyPr>
-          <a:lstStyle/>
-          <a:p>
-            <a:pPr algn="l"/>
-            <a:r>
-              <a:rPr sz="800" b="1" i="0">
-                <a:solidFill>
-                  <a:srgbClr val="FFFFFF"/>
-                </a:solidFill>
-                <a:latin typeface="Calibri"/>
-              </a:rPr>
-              <a:t>4 steps</a:t>
-            </a:r>
-          </a:p>
-        </p:txBody>
-      </p:sp>
-      <p:sp>
-        <p:nvSpPr>
-          <p:cNvPr id="59" name="TextBox 58"/>
-          <p:cNvSpPr txBox="1"/>
-          <p:nvPr/>
-        </p:nvSpPr>
-        <p:spPr>
-          <a:xfrm>
-            <a:off x="1316736" y="4261104"/>
-            <a:ext cx="2706623" cy="201168"/>
-          </a:xfrm>
-          <a:prstGeom prst="rect">
-            <a:avLst/>
-          </a:prstGeom>
-          <a:noFill/>
-        </p:spPr>
-        <p:txBody>
-          <a:bodyPr wrap="square">
-            <a:spAutoFit/>
-          </a:bodyPr>
-          <a:lstStyle/>
-          <a:p>
-            <a:pPr algn="l"/>
-            <a:r>
-              <a:rPr sz="800" b="0" i="1">
-                <a:solidFill>
-                  <a:srgbClr val="78716C"/>
-                </a:solidFill>
-                <a:latin typeface="Calibri"/>
-              </a:rPr>
-              <a:t>HMRC MTD API v1.0 direct</a:t>
-            </a:r>
-          </a:p>
-        </p:txBody>
-      </p:sp>
-      <p:sp>
-        <p:nvSpPr>
-          <p:cNvPr id="60" name="Rectangle 59"/>
-          <p:cNvSpPr/>
-          <p:nvPr/>
-        </p:nvSpPr>
-        <p:spPr>
-          <a:xfrm>
-            <a:off x="603503" y="4535424"/>
-            <a:ext cx="3383279" cy="365760"/>
-          </a:xfrm>
-          <a:prstGeom prst="rect">
-            <a:avLst/>
-          </a:prstGeom>
-          <a:solidFill>
-            <a:srgbClr val="F5F5F4"/>
+          <a:effectLst/>
+        </p:spPr>
+        <p:style>
+          <a:lnRef idx="1">
+            <a:schemeClr val="accent1"/>
+          </a:lnRef>
+          <a:fillRef idx="3">
+            <a:schemeClr val="accent1"/>
+          </a:fillRef>
+          <a:effectRef idx="2">
+            <a:schemeClr val="accent1"/>
+          </a:effectRef>
+          <a:fontRef idx="minor">
+            <a:schemeClr val="lt1"/>
+          </a:fontRef>
+        </p:style>
+        <p:txBody>
+          <a:bodyPr rtlCol="0" anchor="ctr"/>
+          <a:lstStyle/>
+          <a:p>
+            <a:pPr algn="ctr"/>
+          </a:p>
+        </p:txBody>
+      </p:sp>
+      <p:sp>
+        <p:nvSpPr>
+          <p:cNvPr id="129" name="TextBox 128"/>
+          <p:cNvSpPr txBox="1"/>
+          <p:nvPr/>
+        </p:nvSpPr>
+        <p:spPr>
+          <a:xfrm>
+            <a:off x="2880360" y="2578608"/>
+            <a:ext cx="1892808" cy="420624"/>
+          </a:xfrm>
+          <a:prstGeom prst="rect">
+            <a:avLst/>
+          </a:prstGeom>
+          <a:noFill/>
+        </p:spPr>
+        <p:txBody>
+          <a:bodyPr wrap="square" anchor="t" lIns="12700" rIns="12700" tIns="0" bIns="0">
+            <a:spAutoFit/>
+          </a:bodyPr>
+          <a:lstStyle/>
+          <a:p>
+            <a:r>
+              <a:rPr sz="1000" b="1">
+                <a:solidFill>
+                  <a:srgbClr val="1C1917"/>
+                </a:solidFill>
+                <a:latin typeface="Calibri"/>
+              </a:rPr>
+              <a:t>MTD VAT Submission</a:t>
+            </a:r>
+          </a:p>
+        </p:txBody>
+      </p:sp>
+      <p:sp>
+        <p:nvSpPr>
+          <p:cNvPr id="130" name="Rectangle 129"/>
+          <p:cNvSpPr/>
+          <p:nvPr/>
+        </p:nvSpPr>
+        <p:spPr>
+          <a:xfrm>
+            <a:off x="2880360" y="3054096"/>
+            <a:ext cx="713232" cy="219456"/>
+          </a:xfrm>
+          <a:prstGeom prst="rect">
+            <a:avLst/>
+          </a:prstGeom>
+          <a:solidFill>
+            <a:srgbClr val="DA291C"/>
           </a:solidFill>
           <a:ln>
             <a:noFill/>
           </a:ln>
-        </p:spPr>
-        <p:style>
-          <a:lnRef idx="1">
-            <a:schemeClr val="accent1"/>
-          </a:lnRef>
-          <a:fillRef idx="3">
-            <a:schemeClr val="accent1"/>
-          </a:fillRef>
-          <a:effectRef idx="2">
-            <a:schemeClr val="accent1"/>
-          </a:effectRef>
-          <a:fontRef idx="minor">
-            <a:schemeClr val="lt1"/>
-          </a:fontRef>
-        </p:style>
-        <p:txBody>
-          <a:bodyPr rtlCol="0" anchor="ctr"/>
-          <a:lstStyle/>
-          <a:p>
-            <a:pPr algn="ctr"/>
-          </a:p>
-        </p:txBody>
-      </p:sp>
-      <p:sp>
-        <p:nvSpPr>
-          <p:cNvPr id="61" name="TextBox 60"/>
-          <p:cNvSpPr txBox="1"/>
-          <p:nvPr/>
-        </p:nvSpPr>
-        <p:spPr>
-          <a:xfrm>
-            <a:off x="694944" y="4590288"/>
-            <a:ext cx="3200399" cy="256032"/>
-          </a:xfrm>
-          <a:prstGeom prst="rect">
-            <a:avLst/>
-          </a:prstGeom>
-          <a:noFill/>
-        </p:spPr>
-        <p:txBody>
-          <a:bodyPr wrap="square">
-            <a:spAutoFit/>
-          </a:bodyPr>
-          <a:lstStyle/>
-          <a:p>
-            <a:pPr algn="l"/>
-            <a:r>
-              <a:rPr sz="750" b="0" i="1">
+          <a:effectLst/>
+        </p:spPr>
+        <p:style>
+          <a:lnRef idx="1">
+            <a:schemeClr val="accent1"/>
+          </a:lnRef>
+          <a:fillRef idx="3">
+            <a:schemeClr val="accent1"/>
+          </a:fillRef>
+          <a:effectRef idx="2">
+            <a:schemeClr val="accent1"/>
+          </a:effectRef>
+          <a:fontRef idx="minor">
+            <a:schemeClr val="lt1"/>
+          </a:fontRef>
+        </p:style>
+        <p:txBody>
+          <a:bodyPr rtlCol="0" anchor="ctr" wrap="none" lIns="38100" rIns="38100" tIns="0" bIns="0"/>
+          <a:lstStyle/>
+          <a:p>
+            <a:pPr algn="ctr"/>
+            <a:r>
+              <a:rPr sz="750" b="1">
+                <a:solidFill>
+                  <a:srgbClr val="FFFFFF"/>
+                </a:solidFill>
+                <a:latin typeface="Calibri"/>
+              </a:rPr>
+              <a:t>4 steps</a:t>
+            </a:r>
+          </a:p>
+        </p:txBody>
+      </p:sp>
+      <p:sp>
+        <p:nvSpPr>
+          <p:cNvPr id="131" name="TextBox 130"/>
+          <p:cNvSpPr txBox="1"/>
+          <p:nvPr/>
+        </p:nvSpPr>
+        <p:spPr>
+          <a:xfrm>
+            <a:off x="2880360" y="3346704"/>
+            <a:ext cx="1892808" cy="310896"/>
+          </a:xfrm>
+          <a:prstGeom prst="rect">
+            <a:avLst/>
+          </a:prstGeom>
+          <a:noFill/>
+        </p:spPr>
+        <p:txBody>
+          <a:bodyPr wrap="square" anchor="t" lIns="12700" rIns="12700" tIns="0" bIns="0">
+            <a:spAutoFit/>
+          </a:bodyPr>
+          <a:lstStyle/>
+          <a:p>
+            <a:r>
+              <a:rPr sz="750" b="0">
                 <a:solidFill>
                   <a:srgbClr val="78716C"/>
                 </a:solidFill>
                 <a:latin typeface="Calibri"/>
               </a:rPr>
-              <a:t>Self-serve · No branch · No call · No paper</a:t>
-            </a:r>
-          </a:p>
-        </p:txBody>
-      </p:sp>
-      <p:sp>
-        <p:nvSpPr>
-          <p:cNvPr id="62" name="Rectangle 61"/>
-          <p:cNvSpPr/>
-          <p:nvPr/>
-        </p:nvSpPr>
-        <p:spPr>
-          <a:xfrm>
-            <a:off x="4315967" y="3840480"/>
-            <a:ext cx="3712463" cy="1261872"/>
+              <a:t>HMRC MTD API v1.0</a:t>
+            </a:r>
+          </a:p>
+        </p:txBody>
+      </p:sp>
+      <p:sp>
+        <p:nvSpPr>
+          <p:cNvPr id="132" name="Rectangle 131"/>
+          <p:cNvSpPr/>
+          <p:nvPr/>
+        </p:nvSpPr>
+        <p:spPr>
+          <a:xfrm>
+            <a:off x="5029200" y="2450592"/>
+            <a:ext cx="2148840" cy="1261872"/>
           </a:xfrm>
           <a:prstGeom prst="rect">
             <a:avLst/>
           </a:prstGeom>
           <a:solidFill>
             <a:srgbClr val="FFFFFF"/>
-          </a:solidFill>
-          <a:ln w="9525">
-            <a:solidFill>
-              <a:srgbClr val="D6D3D1"/>
-            </a:solidFill>
-          </a:ln>
-        </p:spPr>
-        <p:style>
-          <a:lnRef idx="1">
-            <a:schemeClr val="accent1"/>
-          </a:lnRef>
-          <a:fillRef idx="3">
-            <a:schemeClr val="accent1"/>
-          </a:fillRef>
-          <a:effectRef idx="2">
-            <a:schemeClr val="accent1"/>
-          </a:effectRef>
-          <a:fontRef idx="minor">
-            <a:schemeClr val="lt1"/>
-          </a:fontRef>
-        </p:style>
-        <p:txBody>
-          <a:bodyPr rtlCol="0" anchor="ctr"/>
-          <a:lstStyle/>
-          <a:p>
-            <a:pPr algn="ctr"/>
-          </a:p>
-        </p:txBody>
-      </p:sp>
-      <p:sp>
-        <p:nvSpPr>
-          <p:cNvPr id="63" name="Rectangle 62"/>
-          <p:cNvSpPr/>
-          <p:nvPr/>
-        </p:nvSpPr>
-        <p:spPr>
-          <a:xfrm>
-            <a:off x="4315967" y="3840480"/>
-            <a:ext cx="3712463" cy="50292"/>
-          </a:xfrm>
-          <a:prstGeom prst="rect">
-            <a:avLst/>
-          </a:prstGeom>
-          <a:solidFill>
-            <a:srgbClr val="DA291C"/>
           </a:solidFill>
           <a:ln>
             <a:noFill/>
           </a:ln>
-        </p:spPr>
-        <p:style>
-          <a:lnRef idx="1">
-            <a:schemeClr val="accent1"/>
-          </a:lnRef>
-          <a:fillRef idx="3">
-            <a:schemeClr val="accent1"/>
-          </a:fillRef>
-          <a:effectRef idx="2">
-            <a:schemeClr val="accent1"/>
-          </a:effectRef>
-          <a:fontRef idx="minor">
-            <a:schemeClr val="lt1"/>
-          </a:fontRef>
-        </p:style>
-        <p:txBody>
-          <a:bodyPr rtlCol="0" anchor="ctr"/>
-          <a:lstStyle/>
-          <a:p>
-            <a:pPr algn="ctr"/>
-          </a:p>
-        </p:txBody>
-      </p:sp>
-      <p:sp>
-        <p:nvSpPr>
-          <p:cNvPr id="64" name="TextBox 63"/>
-          <p:cNvSpPr txBox="1"/>
-          <p:nvPr/>
-        </p:nvSpPr>
-        <p:spPr>
-          <a:xfrm>
-            <a:off x="4480559" y="3931920"/>
-            <a:ext cx="3438144" cy="274320"/>
-          </a:xfrm>
-          <a:prstGeom prst="rect">
-            <a:avLst/>
-          </a:prstGeom>
-          <a:noFill/>
-        </p:spPr>
-        <p:txBody>
-          <a:bodyPr wrap="square">
-            <a:spAutoFit/>
-          </a:bodyPr>
-          <a:lstStyle/>
-          <a:p>
-            <a:pPr algn="l"/>
-            <a:r>
-              <a:rPr sz="1000" b="1" i="0">
-                <a:solidFill>
-                  <a:srgbClr val="1C1917"/>
-                </a:solidFill>
-                <a:latin typeface="Calibri"/>
-              </a:rPr>
-              <a:t>Personal / Business Unlink</a:t>
-            </a:r>
-          </a:p>
-        </p:txBody>
-      </p:sp>
-      <p:sp>
-        <p:nvSpPr>
-          <p:cNvPr id="65" name="Rectangle 64"/>
-          <p:cNvSpPr/>
-          <p:nvPr/>
-        </p:nvSpPr>
-        <p:spPr>
-          <a:xfrm>
-            <a:off x="4480559" y="4242816"/>
-            <a:ext cx="621792" cy="237744"/>
+          <a:effectLst/>
+        </p:spPr>
+        <p:style>
+          <a:lnRef idx="1">
+            <a:schemeClr val="accent1"/>
+          </a:lnRef>
+          <a:fillRef idx="3">
+            <a:schemeClr val="accent1"/>
+          </a:fillRef>
+          <a:effectRef idx="2">
+            <a:schemeClr val="accent1"/>
+          </a:effectRef>
+          <a:fontRef idx="minor">
+            <a:schemeClr val="lt1"/>
+          </a:fontRef>
+        </p:style>
+        <p:txBody>
+          <a:bodyPr rtlCol="0" anchor="ctr"/>
+          <a:lstStyle/>
+          <a:p>
+            <a:pPr algn="ctr"/>
+          </a:p>
+        </p:txBody>
+      </p:sp>
+      <p:sp>
+        <p:nvSpPr>
+          <p:cNvPr id="133" name="Rectangle 132"/>
+          <p:cNvSpPr/>
+          <p:nvPr/>
+        </p:nvSpPr>
+        <p:spPr>
+          <a:xfrm>
+            <a:off x="5029200" y="2450592"/>
+            <a:ext cx="2148840" cy="54864"/>
           </a:xfrm>
           <a:prstGeom prst="rect">
             <a:avLst/>
@@ -30420,310 +29711,205 @@
           <a:ln>
             <a:noFill/>
           </a:ln>
-        </p:spPr>
-        <p:style>
-          <a:lnRef idx="1">
-            <a:schemeClr val="accent1"/>
-          </a:lnRef>
-          <a:fillRef idx="3">
-            <a:schemeClr val="accent1"/>
-          </a:fillRef>
-          <a:effectRef idx="2">
-            <a:schemeClr val="accent1"/>
-          </a:effectRef>
-          <a:fontRef idx="minor">
-            <a:schemeClr val="lt1"/>
-          </a:fontRef>
-        </p:style>
-        <p:txBody>
-          <a:bodyPr rtlCol="0" anchor="ctr"/>
-          <a:lstStyle/>
-          <a:p>
-            <a:pPr algn="ctr"/>
-          </a:p>
-        </p:txBody>
-      </p:sp>
-      <p:sp>
-        <p:nvSpPr>
-          <p:cNvPr id="66" name="TextBox 65"/>
-          <p:cNvSpPr txBox="1"/>
-          <p:nvPr/>
-        </p:nvSpPr>
-        <p:spPr>
-          <a:xfrm>
-            <a:off x="4553711" y="4261104"/>
-            <a:ext cx="530352" cy="201168"/>
-          </a:xfrm>
-          <a:prstGeom prst="rect">
-            <a:avLst/>
-          </a:prstGeom>
-          <a:noFill/>
-        </p:spPr>
-        <p:txBody>
-          <a:bodyPr wrap="square">
-            <a:spAutoFit/>
-          </a:bodyPr>
-          <a:lstStyle/>
-          <a:p>
-            <a:pPr algn="l"/>
-            <a:r>
-              <a:rPr sz="800" b="1" i="0">
-                <a:solidFill>
-                  <a:srgbClr val="FFFFFF"/>
-                </a:solidFill>
-                <a:latin typeface="Calibri"/>
-              </a:rPr>
-              <a:t>4 steps</a:t>
-            </a:r>
-          </a:p>
-        </p:txBody>
-      </p:sp>
-      <p:sp>
-        <p:nvSpPr>
-          <p:cNvPr id="67" name="TextBox 66"/>
-          <p:cNvSpPr txBox="1"/>
-          <p:nvPr/>
-        </p:nvSpPr>
-        <p:spPr>
-          <a:xfrm>
-            <a:off x="5193791" y="4261104"/>
-            <a:ext cx="2706623" cy="201168"/>
-          </a:xfrm>
-          <a:prstGeom prst="rect">
-            <a:avLst/>
-          </a:prstGeom>
-          <a:noFill/>
-        </p:spPr>
-        <p:txBody>
-          <a:bodyPr wrap="square">
-            <a:spAutoFit/>
-          </a:bodyPr>
-          <a:lstStyle/>
-          <a:p>
-            <a:pPr algn="l"/>
-            <a:r>
-              <a:rPr sz="800" b="0" i="1">
-                <a:solidFill>
-                  <a:srgbClr val="78716C"/>
-                </a:solidFill>
-                <a:latin typeface="Calibri"/>
-              </a:rPr>
-              <a:t>GDPR Art.5(1)(c) · CRM update</a:t>
-            </a:r>
-          </a:p>
-        </p:txBody>
-      </p:sp>
-      <p:sp>
-        <p:nvSpPr>
-          <p:cNvPr id="68" name="Rectangle 67"/>
-          <p:cNvSpPr/>
-          <p:nvPr/>
-        </p:nvSpPr>
-        <p:spPr>
-          <a:xfrm>
-            <a:off x="4480559" y="4535424"/>
-            <a:ext cx="3383279" cy="365760"/>
-          </a:xfrm>
-          <a:prstGeom prst="rect">
-            <a:avLst/>
-          </a:prstGeom>
-          <a:solidFill>
-            <a:srgbClr val="F5F5F4"/>
+          <a:effectLst/>
+        </p:spPr>
+        <p:style>
+          <a:lnRef idx="1">
+            <a:schemeClr val="accent1"/>
+          </a:lnRef>
+          <a:fillRef idx="3">
+            <a:schemeClr val="accent1"/>
+          </a:fillRef>
+          <a:effectRef idx="2">
+            <a:schemeClr val="accent1"/>
+          </a:effectRef>
+          <a:fontRef idx="minor">
+            <a:schemeClr val="lt1"/>
+          </a:fontRef>
+        </p:style>
+        <p:txBody>
+          <a:bodyPr rtlCol="0" anchor="ctr"/>
+          <a:lstStyle/>
+          <a:p>
+            <a:pPr algn="ctr"/>
+          </a:p>
+        </p:txBody>
+      </p:sp>
+      <p:sp>
+        <p:nvSpPr>
+          <p:cNvPr id="134" name="TextBox 133"/>
+          <p:cNvSpPr txBox="1"/>
+          <p:nvPr/>
+        </p:nvSpPr>
+        <p:spPr>
+          <a:xfrm>
+            <a:off x="5175504" y="2578608"/>
+            <a:ext cx="1892808" cy="420624"/>
+          </a:xfrm>
+          <a:prstGeom prst="rect">
+            <a:avLst/>
+          </a:prstGeom>
+          <a:noFill/>
+        </p:spPr>
+        <p:txBody>
+          <a:bodyPr wrap="square" anchor="t" lIns="12700" rIns="12700" tIns="0" bIns="0">
+            <a:spAutoFit/>
+          </a:bodyPr>
+          <a:lstStyle/>
+          <a:p>
+            <a:r>
+              <a:rPr sz="1000" b="1">
+                <a:solidFill>
+                  <a:srgbClr val="1C1917"/>
+                </a:solidFill>
+                <a:latin typeface="Calibri"/>
+              </a:rPr>
+              <a:t>Personal / Business Unlink</a:t>
+            </a:r>
+          </a:p>
+        </p:txBody>
+      </p:sp>
+      <p:sp>
+        <p:nvSpPr>
+          <p:cNvPr id="135" name="Rectangle 134"/>
+          <p:cNvSpPr/>
+          <p:nvPr/>
+        </p:nvSpPr>
+        <p:spPr>
+          <a:xfrm>
+            <a:off x="5175504" y="3054096"/>
+            <a:ext cx="713232" cy="219456"/>
+          </a:xfrm>
+          <a:prstGeom prst="rect">
+            <a:avLst/>
+          </a:prstGeom>
+          <a:solidFill>
+            <a:srgbClr val="DA291C"/>
           </a:solidFill>
           <a:ln>
             <a:noFill/>
           </a:ln>
-        </p:spPr>
-        <p:style>
-          <a:lnRef idx="1">
-            <a:schemeClr val="accent1"/>
-          </a:lnRef>
-          <a:fillRef idx="3">
-            <a:schemeClr val="accent1"/>
-          </a:fillRef>
-          <a:effectRef idx="2">
-            <a:schemeClr val="accent1"/>
-          </a:effectRef>
-          <a:fontRef idx="minor">
-            <a:schemeClr val="lt1"/>
-          </a:fontRef>
-        </p:style>
-        <p:txBody>
-          <a:bodyPr rtlCol="0" anchor="ctr"/>
-          <a:lstStyle/>
-          <a:p>
-            <a:pPr algn="ctr"/>
-          </a:p>
-        </p:txBody>
-      </p:sp>
-      <p:sp>
-        <p:nvSpPr>
-          <p:cNvPr id="69" name="TextBox 68"/>
-          <p:cNvSpPr txBox="1"/>
-          <p:nvPr/>
-        </p:nvSpPr>
-        <p:spPr>
-          <a:xfrm>
-            <a:off x="4571999" y="4590288"/>
-            <a:ext cx="3200399" cy="256032"/>
-          </a:xfrm>
-          <a:prstGeom prst="rect">
-            <a:avLst/>
-          </a:prstGeom>
-          <a:noFill/>
-        </p:spPr>
-        <p:txBody>
-          <a:bodyPr wrap="square">
-            <a:spAutoFit/>
-          </a:bodyPr>
-          <a:lstStyle/>
-          <a:p>
-            <a:pPr algn="l"/>
-            <a:r>
-              <a:rPr sz="750" b="0" i="1">
+          <a:effectLst/>
+        </p:spPr>
+        <p:style>
+          <a:lnRef idx="1">
+            <a:schemeClr val="accent1"/>
+          </a:lnRef>
+          <a:fillRef idx="3">
+            <a:schemeClr val="accent1"/>
+          </a:fillRef>
+          <a:effectRef idx="2">
+            <a:schemeClr val="accent1"/>
+          </a:effectRef>
+          <a:fontRef idx="minor">
+            <a:schemeClr val="lt1"/>
+          </a:fontRef>
+        </p:style>
+        <p:txBody>
+          <a:bodyPr rtlCol="0" anchor="ctr" wrap="none" lIns="38100" rIns="38100" tIns="0" bIns="0"/>
+          <a:lstStyle/>
+          <a:p>
+            <a:pPr algn="ctr"/>
+            <a:r>
+              <a:rPr sz="750" b="1">
+                <a:solidFill>
+                  <a:srgbClr val="FFFFFF"/>
+                </a:solidFill>
+                <a:latin typeface="Calibri"/>
+              </a:rPr>
+              <a:t>4 steps</a:t>
+            </a:r>
+          </a:p>
+        </p:txBody>
+      </p:sp>
+      <p:sp>
+        <p:nvSpPr>
+          <p:cNvPr id="136" name="TextBox 135"/>
+          <p:cNvSpPr txBox="1"/>
+          <p:nvPr/>
+        </p:nvSpPr>
+        <p:spPr>
+          <a:xfrm>
+            <a:off x="5175504" y="3346704"/>
+            <a:ext cx="1892808" cy="310896"/>
+          </a:xfrm>
+          <a:prstGeom prst="rect">
+            <a:avLst/>
+          </a:prstGeom>
+          <a:noFill/>
+        </p:spPr>
+        <p:txBody>
+          <a:bodyPr wrap="square" anchor="t" lIns="12700" rIns="12700" tIns="0" bIns="0">
+            <a:spAutoFit/>
+          </a:bodyPr>
+          <a:lstStyle/>
+          <a:p>
+            <a:r>
+              <a:rPr sz="750" b="0">
                 <a:solidFill>
                   <a:srgbClr val="78716C"/>
                 </a:solidFill>
                 <a:latin typeface="Calibri"/>
               </a:rPr>
-              <a:t>Self-serve · No branch · No call · No paper</a:t>
-            </a:r>
-          </a:p>
-        </p:txBody>
-      </p:sp>
-      <p:sp>
-        <p:nvSpPr>
-          <p:cNvPr id="70" name="Rectangle 69"/>
-          <p:cNvSpPr/>
-          <p:nvPr/>
-        </p:nvSpPr>
-        <p:spPr>
-          <a:xfrm>
-            <a:off x="8193023" y="3840480"/>
-            <a:ext cx="3712463" cy="1261872"/>
+              <a:t>GDPR Art.5(1)(c) · CRM</a:t>
+            </a:r>
+          </a:p>
+        </p:txBody>
+      </p:sp>
+      <p:sp>
+        <p:nvSpPr>
+          <p:cNvPr id="137" name="Rectangle 136"/>
+          <p:cNvSpPr/>
+          <p:nvPr/>
+        </p:nvSpPr>
+        <p:spPr>
+          <a:xfrm>
+            <a:off x="7324344" y="2450592"/>
+            <a:ext cx="2148840" cy="1261872"/>
           </a:xfrm>
           <a:prstGeom prst="rect">
             <a:avLst/>
           </a:prstGeom>
           <a:solidFill>
             <a:srgbClr val="FFFFFF"/>
-          </a:solidFill>
-          <a:ln w="9525">
-            <a:solidFill>
-              <a:srgbClr val="D6D3D1"/>
-            </a:solidFill>
-          </a:ln>
-        </p:spPr>
-        <p:style>
-          <a:lnRef idx="1">
-            <a:schemeClr val="accent1"/>
-          </a:lnRef>
-          <a:fillRef idx="3">
-            <a:schemeClr val="accent1"/>
-          </a:fillRef>
-          <a:effectRef idx="2">
-            <a:schemeClr val="accent1"/>
-          </a:effectRef>
-          <a:fontRef idx="minor">
-            <a:schemeClr val="lt1"/>
-          </a:fontRef>
-        </p:style>
-        <p:txBody>
-          <a:bodyPr rtlCol="0" anchor="ctr"/>
-          <a:lstStyle/>
-          <a:p>
-            <a:pPr algn="ctr"/>
-          </a:p>
-        </p:txBody>
-      </p:sp>
-      <p:sp>
-        <p:nvSpPr>
-          <p:cNvPr id="71" name="Rectangle 70"/>
-          <p:cNvSpPr/>
-          <p:nvPr/>
-        </p:nvSpPr>
-        <p:spPr>
-          <a:xfrm>
-            <a:off x="8193023" y="3840480"/>
-            <a:ext cx="3712463" cy="50292"/>
-          </a:xfrm>
-          <a:prstGeom prst="rect">
-            <a:avLst/>
-          </a:prstGeom>
-          <a:solidFill>
-            <a:srgbClr val="DA291C"/>
           </a:solidFill>
           <a:ln>
             <a:noFill/>
           </a:ln>
-        </p:spPr>
-        <p:style>
-          <a:lnRef idx="1">
-            <a:schemeClr val="accent1"/>
-          </a:lnRef>
-          <a:fillRef idx="3">
-            <a:schemeClr val="accent1"/>
-          </a:fillRef>
-          <a:effectRef idx="2">
-            <a:schemeClr val="accent1"/>
-          </a:effectRef>
-          <a:fontRef idx="minor">
-            <a:schemeClr val="lt1"/>
-          </a:fontRef>
-        </p:style>
-        <p:txBody>
-          <a:bodyPr rtlCol="0" anchor="ctr"/>
-          <a:lstStyle/>
-          <a:p>
-            <a:pPr algn="ctr"/>
-          </a:p>
-        </p:txBody>
-      </p:sp>
-      <p:sp>
-        <p:nvSpPr>
-          <p:cNvPr id="72" name="TextBox 71"/>
-          <p:cNvSpPr txBox="1"/>
-          <p:nvPr/>
-        </p:nvSpPr>
-        <p:spPr>
-          <a:xfrm>
-            <a:off x="8357615" y="3931920"/>
-            <a:ext cx="3438144" cy="274320"/>
-          </a:xfrm>
-          <a:prstGeom prst="rect">
-            <a:avLst/>
-          </a:prstGeom>
-          <a:noFill/>
-        </p:spPr>
-        <p:txBody>
-          <a:bodyPr wrap="square">
-            <a:spAutoFit/>
-          </a:bodyPr>
-          <a:lstStyle/>
-          <a:p>
-            <a:pPr algn="l"/>
-            <a:r>
-              <a:rPr sz="1000" b="1" i="0">
-                <a:solidFill>
-                  <a:srgbClr val="1C1917"/>
-                </a:solidFill>
-                <a:latin typeface="Calibri"/>
-              </a:rPr>
-              <a:t>Credit Ring-Fence</a:t>
-            </a:r>
-          </a:p>
-        </p:txBody>
-      </p:sp>
-      <p:sp>
-        <p:nvSpPr>
-          <p:cNvPr id="73" name="Rectangle 72"/>
-          <p:cNvSpPr/>
-          <p:nvPr/>
-        </p:nvSpPr>
-        <p:spPr>
-          <a:xfrm>
-            <a:off x="8357615" y="4242816"/>
-            <a:ext cx="621792" cy="237744"/>
+          <a:effectLst/>
+        </p:spPr>
+        <p:style>
+          <a:lnRef idx="1">
+            <a:schemeClr val="accent1"/>
+          </a:lnRef>
+          <a:fillRef idx="3">
+            <a:schemeClr val="accent1"/>
+          </a:fillRef>
+          <a:effectRef idx="2">
+            <a:schemeClr val="accent1"/>
+          </a:effectRef>
+          <a:fontRef idx="minor">
+            <a:schemeClr val="lt1"/>
+          </a:fontRef>
+        </p:style>
+        <p:txBody>
+          <a:bodyPr rtlCol="0" anchor="ctr"/>
+          <a:lstStyle/>
+          <a:p>
+            <a:pPr algn="ctr"/>
+          </a:p>
+        </p:txBody>
+      </p:sp>
+      <p:sp>
+        <p:nvSpPr>
+          <p:cNvPr id="138" name="Rectangle 137"/>
+          <p:cNvSpPr/>
+          <p:nvPr/>
+        </p:nvSpPr>
+        <p:spPr>
+          <a:xfrm>
+            <a:off x="7324344" y="2450592"/>
+            <a:ext cx="2148840" cy="54864"/>
           </a:xfrm>
           <a:prstGeom prst="rect">
             <a:avLst/>
@@ -30734,310 +29920,205 @@
           <a:ln>
             <a:noFill/>
           </a:ln>
-        </p:spPr>
-        <p:style>
-          <a:lnRef idx="1">
-            <a:schemeClr val="accent1"/>
-          </a:lnRef>
-          <a:fillRef idx="3">
-            <a:schemeClr val="accent1"/>
-          </a:fillRef>
-          <a:effectRef idx="2">
-            <a:schemeClr val="accent1"/>
-          </a:effectRef>
-          <a:fontRef idx="minor">
-            <a:schemeClr val="lt1"/>
-          </a:fontRef>
-        </p:style>
-        <p:txBody>
-          <a:bodyPr rtlCol="0" anchor="ctr"/>
-          <a:lstStyle/>
-          <a:p>
-            <a:pPr algn="ctr"/>
-          </a:p>
-        </p:txBody>
-      </p:sp>
-      <p:sp>
-        <p:nvSpPr>
-          <p:cNvPr id="74" name="TextBox 73"/>
-          <p:cNvSpPr txBox="1"/>
-          <p:nvPr/>
-        </p:nvSpPr>
-        <p:spPr>
-          <a:xfrm>
-            <a:off x="8430767" y="4261104"/>
-            <a:ext cx="530352" cy="201168"/>
-          </a:xfrm>
-          <a:prstGeom prst="rect">
-            <a:avLst/>
-          </a:prstGeom>
-          <a:noFill/>
-        </p:spPr>
-        <p:txBody>
-          <a:bodyPr wrap="square">
-            <a:spAutoFit/>
-          </a:bodyPr>
-          <a:lstStyle/>
-          <a:p>
-            <a:pPr algn="l"/>
-            <a:r>
-              <a:rPr sz="800" b="1" i="0">
-                <a:solidFill>
-                  <a:srgbClr val="FFFFFF"/>
-                </a:solidFill>
-                <a:latin typeface="Calibri"/>
-              </a:rPr>
-              <a:t>2 steps</a:t>
-            </a:r>
-          </a:p>
-        </p:txBody>
-      </p:sp>
-      <p:sp>
-        <p:nvSpPr>
-          <p:cNvPr id="75" name="TextBox 74"/>
-          <p:cNvSpPr txBox="1"/>
-          <p:nvPr/>
-        </p:nvSpPr>
-        <p:spPr>
-          <a:xfrm>
-            <a:off x="9070847" y="4261104"/>
-            <a:ext cx="2706623" cy="201168"/>
-          </a:xfrm>
-          <a:prstGeom prst="rect">
-            <a:avLst/>
-          </a:prstGeom>
-          <a:noFill/>
-        </p:spPr>
-        <p:txBody>
-          <a:bodyPr wrap="square">
-            <a:spAutoFit/>
-          </a:bodyPr>
-          <a:lstStyle/>
-          <a:p>
-            <a:pPr algn="l"/>
-            <a:r>
-              <a:rPr sz="800" b="0" i="1">
-                <a:solidFill>
-                  <a:srgbClr val="78716C"/>
-                </a:solidFill>
-                <a:latin typeface="Calibri"/>
-              </a:rPr>
-              <a:t>ICO LIA · purpose limitation</a:t>
-            </a:r>
-          </a:p>
-        </p:txBody>
-      </p:sp>
-      <p:sp>
-        <p:nvSpPr>
-          <p:cNvPr id="76" name="Rectangle 75"/>
-          <p:cNvSpPr/>
-          <p:nvPr/>
-        </p:nvSpPr>
-        <p:spPr>
-          <a:xfrm>
-            <a:off x="8357615" y="4535424"/>
-            <a:ext cx="3383279" cy="365760"/>
-          </a:xfrm>
-          <a:prstGeom prst="rect">
-            <a:avLst/>
-          </a:prstGeom>
-          <a:solidFill>
-            <a:srgbClr val="F5F5F4"/>
+          <a:effectLst/>
+        </p:spPr>
+        <p:style>
+          <a:lnRef idx="1">
+            <a:schemeClr val="accent1"/>
+          </a:lnRef>
+          <a:fillRef idx="3">
+            <a:schemeClr val="accent1"/>
+          </a:fillRef>
+          <a:effectRef idx="2">
+            <a:schemeClr val="accent1"/>
+          </a:effectRef>
+          <a:fontRef idx="minor">
+            <a:schemeClr val="lt1"/>
+          </a:fontRef>
+        </p:style>
+        <p:txBody>
+          <a:bodyPr rtlCol="0" anchor="ctr"/>
+          <a:lstStyle/>
+          <a:p>
+            <a:pPr algn="ctr"/>
+          </a:p>
+        </p:txBody>
+      </p:sp>
+      <p:sp>
+        <p:nvSpPr>
+          <p:cNvPr id="139" name="TextBox 138"/>
+          <p:cNvSpPr txBox="1"/>
+          <p:nvPr/>
+        </p:nvSpPr>
+        <p:spPr>
+          <a:xfrm>
+            <a:off x="7470648" y="2578608"/>
+            <a:ext cx="1892808" cy="420624"/>
+          </a:xfrm>
+          <a:prstGeom prst="rect">
+            <a:avLst/>
+          </a:prstGeom>
+          <a:noFill/>
+        </p:spPr>
+        <p:txBody>
+          <a:bodyPr wrap="square" anchor="t" lIns="12700" rIns="12700" tIns="0" bIns="0">
+            <a:spAutoFit/>
+          </a:bodyPr>
+          <a:lstStyle/>
+          <a:p>
+            <a:r>
+              <a:rPr sz="1000" b="1">
+                <a:solidFill>
+                  <a:srgbClr val="1C1917"/>
+                </a:solidFill>
+                <a:latin typeface="Calibri"/>
+              </a:rPr>
+              <a:t>Credit Ring-Fence</a:t>
+            </a:r>
+          </a:p>
+        </p:txBody>
+      </p:sp>
+      <p:sp>
+        <p:nvSpPr>
+          <p:cNvPr id="140" name="Rectangle 139"/>
+          <p:cNvSpPr/>
+          <p:nvPr/>
+        </p:nvSpPr>
+        <p:spPr>
+          <a:xfrm>
+            <a:off x="7470648" y="3054096"/>
+            <a:ext cx="713232" cy="219456"/>
+          </a:xfrm>
+          <a:prstGeom prst="rect">
+            <a:avLst/>
+          </a:prstGeom>
+          <a:solidFill>
+            <a:srgbClr val="DA291C"/>
           </a:solidFill>
           <a:ln>
             <a:noFill/>
           </a:ln>
-        </p:spPr>
-        <p:style>
-          <a:lnRef idx="1">
-            <a:schemeClr val="accent1"/>
-          </a:lnRef>
-          <a:fillRef idx="3">
-            <a:schemeClr val="accent1"/>
-          </a:fillRef>
-          <a:effectRef idx="2">
-            <a:schemeClr val="accent1"/>
-          </a:effectRef>
-          <a:fontRef idx="minor">
-            <a:schemeClr val="lt1"/>
-          </a:fontRef>
-        </p:style>
-        <p:txBody>
-          <a:bodyPr rtlCol="0" anchor="ctr"/>
-          <a:lstStyle/>
-          <a:p>
-            <a:pPr algn="ctr"/>
-          </a:p>
-        </p:txBody>
-      </p:sp>
-      <p:sp>
-        <p:nvSpPr>
-          <p:cNvPr id="77" name="TextBox 76"/>
-          <p:cNvSpPr txBox="1"/>
-          <p:nvPr/>
-        </p:nvSpPr>
-        <p:spPr>
-          <a:xfrm>
-            <a:off x="8449055" y="4590288"/>
-            <a:ext cx="3200399" cy="256032"/>
-          </a:xfrm>
-          <a:prstGeom prst="rect">
-            <a:avLst/>
-          </a:prstGeom>
-          <a:noFill/>
-        </p:spPr>
-        <p:txBody>
-          <a:bodyPr wrap="square">
-            <a:spAutoFit/>
-          </a:bodyPr>
-          <a:lstStyle/>
-          <a:p>
-            <a:pPr algn="l"/>
-            <a:r>
-              <a:rPr sz="750" b="0" i="1">
+          <a:effectLst/>
+        </p:spPr>
+        <p:style>
+          <a:lnRef idx="1">
+            <a:schemeClr val="accent1"/>
+          </a:lnRef>
+          <a:fillRef idx="3">
+            <a:schemeClr val="accent1"/>
+          </a:fillRef>
+          <a:effectRef idx="2">
+            <a:schemeClr val="accent1"/>
+          </a:effectRef>
+          <a:fontRef idx="minor">
+            <a:schemeClr val="lt1"/>
+          </a:fontRef>
+        </p:style>
+        <p:txBody>
+          <a:bodyPr rtlCol="0" anchor="ctr" wrap="none" lIns="38100" rIns="38100" tIns="0" bIns="0"/>
+          <a:lstStyle/>
+          <a:p>
+            <a:pPr algn="ctr"/>
+            <a:r>
+              <a:rPr sz="750" b="1">
+                <a:solidFill>
+                  <a:srgbClr val="FFFFFF"/>
+                </a:solidFill>
+                <a:latin typeface="Calibri"/>
+              </a:rPr>
+              <a:t>2 steps</a:t>
+            </a:r>
+          </a:p>
+        </p:txBody>
+      </p:sp>
+      <p:sp>
+        <p:nvSpPr>
+          <p:cNvPr id="141" name="TextBox 140"/>
+          <p:cNvSpPr txBox="1"/>
+          <p:nvPr/>
+        </p:nvSpPr>
+        <p:spPr>
+          <a:xfrm>
+            <a:off x="7470648" y="3346704"/>
+            <a:ext cx="1892808" cy="310896"/>
+          </a:xfrm>
+          <a:prstGeom prst="rect">
+            <a:avLst/>
+          </a:prstGeom>
+          <a:noFill/>
+        </p:spPr>
+        <p:txBody>
+          <a:bodyPr wrap="square" anchor="t" lIns="12700" rIns="12700" tIns="0" bIns="0">
+            <a:spAutoFit/>
+          </a:bodyPr>
+          <a:lstStyle/>
+          <a:p>
+            <a:r>
+              <a:rPr sz="750" b="0">
                 <a:solidFill>
                   <a:srgbClr val="78716C"/>
                 </a:solidFill>
                 <a:latin typeface="Calibri"/>
               </a:rPr>
-              <a:t>Self-serve · No branch · No call · No paper</a:t>
-            </a:r>
-          </a:p>
-        </p:txBody>
-      </p:sp>
-      <p:sp>
-        <p:nvSpPr>
-          <p:cNvPr id="78" name="Rectangle 77"/>
-          <p:cNvSpPr/>
-          <p:nvPr/>
-        </p:nvSpPr>
-        <p:spPr>
-          <a:xfrm>
-            <a:off x="438912" y="5230368"/>
-            <a:ext cx="3712463" cy="1261872"/>
+              <a:t>ICO LIA · purpose limitation</a:t>
+            </a:r>
+          </a:p>
+        </p:txBody>
+      </p:sp>
+      <p:sp>
+        <p:nvSpPr>
+          <p:cNvPr id="142" name="Rectangle 141"/>
+          <p:cNvSpPr/>
+          <p:nvPr/>
+        </p:nvSpPr>
+        <p:spPr>
+          <a:xfrm>
+            <a:off x="9619488" y="2450592"/>
+            <a:ext cx="2148840" cy="1261872"/>
           </a:xfrm>
           <a:prstGeom prst="rect">
             <a:avLst/>
           </a:prstGeom>
           <a:solidFill>
             <a:srgbClr val="FFFFFF"/>
-          </a:solidFill>
-          <a:ln w="9525">
-            <a:solidFill>
-              <a:srgbClr val="D6D3D1"/>
-            </a:solidFill>
-          </a:ln>
-        </p:spPr>
-        <p:style>
-          <a:lnRef idx="1">
-            <a:schemeClr val="accent1"/>
-          </a:lnRef>
-          <a:fillRef idx="3">
-            <a:schemeClr val="accent1"/>
-          </a:fillRef>
-          <a:effectRef idx="2">
-            <a:schemeClr val="accent1"/>
-          </a:effectRef>
-          <a:fontRef idx="minor">
-            <a:schemeClr val="lt1"/>
-          </a:fontRef>
-        </p:style>
-        <p:txBody>
-          <a:bodyPr rtlCol="0" anchor="ctr"/>
-          <a:lstStyle/>
-          <a:p>
-            <a:pPr algn="ctr"/>
-          </a:p>
-        </p:txBody>
-      </p:sp>
-      <p:sp>
-        <p:nvSpPr>
-          <p:cNvPr id="79" name="Rectangle 78"/>
-          <p:cNvSpPr/>
-          <p:nvPr/>
-        </p:nvSpPr>
-        <p:spPr>
-          <a:xfrm>
-            <a:off x="438912" y="5230368"/>
-            <a:ext cx="3712463" cy="50292"/>
-          </a:xfrm>
-          <a:prstGeom prst="rect">
-            <a:avLst/>
-          </a:prstGeom>
-          <a:solidFill>
-            <a:srgbClr val="DA291C"/>
           </a:solidFill>
           <a:ln>
             <a:noFill/>
           </a:ln>
-        </p:spPr>
-        <p:style>
-          <a:lnRef idx="1">
-            <a:schemeClr val="accent1"/>
-          </a:lnRef>
-          <a:fillRef idx="3">
-            <a:schemeClr val="accent1"/>
-          </a:fillRef>
-          <a:effectRef idx="2">
-            <a:schemeClr val="accent1"/>
-          </a:effectRef>
-          <a:fontRef idx="minor">
-            <a:schemeClr val="lt1"/>
-          </a:fontRef>
-        </p:style>
-        <p:txBody>
-          <a:bodyPr rtlCol="0" anchor="ctr"/>
-          <a:lstStyle/>
-          <a:p>
-            <a:pPr algn="ctr"/>
-          </a:p>
-        </p:txBody>
-      </p:sp>
-      <p:sp>
-        <p:nvSpPr>
-          <p:cNvPr id="80" name="TextBox 79"/>
-          <p:cNvSpPr txBox="1"/>
-          <p:nvPr/>
-        </p:nvSpPr>
-        <p:spPr>
-          <a:xfrm>
-            <a:off x="603503" y="5321808"/>
-            <a:ext cx="3438144" cy="274320"/>
-          </a:xfrm>
-          <a:prstGeom prst="rect">
-            <a:avLst/>
-          </a:prstGeom>
-          <a:noFill/>
-        </p:spPr>
-        <p:txBody>
-          <a:bodyPr wrap="square">
-            <a:spAutoFit/>
-          </a:bodyPr>
-          <a:lstStyle/>
-          <a:p>
-            <a:pPr algn="l"/>
-            <a:r>
-              <a:rPr sz="1000" b="1" i="0">
-                <a:solidFill>
-                  <a:srgbClr val="1C1917"/>
-                </a:solidFill>
-                <a:latin typeface="Calibri"/>
-              </a:rPr>
-              <a:t>Pre-Approved Lending</a:t>
-            </a:r>
-          </a:p>
-        </p:txBody>
-      </p:sp>
-      <p:sp>
-        <p:nvSpPr>
-          <p:cNvPr id="81" name="Rectangle 80"/>
-          <p:cNvSpPr/>
-          <p:nvPr/>
-        </p:nvSpPr>
-        <p:spPr>
-          <a:xfrm>
-            <a:off x="603503" y="5632704"/>
-            <a:ext cx="621792" cy="237744"/>
+          <a:effectLst/>
+        </p:spPr>
+        <p:style>
+          <a:lnRef idx="1">
+            <a:schemeClr val="accent1"/>
+          </a:lnRef>
+          <a:fillRef idx="3">
+            <a:schemeClr val="accent1"/>
+          </a:fillRef>
+          <a:effectRef idx="2">
+            <a:schemeClr val="accent1"/>
+          </a:effectRef>
+          <a:fontRef idx="minor">
+            <a:schemeClr val="lt1"/>
+          </a:fontRef>
+        </p:style>
+        <p:txBody>
+          <a:bodyPr rtlCol="0" anchor="ctr"/>
+          <a:lstStyle/>
+          <a:p>
+            <a:pPr algn="ctr"/>
+          </a:p>
+        </p:txBody>
+      </p:sp>
+      <p:sp>
+        <p:nvSpPr>
+          <p:cNvPr id="143" name="Rectangle 142"/>
+          <p:cNvSpPr/>
+          <p:nvPr/>
+        </p:nvSpPr>
+        <p:spPr>
+          <a:xfrm>
+            <a:off x="9619488" y="2450592"/>
+            <a:ext cx="2148840" cy="54864"/>
           </a:xfrm>
           <a:prstGeom prst="rect">
             <a:avLst/>
@@ -31048,310 +30129,205 @@
           <a:ln>
             <a:noFill/>
           </a:ln>
-        </p:spPr>
-        <p:style>
-          <a:lnRef idx="1">
-            <a:schemeClr val="accent1"/>
-          </a:lnRef>
-          <a:fillRef idx="3">
-            <a:schemeClr val="accent1"/>
-          </a:fillRef>
-          <a:effectRef idx="2">
-            <a:schemeClr val="accent1"/>
-          </a:effectRef>
-          <a:fontRef idx="minor">
-            <a:schemeClr val="lt1"/>
-          </a:fontRef>
-        </p:style>
-        <p:txBody>
-          <a:bodyPr rtlCol="0" anchor="ctr"/>
-          <a:lstStyle/>
-          <a:p>
-            <a:pPr algn="ctr"/>
-          </a:p>
-        </p:txBody>
-      </p:sp>
-      <p:sp>
-        <p:nvSpPr>
-          <p:cNvPr id="82" name="TextBox 81"/>
-          <p:cNvSpPr txBox="1"/>
-          <p:nvPr/>
-        </p:nvSpPr>
-        <p:spPr>
-          <a:xfrm>
-            <a:off x="676656" y="5650992"/>
-            <a:ext cx="530352" cy="201168"/>
-          </a:xfrm>
-          <a:prstGeom prst="rect">
-            <a:avLst/>
-          </a:prstGeom>
-          <a:noFill/>
-        </p:spPr>
-        <p:txBody>
-          <a:bodyPr wrap="square">
-            <a:spAutoFit/>
-          </a:bodyPr>
-          <a:lstStyle/>
-          <a:p>
-            <a:pPr algn="l"/>
-            <a:r>
-              <a:rPr sz="800" b="1" i="0">
-                <a:solidFill>
-                  <a:srgbClr val="FFFFFF"/>
-                </a:solidFill>
-                <a:latin typeface="Calibri"/>
-              </a:rPr>
-              <a:t>3 steps</a:t>
-            </a:r>
-          </a:p>
-        </p:txBody>
-      </p:sp>
-      <p:sp>
-        <p:nvSpPr>
-          <p:cNvPr id="83" name="TextBox 82"/>
-          <p:cNvSpPr txBox="1"/>
-          <p:nvPr/>
-        </p:nvSpPr>
-        <p:spPr>
-          <a:xfrm>
-            <a:off x="1316736" y="5650992"/>
-            <a:ext cx="2706623" cy="201168"/>
-          </a:xfrm>
-          <a:prstGeom prst="rect">
-            <a:avLst/>
-          </a:prstGeom>
-          <a:noFill/>
-        </p:spPr>
-        <p:txBody>
-          <a:bodyPr wrap="square">
-            <a:spAutoFit/>
-          </a:bodyPr>
-          <a:lstStyle/>
-          <a:p>
-            <a:pPr algn="l"/>
-            <a:r>
-              <a:rPr sz="800" b="0" i="1">
-                <a:solidFill>
-                  <a:srgbClr val="78716C"/>
-                </a:solidFill>
-                <a:latin typeface="Calibri"/>
-              </a:rPr>
-              <a:t>CCA 1974 regulated · cooling-off</a:t>
-            </a:r>
-          </a:p>
-        </p:txBody>
-      </p:sp>
-      <p:sp>
-        <p:nvSpPr>
-          <p:cNvPr id="84" name="Rectangle 83"/>
-          <p:cNvSpPr/>
-          <p:nvPr/>
-        </p:nvSpPr>
-        <p:spPr>
-          <a:xfrm>
-            <a:off x="603503" y="5925312"/>
-            <a:ext cx="3383279" cy="365760"/>
-          </a:xfrm>
-          <a:prstGeom prst="rect">
-            <a:avLst/>
-          </a:prstGeom>
-          <a:solidFill>
-            <a:srgbClr val="F5F5F4"/>
+          <a:effectLst/>
+        </p:spPr>
+        <p:style>
+          <a:lnRef idx="1">
+            <a:schemeClr val="accent1"/>
+          </a:lnRef>
+          <a:fillRef idx="3">
+            <a:schemeClr val="accent1"/>
+          </a:fillRef>
+          <a:effectRef idx="2">
+            <a:schemeClr val="accent1"/>
+          </a:effectRef>
+          <a:fontRef idx="minor">
+            <a:schemeClr val="lt1"/>
+          </a:fontRef>
+        </p:style>
+        <p:txBody>
+          <a:bodyPr rtlCol="0" anchor="ctr"/>
+          <a:lstStyle/>
+          <a:p>
+            <a:pPr algn="ctr"/>
+          </a:p>
+        </p:txBody>
+      </p:sp>
+      <p:sp>
+        <p:nvSpPr>
+          <p:cNvPr id="144" name="TextBox 143"/>
+          <p:cNvSpPr txBox="1"/>
+          <p:nvPr/>
+        </p:nvSpPr>
+        <p:spPr>
+          <a:xfrm>
+            <a:off x="9765792" y="2578608"/>
+            <a:ext cx="1892808" cy="420624"/>
+          </a:xfrm>
+          <a:prstGeom prst="rect">
+            <a:avLst/>
+          </a:prstGeom>
+          <a:noFill/>
+        </p:spPr>
+        <p:txBody>
+          <a:bodyPr wrap="square" anchor="t" lIns="12700" rIns="12700" tIns="0" bIns="0">
+            <a:spAutoFit/>
+          </a:bodyPr>
+          <a:lstStyle/>
+          <a:p>
+            <a:r>
+              <a:rPr sz="1000" b="1">
+                <a:solidFill>
+                  <a:srgbClr val="1C1917"/>
+                </a:solidFill>
+                <a:latin typeface="Calibri"/>
+              </a:rPr>
+              <a:t>Pre-Approved Lending</a:t>
+            </a:r>
+          </a:p>
+        </p:txBody>
+      </p:sp>
+      <p:sp>
+        <p:nvSpPr>
+          <p:cNvPr id="145" name="Rectangle 144"/>
+          <p:cNvSpPr/>
+          <p:nvPr/>
+        </p:nvSpPr>
+        <p:spPr>
+          <a:xfrm>
+            <a:off x="9765792" y="3054096"/>
+            <a:ext cx="713232" cy="219456"/>
+          </a:xfrm>
+          <a:prstGeom prst="rect">
+            <a:avLst/>
+          </a:prstGeom>
+          <a:solidFill>
+            <a:srgbClr val="DA291C"/>
           </a:solidFill>
           <a:ln>
             <a:noFill/>
           </a:ln>
-        </p:spPr>
-        <p:style>
-          <a:lnRef idx="1">
-            <a:schemeClr val="accent1"/>
-          </a:lnRef>
-          <a:fillRef idx="3">
-            <a:schemeClr val="accent1"/>
-          </a:fillRef>
-          <a:effectRef idx="2">
-            <a:schemeClr val="accent1"/>
-          </a:effectRef>
-          <a:fontRef idx="minor">
-            <a:schemeClr val="lt1"/>
-          </a:fontRef>
-        </p:style>
-        <p:txBody>
-          <a:bodyPr rtlCol="0" anchor="ctr"/>
-          <a:lstStyle/>
-          <a:p>
-            <a:pPr algn="ctr"/>
-          </a:p>
-        </p:txBody>
-      </p:sp>
-      <p:sp>
-        <p:nvSpPr>
-          <p:cNvPr id="85" name="TextBox 84"/>
-          <p:cNvSpPr txBox="1"/>
-          <p:nvPr/>
-        </p:nvSpPr>
-        <p:spPr>
-          <a:xfrm>
-            <a:off x="694944" y="5980176"/>
-            <a:ext cx="3200399" cy="256032"/>
-          </a:xfrm>
-          <a:prstGeom prst="rect">
-            <a:avLst/>
-          </a:prstGeom>
-          <a:noFill/>
-        </p:spPr>
-        <p:txBody>
-          <a:bodyPr wrap="square">
-            <a:spAutoFit/>
-          </a:bodyPr>
-          <a:lstStyle/>
-          <a:p>
-            <a:pPr algn="l"/>
-            <a:r>
-              <a:rPr sz="750" b="0" i="1">
+          <a:effectLst/>
+        </p:spPr>
+        <p:style>
+          <a:lnRef idx="1">
+            <a:schemeClr val="accent1"/>
+          </a:lnRef>
+          <a:fillRef idx="3">
+            <a:schemeClr val="accent1"/>
+          </a:fillRef>
+          <a:effectRef idx="2">
+            <a:schemeClr val="accent1"/>
+          </a:effectRef>
+          <a:fontRef idx="minor">
+            <a:schemeClr val="lt1"/>
+          </a:fontRef>
+        </p:style>
+        <p:txBody>
+          <a:bodyPr rtlCol="0" anchor="ctr" wrap="none" lIns="38100" rIns="38100" tIns="0" bIns="0"/>
+          <a:lstStyle/>
+          <a:p>
+            <a:pPr algn="ctr"/>
+            <a:r>
+              <a:rPr sz="750" b="1">
+                <a:solidFill>
+                  <a:srgbClr val="FFFFFF"/>
+                </a:solidFill>
+                <a:latin typeface="Calibri"/>
+              </a:rPr>
+              <a:t>3 steps</a:t>
+            </a:r>
+          </a:p>
+        </p:txBody>
+      </p:sp>
+      <p:sp>
+        <p:nvSpPr>
+          <p:cNvPr id="146" name="TextBox 145"/>
+          <p:cNvSpPr txBox="1"/>
+          <p:nvPr/>
+        </p:nvSpPr>
+        <p:spPr>
+          <a:xfrm>
+            <a:off x="9765792" y="3346704"/>
+            <a:ext cx="1892808" cy="310896"/>
+          </a:xfrm>
+          <a:prstGeom prst="rect">
+            <a:avLst/>
+          </a:prstGeom>
+          <a:noFill/>
+        </p:spPr>
+        <p:txBody>
+          <a:bodyPr wrap="square" anchor="t" lIns="12700" rIns="12700" tIns="0" bIns="0">
+            <a:spAutoFit/>
+          </a:bodyPr>
+          <a:lstStyle/>
+          <a:p>
+            <a:r>
+              <a:rPr sz="750" b="0">
                 <a:solidFill>
                   <a:srgbClr val="78716C"/>
                 </a:solidFill>
                 <a:latin typeface="Calibri"/>
               </a:rPr>
-              <a:t>Self-serve · No branch · No call · No paper</a:t>
-            </a:r>
-          </a:p>
-        </p:txBody>
-      </p:sp>
-      <p:sp>
-        <p:nvSpPr>
-          <p:cNvPr id="86" name="Rectangle 85"/>
-          <p:cNvSpPr/>
-          <p:nvPr/>
-        </p:nvSpPr>
-        <p:spPr>
-          <a:xfrm>
-            <a:off x="4315967" y="5230368"/>
-            <a:ext cx="3712463" cy="1261872"/>
+              <a:t>CCA 1974 · cooling-off</a:t>
+            </a:r>
+          </a:p>
+        </p:txBody>
+      </p:sp>
+      <p:sp>
+        <p:nvSpPr>
+          <p:cNvPr id="147" name="Rectangle 146"/>
+          <p:cNvSpPr/>
+          <p:nvPr/>
+        </p:nvSpPr>
+        <p:spPr>
+          <a:xfrm>
+            <a:off x="438912" y="3840480"/>
+            <a:ext cx="2148840" cy="1261872"/>
           </a:xfrm>
           <a:prstGeom prst="rect">
             <a:avLst/>
           </a:prstGeom>
           <a:solidFill>
             <a:srgbClr val="FFFFFF"/>
-          </a:solidFill>
-          <a:ln w="9525">
-            <a:solidFill>
-              <a:srgbClr val="D6D3D1"/>
-            </a:solidFill>
-          </a:ln>
-        </p:spPr>
-        <p:style>
-          <a:lnRef idx="1">
-            <a:schemeClr val="accent1"/>
-          </a:lnRef>
-          <a:fillRef idx="3">
-            <a:schemeClr val="accent1"/>
-          </a:fillRef>
-          <a:effectRef idx="2">
-            <a:schemeClr val="accent1"/>
-          </a:effectRef>
-          <a:fontRef idx="minor">
-            <a:schemeClr val="lt1"/>
-          </a:fontRef>
-        </p:style>
-        <p:txBody>
-          <a:bodyPr rtlCol="0" anchor="ctr"/>
-          <a:lstStyle/>
-          <a:p>
-            <a:pPr algn="ctr"/>
-          </a:p>
-        </p:txBody>
-      </p:sp>
-      <p:sp>
-        <p:nvSpPr>
-          <p:cNvPr id="87" name="Rectangle 86"/>
-          <p:cNvSpPr/>
-          <p:nvPr/>
-        </p:nvSpPr>
-        <p:spPr>
-          <a:xfrm>
-            <a:off x="4315967" y="5230368"/>
-            <a:ext cx="3712463" cy="50292"/>
-          </a:xfrm>
-          <a:prstGeom prst="rect">
-            <a:avLst/>
-          </a:prstGeom>
-          <a:solidFill>
-            <a:srgbClr val="DA291C"/>
           </a:solidFill>
           <a:ln>
             <a:noFill/>
           </a:ln>
-        </p:spPr>
-        <p:style>
-          <a:lnRef idx="1">
-            <a:schemeClr val="accent1"/>
-          </a:lnRef>
-          <a:fillRef idx="3">
-            <a:schemeClr val="accent1"/>
-          </a:fillRef>
-          <a:effectRef idx="2">
-            <a:schemeClr val="accent1"/>
-          </a:effectRef>
-          <a:fontRef idx="minor">
-            <a:schemeClr val="lt1"/>
-          </a:fontRef>
-        </p:style>
-        <p:txBody>
-          <a:bodyPr rtlCol="0" anchor="ctr"/>
-          <a:lstStyle/>
-          <a:p>
-            <a:pPr algn="ctr"/>
-          </a:p>
-        </p:txBody>
-      </p:sp>
-      <p:sp>
-        <p:nvSpPr>
-          <p:cNvPr id="88" name="TextBox 87"/>
-          <p:cNvSpPr txBox="1"/>
-          <p:nvPr/>
-        </p:nvSpPr>
-        <p:spPr>
-          <a:xfrm>
-            <a:off x="4480559" y="5321808"/>
-            <a:ext cx="3438144" cy="274320"/>
-          </a:xfrm>
-          <a:prstGeom prst="rect">
-            <a:avLst/>
-          </a:prstGeom>
-          <a:noFill/>
-        </p:spPr>
-        <p:txBody>
-          <a:bodyPr wrap="square">
-            <a:spAutoFit/>
-          </a:bodyPr>
-          <a:lstStyle/>
-          <a:p>
-            <a:pPr algn="l"/>
-            <a:r>
-              <a:rPr sz="1000" b="1" i="0">
-                <a:solidFill>
-                  <a:srgbClr val="1C1917"/>
-                </a:solidFill>
-                <a:latin typeface="Calibri"/>
-              </a:rPr>
-              <a:t>International FX Payment</a:t>
-            </a:r>
-          </a:p>
-        </p:txBody>
-      </p:sp>
-      <p:sp>
-        <p:nvSpPr>
-          <p:cNvPr id="89" name="Rectangle 88"/>
-          <p:cNvSpPr/>
-          <p:nvPr/>
-        </p:nvSpPr>
-        <p:spPr>
-          <a:xfrm>
-            <a:off x="4480559" y="5632704"/>
-            <a:ext cx="621792" cy="237744"/>
+          <a:effectLst/>
+        </p:spPr>
+        <p:style>
+          <a:lnRef idx="1">
+            <a:schemeClr val="accent1"/>
+          </a:lnRef>
+          <a:fillRef idx="3">
+            <a:schemeClr val="accent1"/>
+          </a:fillRef>
+          <a:effectRef idx="2">
+            <a:schemeClr val="accent1"/>
+          </a:effectRef>
+          <a:fontRef idx="minor">
+            <a:schemeClr val="lt1"/>
+          </a:fontRef>
+        </p:style>
+        <p:txBody>
+          <a:bodyPr rtlCol="0" anchor="ctr"/>
+          <a:lstStyle/>
+          <a:p>
+            <a:pPr algn="ctr"/>
+          </a:p>
+        </p:txBody>
+      </p:sp>
+      <p:sp>
+        <p:nvSpPr>
+          <p:cNvPr id="148" name="Rectangle 147"/>
+          <p:cNvSpPr/>
+          <p:nvPr/>
+        </p:nvSpPr>
+        <p:spPr>
+          <a:xfrm>
+            <a:off x="438912" y="3840480"/>
+            <a:ext cx="2148840" cy="54864"/>
           </a:xfrm>
           <a:prstGeom prst="rect">
             <a:avLst/>
@@ -31362,278 +30338,1401 @@
           <a:ln>
             <a:noFill/>
           </a:ln>
-        </p:spPr>
-        <p:style>
-          <a:lnRef idx="1">
-            <a:schemeClr val="accent1"/>
-          </a:lnRef>
-          <a:fillRef idx="3">
-            <a:schemeClr val="accent1"/>
-          </a:fillRef>
-          <a:effectRef idx="2">
-            <a:schemeClr val="accent1"/>
-          </a:effectRef>
-          <a:fontRef idx="minor">
-            <a:schemeClr val="lt1"/>
-          </a:fontRef>
-        </p:style>
-        <p:txBody>
-          <a:bodyPr rtlCol="0" anchor="ctr"/>
-          <a:lstStyle/>
-          <a:p>
-            <a:pPr algn="ctr"/>
-          </a:p>
-        </p:txBody>
-      </p:sp>
-      <p:sp>
-        <p:nvSpPr>
-          <p:cNvPr id="90" name="TextBox 89"/>
-          <p:cNvSpPr txBox="1"/>
-          <p:nvPr/>
-        </p:nvSpPr>
-        <p:spPr>
-          <a:xfrm>
-            <a:off x="4553711" y="5650992"/>
-            <a:ext cx="530352" cy="201168"/>
-          </a:xfrm>
-          <a:prstGeom prst="rect">
-            <a:avLst/>
-          </a:prstGeom>
-          <a:noFill/>
-        </p:spPr>
-        <p:txBody>
-          <a:bodyPr wrap="square">
-            <a:spAutoFit/>
-          </a:bodyPr>
-          <a:lstStyle/>
-          <a:p>
-            <a:pPr algn="l"/>
-            <a:r>
-              <a:rPr sz="800" b="1" i="0">
-                <a:solidFill>
-                  <a:srgbClr val="FFFFFF"/>
-                </a:solidFill>
-                <a:latin typeface="Calibri"/>
-              </a:rPr>
-              <a:t>3 steps</a:t>
-            </a:r>
-          </a:p>
-        </p:txBody>
-      </p:sp>
-      <p:sp>
-        <p:nvSpPr>
-          <p:cNvPr id="91" name="TextBox 90"/>
-          <p:cNvSpPr txBox="1"/>
-          <p:nvPr/>
-        </p:nvSpPr>
-        <p:spPr>
-          <a:xfrm>
-            <a:off x="5193791" y="5650992"/>
-            <a:ext cx="2706623" cy="201168"/>
-          </a:xfrm>
-          <a:prstGeom prst="rect">
-            <a:avLst/>
-          </a:prstGeom>
-          <a:noFill/>
-        </p:spPr>
-        <p:txBody>
-          <a:bodyPr wrap="square">
-            <a:spAutoFit/>
-          </a:bodyPr>
-          <a:lstStyle/>
-          <a:p>
-            <a:pPr algn="l"/>
-            <a:r>
-              <a:rPr sz="800" b="0" i="1">
-                <a:solidFill>
-                  <a:srgbClr val="78716C"/>
-                </a:solidFill>
-                <a:latin typeface="Calibri"/>
-              </a:rPr>
-              <a:t>MLR 2017 screening · SWIFT ref</a:t>
-            </a:r>
-          </a:p>
-        </p:txBody>
-      </p:sp>
-      <p:sp>
-        <p:nvSpPr>
-          <p:cNvPr id="92" name="Rectangle 91"/>
-          <p:cNvSpPr/>
-          <p:nvPr/>
-        </p:nvSpPr>
-        <p:spPr>
-          <a:xfrm>
-            <a:off x="4480559" y="5925312"/>
-            <a:ext cx="3383279" cy="365760"/>
-          </a:xfrm>
-          <a:prstGeom prst="rect">
-            <a:avLst/>
-          </a:prstGeom>
-          <a:solidFill>
-            <a:srgbClr val="F5F5F4"/>
+          <a:effectLst/>
+        </p:spPr>
+        <p:style>
+          <a:lnRef idx="1">
+            <a:schemeClr val="accent1"/>
+          </a:lnRef>
+          <a:fillRef idx="3">
+            <a:schemeClr val="accent1"/>
+          </a:fillRef>
+          <a:effectRef idx="2">
+            <a:schemeClr val="accent1"/>
+          </a:effectRef>
+          <a:fontRef idx="minor">
+            <a:schemeClr val="lt1"/>
+          </a:fontRef>
+        </p:style>
+        <p:txBody>
+          <a:bodyPr rtlCol="0" anchor="ctr"/>
+          <a:lstStyle/>
+          <a:p>
+            <a:pPr algn="ctr"/>
+          </a:p>
+        </p:txBody>
+      </p:sp>
+      <p:sp>
+        <p:nvSpPr>
+          <p:cNvPr id="149" name="TextBox 148"/>
+          <p:cNvSpPr txBox="1"/>
+          <p:nvPr/>
+        </p:nvSpPr>
+        <p:spPr>
+          <a:xfrm>
+            <a:off x="585216" y="3968496"/>
+            <a:ext cx="1892808" cy="420624"/>
+          </a:xfrm>
+          <a:prstGeom prst="rect">
+            <a:avLst/>
+          </a:prstGeom>
+          <a:noFill/>
+        </p:spPr>
+        <p:txBody>
+          <a:bodyPr wrap="square" anchor="t" lIns="12700" rIns="12700" tIns="0" bIns="0">
+            <a:spAutoFit/>
+          </a:bodyPr>
+          <a:lstStyle/>
+          <a:p>
+            <a:r>
+              <a:rPr sz="1000" b="1">
+                <a:solidFill>
+                  <a:srgbClr val="1C1917"/>
+                </a:solidFill>
+                <a:latin typeface="Calibri"/>
+              </a:rPr>
+              <a:t>International FX Payment</a:t>
+            </a:r>
+          </a:p>
+        </p:txBody>
+      </p:sp>
+      <p:sp>
+        <p:nvSpPr>
+          <p:cNvPr id="150" name="Rectangle 149"/>
+          <p:cNvSpPr/>
+          <p:nvPr/>
+        </p:nvSpPr>
+        <p:spPr>
+          <a:xfrm>
+            <a:off x="585216" y="4443984"/>
+            <a:ext cx="713232" cy="219456"/>
+          </a:xfrm>
+          <a:prstGeom prst="rect">
+            <a:avLst/>
+          </a:prstGeom>
+          <a:solidFill>
+            <a:srgbClr val="DA291C"/>
           </a:solidFill>
           <a:ln>
             <a:noFill/>
           </a:ln>
-        </p:spPr>
-        <p:style>
-          <a:lnRef idx="1">
-            <a:schemeClr val="accent1"/>
-          </a:lnRef>
-          <a:fillRef idx="3">
-            <a:schemeClr val="accent1"/>
-          </a:fillRef>
-          <a:effectRef idx="2">
-            <a:schemeClr val="accent1"/>
-          </a:effectRef>
-          <a:fontRef idx="minor">
-            <a:schemeClr val="lt1"/>
-          </a:fontRef>
-        </p:style>
-        <p:txBody>
-          <a:bodyPr rtlCol="0" anchor="ctr"/>
-          <a:lstStyle/>
-          <a:p>
-            <a:pPr algn="ctr"/>
-          </a:p>
-        </p:txBody>
-      </p:sp>
-      <p:sp>
-        <p:nvSpPr>
-          <p:cNvPr id="93" name="TextBox 92"/>
-          <p:cNvSpPr txBox="1"/>
-          <p:nvPr/>
-        </p:nvSpPr>
-        <p:spPr>
-          <a:xfrm>
-            <a:off x="4571999" y="5980176"/>
-            <a:ext cx="3200399" cy="256032"/>
-          </a:xfrm>
-          <a:prstGeom prst="rect">
-            <a:avLst/>
-          </a:prstGeom>
-          <a:noFill/>
-        </p:spPr>
-        <p:txBody>
-          <a:bodyPr wrap="square">
-            <a:spAutoFit/>
-          </a:bodyPr>
-          <a:lstStyle/>
-          <a:p>
-            <a:pPr algn="l"/>
-            <a:r>
-              <a:rPr sz="750" b="0" i="1">
+          <a:effectLst/>
+        </p:spPr>
+        <p:style>
+          <a:lnRef idx="1">
+            <a:schemeClr val="accent1"/>
+          </a:lnRef>
+          <a:fillRef idx="3">
+            <a:schemeClr val="accent1"/>
+          </a:fillRef>
+          <a:effectRef idx="2">
+            <a:schemeClr val="accent1"/>
+          </a:effectRef>
+          <a:fontRef idx="minor">
+            <a:schemeClr val="lt1"/>
+          </a:fontRef>
+        </p:style>
+        <p:txBody>
+          <a:bodyPr rtlCol="0" anchor="ctr" wrap="none" lIns="38100" rIns="38100" tIns="0" bIns="0"/>
+          <a:lstStyle/>
+          <a:p>
+            <a:pPr algn="ctr"/>
+            <a:r>
+              <a:rPr sz="750" b="1">
+                <a:solidFill>
+                  <a:srgbClr val="FFFFFF"/>
+                </a:solidFill>
+                <a:latin typeface="Calibri"/>
+              </a:rPr>
+              <a:t>3 steps</a:t>
+            </a:r>
+          </a:p>
+        </p:txBody>
+      </p:sp>
+      <p:sp>
+        <p:nvSpPr>
+          <p:cNvPr id="151" name="TextBox 150"/>
+          <p:cNvSpPr txBox="1"/>
+          <p:nvPr/>
+        </p:nvSpPr>
+        <p:spPr>
+          <a:xfrm>
+            <a:off x="585216" y="4736592"/>
+            <a:ext cx="1892808" cy="310896"/>
+          </a:xfrm>
+          <a:prstGeom prst="rect">
+            <a:avLst/>
+          </a:prstGeom>
+          <a:noFill/>
+        </p:spPr>
+        <p:txBody>
+          <a:bodyPr wrap="square" anchor="t" lIns="12700" rIns="12700" tIns="0" bIns="0">
+            <a:spAutoFit/>
+          </a:bodyPr>
+          <a:lstStyle/>
+          <a:p>
+            <a:r>
+              <a:rPr sz="750" b="0">
                 <a:solidFill>
                   <a:srgbClr val="78716C"/>
                 </a:solidFill>
                 <a:latin typeface="Calibri"/>
               </a:rPr>
-              <a:t>Self-serve · No branch · No call · No paper</a:t>
-            </a:r>
-          </a:p>
-        </p:txBody>
-      </p:sp>
-      <p:sp>
-        <p:nvSpPr>
-          <p:cNvPr id="94" name="TextBox 93"/>
-          <p:cNvSpPr txBox="1"/>
-          <p:nvPr/>
-        </p:nvSpPr>
-        <p:spPr>
-          <a:xfrm>
-            <a:off x="411480" y="6620256"/>
-            <a:ext cx="3657600" cy="201168"/>
-          </a:xfrm>
-          <a:prstGeom prst="rect">
-            <a:avLst/>
-          </a:prstGeom>
-          <a:noFill/>
-        </p:spPr>
-        <p:txBody>
-          <a:bodyPr wrap="square">
-            <a:spAutoFit/>
-          </a:bodyPr>
-          <a:lstStyle/>
-          <a:p>
-            <a:pPr algn="l"/>
-            <a:r>
-              <a:rPr sz="750" b="1" i="0">
-                <a:solidFill>
-                  <a:srgbClr val="DA291C"/>
-                </a:solidFill>
-                <a:latin typeface="Calibri"/>
-              </a:rPr>
-              <a:t>INTERNAL · CONFIDENTIAL</a:t>
-            </a:r>
-          </a:p>
-        </p:txBody>
-      </p:sp>
-      <p:sp>
-        <p:nvSpPr>
-          <p:cNvPr id="95" name="TextBox 94"/>
-          <p:cNvSpPr txBox="1"/>
-          <p:nvPr/>
-        </p:nvSpPr>
-        <p:spPr>
-          <a:xfrm>
-            <a:off x="3657600" y="6620256"/>
-            <a:ext cx="8119872" cy="201168"/>
-          </a:xfrm>
-          <a:prstGeom prst="rect">
-            <a:avLst/>
-          </a:prstGeom>
-          <a:noFill/>
-        </p:spPr>
-        <p:txBody>
-          <a:bodyPr wrap="square">
-            <a:spAutoFit/>
-          </a:bodyPr>
-          <a:lstStyle/>
-          <a:p>
-            <a:pPr algn="r"/>
-            <a:r>
-              <a:rPr sz="750" b="0" i="1">
+              <a:t>MLR 2017 screening · SWIFT</a:t>
+            </a:r>
+          </a:p>
+        </p:txBody>
+      </p:sp>
+      <p:sp>
+        <p:nvSpPr>
+          <p:cNvPr id="152" name="Rectangle 151"/>
+          <p:cNvSpPr/>
+          <p:nvPr/>
+        </p:nvSpPr>
+        <p:spPr>
+          <a:xfrm>
+            <a:off x="2734056" y="3840480"/>
+            <a:ext cx="2148840" cy="1261872"/>
+          </a:xfrm>
+          <a:prstGeom prst="rect">
+            <a:avLst/>
+          </a:prstGeom>
+          <a:solidFill>
+            <a:srgbClr val="FFFFFF"/>
+          </a:solidFill>
+          <a:ln>
+            <a:noFill/>
+          </a:ln>
+          <a:effectLst/>
+        </p:spPr>
+        <p:style>
+          <a:lnRef idx="1">
+            <a:schemeClr val="accent1"/>
+          </a:lnRef>
+          <a:fillRef idx="3">
+            <a:schemeClr val="accent1"/>
+          </a:fillRef>
+          <a:effectRef idx="2">
+            <a:schemeClr val="accent1"/>
+          </a:effectRef>
+          <a:fontRef idx="minor">
+            <a:schemeClr val="lt1"/>
+          </a:fontRef>
+        </p:style>
+        <p:txBody>
+          <a:bodyPr rtlCol="0" anchor="ctr"/>
+          <a:lstStyle/>
+          <a:p>
+            <a:pPr algn="ctr"/>
+          </a:p>
+        </p:txBody>
+      </p:sp>
+      <p:sp>
+        <p:nvSpPr>
+          <p:cNvPr id="153" name="Rectangle 152"/>
+          <p:cNvSpPr/>
+          <p:nvPr/>
+        </p:nvSpPr>
+        <p:spPr>
+          <a:xfrm>
+            <a:off x="2734056" y="3840480"/>
+            <a:ext cx="2148840" cy="54864"/>
+          </a:xfrm>
+          <a:prstGeom prst="rect">
+            <a:avLst/>
+          </a:prstGeom>
+          <a:solidFill>
+            <a:srgbClr val="DA291C"/>
+          </a:solidFill>
+          <a:ln>
+            <a:noFill/>
+          </a:ln>
+          <a:effectLst/>
+        </p:spPr>
+        <p:style>
+          <a:lnRef idx="1">
+            <a:schemeClr val="accent1"/>
+          </a:lnRef>
+          <a:fillRef idx="3">
+            <a:schemeClr val="accent1"/>
+          </a:fillRef>
+          <a:effectRef idx="2">
+            <a:schemeClr val="accent1"/>
+          </a:effectRef>
+          <a:fontRef idx="minor">
+            <a:schemeClr val="lt1"/>
+          </a:fontRef>
+        </p:style>
+        <p:txBody>
+          <a:bodyPr rtlCol="0" anchor="ctr"/>
+          <a:lstStyle/>
+          <a:p>
+            <a:pPr algn="ctr"/>
+          </a:p>
+        </p:txBody>
+      </p:sp>
+      <p:sp>
+        <p:nvSpPr>
+          <p:cNvPr id="154" name="TextBox 153"/>
+          <p:cNvSpPr txBox="1"/>
+          <p:nvPr/>
+        </p:nvSpPr>
+        <p:spPr>
+          <a:xfrm>
+            <a:off x="2880360" y="3968496"/>
+            <a:ext cx="1892808" cy="420624"/>
+          </a:xfrm>
+          <a:prstGeom prst="rect">
+            <a:avLst/>
+          </a:prstGeom>
+          <a:noFill/>
+        </p:spPr>
+        <p:txBody>
+          <a:bodyPr wrap="square" anchor="t" lIns="12700" rIns="12700" tIns="0" bIns="0">
+            <a:spAutoFit/>
+          </a:bodyPr>
+          <a:lstStyle/>
+          <a:p>
+            <a:r>
+              <a:rPr sz="1000" b="1">
+                <a:solidFill>
+                  <a:srgbClr val="1C1917"/>
+                </a:solidFill>
+                <a:latin typeface="Calibri"/>
+              </a:rPr>
+              <a:t>Complaint Handling</a:t>
+            </a:r>
+          </a:p>
+        </p:txBody>
+      </p:sp>
+      <p:sp>
+        <p:nvSpPr>
+          <p:cNvPr id="155" name="Rectangle 154"/>
+          <p:cNvSpPr/>
+          <p:nvPr/>
+        </p:nvSpPr>
+        <p:spPr>
+          <a:xfrm>
+            <a:off x="2880360" y="4443984"/>
+            <a:ext cx="713232" cy="219456"/>
+          </a:xfrm>
+          <a:prstGeom prst="rect">
+            <a:avLst/>
+          </a:prstGeom>
+          <a:solidFill>
+            <a:srgbClr val="DA291C"/>
+          </a:solidFill>
+          <a:ln>
+            <a:noFill/>
+          </a:ln>
+          <a:effectLst/>
+        </p:spPr>
+        <p:style>
+          <a:lnRef idx="1">
+            <a:schemeClr val="accent1"/>
+          </a:lnRef>
+          <a:fillRef idx="3">
+            <a:schemeClr val="accent1"/>
+          </a:fillRef>
+          <a:effectRef idx="2">
+            <a:schemeClr val="accent1"/>
+          </a:effectRef>
+          <a:fontRef idx="minor">
+            <a:schemeClr val="lt1"/>
+          </a:fontRef>
+        </p:style>
+        <p:txBody>
+          <a:bodyPr rtlCol="0" anchor="ctr" wrap="none" lIns="38100" rIns="38100" tIns="0" bIns="0"/>
+          <a:lstStyle/>
+          <a:p>
+            <a:pPr algn="ctr"/>
+            <a:r>
+              <a:rPr sz="750" b="1">
+                <a:solidFill>
+                  <a:srgbClr val="FFFFFF"/>
+                </a:solidFill>
+                <a:latin typeface="Calibri"/>
+              </a:rPr>
+              <a:t>4 steps</a:t>
+            </a:r>
+          </a:p>
+        </p:txBody>
+      </p:sp>
+      <p:sp>
+        <p:nvSpPr>
+          <p:cNvPr id="156" name="TextBox 155"/>
+          <p:cNvSpPr txBox="1"/>
+          <p:nvPr/>
+        </p:nvSpPr>
+        <p:spPr>
+          <a:xfrm>
+            <a:off x="2880360" y="4736592"/>
+            <a:ext cx="1892808" cy="310896"/>
+          </a:xfrm>
+          <a:prstGeom prst="rect">
+            <a:avLst/>
+          </a:prstGeom>
+          <a:noFill/>
+        </p:spPr>
+        <p:txBody>
+          <a:bodyPr wrap="square" anchor="t" lIns="12700" rIns="12700" tIns="0" bIns="0">
+            <a:spAutoFit/>
+          </a:bodyPr>
+          <a:lstStyle/>
+          <a:p>
+            <a:r>
+              <a:rPr sz="750" b="0">
                 <a:solidFill>
                   <a:srgbClr val="78716C"/>
                 </a:solidFill>
                 <a:latin typeface="Calibri"/>
               </a:rPr>
-              <a:t>Alan Davidson  ·  Business Banking Advisor  ·  Self-initiated  ·  Own time  ·  June 2026</a:t>
-            </a:r>
-          </a:p>
-        </p:txBody>
-      </p:sp>
-      <p:sp>
-        <p:nvSpPr>
-          <p:cNvPr id="96" name="TextBox 95"/>
-          <p:cNvSpPr txBox="1"/>
-          <p:nvPr/>
-        </p:nvSpPr>
-        <p:spPr>
-          <a:xfrm>
-            <a:off x="11722608" y="6565392"/>
-            <a:ext cx="347472" cy="219456"/>
-          </a:xfrm>
-          <a:prstGeom prst="rect">
-            <a:avLst/>
-          </a:prstGeom>
-          <a:noFill/>
-        </p:spPr>
-        <p:txBody>
-          <a:bodyPr wrap="square">
-            <a:spAutoFit/>
-          </a:bodyPr>
-          <a:lstStyle/>
-          <a:p>
-            <a:pPr algn="r"/>
-            <a:r>
-              <a:rPr sz="850" b="0" i="0">
+              <a:t>FCA DISP · FOS route</a:t>
+            </a:r>
+          </a:p>
+        </p:txBody>
+      </p:sp>
+      <p:sp>
+        <p:nvSpPr>
+          <p:cNvPr id="157" name="Rectangle 156"/>
+          <p:cNvSpPr/>
+          <p:nvPr/>
+        </p:nvSpPr>
+        <p:spPr>
+          <a:xfrm>
+            <a:off x="5029200" y="3840480"/>
+            <a:ext cx="2148840" cy="1261872"/>
+          </a:xfrm>
+          <a:prstGeom prst="rect">
+            <a:avLst/>
+          </a:prstGeom>
+          <a:solidFill>
+            <a:srgbClr val="FFFFFF"/>
+          </a:solidFill>
+          <a:ln>
+            <a:noFill/>
+          </a:ln>
+          <a:effectLst/>
+        </p:spPr>
+        <p:style>
+          <a:lnRef idx="1">
+            <a:schemeClr val="accent1"/>
+          </a:lnRef>
+          <a:fillRef idx="3">
+            <a:schemeClr val="accent1"/>
+          </a:fillRef>
+          <a:effectRef idx="2">
+            <a:schemeClr val="accent1"/>
+          </a:effectRef>
+          <a:fontRef idx="minor">
+            <a:schemeClr val="lt1"/>
+          </a:fontRef>
+        </p:style>
+        <p:txBody>
+          <a:bodyPr rtlCol="0" anchor="ctr"/>
+          <a:lstStyle/>
+          <a:p>
+            <a:pPr algn="ctr"/>
+          </a:p>
+        </p:txBody>
+      </p:sp>
+      <p:sp>
+        <p:nvSpPr>
+          <p:cNvPr id="158" name="Rectangle 157"/>
+          <p:cNvSpPr/>
+          <p:nvPr/>
+        </p:nvSpPr>
+        <p:spPr>
+          <a:xfrm>
+            <a:off x="5029200" y="3840480"/>
+            <a:ext cx="2148840" cy="54864"/>
+          </a:xfrm>
+          <a:prstGeom prst="rect">
+            <a:avLst/>
+          </a:prstGeom>
+          <a:solidFill>
+            <a:srgbClr val="DA291C"/>
+          </a:solidFill>
+          <a:ln>
+            <a:noFill/>
+          </a:ln>
+          <a:effectLst/>
+        </p:spPr>
+        <p:style>
+          <a:lnRef idx="1">
+            <a:schemeClr val="accent1"/>
+          </a:lnRef>
+          <a:fillRef idx="3">
+            <a:schemeClr val="accent1"/>
+          </a:fillRef>
+          <a:effectRef idx="2">
+            <a:schemeClr val="accent1"/>
+          </a:effectRef>
+          <a:fontRef idx="minor">
+            <a:schemeClr val="lt1"/>
+          </a:fontRef>
+        </p:style>
+        <p:txBody>
+          <a:bodyPr rtlCol="0" anchor="ctr"/>
+          <a:lstStyle/>
+          <a:p>
+            <a:pPr algn="ctr"/>
+          </a:p>
+        </p:txBody>
+      </p:sp>
+      <p:sp>
+        <p:nvSpPr>
+          <p:cNvPr id="159" name="TextBox 158"/>
+          <p:cNvSpPr txBox="1"/>
+          <p:nvPr/>
+        </p:nvSpPr>
+        <p:spPr>
+          <a:xfrm>
+            <a:off x="5175504" y="3968496"/>
+            <a:ext cx="1892808" cy="420624"/>
+          </a:xfrm>
+          <a:prstGeom prst="rect">
+            <a:avLst/>
+          </a:prstGeom>
+          <a:noFill/>
+        </p:spPr>
+        <p:txBody>
+          <a:bodyPr wrap="square" anchor="t" lIns="12700" rIns="12700" tIns="0" bIns="0">
+            <a:spAutoFit/>
+          </a:bodyPr>
+          <a:lstStyle/>
+          <a:p>
+            <a:r>
+              <a:rPr sz="1000" b="1">
+                <a:solidFill>
+                  <a:srgbClr val="1C1917"/>
+                </a:solidFill>
+                <a:latin typeface="Calibri"/>
+              </a:rPr>
+              <a:t>Standing Orders &amp; DDs</a:t>
+            </a:r>
+          </a:p>
+        </p:txBody>
+      </p:sp>
+      <p:sp>
+        <p:nvSpPr>
+          <p:cNvPr id="160" name="Rectangle 159"/>
+          <p:cNvSpPr/>
+          <p:nvPr/>
+        </p:nvSpPr>
+        <p:spPr>
+          <a:xfrm>
+            <a:off x="5175504" y="4443984"/>
+            <a:ext cx="713232" cy="219456"/>
+          </a:xfrm>
+          <a:prstGeom prst="rect">
+            <a:avLst/>
+          </a:prstGeom>
+          <a:solidFill>
+            <a:srgbClr val="DA291C"/>
+          </a:solidFill>
+          <a:ln>
+            <a:noFill/>
+          </a:ln>
+          <a:effectLst/>
+        </p:spPr>
+        <p:style>
+          <a:lnRef idx="1">
+            <a:schemeClr val="accent1"/>
+          </a:lnRef>
+          <a:fillRef idx="3">
+            <a:schemeClr val="accent1"/>
+          </a:fillRef>
+          <a:effectRef idx="2">
+            <a:schemeClr val="accent1"/>
+          </a:effectRef>
+          <a:fontRef idx="minor">
+            <a:schemeClr val="lt1"/>
+          </a:fontRef>
+        </p:style>
+        <p:txBody>
+          <a:bodyPr rtlCol="0" anchor="ctr" wrap="none" lIns="38100" rIns="38100" tIns="0" bIns="0"/>
+          <a:lstStyle/>
+          <a:p>
+            <a:pPr algn="ctr"/>
+            <a:r>
+              <a:rPr sz="750" b="1">
+                <a:solidFill>
+                  <a:srgbClr val="FFFFFF"/>
+                </a:solidFill>
+                <a:latin typeface="Calibri"/>
+              </a:rPr>
+              <a:t>up to 3 steps</a:t>
+            </a:r>
+          </a:p>
+        </p:txBody>
+      </p:sp>
+      <p:sp>
+        <p:nvSpPr>
+          <p:cNvPr id="161" name="TextBox 160"/>
+          <p:cNvSpPr txBox="1"/>
+          <p:nvPr/>
+        </p:nvSpPr>
+        <p:spPr>
+          <a:xfrm>
+            <a:off x="5175504" y="4736592"/>
+            <a:ext cx="1892808" cy="310896"/>
+          </a:xfrm>
+          <a:prstGeom prst="rect">
+            <a:avLst/>
+          </a:prstGeom>
+          <a:noFill/>
+        </p:spPr>
+        <p:txBody>
+          <a:bodyPr wrap="square" anchor="t" lIns="12700" rIns="12700" tIns="0" bIns="0">
+            <a:spAutoFit/>
+          </a:bodyPr>
+          <a:lstStyle/>
+          <a:p>
+            <a:r>
+              <a:rPr sz="750" b="0">
                 <a:solidFill>
                   <a:srgbClr val="78716C"/>
                 </a:solidFill>
                 <a:latin typeface="Calibri"/>
               </a:rPr>
-              <a:t>8</a:t>
+              <a:t>Direct Debit Guarantee</a:t>
+            </a:r>
+          </a:p>
+        </p:txBody>
+      </p:sp>
+      <p:sp>
+        <p:nvSpPr>
+          <p:cNvPr id="162" name="Rectangle 161"/>
+          <p:cNvSpPr/>
+          <p:nvPr/>
+        </p:nvSpPr>
+        <p:spPr>
+          <a:xfrm>
+            <a:off x="7324344" y="3840480"/>
+            <a:ext cx="2148840" cy="1261872"/>
+          </a:xfrm>
+          <a:prstGeom prst="rect">
+            <a:avLst/>
+          </a:prstGeom>
+          <a:solidFill>
+            <a:srgbClr val="FFFFFF"/>
+          </a:solidFill>
+          <a:ln>
+            <a:noFill/>
+          </a:ln>
+          <a:effectLst/>
+        </p:spPr>
+        <p:style>
+          <a:lnRef idx="1">
+            <a:schemeClr val="accent1"/>
+          </a:lnRef>
+          <a:fillRef idx="3">
+            <a:schemeClr val="accent1"/>
+          </a:fillRef>
+          <a:effectRef idx="2">
+            <a:schemeClr val="accent1"/>
+          </a:effectRef>
+          <a:fontRef idx="minor">
+            <a:schemeClr val="lt1"/>
+          </a:fontRef>
+        </p:style>
+        <p:txBody>
+          <a:bodyPr rtlCol="0" anchor="ctr"/>
+          <a:lstStyle/>
+          <a:p>
+            <a:pPr algn="ctr"/>
+          </a:p>
+        </p:txBody>
+      </p:sp>
+      <p:sp>
+        <p:nvSpPr>
+          <p:cNvPr id="163" name="Rectangle 162"/>
+          <p:cNvSpPr/>
+          <p:nvPr/>
+        </p:nvSpPr>
+        <p:spPr>
+          <a:xfrm>
+            <a:off x="7324344" y="3840480"/>
+            <a:ext cx="2148840" cy="54864"/>
+          </a:xfrm>
+          <a:prstGeom prst="rect">
+            <a:avLst/>
+          </a:prstGeom>
+          <a:solidFill>
+            <a:srgbClr val="DA291C"/>
+          </a:solidFill>
+          <a:ln>
+            <a:noFill/>
+          </a:ln>
+          <a:effectLst/>
+        </p:spPr>
+        <p:style>
+          <a:lnRef idx="1">
+            <a:schemeClr val="accent1"/>
+          </a:lnRef>
+          <a:fillRef idx="3">
+            <a:schemeClr val="accent1"/>
+          </a:fillRef>
+          <a:effectRef idx="2">
+            <a:schemeClr val="accent1"/>
+          </a:effectRef>
+          <a:fontRef idx="minor">
+            <a:schemeClr val="lt1"/>
+          </a:fontRef>
+        </p:style>
+        <p:txBody>
+          <a:bodyPr rtlCol="0" anchor="ctr"/>
+          <a:lstStyle/>
+          <a:p>
+            <a:pPr algn="ctr"/>
+          </a:p>
+        </p:txBody>
+      </p:sp>
+      <p:sp>
+        <p:nvSpPr>
+          <p:cNvPr id="164" name="TextBox 163"/>
+          <p:cNvSpPr txBox="1"/>
+          <p:nvPr/>
+        </p:nvSpPr>
+        <p:spPr>
+          <a:xfrm>
+            <a:off x="7470648" y="3968496"/>
+            <a:ext cx="1892808" cy="420624"/>
+          </a:xfrm>
+          <a:prstGeom prst="rect">
+            <a:avLst/>
+          </a:prstGeom>
+          <a:noFill/>
+        </p:spPr>
+        <p:txBody>
+          <a:bodyPr wrap="square" anchor="t" lIns="12700" rIns="12700" tIns="0" bIns="0">
+            <a:spAutoFit/>
+          </a:bodyPr>
+          <a:lstStyle/>
+          <a:p>
+            <a:r>
+              <a:rPr sz="1000" b="1">
+                <a:solidFill>
+                  <a:srgbClr val="1C1917"/>
+                </a:solidFill>
+                <a:latin typeface="Calibri"/>
+              </a:rPr>
+              <a:t>Dispute a Payment</a:t>
+            </a:r>
+          </a:p>
+        </p:txBody>
+      </p:sp>
+      <p:sp>
+        <p:nvSpPr>
+          <p:cNvPr id="165" name="Rectangle 164"/>
+          <p:cNvSpPr/>
+          <p:nvPr/>
+        </p:nvSpPr>
+        <p:spPr>
+          <a:xfrm>
+            <a:off x="7470648" y="4443984"/>
+            <a:ext cx="713232" cy="219456"/>
+          </a:xfrm>
+          <a:prstGeom prst="rect">
+            <a:avLst/>
+          </a:prstGeom>
+          <a:solidFill>
+            <a:srgbClr val="DA291C"/>
+          </a:solidFill>
+          <a:ln>
+            <a:noFill/>
+          </a:ln>
+          <a:effectLst/>
+        </p:spPr>
+        <p:style>
+          <a:lnRef idx="1">
+            <a:schemeClr val="accent1"/>
+          </a:lnRef>
+          <a:fillRef idx="3">
+            <a:schemeClr val="accent1"/>
+          </a:fillRef>
+          <a:effectRef idx="2">
+            <a:schemeClr val="accent1"/>
+          </a:effectRef>
+          <a:fontRef idx="minor">
+            <a:schemeClr val="lt1"/>
+          </a:fontRef>
+        </p:style>
+        <p:txBody>
+          <a:bodyPr rtlCol="0" anchor="ctr" wrap="none" lIns="38100" rIns="38100" tIns="0" bIns="0"/>
+          <a:lstStyle/>
+          <a:p>
+            <a:pPr algn="ctr"/>
+            <a:r>
+              <a:rPr sz="750" b="1">
+                <a:solidFill>
+                  <a:srgbClr val="FFFFFF"/>
+                </a:solidFill>
+                <a:latin typeface="Calibri"/>
+              </a:rPr>
+              <a:t>4 steps</a:t>
+            </a:r>
+          </a:p>
+        </p:txBody>
+      </p:sp>
+      <p:sp>
+        <p:nvSpPr>
+          <p:cNvPr id="166" name="TextBox 165"/>
+          <p:cNvSpPr txBox="1"/>
+          <p:nvPr/>
+        </p:nvSpPr>
+        <p:spPr>
+          <a:xfrm>
+            <a:off x="7470648" y="4736592"/>
+            <a:ext cx="1892808" cy="310896"/>
+          </a:xfrm>
+          <a:prstGeom prst="rect">
+            <a:avLst/>
+          </a:prstGeom>
+          <a:noFill/>
+        </p:spPr>
+        <p:txBody>
+          <a:bodyPr wrap="square" anchor="t" lIns="12700" rIns="12700" tIns="0" bIns="0">
+            <a:spAutoFit/>
+          </a:bodyPr>
+          <a:lstStyle/>
+          <a:p>
+            <a:r>
+              <a:rPr sz="750" b="0">
+                <a:solidFill>
+                  <a:srgbClr val="78716C"/>
+                </a:solidFill>
+                <a:latin typeface="Calibri"/>
+              </a:rPr>
+              <a:t>Chargeback · fraud · DDG</a:t>
+            </a:r>
+          </a:p>
+        </p:txBody>
+      </p:sp>
+      <p:sp>
+        <p:nvSpPr>
+          <p:cNvPr id="167" name="Rectangle 166"/>
+          <p:cNvSpPr/>
+          <p:nvPr/>
+        </p:nvSpPr>
+        <p:spPr>
+          <a:xfrm>
+            <a:off x="9619488" y="3840480"/>
+            <a:ext cx="2148840" cy="1261872"/>
+          </a:xfrm>
+          <a:prstGeom prst="rect">
+            <a:avLst/>
+          </a:prstGeom>
+          <a:solidFill>
+            <a:srgbClr val="FFFFFF"/>
+          </a:solidFill>
+          <a:ln>
+            <a:noFill/>
+          </a:ln>
+          <a:effectLst/>
+        </p:spPr>
+        <p:style>
+          <a:lnRef idx="1">
+            <a:schemeClr val="accent1"/>
+          </a:lnRef>
+          <a:fillRef idx="3">
+            <a:schemeClr val="accent1"/>
+          </a:fillRef>
+          <a:effectRef idx="2">
+            <a:schemeClr val="accent1"/>
+          </a:effectRef>
+          <a:fontRef idx="minor">
+            <a:schemeClr val="lt1"/>
+          </a:fontRef>
+        </p:style>
+        <p:txBody>
+          <a:bodyPr rtlCol="0" anchor="ctr"/>
+          <a:lstStyle/>
+          <a:p>
+            <a:pPr algn="ctr"/>
+          </a:p>
+        </p:txBody>
+      </p:sp>
+      <p:sp>
+        <p:nvSpPr>
+          <p:cNvPr id="168" name="Rectangle 167"/>
+          <p:cNvSpPr/>
+          <p:nvPr/>
+        </p:nvSpPr>
+        <p:spPr>
+          <a:xfrm>
+            <a:off x="9619488" y="3840480"/>
+            <a:ext cx="2148840" cy="54864"/>
+          </a:xfrm>
+          <a:prstGeom prst="rect">
+            <a:avLst/>
+          </a:prstGeom>
+          <a:solidFill>
+            <a:srgbClr val="DA291C"/>
+          </a:solidFill>
+          <a:ln>
+            <a:noFill/>
+          </a:ln>
+          <a:effectLst/>
+        </p:spPr>
+        <p:style>
+          <a:lnRef idx="1">
+            <a:schemeClr val="accent1"/>
+          </a:lnRef>
+          <a:fillRef idx="3">
+            <a:schemeClr val="accent1"/>
+          </a:fillRef>
+          <a:effectRef idx="2">
+            <a:schemeClr val="accent1"/>
+          </a:effectRef>
+          <a:fontRef idx="minor">
+            <a:schemeClr val="lt1"/>
+          </a:fontRef>
+        </p:style>
+        <p:txBody>
+          <a:bodyPr rtlCol="0" anchor="ctr"/>
+          <a:lstStyle/>
+          <a:p>
+            <a:pPr algn="ctr"/>
+          </a:p>
+        </p:txBody>
+      </p:sp>
+      <p:sp>
+        <p:nvSpPr>
+          <p:cNvPr id="169" name="TextBox 168"/>
+          <p:cNvSpPr txBox="1"/>
+          <p:nvPr/>
+        </p:nvSpPr>
+        <p:spPr>
+          <a:xfrm>
+            <a:off x="9765792" y="3968496"/>
+            <a:ext cx="1892808" cy="420624"/>
+          </a:xfrm>
+          <a:prstGeom prst="rect">
+            <a:avLst/>
+          </a:prstGeom>
+          <a:noFill/>
+        </p:spPr>
+        <p:txBody>
+          <a:bodyPr wrap="square" anchor="t" lIns="12700" rIns="12700" tIns="0" bIns="0">
+            <a:spAutoFit/>
+          </a:bodyPr>
+          <a:lstStyle/>
+          <a:p>
+            <a:r>
+              <a:rPr sz="1000" b="1">
+                <a:solidFill>
+                  <a:srgbClr val="1C1917"/>
+                </a:solidFill>
+                <a:latin typeface="Calibri"/>
+              </a:rPr>
+              <a:t>Intl. Beneficiary</a:t>
+            </a:r>
+          </a:p>
+        </p:txBody>
+      </p:sp>
+      <p:sp>
+        <p:nvSpPr>
+          <p:cNvPr id="170" name="Rectangle 169"/>
+          <p:cNvSpPr/>
+          <p:nvPr/>
+        </p:nvSpPr>
+        <p:spPr>
+          <a:xfrm>
+            <a:off x="9765792" y="4443984"/>
+            <a:ext cx="713232" cy="219456"/>
+          </a:xfrm>
+          <a:prstGeom prst="rect">
+            <a:avLst/>
+          </a:prstGeom>
+          <a:solidFill>
+            <a:srgbClr val="DA291C"/>
+          </a:solidFill>
+          <a:ln>
+            <a:noFill/>
+          </a:ln>
+          <a:effectLst/>
+        </p:spPr>
+        <p:style>
+          <a:lnRef idx="1">
+            <a:schemeClr val="accent1"/>
+          </a:lnRef>
+          <a:fillRef idx="3">
+            <a:schemeClr val="accent1"/>
+          </a:fillRef>
+          <a:effectRef idx="2">
+            <a:schemeClr val="accent1"/>
+          </a:effectRef>
+          <a:fontRef idx="minor">
+            <a:schemeClr val="lt1"/>
+          </a:fontRef>
+        </p:style>
+        <p:txBody>
+          <a:bodyPr rtlCol="0" anchor="ctr" wrap="none" lIns="38100" rIns="38100" tIns="0" bIns="0"/>
+          <a:lstStyle/>
+          <a:p>
+            <a:pPr algn="ctr"/>
+            <a:r>
+              <a:rPr sz="750" b="1">
+                <a:solidFill>
+                  <a:srgbClr val="FFFFFF"/>
+                </a:solidFill>
+                <a:latin typeface="Calibri"/>
+              </a:rPr>
+              <a:t>4 steps</a:t>
+            </a:r>
+          </a:p>
+        </p:txBody>
+      </p:sp>
+      <p:sp>
+        <p:nvSpPr>
+          <p:cNvPr id="171" name="TextBox 170"/>
+          <p:cNvSpPr txBox="1"/>
+          <p:nvPr/>
+        </p:nvSpPr>
+        <p:spPr>
+          <a:xfrm>
+            <a:off x="9765792" y="4736592"/>
+            <a:ext cx="1892808" cy="310896"/>
+          </a:xfrm>
+          <a:prstGeom prst="rect">
+            <a:avLst/>
+          </a:prstGeom>
+          <a:noFill/>
+        </p:spPr>
+        <p:txBody>
+          <a:bodyPr wrap="square" anchor="t" lIns="12700" rIns="12700" tIns="0" bIns="0">
+            <a:spAutoFit/>
+          </a:bodyPr>
+          <a:lstStyle/>
+          <a:p>
+            <a:r>
+              <a:rPr sz="750" b="0">
+                <a:solidFill>
+                  <a:srgbClr val="78716C"/>
+                </a:solidFill>
+                <a:latin typeface="Calibri"/>
+              </a:rPr>
+              <a:t>IBAN/SWIFT · sanctions screen</a:t>
+            </a:r>
+          </a:p>
+        </p:txBody>
+      </p:sp>
+      <p:sp>
+        <p:nvSpPr>
+          <p:cNvPr id="172" name="Rectangle 171"/>
+          <p:cNvSpPr/>
+          <p:nvPr/>
+        </p:nvSpPr>
+        <p:spPr>
+          <a:xfrm>
+            <a:off x="438912" y="5230368"/>
+            <a:ext cx="2148840" cy="1261872"/>
+          </a:xfrm>
+          <a:prstGeom prst="rect">
+            <a:avLst/>
+          </a:prstGeom>
+          <a:solidFill>
+            <a:srgbClr val="FFFFFF"/>
+          </a:solidFill>
+          <a:ln>
+            <a:noFill/>
+          </a:ln>
+          <a:effectLst/>
+        </p:spPr>
+        <p:style>
+          <a:lnRef idx="1">
+            <a:schemeClr val="accent1"/>
+          </a:lnRef>
+          <a:fillRef idx="3">
+            <a:schemeClr val="accent1"/>
+          </a:fillRef>
+          <a:effectRef idx="2">
+            <a:schemeClr val="accent1"/>
+          </a:effectRef>
+          <a:fontRef idx="minor">
+            <a:schemeClr val="lt1"/>
+          </a:fontRef>
+        </p:style>
+        <p:txBody>
+          <a:bodyPr rtlCol="0" anchor="ctr"/>
+          <a:lstStyle/>
+          <a:p>
+            <a:pPr algn="ctr"/>
+          </a:p>
+        </p:txBody>
+      </p:sp>
+      <p:sp>
+        <p:nvSpPr>
+          <p:cNvPr id="173" name="Rectangle 172"/>
+          <p:cNvSpPr/>
+          <p:nvPr/>
+        </p:nvSpPr>
+        <p:spPr>
+          <a:xfrm>
+            <a:off x="438912" y="5230368"/>
+            <a:ext cx="2148840" cy="54864"/>
+          </a:xfrm>
+          <a:prstGeom prst="rect">
+            <a:avLst/>
+          </a:prstGeom>
+          <a:solidFill>
+            <a:srgbClr val="DA291C"/>
+          </a:solidFill>
+          <a:ln>
+            <a:noFill/>
+          </a:ln>
+          <a:effectLst/>
+        </p:spPr>
+        <p:style>
+          <a:lnRef idx="1">
+            <a:schemeClr val="accent1"/>
+          </a:lnRef>
+          <a:fillRef idx="3">
+            <a:schemeClr val="accent1"/>
+          </a:fillRef>
+          <a:effectRef idx="2">
+            <a:schemeClr val="accent1"/>
+          </a:effectRef>
+          <a:fontRef idx="minor">
+            <a:schemeClr val="lt1"/>
+          </a:fontRef>
+        </p:style>
+        <p:txBody>
+          <a:bodyPr rtlCol="0" anchor="ctr"/>
+          <a:lstStyle/>
+          <a:p>
+            <a:pPr algn="ctr"/>
+          </a:p>
+        </p:txBody>
+      </p:sp>
+      <p:sp>
+        <p:nvSpPr>
+          <p:cNvPr id="174" name="TextBox 173"/>
+          <p:cNvSpPr txBox="1"/>
+          <p:nvPr/>
+        </p:nvSpPr>
+        <p:spPr>
+          <a:xfrm>
+            <a:off x="585216" y="5358383"/>
+            <a:ext cx="1892808" cy="420624"/>
+          </a:xfrm>
+          <a:prstGeom prst="rect">
+            <a:avLst/>
+          </a:prstGeom>
+          <a:noFill/>
+        </p:spPr>
+        <p:txBody>
+          <a:bodyPr wrap="square" anchor="t" lIns="12700" rIns="12700" tIns="0" bIns="0">
+            <a:spAutoFit/>
+          </a:bodyPr>
+          <a:lstStyle/>
+          <a:p>
+            <a:r>
+              <a:rPr sz="1000" b="1">
+                <a:solidFill>
+                  <a:srgbClr val="1C1917"/>
+                </a:solidFill>
+                <a:latin typeface="Calibri"/>
+              </a:rPr>
+              <a:t>Balance Certificate</a:t>
+            </a:r>
+          </a:p>
+        </p:txBody>
+      </p:sp>
+      <p:sp>
+        <p:nvSpPr>
+          <p:cNvPr id="175" name="Rectangle 174"/>
+          <p:cNvSpPr/>
+          <p:nvPr/>
+        </p:nvSpPr>
+        <p:spPr>
+          <a:xfrm>
+            <a:off x="585216" y="5833872"/>
+            <a:ext cx="713232" cy="219456"/>
+          </a:xfrm>
+          <a:prstGeom prst="rect">
+            <a:avLst/>
+          </a:prstGeom>
+          <a:solidFill>
+            <a:srgbClr val="DA291C"/>
+          </a:solidFill>
+          <a:ln>
+            <a:noFill/>
+          </a:ln>
+          <a:effectLst/>
+        </p:spPr>
+        <p:style>
+          <a:lnRef idx="1">
+            <a:schemeClr val="accent1"/>
+          </a:lnRef>
+          <a:fillRef idx="3">
+            <a:schemeClr val="accent1"/>
+          </a:fillRef>
+          <a:effectRef idx="2">
+            <a:schemeClr val="accent1"/>
+          </a:effectRef>
+          <a:fontRef idx="minor">
+            <a:schemeClr val="lt1"/>
+          </a:fontRef>
+        </p:style>
+        <p:txBody>
+          <a:bodyPr rtlCol="0" anchor="ctr" wrap="none" lIns="38100" rIns="38100" tIns="0" bIns="0"/>
+          <a:lstStyle/>
+          <a:p>
+            <a:pPr algn="ctr"/>
+            <a:r>
+              <a:rPr sz="750" b="1">
+                <a:solidFill>
+                  <a:srgbClr val="FFFFFF"/>
+                </a:solidFill>
+                <a:latin typeface="Calibri"/>
+              </a:rPr>
+              <a:t>4 steps</a:t>
+            </a:r>
+          </a:p>
+        </p:txBody>
+      </p:sp>
+      <p:sp>
+        <p:nvSpPr>
+          <p:cNvPr id="176" name="TextBox 175"/>
+          <p:cNvSpPr txBox="1"/>
+          <p:nvPr/>
+        </p:nvSpPr>
+        <p:spPr>
+          <a:xfrm>
+            <a:off x="585216" y="6126479"/>
+            <a:ext cx="1892808" cy="310896"/>
+          </a:xfrm>
+          <a:prstGeom prst="rect">
+            <a:avLst/>
+          </a:prstGeom>
+          <a:noFill/>
+        </p:spPr>
+        <p:txBody>
+          <a:bodyPr wrap="square" anchor="t" lIns="12700" rIns="12700" tIns="0" bIns="0">
+            <a:spAutoFit/>
+          </a:bodyPr>
+          <a:lstStyle/>
+          <a:p>
+            <a:r>
+              <a:rPr sz="750" b="0">
+                <a:solidFill>
+                  <a:srgbClr val="78716C"/>
+                </a:solidFill>
+                <a:latin typeface="Calibri"/>
+              </a:rPr>
+              <a:t>Sealed proof of balance</a:t>
+            </a:r>
+          </a:p>
+        </p:txBody>
+      </p:sp>
+      <p:sp>
+        <p:nvSpPr>
+          <p:cNvPr id="177" name="Rectangle 176"/>
+          <p:cNvSpPr/>
+          <p:nvPr/>
+        </p:nvSpPr>
+        <p:spPr>
+          <a:xfrm>
+            <a:off x="2734056" y="5230368"/>
+            <a:ext cx="2148840" cy="1261872"/>
+          </a:xfrm>
+          <a:prstGeom prst="rect">
+            <a:avLst/>
+          </a:prstGeom>
+          <a:solidFill>
+            <a:srgbClr val="FFFFFF"/>
+          </a:solidFill>
+          <a:ln>
+            <a:noFill/>
+          </a:ln>
+          <a:effectLst/>
+        </p:spPr>
+        <p:style>
+          <a:lnRef idx="1">
+            <a:schemeClr val="accent1"/>
+          </a:lnRef>
+          <a:fillRef idx="3">
+            <a:schemeClr val="accent1"/>
+          </a:fillRef>
+          <a:effectRef idx="2">
+            <a:schemeClr val="accent1"/>
+          </a:effectRef>
+          <a:fontRef idx="minor">
+            <a:schemeClr val="lt1"/>
+          </a:fontRef>
+        </p:style>
+        <p:txBody>
+          <a:bodyPr rtlCol="0" anchor="ctr"/>
+          <a:lstStyle/>
+          <a:p>
+            <a:pPr algn="ctr"/>
+          </a:p>
+        </p:txBody>
+      </p:sp>
+      <p:sp>
+        <p:nvSpPr>
+          <p:cNvPr id="178" name="Rectangle 177"/>
+          <p:cNvSpPr/>
+          <p:nvPr/>
+        </p:nvSpPr>
+        <p:spPr>
+          <a:xfrm>
+            <a:off x="2734056" y="5230368"/>
+            <a:ext cx="2148840" cy="54864"/>
+          </a:xfrm>
+          <a:prstGeom prst="rect">
+            <a:avLst/>
+          </a:prstGeom>
+          <a:solidFill>
+            <a:srgbClr val="DA291C"/>
+          </a:solidFill>
+          <a:ln>
+            <a:noFill/>
+          </a:ln>
+          <a:effectLst/>
+        </p:spPr>
+        <p:style>
+          <a:lnRef idx="1">
+            <a:schemeClr val="accent1"/>
+          </a:lnRef>
+          <a:fillRef idx="3">
+            <a:schemeClr val="accent1"/>
+          </a:fillRef>
+          <a:effectRef idx="2">
+            <a:schemeClr val="accent1"/>
+          </a:effectRef>
+          <a:fontRef idx="minor">
+            <a:schemeClr val="lt1"/>
+          </a:fontRef>
+        </p:style>
+        <p:txBody>
+          <a:bodyPr rtlCol="0" anchor="ctr"/>
+          <a:lstStyle/>
+          <a:p>
+            <a:pPr algn="ctr"/>
+          </a:p>
+        </p:txBody>
+      </p:sp>
+      <p:sp>
+        <p:nvSpPr>
+          <p:cNvPr id="179" name="TextBox 178"/>
+          <p:cNvSpPr txBox="1"/>
+          <p:nvPr/>
+        </p:nvSpPr>
+        <p:spPr>
+          <a:xfrm>
+            <a:off x="2880360" y="5358383"/>
+            <a:ext cx="1892808" cy="420624"/>
+          </a:xfrm>
+          <a:prstGeom prst="rect">
+            <a:avLst/>
+          </a:prstGeom>
+          <a:noFill/>
+        </p:spPr>
+        <p:txBody>
+          <a:bodyPr wrap="square" anchor="t" lIns="12700" rIns="12700" tIns="0" bIns="0">
+            <a:spAutoFit/>
+          </a:bodyPr>
+          <a:lstStyle/>
+          <a:p>
+            <a:r>
+              <a:rPr sz="1000" b="1">
+                <a:solidFill>
+                  <a:srgbClr val="1C1917"/>
+                </a:solidFill>
+                <a:latin typeface="Calibri"/>
+              </a:rPr>
+              <a:t>Devices &amp; Sessions</a:t>
+            </a:r>
+          </a:p>
+        </p:txBody>
+      </p:sp>
+      <p:sp>
+        <p:nvSpPr>
+          <p:cNvPr id="180" name="Rectangle 179"/>
+          <p:cNvSpPr/>
+          <p:nvPr/>
+        </p:nvSpPr>
+        <p:spPr>
+          <a:xfrm>
+            <a:off x="2880360" y="5833872"/>
+            <a:ext cx="713232" cy="219456"/>
+          </a:xfrm>
+          <a:prstGeom prst="rect">
+            <a:avLst/>
+          </a:prstGeom>
+          <a:solidFill>
+            <a:srgbClr val="DA291C"/>
+          </a:solidFill>
+          <a:ln>
+            <a:noFill/>
+          </a:ln>
+          <a:effectLst/>
+        </p:spPr>
+        <p:style>
+          <a:lnRef idx="1">
+            <a:schemeClr val="accent1"/>
+          </a:lnRef>
+          <a:fillRef idx="3">
+            <a:schemeClr val="accent1"/>
+          </a:fillRef>
+          <a:effectRef idx="2">
+            <a:schemeClr val="accent1"/>
+          </a:effectRef>
+          <a:fontRef idx="minor">
+            <a:schemeClr val="lt1"/>
+          </a:fontRef>
+        </p:style>
+        <p:txBody>
+          <a:bodyPr rtlCol="0" anchor="ctr" wrap="none" lIns="38100" rIns="38100" tIns="0" bIns="0"/>
+          <a:lstStyle/>
+          <a:p>
+            <a:pPr algn="ctr"/>
+            <a:r>
+              <a:rPr sz="750" b="1">
+                <a:solidFill>
+                  <a:srgbClr val="FFFFFF"/>
+                </a:solidFill>
+                <a:latin typeface="Calibri"/>
+              </a:rPr>
+              <a:t>4 steps</a:t>
+            </a:r>
+          </a:p>
+        </p:txBody>
+      </p:sp>
+      <p:sp>
+        <p:nvSpPr>
+          <p:cNvPr id="181" name="TextBox 180"/>
+          <p:cNvSpPr txBox="1"/>
+          <p:nvPr/>
+        </p:nvSpPr>
+        <p:spPr>
+          <a:xfrm>
+            <a:off x="2880360" y="6126479"/>
+            <a:ext cx="1892808" cy="310896"/>
+          </a:xfrm>
+          <a:prstGeom prst="rect">
+            <a:avLst/>
+          </a:prstGeom>
+          <a:noFill/>
+        </p:spPr>
+        <p:txBody>
+          <a:bodyPr wrap="square" anchor="t" lIns="12700" rIns="12700" tIns="0" bIns="0">
+            <a:spAutoFit/>
+          </a:bodyPr>
+          <a:lstStyle/>
+          <a:p>
+            <a:r>
+              <a:rPr sz="750" b="0">
+                <a:solidFill>
+                  <a:srgbClr val="78716C"/>
+                </a:solidFill>
+                <a:latin typeface="Calibri"/>
+              </a:rPr>
+              <a:t>SCA · remote sign-out</a:t>
             </a:r>
           </a:p>
         </p:txBody>

--- a/Santander_Digital_Banking_Future.pptx
+++ b/Santander_Digital_Banking_Future.pptx
@@ -8207,7 +8207,7 @@
                 </a:solidFill>
                 <a:latin typeface="Calibri"/>
               </a:rPr>
-              <a:t>21 features built</a:t>
+              <a:t>36 features built</a:t>
             </a:r>
           </a:p>
         </p:txBody>
@@ -11356,7 +11356,7 @@
                 </a:solidFill>
                 <a:latin typeface="Calibri"/>
               </a:rPr>
-              <a:t>All 21 features validated</a:t>
+              <a:t>All 36 features validated</a:t>
             </a:r>
           </a:p>
         </p:txBody>
@@ -13650,7 +13650,7 @@
                 </a:solidFill>
                 <a:latin typeface="Calibri"/>
               </a:rPr>
-              <a:t>#C8102E</a:t>
+              <a:t>#DA291C</a:t>
             </a:r>
           </a:p>
         </p:txBody>
@@ -14433,7 +14433,7 @@
                 </a:solidFill>
                 <a:latin typeface="Calibri"/>
               </a:rPr>
-              <a:t>Fraunces</a:t>
+              <a:t>Santander Text</a:t>
             </a:r>
           </a:p>
         </p:txBody>
@@ -14468,7 +14468,7 @@
                 </a:solidFill>
                 <a:latin typeface="Calibri"/>
               </a:rPr>
-              <a:t>Serif — large display numbers, editorial headers</a:t>
+              <a:t>Corporate sans — display numbers, editorial headers (Geist fallback)</a:t>
             </a:r>
           </a:p>
         </p:txBody>
@@ -20292,7 +20292,7 @@
                 </a:solidFill>
                 <a:latin typeface="Calibri"/>
               </a:rPr>
-              <a:t>Built in React. 7,400 lines. 21 features. Live at imscots-ui.github.io/santander — open it now.</a:t>
+              <a:t>Built in React. 7,400 lines. 36 features. Live at imscots-ui.github.io/santander — open it now.</a:t>
             </a:r>
           </a:p>
         </p:txBody>
@@ -20501,7 +20501,7 @@
                 </a:solidFill>
                 <a:latin typeface="Calibri"/>
               </a:rPr>
-              <a:t>21 features. Four categories. One app.</a:t>
+              <a:t>36 features. Four categories. One app.</a:t>
             </a:r>
           </a:p>
         </p:txBody>
@@ -20629,65 +20629,20 @@
       </p:sp>
       <p:sp>
         <p:nvSpPr>
-          <p:cNvPr id="8" name="Rectangle 7"/>
-          <p:cNvSpPr/>
-          <p:nvPr/>
-        </p:nvSpPr>
-        <p:spPr>
-          <a:xfrm>
-            <a:off x="438912" y="1335024"/>
-            <a:ext cx="2788920" cy="658368"/>
-          </a:xfrm>
-          <a:prstGeom prst="rect">
-            <a:avLst/>
-          </a:prstGeom>
-          <a:solidFill>
-            <a:srgbClr val="FFFFFF"/>
-          </a:solidFill>
-          <a:ln w="9525">
-            <a:solidFill>
-              <a:srgbClr val="D6D3D1"/>
-            </a:solidFill>
-          </a:ln>
-        </p:spPr>
-        <p:style>
-          <a:lnRef idx="1">
-            <a:schemeClr val="accent1"/>
-          </a:lnRef>
-          <a:fillRef idx="3">
-            <a:schemeClr val="accent1"/>
-          </a:fillRef>
-          <a:effectRef idx="2">
-            <a:schemeClr val="accent1"/>
-          </a:effectRef>
-          <a:fontRef idx="minor">
-            <a:schemeClr val="lt1"/>
-          </a:fontRef>
-        </p:style>
-        <p:txBody>
-          <a:bodyPr rtlCol="0" anchor="ctr"/>
-          <a:lstStyle/>
-          <a:p>
-            <a:pPr algn="ctr"/>
-          </a:p>
-        </p:txBody>
-      </p:sp>
-      <p:sp>
-        <p:nvSpPr>
-          <p:cNvPr id="9" name="Rectangle 8"/>
-          <p:cNvSpPr/>
-          <p:nvPr/>
-        </p:nvSpPr>
-        <p:spPr>
-          <a:xfrm>
-            <a:off x="438912" y="1335024"/>
-            <a:ext cx="45720" cy="658368"/>
-          </a:xfrm>
-          <a:prstGeom prst="rect">
-            <a:avLst/>
-          </a:prstGeom>
-          <a:solidFill>
-            <a:srgbClr val="DA291C"/>
+          <p:cNvPr id="29" name="Rectangle 28"/>
+          <p:cNvSpPr/>
+          <p:nvPr/>
+        </p:nvSpPr>
+        <p:spPr>
+          <a:xfrm>
+            <a:off x="3383280" y="1024128"/>
+            <a:ext cx="2788920" cy="310896"/>
+          </a:xfrm>
+          <a:prstGeom prst="rect">
+            <a:avLst/>
+          </a:prstGeom>
+          <a:solidFill>
+            <a:srgbClr val="1C1917"/>
           </a:solidFill>
           <a:ln>
             <a:noFill/>
@@ -20717,14 +20672,14 @@
       </p:sp>
       <p:sp>
         <p:nvSpPr>
-          <p:cNvPr id="10" name="TextBox 9"/>
-          <p:cNvSpPr txBox="1"/>
-          <p:nvPr/>
-        </p:nvSpPr>
-        <p:spPr>
-          <a:xfrm>
-            <a:off x="603503" y="1389888"/>
-            <a:ext cx="2505456" cy="530352"/>
+          <p:cNvPr id="30" name="TextBox 29"/>
+          <p:cNvSpPr txBox="1"/>
+          <p:nvPr/>
+        </p:nvSpPr>
+        <p:spPr>
+          <a:xfrm>
+            <a:off x="3493008" y="1042415"/>
+            <a:ext cx="2578608" cy="256032"/>
           </a:xfrm>
           <a:prstGeom prst="rect">
             <a:avLst/>
@@ -20739,78 +20694,33 @@
           <a:p>
             <a:pPr algn="l"/>
             <a:r>
-              <a:rPr sz="850" b="0" i="0">
-                <a:solidFill>
-                  <a:srgbClr val="1C1917"/>
-                </a:solidFill>
-                <a:latin typeface="Calibri"/>
-              </a:rPr>
-              <a:t>Account management + mandate badges</a:t>
-            </a:r>
-          </a:p>
-        </p:txBody>
-      </p:sp>
-      <p:sp>
-        <p:nvSpPr>
-          <p:cNvPr id="11" name="Rectangle 10"/>
-          <p:cNvSpPr/>
-          <p:nvPr/>
-        </p:nvSpPr>
-        <p:spPr>
-          <a:xfrm>
-            <a:off x="438912" y="2011680"/>
-            <a:ext cx="2788920" cy="658368"/>
-          </a:xfrm>
-          <a:prstGeom prst="rect">
-            <a:avLst/>
-          </a:prstGeom>
-          <a:solidFill>
-            <a:srgbClr val="F5F5F4"/>
-          </a:solidFill>
-          <a:ln w="9525">
-            <a:solidFill>
-              <a:srgbClr val="D6D3D1"/>
-            </a:solidFill>
-          </a:ln>
-        </p:spPr>
-        <p:style>
-          <a:lnRef idx="1">
-            <a:schemeClr val="accent1"/>
-          </a:lnRef>
-          <a:fillRef idx="3">
-            <a:schemeClr val="accent1"/>
-          </a:fillRef>
-          <a:effectRef idx="2">
-            <a:schemeClr val="accent1"/>
-          </a:effectRef>
-          <a:fontRef idx="minor">
-            <a:schemeClr val="lt1"/>
-          </a:fontRef>
-        </p:style>
-        <p:txBody>
-          <a:bodyPr rtlCol="0" anchor="ctr"/>
-          <a:lstStyle/>
-          <a:p>
-            <a:pPr algn="ctr"/>
-          </a:p>
-        </p:txBody>
-      </p:sp>
-      <p:sp>
-        <p:nvSpPr>
-          <p:cNvPr id="12" name="Rectangle 11"/>
-          <p:cNvSpPr/>
-          <p:nvPr/>
-        </p:nvSpPr>
-        <p:spPr>
-          <a:xfrm>
-            <a:off x="438912" y="2011680"/>
-            <a:ext cx="45720" cy="658368"/>
-          </a:xfrm>
-          <a:prstGeom prst="rect">
-            <a:avLst/>
-          </a:prstGeom>
-          <a:solidFill>
-            <a:srgbClr val="DA291C"/>
+              <a:rPr sz="800" b="1" i="0">
+                <a:solidFill>
+                  <a:srgbClr val="FFFFFF"/>
+                </a:solidFill>
+                <a:latin typeface="Calibri"/>
+              </a:rPr>
+              <a:t>PAPERLESS WORKFLOWS</a:t>
+            </a:r>
+          </a:p>
+        </p:txBody>
+      </p:sp>
+      <p:sp>
+        <p:nvSpPr>
+          <p:cNvPr id="52" name="Rectangle 51"/>
+          <p:cNvSpPr/>
+          <p:nvPr/>
+        </p:nvSpPr>
+        <p:spPr>
+          <a:xfrm>
+            <a:off x="6327648" y="1024128"/>
+            <a:ext cx="2788920" cy="310896"/>
+          </a:xfrm>
+          <a:prstGeom prst="rect">
+            <a:avLst/>
+          </a:prstGeom>
+          <a:solidFill>
+            <a:srgbClr val="1D4ED8"/>
           </a:solidFill>
           <a:ln>
             <a:noFill/>
@@ -20840,14 +20750,14 @@
       </p:sp>
       <p:sp>
         <p:nvSpPr>
-          <p:cNvPr id="13" name="TextBox 12"/>
-          <p:cNvSpPr txBox="1"/>
-          <p:nvPr/>
-        </p:nvSpPr>
-        <p:spPr>
-          <a:xfrm>
-            <a:off x="603503" y="2066543"/>
-            <a:ext cx="2505456" cy="530352"/>
+          <p:cNvPr id="53" name="TextBox 52"/>
+          <p:cNvSpPr txBox="1"/>
+          <p:nvPr/>
+        </p:nvSpPr>
+        <p:spPr>
+          <a:xfrm>
+            <a:off x="6437376" y="1042415"/>
+            <a:ext cx="2578608" cy="256032"/>
           </a:xfrm>
           <a:prstGeom prst="rect">
             <a:avLst/>
@@ -20862,78 +20772,33 @@
           <a:p>
             <a:pPr algn="l"/>
             <a:r>
-              <a:rPr sz="850" b="0" i="0">
-                <a:solidFill>
-                  <a:srgbClr val="1C1917"/>
-                </a:solidFill>
-                <a:latin typeface="Calibri"/>
-              </a:rPr>
-              <a:t>Dual-authorisation (Face ID / reject)</a:t>
-            </a:r>
-          </a:p>
-        </p:txBody>
-      </p:sp>
-      <p:sp>
-        <p:nvSpPr>
-          <p:cNvPr id="14" name="Rectangle 13"/>
-          <p:cNvSpPr/>
-          <p:nvPr/>
-        </p:nvSpPr>
-        <p:spPr>
-          <a:xfrm>
-            <a:off x="438912" y="2688336"/>
-            <a:ext cx="2788920" cy="658368"/>
-          </a:xfrm>
-          <a:prstGeom prst="rect">
-            <a:avLst/>
-          </a:prstGeom>
-          <a:solidFill>
-            <a:srgbClr val="FFFFFF"/>
-          </a:solidFill>
-          <a:ln w="9525">
-            <a:solidFill>
-              <a:srgbClr val="D6D3D1"/>
-            </a:solidFill>
-          </a:ln>
-        </p:spPr>
-        <p:style>
-          <a:lnRef idx="1">
-            <a:schemeClr val="accent1"/>
-          </a:lnRef>
-          <a:fillRef idx="3">
-            <a:schemeClr val="accent1"/>
-          </a:fillRef>
-          <a:effectRef idx="2">
-            <a:schemeClr val="accent1"/>
-          </a:effectRef>
-          <a:fontRef idx="minor">
-            <a:schemeClr val="lt1"/>
-          </a:fontRef>
-        </p:style>
-        <p:txBody>
-          <a:bodyPr rtlCol="0" anchor="ctr"/>
-          <a:lstStyle/>
-          <a:p>
-            <a:pPr algn="ctr"/>
-          </a:p>
-        </p:txBody>
-      </p:sp>
-      <p:sp>
-        <p:nvSpPr>
-          <p:cNvPr id="15" name="Rectangle 14"/>
-          <p:cNvSpPr/>
-          <p:nvPr/>
-        </p:nvSpPr>
-        <p:spPr>
-          <a:xfrm>
-            <a:off x="438912" y="2688336"/>
-            <a:ext cx="45720" cy="658368"/>
-          </a:xfrm>
-          <a:prstGeom prst="rect">
-            <a:avLst/>
-          </a:prstGeom>
-          <a:solidFill>
-            <a:srgbClr val="DA291C"/>
+              <a:rPr sz="800" b="1" i="0">
+                <a:solidFill>
+                  <a:srgbClr val="FFFFFF"/>
+                </a:solidFill>
+                <a:latin typeface="Calibri"/>
+              </a:rPr>
+              <a:t>INTELLIGENCE</a:t>
+            </a:r>
+          </a:p>
+        </p:txBody>
+      </p:sp>
+      <p:sp>
+        <p:nvSpPr>
+          <p:cNvPr id="75" name="Rectangle 74"/>
+          <p:cNvSpPr/>
+          <p:nvPr/>
+        </p:nvSpPr>
+        <p:spPr>
+          <a:xfrm>
+            <a:off x="9272016" y="1024128"/>
+            <a:ext cx="2788920" cy="310896"/>
+          </a:xfrm>
+          <a:prstGeom prst="rect">
+            <a:avLst/>
+          </a:prstGeom>
+          <a:solidFill>
+            <a:srgbClr val="059669"/>
           </a:solidFill>
           <a:ln>
             <a:noFill/>
@@ -20963,14 +20828,14 @@
       </p:sp>
       <p:sp>
         <p:nvSpPr>
-          <p:cNvPr id="16" name="TextBox 15"/>
-          <p:cNvSpPr txBox="1"/>
-          <p:nvPr/>
-        </p:nvSpPr>
-        <p:spPr>
-          <a:xfrm>
-            <a:off x="603503" y="2743200"/>
-            <a:ext cx="2505456" cy="530352"/>
+          <p:cNvPr id="76" name="TextBox 75"/>
+          <p:cNvSpPr txBox="1"/>
+          <p:nvPr/>
+        </p:nvSpPr>
+        <p:spPr>
+          <a:xfrm>
+            <a:off x="9381744" y="1042415"/>
+            <a:ext cx="2578608" cy="256032"/>
           </a:xfrm>
           <a:prstGeom prst="rect">
             <a:avLst/>
@@ -20985,195 +20850,176 @@
           <a:p>
             <a:pPr algn="l"/>
             <a:r>
+              <a:rPr sz="800" b="1" i="0">
+                <a:solidFill>
+                  <a:srgbClr val="FFFFFF"/>
+                </a:solidFill>
+                <a:latin typeface="Calibri"/>
+              </a:rPr>
+              <a:t>PRIVACY &amp; SECURITY</a:t>
+            </a:r>
+          </a:p>
+        </p:txBody>
+      </p:sp>
+      <p:sp>
+        <p:nvSpPr>
+          <p:cNvPr id="98" name="TextBox 97"/>
+          <p:cNvSpPr txBox="1"/>
+          <p:nvPr/>
+        </p:nvSpPr>
+        <p:spPr>
+          <a:xfrm>
+            <a:off x="411480" y="6620256"/>
+            <a:ext cx="3657600" cy="201168"/>
+          </a:xfrm>
+          <a:prstGeom prst="rect">
+            <a:avLst/>
+          </a:prstGeom>
+          <a:noFill/>
+        </p:spPr>
+        <p:txBody>
+          <a:bodyPr wrap="square">
+            <a:spAutoFit/>
+          </a:bodyPr>
+          <a:lstStyle/>
+          <a:p>
+            <a:pPr algn="l"/>
+            <a:r>
+              <a:rPr sz="750" b="1" i="0">
+                <a:solidFill>
+                  <a:srgbClr val="DA291C"/>
+                </a:solidFill>
+                <a:latin typeface="Calibri"/>
+              </a:rPr>
+              <a:t>INTERNAL · CONFIDENTIAL</a:t>
+            </a:r>
+          </a:p>
+        </p:txBody>
+      </p:sp>
+      <p:sp>
+        <p:nvSpPr>
+          <p:cNvPr id="99" name="TextBox 98"/>
+          <p:cNvSpPr txBox="1"/>
+          <p:nvPr/>
+        </p:nvSpPr>
+        <p:spPr>
+          <a:xfrm>
+            <a:off x="3657600" y="6620256"/>
+            <a:ext cx="8119872" cy="201168"/>
+          </a:xfrm>
+          <a:prstGeom prst="rect">
+            <a:avLst/>
+          </a:prstGeom>
+          <a:noFill/>
+        </p:spPr>
+        <p:txBody>
+          <a:bodyPr wrap="square">
+            <a:spAutoFit/>
+          </a:bodyPr>
+          <a:lstStyle/>
+          <a:p>
+            <a:pPr algn="r"/>
+            <a:r>
+              <a:rPr sz="750" b="0" i="1">
+                <a:solidFill>
+                  <a:srgbClr val="78716C"/>
+                </a:solidFill>
+                <a:latin typeface="Calibri"/>
+              </a:rPr>
+              <a:t>Alan Davidson  ·  Business Banking Advisor  ·  Self-initiated  ·  Own time  ·  June 2026</a:t>
+            </a:r>
+          </a:p>
+        </p:txBody>
+      </p:sp>
+      <p:sp>
+        <p:nvSpPr>
+          <p:cNvPr id="100" name="TextBox 99"/>
+          <p:cNvSpPr txBox="1"/>
+          <p:nvPr/>
+        </p:nvSpPr>
+        <p:spPr>
+          <a:xfrm>
+            <a:off x="11722608" y="6565392"/>
+            <a:ext cx="347472" cy="219456"/>
+          </a:xfrm>
+          <a:prstGeom prst="rect">
+            <a:avLst/>
+          </a:prstGeom>
+          <a:noFill/>
+        </p:spPr>
+        <p:txBody>
+          <a:bodyPr wrap="square">
+            <a:spAutoFit/>
+          </a:bodyPr>
+          <a:lstStyle/>
+          <a:p>
+            <a:pPr algn="r"/>
+            <a:r>
               <a:rPr sz="850" b="0" i="0">
                 <a:solidFill>
-                  <a:srgbClr val="1C1917"/>
-                </a:solidFill>
-                <a:latin typeface="Calibri"/>
-              </a:rPr>
-              <a:t>Per-account signing rules (Any-1 / 2 / All)</a:t>
-            </a:r>
-          </a:p>
-        </p:txBody>
-      </p:sp>
-      <p:sp>
-        <p:nvSpPr>
-          <p:cNvPr id="17" name="Rectangle 16"/>
-          <p:cNvSpPr/>
-          <p:nvPr/>
-        </p:nvSpPr>
-        <p:spPr>
-          <a:xfrm>
-            <a:off x="438912" y="3364991"/>
-            <a:ext cx="2788920" cy="658368"/>
-          </a:xfrm>
-          <a:prstGeom prst="rect">
-            <a:avLst/>
-          </a:prstGeom>
-          <a:solidFill>
-            <a:srgbClr val="F5F5F4"/>
-          </a:solidFill>
-          <a:ln w="9525">
-            <a:solidFill>
-              <a:srgbClr val="D6D3D1"/>
-            </a:solidFill>
-          </a:ln>
-        </p:spPr>
-        <p:style>
-          <a:lnRef idx="1">
-            <a:schemeClr val="accent1"/>
-          </a:lnRef>
-          <a:fillRef idx="3">
-            <a:schemeClr val="accent1"/>
-          </a:fillRef>
-          <a:effectRef idx="2">
-            <a:schemeClr val="accent1"/>
-          </a:effectRef>
-          <a:fontRef idx="minor">
-            <a:schemeClr val="lt1"/>
-          </a:fontRef>
-        </p:style>
-        <p:txBody>
-          <a:bodyPr rtlCol="0" anchor="ctr"/>
-          <a:lstStyle/>
-          <a:p>
-            <a:pPr algn="ctr"/>
-          </a:p>
-        </p:txBody>
-      </p:sp>
-      <p:sp>
-        <p:nvSpPr>
-          <p:cNvPr id="18" name="Rectangle 17"/>
-          <p:cNvSpPr/>
-          <p:nvPr/>
-        </p:nvSpPr>
-        <p:spPr>
-          <a:xfrm>
-            <a:off x="438912" y="3364991"/>
-            <a:ext cx="45720" cy="658368"/>
-          </a:xfrm>
-          <a:prstGeom prst="rect">
-            <a:avLst/>
-          </a:prstGeom>
-          <a:solidFill>
-            <a:srgbClr val="DA291C"/>
+                  <a:srgbClr val="78716C"/>
+                </a:solidFill>
+                <a:latin typeface="Calibri"/>
+              </a:rPr>
+              <a:t>5</a:t>
+            </a:r>
+          </a:p>
+        </p:txBody>
+      </p:sp>
+      <p:sp>
+        <p:nvSpPr>
+          <p:cNvPr id="101" name="Rectangle 100"/>
+          <p:cNvSpPr/>
+          <p:nvPr/>
+        </p:nvSpPr>
+        <p:spPr>
+          <a:xfrm>
+            <a:off x="438912" y="1335024"/>
+            <a:ext cx="2788920" cy="457200"/>
+          </a:xfrm>
+          <a:prstGeom prst="rect">
+            <a:avLst/>
+          </a:prstGeom>
+          <a:solidFill>
+            <a:srgbClr val="FFFFFF"/>
           </a:solidFill>
           <a:ln>
             <a:noFill/>
           </a:ln>
-        </p:spPr>
-        <p:style>
-          <a:lnRef idx="1">
-            <a:schemeClr val="accent1"/>
-          </a:lnRef>
-          <a:fillRef idx="3">
-            <a:schemeClr val="accent1"/>
-          </a:fillRef>
-          <a:effectRef idx="2">
-            <a:schemeClr val="accent1"/>
-          </a:effectRef>
-          <a:fontRef idx="minor">
-            <a:schemeClr val="lt1"/>
-          </a:fontRef>
-        </p:style>
-        <p:txBody>
-          <a:bodyPr rtlCol="0" anchor="ctr"/>
-          <a:lstStyle/>
-          <a:p>
-            <a:pPr algn="ctr"/>
-          </a:p>
-        </p:txBody>
-      </p:sp>
-      <p:sp>
-        <p:nvSpPr>
-          <p:cNvPr id="19" name="TextBox 18"/>
-          <p:cNvSpPr txBox="1"/>
-          <p:nvPr/>
-        </p:nvSpPr>
-        <p:spPr>
-          <a:xfrm>
-            <a:off x="603503" y="3419856"/>
-            <a:ext cx="2505456" cy="530352"/>
-          </a:xfrm>
-          <a:prstGeom prst="rect">
-            <a:avLst/>
-          </a:prstGeom>
-          <a:noFill/>
-        </p:spPr>
-        <p:txBody>
-          <a:bodyPr wrap="square">
-            <a:spAutoFit/>
-          </a:bodyPr>
-          <a:lstStyle/>
-          <a:p>
-            <a:pPr algn="l"/>
-            <a:r>
-              <a:rPr sz="850" b="0" i="0">
-                <a:solidFill>
-                  <a:srgbClr val="1C1917"/>
-                </a:solidFill>
-                <a:latin typeface="Calibri"/>
-              </a:rPr>
-              <a:t>7 entity types — full compliance paths</a:t>
-            </a:r>
-          </a:p>
-        </p:txBody>
-      </p:sp>
-      <p:sp>
-        <p:nvSpPr>
-          <p:cNvPr id="20" name="Rectangle 19"/>
-          <p:cNvSpPr/>
-          <p:nvPr/>
-        </p:nvSpPr>
-        <p:spPr>
-          <a:xfrm>
-            <a:off x="438912" y="4041648"/>
-            <a:ext cx="2788920" cy="658368"/>
-          </a:xfrm>
-          <a:prstGeom prst="rect">
-            <a:avLst/>
-          </a:prstGeom>
-          <a:solidFill>
-            <a:srgbClr val="FFFFFF"/>
-          </a:solidFill>
-          <a:ln w="9525">
-            <a:solidFill>
-              <a:srgbClr val="D6D3D1"/>
-            </a:solidFill>
-          </a:ln>
-        </p:spPr>
-        <p:style>
-          <a:lnRef idx="1">
-            <a:schemeClr val="accent1"/>
-          </a:lnRef>
-          <a:fillRef idx="3">
-            <a:schemeClr val="accent1"/>
-          </a:fillRef>
-          <a:effectRef idx="2">
-            <a:schemeClr val="accent1"/>
-          </a:effectRef>
-          <a:fontRef idx="minor">
-            <a:schemeClr val="lt1"/>
-          </a:fontRef>
-        </p:style>
-        <p:txBody>
-          <a:bodyPr rtlCol="0" anchor="ctr"/>
-          <a:lstStyle/>
-          <a:p>
-            <a:pPr algn="ctr"/>
-          </a:p>
-        </p:txBody>
-      </p:sp>
-      <p:sp>
-        <p:nvSpPr>
-          <p:cNvPr id="21" name="Rectangle 20"/>
-          <p:cNvSpPr/>
-          <p:nvPr/>
-        </p:nvSpPr>
-        <p:spPr>
-          <a:xfrm>
-            <a:off x="438912" y="4041648"/>
-            <a:ext cx="45720" cy="658368"/>
+          <a:effectLst/>
+        </p:spPr>
+        <p:style>
+          <a:lnRef idx="1">
+            <a:schemeClr val="accent1"/>
+          </a:lnRef>
+          <a:fillRef idx="3">
+            <a:schemeClr val="accent1"/>
+          </a:fillRef>
+          <a:effectRef idx="2">
+            <a:schemeClr val="accent1"/>
+          </a:effectRef>
+          <a:fontRef idx="minor">
+            <a:schemeClr val="lt1"/>
+          </a:fontRef>
+        </p:style>
+        <p:txBody>
+          <a:bodyPr rtlCol="0" anchor="ctr"/>
+          <a:lstStyle/>
+          <a:p>
+            <a:pPr algn="ctr"/>
+          </a:p>
+        </p:txBody>
+      </p:sp>
+      <p:sp>
+        <p:nvSpPr>
+          <p:cNvPr id="102" name="Rectangle 101"/>
+          <p:cNvSpPr/>
+          <p:nvPr/>
+        </p:nvSpPr>
+        <p:spPr>
+          <a:xfrm>
+            <a:off x="438912" y="1335024"/>
+            <a:ext cx="45720" cy="457200"/>
           </a:xfrm>
           <a:prstGeom prst="rect">
             <a:avLst/>
@@ -21184,242 +21030,118 @@
           <a:ln>
             <a:noFill/>
           </a:ln>
-        </p:spPr>
-        <p:style>
-          <a:lnRef idx="1">
-            <a:schemeClr val="accent1"/>
-          </a:lnRef>
-          <a:fillRef idx="3">
-            <a:schemeClr val="accent1"/>
-          </a:fillRef>
-          <a:effectRef idx="2">
-            <a:schemeClr val="accent1"/>
-          </a:effectRef>
-          <a:fontRef idx="minor">
-            <a:schemeClr val="lt1"/>
-          </a:fontRef>
-        </p:style>
-        <p:txBody>
-          <a:bodyPr rtlCol="0" anchor="ctr"/>
-          <a:lstStyle/>
-          <a:p>
-            <a:pPr algn="ctr"/>
-          </a:p>
-        </p:txBody>
-      </p:sp>
-      <p:sp>
-        <p:nvSpPr>
-          <p:cNvPr id="22" name="TextBox 21"/>
-          <p:cNvSpPr txBox="1"/>
-          <p:nvPr/>
-        </p:nvSpPr>
-        <p:spPr>
-          <a:xfrm>
-            <a:off x="603503" y="4096512"/>
-            <a:ext cx="2505456" cy="530352"/>
-          </a:xfrm>
-          <a:prstGeom prst="rect">
-            <a:avLst/>
-          </a:prstGeom>
-          <a:noFill/>
-        </p:spPr>
-        <p:txBody>
-          <a:bodyPr wrap="square">
-            <a:spAutoFit/>
-          </a:bodyPr>
-          <a:lstStyle/>
-          <a:p>
-            <a:pPr algn="l"/>
-            <a:r>
-              <a:rPr sz="850" b="0" i="0">
+          <a:effectLst/>
+        </p:spPr>
+        <p:style>
+          <a:lnRef idx="1">
+            <a:schemeClr val="accent1"/>
+          </a:lnRef>
+          <a:fillRef idx="3">
+            <a:schemeClr val="accent1"/>
+          </a:fillRef>
+          <a:effectRef idx="2">
+            <a:schemeClr val="accent1"/>
+          </a:effectRef>
+          <a:fontRef idx="minor">
+            <a:schemeClr val="lt1"/>
+          </a:fontRef>
+        </p:style>
+        <p:txBody>
+          <a:bodyPr rtlCol="0" anchor="ctr"/>
+          <a:lstStyle/>
+          <a:p>
+            <a:pPr algn="ctr"/>
+          </a:p>
+        </p:txBody>
+      </p:sp>
+      <p:sp>
+        <p:nvSpPr>
+          <p:cNvPr id="103" name="TextBox 102"/>
+          <p:cNvSpPr txBox="1"/>
+          <p:nvPr/>
+        </p:nvSpPr>
+        <p:spPr>
+          <a:xfrm>
+            <a:off x="603503" y="1362456"/>
+            <a:ext cx="2505456" cy="402336"/>
+          </a:xfrm>
+          <a:prstGeom prst="rect">
+            <a:avLst/>
+          </a:prstGeom>
+          <a:noFill/>
+        </p:spPr>
+        <p:txBody>
+          <a:bodyPr wrap="square" anchor="ctr" lIns="12700" rIns="12700" tIns="0" bIns="0">
+            <a:spAutoFit/>
+          </a:bodyPr>
+          <a:lstStyle/>
+          <a:p>
+            <a:r>
+              <a:rPr sz="850">
                 <a:solidFill>
                   <a:srgbClr val="1C1917"/>
                 </a:solidFill>
                 <a:latin typeface="Calibri"/>
               </a:rPr>
-              <a:t>Cooling-off with working-day countdown</a:t>
-            </a:r>
-          </a:p>
-        </p:txBody>
-      </p:sp>
-      <p:sp>
-        <p:nvSpPr>
-          <p:cNvPr id="23" name="Rectangle 22"/>
-          <p:cNvSpPr/>
-          <p:nvPr/>
-        </p:nvSpPr>
-        <p:spPr>
-          <a:xfrm>
-            <a:off x="438912" y="4718304"/>
-            <a:ext cx="2788920" cy="658368"/>
+              <a:t>Account management + mandate badges</a:t>
+            </a:r>
+          </a:p>
+        </p:txBody>
+      </p:sp>
+      <p:sp>
+        <p:nvSpPr>
+          <p:cNvPr id="104" name="Rectangle 103"/>
+          <p:cNvSpPr/>
+          <p:nvPr/>
+        </p:nvSpPr>
+        <p:spPr>
+          <a:xfrm>
+            <a:off x="438912" y="1883664"/>
+            <a:ext cx="2788920" cy="457200"/>
           </a:xfrm>
           <a:prstGeom prst="rect">
             <a:avLst/>
           </a:prstGeom>
           <a:solidFill>
             <a:srgbClr val="F5F5F4"/>
-          </a:solidFill>
-          <a:ln w="9525">
-            <a:solidFill>
-              <a:srgbClr val="D6D3D1"/>
-            </a:solidFill>
-          </a:ln>
-        </p:spPr>
-        <p:style>
-          <a:lnRef idx="1">
-            <a:schemeClr val="accent1"/>
-          </a:lnRef>
-          <a:fillRef idx="3">
-            <a:schemeClr val="accent1"/>
-          </a:fillRef>
-          <a:effectRef idx="2">
-            <a:schemeClr val="accent1"/>
-          </a:effectRef>
-          <a:fontRef idx="minor">
-            <a:schemeClr val="lt1"/>
-          </a:fontRef>
-        </p:style>
-        <p:txBody>
-          <a:bodyPr rtlCol="0" anchor="ctr"/>
-          <a:lstStyle/>
-          <a:p>
-            <a:pPr algn="ctr"/>
-          </a:p>
-        </p:txBody>
-      </p:sp>
-      <p:sp>
-        <p:nvSpPr>
-          <p:cNvPr id="24" name="Rectangle 23"/>
-          <p:cNvSpPr/>
-          <p:nvPr/>
-        </p:nvSpPr>
-        <p:spPr>
-          <a:xfrm>
-            <a:off x="438912" y="4718304"/>
-            <a:ext cx="45720" cy="658368"/>
-          </a:xfrm>
-          <a:prstGeom prst="rect">
-            <a:avLst/>
-          </a:prstGeom>
-          <a:solidFill>
-            <a:srgbClr val="DA291C"/>
           </a:solidFill>
           <a:ln>
             <a:noFill/>
           </a:ln>
-        </p:spPr>
-        <p:style>
-          <a:lnRef idx="1">
-            <a:schemeClr val="accent1"/>
-          </a:lnRef>
-          <a:fillRef idx="3">
-            <a:schemeClr val="accent1"/>
-          </a:fillRef>
-          <a:effectRef idx="2">
-            <a:schemeClr val="accent1"/>
-          </a:effectRef>
-          <a:fontRef idx="minor">
-            <a:schemeClr val="lt1"/>
-          </a:fontRef>
-        </p:style>
-        <p:txBody>
-          <a:bodyPr rtlCol="0" anchor="ctr"/>
-          <a:lstStyle/>
-          <a:p>
-            <a:pPr algn="ctr"/>
-          </a:p>
-        </p:txBody>
-      </p:sp>
-      <p:sp>
-        <p:nvSpPr>
-          <p:cNvPr id="25" name="TextBox 24"/>
-          <p:cNvSpPr txBox="1"/>
-          <p:nvPr/>
-        </p:nvSpPr>
-        <p:spPr>
-          <a:xfrm>
-            <a:off x="603503" y="4773168"/>
-            <a:ext cx="2505456" cy="530352"/>
-          </a:xfrm>
-          <a:prstGeom prst="rect">
-            <a:avLst/>
-          </a:prstGeom>
-          <a:noFill/>
-        </p:spPr>
-        <p:txBody>
-          <a:bodyPr wrap="square">
-            <a:spAutoFit/>
-          </a:bodyPr>
-          <a:lstStyle/>
-          <a:p>
-            <a:pPr algn="l"/>
-            <a:r>
-              <a:rPr sz="850" b="0" i="0">
-                <a:solidFill>
-                  <a:srgbClr val="1C1917"/>
-                </a:solidFill>
-                <a:latin typeface="Calibri"/>
-              </a:rPr>
-              <a:t>Stalled request RM escalation</a:t>
-            </a:r>
-          </a:p>
-        </p:txBody>
-      </p:sp>
-      <p:sp>
-        <p:nvSpPr>
-          <p:cNvPr id="26" name="Rectangle 25"/>
-          <p:cNvSpPr/>
-          <p:nvPr/>
-        </p:nvSpPr>
-        <p:spPr>
-          <a:xfrm>
-            <a:off x="438912" y="5394959"/>
-            <a:ext cx="2788920" cy="658368"/>
-          </a:xfrm>
-          <a:prstGeom prst="rect">
-            <a:avLst/>
-          </a:prstGeom>
-          <a:solidFill>
-            <a:srgbClr val="FFFFFF"/>
-          </a:solidFill>
-          <a:ln w="9525">
-            <a:solidFill>
-              <a:srgbClr val="D6D3D1"/>
-            </a:solidFill>
-          </a:ln>
-        </p:spPr>
-        <p:style>
-          <a:lnRef idx="1">
-            <a:schemeClr val="accent1"/>
-          </a:lnRef>
-          <a:fillRef idx="3">
-            <a:schemeClr val="accent1"/>
-          </a:fillRef>
-          <a:effectRef idx="2">
-            <a:schemeClr val="accent1"/>
-          </a:effectRef>
-          <a:fontRef idx="minor">
-            <a:schemeClr val="lt1"/>
-          </a:fontRef>
-        </p:style>
-        <p:txBody>
-          <a:bodyPr rtlCol="0" anchor="ctr"/>
-          <a:lstStyle/>
-          <a:p>
-            <a:pPr algn="ctr"/>
-          </a:p>
-        </p:txBody>
-      </p:sp>
-      <p:sp>
-        <p:nvSpPr>
-          <p:cNvPr id="27" name="Rectangle 26"/>
-          <p:cNvSpPr/>
-          <p:nvPr/>
-        </p:nvSpPr>
-        <p:spPr>
-          <a:xfrm>
-            <a:off x="438912" y="5394959"/>
-            <a:ext cx="45720" cy="658368"/>
+          <a:effectLst/>
+        </p:spPr>
+        <p:style>
+          <a:lnRef idx="1">
+            <a:schemeClr val="accent1"/>
+          </a:lnRef>
+          <a:fillRef idx="3">
+            <a:schemeClr val="accent1"/>
+          </a:fillRef>
+          <a:effectRef idx="2">
+            <a:schemeClr val="accent1"/>
+          </a:effectRef>
+          <a:fontRef idx="minor">
+            <a:schemeClr val="lt1"/>
+          </a:fontRef>
+        </p:style>
+        <p:txBody>
+          <a:bodyPr rtlCol="0" anchor="ctr"/>
+          <a:lstStyle/>
+          <a:p>
+            <a:pPr algn="ctr"/>
+          </a:p>
+        </p:txBody>
+      </p:sp>
+      <p:sp>
+        <p:nvSpPr>
+          <p:cNvPr id="105" name="Rectangle 104"/>
+          <p:cNvSpPr/>
+          <p:nvPr/>
+        </p:nvSpPr>
+        <p:spPr>
+          <a:xfrm>
+            <a:off x="438912" y="1883664"/>
+            <a:ext cx="45720" cy="457200"/>
           </a:xfrm>
           <a:prstGeom prst="rect">
             <a:avLst/>
@@ -21430,2876 +21152,3963 @@
           <a:ln>
             <a:noFill/>
           </a:ln>
-        </p:spPr>
-        <p:style>
-          <a:lnRef idx="1">
-            <a:schemeClr val="accent1"/>
-          </a:lnRef>
-          <a:fillRef idx="3">
-            <a:schemeClr val="accent1"/>
-          </a:fillRef>
-          <a:effectRef idx="2">
-            <a:schemeClr val="accent1"/>
-          </a:effectRef>
-          <a:fontRef idx="minor">
-            <a:schemeClr val="lt1"/>
-          </a:fontRef>
-        </p:style>
-        <p:txBody>
-          <a:bodyPr rtlCol="0" anchor="ctr"/>
-          <a:lstStyle/>
-          <a:p>
-            <a:pPr algn="ctr"/>
-          </a:p>
-        </p:txBody>
-      </p:sp>
-      <p:sp>
-        <p:nvSpPr>
-          <p:cNvPr id="28" name="TextBox 27"/>
-          <p:cNvSpPr txBox="1"/>
-          <p:nvPr/>
-        </p:nvSpPr>
-        <p:spPr>
-          <a:xfrm>
-            <a:off x="603503" y="5449823"/>
-            <a:ext cx="2505456" cy="530352"/>
-          </a:xfrm>
-          <a:prstGeom prst="rect">
-            <a:avLst/>
-          </a:prstGeom>
-          <a:noFill/>
-        </p:spPr>
-        <p:txBody>
-          <a:bodyPr wrap="square">
-            <a:spAutoFit/>
-          </a:bodyPr>
-          <a:lstStyle/>
-          <a:p>
-            <a:pPr algn="l"/>
-            <a:r>
-              <a:rPr sz="850" b="0" i="0">
+          <a:effectLst/>
+        </p:spPr>
+        <p:style>
+          <a:lnRef idx="1">
+            <a:schemeClr val="accent1"/>
+          </a:lnRef>
+          <a:fillRef idx="3">
+            <a:schemeClr val="accent1"/>
+          </a:fillRef>
+          <a:effectRef idx="2">
+            <a:schemeClr val="accent1"/>
+          </a:effectRef>
+          <a:fontRef idx="minor">
+            <a:schemeClr val="lt1"/>
+          </a:fontRef>
+        </p:style>
+        <p:txBody>
+          <a:bodyPr rtlCol="0" anchor="ctr"/>
+          <a:lstStyle/>
+          <a:p>
+            <a:pPr algn="ctr"/>
+          </a:p>
+        </p:txBody>
+      </p:sp>
+      <p:sp>
+        <p:nvSpPr>
+          <p:cNvPr id="106" name="TextBox 105"/>
+          <p:cNvSpPr txBox="1"/>
+          <p:nvPr/>
+        </p:nvSpPr>
+        <p:spPr>
+          <a:xfrm>
+            <a:off x="603503" y="1911095"/>
+            <a:ext cx="2505456" cy="402336"/>
+          </a:xfrm>
+          <a:prstGeom prst="rect">
+            <a:avLst/>
+          </a:prstGeom>
+          <a:noFill/>
+        </p:spPr>
+        <p:txBody>
+          <a:bodyPr wrap="square" anchor="ctr" lIns="12700" rIns="12700" tIns="0" bIns="0">
+            <a:spAutoFit/>
+          </a:bodyPr>
+          <a:lstStyle/>
+          <a:p>
+            <a:r>
+              <a:rPr sz="850">
                 <a:solidFill>
                   <a:srgbClr val="1C1917"/>
                 </a:solidFill>
                 <a:latin typeface="Calibri"/>
               </a:rPr>
-              <a:t>7-year immutable audit trail</a:t>
-            </a:r>
-          </a:p>
-        </p:txBody>
-      </p:sp>
-      <p:sp>
-        <p:nvSpPr>
-          <p:cNvPr id="29" name="Rectangle 28"/>
-          <p:cNvSpPr/>
-          <p:nvPr/>
-        </p:nvSpPr>
-        <p:spPr>
-          <a:xfrm>
-            <a:off x="3383280" y="1024128"/>
-            <a:ext cx="2788920" cy="310896"/>
-          </a:xfrm>
-          <a:prstGeom prst="rect">
-            <a:avLst/>
-          </a:prstGeom>
-          <a:solidFill>
-            <a:srgbClr val="1C1917"/>
+              <a:t>Dual-authorisation (Face ID / reject)</a:t>
+            </a:r>
+          </a:p>
+        </p:txBody>
+      </p:sp>
+      <p:sp>
+        <p:nvSpPr>
+          <p:cNvPr id="107" name="Rectangle 106"/>
+          <p:cNvSpPr/>
+          <p:nvPr/>
+        </p:nvSpPr>
+        <p:spPr>
+          <a:xfrm>
+            <a:off x="438912" y="2432304"/>
+            <a:ext cx="2788920" cy="457200"/>
+          </a:xfrm>
+          <a:prstGeom prst="rect">
+            <a:avLst/>
+          </a:prstGeom>
+          <a:solidFill>
+            <a:srgbClr val="FFFFFF"/>
           </a:solidFill>
           <a:ln>
             <a:noFill/>
           </a:ln>
-        </p:spPr>
-        <p:style>
-          <a:lnRef idx="1">
-            <a:schemeClr val="accent1"/>
-          </a:lnRef>
-          <a:fillRef idx="3">
-            <a:schemeClr val="accent1"/>
-          </a:fillRef>
-          <a:effectRef idx="2">
-            <a:schemeClr val="accent1"/>
-          </a:effectRef>
-          <a:fontRef idx="minor">
-            <a:schemeClr val="lt1"/>
-          </a:fontRef>
-        </p:style>
-        <p:txBody>
-          <a:bodyPr rtlCol="0" anchor="ctr"/>
-          <a:lstStyle/>
-          <a:p>
-            <a:pPr algn="ctr"/>
-          </a:p>
-        </p:txBody>
-      </p:sp>
-      <p:sp>
-        <p:nvSpPr>
-          <p:cNvPr id="30" name="TextBox 29"/>
-          <p:cNvSpPr txBox="1"/>
-          <p:nvPr/>
-        </p:nvSpPr>
-        <p:spPr>
-          <a:xfrm>
-            <a:off x="3493008" y="1042415"/>
-            <a:ext cx="2578608" cy="256032"/>
-          </a:xfrm>
-          <a:prstGeom prst="rect">
-            <a:avLst/>
-          </a:prstGeom>
-          <a:noFill/>
-        </p:spPr>
-        <p:txBody>
-          <a:bodyPr wrap="square">
-            <a:spAutoFit/>
-          </a:bodyPr>
-          <a:lstStyle/>
-          <a:p>
-            <a:pPr algn="l"/>
-            <a:r>
-              <a:rPr sz="800" b="1" i="0">
-                <a:solidFill>
-                  <a:srgbClr val="FFFFFF"/>
-                </a:solidFill>
-                <a:latin typeface="Calibri"/>
-              </a:rPr>
-              <a:t>PAPERLESS WORKFLOWS</a:t>
-            </a:r>
-          </a:p>
-        </p:txBody>
-      </p:sp>
-      <p:sp>
-        <p:nvSpPr>
-          <p:cNvPr id="31" name="Rectangle 30"/>
-          <p:cNvSpPr/>
-          <p:nvPr/>
-        </p:nvSpPr>
-        <p:spPr>
-          <a:xfrm>
-            <a:off x="3383280" y="1335024"/>
-            <a:ext cx="2788920" cy="658368"/>
-          </a:xfrm>
-          <a:prstGeom prst="rect">
-            <a:avLst/>
-          </a:prstGeom>
-          <a:solidFill>
-            <a:srgbClr val="FFFFFF"/>
-          </a:solidFill>
-          <a:ln w="9525">
-            <a:solidFill>
-              <a:srgbClr val="D6D3D1"/>
-            </a:solidFill>
-          </a:ln>
-        </p:spPr>
-        <p:style>
-          <a:lnRef idx="1">
-            <a:schemeClr val="accent1"/>
-          </a:lnRef>
-          <a:fillRef idx="3">
-            <a:schemeClr val="accent1"/>
-          </a:fillRef>
-          <a:effectRef idx="2">
-            <a:schemeClr val="accent1"/>
-          </a:effectRef>
-          <a:fontRef idx="minor">
-            <a:schemeClr val="lt1"/>
-          </a:fontRef>
-        </p:style>
-        <p:txBody>
-          <a:bodyPr rtlCol="0" anchor="ctr"/>
-          <a:lstStyle/>
-          <a:p>
-            <a:pPr algn="ctr"/>
-          </a:p>
-        </p:txBody>
-      </p:sp>
-      <p:sp>
-        <p:nvSpPr>
-          <p:cNvPr id="32" name="Rectangle 31"/>
-          <p:cNvSpPr/>
-          <p:nvPr/>
-        </p:nvSpPr>
-        <p:spPr>
-          <a:xfrm>
-            <a:off x="3383280" y="1335024"/>
-            <a:ext cx="45720" cy="658368"/>
-          </a:xfrm>
-          <a:prstGeom prst="rect">
-            <a:avLst/>
-          </a:prstGeom>
-          <a:solidFill>
-            <a:srgbClr val="1C1917"/>
+          <a:effectLst/>
+        </p:spPr>
+        <p:style>
+          <a:lnRef idx="1">
+            <a:schemeClr val="accent1"/>
+          </a:lnRef>
+          <a:fillRef idx="3">
+            <a:schemeClr val="accent1"/>
+          </a:fillRef>
+          <a:effectRef idx="2">
+            <a:schemeClr val="accent1"/>
+          </a:effectRef>
+          <a:fontRef idx="minor">
+            <a:schemeClr val="lt1"/>
+          </a:fontRef>
+        </p:style>
+        <p:txBody>
+          <a:bodyPr rtlCol="0" anchor="ctr"/>
+          <a:lstStyle/>
+          <a:p>
+            <a:pPr algn="ctr"/>
+          </a:p>
+        </p:txBody>
+      </p:sp>
+      <p:sp>
+        <p:nvSpPr>
+          <p:cNvPr id="108" name="Rectangle 107"/>
+          <p:cNvSpPr/>
+          <p:nvPr/>
+        </p:nvSpPr>
+        <p:spPr>
+          <a:xfrm>
+            <a:off x="438912" y="2432304"/>
+            <a:ext cx="45720" cy="457200"/>
+          </a:xfrm>
+          <a:prstGeom prst="rect">
+            <a:avLst/>
+          </a:prstGeom>
+          <a:solidFill>
+            <a:srgbClr val="DA291C"/>
           </a:solidFill>
           <a:ln>
             <a:noFill/>
           </a:ln>
-        </p:spPr>
-        <p:style>
-          <a:lnRef idx="1">
-            <a:schemeClr val="accent1"/>
-          </a:lnRef>
-          <a:fillRef idx="3">
-            <a:schemeClr val="accent1"/>
-          </a:fillRef>
-          <a:effectRef idx="2">
-            <a:schemeClr val="accent1"/>
-          </a:effectRef>
-          <a:fontRef idx="minor">
-            <a:schemeClr val="lt1"/>
-          </a:fontRef>
-        </p:style>
-        <p:txBody>
-          <a:bodyPr rtlCol="0" anchor="ctr"/>
-          <a:lstStyle/>
-          <a:p>
-            <a:pPr algn="ctr"/>
-          </a:p>
-        </p:txBody>
-      </p:sp>
-      <p:sp>
-        <p:nvSpPr>
-          <p:cNvPr id="33" name="TextBox 32"/>
-          <p:cNvSpPr txBox="1"/>
-          <p:nvPr/>
-        </p:nvSpPr>
-        <p:spPr>
-          <a:xfrm>
-            <a:off x="3547872" y="1389888"/>
-            <a:ext cx="2505456" cy="530352"/>
-          </a:xfrm>
-          <a:prstGeom prst="rect">
-            <a:avLst/>
-          </a:prstGeom>
-          <a:noFill/>
-        </p:spPr>
-        <p:txBody>
-          <a:bodyPr wrap="square">
-            <a:spAutoFit/>
-          </a:bodyPr>
-          <a:lstStyle/>
-          <a:p>
-            <a:pPr algn="l"/>
-            <a:r>
-              <a:rPr sz="850" b="0" i="0">
+          <a:effectLst/>
+        </p:spPr>
+        <p:style>
+          <a:lnRef idx="1">
+            <a:schemeClr val="accent1"/>
+          </a:lnRef>
+          <a:fillRef idx="3">
+            <a:schemeClr val="accent1"/>
+          </a:fillRef>
+          <a:effectRef idx="2">
+            <a:schemeClr val="accent1"/>
+          </a:effectRef>
+          <a:fontRef idx="minor">
+            <a:schemeClr val="lt1"/>
+          </a:fontRef>
+        </p:style>
+        <p:txBody>
+          <a:bodyPr rtlCol="0" anchor="ctr"/>
+          <a:lstStyle/>
+          <a:p>
+            <a:pPr algn="ctr"/>
+          </a:p>
+        </p:txBody>
+      </p:sp>
+      <p:sp>
+        <p:nvSpPr>
+          <p:cNvPr id="109" name="TextBox 108"/>
+          <p:cNvSpPr txBox="1"/>
+          <p:nvPr/>
+        </p:nvSpPr>
+        <p:spPr>
+          <a:xfrm>
+            <a:off x="603503" y="2459736"/>
+            <a:ext cx="2505456" cy="402336"/>
+          </a:xfrm>
+          <a:prstGeom prst="rect">
+            <a:avLst/>
+          </a:prstGeom>
+          <a:noFill/>
+        </p:spPr>
+        <p:txBody>
+          <a:bodyPr wrap="square" anchor="ctr" lIns="12700" rIns="12700" tIns="0" bIns="0">
+            <a:spAutoFit/>
+          </a:bodyPr>
+          <a:lstStyle/>
+          <a:p>
+            <a:r>
+              <a:rPr sz="850">
                 <a:solidFill>
                   <a:srgbClr val="1C1917"/>
                 </a:solidFill>
                 <a:latin typeface="Calibri"/>
               </a:rPr>
-              <a:t>Account closure + Confirmation of Payee</a:t>
-            </a:r>
-          </a:p>
-        </p:txBody>
-      </p:sp>
-      <p:sp>
-        <p:nvSpPr>
-          <p:cNvPr id="34" name="Rectangle 33"/>
-          <p:cNvSpPr/>
-          <p:nvPr/>
-        </p:nvSpPr>
-        <p:spPr>
-          <a:xfrm>
-            <a:off x="3383280" y="2011680"/>
-            <a:ext cx="2788920" cy="658368"/>
+              <a:t>Per-account signing rules (Any-1 / 2 / All)</a:t>
+            </a:r>
+          </a:p>
+        </p:txBody>
+      </p:sp>
+      <p:sp>
+        <p:nvSpPr>
+          <p:cNvPr id="110" name="Rectangle 109"/>
+          <p:cNvSpPr/>
+          <p:nvPr/>
+        </p:nvSpPr>
+        <p:spPr>
+          <a:xfrm>
+            <a:off x="438912" y="2980944"/>
+            <a:ext cx="2788920" cy="457200"/>
           </a:xfrm>
           <a:prstGeom prst="rect">
             <a:avLst/>
           </a:prstGeom>
           <a:solidFill>
             <a:srgbClr val="F5F5F4"/>
-          </a:solidFill>
-          <a:ln w="9525">
-            <a:solidFill>
-              <a:srgbClr val="D6D3D1"/>
-            </a:solidFill>
-          </a:ln>
-        </p:spPr>
-        <p:style>
-          <a:lnRef idx="1">
-            <a:schemeClr val="accent1"/>
-          </a:lnRef>
-          <a:fillRef idx="3">
-            <a:schemeClr val="accent1"/>
-          </a:fillRef>
-          <a:effectRef idx="2">
-            <a:schemeClr val="accent1"/>
-          </a:effectRef>
-          <a:fontRef idx="minor">
-            <a:schemeClr val="lt1"/>
-          </a:fontRef>
-        </p:style>
-        <p:txBody>
-          <a:bodyPr rtlCol="0" anchor="ctr"/>
-          <a:lstStyle/>
-          <a:p>
-            <a:pPr algn="ctr"/>
-          </a:p>
-        </p:txBody>
-      </p:sp>
-      <p:sp>
-        <p:nvSpPr>
-          <p:cNvPr id="35" name="Rectangle 34"/>
-          <p:cNvSpPr/>
-          <p:nvPr/>
-        </p:nvSpPr>
-        <p:spPr>
-          <a:xfrm>
-            <a:off x="3383280" y="2011680"/>
-            <a:ext cx="45720" cy="658368"/>
-          </a:xfrm>
-          <a:prstGeom prst="rect">
-            <a:avLst/>
-          </a:prstGeom>
-          <a:solidFill>
-            <a:srgbClr val="1C1917"/>
           </a:solidFill>
           <a:ln>
             <a:noFill/>
           </a:ln>
-        </p:spPr>
-        <p:style>
-          <a:lnRef idx="1">
-            <a:schemeClr val="accent1"/>
-          </a:lnRef>
-          <a:fillRef idx="3">
-            <a:schemeClr val="accent1"/>
-          </a:fillRef>
-          <a:effectRef idx="2">
-            <a:schemeClr val="accent1"/>
-          </a:effectRef>
-          <a:fontRef idx="minor">
-            <a:schemeClr val="lt1"/>
-          </a:fontRef>
-        </p:style>
-        <p:txBody>
-          <a:bodyPr rtlCol="0" anchor="ctr"/>
-          <a:lstStyle/>
-          <a:p>
-            <a:pPr algn="ctr"/>
-          </a:p>
-        </p:txBody>
-      </p:sp>
-      <p:sp>
-        <p:nvSpPr>
-          <p:cNvPr id="36" name="TextBox 35"/>
-          <p:cNvSpPr txBox="1"/>
-          <p:nvPr/>
-        </p:nvSpPr>
-        <p:spPr>
-          <a:xfrm>
-            <a:off x="3547872" y="2066543"/>
-            <a:ext cx="2505456" cy="530352"/>
-          </a:xfrm>
-          <a:prstGeom prst="rect">
-            <a:avLst/>
-          </a:prstGeom>
-          <a:noFill/>
-        </p:spPr>
-        <p:txBody>
-          <a:bodyPr wrap="square">
-            <a:spAutoFit/>
-          </a:bodyPr>
-          <a:lstStyle/>
-          <a:p>
-            <a:pPr algn="l"/>
-            <a:r>
-              <a:rPr sz="850" b="0" i="0">
-                <a:solidFill>
-                  <a:srgbClr val="1C1917"/>
-                </a:solidFill>
-                <a:latin typeface="Calibri"/>
-              </a:rPr>
-              <a:t>Partner unreachable (4 regulatory paths)</a:t>
-            </a:r>
-          </a:p>
-        </p:txBody>
-      </p:sp>
-      <p:sp>
-        <p:nvSpPr>
-          <p:cNvPr id="37" name="Rectangle 36"/>
-          <p:cNvSpPr/>
-          <p:nvPr/>
-        </p:nvSpPr>
-        <p:spPr>
-          <a:xfrm>
-            <a:off x="3383280" y="2688336"/>
-            <a:ext cx="2788920" cy="658368"/>
-          </a:xfrm>
-          <a:prstGeom prst="rect">
-            <a:avLst/>
-          </a:prstGeom>
-          <a:solidFill>
-            <a:srgbClr val="FFFFFF"/>
-          </a:solidFill>
-          <a:ln w="9525">
-            <a:solidFill>
-              <a:srgbClr val="D6D3D1"/>
-            </a:solidFill>
-          </a:ln>
-        </p:spPr>
-        <p:style>
-          <a:lnRef idx="1">
-            <a:schemeClr val="accent1"/>
-          </a:lnRef>
-          <a:fillRef idx="3">
-            <a:schemeClr val="accent1"/>
-          </a:fillRef>
-          <a:effectRef idx="2">
-            <a:schemeClr val="accent1"/>
-          </a:effectRef>
-          <a:fontRef idx="minor">
-            <a:schemeClr val="lt1"/>
-          </a:fontRef>
-        </p:style>
-        <p:txBody>
-          <a:bodyPr rtlCol="0" anchor="ctr"/>
-          <a:lstStyle/>
-          <a:p>
-            <a:pPr algn="ctr"/>
-          </a:p>
-        </p:txBody>
-      </p:sp>
-      <p:sp>
-        <p:nvSpPr>
-          <p:cNvPr id="38" name="Rectangle 37"/>
-          <p:cNvSpPr/>
-          <p:nvPr/>
-        </p:nvSpPr>
-        <p:spPr>
-          <a:xfrm>
-            <a:off x="3383280" y="2688336"/>
-            <a:ext cx="45720" cy="658368"/>
-          </a:xfrm>
-          <a:prstGeom prst="rect">
-            <a:avLst/>
-          </a:prstGeom>
-          <a:solidFill>
-            <a:srgbClr val="1C1917"/>
+          <a:effectLst/>
+        </p:spPr>
+        <p:style>
+          <a:lnRef idx="1">
+            <a:schemeClr val="accent1"/>
+          </a:lnRef>
+          <a:fillRef idx="3">
+            <a:schemeClr val="accent1"/>
+          </a:fillRef>
+          <a:effectRef idx="2">
+            <a:schemeClr val="accent1"/>
+          </a:effectRef>
+          <a:fontRef idx="minor">
+            <a:schemeClr val="lt1"/>
+          </a:fontRef>
+        </p:style>
+        <p:txBody>
+          <a:bodyPr rtlCol="0" anchor="ctr"/>
+          <a:lstStyle/>
+          <a:p>
+            <a:pPr algn="ctr"/>
+          </a:p>
+        </p:txBody>
+      </p:sp>
+      <p:sp>
+        <p:nvSpPr>
+          <p:cNvPr id="111" name="Rectangle 110"/>
+          <p:cNvSpPr/>
+          <p:nvPr/>
+        </p:nvSpPr>
+        <p:spPr>
+          <a:xfrm>
+            <a:off x="438912" y="2980944"/>
+            <a:ext cx="45720" cy="457200"/>
+          </a:xfrm>
+          <a:prstGeom prst="rect">
+            <a:avLst/>
+          </a:prstGeom>
+          <a:solidFill>
+            <a:srgbClr val="DA291C"/>
           </a:solidFill>
           <a:ln>
             <a:noFill/>
           </a:ln>
-        </p:spPr>
-        <p:style>
-          <a:lnRef idx="1">
-            <a:schemeClr val="accent1"/>
-          </a:lnRef>
-          <a:fillRef idx="3">
-            <a:schemeClr val="accent1"/>
-          </a:fillRef>
-          <a:effectRef idx="2">
-            <a:schemeClr val="accent1"/>
-          </a:effectRef>
-          <a:fontRef idx="minor">
-            <a:schemeClr val="lt1"/>
-          </a:fontRef>
-        </p:style>
-        <p:txBody>
-          <a:bodyPr rtlCol="0" anchor="ctr"/>
-          <a:lstStyle/>
-          <a:p>
-            <a:pPr algn="ctr"/>
-          </a:p>
-        </p:txBody>
-      </p:sp>
-      <p:sp>
-        <p:nvSpPr>
-          <p:cNvPr id="39" name="TextBox 38"/>
-          <p:cNvSpPr txBox="1"/>
-          <p:nvPr/>
-        </p:nvSpPr>
-        <p:spPr>
-          <a:xfrm>
-            <a:off x="3547872" y="2743200"/>
-            <a:ext cx="2505456" cy="530352"/>
-          </a:xfrm>
-          <a:prstGeom prst="rect">
-            <a:avLst/>
-          </a:prstGeom>
-          <a:noFill/>
-        </p:spPr>
-        <p:txBody>
-          <a:bodyPr wrap="square">
-            <a:spAutoFit/>
-          </a:bodyPr>
-          <a:lstStyle/>
-          <a:p>
-            <a:pPr algn="l"/>
-            <a:r>
-              <a:rPr sz="850" b="0" i="0">
+          <a:effectLst/>
+        </p:spPr>
+        <p:style>
+          <a:lnRef idx="1">
+            <a:schemeClr val="accent1"/>
+          </a:lnRef>
+          <a:fillRef idx="3">
+            <a:schemeClr val="accent1"/>
+          </a:fillRef>
+          <a:effectRef idx="2">
+            <a:schemeClr val="accent1"/>
+          </a:effectRef>
+          <a:fontRef idx="minor">
+            <a:schemeClr val="lt1"/>
+          </a:fontRef>
+        </p:style>
+        <p:txBody>
+          <a:bodyPr rtlCol="0" anchor="ctr"/>
+          <a:lstStyle/>
+          <a:p>
+            <a:pPr algn="ctr"/>
+          </a:p>
+        </p:txBody>
+      </p:sp>
+      <p:sp>
+        <p:nvSpPr>
+          <p:cNvPr id="112" name="TextBox 111"/>
+          <p:cNvSpPr txBox="1"/>
+          <p:nvPr/>
+        </p:nvSpPr>
+        <p:spPr>
+          <a:xfrm>
+            <a:off x="603503" y="3008375"/>
+            <a:ext cx="2505456" cy="402336"/>
+          </a:xfrm>
+          <a:prstGeom prst="rect">
+            <a:avLst/>
+          </a:prstGeom>
+          <a:noFill/>
+        </p:spPr>
+        <p:txBody>
+          <a:bodyPr wrap="square" anchor="ctr" lIns="12700" rIns="12700" tIns="0" bIns="0">
+            <a:spAutoFit/>
+          </a:bodyPr>
+          <a:lstStyle/>
+          <a:p>
+            <a:r>
+              <a:rPr sz="850">
                 <a:solidFill>
                   <a:srgbClr val="1C1917"/>
                 </a:solidFill>
                 <a:latin typeface="Calibri"/>
               </a:rPr>
-              <a:t>Mandate changes + KYC / KYB</a:t>
-            </a:r>
-          </a:p>
-        </p:txBody>
-      </p:sp>
-      <p:sp>
-        <p:nvSpPr>
-          <p:cNvPr id="40" name="Rectangle 39"/>
-          <p:cNvSpPr/>
-          <p:nvPr/>
-        </p:nvSpPr>
-        <p:spPr>
-          <a:xfrm>
-            <a:off x="3383280" y="3364991"/>
-            <a:ext cx="2788920" cy="658368"/>
-          </a:xfrm>
-          <a:prstGeom prst="rect">
-            <a:avLst/>
-          </a:prstGeom>
-          <a:solidFill>
-            <a:srgbClr val="F5F5F4"/>
-          </a:solidFill>
-          <a:ln w="9525">
-            <a:solidFill>
-              <a:srgbClr val="D6D3D1"/>
-            </a:solidFill>
-          </a:ln>
-        </p:spPr>
-        <p:style>
-          <a:lnRef idx="1">
-            <a:schemeClr val="accent1"/>
-          </a:lnRef>
-          <a:fillRef idx="3">
-            <a:schemeClr val="accent1"/>
-          </a:fillRef>
-          <a:effectRef idx="2">
-            <a:schemeClr val="accent1"/>
-          </a:effectRef>
-          <a:fontRef idx="minor">
-            <a:schemeClr val="lt1"/>
-          </a:fontRef>
-        </p:style>
-        <p:txBody>
-          <a:bodyPr rtlCol="0" anchor="ctr"/>
-          <a:lstStyle/>
-          <a:p>
-            <a:pPr algn="ctr"/>
-          </a:p>
-        </p:txBody>
-      </p:sp>
-      <p:sp>
-        <p:nvSpPr>
-          <p:cNvPr id="41" name="Rectangle 40"/>
-          <p:cNvSpPr/>
-          <p:nvPr/>
-        </p:nvSpPr>
-        <p:spPr>
-          <a:xfrm>
-            <a:off x="3383280" y="3364991"/>
-            <a:ext cx="45720" cy="658368"/>
-          </a:xfrm>
-          <a:prstGeom prst="rect">
-            <a:avLst/>
-          </a:prstGeom>
-          <a:solidFill>
-            <a:srgbClr val="1C1917"/>
+              <a:t>7 entity types — full compliance paths</a:t>
+            </a:r>
+          </a:p>
+        </p:txBody>
+      </p:sp>
+      <p:sp>
+        <p:nvSpPr>
+          <p:cNvPr id="113" name="Rectangle 112"/>
+          <p:cNvSpPr/>
+          <p:nvPr/>
+        </p:nvSpPr>
+        <p:spPr>
+          <a:xfrm>
+            <a:off x="438912" y="3529584"/>
+            <a:ext cx="2788920" cy="457200"/>
+          </a:xfrm>
+          <a:prstGeom prst="rect">
+            <a:avLst/>
+          </a:prstGeom>
+          <a:solidFill>
+            <a:srgbClr val="FFFFFF"/>
           </a:solidFill>
           <a:ln>
             <a:noFill/>
           </a:ln>
-        </p:spPr>
-        <p:style>
-          <a:lnRef idx="1">
-            <a:schemeClr val="accent1"/>
-          </a:lnRef>
-          <a:fillRef idx="3">
-            <a:schemeClr val="accent1"/>
-          </a:fillRef>
-          <a:effectRef idx="2">
-            <a:schemeClr val="accent1"/>
-          </a:effectRef>
-          <a:fontRef idx="minor">
-            <a:schemeClr val="lt1"/>
-          </a:fontRef>
-        </p:style>
-        <p:txBody>
-          <a:bodyPr rtlCol="0" anchor="ctr"/>
-          <a:lstStyle/>
-          <a:p>
-            <a:pPr algn="ctr"/>
-          </a:p>
-        </p:txBody>
-      </p:sp>
-      <p:sp>
-        <p:nvSpPr>
-          <p:cNvPr id="42" name="TextBox 41"/>
-          <p:cNvSpPr txBox="1"/>
-          <p:nvPr/>
-        </p:nvSpPr>
-        <p:spPr>
-          <a:xfrm>
-            <a:off x="3547872" y="3419856"/>
-            <a:ext cx="2505456" cy="530352"/>
-          </a:xfrm>
-          <a:prstGeom prst="rect">
-            <a:avLst/>
-          </a:prstGeom>
-          <a:noFill/>
-        </p:spPr>
-        <p:txBody>
-          <a:bodyPr wrap="square">
-            <a:spAutoFit/>
-          </a:bodyPr>
-          <a:lstStyle/>
-          <a:p>
-            <a:pPr algn="l"/>
-            <a:r>
-              <a:rPr sz="850" b="0" i="0">
-                <a:solidFill>
-                  <a:srgbClr val="1C1917"/>
-                </a:solidFill>
-                <a:latin typeface="Calibri"/>
-              </a:rPr>
-              <a:t>Bulk payments / wages + payee book</a:t>
-            </a:r>
-          </a:p>
-        </p:txBody>
-      </p:sp>
-      <p:sp>
-        <p:nvSpPr>
-          <p:cNvPr id="43" name="Rectangle 42"/>
-          <p:cNvSpPr/>
-          <p:nvPr/>
-        </p:nvSpPr>
-        <p:spPr>
-          <a:xfrm>
-            <a:off x="3383280" y="4041648"/>
-            <a:ext cx="2788920" cy="658368"/>
-          </a:xfrm>
-          <a:prstGeom prst="rect">
-            <a:avLst/>
-          </a:prstGeom>
-          <a:solidFill>
-            <a:srgbClr val="FFFFFF"/>
-          </a:solidFill>
-          <a:ln w="9525">
-            <a:solidFill>
-              <a:srgbClr val="D6D3D1"/>
-            </a:solidFill>
-          </a:ln>
-        </p:spPr>
-        <p:style>
-          <a:lnRef idx="1">
-            <a:schemeClr val="accent1"/>
-          </a:lnRef>
-          <a:fillRef idx="3">
-            <a:schemeClr val="accent1"/>
-          </a:fillRef>
-          <a:effectRef idx="2">
-            <a:schemeClr val="accent1"/>
-          </a:effectRef>
-          <a:fontRef idx="minor">
-            <a:schemeClr val="lt1"/>
-          </a:fontRef>
-        </p:style>
-        <p:txBody>
-          <a:bodyPr rtlCol="0" anchor="ctr"/>
-          <a:lstStyle/>
-          <a:p>
-            <a:pPr algn="ctr"/>
-          </a:p>
-        </p:txBody>
-      </p:sp>
-      <p:sp>
-        <p:nvSpPr>
-          <p:cNvPr id="44" name="Rectangle 43"/>
-          <p:cNvSpPr/>
-          <p:nvPr/>
-        </p:nvSpPr>
-        <p:spPr>
-          <a:xfrm>
-            <a:off x="3383280" y="4041648"/>
-            <a:ext cx="45720" cy="658368"/>
-          </a:xfrm>
-          <a:prstGeom prst="rect">
-            <a:avLst/>
-          </a:prstGeom>
-          <a:solidFill>
-            <a:srgbClr val="1C1917"/>
+          <a:effectLst/>
+        </p:spPr>
+        <p:style>
+          <a:lnRef idx="1">
+            <a:schemeClr val="accent1"/>
+          </a:lnRef>
+          <a:fillRef idx="3">
+            <a:schemeClr val="accent1"/>
+          </a:fillRef>
+          <a:effectRef idx="2">
+            <a:schemeClr val="accent1"/>
+          </a:effectRef>
+          <a:fontRef idx="minor">
+            <a:schemeClr val="lt1"/>
+          </a:fontRef>
+        </p:style>
+        <p:txBody>
+          <a:bodyPr rtlCol="0" anchor="ctr"/>
+          <a:lstStyle/>
+          <a:p>
+            <a:pPr algn="ctr"/>
+          </a:p>
+        </p:txBody>
+      </p:sp>
+      <p:sp>
+        <p:nvSpPr>
+          <p:cNvPr id="114" name="Rectangle 113"/>
+          <p:cNvSpPr/>
+          <p:nvPr/>
+        </p:nvSpPr>
+        <p:spPr>
+          <a:xfrm>
+            <a:off x="438912" y="3529584"/>
+            <a:ext cx="45720" cy="457200"/>
+          </a:xfrm>
+          <a:prstGeom prst="rect">
+            <a:avLst/>
+          </a:prstGeom>
+          <a:solidFill>
+            <a:srgbClr val="DA291C"/>
           </a:solidFill>
           <a:ln>
             <a:noFill/>
           </a:ln>
-        </p:spPr>
-        <p:style>
-          <a:lnRef idx="1">
-            <a:schemeClr val="accent1"/>
-          </a:lnRef>
-          <a:fillRef idx="3">
-            <a:schemeClr val="accent1"/>
-          </a:fillRef>
-          <a:effectRef idx="2">
-            <a:schemeClr val="accent1"/>
-          </a:effectRef>
-          <a:fontRef idx="minor">
-            <a:schemeClr val="lt1"/>
-          </a:fontRef>
-        </p:style>
-        <p:txBody>
-          <a:bodyPr rtlCol="0" anchor="ctr"/>
-          <a:lstStyle/>
-          <a:p>
-            <a:pPr algn="ctr"/>
-          </a:p>
-        </p:txBody>
-      </p:sp>
-      <p:sp>
-        <p:nvSpPr>
-          <p:cNvPr id="45" name="TextBox 44"/>
-          <p:cNvSpPr txBox="1"/>
-          <p:nvPr/>
-        </p:nvSpPr>
-        <p:spPr>
-          <a:xfrm>
-            <a:off x="3547872" y="4096512"/>
-            <a:ext cx="2505456" cy="530352"/>
-          </a:xfrm>
-          <a:prstGeom prst="rect">
-            <a:avLst/>
-          </a:prstGeom>
-          <a:noFill/>
-        </p:spPr>
-        <p:txBody>
-          <a:bodyPr wrap="square">
-            <a:spAutoFit/>
-          </a:bodyPr>
-          <a:lstStyle/>
-          <a:p>
-            <a:pPr algn="l"/>
-            <a:r>
-              <a:rPr sz="850" b="0" i="0">
+          <a:effectLst/>
+        </p:spPr>
+        <p:style>
+          <a:lnRef idx="1">
+            <a:schemeClr val="accent1"/>
+          </a:lnRef>
+          <a:fillRef idx="3">
+            <a:schemeClr val="accent1"/>
+          </a:fillRef>
+          <a:effectRef idx="2">
+            <a:schemeClr val="accent1"/>
+          </a:effectRef>
+          <a:fontRef idx="minor">
+            <a:schemeClr val="lt1"/>
+          </a:fontRef>
+        </p:style>
+        <p:txBody>
+          <a:bodyPr rtlCol="0" anchor="ctr"/>
+          <a:lstStyle/>
+          <a:p>
+            <a:pPr algn="ctr"/>
+          </a:p>
+        </p:txBody>
+      </p:sp>
+      <p:sp>
+        <p:nvSpPr>
+          <p:cNvPr id="115" name="TextBox 114"/>
+          <p:cNvSpPr txBox="1"/>
+          <p:nvPr/>
+        </p:nvSpPr>
+        <p:spPr>
+          <a:xfrm>
+            <a:off x="603503" y="3557015"/>
+            <a:ext cx="2505456" cy="402336"/>
+          </a:xfrm>
+          <a:prstGeom prst="rect">
+            <a:avLst/>
+          </a:prstGeom>
+          <a:noFill/>
+        </p:spPr>
+        <p:txBody>
+          <a:bodyPr wrap="square" anchor="ctr" lIns="12700" rIns="12700" tIns="0" bIns="0">
+            <a:spAutoFit/>
+          </a:bodyPr>
+          <a:lstStyle/>
+          <a:p>
+            <a:r>
+              <a:rPr sz="850">
                 <a:solidFill>
                   <a:srgbClr val="1C1917"/>
                 </a:solidFill>
                 <a:latin typeface="Calibri"/>
               </a:rPr>
-              <a:t>Business details update</a:t>
-            </a:r>
-          </a:p>
-        </p:txBody>
-      </p:sp>
-      <p:sp>
-        <p:nvSpPr>
-          <p:cNvPr id="46" name="Rectangle 45"/>
-          <p:cNvSpPr/>
-          <p:nvPr/>
-        </p:nvSpPr>
-        <p:spPr>
-          <a:xfrm>
-            <a:off x="3383280" y="4718304"/>
-            <a:ext cx="2788920" cy="658368"/>
+              <a:t>Cooling-off with working-day countdown</a:t>
+            </a:r>
+          </a:p>
+        </p:txBody>
+      </p:sp>
+      <p:sp>
+        <p:nvSpPr>
+          <p:cNvPr id="116" name="Rectangle 115"/>
+          <p:cNvSpPr/>
+          <p:nvPr/>
+        </p:nvSpPr>
+        <p:spPr>
+          <a:xfrm>
+            <a:off x="438912" y="4078224"/>
+            <a:ext cx="2788920" cy="457200"/>
           </a:xfrm>
           <a:prstGeom prst="rect">
             <a:avLst/>
           </a:prstGeom>
           <a:solidFill>
             <a:srgbClr val="F5F5F4"/>
-          </a:solidFill>
-          <a:ln w="9525">
-            <a:solidFill>
-              <a:srgbClr val="D6D3D1"/>
-            </a:solidFill>
-          </a:ln>
-        </p:spPr>
-        <p:style>
-          <a:lnRef idx="1">
-            <a:schemeClr val="accent1"/>
-          </a:lnRef>
-          <a:fillRef idx="3">
-            <a:schemeClr val="accent1"/>
-          </a:fillRef>
-          <a:effectRef idx="2">
-            <a:schemeClr val="accent1"/>
-          </a:effectRef>
-          <a:fontRef idx="minor">
-            <a:schemeClr val="lt1"/>
-          </a:fontRef>
-        </p:style>
-        <p:txBody>
-          <a:bodyPr rtlCol="0" anchor="ctr"/>
-          <a:lstStyle/>
-          <a:p>
-            <a:pPr algn="ctr"/>
-          </a:p>
-        </p:txBody>
-      </p:sp>
-      <p:sp>
-        <p:nvSpPr>
-          <p:cNvPr id="47" name="Rectangle 46"/>
-          <p:cNvSpPr/>
-          <p:nvPr/>
-        </p:nvSpPr>
-        <p:spPr>
-          <a:xfrm>
-            <a:off x="3383280" y="4718304"/>
-            <a:ext cx="45720" cy="658368"/>
-          </a:xfrm>
-          <a:prstGeom prst="rect">
-            <a:avLst/>
-          </a:prstGeom>
-          <a:solidFill>
-            <a:srgbClr val="1C1917"/>
           </a:solidFill>
           <a:ln>
             <a:noFill/>
           </a:ln>
-        </p:spPr>
-        <p:style>
-          <a:lnRef idx="1">
-            <a:schemeClr val="accent1"/>
-          </a:lnRef>
-          <a:fillRef idx="3">
-            <a:schemeClr val="accent1"/>
-          </a:fillRef>
-          <a:effectRef idx="2">
-            <a:schemeClr val="accent1"/>
-          </a:effectRef>
-          <a:fontRef idx="minor">
-            <a:schemeClr val="lt1"/>
-          </a:fontRef>
-        </p:style>
-        <p:txBody>
-          <a:bodyPr rtlCol="0" anchor="ctr"/>
-          <a:lstStyle/>
-          <a:p>
-            <a:pPr algn="ctr"/>
-          </a:p>
-        </p:txBody>
-      </p:sp>
-      <p:sp>
-        <p:nvSpPr>
-          <p:cNvPr id="48" name="TextBox 47"/>
-          <p:cNvSpPr txBox="1"/>
-          <p:nvPr/>
-        </p:nvSpPr>
-        <p:spPr>
-          <a:xfrm>
-            <a:off x="3547872" y="4773168"/>
-            <a:ext cx="2505456" cy="530352"/>
-          </a:xfrm>
-          <a:prstGeom prst="rect">
-            <a:avLst/>
-          </a:prstGeom>
-          <a:noFill/>
-        </p:spPr>
-        <p:txBody>
-          <a:bodyPr wrap="square">
-            <a:spAutoFit/>
-          </a:bodyPr>
-          <a:lstStyle/>
-          <a:p>
-            <a:pPr algn="l"/>
-            <a:r>
-              <a:rPr sz="850" b="0" i="0">
-                <a:solidFill>
-                  <a:srgbClr val="1C1917"/>
-                </a:solidFill>
-                <a:latin typeface="Calibri"/>
-              </a:rPr>
-              <a:t>Dormant account reactivation</a:t>
-            </a:r>
-          </a:p>
-        </p:txBody>
-      </p:sp>
-      <p:sp>
-        <p:nvSpPr>
-          <p:cNvPr id="49" name="Rectangle 48"/>
-          <p:cNvSpPr/>
-          <p:nvPr/>
-        </p:nvSpPr>
-        <p:spPr>
-          <a:xfrm>
-            <a:off x="3383280" y="5394959"/>
-            <a:ext cx="2788920" cy="658368"/>
-          </a:xfrm>
-          <a:prstGeom prst="rect">
-            <a:avLst/>
-          </a:prstGeom>
-          <a:solidFill>
-            <a:srgbClr val="FFFFFF"/>
-          </a:solidFill>
-          <a:ln w="9525">
-            <a:solidFill>
-              <a:srgbClr val="D6D3D1"/>
-            </a:solidFill>
-          </a:ln>
-        </p:spPr>
-        <p:style>
-          <a:lnRef idx="1">
-            <a:schemeClr val="accent1"/>
-          </a:lnRef>
-          <a:fillRef idx="3">
-            <a:schemeClr val="accent1"/>
-          </a:fillRef>
-          <a:effectRef idx="2">
-            <a:schemeClr val="accent1"/>
-          </a:effectRef>
-          <a:fontRef idx="minor">
-            <a:schemeClr val="lt1"/>
-          </a:fontRef>
-        </p:style>
-        <p:txBody>
-          <a:bodyPr rtlCol="0" anchor="ctr"/>
-          <a:lstStyle/>
-          <a:p>
-            <a:pPr algn="ctr"/>
-          </a:p>
-        </p:txBody>
-      </p:sp>
-      <p:sp>
-        <p:nvSpPr>
-          <p:cNvPr id="50" name="Rectangle 49"/>
-          <p:cNvSpPr/>
-          <p:nvPr/>
-        </p:nvSpPr>
-        <p:spPr>
-          <a:xfrm>
-            <a:off x="3383280" y="5394959"/>
-            <a:ext cx="45720" cy="658368"/>
-          </a:xfrm>
-          <a:prstGeom prst="rect">
-            <a:avLst/>
-          </a:prstGeom>
-          <a:solidFill>
-            <a:srgbClr val="1C1917"/>
+          <a:effectLst/>
+        </p:spPr>
+        <p:style>
+          <a:lnRef idx="1">
+            <a:schemeClr val="accent1"/>
+          </a:lnRef>
+          <a:fillRef idx="3">
+            <a:schemeClr val="accent1"/>
+          </a:fillRef>
+          <a:effectRef idx="2">
+            <a:schemeClr val="accent1"/>
+          </a:effectRef>
+          <a:fontRef idx="minor">
+            <a:schemeClr val="lt1"/>
+          </a:fontRef>
+        </p:style>
+        <p:txBody>
+          <a:bodyPr rtlCol="0" anchor="ctr"/>
+          <a:lstStyle/>
+          <a:p>
+            <a:pPr algn="ctr"/>
+          </a:p>
+        </p:txBody>
+      </p:sp>
+      <p:sp>
+        <p:nvSpPr>
+          <p:cNvPr id="117" name="Rectangle 116"/>
+          <p:cNvSpPr/>
+          <p:nvPr/>
+        </p:nvSpPr>
+        <p:spPr>
+          <a:xfrm>
+            <a:off x="438912" y="4078224"/>
+            <a:ext cx="45720" cy="457200"/>
+          </a:xfrm>
+          <a:prstGeom prst="rect">
+            <a:avLst/>
+          </a:prstGeom>
+          <a:solidFill>
+            <a:srgbClr val="DA291C"/>
           </a:solidFill>
           <a:ln>
             <a:noFill/>
           </a:ln>
-        </p:spPr>
-        <p:style>
-          <a:lnRef idx="1">
-            <a:schemeClr val="accent1"/>
-          </a:lnRef>
-          <a:fillRef idx="3">
-            <a:schemeClr val="accent1"/>
-          </a:fillRef>
-          <a:effectRef idx="2">
-            <a:schemeClr val="accent1"/>
-          </a:effectRef>
-          <a:fontRef idx="minor">
-            <a:schemeClr val="lt1"/>
-          </a:fontRef>
-        </p:style>
-        <p:txBody>
-          <a:bodyPr rtlCol="0" anchor="ctr"/>
-          <a:lstStyle/>
-          <a:p>
-            <a:pPr algn="ctr"/>
-          </a:p>
-        </p:txBody>
-      </p:sp>
-      <p:sp>
-        <p:nvSpPr>
-          <p:cNvPr id="51" name="TextBox 50"/>
-          <p:cNvSpPr txBox="1"/>
-          <p:nvPr/>
-        </p:nvSpPr>
-        <p:spPr>
-          <a:xfrm>
-            <a:off x="3547872" y="5449823"/>
-            <a:ext cx="2505456" cy="530352"/>
-          </a:xfrm>
-          <a:prstGeom prst="rect">
-            <a:avLst/>
-          </a:prstGeom>
-          <a:noFill/>
-        </p:spPr>
-        <p:txBody>
-          <a:bodyPr wrap="square">
-            <a:spAutoFit/>
-          </a:bodyPr>
-          <a:lstStyle/>
-          <a:p>
-            <a:pPr algn="l"/>
-            <a:r>
-              <a:rPr sz="850" b="0" i="0">
+          <a:effectLst/>
+        </p:spPr>
+        <p:style>
+          <a:lnRef idx="1">
+            <a:schemeClr val="accent1"/>
+          </a:lnRef>
+          <a:fillRef idx="3">
+            <a:schemeClr val="accent1"/>
+          </a:fillRef>
+          <a:effectRef idx="2">
+            <a:schemeClr val="accent1"/>
+          </a:effectRef>
+          <a:fontRef idx="minor">
+            <a:schemeClr val="lt1"/>
+          </a:fontRef>
+        </p:style>
+        <p:txBody>
+          <a:bodyPr rtlCol="0" anchor="ctr"/>
+          <a:lstStyle/>
+          <a:p>
+            <a:pPr algn="ctr"/>
+          </a:p>
+        </p:txBody>
+      </p:sp>
+      <p:sp>
+        <p:nvSpPr>
+          <p:cNvPr id="118" name="TextBox 117"/>
+          <p:cNvSpPr txBox="1"/>
+          <p:nvPr/>
+        </p:nvSpPr>
+        <p:spPr>
+          <a:xfrm>
+            <a:off x="603503" y="4105656"/>
+            <a:ext cx="2505456" cy="402336"/>
+          </a:xfrm>
+          <a:prstGeom prst="rect">
+            <a:avLst/>
+          </a:prstGeom>
+          <a:noFill/>
+        </p:spPr>
+        <p:txBody>
+          <a:bodyPr wrap="square" anchor="ctr" lIns="12700" rIns="12700" tIns="0" bIns="0">
+            <a:spAutoFit/>
+          </a:bodyPr>
+          <a:lstStyle/>
+          <a:p>
+            <a:r>
+              <a:rPr sz="850">
                 <a:solidFill>
                   <a:srgbClr val="1C1917"/>
                 </a:solidFill>
                 <a:latin typeface="Calibri"/>
               </a:rPr>
-              <a:t>MTD VAT quarterly submission</a:t>
-            </a:r>
-          </a:p>
-        </p:txBody>
-      </p:sp>
-      <p:sp>
-        <p:nvSpPr>
-          <p:cNvPr id="52" name="Rectangle 51"/>
-          <p:cNvSpPr/>
-          <p:nvPr/>
-        </p:nvSpPr>
-        <p:spPr>
-          <a:xfrm>
-            <a:off x="6327648" y="1024128"/>
-            <a:ext cx="2788920" cy="310896"/>
-          </a:xfrm>
-          <a:prstGeom prst="rect">
-            <a:avLst/>
-          </a:prstGeom>
-          <a:solidFill>
-            <a:srgbClr val="1D4ED8"/>
+              <a:t>Stalled request RM escalation</a:t>
+            </a:r>
+          </a:p>
+        </p:txBody>
+      </p:sp>
+      <p:sp>
+        <p:nvSpPr>
+          <p:cNvPr id="119" name="Rectangle 118"/>
+          <p:cNvSpPr/>
+          <p:nvPr/>
+        </p:nvSpPr>
+        <p:spPr>
+          <a:xfrm>
+            <a:off x="438912" y="4626864"/>
+            <a:ext cx="2788920" cy="457200"/>
+          </a:xfrm>
+          <a:prstGeom prst="rect">
+            <a:avLst/>
+          </a:prstGeom>
+          <a:solidFill>
+            <a:srgbClr val="FFFFFF"/>
           </a:solidFill>
           <a:ln>
             <a:noFill/>
           </a:ln>
-        </p:spPr>
-        <p:style>
-          <a:lnRef idx="1">
-            <a:schemeClr val="accent1"/>
-          </a:lnRef>
-          <a:fillRef idx="3">
-            <a:schemeClr val="accent1"/>
-          </a:fillRef>
-          <a:effectRef idx="2">
-            <a:schemeClr val="accent1"/>
-          </a:effectRef>
-          <a:fontRef idx="minor">
-            <a:schemeClr val="lt1"/>
-          </a:fontRef>
-        </p:style>
-        <p:txBody>
-          <a:bodyPr rtlCol="0" anchor="ctr"/>
-          <a:lstStyle/>
-          <a:p>
-            <a:pPr algn="ctr"/>
-          </a:p>
-        </p:txBody>
-      </p:sp>
-      <p:sp>
-        <p:nvSpPr>
-          <p:cNvPr id="53" name="TextBox 52"/>
-          <p:cNvSpPr txBox="1"/>
-          <p:nvPr/>
-        </p:nvSpPr>
-        <p:spPr>
-          <a:xfrm>
-            <a:off x="6437376" y="1042415"/>
-            <a:ext cx="2578608" cy="256032"/>
-          </a:xfrm>
-          <a:prstGeom prst="rect">
-            <a:avLst/>
-          </a:prstGeom>
-          <a:noFill/>
-        </p:spPr>
-        <p:txBody>
-          <a:bodyPr wrap="square">
-            <a:spAutoFit/>
-          </a:bodyPr>
-          <a:lstStyle/>
-          <a:p>
-            <a:pPr algn="l"/>
-            <a:r>
-              <a:rPr sz="800" b="1" i="0">
-                <a:solidFill>
-                  <a:srgbClr val="FFFFFF"/>
-                </a:solidFill>
-                <a:latin typeface="Calibri"/>
-              </a:rPr>
-              <a:t>INTELLIGENCE</a:t>
-            </a:r>
-          </a:p>
-        </p:txBody>
-      </p:sp>
-      <p:sp>
-        <p:nvSpPr>
-          <p:cNvPr id="54" name="Rectangle 53"/>
-          <p:cNvSpPr/>
-          <p:nvPr/>
-        </p:nvSpPr>
-        <p:spPr>
-          <a:xfrm>
-            <a:off x="6327648" y="1335024"/>
-            <a:ext cx="2788920" cy="658368"/>
-          </a:xfrm>
-          <a:prstGeom prst="rect">
-            <a:avLst/>
-          </a:prstGeom>
-          <a:solidFill>
-            <a:srgbClr val="FFFFFF"/>
-          </a:solidFill>
-          <a:ln w="9525">
-            <a:solidFill>
-              <a:srgbClr val="D6D3D1"/>
-            </a:solidFill>
-          </a:ln>
-        </p:spPr>
-        <p:style>
-          <a:lnRef idx="1">
-            <a:schemeClr val="accent1"/>
-          </a:lnRef>
-          <a:fillRef idx="3">
-            <a:schemeClr val="accent1"/>
-          </a:fillRef>
-          <a:effectRef idx="2">
-            <a:schemeClr val="accent1"/>
-          </a:effectRef>
-          <a:fontRef idx="minor">
-            <a:schemeClr val="lt1"/>
-          </a:fontRef>
-        </p:style>
-        <p:txBody>
-          <a:bodyPr rtlCol="0" anchor="ctr"/>
-          <a:lstStyle/>
-          <a:p>
-            <a:pPr algn="ctr"/>
-          </a:p>
-        </p:txBody>
-      </p:sp>
-      <p:sp>
-        <p:nvSpPr>
-          <p:cNvPr id="55" name="Rectangle 54"/>
-          <p:cNvSpPr/>
-          <p:nvPr/>
-        </p:nvSpPr>
-        <p:spPr>
-          <a:xfrm>
-            <a:off x="6327648" y="1335024"/>
-            <a:ext cx="45720" cy="658368"/>
-          </a:xfrm>
-          <a:prstGeom prst="rect">
-            <a:avLst/>
-          </a:prstGeom>
-          <a:solidFill>
-            <a:srgbClr val="1D4ED8"/>
+          <a:effectLst/>
+        </p:spPr>
+        <p:style>
+          <a:lnRef idx="1">
+            <a:schemeClr val="accent1"/>
+          </a:lnRef>
+          <a:fillRef idx="3">
+            <a:schemeClr val="accent1"/>
+          </a:fillRef>
+          <a:effectRef idx="2">
+            <a:schemeClr val="accent1"/>
+          </a:effectRef>
+          <a:fontRef idx="minor">
+            <a:schemeClr val="lt1"/>
+          </a:fontRef>
+        </p:style>
+        <p:txBody>
+          <a:bodyPr rtlCol="0" anchor="ctr"/>
+          <a:lstStyle/>
+          <a:p>
+            <a:pPr algn="ctr"/>
+          </a:p>
+        </p:txBody>
+      </p:sp>
+      <p:sp>
+        <p:nvSpPr>
+          <p:cNvPr id="120" name="Rectangle 119"/>
+          <p:cNvSpPr/>
+          <p:nvPr/>
+        </p:nvSpPr>
+        <p:spPr>
+          <a:xfrm>
+            <a:off x="438912" y="4626864"/>
+            <a:ext cx="45720" cy="457200"/>
+          </a:xfrm>
+          <a:prstGeom prst="rect">
+            <a:avLst/>
+          </a:prstGeom>
+          <a:solidFill>
+            <a:srgbClr val="DA291C"/>
           </a:solidFill>
           <a:ln>
             <a:noFill/>
           </a:ln>
-        </p:spPr>
-        <p:style>
-          <a:lnRef idx="1">
-            <a:schemeClr val="accent1"/>
-          </a:lnRef>
-          <a:fillRef idx="3">
-            <a:schemeClr val="accent1"/>
-          </a:fillRef>
-          <a:effectRef idx="2">
-            <a:schemeClr val="accent1"/>
-          </a:effectRef>
-          <a:fontRef idx="minor">
-            <a:schemeClr val="lt1"/>
-          </a:fontRef>
-        </p:style>
-        <p:txBody>
-          <a:bodyPr rtlCol="0" anchor="ctr"/>
-          <a:lstStyle/>
-          <a:p>
-            <a:pPr algn="ctr"/>
-          </a:p>
-        </p:txBody>
-      </p:sp>
-      <p:sp>
-        <p:nvSpPr>
-          <p:cNvPr id="56" name="TextBox 55"/>
-          <p:cNvSpPr txBox="1"/>
-          <p:nvPr/>
-        </p:nvSpPr>
-        <p:spPr>
-          <a:xfrm>
-            <a:off x="6492240" y="1389888"/>
-            <a:ext cx="2505456" cy="530352"/>
-          </a:xfrm>
-          <a:prstGeom prst="rect">
-            <a:avLst/>
-          </a:prstGeom>
-          <a:noFill/>
-        </p:spPr>
-        <p:txBody>
-          <a:bodyPr wrap="square">
-            <a:spAutoFit/>
-          </a:bodyPr>
-          <a:lstStyle/>
-          <a:p>
-            <a:pPr algn="l"/>
-            <a:r>
-              <a:rPr sz="850" b="0" i="0">
+          <a:effectLst/>
+        </p:spPr>
+        <p:style>
+          <a:lnRef idx="1">
+            <a:schemeClr val="accent1"/>
+          </a:lnRef>
+          <a:fillRef idx="3">
+            <a:schemeClr val="accent1"/>
+          </a:fillRef>
+          <a:effectRef idx="2">
+            <a:schemeClr val="accent1"/>
+          </a:effectRef>
+          <a:fontRef idx="minor">
+            <a:schemeClr val="lt1"/>
+          </a:fontRef>
+        </p:style>
+        <p:txBody>
+          <a:bodyPr rtlCol="0" anchor="ctr"/>
+          <a:lstStyle/>
+          <a:p>
+            <a:pPr algn="ctr"/>
+          </a:p>
+        </p:txBody>
+      </p:sp>
+      <p:sp>
+        <p:nvSpPr>
+          <p:cNvPr id="121" name="TextBox 120"/>
+          <p:cNvSpPr txBox="1"/>
+          <p:nvPr/>
+        </p:nvSpPr>
+        <p:spPr>
+          <a:xfrm>
+            <a:off x="603503" y="4654296"/>
+            <a:ext cx="2505456" cy="402336"/>
+          </a:xfrm>
+          <a:prstGeom prst="rect">
+            <a:avLst/>
+          </a:prstGeom>
+          <a:noFill/>
+        </p:spPr>
+        <p:txBody>
+          <a:bodyPr wrap="square" anchor="ctr" lIns="12700" rIns="12700" tIns="0" bIns="0">
+            <a:spAutoFit/>
+          </a:bodyPr>
+          <a:lstStyle/>
+          <a:p>
+            <a:r>
+              <a:rPr sz="850">
                 <a:solidFill>
                   <a:srgbClr val="1C1917"/>
                 </a:solidFill>
                 <a:latin typeface="Calibri"/>
               </a:rPr>
-              <a:t>Business health score (5-factor gauge)</a:t>
-            </a:r>
-          </a:p>
-        </p:txBody>
-      </p:sp>
-      <p:sp>
-        <p:nvSpPr>
-          <p:cNvPr id="57" name="Rectangle 56"/>
-          <p:cNvSpPr/>
-          <p:nvPr/>
-        </p:nvSpPr>
-        <p:spPr>
-          <a:xfrm>
-            <a:off x="6327648" y="2011680"/>
-            <a:ext cx="2788920" cy="658368"/>
+              <a:t>7-year immutable audit trail</a:t>
+            </a:r>
+          </a:p>
+        </p:txBody>
+      </p:sp>
+      <p:sp>
+        <p:nvSpPr>
+          <p:cNvPr id="122" name="Rectangle 121"/>
+          <p:cNvSpPr/>
+          <p:nvPr/>
+        </p:nvSpPr>
+        <p:spPr>
+          <a:xfrm>
+            <a:off x="438912" y="5175504"/>
+            <a:ext cx="2788920" cy="457200"/>
           </a:xfrm>
           <a:prstGeom prst="rect">
             <a:avLst/>
           </a:prstGeom>
           <a:solidFill>
             <a:srgbClr val="F5F5F4"/>
-          </a:solidFill>
-          <a:ln w="9525">
-            <a:solidFill>
-              <a:srgbClr val="D6D3D1"/>
-            </a:solidFill>
-          </a:ln>
-        </p:spPr>
-        <p:style>
-          <a:lnRef idx="1">
-            <a:schemeClr val="accent1"/>
-          </a:lnRef>
-          <a:fillRef idx="3">
-            <a:schemeClr val="accent1"/>
-          </a:fillRef>
-          <a:effectRef idx="2">
-            <a:schemeClr val="accent1"/>
-          </a:effectRef>
-          <a:fontRef idx="minor">
-            <a:schemeClr val="lt1"/>
-          </a:fontRef>
-        </p:style>
-        <p:txBody>
-          <a:bodyPr rtlCol="0" anchor="ctr"/>
-          <a:lstStyle/>
-          <a:p>
-            <a:pPr algn="ctr"/>
-          </a:p>
-        </p:txBody>
-      </p:sp>
-      <p:sp>
-        <p:nvSpPr>
-          <p:cNvPr id="58" name="Rectangle 57"/>
-          <p:cNvSpPr/>
-          <p:nvPr/>
-        </p:nvSpPr>
-        <p:spPr>
-          <a:xfrm>
-            <a:off x="6327648" y="2011680"/>
-            <a:ext cx="45720" cy="658368"/>
-          </a:xfrm>
-          <a:prstGeom prst="rect">
-            <a:avLst/>
-          </a:prstGeom>
-          <a:solidFill>
-            <a:srgbClr val="1D4ED8"/>
           </a:solidFill>
           <a:ln>
             <a:noFill/>
           </a:ln>
-        </p:spPr>
-        <p:style>
-          <a:lnRef idx="1">
-            <a:schemeClr val="accent1"/>
-          </a:lnRef>
-          <a:fillRef idx="3">
-            <a:schemeClr val="accent1"/>
-          </a:fillRef>
-          <a:effectRef idx="2">
-            <a:schemeClr val="accent1"/>
-          </a:effectRef>
-          <a:fontRef idx="minor">
-            <a:schemeClr val="lt1"/>
-          </a:fontRef>
-        </p:style>
-        <p:txBody>
-          <a:bodyPr rtlCol="0" anchor="ctr"/>
-          <a:lstStyle/>
-          <a:p>
-            <a:pPr algn="ctr"/>
-          </a:p>
-        </p:txBody>
-      </p:sp>
-      <p:sp>
-        <p:nvSpPr>
-          <p:cNvPr id="59" name="TextBox 58"/>
-          <p:cNvSpPr txBox="1"/>
-          <p:nvPr/>
-        </p:nvSpPr>
-        <p:spPr>
-          <a:xfrm>
-            <a:off x="6492240" y="2066543"/>
-            <a:ext cx="2505456" cy="530352"/>
-          </a:xfrm>
-          <a:prstGeom prst="rect">
-            <a:avLst/>
-          </a:prstGeom>
-          <a:noFill/>
-        </p:spPr>
-        <p:txBody>
-          <a:bodyPr wrap="square">
-            <a:spAutoFit/>
-          </a:bodyPr>
-          <a:lstStyle/>
-          <a:p>
-            <a:pPr algn="l"/>
-            <a:r>
-              <a:rPr sz="850" b="0" i="0">
-                <a:solidFill>
-                  <a:srgbClr val="1C1917"/>
-                </a:solidFill>
-                <a:latin typeface="Calibri"/>
-              </a:rPr>
-              <a:t>13-week cash flow forecast</a:t>
-            </a:r>
-          </a:p>
-        </p:txBody>
-      </p:sp>
-      <p:sp>
-        <p:nvSpPr>
-          <p:cNvPr id="60" name="Rectangle 59"/>
-          <p:cNvSpPr/>
-          <p:nvPr/>
-        </p:nvSpPr>
-        <p:spPr>
-          <a:xfrm>
-            <a:off x="6327648" y="2688336"/>
-            <a:ext cx="2788920" cy="658368"/>
-          </a:xfrm>
-          <a:prstGeom prst="rect">
-            <a:avLst/>
-          </a:prstGeom>
-          <a:solidFill>
-            <a:srgbClr val="FFFFFF"/>
-          </a:solidFill>
-          <a:ln w="9525">
-            <a:solidFill>
-              <a:srgbClr val="D6D3D1"/>
-            </a:solidFill>
-          </a:ln>
-        </p:spPr>
-        <p:style>
-          <a:lnRef idx="1">
-            <a:schemeClr val="accent1"/>
-          </a:lnRef>
-          <a:fillRef idx="3">
-            <a:schemeClr val="accent1"/>
-          </a:fillRef>
-          <a:effectRef idx="2">
-            <a:schemeClr val="accent1"/>
-          </a:effectRef>
-          <a:fontRef idx="minor">
-            <a:schemeClr val="lt1"/>
-          </a:fontRef>
-        </p:style>
-        <p:txBody>
-          <a:bodyPr rtlCol="0" anchor="ctr"/>
-          <a:lstStyle/>
-          <a:p>
-            <a:pPr algn="ctr"/>
-          </a:p>
-        </p:txBody>
-      </p:sp>
-      <p:sp>
-        <p:nvSpPr>
-          <p:cNvPr id="61" name="Rectangle 60"/>
-          <p:cNvSpPr/>
-          <p:nvPr/>
-        </p:nvSpPr>
-        <p:spPr>
-          <a:xfrm>
-            <a:off x="6327648" y="2688336"/>
-            <a:ext cx="45720" cy="658368"/>
-          </a:xfrm>
-          <a:prstGeom prst="rect">
-            <a:avLst/>
-          </a:prstGeom>
-          <a:solidFill>
-            <a:srgbClr val="1D4ED8"/>
+          <a:effectLst/>
+        </p:spPr>
+        <p:style>
+          <a:lnRef idx="1">
+            <a:schemeClr val="accent1"/>
+          </a:lnRef>
+          <a:fillRef idx="3">
+            <a:schemeClr val="accent1"/>
+          </a:fillRef>
+          <a:effectRef idx="2">
+            <a:schemeClr val="accent1"/>
+          </a:effectRef>
+          <a:fontRef idx="minor">
+            <a:schemeClr val="lt1"/>
+          </a:fontRef>
+        </p:style>
+        <p:txBody>
+          <a:bodyPr rtlCol="0" anchor="ctr"/>
+          <a:lstStyle/>
+          <a:p>
+            <a:pPr algn="ctr"/>
+          </a:p>
+        </p:txBody>
+      </p:sp>
+      <p:sp>
+        <p:nvSpPr>
+          <p:cNvPr id="123" name="Rectangle 122"/>
+          <p:cNvSpPr/>
+          <p:nvPr/>
+        </p:nvSpPr>
+        <p:spPr>
+          <a:xfrm>
+            <a:off x="438912" y="5175504"/>
+            <a:ext cx="45720" cy="457200"/>
+          </a:xfrm>
+          <a:prstGeom prst="rect">
+            <a:avLst/>
+          </a:prstGeom>
+          <a:solidFill>
+            <a:srgbClr val="DA291C"/>
           </a:solidFill>
           <a:ln>
             <a:noFill/>
           </a:ln>
-        </p:spPr>
-        <p:style>
-          <a:lnRef idx="1">
-            <a:schemeClr val="accent1"/>
-          </a:lnRef>
-          <a:fillRef idx="3">
-            <a:schemeClr val="accent1"/>
-          </a:fillRef>
-          <a:effectRef idx="2">
-            <a:schemeClr val="accent1"/>
-          </a:effectRef>
-          <a:fontRef idx="minor">
-            <a:schemeClr val="lt1"/>
-          </a:fontRef>
-        </p:style>
-        <p:txBody>
-          <a:bodyPr rtlCol="0" anchor="ctr"/>
-          <a:lstStyle/>
-          <a:p>
-            <a:pPr algn="ctr"/>
-          </a:p>
-        </p:txBody>
-      </p:sp>
-      <p:sp>
-        <p:nvSpPr>
-          <p:cNvPr id="62" name="TextBox 61"/>
-          <p:cNvSpPr txBox="1"/>
-          <p:nvPr/>
-        </p:nvSpPr>
-        <p:spPr>
-          <a:xfrm>
-            <a:off x="6492240" y="2743200"/>
-            <a:ext cx="2505456" cy="530352"/>
-          </a:xfrm>
-          <a:prstGeom prst="rect">
-            <a:avLst/>
-          </a:prstGeom>
-          <a:noFill/>
-        </p:spPr>
-        <p:txBody>
-          <a:bodyPr wrap="square">
-            <a:spAutoFit/>
-          </a:bodyPr>
-          <a:lstStyle/>
-          <a:p>
-            <a:pPr algn="l"/>
-            <a:r>
-              <a:rPr sz="850" b="0" i="0">
+          <a:effectLst/>
+        </p:spPr>
+        <p:style>
+          <a:lnRef idx="1">
+            <a:schemeClr val="accent1"/>
+          </a:lnRef>
+          <a:fillRef idx="3">
+            <a:schemeClr val="accent1"/>
+          </a:fillRef>
+          <a:effectRef idx="2">
+            <a:schemeClr val="accent1"/>
+          </a:effectRef>
+          <a:fontRef idx="minor">
+            <a:schemeClr val="lt1"/>
+          </a:fontRef>
+        </p:style>
+        <p:txBody>
+          <a:bodyPr rtlCol="0" anchor="ctr"/>
+          <a:lstStyle/>
+          <a:p>
+            <a:pPr algn="ctr"/>
+          </a:p>
+        </p:txBody>
+      </p:sp>
+      <p:sp>
+        <p:nvSpPr>
+          <p:cNvPr id="124" name="TextBox 123"/>
+          <p:cNvSpPr txBox="1"/>
+          <p:nvPr/>
+        </p:nvSpPr>
+        <p:spPr>
+          <a:xfrm>
+            <a:off x="603503" y="5202936"/>
+            <a:ext cx="2505456" cy="402336"/>
+          </a:xfrm>
+          <a:prstGeom prst="rect">
+            <a:avLst/>
+          </a:prstGeom>
+          <a:noFill/>
+        </p:spPr>
+        <p:txBody>
+          <a:bodyPr wrap="square" anchor="ctr" lIns="12700" rIns="12700" tIns="0" bIns="0">
+            <a:spAutoFit/>
+          </a:bodyPr>
+          <a:lstStyle/>
+          <a:p>
+            <a:r>
+              <a:rPr sz="850">
                 <a:solidFill>
                   <a:srgbClr val="1C1917"/>
                 </a:solidFill>
                 <a:latin typeface="Calibri"/>
               </a:rPr>
-              <a:t>Supplier risk radar (Companies House)</a:t>
-            </a:r>
-          </a:p>
-        </p:txBody>
-      </p:sp>
-      <p:sp>
-        <p:nvSpPr>
-          <p:cNvPr id="63" name="Rectangle 62"/>
-          <p:cNvSpPr/>
-          <p:nvPr/>
-        </p:nvSpPr>
-        <p:spPr>
-          <a:xfrm>
-            <a:off x="6327648" y="3364991"/>
-            <a:ext cx="2788920" cy="658368"/>
-          </a:xfrm>
-          <a:prstGeom prst="rect">
-            <a:avLst/>
-          </a:prstGeom>
-          <a:solidFill>
-            <a:srgbClr val="F5F5F4"/>
-          </a:solidFill>
-          <a:ln w="9525">
-            <a:solidFill>
-              <a:srgbClr val="D6D3D1"/>
-            </a:solidFill>
-          </a:ln>
-        </p:spPr>
-        <p:style>
-          <a:lnRef idx="1">
-            <a:schemeClr val="accent1"/>
-          </a:lnRef>
-          <a:fillRef idx="3">
-            <a:schemeClr val="accent1"/>
-          </a:fillRef>
-          <a:effectRef idx="2">
-            <a:schemeClr val="accent1"/>
-          </a:effectRef>
-          <a:fontRef idx="minor">
-            <a:schemeClr val="lt1"/>
-          </a:fontRef>
-        </p:style>
-        <p:txBody>
-          <a:bodyPr rtlCol="0" anchor="ctr"/>
-          <a:lstStyle/>
-          <a:p>
-            <a:pPr algn="ctr"/>
-          </a:p>
-        </p:txBody>
-      </p:sp>
-      <p:sp>
-        <p:nvSpPr>
-          <p:cNvPr id="64" name="Rectangle 63"/>
-          <p:cNvSpPr/>
-          <p:nvPr/>
-        </p:nvSpPr>
-        <p:spPr>
-          <a:xfrm>
-            <a:off x="6327648" y="3364991"/>
-            <a:ext cx="45720" cy="658368"/>
-          </a:xfrm>
-          <a:prstGeom prst="rect">
-            <a:avLst/>
-          </a:prstGeom>
-          <a:solidFill>
-            <a:srgbClr val="1D4ED8"/>
+              <a:t>Standing orders &amp; Direct Debits</a:t>
+            </a:r>
+          </a:p>
+        </p:txBody>
+      </p:sp>
+      <p:sp>
+        <p:nvSpPr>
+          <p:cNvPr id="125" name="Rectangle 124"/>
+          <p:cNvSpPr/>
+          <p:nvPr/>
+        </p:nvSpPr>
+        <p:spPr>
+          <a:xfrm>
+            <a:off x="438912" y="5724144"/>
+            <a:ext cx="2788920" cy="457200"/>
+          </a:xfrm>
+          <a:prstGeom prst="rect">
+            <a:avLst/>
+          </a:prstGeom>
+          <a:solidFill>
+            <a:srgbClr val="FFFFFF"/>
           </a:solidFill>
           <a:ln>
             <a:noFill/>
           </a:ln>
-        </p:spPr>
-        <p:style>
-          <a:lnRef idx="1">
-            <a:schemeClr val="accent1"/>
-          </a:lnRef>
-          <a:fillRef idx="3">
-            <a:schemeClr val="accent1"/>
-          </a:fillRef>
-          <a:effectRef idx="2">
-            <a:schemeClr val="accent1"/>
-          </a:effectRef>
-          <a:fontRef idx="minor">
-            <a:schemeClr val="lt1"/>
-          </a:fontRef>
-        </p:style>
-        <p:txBody>
-          <a:bodyPr rtlCol="0" anchor="ctr"/>
-          <a:lstStyle/>
-          <a:p>
-            <a:pPr algn="ctr"/>
-          </a:p>
-        </p:txBody>
-      </p:sp>
-      <p:sp>
-        <p:nvSpPr>
-          <p:cNvPr id="65" name="TextBox 64"/>
-          <p:cNvSpPr txBox="1"/>
-          <p:nvPr/>
-        </p:nvSpPr>
-        <p:spPr>
-          <a:xfrm>
-            <a:off x="6492240" y="3419856"/>
-            <a:ext cx="2505456" cy="530352"/>
-          </a:xfrm>
-          <a:prstGeom prst="rect">
-            <a:avLst/>
-          </a:prstGeom>
-          <a:noFill/>
-        </p:spPr>
-        <p:txBody>
-          <a:bodyPr wrap="square">
-            <a:spAutoFit/>
-          </a:bodyPr>
-          <a:lstStyle/>
-          <a:p>
-            <a:pPr algn="l"/>
-            <a:r>
-              <a:rPr sz="850" b="0" i="0">
-                <a:solidFill>
-                  <a:srgbClr val="1C1917"/>
-                </a:solidFill>
-                <a:latin typeface="Calibri"/>
-              </a:rPr>
-              <a:t>Director command centre</a:t>
-            </a:r>
-          </a:p>
-        </p:txBody>
-      </p:sp>
-      <p:sp>
-        <p:nvSpPr>
-          <p:cNvPr id="66" name="Rectangle 65"/>
-          <p:cNvSpPr/>
-          <p:nvPr/>
-        </p:nvSpPr>
-        <p:spPr>
-          <a:xfrm>
-            <a:off x="6327648" y="4041648"/>
-            <a:ext cx="2788920" cy="658368"/>
-          </a:xfrm>
-          <a:prstGeom prst="rect">
-            <a:avLst/>
-          </a:prstGeom>
-          <a:solidFill>
-            <a:srgbClr val="FFFFFF"/>
-          </a:solidFill>
-          <a:ln w="9525">
-            <a:solidFill>
-              <a:srgbClr val="D6D3D1"/>
-            </a:solidFill>
-          </a:ln>
-        </p:spPr>
-        <p:style>
-          <a:lnRef idx="1">
-            <a:schemeClr val="accent1"/>
-          </a:lnRef>
-          <a:fillRef idx="3">
-            <a:schemeClr val="accent1"/>
-          </a:fillRef>
-          <a:effectRef idx="2">
-            <a:schemeClr val="accent1"/>
-          </a:effectRef>
-          <a:fontRef idx="minor">
-            <a:schemeClr val="lt1"/>
-          </a:fontRef>
-        </p:style>
-        <p:txBody>
-          <a:bodyPr rtlCol="0" anchor="ctr"/>
-          <a:lstStyle/>
-          <a:p>
-            <a:pPr algn="ctr"/>
-          </a:p>
-        </p:txBody>
-      </p:sp>
-      <p:sp>
-        <p:nvSpPr>
-          <p:cNvPr id="67" name="Rectangle 66"/>
-          <p:cNvSpPr/>
-          <p:nvPr/>
-        </p:nvSpPr>
-        <p:spPr>
-          <a:xfrm>
-            <a:off x="6327648" y="4041648"/>
-            <a:ext cx="45720" cy="658368"/>
-          </a:xfrm>
-          <a:prstGeom prst="rect">
-            <a:avLst/>
-          </a:prstGeom>
-          <a:solidFill>
-            <a:srgbClr val="1D4ED8"/>
+          <a:effectLst/>
+        </p:spPr>
+        <p:style>
+          <a:lnRef idx="1">
+            <a:schemeClr val="accent1"/>
+          </a:lnRef>
+          <a:fillRef idx="3">
+            <a:schemeClr val="accent1"/>
+          </a:fillRef>
+          <a:effectRef idx="2">
+            <a:schemeClr val="accent1"/>
+          </a:effectRef>
+          <a:fontRef idx="minor">
+            <a:schemeClr val="lt1"/>
+          </a:fontRef>
+        </p:style>
+        <p:txBody>
+          <a:bodyPr rtlCol="0" anchor="ctr"/>
+          <a:lstStyle/>
+          <a:p>
+            <a:pPr algn="ctr"/>
+          </a:p>
+        </p:txBody>
+      </p:sp>
+      <p:sp>
+        <p:nvSpPr>
+          <p:cNvPr id="126" name="Rectangle 125"/>
+          <p:cNvSpPr/>
+          <p:nvPr/>
+        </p:nvSpPr>
+        <p:spPr>
+          <a:xfrm>
+            <a:off x="438912" y="5724144"/>
+            <a:ext cx="45720" cy="457200"/>
+          </a:xfrm>
+          <a:prstGeom prst="rect">
+            <a:avLst/>
+          </a:prstGeom>
+          <a:solidFill>
+            <a:srgbClr val="DA291C"/>
           </a:solidFill>
           <a:ln>
             <a:noFill/>
           </a:ln>
-        </p:spPr>
-        <p:style>
-          <a:lnRef idx="1">
-            <a:schemeClr val="accent1"/>
-          </a:lnRef>
-          <a:fillRef idx="3">
-            <a:schemeClr val="accent1"/>
-          </a:fillRef>
-          <a:effectRef idx="2">
-            <a:schemeClr val="accent1"/>
-          </a:effectRef>
-          <a:fontRef idx="minor">
-            <a:schemeClr val="lt1"/>
-          </a:fontRef>
-        </p:style>
-        <p:txBody>
-          <a:bodyPr rtlCol="0" anchor="ctr"/>
-          <a:lstStyle/>
-          <a:p>
-            <a:pPr algn="ctr"/>
-          </a:p>
-        </p:txBody>
-      </p:sp>
-      <p:sp>
-        <p:nvSpPr>
-          <p:cNvPr id="68" name="TextBox 67"/>
-          <p:cNvSpPr txBox="1"/>
-          <p:nvPr/>
-        </p:nvSpPr>
-        <p:spPr>
-          <a:xfrm>
-            <a:off x="6492240" y="4096512"/>
-            <a:ext cx="2505456" cy="530352"/>
-          </a:xfrm>
-          <a:prstGeom prst="rect">
-            <a:avLst/>
-          </a:prstGeom>
-          <a:noFill/>
-        </p:spPr>
-        <p:txBody>
-          <a:bodyPr wrap="square">
-            <a:spAutoFit/>
-          </a:bodyPr>
-          <a:lstStyle/>
-          <a:p>
-            <a:pPr algn="l"/>
-            <a:r>
-              <a:rPr sz="850" b="0" i="0">
+          <a:effectLst/>
+        </p:spPr>
+        <p:style>
+          <a:lnRef idx="1">
+            <a:schemeClr val="accent1"/>
+          </a:lnRef>
+          <a:fillRef idx="3">
+            <a:schemeClr val="accent1"/>
+          </a:fillRef>
+          <a:effectRef idx="2">
+            <a:schemeClr val="accent1"/>
+          </a:effectRef>
+          <a:fontRef idx="minor">
+            <a:schemeClr val="lt1"/>
+          </a:fontRef>
+        </p:style>
+        <p:txBody>
+          <a:bodyPr rtlCol="0" anchor="ctr"/>
+          <a:lstStyle/>
+          <a:p>
+            <a:pPr algn="ctr"/>
+          </a:p>
+        </p:txBody>
+      </p:sp>
+      <p:sp>
+        <p:nvSpPr>
+          <p:cNvPr id="127" name="TextBox 126"/>
+          <p:cNvSpPr txBox="1"/>
+          <p:nvPr/>
+        </p:nvSpPr>
+        <p:spPr>
+          <a:xfrm>
+            <a:off x="603503" y="5751576"/>
+            <a:ext cx="2505456" cy="402336"/>
+          </a:xfrm>
+          <a:prstGeom prst="rect">
+            <a:avLst/>
+          </a:prstGeom>
+          <a:noFill/>
+        </p:spPr>
+        <p:txBody>
+          <a:bodyPr wrap="square" anchor="ctr" lIns="12700" rIns="12700" tIns="0" bIns="0">
+            <a:spAutoFit/>
+          </a:bodyPr>
+          <a:lstStyle/>
+          <a:p>
+            <a:r>
+              <a:rPr sz="850">
                 <a:solidFill>
                   <a:srgbClr val="1C1917"/>
                 </a:solidFill>
                 <a:latin typeface="Calibri"/>
               </a:rPr>
-              <a:t>Smart payment sequencer</a:t>
-            </a:r>
-          </a:p>
-        </p:txBody>
-      </p:sp>
-      <p:sp>
-        <p:nvSpPr>
-          <p:cNvPr id="69" name="Rectangle 68"/>
-          <p:cNvSpPr/>
-          <p:nvPr/>
-        </p:nvSpPr>
-        <p:spPr>
-          <a:xfrm>
-            <a:off x="6327648" y="4718304"/>
-            <a:ext cx="2788920" cy="658368"/>
-          </a:xfrm>
-          <a:prstGeom prst="rect">
-            <a:avLst/>
-          </a:prstGeom>
-          <a:solidFill>
-            <a:srgbClr val="F5F5F4"/>
-          </a:solidFill>
-          <a:ln w="9525">
-            <a:solidFill>
-              <a:srgbClr val="D6D3D1"/>
-            </a:solidFill>
-          </a:ln>
-        </p:spPr>
-        <p:style>
-          <a:lnRef idx="1">
-            <a:schemeClr val="accent1"/>
-          </a:lnRef>
-          <a:fillRef idx="3">
-            <a:schemeClr val="accent1"/>
-          </a:fillRef>
-          <a:effectRef idx="2">
-            <a:schemeClr val="accent1"/>
-          </a:effectRef>
-          <a:fontRef idx="minor">
-            <a:schemeClr val="lt1"/>
-          </a:fontRef>
-        </p:style>
-        <p:txBody>
-          <a:bodyPr rtlCol="0" anchor="ctr"/>
-          <a:lstStyle/>
-          <a:p>
-            <a:pPr algn="ctr"/>
-          </a:p>
-        </p:txBody>
-      </p:sp>
-      <p:sp>
-        <p:nvSpPr>
-          <p:cNvPr id="70" name="Rectangle 69"/>
-          <p:cNvSpPr/>
-          <p:nvPr/>
-        </p:nvSpPr>
-        <p:spPr>
-          <a:xfrm>
-            <a:off x="6327648" y="4718304"/>
-            <a:ext cx="45720" cy="658368"/>
-          </a:xfrm>
-          <a:prstGeom prst="rect">
-            <a:avLst/>
-          </a:prstGeom>
-          <a:solidFill>
-            <a:srgbClr val="1D4ED8"/>
+              <a:t>Balance certificate — sealed proof</a:t>
+            </a:r>
+          </a:p>
+        </p:txBody>
+      </p:sp>
+      <p:sp>
+        <p:nvSpPr>
+          <p:cNvPr id="128" name="Rectangle 127"/>
+          <p:cNvSpPr/>
+          <p:nvPr/>
+        </p:nvSpPr>
+        <p:spPr>
+          <a:xfrm>
+            <a:off x="3383280" y="1335024"/>
+            <a:ext cx="2788920" cy="457200"/>
+          </a:xfrm>
+          <a:prstGeom prst="rect">
+            <a:avLst/>
+          </a:prstGeom>
+          <a:solidFill>
+            <a:srgbClr val="FFFFFF"/>
           </a:solidFill>
           <a:ln>
             <a:noFill/>
           </a:ln>
-        </p:spPr>
-        <p:style>
-          <a:lnRef idx="1">
-            <a:schemeClr val="accent1"/>
-          </a:lnRef>
-          <a:fillRef idx="3">
-            <a:schemeClr val="accent1"/>
-          </a:fillRef>
-          <a:effectRef idx="2">
-            <a:schemeClr val="accent1"/>
-          </a:effectRef>
-          <a:fontRef idx="minor">
-            <a:schemeClr val="lt1"/>
-          </a:fontRef>
-        </p:style>
-        <p:txBody>
-          <a:bodyPr rtlCol="0" anchor="ctr"/>
-          <a:lstStyle/>
-          <a:p>
-            <a:pPr algn="ctr"/>
-          </a:p>
-        </p:txBody>
-      </p:sp>
-      <p:sp>
-        <p:nvSpPr>
-          <p:cNvPr id="71" name="TextBox 70"/>
-          <p:cNvSpPr txBox="1"/>
-          <p:nvPr/>
-        </p:nvSpPr>
-        <p:spPr>
-          <a:xfrm>
-            <a:off x="6492240" y="4773168"/>
-            <a:ext cx="2505456" cy="530352"/>
-          </a:xfrm>
-          <a:prstGeom prst="rect">
-            <a:avLst/>
-          </a:prstGeom>
-          <a:noFill/>
-        </p:spPr>
-        <p:txBody>
-          <a:bodyPr wrap="square">
-            <a:spAutoFit/>
-          </a:bodyPr>
-          <a:lstStyle/>
-          <a:p>
-            <a:pPr algn="l"/>
-            <a:r>
-              <a:rPr sz="850" b="0" i="0">
-                <a:solidFill>
-                  <a:srgbClr val="1C1917"/>
-                </a:solidFill>
-                <a:latin typeface="Calibri"/>
-              </a:rPr>
-              <a:t>Pre-approved lending offer</a:t>
-            </a:r>
-          </a:p>
-        </p:txBody>
-      </p:sp>
-      <p:sp>
-        <p:nvSpPr>
-          <p:cNvPr id="72" name="Rectangle 71"/>
-          <p:cNvSpPr/>
-          <p:nvPr/>
-        </p:nvSpPr>
-        <p:spPr>
-          <a:xfrm>
-            <a:off x="6327648" y="5394959"/>
-            <a:ext cx="2788920" cy="658368"/>
-          </a:xfrm>
-          <a:prstGeom prst="rect">
-            <a:avLst/>
-          </a:prstGeom>
-          <a:solidFill>
-            <a:srgbClr val="FFFFFF"/>
-          </a:solidFill>
-          <a:ln w="9525">
-            <a:solidFill>
-              <a:srgbClr val="D6D3D1"/>
-            </a:solidFill>
-          </a:ln>
-        </p:spPr>
-        <p:style>
-          <a:lnRef idx="1">
-            <a:schemeClr val="accent1"/>
-          </a:lnRef>
-          <a:fillRef idx="3">
-            <a:schemeClr val="accent1"/>
-          </a:fillRef>
-          <a:effectRef idx="2">
-            <a:schemeClr val="accent1"/>
-          </a:effectRef>
-          <a:fontRef idx="minor">
-            <a:schemeClr val="lt1"/>
-          </a:fontRef>
-        </p:style>
-        <p:txBody>
-          <a:bodyPr rtlCol="0" anchor="ctr"/>
-          <a:lstStyle/>
-          <a:p>
-            <a:pPr algn="ctr"/>
-          </a:p>
-        </p:txBody>
-      </p:sp>
-      <p:sp>
-        <p:nvSpPr>
-          <p:cNvPr id="73" name="Rectangle 72"/>
-          <p:cNvSpPr/>
-          <p:nvPr/>
-        </p:nvSpPr>
-        <p:spPr>
-          <a:xfrm>
-            <a:off x="6327648" y="5394959"/>
-            <a:ext cx="45720" cy="658368"/>
-          </a:xfrm>
-          <a:prstGeom prst="rect">
-            <a:avLst/>
-          </a:prstGeom>
-          <a:solidFill>
-            <a:srgbClr val="1D4ED8"/>
+          <a:effectLst/>
+        </p:spPr>
+        <p:style>
+          <a:lnRef idx="1">
+            <a:schemeClr val="accent1"/>
+          </a:lnRef>
+          <a:fillRef idx="3">
+            <a:schemeClr val="accent1"/>
+          </a:fillRef>
+          <a:effectRef idx="2">
+            <a:schemeClr val="accent1"/>
+          </a:effectRef>
+          <a:fontRef idx="minor">
+            <a:schemeClr val="lt1"/>
+          </a:fontRef>
+        </p:style>
+        <p:txBody>
+          <a:bodyPr rtlCol="0" anchor="ctr"/>
+          <a:lstStyle/>
+          <a:p>
+            <a:pPr algn="ctr"/>
+          </a:p>
+        </p:txBody>
+      </p:sp>
+      <p:sp>
+        <p:nvSpPr>
+          <p:cNvPr id="129" name="Rectangle 128"/>
+          <p:cNvSpPr/>
+          <p:nvPr/>
+        </p:nvSpPr>
+        <p:spPr>
+          <a:xfrm>
+            <a:off x="3383280" y="1335024"/>
+            <a:ext cx="45720" cy="457200"/>
+          </a:xfrm>
+          <a:prstGeom prst="rect">
+            <a:avLst/>
+          </a:prstGeom>
+          <a:solidFill>
+            <a:srgbClr val="DA291C"/>
           </a:solidFill>
           <a:ln>
             <a:noFill/>
           </a:ln>
-        </p:spPr>
-        <p:style>
-          <a:lnRef idx="1">
-            <a:schemeClr val="accent1"/>
-          </a:lnRef>
-          <a:fillRef idx="3">
-            <a:schemeClr val="accent1"/>
-          </a:fillRef>
-          <a:effectRef idx="2">
-            <a:schemeClr val="accent1"/>
-          </a:effectRef>
-          <a:fontRef idx="minor">
-            <a:schemeClr val="lt1"/>
-          </a:fontRef>
-        </p:style>
-        <p:txBody>
-          <a:bodyPr rtlCol="0" anchor="ctr"/>
-          <a:lstStyle/>
-          <a:p>
-            <a:pPr algn="ctr"/>
-          </a:p>
-        </p:txBody>
-      </p:sp>
-      <p:sp>
-        <p:nvSpPr>
-          <p:cNvPr id="74" name="TextBox 73"/>
-          <p:cNvSpPr txBox="1"/>
-          <p:nvPr/>
-        </p:nvSpPr>
-        <p:spPr>
-          <a:xfrm>
-            <a:off x="6492240" y="5449823"/>
-            <a:ext cx="2505456" cy="530352"/>
-          </a:xfrm>
-          <a:prstGeom prst="rect">
-            <a:avLst/>
-          </a:prstGeom>
-          <a:noFill/>
-        </p:spPr>
-        <p:txBody>
-          <a:bodyPr wrap="square">
-            <a:spAutoFit/>
-          </a:bodyPr>
-          <a:lstStyle/>
-          <a:p>
-            <a:pPr algn="l"/>
-            <a:r>
-              <a:rPr sz="850" b="0" i="0">
+          <a:effectLst/>
+        </p:spPr>
+        <p:style>
+          <a:lnRef idx="1">
+            <a:schemeClr val="accent1"/>
+          </a:lnRef>
+          <a:fillRef idx="3">
+            <a:schemeClr val="accent1"/>
+          </a:fillRef>
+          <a:effectRef idx="2">
+            <a:schemeClr val="accent1"/>
+          </a:effectRef>
+          <a:fontRef idx="minor">
+            <a:schemeClr val="lt1"/>
+          </a:fontRef>
+        </p:style>
+        <p:txBody>
+          <a:bodyPr rtlCol="0" anchor="ctr"/>
+          <a:lstStyle/>
+          <a:p>
+            <a:pPr algn="ctr"/>
+          </a:p>
+        </p:txBody>
+      </p:sp>
+      <p:sp>
+        <p:nvSpPr>
+          <p:cNvPr id="130" name="TextBox 129"/>
+          <p:cNvSpPr txBox="1"/>
+          <p:nvPr/>
+        </p:nvSpPr>
+        <p:spPr>
+          <a:xfrm>
+            <a:off x="3547872" y="1362456"/>
+            <a:ext cx="2505456" cy="402336"/>
+          </a:xfrm>
+          <a:prstGeom prst="rect">
+            <a:avLst/>
+          </a:prstGeom>
+          <a:noFill/>
+        </p:spPr>
+        <p:txBody>
+          <a:bodyPr wrap="square" anchor="ctr" lIns="12700" rIns="12700" tIns="0" bIns="0">
+            <a:spAutoFit/>
+          </a:bodyPr>
+          <a:lstStyle/>
+          <a:p>
+            <a:r>
+              <a:rPr sz="850">
                 <a:solidFill>
                   <a:srgbClr val="1C1917"/>
                 </a:solidFill>
                 <a:latin typeface="Calibri"/>
               </a:rPr>
-              <a:t>Financial statements + counterparty search</a:t>
-            </a:r>
-          </a:p>
-        </p:txBody>
-      </p:sp>
-      <p:sp>
-        <p:nvSpPr>
-          <p:cNvPr id="75" name="Rectangle 74"/>
-          <p:cNvSpPr/>
-          <p:nvPr/>
-        </p:nvSpPr>
-        <p:spPr>
-          <a:xfrm>
-            <a:off x="9272016" y="1024128"/>
-            <a:ext cx="2788920" cy="310896"/>
-          </a:xfrm>
-          <a:prstGeom prst="rect">
-            <a:avLst/>
-          </a:prstGeom>
-          <a:solidFill>
-            <a:srgbClr val="059669"/>
+              <a:t>Account closure + Confirmation of Payee</a:t>
+            </a:r>
+          </a:p>
+        </p:txBody>
+      </p:sp>
+      <p:sp>
+        <p:nvSpPr>
+          <p:cNvPr id="131" name="Rectangle 130"/>
+          <p:cNvSpPr/>
+          <p:nvPr/>
+        </p:nvSpPr>
+        <p:spPr>
+          <a:xfrm>
+            <a:off x="3383280" y="1883664"/>
+            <a:ext cx="2788920" cy="457200"/>
+          </a:xfrm>
+          <a:prstGeom prst="rect">
+            <a:avLst/>
+          </a:prstGeom>
+          <a:solidFill>
+            <a:srgbClr val="F5F5F4"/>
           </a:solidFill>
           <a:ln>
             <a:noFill/>
           </a:ln>
-        </p:spPr>
-        <p:style>
-          <a:lnRef idx="1">
-            <a:schemeClr val="accent1"/>
-          </a:lnRef>
-          <a:fillRef idx="3">
-            <a:schemeClr val="accent1"/>
-          </a:fillRef>
-          <a:effectRef idx="2">
-            <a:schemeClr val="accent1"/>
-          </a:effectRef>
-          <a:fontRef idx="minor">
-            <a:schemeClr val="lt1"/>
-          </a:fontRef>
-        </p:style>
-        <p:txBody>
-          <a:bodyPr rtlCol="0" anchor="ctr"/>
-          <a:lstStyle/>
-          <a:p>
-            <a:pPr algn="ctr"/>
-          </a:p>
-        </p:txBody>
-      </p:sp>
-      <p:sp>
-        <p:nvSpPr>
-          <p:cNvPr id="76" name="TextBox 75"/>
-          <p:cNvSpPr txBox="1"/>
-          <p:nvPr/>
-        </p:nvSpPr>
-        <p:spPr>
-          <a:xfrm>
-            <a:off x="9381744" y="1042415"/>
-            <a:ext cx="2578608" cy="256032"/>
-          </a:xfrm>
-          <a:prstGeom prst="rect">
-            <a:avLst/>
-          </a:prstGeom>
-          <a:noFill/>
-        </p:spPr>
-        <p:txBody>
-          <a:bodyPr wrap="square">
-            <a:spAutoFit/>
-          </a:bodyPr>
-          <a:lstStyle/>
-          <a:p>
-            <a:pPr algn="l"/>
-            <a:r>
-              <a:rPr sz="800" b="1" i="0">
-                <a:solidFill>
-                  <a:srgbClr val="FFFFFF"/>
-                </a:solidFill>
-                <a:latin typeface="Calibri"/>
-              </a:rPr>
-              <a:t>PRIVACY &amp; SECURITY</a:t>
-            </a:r>
-          </a:p>
-        </p:txBody>
-      </p:sp>
-      <p:sp>
-        <p:nvSpPr>
-          <p:cNvPr id="77" name="Rectangle 76"/>
-          <p:cNvSpPr/>
-          <p:nvPr/>
-        </p:nvSpPr>
-        <p:spPr>
-          <a:xfrm>
-            <a:off x="9272016" y="1335024"/>
-            <a:ext cx="2788920" cy="658368"/>
-          </a:xfrm>
-          <a:prstGeom prst="rect">
-            <a:avLst/>
-          </a:prstGeom>
-          <a:solidFill>
-            <a:srgbClr val="FFFFFF"/>
-          </a:solidFill>
-          <a:ln w="9525">
-            <a:solidFill>
-              <a:srgbClr val="D6D3D1"/>
-            </a:solidFill>
-          </a:ln>
-        </p:spPr>
-        <p:style>
-          <a:lnRef idx="1">
-            <a:schemeClr val="accent1"/>
-          </a:lnRef>
-          <a:fillRef idx="3">
-            <a:schemeClr val="accent1"/>
-          </a:fillRef>
-          <a:effectRef idx="2">
-            <a:schemeClr val="accent1"/>
-          </a:effectRef>
-          <a:fontRef idx="minor">
-            <a:schemeClr val="lt1"/>
-          </a:fontRef>
-        </p:style>
-        <p:txBody>
-          <a:bodyPr rtlCol="0" anchor="ctr"/>
-          <a:lstStyle/>
-          <a:p>
-            <a:pPr algn="ctr"/>
-          </a:p>
-        </p:txBody>
-      </p:sp>
-      <p:sp>
-        <p:nvSpPr>
-          <p:cNvPr id="78" name="Rectangle 77"/>
-          <p:cNvSpPr/>
-          <p:nvPr/>
-        </p:nvSpPr>
-        <p:spPr>
-          <a:xfrm>
-            <a:off x="9272016" y="1335024"/>
-            <a:ext cx="45720" cy="658368"/>
-          </a:xfrm>
-          <a:prstGeom prst="rect">
-            <a:avLst/>
-          </a:prstGeom>
-          <a:solidFill>
-            <a:srgbClr val="059669"/>
+          <a:effectLst/>
+        </p:spPr>
+        <p:style>
+          <a:lnRef idx="1">
+            <a:schemeClr val="accent1"/>
+          </a:lnRef>
+          <a:fillRef idx="3">
+            <a:schemeClr val="accent1"/>
+          </a:fillRef>
+          <a:effectRef idx="2">
+            <a:schemeClr val="accent1"/>
+          </a:effectRef>
+          <a:fontRef idx="minor">
+            <a:schemeClr val="lt1"/>
+          </a:fontRef>
+        </p:style>
+        <p:txBody>
+          <a:bodyPr rtlCol="0" anchor="ctr"/>
+          <a:lstStyle/>
+          <a:p>
+            <a:pPr algn="ctr"/>
+          </a:p>
+        </p:txBody>
+      </p:sp>
+      <p:sp>
+        <p:nvSpPr>
+          <p:cNvPr id="132" name="Rectangle 131"/>
+          <p:cNvSpPr/>
+          <p:nvPr/>
+        </p:nvSpPr>
+        <p:spPr>
+          <a:xfrm>
+            <a:off x="3383280" y="1883664"/>
+            <a:ext cx="45720" cy="457200"/>
+          </a:xfrm>
+          <a:prstGeom prst="rect">
+            <a:avLst/>
+          </a:prstGeom>
+          <a:solidFill>
+            <a:srgbClr val="DA291C"/>
           </a:solidFill>
           <a:ln>
             <a:noFill/>
           </a:ln>
-        </p:spPr>
-        <p:style>
-          <a:lnRef idx="1">
-            <a:schemeClr val="accent1"/>
-          </a:lnRef>
-          <a:fillRef idx="3">
-            <a:schemeClr val="accent1"/>
-          </a:fillRef>
-          <a:effectRef idx="2">
-            <a:schemeClr val="accent1"/>
-          </a:effectRef>
-          <a:fontRef idx="minor">
-            <a:schemeClr val="lt1"/>
-          </a:fontRef>
-        </p:style>
-        <p:txBody>
-          <a:bodyPr rtlCol="0" anchor="ctr"/>
-          <a:lstStyle/>
-          <a:p>
-            <a:pPr algn="ctr"/>
-          </a:p>
-        </p:txBody>
-      </p:sp>
-      <p:sp>
-        <p:nvSpPr>
-          <p:cNvPr id="79" name="TextBox 78"/>
-          <p:cNvSpPr txBox="1"/>
-          <p:nvPr/>
-        </p:nvSpPr>
-        <p:spPr>
-          <a:xfrm>
-            <a:off x="9436608" y="1389888"/>
-            <a:ext cx="2505456" cy="530352"/>
-          </a:xfrm>
-          <a:prstGeom prst="rect">
-            <a:avLst/>
-          </a:prstGeom>
-          <a:noFill/>
-        </p:spPr>
-        <p:txBody>
-          <a:bodyPr wrap="square">
-            <a:spAutoFit/>
-          </a:bodyPr>
-          <a:lstStyle/>
-          <a:p>
-            <a:pPr algn="l"/>
-            <a:r>
-              <a:rPr sz="850" b="0" i="0">
+          <a:effectLst/>
+        </p:spPr>
+        <p:style>
+          <a:lnRef idx="1">
+            <a:schemeClr val="accent1"/>
+          </a:lnRef>
+          <a:fillRef idx="3">
+            <a:schemeClr val="accent1"/>
+          </a:fillRef>
+          <a:effectRef idx="2">
+            <a:schemeClr val="accent1"/>
+          </a:effectRef>
+          <a:fontRef idx="minor">
+            <a:schemeClr val="lt1"/>
+          </a:fontRef>
+        </p:style>
+        <p:txBody>
+          <a:bodyPr rtlCol="0" anchor="ctr"/>
+          <a:lstStyle/>
+          <a:p>
+            <a:pPr algn="ctr"/>
+          </a:p>
+        </p:txBody>
+      </p:sp>
+      <p:sp>
+        <p:nvSpPr>
+          <p:cNvPr id="133" name="TextBox 132"/>
+          <p:cNvSpPr txBox="1"/>
+          <p:nvPr/>
+        </p:nvSpPr>
+        <p:spPr>
+          <a:xfrm>
+            <a:off x="3547872" y="1911095"/>
+            <a:ext cx="2505456" cy="402336"/>
+          </a:xfrm>
+          <a:prstGeom prst="rect">
+            <a:avLst/>
+          </a:prstGeom>
+          <a:noFill/>
+        </p:spPr>
+        <p:txBody>
+          <a:bodyPr wrap="square" anchor="ctr" lIns="12700" rIns="12700" tIns="0" bIns="0">
+            <a:spAutoFit/>
+          </a:bodyPr>
+          <a:lstStyle/>
+          <a:p>
+            <a:r>
+              <a:rPr sz="850">
                 <a:solidFill>
                   <a:srgbClr val="1C1917"/>
                 </a:solidFill>
                 <a:latin typeface="Calibri"/>
               </a:rPr>
-              <a:t>Personal / business account unlink</a:t>
-            </a:r>
-          </a:p>
-        </p:txBody>
-      </p:sp>
-      <p:sp>
-        <p:nvSpPr>
-          <p:cNvPr id="80" name="Rectangle 79"/>
-          <p:cNvSpPr/>
-          <p:nvPr/>
-        </p:nvSpPr>
-        <p:spPr>
-          <a:xfrm>
-            <a:off x="9272016" y="2011680"/>
-            <a:ext cx="2788920" cy="658368"/>
-          </a:xfrm>
-          <a:prstGeom prst="rect">
-            <a:avLst/>
-          </a:prstGeom>
-          <a:solidFill>
-            <a:srgbClr val="F5F5F4"/>
-          </a:solidFill>
-          <a:ln w="9525">
-            <a:solidFill>
-              <a:srgbClr val="D6D3D1"/>
-            </a:solidFill>
-          </a:ln>
-        </p:spPr>
-        <p:style>
-          <a:lnRef idx="1">
-            <a:schemeClr val="accent1"/>
-          </a:lnRef>
-          <a:fillRef idx="3">
-            <a:schemeClr val="accent1"/>
-          </a:fillRef>
-          <a:effectRef idx="2">
-            <a:schemeClr val="accent1"/>
-          </a:effectRef>
-          <a:fontRef idx="minor">
-            <a:schemeClr val="lt1"/>
-          </a:fontRef>
-        </p:style>
-        <p:txBody>
-          <a:bodyPr rtlCol="0" anchor="ctr"/>
-          <a:lstStyle/>
-          <a:p>
-            <a:pPr algn="ctr"/>
-          </a:p>
-        </p:txBody>
-      </p:sp>
-      <p:sp>
-        <p:nvSpPr>
-          <p:cNvPr id="81" name="Rectangle 80"/>
-          <p:cNvSpPr/>
-          <p:nvPr/>
-        </p:nvSpPr>
-        <p:spPr>
-          <a:xfrm>
-            <a:off x="9272016" y="2011680"/>
-            <a:ext cx="45720" cy="658368"/>
-          </a:xfrm>
-          <a:prstGeom prst="rect">
-            <a:avLst/>
-          </a:prstGeom>
-          <a:solidFill>
-            <a:srgbClr val="059669"/>
+              <a:t>Partner unreachable (4 regulatory paths)</a:t>
+            </a:r>
+          </a:p>
+        </p:txBody>
+      </p:sp>
+      <p:sp>
+        <p:nvSpPr>
+          <p:cNvPr id="134" name="Rectangle 133"/>
+          <p:cNvSpPr/>
+          <p:nvPr/>
+        </p:nvSpPr>
+        <p:spPr>
+          <a:xfrm>
+            <a:off x="3383280" y="2432304"/>
+            <a:ext cx="2788920" cy="457200"/>
+          </a:xfrm>
+          <a:prstGeom prst="rect">
+            <a:avLst/>
+          </a:prstGeom>
+          <a:solidFill>
+            <a:srgbClr val="FFFFFF"/>
           </a:solidFill>
           <a:ln>
             <a:noFill/>
           </a:ln>
-        </p:spPr>
-        <p:style>
-          <a:lnRef idx="1">
-            <a:schemeClr val="accent1"/>
-          </a:lnRef>
-          <a:fillRef idx="3">
-            <a:schemeClr val="accent1"/>
-          </a:fillRef>
-          <a:effectRef idx="2">
-            <a:schemeClr val="accent1"/>
-          </a:effectRef>
-          <a:fontRef idx="minor">
-            <a:schemeClr val="lt1"/>
-          </a:fontRef>
-        </p:style>
-        <p:txBody>
-          <a:bodyPr rtlCol="0" anchor="ctr"/>
-          <a:lstStyle/>
-          <a:p>
-            <a:pPr algn="ctr"/>
-          </a:p>
-        </p:txBody>
-      </p:sp>
-      <p:sp>
-        <p:nvSpPr>
-          <p:cNvPr id="82" name="TextBox 81"/>
-          <p:cNvSpPr txBox="1"/>
-          <p:nvPr/>
-        </p:nvSpPr>
-        <p:spPr>
-          <a:xfrm>
-            <a:off x="9436608" y="2066543"/>
-            <a:ext cx="2505456" cy="530352"/>
-          </a:xfrm>
-          <a:prstGeom prst="rect">
-            <a:avLst/>
-          </a:prstGeom>
-          <a:noFill/>
-        </p:spPr>
-        <p:txBody>
-          <a:bodyPr wrap="square">
-            <a:spAutoFit/>
-          </a:bodyPr>
-          <a:lstStyle/>
-          <a:p>
-            <a:pPr algn="l"/>
-            <a:r>
-              <a:rPr sz="850" b="0" i="0">
-                <a:solidFill>
-                  <a:srgbClr val="1C1917"/>
-                </a:solidFill>
-                <a:latin typeface="Calibri"/>
-              </a:rPr>
-              <a:t>Call centre channel separation</a:t>
-            </a:r>
-          </a:p>
-        </p:txBody>
-      </p:sp>
-      <p:sp>
-        <p:nvSpPr>
-          <p:cNvPr id="83" name="Rectangle 82"/>
-          <p:cNvSpPr/>
-          <p:nvPr/>
-        </p:nvSpPr>
-        <p:spPr>
-          <a:xfrm>
-            <a:off x="9272016" y="2688336"/>
-            <a:ext cx="2788920" cy="658368"/>
-          </a:xfrm>
-          <a:prstGeom prst="rect">
-            <a:avLst/>
-          </a:prstGeom>
-          <a:solidFill>
-            <a:srgbClr val="FFFFFF"/>
-          </a:solidFill>
-          <a:ln w="9525">
-            <a:solidFill>
-              <a:srgbClr val="D6D3D1"/>
-            </a:solidFill>
-          </a:ln>
-        </p:spPr>
-        <p:style>
-          <a:lnRef idx="1">
-            <a:schemeClr val="accent1"/>
-          </a:lnRef>
-          <a:fillRef idx="3">
-            <a:schemeClr val="accent1"/>
-          </a:fillRef>
-          <a:effectRef idx="2">
-            <a:schemeClr val="accent1"/>
-          </a:effectRef>
-          <a:fontRef idx="minor">
-            <a:schemeClr val="lt1"/>
-          </a:fontRef>
-        </p:style>
-        <p:txBody>
-          <a:bodyPr rtlCol="0" anchor="ctr"/>
-          <a:lstStyle/>
-          <a:p>
-            <a:pPr algn="ctr"/>
-          </a:p>
-        </p:txBody>
-      </p:sp>
-      <p:sp>
-        <p:nvSpPr>
-          <p:cNvPr id="84" name="Rectangle 83"/>
-          <p:cNvSpPr/>
-          <p:nvPr/>
-        </p:nvSpPr>
-        <p:spPr>
-          <a:xfrm>
-            <a:off x="9272016" y="2688336"/>
-            <a:ext cx="45720" cy="658368"/>
-          </a:xfrm>
-          <a:prstGeom prst="rect">
-            <a:avLst/>
-          </a:prstGeom>
-          <a:solidFill>
-            <a:srgbClr val="059669"/>
+          <a:effectLst/>
+        </p:spPr>
+        <p:style>
+          <a:lnRef idx="1">
+            <a:schemeClr val="accent1"/>
+          </a:lnRef>
+          <a:fillRef idx="3">
+            <a:schemeClr val="accent1"/>
+          </a:fillRef>
+          <a:effectRef idx="2">
+            <a:schemeClr val="accent1"/>
+          </a:effectRef>
+          <a:fontRef idx="minor">
+            <a:schemeClr val="lt1"/>
+          </a:fontRef>
+        </p:style>
+        <p:txBody>
+          <a:bodyPr rtlCol="0" anchor="ctr"/>
+          <a:lstStyle/>
+          <a:p>
+            <a:pPr algn="ctr"/>
+          </a:p>
+        </p:txBody>
+      </p:sp>
+      <p:sp>
+        <p:nvSpPr>
+          <p:cNvPr id="135" name="Rectangle 134"/>
+          <p:cNvSpPr/>
+          <p:nvPr/>
+        </p:nvSpPr>
+        <p:spPr>
+          <a:xfrm>
+            <a:off x="3383280" y="2432304"/>
+            <a:ext cx="45720" cy="457200"/>
+          </a:xfrm>
+          <a:prstGeom prst="rect">
+            <a:avLst/>
+          </a:prstGeom>
+          <a:solidFill>
+            <a:srgbClr val="DA291C"/>
           </a:solidFill>
           <a:ln>
             <a:noFill/>
           </a:ln>
-        </p:spPr>
-        <p:style>
-          <a:lnRef idx="1">
-            <a:schemeClr val="accent1"/>
-          </a:lnRef>
-          <a:fillRef idx="3">
-            <a:schemeClr val="accent1"/>
-          </a:fillRef>
-          <a:effectRef idx="2">
-            <a:schemeClr val="accent1"/>
-          </a:effectRef>
-          <a:fontRef idx="minor">
-            <a:schemeClr val="lt1"/>
-          </a:fontRef>
-        </p:style>
-        <p:txBody>
-          <a:bodyPr rtlCol="0" anchor="ctr"/>
-          <a:lstStyle/>
-          <a:p>
-            <a:pPr algn="ctr"/>
-          </a:p>
-        </p:txBody>
-      </p:sp>
-      <p:sp>
-        <p:nvSpPr>
-          <p:cNvPr id="85" name="TextBox 84"/>
-          <p:cNvSpPr txBox="1"/>
-          <p:nvPr/>
-        </p:nvSpPr>
-        <p:spPr>
-          <a:xfrm>
-            <a:off x="9436608" y="2743200"/>
-            <a:ext cx="2505456" cy="530352"/>
-          </a:xfrm>
-          <a:prstGeom prst="rect">
-            <a:avLst/>
-          </a:prstGeom>
-          <a:noFill/>
-        </p:spPr>
-        <p:txBody>
-          <a:bodyPr wrap="square">
-            <a:spAutoFit/>
-          </a:bodyPr>
-          <a:lstStyle/>
-          <a:p>
-            <a:pPr algn="l"/>
-            <a:r>
-              <a:rPr sz="850" b="0" i="0">
+          <a:effectLst/>
+        </p:spPr>
+        <p:style>
+          <a:lnRef idx="1">
+            <a:schemeClr val="accent1"/>
+          </a:lnRef>
+          <a:fillRef idx="3">
+            <a:schemeClr val="accent1"/>
+          </a:fillRef>
+          <a:effectRef idx="2">
+            <a:schemeClr val="accent1"/>
+          </a:effectRef>
+          <a:fontRef idx="minor">
+            <a:schemeClr val="lt1"/>
+          </a:fontRef>
+        </p:style>
+        <p:txBody>
+          <a:bodyPr rtlCol="0" anchor="ctr"/>
+          <a:lstStyle/>
+          <a:p>
+            <a:pPr algn="ctr"/>
+          </a:p>
+        </p:txBody>
+      </p:sp>
+      <p:sp>
+        <p:nvSpPr>
+          <p:cNvPr id="136" name="TextBox 135"/>
+          <p:cNvSpPr txBox="1"/>
+          <p:nvPr/>
+        </p:nvSpPr>
+        <p:spPr>
+          <a:xfrm>
+            <a:off x="3547872" y="2459736"/>
+            <a:ext cx="2505456" cy="402336"/>
+          </a:xfrm>
+          <a:prstGeom prst="rect">
+            <a:avLst/>
+          </a:prstGeom>
+          <a:noFill/>
+        </p:spPr>
+        <p:txBody>
+          <a:bodyPr wrap="square" anchor="ctr" lIns="12700" rIns="12700" tIns="0" bIns="0">
+            <a:spAutoFit/>
+          </a:bodyPr>
+          <a:lstStyle/>
+          <a:p>
+            <a:r>
+              <a:rPr sz="850">
                 <a:solidFill>
                   <a:srgbClr val="1C1917"/>
                 </a:solidFill>
                 <a:latin typeface="Calibri"/>
               </a:rPr>
-              <a:t>Credit ring-fence (GDPR Art.5(1)(c))</a:t>
-            </a:r>
-          </a:p>
-        </p:txBody>
-      </p:sp>
-      <p:sp>
-        <p:nvSpPr>
-          <p:cNvPr id="86" name="Rectangle 85"/>
-          <p:cNvSpPr/>
-          <p:nvPr/>
-        </p:nvSpPr>
-        <p:spPr>
-          <a:xfrm>
-            <a:off x="9272016" y="3364991"/>
-            <a:ext cx="2788920" cy="658368"/>
+              <a:t>Mandate changes + KYC / KYB</a:t>
+            </a:r>
+          </a:p>
+        </p:txBody>
+      </p:sp>
+      <p:sp>
+        <p:nvSpPr>
+          <p:cNvPr id="137" name="Rectangle 136"/>
+          <p:cNvSpPr/>
+          <p:nvPr/>
+        </p:nvSpPr>
+        <p:spPr>
+          <a:xfrm>
+            <a:off x="3383280" y="2980944"/>
+            <a:ext cx="2788920" cy="457200"/>
           </a:xfrm>
           <a:prstGeom prst="rect">
             <a:avLst/>
           </a:prstGeom>
           <a:solidFill>
             <a:srgbClr val="F5F5F4"/>
-          </a:solidFill>
-          <a:ln w="9525">
-            <a:solidFill>
-              <a:srgbClr val="D6D3D1"/>
-            </a:solidFill>
-          </a:ln>
-        </p:spPr>
-        <p:style>
-          <a:lnRef idx="1">
-            <a:schemeClr val="accent1"/>
-          </a:lnRef>
-          <a:fillRef idx="3">
-            <a:schemeClr val="accent1"/>
-          </a:fillRef>
-          <a:effectRef idx="2">
-            <a:schemeClr val="accent1"/>
-          </a:effectRef>
-          <a:fontRef idx="minor">
-            <a:schemeClr val="lt1"/>
-          </a:fontRef>
-        </p:style>
-        <p:txBody>
-          <a:bodyPr rtlCol="0" anchor="ctr"/>
-          <a:lstStyle/>
-          <a:p>
-            <a:pPr algn="ctr"/>
-          </a:p>
-        </p:txBody>
-      </p:sp>
-      <p:sp>
-        <p:nvSpPr>
-          <p:cNvPr id="87" name="Rectangle 86"/>
-          <p:cNvSpPr/>
-          <p:nvPr/>
-        </p:nvSpPr>
-        <p:spPr>
-          <a:xfrm>
-            <a:off x="9272016" y="3364991"/>
-            <a:ext cx="45720" cy="658368"/>
-          </a:xfrm>
-          <a:prstGeom prst="rect">
-            <a:avLst/>
-          </a:prstGeom>
-          <a:solidFill>
-            <a:srgbClr val="059669"/>
           </a:solidFill>
           <a:ln>
             <a:noFill/>
           </a:ln>
-        </p:spPr>
-        <p:style>
-          <a:lnRef idx="1">
-            <a:schemeClr val="accent1"/>
-          </a:lnRef>
-          <a:fillRef idx="3">
-            <a:schemeClr val="accent1"/>
-          </a:fillRef>
-          <a:effectRef idx="2">
-            <a:schemeClr val="accent1"/>
-          </a:effectRef>
-          <a:fontRef idx="minor">
-            <a:schemeClr val="lt1"/>
-          </a:fontRef>
-        </p:style>
-        <p:txBody>
-          <a:bodyPr rtlCol="0" anchor="ctr"/>
-          <a:lstStyle/>
-          <a:p>
-            <a:pPr algn="ctr"/>
-          </a:p>
-        </p:txBody>
-      </p:sp>
-      <p:sp>
-        <p:nvSpPr>
-          <p:cNvPr id="88" name="TextBox 87"/>
-          <p:cNvSpPr txBox="1"/>
-          <p:nvPr/>
-        </p:nvSpPr>
-        <p:spPr>
-          <a:xfrm>
-            <a:off x="9436608" y="3419856"/>
-            <a:ext cx="2505456" cy="530352"/>
-          </a:xfrm>
-          <a:prstGeom prst="rect">
-            <a:avLst/>
-          </a:prstGeom>
-          <a:noFill/>
-        </p:spPr>
-        <p:txBody>
-          <a:bodyPr wrap="square">
-            <a:spAutoFit/>
-          </a:bodyPr>
-          <a:lstStyle/>
-          <a:p>
-            <a:pPr algn="l"/>
-            <a:r>
-              <a:rPr sz="850" b="0" i="0">
-                <a:solidFill>
-                  <a:srgbClr val="1C1917"/>
-                </a:solidFill>
-                <a:latin typeface="Calibri"/>
-              </a:rPr>
-              <a:t>PSD2 consent audit + one-tap revoke</a:t>
-            </a:r>
-          </a:p>
-        </p:txBody>
-      </p:sp>
-      <p:sp>
-        <p:nvSpPr>
-          <p:cNvPr id="89" name="Rectangle 88"/>
-          <p:cNvSpPr/>
-          <p:nvPr/>
-        </p:nvSpPr>
-        <p:spPr>
-          <a:xfrm>
-            <a:off x="9272016" y="4041648"/>
-            <a:ext cx="2788920" cy="658368"/>
-          </a:xfrm>
-          <a:prstGeom prst="rect">
-            <a:avLst/>
-          </a:prstGeom>
-          <a:solidFill>
-            <a:srgbClr val="FFFFFF"/>
-          </a:solidFill>
-          <a:ln w="9525">
-            <a:solidFill>
-              <a:srgbClr val="D6D3D1"/>
-            </a:solidFill>
-          </a:ln>
-        </p:spPr>
-        <p:style>
-          <a:lnRef idx="1">
-            <a:schemeClr val="accent1"/>
-          </a:lnRef>
-          <a:fillRef idx="3">
-            <a:schemeClr val="accent1"/>
-          </a:fillRef>
-          <a:effectRef idx="2">
-            <a:schemeClr val="accent1"/>
-          </a:effectRef>
-          <a:fontRef idx="minor">
-            <a:schemeClr val="lt1"/>
-          </a:fontRef>
-        </p:style>
-        <p:txBody>
-          <a:bodyPr rtlCol="0" anchor="ctr"/>
-          <a:lstStyle/>
-          <a:p>
-            <a:pPr algn="ctr"/>
-          </a:p>
-        </p:txBody>
-      </p:sp>
-      <p:sp>
-        <p:nvSpPr>
-          <p:cNvPr id="90" name="Rectangle 89"/>
-          <p:cNvSpPr/>
-          <p:nvPr/>
-        </p:nvSpPr>
-        <p:spPr>
-          <a:xfrm>
-            <a:off x="9272016" y="4041648"/>
-            <a:ext cx="45720" cy="658368"/>
-          </a:xfrm>
-          <a:prstGeom prst="rect">
-            <a:avLst/>
-          </a:prstGeom>
-          <a:solidFill>
-            <a:srgbClr val="059669"/>
+          <a:effectLst/>
+        </p:spPr>
+        <p:style>
+          <a:lnRef idx="1">
+            <a:schemeClr val="accent1"/>
+          </a:lnRef>
+          <a:fillRef idx="3">
+            <a:schemeClr val="accent1"/>
+          </a:fillRef>
+          <a:effectRef idx="2">
+            <a:schemeClr val="accent1"/>
+          </a:effectRef>
+          <a:fontRef idx="minor">
+            <a:schemeClr val="lt1"/>
+          </a:fontRef>
+        </p:style>
+        <p:txBody>
+          <a:bodyPr rtlCol="0" anchor="ctr"/>
+          <a:lstStyle/>
+          <a:p>
+            <a:pPr algn="ctr"/>
+          </a:p>
+        </p:txBody>
+      </p:sp>
+      <p:sp>
+        <p:nvSpPr>
+          <p:cNvPr id="138" name="Rectangle 137"/>
+          <p:cNvSpPr/>
+          <p:nvPr/>
+        </p:nvSpPr>
+        <p:spPr>
+          <a:xfrm>
+            <a:off x="3383280" y="2980944"/>
+            <a:ext cx="45720" cy="457200"/>
+          </a:xfrm>
+          <a:prstGeom prst="rect">
+            <a:avLst/>
+          </a:prstGeom>
+          <a:solidFill>
+            <a:srgbClr val="DA291C"/>
           </a:solidFill>
           <a:ln>
             <a:noFill/>
           </a:ln>
-        </p:spPr>
-        <p:style>
-          <a:lnRef idx="1">
-            <a:schemeClr val="accent1"/>
-          </a:lnRef>
-          <a:fillRef idx="3">
-            <a:schemeClr val="accent1"/>
-          </a:fillRef>
-          <a:effectRef idx="2">
-            <a:schemeClr val="accent1"/>
-          </a:effectRef>
-          <a:fontRef idx="minor">
-            <a:schemeClr val="lt1"/>
-          </a:fontRef>
-        </p:style>
-        <p:txBody>
-          <a:bodyPr rtlCol="0" anchor="ctr"/>
-          <a:lstStyle/>
-          <a:p>
-            <a:pPr algn="ctr"/>
-          </a:p>
-        </p:txBody>
-      </p:sp>
-      <p:sp>
-        <p:nvSpPr>
-          <p:cNvPr id="91" name="TextBox 90"/>
-          <p:cNvSpPr txBox="1"/>
-          <p:nvPr/>
-        </p:nvSpPr>
-        <p:spPr>
-          <a:xfrm>
-            <a:off x="9436608" y="4096512"/>
-            <a:ext cx="2505456" cy="530352"/>
-          </a:xfrm>
-          <a:prstGeom prst="rect">
-            <a:avLst/>
-          </a:prstGeom>
-          <a:noFill/>
-        </p:spPr>
-        <p:txBody>
-          <a:bodyPr wrap="square">
-            <a:spAutoFit/>
-          </a:bodyPr>
-          <a:lstStyle/>
-          <a:p>
-            <a:pPr algn="l"/>
-            <a:r>
-              <a:rPr sz="850" b="0" i="0">
+          <a:effectLst/>
+        </p:spPr>
+        <p:style>
+          <a:lnRef idx="1">
+            <a:schemeClr val="accent1"/>
+          </a:lnRef>
+          <a:fillRef idx="3">
+            <a:schemeClr val="accent1"/>
+          </a:fillRef>
+          <a:effectRef idx="2">
+            <a:schemeClr val="accent1"/>
+          </a:effectRef>
+          <a:fontRef idx="minor">
+            <a:schemeClr val="lt1"/>
+          </a:fontRef>
+        </p:style>
+        <p:txBody>
+          <a:bodyPr rtlCol="0" anchor="ctr"/>
+          <a:lstStyle/>
+          <a:p>
+            <a:pPr algn="ctr"/>
+          </a:p>
+        </p:txBody>
+      </p:sp>
+      <p:sp>
+        <p:nvSpPr>
+          <p:cNvPr id="139" name="TextBox 138"/>
+          <p:cNvSpPr txBox="1"/>
+          <p:nvPr/>
+        </p:nvSpPr>
+        <p:spPr>
+          <a:xfrm>
+            <a:off x="3547872" y="3008375"/>
+            <a:ext cx="2505456" cy="402336"/>
+          </a:xfrm>
+          <a:prstGeom prst="rect">
+            <a:avLst/>
+          </a:prstGeom>
+          <a:noFill/>
+        </p:spPr>
+        <p:txBody>
+          <a:bodyPr wrap="square" anchor="ctr" lIns="12700" rIns="12700" tIns="0" bIns="0">
+            <a:spAutoFit/>
+          </a:bodyPr>
+          <a:lstStyle/>
+          <a:p>
+            <a:r>
+              <a:rPr sz="850">
                 <a:solidFill>
                   <a:srgbClr val="1C1917"/>
                 </a:solidFill>
                 <a:latin typeface="Calibri"/>
               </a:rPr>
-              <a:t>Voice ID biometric (3-phrase enrolment)</a:t>
-            </a:r>
-          </a:p>
-        </p:txBody>
-      </p:sp>
-      <p:sp>
-        <p:nvSpPr>
-          <p:cNvPr id="92" name="Rectangle 91"/>
-          <p:cNvSpPr/>
-          <p:nvPr/>
-        </p:nvSpPr>
-        <p:spPr>
-          <a:xfrm>
-            <a:off x="9272016" y="4718304"/>
-            <a:ext cx="2788920" cy="658368"/>
-          </a:xfrm>
-          <a:prstGeom prst="rect">
-            <a:avLst/>
-          </a:prstGeom>
-          <a:solidFill>
-            <a:srgbClr val="F5F5F4"/>
-          </a:solidFill>
-          <a:ln w="9525">
-            <a:solidFill>
-              <a:srgbClr val="D6D3D1"/>
-            </a:solidFill>
-          </a:ln>
-        </p:spPr>
-        <p:style>
-          <a:lnRef idx="1">
-            <a:schemeClr val="accent1"/>
-          </a:lnRef>
-          <a:fillRef idx="3">
-            <a:schemeClr val="accent1"/>
-          </a:fillRef>
-          <a:effectRef idx="2">
-            <a:schemeClr val="accent1"/>
-          </a:effectRef>
-          <a:fontRef idx="minor">
-            <a:schemeClr val="lt1"/>
-          </a:fontRef>
-        </p:style>
-        <p:txBody>
-          <a:bodyPr rtlCol="0" anchor="ctr"/>
-          <a:lstStyle/>
-          <a:p>
-            <a:pPr algn="ctr"/>
-          </a:p>
-        </p:txBody>
-      </p:sp>
-      <p:sp>
-        <p:nvSpPr>
-          <p:cNvPr id="93" name="Rectangle 92"/>
-          <p:cNvSpPr/>
-          <p:nvPr/>
-        </p:nvSpPr>
-        <p:spPr>
-          <a:xfrm>
-            <a:off x="9272016" y="4718304"/>
-            <a:ext cx="45720" cy="658368"/>
-          </a:xfrm>
-          <a:prstGeom prst="rect">
-            <a:avLst/>
-          </a:prstGeom>
-          <a:solidFill>
-            <a:srgbClr val="059669"/>
+              <a:t>Bulk payments / wages + payee book</a:t>
+            </a:r>
+          </a:p>
+        </p:txBody>
+      </p:sp>
+      <p:sp>
+        <p:nvSpPr>
+          <p:cNvPr id="140" name="Rectangle 139"/>
+          <p:cNvSpPr/>
+          <p:nvPr/>
+        </p:nvSpPr>
+        <p:spPr>
+          <a:xfrm>
+            <a:off x="3383280" y="3529584"/>
+            <a:ext cx="2788920" cy="457200"/>
+          </a:xfrm>
+          <a:prstGeom prst="rect">
+            <a:avLst/>
+          </a:prstGeom>
+          <a:solidFill>
+            <a:srgbClr val="FFFFFF"/>
           </a:solidFill>
           <a:ln>
             <a:noFill/>
           </a:ln>
-        </p:spPr>
-        <p:style>
-          <a:lnRef idx="1">
-            <a:schemeClr val="accent1"/>
-          </a:lnRef>
-          <a:fillRef idx="3">
-            <a:schemeClr val="accent1"/>
-          </a:fillRef>
-          <a:effectRef idx="2">
-            <a:schemeClr val="accent1"/>
-          </a:effectRef>
-          <a:fontRef idx="minor">
-            <a:schemeClr val="lt1"/>
-          </a:fontRef>
-        </p:style>
-        <p:txBody>
-          <a:bodyPr rtlCol="0" anchor="ctr"/>
-          <a:lstStyle/>
-          <a:p>
-            <a:pPr algn="ctr"/>
-          </a:p>
-        </p:txBody>
-      </p:sp>
-      <p:sp>
-        <p:nvSpPr>
-          <p:cNvPr id="94" name="TextBox 93"/>
-          <p:cNvSpPr txBox="1"/>
-          <p:nvPr/>
-        </p:nvSpPr>
-        <p:spPr>
-          <a:xfrm>
-            <a:off x="9436608" y="4773168"/>
-            <a:ext cx="2505456" cy="530352"/>
-          </a:xfrm>
-          <a:prstGeom prst="rect">
-            <a:avLst/>
-          </a:prstGeom>
-          <a:noFill/>
-        </p:spPr>
-        <p:txBody>
-          <a:bodyPr wrap="square">
-            <a:spAutoFit/>
-          </a:bodyPr>
-          <a:lstStyle/>
-          <a:p>
-            <a:pPr algn="l"/>
-            <a:r>
-              <a:rPr sz="850" b="0" i="0">
-                <a:solidFill>
-                  <a:srgbClr val="1C1917"/>
-                </a:solidFill>
-                <a:latin typeface="Calibri"/>
-              </a:rPr>
-              <a:t>Session anomaly detection</a:t>
-            </a:r>
-          </a:p>
-        </p:txBody>
-      </p:sp>
-      <p:sp>
-        <p:nvSpPr>
-          <p:cNvPr id="95" name="Rectangle 94"/>
-          <p:cNvSpPr/>
-          <p:nvPr/>
-        </p:nvSpPr>
-        <p:spPr>
-          <a:xfrm>
-            <a:off x="9272016" y="5394959"/>
-            <a:ext cx="2788920" cy="658368"/>
-          </a:xfrm>
-          <a:prstGeom prst="rect">
-            <a:avLst/>
-          </a:prstGeom>
-          <a:solidFill>
-            <a:srgbClr val="FFFFFF"/>
-          </a:solidFill>
-          <a:ln w="9525">
-            <a:solidFill>
-              <a:srgbClr val="D6D3D1"/>
-            </a:solidFill>
-          </a:ln>
-        </p:spPr>
-        <p:style>
-          <a:lnRef idx="1">
-            <a:schemeClr val="accent1"/>
-          </a:lnRef>
-          <a:fillRef idx="3">
-            <a:schemeClr val="accent1"/>
-          </a:fillRef>
-          <a:effectRef idx="2">
-            <a:schemeClr val="accent1"/>
-          </a:effectRef>
-          <a:fontRef idx="minor">
-            <a:schemeClr val="lt1"/>
-          </a:fontRef>
-        </p:style>
-        <p:txBody>
-          <a:bodyPr rtlCol="0" anchor="ctr"/>
-          <a:lstStyle/>
-          <a:p>
-            <a:pPr algn="ctr"/>
-          </a:p>
-        </p:txBody>
-      </p:sp>
-      <p:sp>
-        <p:nvSpPr>
-          <p:cNvPr id="96" name="Rectangle 95"/>
-          <p:cNvSpPr/>
-          <p:nvPr/>
-        </p:nvSpPr>
-        <p:spPr>
-          <a:xfrm>
-            <a:off x="9272016" y="5394959"/>
-            <a:ext cx="45720" cy="658368"/>
-          </a:xfrm>
-          <a:prstGeom prst="rect">
-            <a:avLst/>
-          </a:prstGeom>
-          <a:solidFill>
-            <a:srgbClr val="059669"/>
+          <a:effectLst/>
+        </p:spPr>
+        <p:style>
+          <a:lnRef idx="1">
+            <a:schemeClr val="accent1"/>
+          </a:lnRef>
+          <a:fillRef idx="3">
+            <a:schemeClr val="accent1"/>
+          </a:fillRef>
+          <a:effectRef idx="2">
+            <a:schemeClr val="accent1"/>
+          </a:effectRef>
+          <a:fontRef idx="minor">
+            <a:schemeClr val="lt1"/>
+          </a:fontRef>
+        </p:style>
+        <p:txBody>
+          <a:bodyPr rtlCol="0" anchor="ctr"/>
+          <a:lstStyle/>
+          <a:p>
+            <a:pPr algn="ctr"/>
+          </a:p>
+        </p:txBody>
+      </p:sp>
+      <p:sp>
+        <p:nvSpPr>
+          <p:cNvPr id="141" name="Rectangle 140"/>
+          <p:cNvSpPr/>
+          <p:nvPr/>
+        </p:nvSpPr>
+        <p:spPr>
+          <a:xfrm>
+            <a:off x="3383280" y="3529584"/>
+            <a:ext cx="45720" cy="457200"/>
+          </a:xfrm>
+          <a:prstGeom prst="rect">
+            <a:avLst/>
+          </a:prstGeom>
+          <a:solidFill>
+            <a:srgbClr val="DA291C"/>
           </a:solidFill>
           <a:ln>
             <a:noFill/>
           </a:ln>
-        </p:spPr>
-        <p:style>
-          <a:lnRef idx="1">
-            <a:schemeClr val="accent1"/>
-          </a:lnRef>
-          <a:fillRef idx="3">
-            <a:schemeClr val="accent1"/>
-          </a:fillRef>
-          <a:effectRef idx="2">
-            <a:schemeClr val="accent1"/>
-          </a:effectRef>
-          <a:fontRef idx="minor">
-            <a:schemeClr val="lt1"/>
-          </a:fontRef>
-        </p:style>
-        <p:txBody>
-          <a:bodyPr rtlCol="0" anchor="ctr"/>
-          <a:lstStyle/>
-          <a:p>
-            <a:pPr algn="ctr"/>
-          </a:p>
-        </p:txBody>
-      </p:sp>
-      <p:sp>
-        <p:nvSpPr>
-          <p:cNvPr id="97" name="TextBox 96"/>
-          <p:cNvSpPr txBox="1"/>
-          <p:nvPr/>
-        </p:nvSpPr>
-        <p:spPr>
-          <a:xfrm>
-            <a:off x="9436608" y="5449823"/>
-            <a:ext cx="2505456" cy="530352"/>
-          </a:xfrm>
-          <a:prstGeom prst="rect">
-            <a:avLst/>
-          </a:prstGeom>
-          <a:noFill/>
-        </p:spPr>
-        <p:txBody>
-          <a:bodyPr wrap="square">
-            <a:spAutoFit/>
-          </a:bodyPr>
-          <a:lstStyle/>
-          <a:p>
-            <a:pPr algn="l"/>
-            <a:r>
-              <a:rPr sz="850" b="0" i="0">
+          <a:effectLst/>
+        </p:spPr>
+        <p:style>
+          <a:lnRef idx="1">
+            <a:schemeClr val="accent1"/>
+          </a:lnRef>
+          <a:fillRef idx="3">
+            <a:schemeClr val="accent1"/>
+          </a:fillRef>
+          <a:effectRef idx="2">
+            <a:schemeClr val="accent1"/>
+          </a:effectRef>
+          <a:fontRef idx="minor">
+            <a:schemeClr val="lt1"/>
+          </a:fontRef>
+        </p:style>
+        <p:txBody>
+          <a:bodyPr rtlCol="0" anchor="ctr"/>
+          <a:lstStyle/>
+          <a:p>
+            <a:pPr algn="ctr"/>
+          </a:p>
+        </p:txBody>
+      </p:sp>
+      <p:sp>
+        <p:nvSpPr>
+          <p:cNvPr id="142" name="TextBox 141"/>
+          <p:cNvSpPr txBox="1"/>
+          <p:nvPr/>
+        </p:nvSpPr>
+        <p:spPr>
+          <a:xfrm>
+            <a:off x="3547872" y="3557015"/>
+            <a:ext cx="2505456" cy="402336"/>
+          </a:xfrm>
+          <a:prstGeom prst="rect">
+            <a:avLst/>
+          </a:prstGeom>
+          <a:noFill/>
+        </p:spPr>
+        <p:txBody>
+          <a:bodyPr wrap="square" anchor="ctr" lIns="12700" rIns="12700" tIns="0" bIns="0">
+            <a:spAutoFit/>
+          </a:bodyPr>
+          <a:lstStyle/>
+          <a:p>
+            <a:r>
+              <a:rPr sz="850">
                 <a:solidFill>
                   <a:srgbClr val="1C1917"/>
                 </a:solidFill>
                 <a:latin typeface="Calibri"/>
               </a:rPr>
+              <a:t>Business details update</a:t>
+            </a:r>
+          </a:p>
+        </p:txBody>
+      </p:sp>
+      <p:sp>
+        <p:nvSpPr>
+          <p:cNvPr id="143" name="Rectangle 142"/>
+          <p:cNvSpPr/>
+          <p:nvPr/>
+        </p:nvSpPr>
+        <p:spPr>
+          <a:xfrm>
+            <a:off x="3383280" y="4078224"/>
+            <a:ext cx="2788920" cy="457200"/>
+          </a:xfrm>
+          <a:prstGeom prst="rect">
+            <a:avLst/>
+          </a:prstGeom>
+          <a:solidFill>
+            <a:srgbClr val="F5F5F4"/>
+          </a:solidFill>
+          <a:ln>
+            <a:noFill/>
+          </a:ln>
+          <a:effectLst/>
+        </p:spPr>
+        <p:style>
+          <a:lnRef idx="1">
+            <a:schemeClr val="accent1"/>
+          </a:lnRef>
+          <a:fillRef idx="3">
+            <a:schemeClr val="accent1"/>
+          </a:fillRef>
+          <a:effectRef idx="2">
+            <a:schemeClr val="accent1"/>
+          </a:effectRef>
+          <a:fontRef idx="minor">
+            <a:schemeClr val="lt1"/>
+          </a:fontRef>
+        </p:style>
+        <p:txBody>
+          <a:bodyPr rtlCol="0" anchor="ctr"/>
+          <a:lstStyle/>
+          <a:p>
+            <a:pPr algn="ctr"/>
+          </a:p>
+        </p:txBody>
+      </p:sp>
+      <p:sp>
+        <p:nvSpPr>
+          <p:cNvPr id="144" name="Rectangle 143"/>
+          <p:cNvSpPr/>
+          <p:nvPr/>
+        </p:nvSpPr>
+        <p:spPr>
+          <a:xfrm>
+            <a:off x="3383280" y="4078224"/>
+            <a:ext cx="45720" cy="457200"/>
+          </a:xfrm>
+          <a:prstGeom prst="rect">
+            <a:avLst/>
+          </a:prstGeom>
+          <a:solidFill>
+            <a:srgbClr val="DA291C"/>
+          </a:solidFill>
+          <a:ln>
+            <a:noFill/>
+          </a:ln>
+          <a:effectLst/>
+        </p:spPr>
+        <p:style>
+          <a:lnRef idx="1">
+            <a:schemeClr val="accent1"/>
+          </a:lnRef>
+          <a:fillRef idx="3">
+            <a:schemeClr val="accent1"/>
+          </a:fillRef>
+          <a:effectRef idx="2">
+            <a:schemeClr val="accent1"/>
+          </a:effectRef>
+          <a:fontRef idx="minor">
+            <a:schemeClr val="lt1"/>
+          </a:fontRef>
+        </p:style>
+        <p:txBody>
+          <a:bodyPr rtlCol="0" anchor="ctr"/>
+          <a:lstStyle/>
+          <a:p>
+            <a:pPr algn="ctr"/>
+          </a:p>
+        </p:txBody>
+      </p:sp>
+      <p:sp>
+        <p:nvSpPr>
+          <p:cNvPr id="145" name="TextBox 144"/>
+          <p:cNvSpPr txBox="1"/>
+          <p:nvPr/>
+        </p:nvSpPr>
+        <p:spPr>
+          <a:xfrm>
+            <a:off x="3547872" y="4105656"/>
+            <a:ext cx="2505456" cy="402336"/>
+          </a:xfrm>
+          <a:prstGeom prst="rect">
+            <a:avLst/>
+          </a:prstGeom>
+          <a:noFill/>
+        </p:spPr>
+        <p:txBody>
+          <a:bodyPr wrap="square" anchor="ctr" lIns="12700" rIns="12700" tIns="0" bIns="0">
+            <a:spAutoFit/>
+          </a:bodyPr>
+          <a:lstStyle/>
+          <a:p>
+            <a:r>
+              <a:rPr sz="850">
+                <a:solidFill>
+                  <a:srgbClr val="1C1917"/>
+                </a:solidFill>
+                <a:latin typeface="Calibri"/>
+              </a:rPr>
+              <a:t>Dormant account reactivation</a:t>
+            </a:r>
+          </a:p>
+        </p:txBody>
+      </p:sp>
+      <p:sp>
+        <p:nvSpPr>
+          <p:cNvPr id="146" name="Rectangle 145"/>
+          <p:cNvSpPr/>
+          <p:nvPr/>
+        </p:nvSpPr>
+        <p:spPr>
+          <a:xfrm>
+            <a:off x="3383280" y="4626864"/>
+            <a:ext cx="2788920" cy="457200"/>
+          </a:xfrm>
+          <a:prstGeom prst="rect">
+            <a:avLst/>
+          </a:prstGeom>
+          <a:solidFill>
+            <a:srgbClr val="FFFFFF"/>
+          </a:solidFill>
+          <a:ln>
+            <a:noFill/>
+          </a:ln>
+          <a:effectLst/>
+        </p:spPr>
+        <p:style>
+          <a:lnRef idx="1">
+            <a:schemeClr val="accent1"/>
+          </a:lnRef>
+          <a:fillRef idx="3">
+            <a:schemeClr val="accent1"/>
+          </a:fillRef>
+          <a:effectRef idx="2">
+            <a:schemeClr val="accent1"/>
+          </a:effectRef>
+          <a:fontRef idx="minor">
+            <a:schemeClr val="lt1"/>
+          </a:fontRef>
+        </p:style>
+        <p:txBody>
+          <a:bodyPr rtlCol="0" anchor="ctr"/>
+          <a:lstStyle/>
+          <a:p>
+            <a:pPr algn="ctr"/>
+          </a:p>
+        </p:txBody>
+      </p:sp>
+      <p:sp>
+        <p:nvSpPr>
+          <p:cNvPr id="147" name="Rectangle 146"/>
+          <p:cNvSpPr/>
+          <p:nvPr/>
+        </p:nvSpPr>
+        <p:spPr>
+          <a:xfrm>
+            <a:off x="3383280" y="4626864"/>
+            <a:ext cx="45720" cy="457200"/>
+          </a:xfrm>
+          <a:prstGeom prst="rect">
+            <a:avLst/>
+          </a:prstGeom>
+          <a:solidFill>
+            <a:srgbClr val="DA291C"/>
+          </a:solidFill>
+          <a:ln>
+            <a:noFill/>
+          </a:ln>
+          <a:effectLst/>
+        </p:spPr>
+        <p:style>
+          <a:lnRef idx="1">
+            <a:schemeClr val="accent1"/>
+          </a:lnRef>
+          <a:fillRef idx="3">
+            <a:schemeClr val="accent1"/>
+          </a:fillRef>
+          <a:effectRef idx="2">
+            <a:schemeClr val="accent1"/>
+          </a:effectRef>
+          <a:fontRef idx="minor">
+            <a:schemeClr val="lt1"/>
+          </a:fontRef>
+        </p:style>
+        <p:txBody>
+          <a:bodyPr rtlCol="0" anchor="ctr"/>
+          <a:lstStyle/>
+          <a:p>
+            <a:pPr algn="ctr"/>
+          </a:p>
+        </p:txBody>
+      </p:sp>
+      <p:sp>
+        <p:nvSpPr>
+          <p:cNvPr id="148" name="TextBox 147"/>
+          <p:cNvSpPr txBox="1"/>
+          <p:nvPr/>
+        </p:nvSpPr>
+        <p:spPr>
+          <a:xfrm>
+            <a:off x="3547872" y="4654296"/>
+            <a:ext cx="2505456" cy="402336"/>
+          </a:xfrm>
+          <a:prstGeom prst="rect">
+            <a:avLst/>
+          </a:prstGeom>
+          <a:noFill/>
+        </p:spPr>
+        <p:txBody>
+          <a:bodyPr wrap="square" anchor="ctr" lIns="12700" rIns="12700" tIns="0" bIns="0">
+            <a:spAutoFit/>
+          </a:bodyPr>
+          <a:lstStyle/>
+          <a:p>
+            <a:r>
+              <a:rPr sz="850">
+                <a:solidFill>
+                  <a:srgbClr val="1C1917"/>
+                </a:solidFill>
+                <a:latin typeface="Calibri"/>
+              </a:rPr>
+              <a:t>MTD VAT quarterly submission</a:t>
+            </a:r>
+          </a:p>
+        </p:txBody>
+      </p:sp>
+      <p:sp>
+        <p:nvSpPr>
+          <p:cNvPr id="149" name="Rectangle 148"/>
+          <p:cNvSpPr/>
+          <p:nvPr/>
+        </p:nvSpPr>
+        <p:spPr>
+          <a:xfrm>
+            <a:off x="3383280" y="5175504"/>
+            <a:ext cx="2788920" cy="457200"/>
+          </a:xfrm>
+          <a:prstGeom prst="rect">
+            <a:avLst/>
+          </a:prstGeom>
+          <a:solidFill>
+            <a:srgbClr val="F5F5F4"/>
+          </a:solidFill>
+          <a:ln>
+            <a:noFill/>
+          </a:ln>
+          <a:effectLst/>
+        </p:spPr>
+        <p:style>
+          <a:lnRef idx="1">
+            <a:schemeClr val="accent1"/>
+          </a:lnRef>
+          <a:fillRef idx="3">
+            <a:schemeClr val="accent1"/>
+          </a:fillRef>
+          <a:effectRef idx="2">
+            <a:schemeClr val="accent1"/>
+          </a:effectRef>
+          <a:fontRef idx="minor">
+            <a:schemeClr val="lt1"/>
+          </a:fontRef>
+        </p:style>
+        <p:txBody>
+          <a:bodyPr rtlCol="0" anchor="ctr"/>
+          <a:lstStyle/>
+          <a:p>
+            <a:pPr algn="ctr"/>
+          </a:p>
+        </p:txBody>
+      </p:sp>
+      <p:sp>
+        <p:nvSpPr>
+          <p:cNvPr id="150" name="Rectangle 149"/>
+          <p:cNvSpPr/>
+          <p:nvPr/>
+        </p:nvSpPr>
+        <p:spPr>
+          <a:xfrm>
+            <a:off x="3383280" y="5175504"/>
+            <a:ext cx="45720" cy="457200"/>
+          </a:xfrm>
+          <a:prstGeom prst="rect">
+            <a:avLst/>
+          </a:prstGeom>
+          <a:solidFill>
+            <a:srgbClr val="DA291C"/>
+          </a:solidFill>
+          <a:ln>
+            <a:noFill/>
+          </a:ln>
+          <a:effectLst/>
+        </p:spPr>
+        <p:style>
+          <a:lnRef idx="1">
+            <a:schemeClr val="accent1"/>
+          </a:lnRef>
+          <a:fillRef idx="3">
+            <a:schemeClr val="accent1"/>
+          </a:fillRef>
+          <a:effectRef idx="2">
+            <a:schemeClr val="accent1"/>
+          </a:effectRef>
+          <a:fontRef idx="minor">
+            <a:schemeClr val="lt1"/>
+          </a:fontRef>
+        </p:style>
+        <p:txBody>
+          <a:bodyPr rtlCol="0" anchor="ctr"/>
+          <a:lstStyle/>
+          <a:p>
+            <a:pPr algn="ctr"/>
+          </a:p>
+        </p:txBody>
+      </p:sp>
+      <p:sp>
+        <p:nvSpPr>
+          <p:cNvPr id="151" name="TextBox 150"/>
+          <p:cNvSpPr txBox="1"/>
+          <p:nvPr/>
+        </p:nvSpPr>
+        <p:spPr>
+          <a:xfrm>
+            <a:off x="3547872" y="5202936"/>
+            <a:ext cx="2505456" cy="402336"/>
+          </a:xfrm>
+          <a:prstGeom prst="rect">
+            <a:avLst/>
+          </a:prstGeom>
+          <a:noFill/>
+        </p:spPr>
+        <p:txBody>
+          <a:bodyPr wrap="square" anchor="ctr" lIns="12700" rIns="12700" tIns="0" bIns="0">
+            <a:spAutoFit/>
+          </a:bodyPr>
+          <a:lstStyle/>
+          <a:p>
+            <a:r>
+              <a:rPr sz="850">
+                <a:solidFill>
+                  <a:srgbClr val="1C1917"/>
+                </a:solidFill>
+                <a:latin typeface="Calibri"/>
+              </a:rPr>
+              <a:t>International FX payment (MLR screening)</a:t>
+            </a:r>
+          </a:p>
+        </p:txBody>
+      </p:sp>
+      <p:sp>
+        <p:nvSpPr>
+          <p:cNvPr id="152" name="Rectangle 151"/>
+          <p:cNvSpPr/>
+          <p:nvPr/>
+        </p:nvSpPr>
+        <p:spPr>
+          <a:xfrm>
+            <a:off x="3383280" y="5724144"/>
+            <a:ext cx="2788920" cy="457200"/>
+          </a:xfrm>
+          <a:prstGeom prst="rect">
+            <a:avLst/>
+          </a:prstGeom>
+          <a:solidFill>
+            <a:srgbClr val="FFFFFF"/>
+          </a:solidFill>
+          <a:ln>
+            <a:noFill/>
+          </a:ln>
+          <a:effectLst/>
+        </p:spPr>
+        <p:style>
+          <a:lnRef idx="1">
+            <a:schemeClr val="accent1"/>
+          </a:lnRef>
+          <a:fillRef idx="3">
+            <a:schemeClr val="accent1"/>
+          </a:fillRef>
+          <a:effectRef idx="2">
+            <a:schemeClr val="accent1"/>
+          </a:effectRef>
+          <a:fontRef idx="minor">
+            <a:schemeClr val="lt1"/>
+          </a:fontRef>
+        </p:style>
+        <p:txBody>
+          <a:bodyPr rtlCol="0" anchor="ctr"/>
+          <a:lstStyle/>
+          <a:p>
+            <a:pPr algn="ctr"/>
+          </a:p>
+        </p:txBody>
+      </p:sp>
+      <p:sp>
+        <p:nvSpPr>
+          <p:cNvPr id="153" name="Rectangle 152"/>
+          <p:cNvSpPr/>
+          <p:nvPr/>
+        </p:nvSpPr>
+        <p:spPr>
+          <a:xfrm>
+            <a:off x="3383280" y="5724144"/>
+            <a:ext cx="45720" cy="457200"/>
+          </a:xfrm>
+          <a:prstGeom prst="rect">
+            <a:avLst/>
+          </a:prstGeom>
+          <a:solidFill>
+            <a:srgbClr val="DA291C"/>
+          </a:solidFill>
+          <a:ln>
+            <a:noFill/>
+          </a:ln>
+          <a:effectLst/>
+        </p:spPr>
+        <p:style>
+          <a:lnRef idx="1">
+            <a:schemeClr val="accent1"/>
+          </a:lnRef>
+          <a:fillRef idx="3">
+            <a:schemeClr val="accent1"/>
+          </a:fillRef>
+          <a:effectRef idx="2">
+            <a:schemeClr val="accent1"/>
+          </a:effectRef>
+          <a:fontRef idx="minor">
+            <a:schemeClr val="lt1"/>
+          </a:fontRef>
+        </p:style>
+        <p:txBody>
+          <a:bodyPr rtlCol="0" anchor="ctr"/>
+          <a:lstStyle/>
+          <a:p>
+            <a:pPr algn="ctr"/>
+          </a:p>
+        </p:txBody>
+      </p:sp>
+      <p:sp>
+        <p:nvSpPr>
+          <p:cNvPr id="154" name="TextBox 153"/>
+          <p:cNvSpPr txBox="1"/>
+          <p:nvPr/>
+        </p:nvSpPr>
+        <p:spPr>
+          <a:xfrm>
+            <a:off x="3547872" y="5751576"/>
+            <a:ext cx="2505456" cy="402336"/>
+          </a:xfrm>
+          <a:prstGeom prst="rect">
+            <a:avLst/>
+          </a:prstGeom>
+          <a:noFill/>
+        </p:spPr>
+        <p:txBody>
+          <a:bodyPr wrap="square" anchor="ctr" lIns="12700" rIns="12700" tIns="0" bIns="0">
+            <a:spAutoFit/>
+          </a:bodyPr>
+          <a:lstStyle/>
+          <a:p>
+            <a:r>
+              <a:rPr sz="850">
+                <a:solidFill>
+                  <a:srgbClr val="1C1917"/>
+                </a:solidFill>
+                <a:latin typeface="Calibri"/>
+              </a:rPr>
+              <a:t>Complaint handling (FCA DISP + FOS)</a:t>
+            </a:r>
+          </a:p>
+        </p:txBody>
+      </p:sp>
+      <p:sp>
+        <p:nvSpPr>
+          <p:cNvPr id="155" name="Rectangle 154"/>
+          <p:cNvSpPr/>
+          <p:nvPr/>
+        </p:nvSpPr>
+        <p:spPr>
+          <a:xfrm>
+            <a:off x="6327648" y="1335024"/>
+            <a:ext cx="2788920" cy="457200"/>
+          </a:xfrm>
+          <a:prstGeom prst="rect">
+            <a:avLst/>
+          </a:prstGeom>
+          <a:solidFill>
+            <a:srgbClr val="FFFFFF"/>
+          </a:solidFill>
+          <a:ln>
+            <a:noFill/>
+          </a:ln>
+          <a:effectLst/>
+        </p:spPr>
+        <p:style>
+          <a:lnRef idx="1">
+            <a:schemeClr val="accent1"/>
+          </a:lnRef>
+          <a:fillRef idx="3">
+            <a:schemeClr val="accent1"/>
+          </a:fillRef>
+          <a:effectRef idx="2">
+            <a:schemeClr val="accent1"/>
+          </a:effectRef>
+          <a:fontRef idx="minor">
+            <a:schemeClr val="lt1"/>
+          </a:fontRef>
+        </p:style>
+        <p:txBody>
+          <a:bodyPr rtlCol="0" anchor="ctr"/>
+          <a:lstStyle/>
+          <a:p>
+            <a:pPr algn="ctr"/>
+          </a:p>
+        </p:txBody>
+      </p:sp>
+      <p:sp>
+        <p:nvSpPr>
+          <p:cNvPr id="156" name="Rectangle 155"/>
+          <p:cNvSpPr/>
+          <p:nvPr/>
+        </p:nvSpPr>
+        <p:spPr>
+          <a:xfrm>
+            <a:off x="6327648" y="1335024"/>
+            <a:ext cx="45720" cy="457200"/>
+          </a:xfrm>
+          <a:prstGeom prst="rect">
+            <a:avLst/>
+          </a:prstGeom>
+          <a:solidFill>
+            <a:srgbClr val="DA291C"/>
+          </a:solidFill>
+          <a:ln>
+            <a:noFill/>
+          </a:ln>
+          <a:effectLst/>
+        </p:spPr>
+        <p:style>
+          <a:lnRef idx="1">
+            <a:schemeClr val="accent1"/>
+          </a:lnRef>
+          <a:fillRef idx="3">
+            <a:schemeClr val="accent1"/>
+          </a:fillRef>
+          <a:effectRef idx="2">
+            <a:schemeClr val="accent1"/>
+          </a:effectRef>
+          <a:fontRef idx="minor">
+            <a:schemeClr val="lt1"/>
+          </a:fontRef>
+        </p:style>
+        <p:txBody>
+          <a:bodyPr rtlCol="0" anchor="ctr"/>
+          <a:lstStyle/>
+          <a:p>
+            <a:pPr algn="ctr"/>
+          </a:p>
+        </p:txBody>
+      </p:sp>
+      <p:sp>
+        <p:nvSpPr>
+          <p:cNvPr id="157" name="TextBox 156"/>
+          <p:cNvSpPr txBox="1"/>
+          <p:nvPr/>
+        </p:nvSpPr>
+        <p:spPr>
+          <a:xfrm>
+            <a:off x="6492240" y="1362456"/>
+            <a:ext cx="2505456" cy="402336"/>
+          </a:xfrm>
+          <a:prstGeom prst="rect">
+            <a:avLst/>
+          </a:prstGeom>
+          <a:noFill/>
+        </p:spPr>
+        <p:txBody>
+          <a:bodyPr wrap="square" anchor="ctr" lIns="12700" rIns="12700" tIns="0" bIns="0">
+            <a:spAutoFit/>
+          </a:bodyPr>
+          <a:lstStyle/>
+          <a:p>
+            <a:r>
+              <a:rPr sz="850">
+                <a:solidFill>
+                  <a:srgbClr val="1C1917"/>
+                </a:solidFill>
+                <a:latin typeface="Calibri"/>
+              </a:rPr>
+              <a:t>Business health score (5-factor gauge)</a:t>
+            </a:r>
+          </a:p>
+        </p:txBody>
+      </p:sp>
+      <p:sp>
+        <p:nvSpPr>
+          <p:cNvPr id="158" name="Rectangle 157"/>
+          <p:cNvSpPr/>
+          <p:nvPr/>
+        </p:nvSpPr>
+        <p:spPr>
+          <a:xfrm>
+            <a:off x="6327648" y="1883664"/>
+            <a:ext cx="2788920" cy="457200"/>
+          </a:xfrm>
+          <a:prstGeom prst="rect">
+            <a:avLst/>
+          </a:prstGeom>
+          <a:solidFill>
+            <a:srgbClr val="F5F5F4"/>
+          </a:solidFill>
+          <a:ln>
+            <a:noFill/>
+          </a:ln>
+          <a:effectLst/>
+        </p:spPr>
+        <p:style>
+          <a:lnRef idx="1">
+            <a:schemeClr val="accent1"/>
+          </a:lnRef>
+          <a:fillRef idx="3">
+            <a:schemeClr val="accent1"/>
+          </a:fillRef>
+          <a:effectRef idx="2">
+            <a:schemeClr val="accent1"/>
+          </a:effectRef>
+          <a:fontRef idx="minor">
+            <a:schemeClr val="lt1"/>
+          </a:fontRef>
+        </p:style>
+        <p:txBody>
+          <a:bodyPr rtlCol="0" anchor="ctr"/>
+          <a:lstStyle/>
+          <a:p>
+            <a:pPr algn="ctr"/>
+          </a:p>
+        </p:txBody>
+      </p:sp>
+      <p:sp>
+        <p:nvSpPr>
+          <p:cNvPr id="159" name="Rectangle 158"/>
+          <p:cNvSpPr/>
+          <p:nvPr/>
+        </p:nvSpPr>
+        <p:spPr>
+          <a:xfrm>
+            <a:off x="6327648" y="1883664"/>
+            <a:ext cx="45720" cy="457200"/>
+          </a:xfrm>
+          <a:prstGeom prst="rect">
+            <a:avLst/>
+          </a:prstGeom>
+          <a:solidFill>
+            <a:srgbClr val="DA291C"/>
+          </a:solidFill>
+          <a:ln>
+            <a:noFill/>
+          </a:ln>
+          <a:effectLst/>
+        </p:spPr>
+        <p:style>
+          <a:lnRef idx="1">
+            <a:schemeClr val="accent1"/>
+          </a:lnRef>
+          <a:fillRef idx="3">
+            <a:schemeClr val="accent1"/>
+          </a:fillRef>
+          <a:effectRef idx="2">
+            <a:schemeClr val="accent1"/>
+          </a:effectRef>
+          <a:fontRef idx="minor">
+            <a:schemeClr val="lt1"/>
+          </a:fontRef>
+        </p:style>
+        <p:txBody>
+          <a:bodyPr rtlCol="0" anchor="ctr"/>
+          <a:lstStyle/>
+          <a:p>
+            <a:pPr algn="ctr"/>
+          </a:p>
+        </p:txBody>
+      </p:sp>
+      <p:sp>
+        <p:nvSpPr>
+          <p:cNvPr id="160" name="TextBox 159"/>
+          <p:cNvSpPr txBox="1"/>
+          <p:nvPr/>
+        </p:nvSpPr>
+        <p:spPr>
+          <a:xfrm>
+            <a:off x="6492240" y="1911095"/>
+            <a:ext cx="2505456" cy="402336"/>
+          </a:xfrm>
+          <a:prstGeom prst="rect">
+            <a:avLst/>
+          </a:prstGeom>
+          <a:noFill/>
+        </p:spPr>
+        <p:txBody>
+          <a:bodyPr wrap="square" anchor="ctr" lIns="12700" rIns="12700" tIns="0" bIns="0">
+            <a:spAutoFit/>
+          </a:bodyPr>
+          <a:lstStyle/>
+          <a:p>
+            <a:r>
+              <a:rPr sz="850">
+                <a:solidFill>
+                  <a:srgbClr val="1C1917"/>
+                </a:solidFill>
+                <a:latin typeface="Calibri"/>
+              </a:rPr>
+              <a:t>13-week cash flow forecast</a:t>
+            </a:r>
+          </a:p>
+        </p:txBody>
+      </p:sp>
+      <p:sp>
+        <p:nvSpPr>
+          <p:cNvPr id="161" name="Rectangle 160"/>
+          <p:cNvSpPr/>
+          <p:nvPr/>
+        </p:nvSpPr>
+        <p:spPr>
+          <a:xfrm>
+            <a:off x="6327648" y="2432304"/>
+            <a:ext cx="2788920" cy="457200"/>
+          </a:xfrm>
+          <a:prstGeom prst="rect">
+            <a:avLst/>
+          </a:prstGeom>
+          <a:solidFill>
+            <a:srgbClr val="FFFFFF"/>
+          </a:solidFill>
+          <a:ln>
+            <a:noFill/>
+          </a:ln>
+          <a:effectLst/>
+        </p:spPr>
+        <p:style>
+          <a:lnRef idx="1">
+            <a:schemeClr val="accent1"/>
+          </a:lnRef>
+          <a:fillRef idx="3">
+            <a:schemeClr val="accent1"/>
+          </a:fillRef>
+          <a:effectRef idx="2">
+            <a:schemeClr val="accent1"/>
+          </a:effectRef>
+          <a:fontRef idx="minor">
+            <a:schemeClr val="lt1"/>
+          </a:fontRef>
+        </p:style>
+        <p:txBody>
+          <a:bodyPr rtlCol="0" anchor="ctr"/>
+          <a:lstStyle/>
+          <a:p>
+            <a:pPr algn="ctr"/>
+          </a:p>
+        </p:txBody>
+      </p:sp>
+      <p:sp>
+        <p:nvSpPr>
+          <p:cNvPr id="162" name="Rectangle 161"/>
+          <p:cNvSpPr/>
+          <p:nvPr/>
+        </p:nvSpPr>
+        <p:spPr>
+          <a:xfrm>
+            <a:off x="6327648" y="2432304"/>
+            <a:ext cx="45720" cy="457200"/>
+          </a:xfrm>
+          <a:prstGeom prst="rect">
+            <a:avLst/>
+          </a:prstGeom>
+          <a:solidFill>
+            <a:srgbClr val="DA291C"/>
+          </a:solidFill>
+          <a:ln>
+            <a:noFill/>
+          </a:ln>
+          <a:effectLst/>
+        </p:spPr>
+        <p:style>
+          <a:lnRef idx="1">
+            <a:schemeClr val="accent1"/>
+          </a:lnRef>
+          <a:fillRef idx="3">
+            <a:schemeClr val="accent1"/>
+          </a:fillRef>
+          <a:effectRef idx="2">
+            <a:schemeClr val="accent1"/>
+          </a:effectRef>
+          <a:fontRef idx="minor">
+            <a:schemeClr val="lt1"/>
+          </a:fontRef>
+        </p:style>
+        <p:txBody>
+          <a:bodyPr rtlCol="0" anchor="ctr"/>
+          <a:lstStyle/>
+          <a:p>
+            <a:pPr algn="ctr"/>
+          </a:p>
+        </p:txBody>
+      </p:sp>
+      <p:sp>
+        <p:nvSpPr>
+          <p:cNvPr id="163" name="TextBox 162"/>
+          <p:cNvSpPr txBox="1"/>
+          <p:nvPr/>
+        </p:nvSpPr>
+        <p:spPr>
+          <a:xfrm>
+            <a:off x="6492240" y="2459736"/>
+            <a:ext cx="2505456" cy="402336"/>
+          </a:xfrm>
+          <a:prstGeom prst="rect">
+            <a:avLst/>
+          </a:prstGeom>
+          <a:noFill/>
+        </p:spPr>
+        <p:txBody>
+          <a:bodyPr wrap="square" anchor="ctr" lIns="12700" rIns="12700" tIns="0" bIns="0">
+            <a:spAutoFit/>
+          </a:bodyPr>
+          <a:lstStyle/>
+          <a:p>
+            <a:r>
+              <a:rPr sz="850">
+                <a:solidFill>
+                  <a:srgbClr val="1C1917"/>
+                </a:solidFill>
+                <a:latin typeface="Calibri"/>
+              </a:rPr>
+              <a:t>Supplier risk radar (Companies House)</a:t>
+            </a:r>
+          </a:p>
+        </p:txBody>
+      </p:sp>
+      <p:sp>
+        <p:nvSpPr>
+          <p:cNvPr id="164" name="Rectangle 163"/>
+          <p:cNvSpPr/>
+          <p:nvPr/>
+        </p:nvSpPr>
+        <p:spPr>
+          <a:xfrm>
+            <a:off x="6327648" y="2980944"/>
+            <a:ext cx="2788920" cy="457200"/>
+          </a:xfrm>
+          <a:prstGeom prst="rect">
+            <a:avLst/>
+          </a:prstGeom>
+          <a:solidFill>
+            <a:srgbClr val="F5F5F4"/>
+          </a:solidFill>
+          <a:ln>
+            <a:noFill/>
+          </a:ln>
+          <a:effectLst/>
+        </p:spPr>
+        <p:style>
+          <a:lnRef idx="1">
+            <a:schemeClr val="accent1"/>
+          </a:lnRef>
+          <a:fillRef idx="3">
+            <a:schemeClr val="accent1"/>
+          </a:fillRef>
+          <a:effectRef idx="2">
+            <a:schemeClr val="accent1"/>
+          </a:effectRef>
+          <a:fontRef idx="minor">
+            <a:schemeClr val="lt1"/>
+          </a:fontRef>
+        </p:style>
+        <p:txBody>
+          <a:bodyPr rtlCol="0" anchor="ctr"/>
+          <a:lstStyle/>
+          <a:p>
+            <a:pPr algn="ctr"/>
+          </a:p>
+        </p:txBody>
+      </p:sp>
+      <p:sp>
+        <p:nvSpPr>
+          <p:cNvPr id="165" name="Rectangle 164"/>
+          <p:cNvSpPr/>
+          <p:nvPr/>
+        </p:nvSpPr>
+        <p:spPr>
+          <a:xfrm>
+            <a:off x="6327648" y="2980944"/>
+            <a:ext cx="45720" cy="457200"/>
+          </a:xfrm>
+          <a:prstGeom prst="rect">
+            <a:avLst/>
+          </a:prstGeom>
+          <a:solidFill>
+            <a:srgbClr val="DA291C"/>
+          </a:solidFill>
+          <a:ln>
+            <a:noFill/>
+          </a:ln>
+          <a:effectLst/>
+        </p:spPr>
+        <p:style>
+          <a:lnRef idx="1">
+            <a:schemeClr val="accent1"/>
+          </a:lnRef>
+          <a:fillRef idx="3">
+            <a:schemeClr val="accent1"/>
+          </a:fillRef>
+          <a:effectRef idx="2">
+            <a:schemeClr val="accent1"/>
+          </a:effectRef>
+          <a:fontRef idx="minor">
+            <a:schemeClr val="lt1"/>
+          </a:fontRef>
+        </p:style>
+        <p:txBody>
+          <a:bodyPr rtlCol="0" anchor="ctr"/>
+          <a:lstStyle/>
+          <a:p>
+            <a:pPr algn="ctr"/>
+          </a:p>
+        </p:txBody>
+      </p:sp>
+      <p:sp>
+        <p:nvSpPr>
+          <p:cNvPr id="166" name="TextBox 165"/>
+          <p:cNvSpPr txBox="1"/>
+          <p:nvPr/>
+        </p:nvSpPr>
+        <p:spPr>
+          <a:xfrm>
+            <a:off x="6492240" y="3008375"/>
+            <a:ext cx="2505456" cy="402336"/>
+          </a:xfrm>
+          <a:prstGeom prst="rect">
+            <a:avLst/>
+          </a:prstGeom>
+          <a:noFill/>
+        </p:spPr>
+        <p:txBody>
+          <a:bodyPr wrap="square" anchor="ctr" lIns="12700" rIns="12700" tIns="0" bIns="0">
+            <a:spAutoFit/>
+          </a:bodyPr>
+          <a:lstStyle/>
+          <a:p>
+            <a:r>
+              <a:rPr sz="850">
+                <a:solidFill>
+                  <a:srgbClr val="1C1917"/>
+                </a:solidFill>
+                <a:latin typeface="Calibri"/>
+              </a:rPr>
+              <a:t>Director command centre</a:t>
+            </a:r>
+          </a:p>
+        </p:txBody>
+      </p:sp>
+      <p:sp>
+        <p:nvSpPr>
+          <p:cNvPr id="167" name="Rectangle 166"/>
+          <p:cNvSpPr/>
+          <p:nvPr/>
+        </p:nvSpPr>
+        <p:spPr>
+          <a:xfrm>
+            <a:off x="6327648" y="3529584"/>
+            <a:ext cx="2788920" cy="457200"/>
+          </a:xfrm>
+          <a:prstGeom prst="rect">
+            <a:avLst/>
+          </a:prstGeom>
+          <a:solidFill>
+            <a:srgbClr val="FFFFFF"/>
+          </a:solidFill>
+          <a:ln>
+            <a:noFill/>
+          </a:ln>
+          <a:effectLst/>
+        </p:spPr>
+        <p:style>
+          <a:lnRef idx="1">
+            <a:schemeClr val="accent1"/>
+          </a:lnRef>
+          <a:fillRef idx="3">
+            <a:schemeClr val="accent1"/>
+          </a:fillRef>
+          <a:effectRef idx="2">
+            <a:schemeClr val="accent1"/>
+          </a:effectRef>
+          <a:fontRef idx="minor">
+            <a:schemeClr val="lt1"/>
+          </a:fontRef>
+        </p:style>
+        <p:txBody>
+          <a:bodyPr rtlCol="0" anchor="ctr"/>
+          <a:lstStyle/>
+          <a:p>
+            <a:pPr algn="ctr"/>
+          </a:p>
+        </p:txBody>
+      </p:sp>
+      <p:sp>
+        <p:nvSpPr>
+          <p:cNvPr id="168" name="Rectangle 167"/>
+          <p:cNvSpPr/>
+          <p:nvPr/>
+        </p:nvSpPr>
+        <p:spPr>
+          <a:xfrm>
+            <a:off x="6327648" y="3529584"/>
+            <a:ext cx="45720" cy="457200"/>
+          </a:xfrm>
+          <a:prstGeom prst="rect">
+            <a:avLst/>
+          </a:prstGeom>
+          <a:solidFill>
+            <a:srgbClr val="DA291C"/>
+          </a:solidFill>
+          <a:ln>
+            <a:noFill/>
+          </a:ln>
+          <a:effectLst/>
+        </p:spPr>
+        <p:style>
+          <a:lnRef idx="1">
+            <a:schemeClr val="accent1"/>
+          </a:lnRef>
+          <a:fillRef idx="3">
+            <a:schemeClr val="accent1"/>
+          </a:fillRef>
+          <a:effectRef idx="2">
+            <a:schemeClr val="accent1"/>
+          </a:effectRef>
+          <a:fontRef idx="minor">
+            <a:schemeClr val="lt1"/>
+          </a:fontRef>
+        </p:style>
+        <p:txBody>
+          <a:bodyPr rtlCol="0" anchor="ctr"/>
+          <a:lstStyle/>
+          <a:p>
+            <a:pPr algn="ctr"/>
+          </a:p>
+        </p:txBody>
+      </p:sp>
+      <p:sp>
+        <p:nvSpPr>
+          <p:cNvPr id="169" name="TextBox 168"/>
+          <p:cNvSpPr txBox="1"/>
+          <p:nvPr/>
+        </p:nvSpPr>
+        <p:spPr>
+          <a:xfrm>
+            <a:off x="6492240" y="3557015"/>
+            <a:ext cx="2505456" cy="402336"/>
+          </a:xfrm>
+          <a:prstGeom prst="rect">
+            <a:avLst/>
+          </a:prstGeom>
+          <a:noFill/>
+        </p:spPr>
+        <p:txBody>
+          <a:bodyPr wrap="square" anchor="ctr" lIns="12700" rIns="12700" tIns="0" bIns="0">
+            <a:spAutoFit/>
+          </a:bodyPr>
+          <a:lstStyle/>
+          <a:p>
+            <a:r>
+              <a:rPr sz="850">
+                <a:solidFill>
+                  <a:srgbClr val="1C1917"/>
+                </a:solidFill>
+                <a:latin typeface="Calibri"/>
+              </a:rPr>
+              <a:t>Smart payment sequencer</a:t>
+            </a:r>
+          </a:p>
+        </p:txBody>
+      </p:sp>
+      <p:sp>
+        <p:nvSpPr>
+          <p:cNvPr id="170" name="Rectangle 169"/>
+          <p:cNvSpPr/>
+          <p:nvPr/>
+        </p:nvSpPr>
+        <p:spPr>
+          <a:xfrm>
+            <a:off x="6327648" y="4078224"/>
+            <a:ext cx="2788920" cy="457200"/>
+          </a:xfrm>
+          <a:prstGeom prst="rect">
+            <a:avLst/>
+          </a:prstGeom>
+          <a:solidFill>
+            <a:srgbClr val="F5F5F4"/>
+          </a:solidFill>
+          <a:ln>
+            <a:noFill/>
+          </a:ln>
+          <a:effectLst/>
+        </p:spPr>
+        <p:style>
+          <a:lnRef idx="1">
+            <a:schemeClr val="accent1"/>
+          </a:lnRef>
+          <a:fillRef idx="3">
+            <a:schemeClr val="accent1"/>
+          </a:fillRef>
+          <a:effectRef idx="2">
+            <a:schemeClr val="accent1"/>
+          </a:effectRef>
+          <a:fontRef idx="minor">
+            <a:schemeClr val="lt1"/>
+          </a:fontRef>
+        </p:style>
+        <p:txBody>
+          <a:bodyPr rtlCol="0" anchor="ctr"/>
+          <a:lstStyle/>
+          <a:p>
+            <a:pPr algn="ctr"/>
+          </a:p>
+        </p:txBody>
+      </p:sp>
+      <p:sp>
+        <p:nvSpPr>
+          <p:cNvPr id="171" name="Rectangle 170"/>
+          <p:cNvSpPr/>
+          <p:nvPr/>
+        </p:nvSpPr>
+        <p:spPr>
+          <a:xfrm>
+            <a:off x="6327648" y="4078224"/>
+            <a:ext cx="45720" cy="457200"/>
+          </a:xfrm>
+          <a:prstGeom prst="rect">
+            <a:avLst/>
+          </a:prstGeom>
+          <a:solidFill>
+            <a:srgbClr val="DA291C"/>
+          </a:solidFill>
+          <a:ln>
+            <a:noFill/>
+          </a:ln>
+          <a:effectLst/>
+        </p:spPr>
+        <p:style>
+          <a:lnRef idx="1">
+            <a:schemeClr val="accent1"/>
+          </a:lnRef>
+          <a:fillRef idx="3">
+            <a:schemeClr val="accent1"/>
+          </a:fillRef>
+          <a:effectRef idx="2">
+            <a:schemeClr val="accent1"/>
+          </a:effectRef>
+          <a:fontRef idx="minor">
+            <a:schemeClr val="lt1"/>
+          </a:fontRef>
+        </p:style>
+        <p:txBody>
+          <a:bodyPr rtlCol="0" anchor="ctr"/>
+          <a:lstStyle/>
+          <a:p>
+            <a:pPr algn="ctr"/>
+          </a:p>
+        </p:txBody>
+      </p:sp>
+      <p:sp>
+        <p:nvSpPr>
+          <p:cNvPr id="172" name="TextBox 171"/>
+          <p:cNvSpPr txBox="1"/>
+          <p:nvPr/>
+        </p:nvSpPr>
+        <p:spPr>
+          <a:xfrm>
+            <a:off x="6492240" y="4105656"/>
+            <a:ext cx="2505456" cy="402336"/>
+          </a:xfrm>
+          <a:prstGeom prst="rect">
+            <a:avLst/>
+          </a:prstGeom>
+          <a:noFill/>
+        </p:spPr>
+        <p:txBody>
+          <a:bodyPr wrap="square" anchor="ctr" lIns="12700" rIns="12700" tIns="0" bIns="0">
+            <a:spAutoFit/>
+          </a:bodyPr>
+          <a:lstStyle/>
+          <a:p>
+            <a:r>
+              <a:rPr sz="850">
+                <a:solidFill>
+                  <a:srgbClr val="1C1917"/>
+                </a:solidFill>
+                <a:latin typeface="Calibri"/>
+              </a:rPr>
+              <a:t>Pre-approved lending offer</a:t>
+            </a:r>
+          </a:p>
+        </p:txBody>
+      </p:sp>
+      <p:sp>
+        <p:nvSpPr>
+          <p:cNvPr id="173" name="Rectangle 172"/>
+          <p:cNvSpPr/>
+          <p:nvPr/>
+        </p:nvSpPr>
+        <p:spPr>
+          <a:xfrm>
+            <a:off x="6327648" y="4626864"/>
+            <a:ext cx="2788920" cy="457200"/>
+          </a:xfrm>
+          <a:prstGeom prst="rect">
+            <a:avLst/>
+          </a:prstGeom>
+          <a:solidFill>
+            <a:srgbClr val="FFFFFF"/>
+          </a:solidFill>
+          <a:ln>
+            <a:noFill/>
+          </a:ln>
+          <a:effectLst/>
+        </p:spPr>
+        <p:style>
+          <a:lnRef idx="1">
+            <a:schemeClr val="accent1"/>
+          </a:lnRef>
+          <a:fillRef idx="3">
+            <a:schemeClr val="accent1"/>
+          </a:fillRef>
+          <a:effectRef idx="2">
+            <a:schemeClr val="accent1"/>
+          </a:effectRef>
+          <a:fontRef idx="minor">
+            <a:schemeClr val="lt1"/>
+          </a:fontRef>
+        </p:style>
+        <p:txBody>
+          <a:bodyPr rtlCol="0" anchor="ctr"/>
+          <a:lstStyle/>
+          <a:p>
+            <a:pPr algn="ctr"/>
+          </a:p>
+        </p:txBody>
+      </p:sp>
+      <p:sp>
+        <p:nvSpPr>
+          <p:cNvPr id="174" name="Rectangle 173"/>
+          <p:cNvSpPr/>
+          <p:nvPr/>
+        </p:nvSpPr>
+        <p:spPr>
+          <a:xfrm>
+            <a:off x="6327648" y="4626864"/>
+            <a:ext cx="45720" cy="457200"/>
+          </a:xfrm>
+          <a:prstGeom prst="rect">
+            <a:avLst/>
+          </a:prstGeom>
+          <a:solidFill>
+            <a:srgbClr val="DA291C"/>
+          </a:solidFill>
+          <a:ln>
+            <a:noFill/>
+          </a:ln>
+          <a:effectLst/>
+        </p:spPr>
+        <p:style>
+          <a:lnRef idx="1">
+            <a:schemeClr val="accent1"/>
+          </a:lnRef>
+          <a:fillRef idx="3">
+            <a:schemeClr val="accent1"/>
+          </a:fillRef>
+          <a:effectRef idx="2">
+            <a:schemeClr val="accent1"/>
+          </a:effectRef>
+          <a:fontRef idx="minor">
+            <a:schemeClr val="lt1"/>
+          </a:fontRef>
+        </p:style>
+        <p:txBody>
+          <a:bodyPr rtlCol="0" anchor="ctr"/>
+          <a:lstStyle/>
+          <a:p>
+            <a:pPr algn="ctr"/>
+          </a:p>
+        </p:txBody>
+      </p:sp>
+      <p:sp>
+        <p:nvSpPr>
+          <p:cNvPr id="175" name="TextBox 174"/>
+          <p:cNvSpPr txBox="1"/>
+          <p:nvPr/>
+        </p:nvSpPr>
+        <p:spPr>
+          <a:xfrm>
+            <a:off x="6492240" y="4654296"/>
+            <a:ext cx="2505456" cy="402336"/>
+          </a:xfrm>
+          <a:prstGeom prst="rect">
+            <a:avLst/>
+          </a:prstGeom>
+          <a:noFill/>
+        </p:spPr>
+        <p:txBody>
+          <a:bodyPr wrap="square" anchor="ctr" lIns="12700" rIns="12700" tIns="0" bIns="0">
+            <a:spAutoFit/>
+          </a:bodyPr>
+          <a:lstStyle/>
+          <a:p>
+            <a:r>
+              <a:rPr sz="850">
+                <a:solidFill>
+                  <a:srgbClr val="1C1917"/>
+                </a:solidFill>
+                <a:latin typeface="Calibri"/>
+              </a:rPr>
+              <a:t>Financial statements + counterparty search</a:t>
+            </a:r>
+          </a:p>
+        </p:txBody>
+      </p:sp>
+      <p:sp>
+        <p:nvSpPr>
+          <p:cNvPr id="176" name="Rectangle 175"/>
+          <p:cNvSpPr/>
+          <p:nvPr/>
+        </p:nvSpPr>
+        <p:spPr>
+          <a:xfrm>
+            <a:off x="6327648" y="5175504"/>
+            <a:ext cx="2788920" cy="457200"/>
+          </a:xfrm>
+          <a:prstGeom prst="rect">
+            <a:avLst/>
+          </a:prstGeom>
+          <a:solidFill>
+            <a:srgbClr val="F5F5F4"/>
+          </a:solidFill>
+          <a:ln>
+            <a:noFill/>
+          </a:ln>
+          <a:effectLst/>
+        </p:spPr>
+        <p:style>
+          <a:lnRef idx="1">
+            <a:schemeClr val="accent1"/>
+          </a:lnRef>
+          <a:fillRef idx="3">
+            <a:schemeClr val="accent1"/>
+          </a:fillRef>
+          <a:effectRef idx="2">
+            <a:schemeClr val="accent1"/>
+          </a:effectRef>
+          <a:fontRef idx="minor">
+            <a:schemeClr val="lt1"/>
+          </a:fontRef>
+        </p:style>
+        <p:txBody>
+          <a:bodyPr rtlCol="0" anchor="ctr"/>
+          <a:lstStyle/>
+          <a:p>
+            <a:pPr algn="ctr"/>
+          </a:p>
+        </p:txBody>
+      </p:sp>
+      <p:sp>
+        <p:nvSpPr>
+          <p:cNvPr id="177" name="Rectangle 176"/>
+          <p:cNvSpPr/>
+          <p:nvPr/>
+        </p:nvSpPr>
+        <p:spPr>
+          <a:xfrm>
+            <a:off x="6327648" y="5175504"/>
+            <a:ext cx="45720" cy="457200"/>
+          </a:xfrm>
+          <a:prstGeom prst="rect">
+            <a:avLst/>
+          </a:prstGeom>
+          <a:solidFill>
+            <a:srgbClr val="DA291C"/>
+          </a:solidFill>
+          <a:ln>
+            <a:noFill/>
+          </a:ln>
+          <a:effectLst/>
+        </p:spPr>
+        <p:style>
+          <a:lnRef idx="1">
+            <a:schemeClr val="accent1"/>
+          </a:lnRef>
+          <a:fillRef idx="3">
+            <a:schemeClr val="accent1"/>
+          </a:fillRef>
+          <a:effectRef idx="2">
+            <a:schemeClr val="accent1"/>
+          </a:effectRef>
+          <a:fontRef idx="minor">
+            <a:schemeClr val="lt1"/>
+          </a:fontRef>
+        </p:style>
+        <p:txBody>
+          <a:bodyPr rtlCol="0" anchor="ctr"/>
+          <a:lstStyle/>
+          <a:p>
+            <a:pPr algn="ctr"/>
+          </a:p>
+        </p:txBody>
+      </p:sp>
+      <p:sp>
+        <p:nvSpPr>
+          <p:cNvPr id="178" name="TextBox 177"/>
+          <p:cNvSpPr txBox="1"/>
+          <p:nvPr/>
+        </p:nvSpPr>
+        <p:spPr>
+          <a:xfrm>
+            <a:off x="6492240" y="5202936"/>
+            <a:ext cx="2505456" cy="402336"/>
+          </a:xfrm>
+          <a:prstGeom prst="rect">
+            <a:avLst/>
+          </a:prstGeom>
+          <a:noFill/>
+        </p:spPr>
+        <p:txBody>
+          <a:bodyPr wrap="square" anchor="ctr" lIns="12700" rIns="12700" tIns="0" bIns="0">
+            <a:spAutoFit/>
+          </a:bodyPr>
+          <a:lstStyle/>
+          <a:p>
+            <a:r>
+              <a:rPr sz="850">
+                <a:solidFill>
+                  <a:srgbClr val="1C1917"/>
+                </a:solidFill>
+                <a:latin typeface="Calibri"/>
+              </a:rPr>
+              <a:t>Beneficiary sanctions screening</a:t>
+            </a:r>
+          </a:p>
+        </p:txBody>
+      </p:sp>
+      <p:sp>
+        <p:nvSpPr>
+          <p:cNvPr id="179" name="Rectangle 178"/>
+          <p:cNvSpPr/>
+          <p:nvPr/>
+        </p:nvSpPr>
+        <p:spPr>
+          <a:xfrm>
+            <a:off x="6327648" y="5724144"/>
+            <a:ext cx="2788920" cy="457200"/>
+          </a:xfrm>
+          <a:prstGeom prst="rect">
+            <a:avLst/>
+          </a:prstGeom>
+          <a:solidFill>
+            <a:srgbClr val="FFFFFF"/>
+          </a:solidFill>
+          <a:ln>
+            <a:noFill/>
+          </a:ln>
+          <a:effectLst/>
+        </p:spPr>
+        <p:style>
+          <a:lnRef idx="1">
+            <a:schemeClr val="accent1"/>
+          </a:lnRef>
+          <a:fillRef idx="3">
+            <a:schemeClr val="accent1"/>
+          </a:fillRef>
+          <a:effectRef idx="2">
+            <a:schemeClr val="accent1"/>
+          </a:effectRef>
+          <a:fontRef idx="minor">
+            <a:schemeClr val="lt1"/>
+          </a:fontRef>
+        </p:style>
+        <p:txBody>
+          <a:bodyPr rtlCol="0" anchor="ctr"/>
+          <a:lstStyle/>
+          <a:p>
+            <a:pPr algn="ctr"/>
+          </a:p>
+        </p:txBody>
+      </p:sp>
+      <p:sp>
+        <p:nvSpPr>
+          <p:cNvPr id="180" name="Rectangle 179"/>
+          <p:cNvSpPr/>
+          <p:nvPr/>
+        </p:nvSpPr>
+        <p:spPr>
+          <a:xfrm>
+            <a:off x="6327648" y="5724144"/>
+            <a:ext cx="45720" cy="457200"/>
+          </a:xfrm>
+          <a:prstGeom prst="rect">
+            <a:avLst/>
+          </a:prstGeom>
+          <a:solidFill>
+            <a:srgbClr val="DA291C"/>
+          </a:solidFill>
+          <a:ln>
+            <a:noFill/>
+          </a:ln>
+          <a:effectLst/>
+        </p:spPr>
+        <p:style>
+          <a:lnRef idx="1">
+            <a:schemeClr val="accent1"/>
+          </a:lnRef>
+          <a:fillRef idx="3">
+            <a:schemeClr val="accent1"/>
+          </a:fillRef>
+          <a:effectRef idx="2">
+            <a:schemeClr val="accent1"/>
+          </a:effectRef>
+          <a:fontRef idx="minor">
+            <a:schemeClr val="lt1"/>
+          </a:fontRef>
+        </p:style>
+        <p:txBody>
+          <a:bodyPr rtlCol="0" anchor="ctr"/>
+          <a:lstStyle/>
+          <a:p>
+            <a:pPr algn="ctr"/>
+          </a:p>
+        </p:txBody>
+      </p:sp>
+      <p:sp>
+        <p:nvSpPr>
+          <p:cNvPr id="181" name="TextBox 180"/>
+          <p:cNvSpPr txBox="1"/>
+          <p:nvPr/>
+        </p:nvSpPr>
+        <p:spPr>
+          <a:xfrm>
+            <a:off x="6492240" y="5751576"/>
+            <a:ext cx="2505456" cy="402336"/>
+          </a:xfrm>
+          <a:prstGeom prst="rect">
+            <a:avLst/>
+          </a:prstGeom>
+          <a:noFill/>
+        </p:spPr>
+        <p:txBody>
+          <a:bodyPr wrap="square" anchor="ctr" lIns="12700" rIns="12700" tIns="0" bIns="0">
+            <a:spAutoFit/>
+          </a:bodyPr>
+          <a:lstStyle/>
+          <a:p>
+            <a:r>
+              <a:rPr sz="850">
+                <a:solidFill>
+                  <a:srgbClr val="1C1917"/>
+                </a:solidFill>
+                <a:latin typeface="Calibri"/>
+              </a:rPr>
+              <a:t>Payment dispute triage + provisional refund</a:t>
+            </a:r>
+          </a:p>
+        </p:txBody>
+      </p:sp>
+      <p:sp>
+        <p:nvSpPr>
+          <p:cNvPr id="182" name="Rectangle 181"/>
+          <p:cNvSpPr/>
+          <p:nvPr/>
+        </p:nvSpPr>
+        <p:spPr>
+          <a:xfrm>
+            <a:off x="9272016" y="1335024"/>
+            <a:ext cx="2788920" cy="457200"/>
+          </a:xfrm>
+          <a:prstGeom prst="rect">
+            <a:avLst/>
+          </a:prstGeom>
+          <a:solidFill>
+            <a:srgbClr val="FFFFFF"/>
+          </a:solidFill>
+          <a:ln>
+            <a:noFill/>
+          </a:ln>
+          <a:effectLst/>
+        </p:spPr>
+        <p:style>
+          <a:lnRef idx="1">
+            <a:schemeClr val="accent1"/>
+          </a:lnRef>
+          <a:fillRef idx="3">
+            <a:schemeClr val="accent1"/>
+          </a:fillRef>
+          <a:effectRef idx="2">
+            <a:schemeClr val="accent1"/>
+          </a:effectRef>
+          <a:fontRef idx="minor">
+            <a:schemeClr val="lt1"/>
+          </a:fontRef>
+        </p:style>
+        <p:txBody>
+          <a:bodyPr rtlCol="0" anchor="ctr"/>
+          <a:lstStyle/>
+          <a:p>
+            <a:pPr algn="ctr"/>
+          </a:p>
+        </p:txBody>
+      </p:sp>
+      <p:sp>
+        <p:nvSpPr>
+          <p:cNvPr id="183" name="Rectangle 182"/>
+          <p:cNvSpPr/>
+          <p:nvPr/>
+        </p:nvSpPr>
+        <p:spPr>
+          <a:xfrm>
+            <a:off x="9272016" y="1335024"/>
+            <a:ext cx="45720" cy="457200"/>
+          </a:xfrm>
+          <a:prstGeom prst="rect">
+            <a:avLst/>
+          </a:prstGeom>
+          <a:solidFill>
+            <a:srgbClr val="DA291C"/>
+          </a:solidFill>
+          <a:ln>
+            <a:noFill/>
+          </a:ln>
+          <a:effectLst/>
+        </p:spPr>
+        <p:style>
+          <a:lnRef idx="1">
+            <a:schemeClr val="accent1"/>
+          </a:lnRef>
+          <a:fillRef idx="3">
+            <a:schemeClr val="accent1"/>
+          </a:fillRef>
+          <a:effectRef idx="2">
+            <a:schemeClr val="accent1"/>
+          </a:effectRef>
+          <a:fontRef idx="minor">
+            <a:schemeClr val="lt1"/>
+          </a:fontRef>
+        </p:style>
+        <p:txBody>
+          <a:bodyPr rtlCol="0" anchor="ctr"/>
+          <a:lstStyle/>
+          <a:p>
+            <a:pPr algn="ctr"/>
+          </a:p>
+        </p:txBody>
+      </p:sp>
+      <p:sp>
+        <p:nvSpPr>
+          <p:cNvPr id="184" name="TextBox 183"/>
+          <p:cNvSpPr txBox="1"/>
+          <p:nvPr/>
+        </p:nvSpPr>
+        <p:spPr>
+          <a:xfrm>
+            <a:off x="9436608" y="1362456"/>
+            <a:ext cx="2505456" cy="402336"/>
+          </a:xfrm>
+          <a:prstGeom prst="rect">
+            <a:avLst/>
+          </a:prstGeom>
+          <a:noFill/>
+        </p:spPr>
+        <p:txBody>
+          <a:bodyPr wrap="square" anchor="ctr" lIns="12700" rIns="12700" tIns="0" bIns="0">
+            <a:spAutoFit/>
+          </a:bodyPr>
+          <a:lstStyle/>
+          <a:p>
+            <a:r>
+              <a:rPr sz="850">
+                <a:solidFill>
+                  <a:srgbClr val="1C1917"/>
+                </a:solidFill>
+                <a:latin typeface="Calibri"/>
+              </a:rPr>
+              <a:t>Personal / business account unlink</a:t>
+            </a:r>
+          </a:p>
+        </p:txBody>
+      </p:sp>
+      <p:sp>
+        <p:nvSpPr>
+          <p:cNvPr id="185" name="Rectangle 184"/>
+          <p:cNvSpPr/>
+          <p:nvPr/>
+        </p:nvSpPr>
+        <p:spPr>
+          <a:xfrm>
+            <a:off x="9272016" y="1883664"/>
+            <a:ext cx="2788920" cy="457200"/>
+          </a:xfrm>
+          <a:prstGeom prst="rect">
+            <a:avLst/>
+          </a:prstGeom>
+          <a:solidFill>
+            <a:srgbClr val="F5F5F4"/>
+          </a:solidFill>
+          <a:ln>
+            <a:noFill/>
+          </a:ln>
+          <a:effectLst/>
+        </p:spPr>
+        <p:style>
+          <a:lnRef idx="1">
+            <a:schemeClr val="accent1"/>
+          </a:lnRef>
+          <a:fillRef idx="3">
+            <a:schemeClr val="accent1"/>
+          </a:fillRef>
+          <a:effectRef idx="2">
+            <a:schemeClr val="accent1"/>
+          </a:effectRef>
+          <a:fontRef idx="minor">
+            <a:schemeClr val="lt1"/>
+          </a:fontRef>
+        </p:style>
+        <p:txBody>
+          <a:bodyPr rtlCol="0" anchor="ctr"/>
+          <a:lstStyle/>
+          <a:p>
+            <a:pPr algn="ctr"/>
+          </a:p>
+        </p:txBody>
+      </p:sp>
+      <p:sp>
+        <p:nvSpPr>
+          <p:cNvPr id="186" name="Rectangle 185"/>
+          <p:cNvSpPr/>
+          <p:nvPr/>
+        </p:nvSpPr>
+        <p:spPr>
+          <a:xfrm>
+            <a:off x="9272016" y="1883664"/>
+            <a:ext cx="45720" cy="457200"/>
+          </a:xfrm>
+          <a:prstGeom prst="rect">
+            <a:avLst/>
+          </a:prstGeom>
+          <a:solidFill>
+            <a:srgbClr val="DA291C"/>
+          </a:solidFill>
+          <a:ln>
+            <a:noFill/>
+          </a:ln>
+          <a:effectLst/>
+        </p:spPr>
+        <p:style>
+          <a:lnRef idx="1">
+            <a:schemeClr val="accent1"/>
+          </a:lnRef>
+          <a:fillRef idx="3">
+            <a:schemeClr val="accent1"/>
+          </a:fillRef>
+          <a:effectRef idx="2">
+            <a:schemeClr val="accent1"/>
+          </a:effectRef>
+          <a:fontRef idx="minor">
+            <a:schemeClr val="lt1"/>
+          </a:fontRef>
+        </p:style>
+        <p:txBody>
+          <a:bodyPr rtlCol="0" anchor="ctr"/>
+          <a:lstStyle/>
+          <a:p>
+            <a:pPr algn="ctr"/>
+          </a:p>
+        </p:txBody>
+      </p:sp>
+      <p:sp>
+        <p:nvSpPr>
+          <p:cNvPr id="187" name="TextBox 186"/>
+          <p:cNvSpPr txBox="1"/>
+          <p:nvPr/>
+        </p:nvSpPr>
+        <p:spPr>
+          <a:xfrm>
+            <a:off x="9436608" y="1911095"/>
+            <a:ext cx="2505456" cy="402336"/>
+          </a:xfrm>
+          <a:prstGeom prst="rect">
+            <a:avLst/>
+          </a:prstGeom>
+          <a:noFill/>
+        </p:spPr>
+        <p:txBody>
+          <a:bodyPr wrap="square" anchor="ctr" lIns="12700" rIns="12700" tIns="0" bIns="0">
+            <a:spAutoFit/>
+          </a:bodyPr>
+          <a:lstStyle/>
+          <a:p>
+            <a:r>
+              <a:rPr sz="850">
+                <a:solidFill>
+                  <a:srgbClr val="1C1917"/>
+                </a:solidFill>
+                <a:latin typeface="Calibri"/>
+              </a:rPr>
+              <a:t>Call centre channel separation</a:t>
+            </a:r>
+          </a:p>
+        </p:txBody>
+      </p:sp>
+      <p:sp>
+        <p:nvSpPr>
+          <p:cNvPr id="188" name="Rectangle 187"/>
+          <p:cNvSpPr/>
+          <p:nvPr/>
+        </p:nvSpPr>
+        <p:spPr>
+          <a:xfrm>
+            <a:off x="9272016" y="2432304"/>
+            <a:ext cx="2788920" cy="457200"/>
+          </a:xfrm>
+          <a:prstGeom prst="rect">
+            <a:avLst/>
+          </a:prstGeom>
+          <a:solidFill>
+            <a:srgbClr val="FFFFFF"/>
+          </a:solidFill>
+          <a:ln>
+            <a:noFill/>
+          </a:ln>
+          <a:effectLst/>
+        </p:spPr>
+        <p:style>
+          <a:lnRef idx="1">
+            <a:schemeClr val="accent1"/>
+          </a:lnRef>
+          <a:fillRef idx="3">
+            <a:schemeClr val="accent1"/>
+          </a:fillRef>
+          <a:effectRef idx="2">
+            <a:schemeClr val="accent1"/>
+          </a:effectRef>
+          <a:fontRef idx="minor">
+            <a:schemeClr val="lt1"/>
+          </a:fontRef>
+        </p:style>
+        <p:txBody>
+          <a:bodyPr rtlCol="0" anchor="ctr"/>
+          <a:lstStyle/>
+          <a:p>
+            <a:pPr algn="ctr"/>
+          </a:p>
+        </p:txBody>
+      </p:sp>
+      <p:sp>
+        <p:nvSpPr>
+          <p:cNvPr id="189" name="Rectangle 188"/>
+          <p:cNvSpPr/>
+          <p:nvPr/>
+        </p:nvSpPr>
+        <p:spPr>
+          <a:xfrm>
+            <a:off x="9272016" y="2432304"/>
+            <a:ext cx="45720" cy="457200"/>
+          </a:xfrm>
+          <a:prstGeom prst="rect">
+            <a:avLst/>
+          </a:prstGeom>
+          <a:solidFill>
+            <a:srgbClr val="DA291C"/>
+          </a:solidFill>
+          <a:ln>
+            <a:noFill/>
+          </a:ln>
+          <a:effectLst/>
+        </p:spPr>
+        <p:style>
+          <a:lnRef idx="1">
+            <a:schemeClr val="accent1"/>
+          </a:lnRef>
+          <a:fillRef idx="3">
+            <a:schemeClr val="accent1"/>
+          </a:fillRef>
+          <a:effectRef idx="2">
+            <a:schemeClr val="accent1"/>
+          </a:effectRef>
+          <a:fontRef idx="minor">
+            <a:schemeClr val="lt1"/>
+          </a:fontRef>
+        </p:style>
+        <p:txBody>
+          <a:bodyPr rtlCol="0" anchor="ctr"/>
+          <a:lstStyle/>
+          <a:p>
+            <a:pPr algn="ctr"/>
+          </a:p>
+        </p:txBody>
+      </p:sp>
+      <p:sp>
+        <p:nvSpPr>
+          <p:cNvPr id="190" name="TextBox 189"/>
+          <p:cNvSpPr txBox="1"/>
+          <p:nvPr/>
+        </p:nvSpPr>
+        <p:spPr>
+          <a:xfrm>
+            <a:off x="9436608" y="2459736"/>
+            <a:ext cx="2505456" cy="402336"/>
+          </a:xfrm>
+          <a:prstGeom prst="rect">
+            <a:avLst/>
+          </a:prstGeom>
+          <a:noFill/>
+        </p:spPr>
+        <p:txBody>
+          <a:bodyPr wrap="square" anchor="ctr" lIns="12700" rIns="12700" tIns="0" bIns="0">
+            <a:spAutoFit/>
+          </a:bodyPr>
+          <a:lstStyle/>
+          <a:p>
+            <a:r>
+              <a:rPr sz="850">
+                <a:solidFill>
+                  <a:srgbClr val="1C1917"/>
+                </a:solidFill>
+                <a:latin typeface="Calibri"/>
+              </a:rPr>
+              <a:t>Credit ring-fence (GDPR Art.5(1)(c))</a:t>
+            </a:r>
+          </a:p>
+        </p:txBody>
+      </p:sp>
+      <p:sp>
+        <p:nvSpPr>
+          <p:cNvPr id="191" name="Rectangle 190"/>
+          <p:cNvSpPr/>
+          <p:nvPr/>
+        </p:nvSpPr>
+        <p:spPr>
+          <a:xfrm>
+            <a:off x="9272016" y="2980944"/>
+            <a:ext cx="2788920" cy="457200"/>
+          </a:xfrm>
+          <a:prstGeom prst="rect">
+            <a:avLst/>
+          </a:prstGeom>
+          <a:solidFill>
+            <a:srgbClr val="F5F5F4"/>
+          </a:solidFill>
+          <a:ln>
+            <a:noFill/>
+          </a:ln>
+          <a:effectLst/>
+        </p:spPr>
+        <p:style>
+          <a:lnRef idx="1">
+            <a:schemeClr val="accent1"/>
+          </a:lnRef>
+          <a:fillRef idx="3">
+            <a:schemeClr val="accent1"/>
+          </a:fillRef>
+          <a:effectRef idx="2">
+            <a:schemeClr val="accent1"/>
+          </a:effectRef>
+          <a:fontRef idx="minor">
+            <a:schemeClr val="lt1"/>
+          </a:fontRef>
+        </p:style>
+        <p:txBody>
+          <a:bodyPr rtlCol="0" anchor="ctr"/>
+          <a:lstStyle/>
+          <a:p>
+            <a:pPr algn="ctr"/>
+          </a:p>
+        </p:txBody>
+      </p:sp>
+      <p:sp>
+        <p:nvSpPr>
+          <p:cNvPr id="192" name="Rectangle 191"/>
+          <p:cNvSpPr/>
+          <p:nvPr/>
+        </p:nvSpPr>
+        <p:spPr>
+          <a:xfrm>
+            <a:off x="9272016" y="2980944"/>
+            <a:ext cx="45720" cy="457200"/>
+          </a:xfrm>
+          <a:prstGeom prst="rect">
+            <a:avLst/>
+          </a:prstGeom>
+          <a:solidFill>
+            <a:srgbClr val="DA291C"/>
+          </a:solidFill>
+          <a:ln>
+            <a:noFill/>
+          </a:ln>
+          <a:effectLst/>
+        </p:spPr>
+        <p:style>
+          <a:lnRef idx="1">
+            <a:schemeClr val="accent1"/>
+          </a:lnRef>
+          <a:fillRef idx="3">
+            <a:schemeClr val="accent1"/>
+          </a:fillRef>
+          <a:effectRef idx="2">
+            <a:schemeClr val="accent1"/>
+          </a:effectRef>
+          <a:fontRef idx="minor">
+            <a:schemeClr val="lt1"/>
+          </a:fontRef>
+        </p:style>
+        <p:txBody>
+          <a:bodyPr rtlCol="0" anchor="ctr"/>
+          <a:lstStyle/>
+          <a:p>
+            <a:pPr algn="ctr"/>
+          </a:p>
+        </p:txBody>
+      </p:sp>
+      <p:sp>
+        <p:nvSpPr>
+          <p:cNvPr id="193" name="TextBox 192"/>
+          <p:cNvSpPr txBox="1"/>
+          <p:nvPr/>
+        </p:nvSpPr>
+        <p:spPr>
+          <a:xfrm>
+            <a:off x="9436608" y="3008375"/>
+            <a:ext cx="2505456" cy="402336"/>
+          </a:xfrm>
+          <a:prstGeom prst="rect">
+            <a:avLst/>
+          </a:prstGeom>
+          <a:noFill/>
+        </p:spPr>
+        <p:txBody>
+          <a:bodyPr wrap="square" anchor="ctr" lIns="12700" rIns="12700" tIns="0" bIns="0">
+            <a:spAutoFit/>
+          </a:bodyPr>
+          <a:lstStyle/>
+          <a:p>
+            <a:r>
+              <a:rPr sz="850">
+                <a:solidFill>
+                  <a:srgbClr val="1C1917"/>
+                </a:solidFill>
+                <a:latin typeface="Calibri"/>
+              </a:rPr>
+              <a:t>PSD2 consent audit + one-tap revoke</a:t>
+            </a:r>
+          </a:p>
+        </p:txBody>
+      </p:sp>
+      <p:sp>
+        <p:nvSpPr>
+          <p:cNvPr id="194" name="Rectangle 193"/>
+          <p:cNvSpPr/>
+          <p:nvPr/>
+        </p:nvSpPr>
+        <p:spPr>
+          <a:xfrm>
+            <a:off x="9272016" y="3529584"/>
+            <a:ext cx="2788920" cy="457200"/>
+          </a:xfrm>
+          <a:prstGeom prst="rect">
+            <a:avLst/>
+          </a:prstGeom>
+          <a:solidFill>
+            <a:srgbClr val="FFFFFF"/>
+          </a:solidFill>
+          <a:ln>
+            <a:noFill/>
+          </a:ln>
+          <a:effectLst/>
+        </p:spPr>
+        <p:style>
+          <a:lnRef idx="1">
+            <a:schemeClr val="accent1"/>
+          </a:lnRef>
+          <a:fillRef idx="3">
+            <a:schemeClr val="accent1"/>
+          </a:fillRef>
+          <a:effectRef idx="2">
+            <a:schemeClr val="accent1"/>
+          </a:effectRef>
+          <a:fontRef idx="minor">
+            <a:schemeClr val="lt1"/>
+          </a:fontRef>
+        </p:style>
+        <p:txBody>
+          <a:bodyPr rtlCol="0" anchor="ctr"/>
+          <a:lstStyle/>
+          <a:p>
+            <a:pPr algn="ctr"/>
+          </a:p>
+        </p:txBody>
+      </p:sp>
+      <p:sp>
+        <p:nvSpPr>
+          <p:cNvPr id="195" name="Rectangle 194"/>
+          <p:cNvSpPr/>
+          <p:nvPr/>
+        </p:nvSpPr>
+        <p:spPr>
+          <a:xfrm>
+            <a:off x="9272016" y="3529584"/>
+            <a:ext cx="45720" cy="457200"/>
+          </a:xfrm>
+          <a:prstGeom prst="rect">
+            <a:avLst/>
+          </a:prstGeom>
+          <a:solidFill>
+            <a:srgbClr val="DA291C"/>
+          </a:solidFill>
+          <a:ln>
+            <a:noFill/>
+          </a:ln>
+          <a:effectLst/>
+        </p:spPr>
+        <p:style>
+          <a:lnRef idx="1">
+            <a:schemeClr val="accent1"/>
+          </a:lnRef>
+          <a:fillRef idx="3">
+            <a:schemeClr val="accent1"/>
+          </a:fillRef>
+          <a:effectRef idx="2">
+            <a:schemeClr val="accent1"/>
+          </a:effectRef>
+          <a:fontRef idx="minor">
+            <a:schemeClr val="lt1"/>
+          </a:fontRef>
+        </p:style>
+        <p:txBody>
+          <a:bodyPr rtlCol="0" anchor="ctr"/>
+          <a:lstStyle/>
+          <a:p>
+            <a:pPr algn="ctr"/>
+          </a:p>
+        </p:txBody>
+      </p:sp>
+      <p:sp>
+        <p:nvSpPr>
+          <p:cNvPr id="196" name="TextBox 195"/>
+          <p:cNvSpPr txBox="1"/>
+          <p:nvPr/>
+        </p:nvSpPr>
+        <p:spPr>
+          <a:xfrm>
+            <a:off x="9436608" y="3557015"/>
+            <a:ext cx="2505456" cy="402336"/>
+          </a:xfrm>
+          <a:prstGeom prst="rect">
+            <a:avLst/>
+          </a:prstGeom>
+          <a:noFill/>
+        </p:spPr>
+        <p:txBody>
+          <a:bodyPr wrap="square" anchor="ctr" lIns="12700" rIns="12700" tIns="0" bIns="0">
+            <a:spAutoFit/>
+          </a:bodyPr>
+          <a:lstStyle/>
+          <a:p>
+            <a:r>
+              <a:rPr sz="850">
+                <a:solidFill>
+                  <a:srgbClr val="1C1917"/>
+                </a:solidFill>
+                <a:latin typeface="Calibri"/>
+              </a:rPr>
+              <a:t>Voice ID biometric (3-phrase enrolment)</a:t>
+            </a:r>
+          </a:p>
+        </p:txBody>
+      </p:sp>
+      <p:sp>
+        <p:nvSpPr>
+          <p:cNvPr id="197" name="Rectangle 196"/>
+          <p:cNvSpPr/>
+          <p:nvPr/>
+        </p:nvSpPr>
+        <p:spPr>
+          <a:xfrm>
+            <a:off x="9272016" y="4078224"/>
+            <a:ext cx="2788920" cy="457200"/>
+          </a:xfrm>
+          <a:prstGeom prst="rect">
+            <a:avLst/>
+          </a:prstGeom>
+          <a:solidFill>
+            <a:srgbClr val="F5F5F4"/>
+          </a:solidFill>
+          <a:ln>
+            <a:noFill/>
+          </a:ln>
+          <a:effectLst/>
+        </p:spPr>
+        <p:style>
+          <a:lnRef idx="1">
+            <a:schemeClr val="accent1"/>
+          </a:lnRef>
+          <a:fillRef idx="3">
+            <a:schemeClr val="accent1"/>
+          </a:fillRef>
+          <a:effectRef idx="2">
+            <a:schemeClr val="accent1"/>
+          </a:effectRef>
+          <a:fontRef idx="minor">
+            <a:schemeClr val="lt1"/>
+          </a:fontRef>
+        </p:style>
+        <p:txBody>
+          <a:bodyPr rtlCol="0" anchor="ctr"/>
+          <a:lstStyle/>
+          <a:p>
+            <a:pPr algn="ctr"/>
+          </a:p>
+        </p:txBody>
+      </p:sp>
+      <p:sp>
+        <p:nvSpPr>
+          <p:cNvPr id="198" name="Rectangle 197"/>
+          <p:cNvSpPr/>
+          <p:nvPr/>
+        </p:nvSpPr>
+        <p:spPr>
+          <a:xfrm>
+            <a:off x="9272016" y="4078224"/>
+            <a:ext cx="45720" cy="457200"/>
+          </a:xfrm>
+          <a:prstGeom prst="rect">
+            <a:avLst/>
+          </a:prstGeom>
+          <a:solidFill>
+            <a:srgbClr val="DA291C"/>
+          </a:solidFill>
+          <a:ln>
+            <a:noFill/>
+          </a:ln>
+          <a:effectLst/>
+        </p:spPr>
+        <p:style>
+          <a:lnRef idx="1">
+            <a:schemeClr val="accent1"/>
+          </a:lnRef>
+          <a:fillRef idx="3">
+            <a:schemeClr val="accent1"/>
+          </a:fillRef>
+          <a:effectRef idx="2">
+            <a:schemeClr val="accent1"/>
+          </a:effectRef>
+          <a:fontRef idx="minor">
+            <a:schemeClr val="lt1"/>
+          </a:fontRef>
+        </p:style>
+        <p:txBody>
+          <a:bodyPr rtlCol="0" anchor="ctr"/>
+          <a:lstStyle/>
+          <a:p>
+            <a:pPr algn="ctr"/>
+          </a:p>
+        </p:txBody>
+      </p:sp>
+      <p:sp>
+        <p:nvSpPr>
+          <p:cNvPr id="199" name="TextBox 198"/>
+          <p:cNvSpPr txBox="1"/>
+          <p:nvPr/>
+        </p:nvSpPr>
+        <p:spPr>
+          <a:xfrm>
+            <a:off x="9436608" y="4105656"/>
+            <a:ext cx="2505456" cy="402336"/>
+          </a:xfrm>
+          <a:prstGeom prst="rect">
+            <a:avLst/>
+          </a:prstGeom>
+          <a:noFill/>
+        </p:spPr>
+        <p:txBody>
+          <a:bodyPr wrap="square" anchor="ctr" lIns="12700" rIns="12700" tIns="0" bIns="0">
+            <a:spAutoFit/>
+          </a:bodyPr>
+          <a:lstStyle/>
+          <a:p>
+            <a:r>
+              <a:rPr sz="850">
+                <a:solidFill>
+                  <a:srgbClr val="1C1917"/>
+                </a:solidFill>
+                <a:latin typeface="Calibri"/>
+              </a:rPr>
+              <a:t>Session anomaly detection</a:t>
+            </a:r>
+          </a:p>
+        </p:txBody>
+      </p:sp>
+      <p:sp>
+        <p:nvSpPr>
+          <p:cNvPr id="200" name="Rectangle 199"/>
+          <p:cNvSpPr/>
+          <p:nvPr/>
+        </p:nvSpPr>
+        <p:spPr>
+          <a:xfrm>
+            <a:off x="9272016" y="4626864"/>
+            <a:ext cx="2788920" cy="457200"/>
+          </a:xfrm>
+          <a:prstGeom prst="rect">
+            <a:avLst/>
+          </a:prstGeom>
+          <a:solidFill>
+            <a:srgbClr val="FFFFFF"/>
+          </a:solidFill>
+          <a:ln>
+            <a:noFill/>
+          </a:ln>
+          <a:effectLst/>
+        </p:spPr>
+        <p:style>
+          <a:lnRef idx="1">
+            <a:schemeClr val="accent1"/>
+          </a:lnRef>
+          <a:fillRef idx="3">
+            <a:schemeClr val="accent1"/>
+          </a:fillRef>
+          <a:effectRef idx="2">
+            <a:schemeClr val="accent1"/>
+          </a:effectRef>
+          <a:fontRef idx="minor">
+            <a:schemeClr val="lt1"/>
+          </a:fontRef>
+        </p:style>
+        <p:txBody>
+          <a:bodyPr rtlCol="0" anchor="ctr"/>
+          <a:lstStyle/>
+          <a:p>
+            <a:pPr algn="ctr"/>
+          </a:p>
+        </p:txBody>
+      </p:sp>
+      <p:sp>
+        <p:nvSpPr>
+          <p:cNvPr id="201" name="Rectangle 200"/>
+          <p:cNvSpPr/>
+          <p:nvPr/>
+        </p:nvSpPr>
+        <p:spPr>
+          <a:xfrm>
+            <a:off x="9272016" y="4626864"/>
+            <a:ext cx="45720" cy="457200"/>
+          </a:xfrm>
+          <a:prstGeom prst="rect">
+            <a:avLst/>
+          </a:prstGeom>
+          <a:solidFill>
+            <a:srgbClr val="DA291C"/>
+          </a:solidFill>
+          <a:ln>
+            <a:noFill/>
+          </a:ln>
+          <a:effectLst/>
+        </p:spPr>
+        <p:style>
+          <a:lnRef idx="1">
+            <a:schemeClr val="accent1"/>
+          </a:lnRef>
+          <a:fillRef idx="3">
+            <a:schemeClr val="accent1"/>
+          </a:fillRef>
+          <a:effectRef idx="2">
+            <a:schemeClr val="accent1"/>
+          </a:effectRef>
+          <a:fontRef idx="minor">
+            <a:schemeClr val="lt1"/>
+          </a:fontRef>
+        </p:style>
+        <p:txBody>
+          <a:bodyPr rtlCol="0" anchor="ctr"/>
+          <a:lstStyle/>
+          <a:p>
+            <a:pPr algn="ctr"/>
+          </a:p>
+        </p:txBody>
+      </p:sp>
+      <p:sp>
+        <p:nvSpPr>
+          <p:cNvPr id="202" name="TextBox 201"/>
+          <p:cNvSpPr txBox="1"/>
+          <p:nvPr/>
+        </p:nvSpPr>
+        <p:spPr>
+          <a:xfrm>
+            <a:off x="9436608" y="4654296"/>
+            <a:ext cx="2505456" cy="402336"/>
+          </a:xfrm>
+          <a:prstGeom prst="rect">
+            <a:avLst/>
+          </a:prstGeom>
+          <a:noFill/>
+        </p:spPr>
+        <p:txBody>
+          <a:bodyPr wrap="square" anchor="ctr" lIns="12700" rIns="12700" tIns="0" bIns="0">
+            <a:spAutoFit/>
+          </a:bodyPr>
+          <a:lstStyle/>
+          <a:p>
+            <a:r>
+              <a:rPr sz="850">
+                <a:solidFill>
+                  <a:srgbClr val="1C1917"/>
+                </a:solidFill>
+                <a:latin typeface="Calibri"/>
+              </a:rPr>
               <a:t>Live notification bell</a:t>
             </a:r>
           </a:p>
@@ -24307,105 +25116,244 @@
       </p:sp>
       <p:sp>
         <p:nvSpPr>
-          <p:cNvPr id="98" name="TextBox 97"/>
-          <p:cNvSpPr txBox="1"/>
-          <p:nvPr/>
-        </p:nvSpPr>
-        <p:spPr>
-          <a:xfrm>
-            <a:off x="411480" y="6620256"/>
-            <a:ext cx="3657600" cy="201168"/>
-          </a:xfrm>
-          <a:prstGeom prst="rect">
-            <a:avLst/>
-          </a:prstGeom>
-          <a:noFill/>
-        </p:spPr>
-        <p:txBody>
-          <a:bodyPr wrap="square">
-            <a:spAutoFit/>
-          </a:bodyPr>
-          <a:lstStyle/>
-          <a:p>
-            <a:pPr algn="l"/>
-            <a:r>
-              <a:rPr sz="750" b="1" i="0">
-                <a:solidFill>
-                  <a:srgbClr val="DA291C"/>
-                </a:solidFill>
-                <a:latin typeface="Calibri"/>
-              </a:rPr>
-              <a:t>INTERNAL · CONFIDENTIAL</a:t>
-            </a:r>
-          </a:p>
-        </p:txBody>
-      </p:sp>
-      <p:sp>
-        <p:nvSpPr>
-          <p:cNvPr id="99" name="TextBox 98"/>
-          <p:cNvSpPr txBox="1"/>
-          <p:nvPr/>
-        </p:nvSpPr>
-        <p:spPr>
-          <a:xfrm>
-            <a:off x="3657600" y="6620256"/>
-            <a:ext cx="8119872" cy="201168"/>
-          </a:xfrm>
-          <a:prstGeom prst="rect">
-            <a:avLst/>
-          </a:prstGeom>
-          <a:noFill/>
-        </p:spPr>
-        <p:txBody>
-          <a:bodyPr wrap="square">
-            <a:spAutoFit/>
-          </a:bodyPr>
-          <a:lstStyle/>
-          <a:p>
-            <a:pPr algn="r"/>
-            <a:r>
-              <a:rPr sz="750" b="0" i="1">
-                <a:solidFill>
-                  <a:srgbClr val="78716C"/>
-                </a:solidFill>
-                <a:latin typeface="Calibri"/>
-              </a:rPr>
-              <a:t>Alan Davidson  ·  Business Banking Advisor  ·  Self-initiated  ·  Own time  ·  June 2026</a:t>
-            </a:r>
-          </a:p>
-        </p:txBody>
-      </p:sp>
-      <p:sp>
-        <p:nvSpPr>
-          <p:cNvPr id="100" name="TextBox 99"/>
-          <p:cNvSpPr txBox="1"/>
-          <p:nvPr/>
-        </p:nvSpPr>
-        <p:spPr>
-          <a:xfrm>
-            <a:off x="11722608" y="6565392"/>
-            <a:ext cx="347472" cy="219456"/>
-          </a:xfrm>
-          <a:prstGeom prst="rect">
-            <a:avLst/>
-          </a:prstGeom>
-          <a:noFill/>
-        </p:spPr>
-        <p:txBody>
-          <a:bodyPr wrap="square">
-            <a:spAutoFit/>
-          </a:bodyPr>
-          <a:lstStyle/>
-          <a:p>
-            <a:pPr algn="r"/>
-            <a:r>
-              <a:rPr sz="850" b="0" i="0">
-                <a:solidFill>
-                  <a:srgbClr val="78716C"/>
-                </a:solidFill>
-                <a:latin typeface="Calibri"/>
-              </a:rPr>
-              <a:t>5</a:t>
+          <p:cNvPr id="203" name="Rectangle 202"/>
+          <p:cNvSpPr/>
+          <p:nvPr/>
+        </p:nvSpPr>
+        <p:spPr>
+          <a:xfrm>
+            <a:off x="9272016" y="5175504"/>
+            <a:ext cx="2788920" cy="457200"/>
+          </a:xfrm>
+          <a:prstGeom prst="rect">
+            <a:avLst/>
+          </a:prstGeom>
+          <a:solidFill>
+            <a:srgbClr val="F5F5F4"/>
+          </a:solidFill>
+          <a:ln>
+            <a:noFill/>
+          </a:ln>
+          <a:effectLst/>
+        </p:spPr>
+        <p:style>
+          <a:lnRef idx="1">
+            <a:schemeClr val="accent1"/>
+          </a:lnRef>
+          <a:fillRef idx="3">
+            <a:schemeClr val="accent1"/>
+          </a:fillRef>
+          <a:effectRef idx="2">
+            <a:schemeClr val="accent1"/>
+          </a:effectRef>
+          <a:fontRef idx="minor">
+            <a:schemeClr val="lt1"/>
+          </a:fontRef>
+        </p:style>
+        <p:txBody>
+          <a:bodyPr rtlCol="0" anchor="ctr"/>
+          <a:lstStyle/>
+          <a:p>
+            <a:pPr algn="ctr"/>
+          </a:p>
+        </p:txBody>
+      </p:sp>
+      <p:sp>
+        <p:nvSpPr>
+          <p:cNvPr id="204" name="Rectangle 203"/>
+          <p:cNvSpPr/>
+          <p:nvPr/>
+        </p:nvSpPr>
+        <p:spPr>
+          <a:xfrm>
+            <a:off x="9272016" y="5175504"/>
+            <a:ext cx="45720" cy="457200"/>
+          </a:xfrm>
+          <a:prstGeom prst="rect">
+            <a:avLst/>
+          </a:prstGeom>
+          <a:solidFill>
+            <a:srgbClr val="DA291C"/>
+          </a:solidFill>
+          <a:ln>
+            <a:noFill/>
+          </a:ln>
+          <a:effectLst/>
+        </p:spPr>
+        <p:style>
+          <a:lnRef idx="1">
+            <a:schemeClr val="accent1"/>
+          </a:lnRef>
+          <a:fillRef idx="3">
+            <a:schemeClr val="accent1"/>
+          </a:fillRef>
+          <a:effectRef idx="2">
+            <a:schemeClr val="accent1"/>
+          </a:effectRef>
+          <a:fontRef idx="minor">
+            <a:schemeClr val="lt1"/>
+          </a:fontRef>
+        </p:style>
+        <p:txBody>
+          <a:bodyPr rtlCol="0" anchor="ctr"/>
+          <a:lstStyle/>
+          <a:p>
+            <a:pPr algn="ctr"/>
+          </a:p>
+        </p:txBody>
+      </p:sp>
+      <p:sp>
+        <p:nvSpPr>
+          <p:cNvPr id="205" name="TextBox 204"/>
+          <p:cNvSpPr txBox="1"/>
+          <p:nvPr/>
+        </p:nvSpPr>
+        <p:spPr>
+          <a:xfrm>
+            <a:off x="9436608" y="5202936"/>
+            <a:ext cx="2505456" cy="402336"/>
+          </a:xfrm>
+          <a:prstGeom prst="rect">
+            <a:avLst/>
+          </a:prstGeom>
+          <a:noFill/>
+        </p:spPr>
+        <p:txBody>
+          <a:bodyPr wrap="square" anchor="ctr" lIns="12700" rIns="12700" tIns="0" bIns="0">
+            <a:spAutoFit/>
+          </a:bodyPr>
+          <a:lstStyle/>
+          <a:p>
+            <a:r>
+              <a:rPr sz="850">
+                <a:solidFill>
+                  <a:srgbClr val="1C1917"/>
+                </a:solidFill>
+                <a:latin typeface="Calibri"/>
+              </a:rPr>
+              <a:t>Trusted devices &amp; session management</a:t>
+            </a:r>
+          </a:p>
+        </p:txBody>
+      </p:sp>
+      <p:sp>
+        <p:nvSpPr>
+          <p:cNvPr id="206" name="Rectangle 205"/>
+          <p:cNvSpPr/>
+          <p:nvPr/>
+        </p:nvSpPr>
+        <p:spPr>
+          <a:xfrm>
+            <a:off x="9272016" y="5724144"/>
+            <a:ext cx="2788920" cy="457200"/>
+          </a:xfrm>
+          <a:prstGeom prst="rect">
+            <a:avLst/>
+          </a:prstGeom>
+          <a:solidFill>
+            <a:srgbClr val="FFFFFF"/>
+          </a:solidFill>
+          <a:ln>
+            <a:noFill/>
+          </a:ln>
+          <a:effectLst/>
+        </p:spPr>
+        <p:style>
+          <a:lnRef idx="1">
+            <a:schemeClr val="accent1"/>
+          </a:lnRef>
+          <a:fillRef idx="3">
+            <a:schemeClr val="accent1"/>
+          </a:fillRef>
+          <a:effectRef idx="2">
+            <a:schemeClr val="accent1"/>
+          </a:effectRef>
+          <a:fontRef idx="minor">
+            <a:schemeClr val="lt1"/>
+          </a:fontRef>
+        </p:style>
+        <p:txBody>
+          <a:bodyPr rtlCol="0" anchor="ctr"/>
+          <a:lstStyle/>
+          <a:p>
+            <a:pPr algn="ctr"/>
+          </a:p>
+        </p:txBody>
+      </p:sp>
+      <p:sp>
+        <p:nvSpPr>
+          <p:cNvPr id="207" name="Rectangle 206"/>
+          <p:cNvSpPr/>
+          <p:nvPr/>
+        </p:nvSpPr>
+        <p:spPr>
+          <a:xfrm>
+            <a:off x="9272016" y="5724144"/>
+            <a:ext cx="45720" cy="457200"/>
+          </a:xfrm>
+          <a:prstGeom prst="rect">
+            <a:avLst/>
+          </a:prstGeom>
+          <a:solidFill>
+            <a:srgbClr val="DA291C"/>
+          </a:solidFill>
+          <a:ln>
+            <a:noFill/>
+          </a:ln>
+          <a:effectLst/>
+        </p:spPr>
+        <p:style>
+          <a:lnRef idx="1">
+            <a:schemeClr val="accent1"/>
+          </a:lnRef>
+          <a:fillRef idx="3">
+            <a:schemeClr val="accent1"/>
+          </a:fillRef>
+          <a:effectRef idx="2">
+            <a:schemeClr val="accent1"/>
+          </a:effectRef>
+          <a:fontRef idx="minor">
+            <a:schemeClr val="lt1"/>
+          </a:fontRef>
+        </p:style>
+        <p:txBody>
+          <a:bodyPr rtlCol="0" anchor="ctr"/>
+          <a:lstStyle/>
+          <a:p>
+            <a:pPr algn="ctr"/>
+          </a:p>
+        </p:txBody>
+      </p:sp>
+      <p:sp>
+        <p:nvSpPr>
+          <p:cNvPr id="208" name="TextBox 207"/>
+          <p:cNvSpPr txBox="1"/>
+          <p:nvPr/>
+        </p:nvSpPr>
+        <p:spPr>
+          <a:xfrm>
+            <a:off x="9436608" y="5751576"/>
+            <a:ext cx="2505456" cy="402336"/>
+          </a:xfrm>
+          <a:prstGeom prst="rect">
+            <a:avLst/>
+          </a:prstGeom>
+          <a:noFill/>
+        </p:spPr>
+        <p:txBody>
+          <a:bodyPr wrap="square" anchor="ctr" lIns="12700" rIns="12700" tIns="0" bIns="0">
+            <a:spAutoFit/>
+          </a:bodyPr>
+          <a:lstStyle/>
+          <a:p>
+            <a:r>
+              <a:rPr sz="850">
+                <a:solidFill>
+                  <a:srgbClr val="1C1917"/>
+                </a:solidFill>
+                <a:latin typeface="Calibri"/>
+              </a:rPr>
+              <a:t>ID register (KYB lists 1, 2 &amp; 3)</a:t>
             </a:r>
           </a:p>
         </p:txBody>

--- a/Santander_Digital_Banking_Future.pptx
+++ b/Santander_Digital_Banking_Future.pptx
@@ -3161,7 +3161,7 @@
             <a:avLst/>
           </a:prstGeom>
           <a:solidFill>
-            <a:srgbClr val="DA291C"/>
+            <a:srgbClr val="EC0000"/>
           </a:solidFill>
           <a:ln>
             <a:noFill/>
@@ -3204,7 +3204,7 @@
             <a:avLst/>
           </a:prstGeom>
           <a:solidFill>
-            <a:srgbClr val="DA291C"/>
+            <a:srgbClr val="EC0000"/>
           </a:solidFill>
           <a:ln>
             <a:noFill/>
@@ -3395,7 +3395,7 @@
             <a:avLst/>
           </a:prstGeom>
           <a:solidFill>
-            <a:srgbClr val="DA291C"/>
+            <a:srgbClr val="EC0000"/>
           </a:solidFill>
           <a:ln>
             <a:noFill/>
@@ -3496,7 +3496,7 @@
                 </a:solidFill>
                 <a:latin typeface="Calibri"/>
               </a:rPr>
-              <a:t>21</a:t>
+              <a:t>36</a:t>
             </a:r>
           </a:p>
         </p:txBody>
@@ -3609,7 +3609,7 @@
                 </a:solidFill>
                 <a:latin typeface="Calibri"/>
               </a:rPr>
-              <a:t>11</a:t>
+              <a:t>17</a:t>
             </a:r>
           </a:p>
         </p:txBody>
@@ -3777,7 +3777,7 @@
             <a:avLst/>
           </a:prstGeom>
           <a:solidFill>
-            <a:srgbClr val="DA291C"/>
+            <a:srgbClr val="EC0000"/>
           </a:solidFill>
           <a:ln>
             <a:noFill/>
@@ -4010,7 +4010,7 @@
             <a:avLst/>
           </a:prstGeom>
           <a:solidFill>
-            <a:srgbClr val="DA291C"/>
+            <a:srgbClr val="EC0000"/>
           </a:solidFill>
           <a:ln>
             <a:noFill/>
@@ -4088,7 +4088,7 @@
             <a:avLst/>
           </a:prstGeom>
           <a:solidFill>
-            <a:srgbClr val="DA291C"/>
+            <a:srgbClr val="EC0000"/>
           </a:solidFill>
           <a:ln>
             <a:noFill/>
@@ -4174,7 +4174,7 @@
             <a:avLst/>
           </a:prstGeom>
           <a:solidFill>
-            <a:srgbClr val="DA291C"/>
+            <a:srgbClr val="EC0000"/>
           </a:solidFill>
           <a:ln>
             <a:noFill/>
@@ -4217,7 +4217,7 @@
             <a:avLst/>
           </a:prstGeom>
           <a:solidFill>
-            <a:srgbClr val="DA291C"/>
+            <a:srgbClr val="EC0000"/>
           </a:solidFill>
           <a:ln>
             <a:noFill/>
@@ -6126,7 +6126,7 @@
             <a:avLst/>
           </a:prstGeom>
           <a:solidFill>
-            <a:srgbClr val="FAF6EF"/>
+            <a:srgbClr val="FBF1EA"/>
           </a:solidFill>
           <a:ln>
             <a:noFill/>
@@ -6169,7 +6169,7 @@
             <a:avLst/>
           </a:prstGeom>
           <a:solidFill>
-            <a:srgbClr val="DA291C"/>
+            <a:srgbClr val="EC0000"/>
           </a:solidFill>
           <a:ln>
             <a:noFill/>
@@ -6335,7 +6335,7 @@
             <a:avLst/>
           </a:prstGeom>
           <a:solidFill>
-            <a:srgbClr val="DA291C"/>
+            <a:srgbClr val="EC0000"/>
           </a:solidFill>
           <a:ln>
             <a:noFill/>
@@ -6614,7 +6614,7 @@
             <a:avLst/>
           </a:prstGeom>
           <a:solidFill>
-            <a:srgbClr val="DA291C"/>
+            <a:srgbClr val="EC0000"/>
           </a:solidFill>
           <a:ln>
             <a:noFill/>
@@ -6893,7 +6893,7 @@
             <a:avLst/>
           </a:prstGeom>
           <a:solidFill>
-            <a:srgbClr val="DA291C"/>
+            <a:srgbClr val="EC0000"/>
           </a:solidFill>
           <a:ln>
             <a:noFill/>
@@ -7138,7 +7138,7 @@
             <a:r>
               <a:rPr sz="750" b="1" i="0">
                 <a:solidFill>
-                  <a:srgbClr val="DA291C"/>
+                  <a:srgbClr val="EC0000"/>
                 </a:solidFill>
                 <a:latin typeface="Calibri"/>
               </a:rPr>
@@ -7250,7 +7250,7 @@
             <a:avLst/>
           </a:prstGeom>
           <a:solidFill>
-            <a:srgbClr val="FAF6EF"/>
+            <a:srgbClr val="FBF1EA"/>
           </a:solidFill>
           <a:ln>
             <a:noFill/>
@@ -7293,7 +7293,7 @@
             <a:avLst/>
           </a:prstGeom>
           <a:solidFill>
-            <a:srgbClr val="DA291C"/>
+            <a:srgbClr val="EC0000"/>
           </a:solidFill>
           <a:ln>
             <a:noFill/>
@@ -7459,7 +7459,7 @@
             <a:avLst/>
           </a:prstGeom>
           <a:solidFill>
-            <a:srgbClr val="DA291C"/>
+            <a:srgbClr val="EC0000"/>
           </a:solidFill>
           <a:ln>
             <a:noFill/>
@@ -7548,7 +7548,7 @@
             <a:r>
               <a:rPr sz="900" b="0" i="0">
                 <a:solidFill>
-                  <a:srgbClr val="DA291C"/>
+                  <a:srgbClr val="EC0000"/>
                 </a:solidFill>
                 <a:latin typeface="Calibri"/>
               </a:rPr>
@@ -8898,7 +8898,7 @@
           </a:solidFill>
           <a:ln w="9525">
             <a:solidFill>
-              <a:srgbClr val="DA291C"/>
+              <a:srgbClr val="EC0000"/>
             </a:solidFill>
           </a:ln>
         </p:spPr>
@@ -8939,7 +8939,7 @@
             <a:avLst/>
           </a:prstGeom>
           <a:solidFill>
-            <a:srgbClr val="DA291C"/>
+            <a:srgbClr val="EC0000"/>
           </a:solidFill>
           <a:ln>
             <a:noFill/>
@@ -9063,7 +9063,7 @@
             <a:r>
               <a:rPr sz="750" b="1" i="0">
                 <a:solidFill>
-                  <a:srgbClr val="DA291C"/>
+                  <a:srgbClr val="EC0000"/>
                 </a:solidFill>
                 <a:latin typeface="Calibri"/>
               </a:rPr>
@@ -9218,7 +9218,7 @@
             <a:avLst/>
           </a:prstGeom>
           <a:solidFill>
-            <a:srgbClr val="DA291C"/>
+            <a:srgbClr val="EC0000"/>
           </a:solidFill>
           <a:ln>
             <a:noFill/>
@@ -9296,7 +9296,7 @@
             <a:avLst/>
           </a:prstGeom>
           <a:solidFill>
-            <a:srgbClr val="DA291C"/>
+            <a:srgbClr val="EC0000"/>
           </a:solidFill>
           <a:ln>
             <a:noFill/>
@@ -9660,7 +9660,7 @@
                 </a:solidFill>
                 <a:latin typeface="Calibri"/>
               </a:rPr>
-              <a:t>21</a:t>
+              <a:t>36</a:t>
             </a:r>
           </a:p>
         </p:txBody>
@@ -9774,7 +9774,7 @@
                 </a:solidFill>
                 <a:latin typeface="Calibri"/>
               </a:rPr>
-              <a:t>11</a:t>
+              <a:t>17</a:t>
             </a:r>
           </a:p>
         </p:txBody>
@@ -10775,7 +10775,7 @@
             <a:avLst/>
           </a:prstGeom>
           <a:solidFill>
-            <a:srgbClr val="FAF6EF"/>
+            <a:srgbClr val="FBF1EA"/>
           </a:solidFill>
           <a:ln>
             <a:noFill/>
@@ -10818,7 +10818,7 @@
             <a:avLst/>
           </a:prstGeom>
           <a:solidFill>
-            <a:srgbClr val="DA291C"/>
+            <a:srgbClr val="EC0000"/>
           </a:solidFill>
           <a:ln>
             <a:noFill/>
@@ -12168,7 +12168,7 @@
             <a:avLst/>
           </a:prstGeom>
           <a:solidFill>
-            <a:srgbClr val="DA291C"/>
+            <a:srgbClr val="EC0000"/>
           </a:solidFill>
           <a:ln>
             <a:noFill/>
@@ -12285,7 +12285,7 @@
           </a:solidFill>
           <a:ln w="9525">
             <a:solidFill>
-              <a:srgbClr val="DA291C"/>
+              <a:srgbClr val="EC0000"/>
             </a:solidFill>
           </a:ln>
         </p:spPr>
@@ -12337,7 +12337,7 @@
             <a:r>
               <a:rPr sz="900" b="1" i="0">
                 <a:solidFill>
-                  <a:srgbClr val="DA291C"/>
+                  <a:srgbClr val="EC0000"/>
                 </a:solidFill>
                 <a:latin typeface="Calibri"/>
               </a:rPr>
@@ -12406,7 +12406,7 @@
             <a:avLst/>
           </a:prstGeom>
           <a:solidFill>
-            <a:srgbClr val="DA291C"/>
+            <a:srgbClr val="EC0000"/>
           </a:solidFill>
           <a:ln>
             <a:noFill/>
@@ -12484,7 +12484,7 @@
             <a:avLst/>
           </a:prstGeom>
           <a:solidFill>
-            <a:srgbClr val="DA291C"/>
+            <a:srgbClr val="EC0000"/>
           </a:solidFill>
           <a:ln>
             <a:noFill/>
@@ -12562,7 +12562,7 @@
             <a:avLst/>
           </a:prstGeom>
           <a:solidFill>
-            <a:srgbClr val="DA291C"/>
+            <a:srgbClr val="EC0000"/>
           </a:solidFill>
           <a:ln>
             <a:noFill/>
@@ -12640,7 +12640,7 @@
             <a:avLst/>
           </a:prstGeom>
           <a:solidFill>
-            <a:srgbClr val="DA291C"/>
+            <a:srgbClr val="EC0000"/>
           </a:solidFill>
           <a:ln>
             <a:noFill/>
@@ -13279,7 +13279,7 @@
             <a:r>
               <a:rPr sz="750" b="1" i="0">
                 <a:solidFill>
-                  <a:srgbClr val="DA291C"/>
+                  <a:srgbClr val="EC0000"/>
                 </a:solidFill>
                 <a:latin typeface="Calibri"/>
               </a:rPr>
@@ -13391,7 +13391,7 @@
             <a:avLst/>
           </a:prstGeom>
           <a:solidFill>
-            <a:srgbClr val="FAF6EF"/>
+            <a:srgbClr val="FBF1EA"/>
           </a:solidFill>
           <a:ln>
             <a:noFill/>
@@ -13434,7 +13434,7 @@
             <a:avLst/>
           </a:prstGeom>
           <a:solidFill>
-            <a:srgbClr val="DA291C"/>
+            <a:srgbClr val="EC0000"/>
           </a:solidFill>
           <a:ln>
             <a:noFill/>
@@ -13590,7 +13590,7 @@
             <a:avLst/>
           </a:prstGeom>
           <a:solidFill>
-            <a:srgbClr val="DA291C"/>
+            <a:srgbClr val="EC0000"/>
           </a:solidFill>
           <a:ln w="9525">
             <a:solidFill>
@@ -13650,7 +13650,7 @@
                 </a:solidFill>
                 <a:latin typeface="Calibri"/>
               </a:rPr>
-              <a:t>#DA291C</a:t>
+              <a:t>#EC0000</a:t>
             </a:r>
           </a:p>
         </p:txBody>
@@ -13681,11 +13681,11 @@
             <a:r>
               <a:rPr sz="750" b="0" i="0">
                 <a:solidFill>
-                  <a:srgbClr val="DA291C"/>
-                </a:solidFill>
-                <a:latin typeface="Calibri"/>
-              </a:rPr>
-              <a:t>brand-red</a:t>
+                  <a:srgbClr val="EC0000"/>
+                </a:solidFill>
+                <a:latin typeface="Calibri"/>
+              </a:rPr>
+              <a:t>Santander Red</a:t>
             </a:r>
           </a:p>
         </p:txBody>
@@ -13831,7 +13831,7 @@
             <a:r>
               <a:rPr sz="750" b="0" i="0">
                 <a:solidFill>
-                  <a:srgbClr val="DA291C"/>
+                  <a:srgbClr val="EC0000"/>
                 </a:solidFill>
                 <a:latin typeface="Calibri"/>
               </a:rPr>
@@ -13890,7 +13890,7 @@
             <a:avLst/>
           </a:prstGeom>
           <a:solidFill>
-            <a:srgbClr val="FAF6EF"/>
+            <a:srgbClr val="FBF1EA"/>
           </a:solidFill>
           <a:ln w="9525">
             <a:solidFill>
@@ -13950,7 +13950,7 @@
                 </a:solidFill>
                 <a:latin typeface="Calibri"/>
               </a:rPr>
-              <a:t>#FAF6EF</a:t>
+              <a:t>#FBF1EA</a:t>
             </a:r>
           </a:p>
         </p:txBody>
@@ -13981,11 +13981,11 @@
             <a:r>
               <a:rPr sz="750" b="0" i="0">
                 <a:solidFill>
-                  <a:srgbClr val="DA291C"/>
-                </a:solidFill>
-                <a:latin typeface="Calibri"/>
-              </a:rPr>
-              <a:t>warm-bg</a:t>
+                  <a:srgbClr val="EC0000"/>
+                </a:solidFill>
+                <a:latin typeface="Calibri"/>
+              </a:rPr>
+              <a:t>Lisbon</a:t>
             </a:r>
           </a:p>
         </p:txBody>
@@ -14131,7 +14131,7 @@
             <a:r>
               <a:rPr sz="750" b="0" i="0">
                 <a:solidFill>
-                  <a:srgbClr val="DA291C"/>
+                  <a:srgbClr val="EC0000"/>
                 </a:solidFill>
                 <a:latin typeface="Calibri"/>
               </a:rPr>
@@ -14281,7 +14281,7 @@
             <a:r>
               <a:rPr sz="750" b="0" i="0">
                 <a:solidFill>
-                  <a:srgbClr val="DA291C"/>
+                  <a:srgbClr val="EC0000"/>
                 </a:solidFill>
                 <a:latin typeface="Calibri"/>
               </a:rPr>
@@ -15845,7 +15845,7 @@
             <a:avLst/>
           </a:prstGeom>
           <a:solidFill>
-            <a:srgbClr val="DA291C"/>
+            <a:srgbClr val="EC0000"/>
           </a:solidFill>
           <a:ln>
             <a:noFill/>
@@ -15923,7 +15923,7 @@
             <a:avLst/>
           </a:prstGeom>
           <a:solidFill>
-            <a:srgbClr val="DA291C"/>
+            <a:srgbClr val="EC0000"/>
           </a:solidFill>
           <a:ln>
             <a:noFill/>
@@ -16001,7 +16001,7 @@
             <a:avLst/>
           </a:prstGeom>
           <a:solidFill>
-            <a:srgbClr val="DA291C"/>
+            <a:srgbClr val="EC0000"/>
           </a:solidFill>
           <a:ln>
             <a:noFill/>
@@ -16079,7 +16079,7 @@
             <a:avLst/>
           </a:prstGeom>
           <a:solidFill>
-            <a:srgbClr val="DA291C"/>
+            <a:srgbClr val="EC0000"/>
           </a:solidFill>
           <a:ln>
             <a:noFill/>
@@ -16157,7 +16157,7 @@
             <a:avLst/>
           </a:prstGeom>
           <a:solidFill>
-            <a:srgbClr val="DA291C"/>
+            <a:srgbClr val="EC0000"/>
           </a:solidFill>
           <a:ln>
             <a:noFill/>
@@ -16235,7 +16235,7 @@
             <a:avLst/>
           </a:prstGeom>
           <a:solidFill>
-            <a:srgbClr val="DA291C"/>
+            <a:srgbClr val="EC0000"/>
           </a:solidFill>
           <a:ln>
             <a:noFill/>
@@ -16313,7 +16313,7 @@
             <a:avLst/>
           </a:prstGeom>
           <a:solidFill>
-            <a:srgbClr val="DA291C"/>
+            <a:srgbClr val="EC0000"/>
           </a:solidFill>
           <a:ln>
             <a:noFill/>
@@ -16402,7 +16402,7 @@
             <a:r>
               <a:rPr sz="750" b="1" i="0">
                 <a:solidFill>
-                  <a:srgbClr val="DA291C"/>
+                  <a:srgbClr val="EC0000"/>
                 </a:solidFill>
                 <a:latin typeface="Calibri"/>
               </a:rPr>
@@ -16557,7 +16557,7 @@
             <a:avLst/>
           </a:prstGeom>
           <a:solidFill>
-            <a:srgbClr val="DA291C"/>
+            <a:srgbClr val="EC0000"/>
           </a:solidFill>
           <a:ln>
             <a:noFill/>
@@ -16635,7 +16635,7 @@
             <a:avLst/>
           </a:prstGeom>
           <a:solidFill>
-            <a:srgbClr val="DA291C"/>
+            <a:srgbClr val="EC0000"/>
           </a:solidFill>
           <a:ln>
             <a:noFill/>
@@ -16756,7 +16756,7 @@
             <a:avLst/>
           </a:prstGeom>
           <a:solidFill>
-            <a:srgbClr val="DA291C"/>
+            <a:srgbClr val="EC0000"/>
           </a:solidFill>
           <a:ln>
             <a:noFill/>
@@ -16810,7 +16810,7 @@
             <a:r>
               <a:rPr sz="2800" b="1" i="0">
                 <a:solidFill>
-                  <a:srgbClr val="DA291C"/>
+                  <a:srgbClr val="EC0000"/>
                 </a:solidFill>
                 <a:latin typeface="Calibri"/>
               </a:rPr>
@@ -16947,7 +16947,7 @@
             <a:avLst/>
           </a:prstGeom>
           <a:solidFill>
-            <a:srgbClr val="DA291C"/>
+            <a:srgbClr val="EC0000"/>
           </a:solidFill>
           <a:ln>
             <a:noFill/>
@@ -17068,7 +17068,7 @@
             <a:avLst/>
           </a:prstGeom>
           <a:solidFill>
-            <a:srgbClr val="DA291C"/>
+            <a:srgbClr val="EC0000"/>
           </a:solidFill>
           <a:ln>
             <a:noFill/>
@@ -17122,7 +17122,7 @@
             <a:r>
               <a:rPr sz="2800" b="1" i="0">
                 <a:solidFill>
-                  <a:srgbClr val="DA291C"/>
+                  <a:srgbClr val="EC0000"/>
                 </a:solidFill>
                 <a:latin typeface="Calibri"/>
               </a:rPr>
@@ -17259,7 +17259,7 @@
             <a:avLst/>
           </a:prstGeom>
           <a:solidFill>
-            <a:srgbClr val="DA291C"/>
+            <a:srgbClr val="EC0000"/>
           </a:solidFill>
           <a:ln>
             <a:noFill/>
@@ -17380,7 +17380,7 @@
             <a:avLst/>
           </a:prstGeom>
           <a:solidFill>
-            <a:srgbClr val="DA291C"/>
+            <a:srgbClr val="EC0000"/>
           </a:solidFill>
           <a:ln>
             <a:noFill/>
@@ -17434,7 +17434,7 @@
             <a:r>
               <a:rPr sz="2800" b="1" i="0">
                 <a:solidFill>
-                  <a:srgbClr val="DA291C"/>
+                  <a:srgbClr val="EC0000"/>
                 </a:solidFill>
                 <a:latin typeface="Calibri"/>
               </a:rPr>
@@ -17571,7 +17571,7 @@
             <a:avLst/>
           </a:prstGeom>
           <a:solidFill>
-            <a:srgbClr val="DA291C"/>
+            <a:srgbClr val="EC0000"/>
           </a:solidFill>
           <a:ln>
             <a:noFill/>
@@ -17649,7 +17649,7 @@
             <a:avLst/>
           </a:prstGeom>
           <a:solidFill>
-            <a:srgbClr val="DA291C"/>
+            <a:srgbClr val="EC0000"/>
           </a:solidFill>
           <a:ln>
             <a:noFill/>
@@ -17780,7 +17780,7 @@
             <a:avLst/>
           </a:prstGeom>
           <a:solidFill>
-            <a:srgbClr val="FAF6EF"/>
+            <a:srgbClr val="FBF1EA"/>
           </a:solidFill>
           <a:ln>
             <a:noFill/>
@@ -17823,7 +17823,7 @@
             <a:avLst/>
           </a:prstGeom>
           <a:solidFill>
-            <a:srgbClr val="DA291C"/>
+            <a:srgbClr val="EC0000"/>
           </a:solidFill>
           <a:ln>
             <a:noFill/>
@@ -18366,7 +18366,7 @@
             <a:avLst/>
           </a:prstGeom>
           <a:solidFill>
-            <a:srgbClr val="DA291C"/>
+            <a:srgbClr val="EC0000"/>
           </a:solidFill>
           <a:ln>
             <a:noFill/>
@@ -18444,7 +18444,7 @@
             <a:avLst/>
           </a:prstGeom>
           <a:solidFill>
-            <a:srgbClr val="DA291C"/>
+            <a:srgbClr val="EC0000"/>
           </a:solidFill>
           <a:ln>
             <a:noFill/>
@@ -18522,7 +18522,7 @@
             <a:avLst/>
           </a:prstGeom>
           <a:solidFill>
-            <a:srgbClr val="DA291C"/>
+            <a:srgbClr val="EC0000"/>
           </a:solidFill>
           <a:ln>
             <a:noFill/>
@@ -18600,7 +18600,7 @@
             <a:avLst/>
           </a:prstGeom>
           <a:solidFill>
-            <a:srgbClr val="DA291C"/>
+            <a:srgbClr val="EC0000"/>
           </a:solidFill>
           <a:ln>
             <a:noFill/>
@@ -18678,7 +18678,7 @@
             <a:avLst/>
           </a:prstGeom>
           <a:solidFill>
-            <a:srgbClr val="DA291C"/>
+            <a:srgbClr val="EC0000"/>
           </a:solidFill>
           <a:ln>
             <a:noFill/>
@@ -18756,7 +18756,7 @@
             <a:avLst/>
           </a:prstGeom>
           <a:solidFill>
-            <a:srgbClr val="DA291C"/>
+            <a:srgbClr val="EC0000"/>
           </a:solidFill>
           <a:ln>
             <a:noFill/>
@@ -18845,7 +18845,7 @@
             <a:r>
               <a:rPr sz="750" b="1" i="0">
                 <a:solidFill>
-                  <a:srgbClr val="DA291C"/>
+                  <a:srgbClr val="EC0000"/>
                 </a:solidFill>
                 <a:latin typeface="Calibri"/>
               </a:rPr>
@@ -19000,7 +19000,7 @@
             <a:avLst/>
           </a:prstGeom>
           <a:solidFill>
-            <a:srgbClr val="DA291C"/>
+            <a:srgbClr val="EC0000"/>
           </a:solidFill>
           <a:ln>
             <a:noFill/>
@@ -19078,7 +19078,7 @@
             <a:avLst/>
           </a:prstGeom>
           <a:solidFill>
-            <a:srgbClr val="DA291C"/>
+            <a:srgbClr val="EC0000"/>
           </a:solidFill>
           <a:ln>
             <a:noFill/>
@@ -19210,7 +19210,7 @@
             <a:r>
               <a:rPr sz="3200" b="1" i="0">
                 <a:solidFill>
-                  <a:srgbClr val="DA291C"/>
+                  <a:srgbClr val="EC0000"/>
                 </a:solidFill>
                 <a:latin typeface="Calibri"/>
               </a:rPr>
@@ -19269,7 +19269,7 @@
             <a:avLst/>
           </a:prstGeom>
           <a:solidFill>
-            <a:srgbClr val="DA291C"/>
+            <a:srgbClr val="EC0000"/>
           </a:solidFill>
           <a:ln>
             <a:noFill/>
@@ -19401,7 +19401,7 @@
             <a:r>
               <a:rPr sz="3200" b="1" i="0">
                 <a:solidFill>
-                  <a:srgbClr val="DA291C"/>
+                  <a:srgbClr val="EC0000"/>
                 </a:solidFill>
                 <a:latin typeface="Calibri"/>
               </a:rPr>
@@ -19460,7 +19460,7 @@
             <a:avLst/>
           </a:prstGeom>
           <a:solidFill>
-            <a:srgbClr val="DA291C"/>
+            <a:srgbClr val="EC0000"/>
           </a:solidFill>
           <a:ln>
             <a:noFill/>
@@ -19592,7 +19592,7 @@
             <a:r>
               <a:rPr sz="3200" b="1" i="0">
                 <a:solidFill>
-                  <a:srgbClr val="DA291C"/>
+                  <a:srgbClr val="EC0000"/>
                 </a:solidFill>
                 <a:latin typeface="Calibri"/>
               </a:rPr>
@@ -19651,7 +19651,7 @@
             <a:avLst/>
           </a:prstGeom>
           <a:solidFill>
-            <a:srgbClr val="DA291C"/>
+            <a:srgbClr val="EC0000"/>
           </a:solidFill>
           <a:ln>
             <a:noFill/>
@@ -19783,7 +19783,7 @@
             <a:r>
               <a:rPr sz="3200" b="1" i="0">
                 <a:solidFill>
-                  <a:srgbClr val="DA291C"/>
+                  <a:srgbClr val="EC0000"/>
                 </a:solidFill>
                 <a:latin typeface="Calibri"/>
               </a:rPr>
@@ -19842,7 +19842,7 @@
             <a:avLst/>
           </a:prstGeom>
           <a:solidFill>
-            <a:srgbClr val="DA291C"/>
+            <a:srgbClr val="EC0000"/>
           </a:solidFill>
           <a:ln>
             <a:noFill/>
@@ -20043,7 +20043,7 @@
             <a:avLst/>
           </a:prstGeom>
           <a:solidFill>
-            <a:srgbClr val="DA291C"/>
+            <a:srgbClr val="EC0000"/>
           </a:solidFill>
           <a:ln>
             <a:noFill/>
@@ -20400,7 +20400,7 @@
             <a:avLst/>
           </a:prstGeom>
           <a:solidFill>
-            <a:srgbClr val="FAF6EF"/>
+            <a:srgbClr val="FBF1EA"/>
           </a:solidFill>
           <a:ln>
             <a:noFill/>
@@ -20443,7 +20443,7 @@
             <a:avLst/>
           </a:prstGeom>
           <a:solidFill>
-            <a:srgbClr val="DA291C"/>
+            <a:srgbClr val="EC0000"/>
           </a:solidFill>
           <a:ln>
             <a:noFill/>
@@ -20564,7 +20564,7 @@
             <a:avLst/>
           </a:prstGeom>
           <a:solidFill>
-            <a:srgbClr val="DA291C"/>
+            <a:srgbClr val="EC0000"/>
           </a:solidFill>
           <a:ln>
             <a:noFill/>
@@ -20887,7 +20887,7 @@
             <a:r>
               <a:rPr sz="750" b="1" i="0">
                 <a:solidFill>
-                  <a:srgbClr val="DA291C"/>
+                  <a:srgbClr val="EC0000"/>
                 </a:solidFill>
                 <a:latin typeface="Calibri"/>
               </a:rPr>
@@ -21025,7 +21025,7 @@
             <a:avLst/>
           </a:prstGeom>
           <a:solidFill>
-            <a:srgbClr val="DA291C"/>
+            <a:srgbClr val="EC0000"/>
           </a:solidFill>
           <a:ln>
             <a:noFill/>
@@ -21147,7 +21147,7 @@
             <a:avLst/>
           </a:prstGeom>
           <a:solidFill>
-            <a:srgbClr val="DA291C"/>
+            <a:srgbClr val="EC0000"/>
           </a:solidFill>
           <a:ln>
             <a:noFill/>
@@ -21269,7 +21269,7 @@
             <a:avLst/>
           </a:prstGeom>
           <a:solidFill>
-            <a:srgbClr val="DA291C"/>
+            <a:srgbClr val="EC0000"/>
           </a:solidFill>
           <a:ln>
             <a:noFill/>
@@ -21391,7 +21391,7 @@
             <a:avLst/>
           </a:prstGeom>
           <a:solidFill>
-            <a:srgbClr val="DA291C"/>
+            <a:srgbClr val="EC0000"/>
           </a:solidFill>
           <a:ln>
             <a:noFill/>
@@ -21513,7 +21513,7 @@
             <a:avLst/>
           </a:prstGeom>
           <a:solidFill>
-            <a:srgbClr val="DA291C"/>
+            <a:srgbClr val="EC0000"/>
           </a:solidFill>
           <a:ln>
             <a:noFill/>
@@ -21635,7 +21635,7 @@
             <a:avLst/>
           </a:prstGeom>
           <a:solidFill>
-            <a:srgbClr val="DA291C"/>
+            <a:srgbClr val="EC0000"/>
           </a:solidFill>
           <a:ln>
             <a:noFill/>
@@ -21757,7 +21757,7 @@
             <a:avLst/>
           </a:prstGeom>
           <a:solidFill>
-            <a:srgbClr val="DA291C"/>
+            <a:srgbClr val="EC0000"/>
           </a:solidFill>
           <a:ln>
             <a:noFill/>
@@ -21879,7 +21879,7 @@
             <a:avLst/>
           </a:prstGeom>
           <a:solidFill>
-            <a:srgbClr val="DA291C"/>
+            <a:srgbClr val="EC0000"/>
           </a:solidFill>
           <a:ln>
             <a:noFill/>
@@ -22001,7 +22001,7 @@
             <a:avLst/>
           </a:prstGeom>
           <a:solidFill>
-            <a:srgbClr val="DA291C"/>
+            <a:srgbClr val="EC0000"/>
           </a:solidFill>
           <a:ln>
             <a:noFill/>
@@ -22123,7 +22123,7 @@
             <a:avLst/>
           </a:prstGeom>
           <a:solidFill>
-            <a:srgbClr val="DA291C"/>
+            <a:srgbClr val="EC0000"/>
           </a:solidFill>
           <a:ln>
             <a:noFill/>
@@ -22245,7 +22245,7 @@
             <a:avLst/>
           </a:prstGeom>
           <a:solidFill>
-            <a:srgbClr val="DA291C"/>
+            <a:srgbClr val="EC0000"/>
           </a:solidFill>
           <a:ln>
             <a:noFill/>
@@ -22367,7 +22367,7 @@
             <a:avLst/>
           </a:prstGeom>
           <a:solidFill>
-            <a:srgbClr val="DA291C"/>
+            <a:srgbClr val="EC0000"/>
           </a:solidFill>
           <a:ln>
             <a:noFill/>
@@ -22489,7 +22489,7 @@
             <a:avLst/>
           </a:prstGeom>
           <a:solidFill>
-            <a:srgbClr val="DA291C"/>
+            <a:srgbClr val="EC0000"/>
           </a:solidFill>
           <a:ln>
             <a:noFill/>
@@ -22611,7 +22611,7 @@
             <a:avLst/>
           </a:prstGeom>
           <a:solidFill>
-            <a:srgbClr val="DA291C"/>
+            <a:srgbClr val="EC0000"/>
           </a:solidFill>
           <a:ln>
             <a:noFill/>
@@ -22733,7 +22733,7 @@
             <a:avLst/>
           </a:prstGeom>
           <a:solidFill>
-            <a:srgbClr val="DA291C"/>
+            <a:srgbClr val="EC0000"/>
           </a:solidFill>
           <a:ln>
             <a:noFill/>
@@ -22855,7 +22855,7 @@
             <a:avLst/>
           </a:prstGeom>
           <a:solidFill>
-            <a:srgbClr val="DA291C"/>
+            <a:srgbClr val="EC0000"/>
           </a:solidFill>
           <a:ln>
             <a:noFill/>
@@ -22977,7 +22977,7 @@
             <a:avLst/>
           </a:prstGeom>
           <a:solidFill>
-            <a:srgbClr val="DA291C"/>
+            <a:srgbClr val="EC0000"/>
           </a:solidFill>
           <a:ln>
             <a:noFill/>
@@ -23099,7 +23099,7 @@
             <a:avLst/>
           </a:prstGeom>
           <a:solidFill>
-            <a:srgbClr val="DA291C"/>
+            <a:srgbClr val="EC0000"/>
           </a:solidFill>
           <a:ln>
             <a:noFill/>
@@ -23221,7 +23221,7 @@
             <a:avLst/>
           </a:prstGeom>
           <a:solidFill>
-            <a:srgbClr val="DA291C"/>
+            <a:srgbClr val="EC0000"/>
           </a:solidFill>
           <a:ln>
             <a:noFill/>
@@ -23343,7 +23343,7 @@
             <a:avLst/>
           </a:prstGeom>
           <a:solidFill>
-            <a:srgbClr val="DA291C"/>
+            <a:srgbClr val="EC0000"/>
           </a:solidFill>
           <a:ln>
             <a:noFill/>
@@ -23465,7 +23465,7 @@
             <a:avLst/>
           </a:prstGeom>
           <a:solidFill>
-            <a:srgbClr val="DA291C"/>
+            <a:srgbClr val="EC0000"/>
           </a:solidFill>
           <a:ln>
             <a:noFill/>
@@ -23587,7 +23587,7 @@
             <a:avLst/>
           </a:prstGeom>
           <a:solidFill>
-            <a:srgbClr val="DA291C"/>
+            <a:srgbClr val="EC0000"/>
           </a:solidFill>
           <a:ln>
             <a:noFill/>
@@ -23709,7 +23709,7 @@
             <a:avLst/>
           </a:prstGeom>
           <a:solidFill>
-            <a:srgbClr val="DA291C"/>
+            <a:srgbClr val="EC0000"/>
           </a:solidFill>
           <a:ln>
             <a:noFill/>
@@ -23831,7 +23831,7 @@
             <a:avLst/>
           </a:prstGeom>
           <a:solidFill>
-            <a:srgbClr val="DA291C"/>
+            <a:srgbClr val="EC0000"/>
           </a:solidFill>
           <a:ln>
             <a:noFill/>
@@ -23953,7 +23953,7 @@
             <a:avLst/>
           </a:prstGeom>
           <a:solidFill>
-            <a:srgbClr val="DA291C"/>
+            <a:srgbClr val="EC0000"/>
           </a:solidFill>
           <a:ln>
             <a:noFill/>
@@ -24075,7 +24075,7 @@
             <a:avLst/>
           </a:prstGeom>
           <a:solidFill>
-            <a:srgbClr val="DA291C"/>
+            <a:srgbClr val="EC0000"/>
           </a:solidFill>
           <a:ln>
             <a:noFill/>
@@ -24197,7 +24197,7 @@
             <a:avLst/>
           </a:prstGeom>
           <a:solidFill>
-            <a:srgbClr val="DA291C"/>
+            <a:srgbClr val="EC0000"/>
           </a:solidFill>
           <a:ln>
             <a:noFill/>
@@ -24319,7 +24319,7 @@
             <a:avLst/>
           </a:prstGeom>
           <a:solidFill>
-            <a:srgbClr val="DA291C"/>
+            <a:srgbClr val="EC0000"/>
           </a:solidFill>
           <a:ln>
             <a:noFill/>
@@ -24441,7 +24441,7 @@
             <a:avLst/>
           </a:prstGeom>
           <a:solidFill>
-            <a:srgbClr val="DA291C"/>
+            <a:srgbClr val="EC0000"/>
           </a:solidFill>
           <a:ln>
             <a:noFill/>
@@ -24563,7 +24563,7 @@
             <a:avLst/>
           </a:prstGeom>
           <a:solidFill>
-            <a:srgbClr val="DA291C"/>
+            <a:srgbClr val="EC0000"/>
           </a:solidFill>
           <a:ln>
             <a:noFill/>
@@ -24685,7 +24685,7 @@
             <a:avLst/>
           </a:prstGeom>
           <a:solidFill>
-            <a:srgbClr val="DA291C"/>
+            <a:srgbClr val="EC0000"/>
           </a:solidFill>
           <a:ln>
             <a:noFill/>
@@ -24807,7 +24807,7 @@
             <a:avLst/>
           </a:prstGeom>
           <a:solidFill>
-            <a:srgbClr val="DA291C"/>
+            <a:srgbClr val="EC0000"/>
           </a:solidFill>
           <a:ln>
             <a:noFill/>
@@ -24929,7 +24929,7 @@
             <a:avLst/>
           </a:prstGeom>
           <a:solidFill>
-            <a:srgbClr val="DA291C"/>
+            <a:srgbClr val="EC0000"/>
           </a:solidFill>
           <a:ln>
             <a:noFill/>
@@ -25051,7 +25051,7 @@
             <a:avLst/>
           </a:prstGeom>
           <a:solidFill>
-            <a:srgbClr val="DA291C"/>
+            <a:srgbClr val="EC0000"/>
           </a:solidFill>
           <a:ln>
             <a:noFill/>
@@ -25173,7 +25173,7 @@
             <a:avLst/>
           </a:prstGeom>
           <a:solidFill>
-            <a:srgbClr val="DA291C"/>
+            <a:srgbClr val="EC0000"/>
           </a:solidFill>
           <a:ln>
             <a:noFill/>
@@ -25295,7 +25295,7 @@
             <a:avLst/>
           </a:prstGeom>
           <a:solidFill>
-            <a:srgbClr val="DA291C"/>
+            <a:srgbClr val="EC0000"/>
           </a:solidFill>
           <a:ln>
             <a:noFill/>
@@ -25391,7 +25391,7 @@
             <a:avLst/>
           </a:prstGeom>
           <a:solidFill>
-            <a:srgbClr val="FAF6EF"/>
+            <a:srgbClr val="FBF1EA"/>
           </a:solidFill>
           <a:ln>
             <a:noFill/>
@@ -25434,7 +25434,7 @@
             <a:avLst/>
           </a:prstGeom>
           <a:solidFill>
-            <a:srgbClr val="DA291C"/>
+            <a:srgbClr val="EC0000"/>
           </a:solidFill>
           <a:ln>
             <a:noFill/>
@@ -25600,7 +25600,7 @@
             <a:avLst/>
           </a:prstGeom>
           <a:solidFill>
-            <a:srgbClr val="DA291C"/>
+            <a:srgbClr val="EC0000"/>
           </a:solidFill>
           <a:ln>
             <a:noFill/>
@@ -25678,7 +25678,7 @@
             <a:avLst/>
           </a:prstGeom>
           <a:solidFill>
-            <a:srgbClr val="DA291C"/>
+            <a:srgbClr val="EC0000"/>
           </a:solidFill>
           <a:ln>
             <a:noFill/>
@@ -25847,7 +25847,7 @@
             <a:r>
               <a:rPr sz="800" b="1" i="0">
                 <a:solidFill>
-                  <a:srgbClr val="DA291C"/>
+                  <a:srgbClr val="EC0000"/>
                 </a:solidFill>
                 <a:latin typeface="Calibri"/>
               </a:rPr>
@@ -26834,7 +26834,7 @@
             <a:r>
               <a:rPr sz="750" b="1" i="0">
                 <a:solidFill>
-                  <a:srgbClr val="DA291C"/>
+                  <a:srgbClr val="EC0000"/>
                 </a:solidFill>
                 <a:latin typeface="Calibri"/>
               </a:rPr>
@@ -26989,7 +26989,7 @@
             <a:avLst/>
           </a:prstGeom>
           <a:solidFill>
-            <a:srgbClr val="DA291C"/>
+            <a:srgbClr val="EC0000"/>
           </a:solidFill>
           <a:ln>
             <a:noFill/>
@@ -27067,7 +27067,7 @@
             <a:avLst/>
           </a:prstGeom>
           <a:solidFill>
-            <a:srgbClr val="DA291C"/>
+            <a:srgbClr val="EC0000"/>
           </a:solidFill>
           <a:ln>
             <a:noFill/>
@@ -27153,7 +27153,7 @@
             <a:avLst/>
           </a:prstGeom>
           <a:solidFill>
-            <a:srgbClr val="DA291C"/>
+            <a:srgbClr val="EC0000"/>
           </a:solidFill>
           <a:ln>
             <a:noFill/>
@@ -27388,7 +27388,7 @@
             <a:avLst/>
           </a:prstGeom>
           <a:solidFill>
-            <a:srgbClr val="DA291C"/>
+            <a:srgbClr val="EC0000"/>
           </a:solidFill>
           <a:ln>
             <a:noFill/>
@@ -27623,7 +27623,7 @@
             <a:avLst/>
           </a:prstGeom>
           <a:solidFill>
-            <a:srgbClr val="DA291C"/>
+            <a:srgbClr val="EC0000"/>
           </a:solidFill>
           <a:ln>
             <a:noFill/>
@@ -27858,7 +27858,7 @@
             <a:avLst/>
           </a:prstGeom>
           <a:solidFill>
-            <a:srgbClr val="DA291C"/>
+            <a:srgbClr val="EC0000"/>
           </a:solidFill>
           <a:ln>
             <a:noFill/>
@@ -28093,7 +28093,7 @@
             <a:avLst/>
           </a:prstGeom>
           <a:solidFill>
-            <a:srgbClr val="DA291C"/>
+            <a:srgbClr val="EC0000"/>
           </a:solidFill>
           <a:ln>
             <a:noFill/>
@@ -28328,7 +28328,7 @@
             <a:avLst/>
           </a:prstGeom>
           <a:solidFill>
-            <a:srgbClr val="DA291C"/>
+            <a:srgbClr val="EC0000"/>
           </a:solidFill>
           <a:ln>
             <a:noFill/>
@@ -28563,7 +28563,7 @@
             <a:avLst/>
           </a:prstGeom>
           <a:solidFill>
-            <a:srgbClr val="DA291C"/>
+            <a:srgbClr val="EC0000"/>
           </a:solidFill>
           <a:ln>
             <a:noFill/>
@@ -28878,7 +28878,7 @@
             <a:avLst/>
           </a:prstGeom>
           <a:solidFill>
-            <a:srgbClr val="FAF6EF"/>
+            <a:srgbClr val="FBF1EA"/>
           </a:solidFill>
           <a:ln>
             <a:noFill/>
@@ -28921,7 +28921,7 @@
             <a:avLst/>
           </a:prstGeom>
           <a:solidFill>
-            <a:srgbClr val="DA291C"/>
+            <a:srgbClr val="EC0000"/>
           </a:solidFill>
           <a:ln>
             <a:noFill/>
@@ -29053,7 +29053,7 @@
             <a:r>
               <a:rPr sz="750" b="1" i="0">
                 <a:solidFill>
-                  <a:srgbClr val="DA291C"/>
+                  <a:srgbClr val="EC0000"/>
                 </a:solidFill>
                 <a:latin typeface="Calibri"/>
               </a:rPr>
@@ -29191,7 +29191,7 @@
             <a:avLst/>
           </a:prstGeom>
           <a:solidFill>
-            <a:srgbClr val="DA291C"/>
+            <a:srgbClr val="EC0000"/>
           </a:solidFill>
           <a:ln>
             <a:noFill/>
@@ -29269,7 +29269,7 @@
             <a:avLst/>
           </a:prstGeom>
           <a:solidFill>
-            <a:srgbClr val="DA291C"/>
+            <a:srgbClr val="EC0000"/>
           </a:solidFill>
           <a:ln>
             <a:noFill/>
@@ -29400,7 +29400,7 @@
             <a:avLst/>
           </a:prstGeom>
           <a:solidFill>
-            <a:srgbClr val="DA291C"/>
+            <a:srgbClr val="EC0000"/>
           </a:solidFill>
           <a:ln>
             <a:noFill/>
@@ -29478,7 +29478,7 @@
             <a:avLst/>
           </a:prstGeom>
           <a:solidFill>
-            <a:srgbClr val="DA291C"/>
+            <a:srgbClr val="EC0000"/>
           </a:solidFill>
           <a:ln>
             <a:noFill/>
@@ -29609,7 +29609,7 @@
             <a:avLst/>
           </a:prstGeom>
           <a:solidFill>
-            <a:srgbClr val="DA291C"/>
+            <a:srgbClr val="EC0000"/>
           </a:solidFill>
           <a:ln>
             <a:noFill/>
@@ -29687,7 +29687,7 @@
             <a:avLst/>
           </a:prstGeom>
           <a:solidFill>
-            <a:srgbClr val="DA291C"/>
+            <a:srgbClr val="EC0000"/>
           </a:solidFill>
           <a:ln>
             <a:noFill/>
@@ -29818,7 +29818,7 @@
             <a:avLst/>
           </a:prstGeom>
           <a:solidFill>
-            <a:srgbClr val="DA291C"/>
+            <a:srgbClr val="EC0000"/>
           </a:solidFill>
           <a:ln>
             <a:noFill/>
@@ -29896,7 +29896,7 @@
             <a:avLst/>
           </a:prstGeom>
           <a:solidFill>
-            <a:srgbClr val="DA291C"/>
+            <a:srgbClr val="EC0000"/>
           </a:solidFill>
           <a:ln>
             <a:noFill/>
@@ -30027,7 +30027,7 @@
             <a:avLst/>
           </a:prstGeom>
           <a:solidFill>
-            <a:srgbClr val="DA291C"/>
+            <a:srgbClr val="EC0000"/>
           </a:solidFill>
           <a:ln>
             <a:noFill/>
@@ -30105,7 +30105,7 @@
             <a:avLst/>
           </a:prstGeom>
           <a:solidFill>
-            <a:srgbClr val="DA291C"/>
+            <a:srgbClr val="EC0000"/>
           </a:solidFill>
           <a:ln>
             <a:noFill/>
@@ -30236,7 +30236,7 @@
             <a:avLst/>
           </a:prstGeom>
           <a:solidFill>
-            <a:srgbClr val="DA291C"/>
+            <a:srgbClr val="EC0000"/>
           </a:solidFill>
           <a:ln>
             <a:noFill/>
@@ -30314,7 +30314,7 @@
             <a:avLst/>
           </a:prstGeom>
           <a:solidFill>
-            <a:srgbClr val="DA291C"/>
+            <a:srgbClr val="EC0000"/>
           </a:solidFill>
           <a:ln>
             <a:noFill/>
@@ -30445,7 +30445,7 @@
             <a:avLst/>
           </a:prstGeom>
           <a:solidFill>
-            <a:srgbClr val="DA291C"/>
+            <a:srgbClr val="EC0000"/>
           </a:solidFill>
           <a:ln>
             <a:noFill/>
@@ -30523,7 +30523,7 @@
             <a:avLst/>
           </a:prstGeom>
           <a:solidFill>
-            <a:srgbClr val="DA291C"/>
+            <a:srgbClr val="EC0000"/>
           </a:solidFill>
           <a:ln>
             <a:noFill/>
@@ -30654,7 +30654,7 @@
             <a:avLst/>
           </a:prstGeom>
           <a:solidFill>
-            <a:srgbClr val="DA291C"/>
+            <a:srgbClr val="EC0000"/>
           </a:solidFill>
           <a:ln>
             <a:noFill/>
@@ -30732,7 +30732,7 @@
             <a:avLst/>
           </a:prstGeom>
           <a:solidFill>
-            <a:srgbClr val="DA291C"/>
+            <a:srgbClr val="EC0000"/>
           </a:solidFill>
           <a:ln>
             <a:noFill/>
@@ -30863,7 +30863,7 @@
             <a:avLst/>
           </a:prstGeom>
           <a:solidFill>
-            <a:srgbClr val="DA291C"/>
+            <a:srgbClr val="EC0000"/>
           </a:solidFill>
           <a:ln>
             <a:noFill/>
@@ -30941,7 +30941,7 @@
             <a:avLst/>
           </a:prstGeom>
           <a:solidFill>
-            <a:srgbClr val="DA291C"/>
+            <a:srgbClr val="EC0000"/>
           </a:solidFill>
           <a:ln>
             <a:noFill/>
@@ -31072,7 +31072,7 @@
             <a:avLst/>
           </a:prstGeom>
           <a:solidFill>
-            <a:srgbClr val="DA291C"/>
+            <a:srgbClr val="EC0000"/>
           </a:solidFill>
           <a:ln>
             <a:noFill/>
@@ -31150,7 +31150,7 @@
             <a:avLst/>
           </a:prstGeom>
           <a:solidFill>
-            <a:srgbClr val="DA291C"/>
+            <a:srgbClr val="EC0000"/>
           </a:solidFill>
           <a:ln>
             <a:noFill/>
@@ -31281,7 +31281,7 @@
             <a:avLst/>
           </a:prstGeom>
           <a:solidFill>
-            <a:srgbClr val="DA291C"/>
+            <a:srgbClr val="EC0000"/>
           </a:solidFill>
           <a:ln>
             <a:noFill/>
@@ -31359,7 +31359,7 @@
             <a:avLst/>
           </a:prstGeom>
           <a:solidFill>
-            <a:srgbClr val="DA291C"/>
+            <a:srgbClr val="EC0000"/>
           </a:solidFill>
           <a:ln>
             <a:noFill/>
@@ -31490,7 +31490,7 @@
             <a:avLst/>
           </a:prstGeom>
           <a:solidFill>
-            <a:srgbClr val="DA291C"/>
+            <a:srgbClr val="EC0000"/>
           </a:solidFill>
           <a:ln>
             <a:noFill/>
@@ -31568,7 +31568,7 @@
             <a:avLst/>
           </a:prstGeom>
           <a:solidFill>
-            <a:srgbClr val="DA291C"/>
+            <a:srgbClr val="EC0000"/>
           </a:solidFill>
           <a:ln>
             <a:noFill/>
@@ -31699,7 +31699,7 @@
             <a:avLst/>
           </a:prstGeom>
           <a:solidFill>
-            <a:srgbClr val="DA291C"/>
+            <a:srgbClr val="EC0000"/>
           </a:solidFill>
           <a:ln>
             <a:noFill/>
@@ -31777,7 +31777,7 @@
             <a:avLst/>
           </a:prstGeom>
           <a:solidFill>
-            <a:srgbClr val="DA291C"/>
+            <a:srgbClr val="EC0000"/>
           </a:solidFill>
           <a:ln>
             <a:noFill/>
@@ -31908,7 +31908,7 @@
             <a:avLst/>
           </a:prstGeom>
           <a:solidFill>
-            <a:srgbClr val="DA291C"/>
+            <a:srgbClr val="EC0000"/>
           </a:solidFill>
           <a:ln>
             <a:noFill/>
@@ -31986,7 +31986,7 @@
             <a:avLst/>
           </a:prstGeom>
           <a:solidFill>
-            <a:srgbClr val="DA291C"/>
+            <a:srgbClr val="EC0000"/>
           </a:solidFill>
           <a:ln>
             <a:noFill/>
@@ -32117,7 +32117,7 @@
             <a:avLst/>
           </a:prstGeom>
           <a:solidFill>
-            <a:srgbClr val="DA291C"/>
+            <a:srgbClr val="EC0000"/>
           </a:solidFill>
           <a:ln>
             <a:noFill/>
@@ -32195,7 +32195,7 @@
             <a:avLst/>
           </a:prstGeom>
           <a:solidFill>
-            <a:srgbClr val="DA291C"/>
+            <a:srgbClr val="EC0000"/>
           </a:solidFill>
           <a:ln>
             <a:noFill/>
@@ -32326,7 +32326,7 @@
             <a:avLst/>
           </a:prstGeom>
           <a:solidFill>
-            <a:srgbClr val="DA291C"/>
+            <a:srgbClr val="EC0000"/>
           </a:solidFill>
           <a:ln>
             <a:noFill/>
@@ -32404,7 +32404,7 @@
             <a:avLst/>
           </a:prstGeom>
           <a:solidFill>
-            <a:srgbClr val="DA291C"/>
+            <a:srgbClr val="EC0000"/>
           </a:solidFill>
           <a:ln>
             <a:noFill/>
@@ -32535,7 +32535,7 @@
             <a:avLst/>
           </a:prstGeom>
           <a:solidFill>
-            <a:srgbClr val="DA291C"/>
+            <a:srgbClr val="EC0000"/>
           </a:solidFill>
           <a:ln>
             <a:noFill/>
@@ -32613,7 +32613,7 @@
             <a:avLst/>
           </a:prstGeom>
           <a:solidFill>
-            <a:srgbClr val="DA291C"/>
+            <a:srgbClr val="EC0000"/>
           </a:solidFill>
           <a:ln>
             <a:noFill/>
@@ -32718,7 +32718,7 @@
             <a:avLst/>
           </a:prstGeom>
           <a:solidFill>
-            <a:srgbClr val="FAF6EF"/>
+            <a:srgbClr val="FBF1EA"/>
           </a:solidFill>
           <a:ln>
             <a:noFill/>
@@ -32761,7 +32761,7 @@
             <a:avLst/>
           </a:prstGeom>
           <a:solidFill>
-            <a:srgbClr val="DA291C"/>
+            <a:srgbClr val="EC0000"/>
           </a:solidFill>
           <a:ln>
             <a:noFill/>
@@ -32882,7 +32882,7 @@
             <a:avLst/>
           </a:prstGeom>
           <a:solidFill>
-            <a:srgbClr val="DA291C"/>
+            <a:srgbClr val="EC0000"/>
           </a:solidFill>
           <a:ln>
             <a:noFill/>
@@ -32970,7 +32970,7 @@
             <a:avLst/>
           </a:prstGeom>
           <a:solidFill>
-            <a:srgbClr val="DA291C"/>
+            <a:srgbClr val="EC0000"/>
           </a:solidFill>
           <a:ln>
             <a:noFill/>
@@ -33024,7 +33024,7 @@
             <a:r>
               <a:rPr sz="1000" b="1" i="0">
                 <a:solidFill>
-                  <a:srgbClr val="DA291C"/>
+                  <a:srgbClr val="EC0000"/>
                 </a:solidFill>
                 <a:latin typeface="Calibri"/>
               </a:rPr>
@@ -33083,7 +33083,7 @@
             <a:avLst/>
           </a:prstGeom>
           <a:solidFill>
-            <a:srgbClr val="DA291C"/>
+            <a:srgbClr val="EC0000"/>
           </a:solidFill>
           <a:ln>
             <a:noFill/>
@@ -33171,7 +33171,7 @@
             <a:avLst/>
           </a:prstGeom>
           <a:solidFill>
-            <a:srgbClr val="DA291C"/>
+            <a:srgbClr val="EC0000"/>
           </a:solidFill>
           <a:ln>
             <a:noFill/>
@@ -33225,7 +33225,7 @@
             <a:r>
               <a:rPr sz="1000" b="1" i="0">
                 <a:solidFill>
-                  <a:srgbClr val="DA291C"/>
+                  <a:srgbClr val="EC0000"/>
                 </a:solidFill>
                 <a:latin typeface="Calibri"/>
               </a:rPr>
@@ -33284,7 +33284,7 @@
             <a:avLst/>
           </a:prstGeom>
           <a:solidFill>
-            <a:srgbClr val="DA291C"/>
+            <a:srgbClr val="EC0000"/>
           </a:solidFill>
           <a:ln>
             <a:noFill/>
@@ -33372,7 +33372,7 @@
             <a:avLst/>
           </a:prstGeom>
           <a:solidFill>
-            <a:srgbClr val="DA291C"/>
+            <a:srgbClr val="EC0000"/>
           </a:solidFill>
           <a:ln>
             <a:noFill/>
@@ -33426,7 +33426,7 @@
             <a:r>
               <a:rPr sz="1000" b="1" i="0">
                 <a:solidFill>
-                  <a:srgbClr val="DA291C"/>
+                  <a:srgbClr val="EC0000"/>
                 </a:solidFill>
                 <a:latin typeface="Calibri"/>
               </a:rPr>
@@ -33530,7 +33530,7 @@
             <a:avLst/>
           </a:prstGeom>
           <a:solidFill>
-            <a:srgbClr val="DA291C"/>
+            <a:srgbClr val="EC0000"/>
           </a:solidFill>
           <a:ln>
             <a:noFill/>
@@ -33584,7 +33584,7 @@
             <a:r>
               <a:rPr sz="1000" b="1" i="0">
                 <a:solidFill>
-                  <a:srgbClr val="DA291C"/>
+                  <a:srgbClr val="EC0000"/>
                 </a:solidFill>
                 <a:latin typeface="Calibri"/>
               </a:rPr>
@@ -34106,7 +34106,7 @@
             <a:r>
               <a:rPr sz="750" b="1" i="0">
                 <a:solidFill>
-                  <a:srgbClr val="DA291C"/>
+                  <a:srgbClr val="EC0000"/>
                 </a:solidFill>
                 <a:latin typeface="Calibri"/>
               </a:rPr>

--- a/Santander_Digital_Banking_Future.pptx
+++ b/Santander_Digital_Banking_Future.pptx
@@ -3870,7 +3870,7 @@
                 </a:solidFill>
                 <a:latin typeface="Calibri"/>
               </a:rPr>
-              <a:t>Alan Davidson  ·  Business Banking Advisor  ·  Self-initiated  ·  June 2026</a:t>
+              <a:t>Alan Davidson  ·  Business Banking Advisor  ·  Self-initiated  ·  July 2026</a:t>
             </a:r>
           </a:p>
         </p:txBody>
@@ -4262,7 +4262,7 @@
           <a:noFill/>
         </p:spPr>
         <p:txBody>
-          <a:bodyPr wrap="square">
+          <a:bodyPr wrap="none">
             <a:spAutoFit/>
           </a:bodyPr>
           <a:lstStyle/>
@@ -4275,7 +4275,7 @@
                 </a:solidFill>
                 <a:latin typeface="Calibri"/>
               </a:rPr>
-              <a:t>FCA BCOBS 4A</a:t>
+              <a:t>FCA BCOBS</a:t>
             </a:r>
           </a:p>
         </p:txBody>
@@ -4496,7 +4496,7 @@
           <a:noFill/>
         </p:spPr>
         <p:txBody>
-          <a:bodyPr wrap="square">
+          <a:bodyPr wrap="none">
             <a:spAutoFit/>
           </a:bodyPr>
           <a:lstStyle/>
@@ -4509,7 +4509,7 @@
                 </a:solidFill>
                 <a:latin typeface="Calibri"/>
               </a:rPr>
-              <a:t>MLR 2017 / JMLSG</a:t>
+              <a:t>MLR 2017</a:t>
             </a:r>
           </a:p>
         </p:txBody>
@@ -4679,7 +4679,7 @@
         <p:spPr>
           <a:xfrm>
             <a:off x="6327648" y="1115568"/>
-            <a:ext cx="731520" cy="310896"/>
+            <a:ext cx="768096" cy="310896"/>
           </a:xfrm>
           <a:prstGeom prst="rect">
             <a:avLst/>
@@ -5198,7 +5198,7 @@
           <a:noFill/>
         </p:spPr>
         <p:txBody>
-          <a:bodyPr wrap="square">
+          <a:bodyPr wrap="none">
             <a:spAutoFit/>
           </a:bodyPr>
           <a:lstStyle/>
@@ -5211,7 +5211,7 @@
                 </a:solidFill>
                 <a:latin typeface="Calibri"/>
               </a:rPr>
-              <a:t>PSD2 RTS Art.97</a:t>
+              <a:t>PSD2 RTS</a:t>
             </a:r>
           </a:p>
         </p:txBody>
@@ -5381,7 +5381,7 @@
         <p:spPr>
           <a:xfrm>
             <a:off x="3383280" y="3694176"/>
-            <a:ext cx="731520" cy="310896"/>
+            <a:ext cx="768096" cy="310896"/>
           </a:xfrm>
           <a:prstGeom prst="rect">
             <a:avLst/>
@@ -5432,7 +5432,7 @@
           <a:noFill/>
         </p:spPr>
         <p:txBody>
-          <a:bodyPr wrap="square">
+          <a:bodyPr wrap="none">
             <a:spAutoFit/>
           </a:bodyPr>
           <a:lstStyle/>
@@ -5445,7 +5445,7 @@
                 </a:solidFill>
                 <a:latin typeface="Calibri"/>
               </a:rPr>
-              <a:t>GDPR Art.5(1)(c)</a:t>
+              <a:t>GDPR Art.5</a:t>
             </a:r>
           </a:p>
         </p:txBody>
@@ -5578,7 +5578,7 @@
             <a:avLst/>
           </a:prstGeom>
           <a:solidFill>
-            <a:srgbClr val="D6D3D1"/>
+            <a:srgbClr val="475569"/>
           </a:solidFill>
           <a:ln>
             <a:noFill/>
@@ -5615,13 +5615,13 @@
         <p:spPr>
           <a:xfrm>
             <a:off x="6327648" y="3694176"/>
-            <a:ext cx="731520" cy="310896"/>
-          </a:xfrm>
-          <a:prstGeom prst="rect">
-            <a:avLst/>
-          </a:prstGeom>
-          <a:solidFill>
-            <a:srgbClr val="D6D3D1"/>
+            <a:ext cx="768096" cy="310896"/>
+          </a:xfrm>
+          <a:prstGeom prst="rect">
+            <a:avLst/>
+          </a:prstGeom>
+          <a:solidFill>
+            <a:srgbClr val="475569"/>
           </a:solidFill>
           <a:ln>
             <a:noFill/>
@@ -5812,7 +5812,7 @@
             <a:avLst/>
           </a:prstGeom>
           <a:solidFill>
-            <a:srgbClr val="FECACA"/>
+            <a:srgbClr val="E11D48"/>
           </a:solidFill>
           <a:ln>
             <a:noFill/>
@@ -5855,7 +5855,7 @@
             <a:avLst/>
           </a:prstGeom>
           <a:solidFill>
-            <a:srgbClr val="FECACA"/>
+            <a:srgbClr val="E11D48"/>
           </a:solidFill>
           <a:ln>
             <a:noFill/>
@@ -5900,7 +5900,7 @@
           <a:noFill/>
         </p:spPr>
         <p:txBody>
-          <a:bodyPr wrap="square">
+          <a:bodyPr wrap="none">
             <a:spAutoFit/>
           </a:bodyPr>
           <a:lstStyle/>
@@ -5913,7 +5913,7 @@
                 </a:solidFill>
                 <a:latin typeface="Calibri"/>
               </a:rPr>
-              <a:t>FCA SYSC 10A</a:t>
+              <a:t>SYSC 10A</a:t>
             </a:r>
           </a:p>
         </p:txBody>
@@ -6053,7 +6053,7 @@
                 </a:solidFill>
                 <a:latin typeface="Calibri"/>
               </a:rPr>
-              <a:t>Alan Davidson  ·  Business Banking Advisor  ·  Self-initiated  ·  Own time  ·  June 2026</a:t>
+              <a:t>Alan Davidson  ·  Business Banking Advisor  ·  Self-initiated  ·  Own time  ·  July 2026</a:t>
             </a:r>
           </a:p>
         </p:txBody>
@@ -7177,7 +7177,7 @@
                 </a:solidFill>
                 <a:latin typeface="Calibri"/>
               </a:rPr>
-              <a:t>Alan Davidson  ·  Business Banking Advisor  ·  Self-initiated  ·  Own time  ·  June 2026</a:t>
+              <a:t>Alan Davidson  ·  Business Banking Advisor  ·  Self-initiated  ·  Own time  ·  July 2026</a:t>
             </a:r>
           </a:p>
         </p:txBody>
@@ -9102,7 +9102,7 @@
                 </a:solidFill>
                 <a:latin typeface="Calibri"/>
               </a:rPr>
-              <a:t>Alan Davidson  ·  Business Banking Advisor  ·  Self-initiated  ·  Own time  ·  June 2026</a:t>
+              <a:t>Alan Davidson  ·  Business Banking Advisor  ·  Self-initiated  ·  Own time  ·  July 2026</a:t>
             </a:r>
           </a:p>
         </p:txBody>
@@ -10702,7 +10702,7 @@
                 </a:solidFill>
                 <a:latin typeface="Calibri"/>
               </a:rPr>
-              <a:t>Alan Davidson  ·  Business Banking Advisor  ·  Self-initiated  ·  Own time  ·  June 2026</a:t>
+              <a:t>Alan Davidson  ·  Business Banking Advisor  ·  Self-initiated  ·  Own time  ·  July 2026</a:t>
             </a:r>
           </a:p>
         </p:txBody>
@@ -13318,7 +13318,7 @@
                 </a:solidFill>
                 <a:latin typeface="Calibri"/>
               </a:rPr>
-              <a:t>Alan Davidson  ·  Business Banking Advisor  ·  Self-initiated  ·  Own time  ·  June 2026</a:t>
+              <a:t>Alan Davidson  ·  Business Banking Advisor  ·  Self-initiated  ·  Own time  ·  July 2026</a:t>
             </a:r>
           </a:p>
         </p:txBody>
@@ -16441,7 +16441,7 @@
                 </a:solidFill>
                 <a:latin typeface="Calibri"/>
               </a:rPr>
-              <a:t>Alan Davidson  ·  Business Banking Advisor  ·  Self-initiated  ·  Own time  ·  June 2026</a:t>
+              <a:t>Alan Davidson  ·  Business Banking Advisor  ·  Self-initiated  ·  Own time  ·  July 2026</a:t>
             </a:r>
           </a:p>
         </p:txBody>
@@ -18884,7 +18884,7 @@
                 </a:solidFill>
                 <a:latin typeface="Calibri"/>
               </a:rPr>
-              <a:t>Alan Davidson  ·  Business Banking Advisor  ·  Self-initiated  ·  Own time  ·  June 2026</a:t>
+              <a:t>Alan Davidson  ·  Business Banking Advisor  ·  Self-initiated  ·  Own time  ·  July 2026</a:t>
             </a:r>
           </a:p>
         </p:txBody>
@@ -19970,7 +19970,7 @@
                 </a:solidFill>
                 <a:latin typeface="Calibri"/>
               </a:rPr>
-              <a:t>Alan Davidson  ·  Business Banking Advisor  ·  Self-initiated  ·  Own time  ·  June 2026</a:t>
+              <a:t>Alan Davidson  ·  Business Banking Advisor  ·  Self-initiated  ·  Own time  ·  July 2026</a:t>
             </a:r>
           </a:p>
         </p:txBody>
@@ -20327,7 +20327,7 @@
                 </a:solidFill>
                 <a:latin typeface="Calibri"/>
               </a:rPr>
-              <a:t>Alan Davidson  ·  Business Banking Advisor  ·  Self-initiated  ·  Own time  ·  June 2026</a:t>
+              <a:t>Alan Davidson  ·  Business Banking Advisor  ·  Self-initiated  ·  Own time  ·  July 2026</a:t>
             </a:r>
           </a:p>
         </p:txBody>
@@ -20926,7 +20926,7 @@
                 </a:solidFill>
                 <a:latin typeface="Calibri"/>
               </a:rPr>
-              <a:t>Alan Davidson  ·  Business Banking Advisor  ·  Self-initiated  ·  Own time  ·  June 2026</a:t>
+              <a:t>Alan Davidson  ·  Business Banking Advisor  ·  Self-initiated  ·  Own time  ·  July 2026</a:t>
             </a:r>
           </a:p>
         </p:txBody>
@@ -26873,7 +26873,7 @@
                 </a:solidFill>
                 <a:latin typeface="Calibri"/>
               </a:rPr>
-              <a:t>Alan Davidson  ·  Business Banking Advisor  ·  Self-initiated  ·  Own time  ·  June 2026</a:t>
+              <a:t>Alan Davidson  ·  Business Banking Advisor  ·  Self-initiated  ·  Own time  ·  July 2026</a:t>
             </a:r>
           </a:p>
         </p:txBody>
@@ -28805,7 +28805,7 @@
                 </a:solidFill>
                 <a:latin typeface="Calibri"/>
               </a:rPr>
-              <a:t>Alan Davidson  ·  Business Banking Advisor  ·  Self-initiated  ·  Own time  ·  June 2026</a:t>
+              <a:t>Alan Davidson  ·  Business Banking Advisor  ·  Self-initiated  ·  Own time  ·  July 2026</a:t>
             </a:r>
           </a:p>
         </p:txBody>
@@ -29092,7 +29092,7 @@
                 </a:solidFill>
                 <a:latin typeface="Calibri"/>
               </a:rPr>
-              <a:t>Alan Davidson  ·  Business Banking Advisor  ·  Self-initiated  ·  Own time  ·  June 2026</a:t>
+              <a:t>Alan Davidson  ·  Business Banking Advisor  ·  Self-initiated  ·  Own time  ·  July 2026</a:t>
             </a:r>
           </a:p>
         </p:txBody>
@@ -34145,7 +34145,7 @@
                 </a:solidFill>
                 <a:latin typeface="Calibri"/>
               </a:rPr>
-              <a:t>Alan Davidson  ·  Business Banking Advisor  ·  Self-initiated  ·  Own time  ·  June 2026</a:t>
+              <a:t>Alan Davidson  ·  Business Banking Advisor  ·  Self-initiated  ·  Own time  ·  July 2026</a:t>
             </a:r>
           </a:p>
         </p:txBody>
